--- a/site/downloads/pixan-bank-deck-short-en.pptx
+++ b/site/downloads/pixan-bank-deck-short-en.pptx
@@ -2,18 +2,18 @@
 <file path=ppt/presentation.xml><?xml version="1.0" encoding="utf-8"?>
 <p:presentation xmlns:p="http://schemas.openxmlformats.org/presentationml/2006/main">
   <p:sldMasterIdLst>
-    <p:sldMasterId xmlns:r="http://schemas.openxmlformats.org/officeDocument/2006/relationships" id="2147483648" r:id="R293a06437ed4404a"/>
+    <p:sldMasterId xmlns:r="http://schemas.openxmlformats.org/officeDocument/2006/relationships" id="2147483648" r:id="Rf528da79ce52438a"/>
   </p:sldMasterIdLst>
   <p:notesMasterIdLst>
-    <p:notesMasterId xmlns:r="http://schemas.openxmlformats.org/officeDocument/2006/relationships" r:id="R7c8d0ee1997348fb"/>
+    <p:notesMasterId xmlns:r="http://schemas.openxmlformats.org/officeDocument/2006/relationships" r:id="Ra30521dd1a1c431f"/>
   </p:notesMasterIdLst>
   <p:sldIdLst>
-    <p:sldId xmlns:r="http://schemas.openxmlformats.org/officeDocument/2006/relationships" id="256" r:id="R6dc2b987ae3f4e26"/>
-    <p:sldId xmlns:r="http://schemas.openxmlformats.org/officeDocument/2006/relationships" id="257" r:id="Rf220becfa0e84190"/>
-    <p:sldId xmlns:r="http://schemas.openxmlformats.org/officeDocument/2006/relationships" id="258" r:id="R1850b0e12aca4adb"/>
-    <p:sldId xmlns:r="http://schemas.openxmlformats.org/officeDocument/2006/relationships" id="259" r:id="Rd1ba5f2a72d24d4f"/>
-    <p:sldId xmlns:r="http://schemas.openxmlformats.org/officeDocument/2006/relationships" id="260" r:id="R5fb01b0dd6d44071"/>
-    <p:sldId xmlns:r="http://schemas.openxmlformats.org/officeDocument/2006/relationships" id="261" r:id="R2547d1a8d6ed40b4"/>
+    <p:sldId xmlns:r="http://schemas.openxmlformats.org/officeDocument/2006/relationships" id="256" r:id="Rbcc44debce8e4347"/>
+    <p:sldId xmlns:r="http://schemas.openxmlformats.org/officeDocument/2006/relationships" id="257" r:id="R893822e60fec419e"/>
+    <p:sldId xmlns:r="http://schemas.openxmlformats.org/officeDocument/2006/relationships" id="258" r:id="R47149a7f7a9d4b27"/>
+    <p:sldId xmlns:r="http://schemas.openxmlformats.org/officeDocument/2006/relationships" id="259" r:id="R84167868bd0c469d"/>
+    <p:sldId xmlns:r="http://schemas.openxmlformats.org/officeDocument/2006/relationships" id="260" r:id="R4bada82ab4224ec0"/>
+    <p:sldId xmlns:r="http://schemas.openxmlformats.org/officeDocument/2006/relationships" id="261" r:id="R4adb563756f948df"/>
   </p:sldIdLst>
   <p:sldSz cx="12191999" cy="6858000"/>
   <p:notesSz cx="6858000" cy="9144000"/>
@@ -938,7 +938,7 @@
           <p:cNvPr id="2" name="Title 1">
             <a:extLst xmlns:a="http://schemas.openxmlformats.org/drawingml/2006/main">
               <a:ext uri="{FF2B5EF4-FFF2-40B4-BE49-F238E27FC236}">
-                <a16:creationId xmlns:a16="http://schemas.microsoft.com/office/drawing/2014/main" id="{7AC5246C-508C-4590-B873-02A6AE16C217}"/>
+                <a16:creationId xmlns:a16="http://schemas.microsoft.com/office/drawing/2014/main" id="{4D13879F-626F-4A62-B69D-E76CE0C6DE3A}"/>
               </a:ext>
             </a:extLst>
           </p:cNvPr>
@@ -970,7 +970,7 @@
           <p:cNvPr id="3" name="Subtitle 2">
             <a:extLst xmlns:a="http://schemas.openxmlformats.org/drawingml/2006/main">
               <a:ext uri="{FF2B5EF4-FFF2-40B4-BE49-F238E27FC236}">
-                <a16:creationId xmlns:a16="http://schemas.microsoft.com/office/drawing/2014/main" id="{1640C89A-D462-4745-A3EC-B9AC09DF50CE}"/>
+                <a16:creationId xmlns:a16="http://schemas.microsoft.com/office/drawing/2014/main" id="{AC40EDFB-6DF6-4AF8-B545-13A4CAED9947}"/>
               </a:ext>
             </a:extLst>
           </p:cNvPr>
@@ -1093,7 +1093,7 @@
           <p:cNvPr id="4" name="Date Placeholder 3">
             <a:extLst xmlns:a="http://schemas.openxmlformats.org/drawingml/2006/main">
               <a:ext uri="{FF2B5EF4-FFF2-40B4-BE49-F238E27FC236}">
-                <a16:creationId xmlns:a16="http://schemas.microsoft.com/office/drawing/2014/main" id="{A276525C-F524-44F9-9A3D-2C67D50CCD1E}"/>
+                <a16:creationId xmlns:a16="http://schemas.microsoft.com/office/drawing/2014/main" id="{DD20F384-BCE5-4C10-B118-C5331475A1A4}"/>
               </a:ext>
             </a:extLst>
           </p:cNvPr>
@@ -1120,7 +1120,7 @@
           <p:cNvPr id="5" name="Footer Placeholder 4">
             <a:extLst xmlns:a="http://schemas.openxmlformats.org/drawingml/2006/main">
               <a:ext uri="{FF2B5EF4-FFF2-40B4-BE49-F238E27FC236}">
-                <a16:creationId xmlns:a16="http://schemas.microsoft.com/office/drawing/2014/main" id="{8523A1C7-09F0-46F6-A555-087E77A5B784}"/>
+                <a16:creationId xmlns:a16="http://schemas.microsoft.com/office/drawing/2014/main" id="{CEF0A10A-2FAD-4722-855C-36FC71528D95}"/>
               </a:ext>
             </a:extLst>
           </p:cNvPr>
@@ -1143,7 +1143,7 @@
           <p:cNvPr id="6" name="Slide Number Placeholder 5">
             <a:extLst xmlns:a="http://schemas.openxmlformats.org/drawingml/2006/main">
               <a:ext uri="{FF2B5EF4-FFF2-40B4-BE49-F238E27FC236}">
-                <a16:creationId xmlns:a16="http://schemas.microsoft.com/office/drawing/2014/main" id="{C7386FD0-5E26-4CD1-B1A6-FE32BB33C325}"/>
+                <a16:creationId xmlns:a16="http://schemas.microsoft.com/office/drawing/2014/main" id="{FBC0A956-3102-413F-8786-C7D4912B85B3}"/>
               </a:ext>
             </a:extLst>
           </p:cNvPr>
@@ -1187,7 +1187,7 @@
           <p:cNvPr id="2" name="Title 1">
             <a:extLst xmlns:a="http://schemas.openxmlformats.org/drawingml/2006/main">
               <a:ext uri="{FF2B5EF4-FFF2-40B4-BE49-F238E27FC236}">
-                <a16:creationId xmlns:a16="http://schemas.microsoft.com/office/drawing/2014/main" id="{7C11739A-B121-4A33-855E-676E9E8B480C}"/>
+                <a16:creationId xmlns:a16="http://schemas.microsoft.com/office/drawing/2014/main" id="{5989B70F-87BD-4CA7-A8F2-D3D28537C475}"/>
               </a:ext>
             </a:extLst>
           </p:cNvPr>
@@ -1214,7 +1214,7 @@
           <p:cNvPr id="3" name="Vertical Text Placeholder 2">
             <a:extLst xmlns:a="http://schemas.openxmlformats.org/drawingml/2006/main">
               <a:ext uri="{FF2B5EF4-FFF2-40B4-BE49-F238E27FC236}">
-                <a16:creationId xmlns:a16="http://schemas.microsoft.com/office/drawing/2014/main" id="{C95A555E-6FD3-40A1-99D9-688C4F2B820F}"/>
+                <a16:creationId xmlns:a16="http://schemas.microsoft.com/office/drawing/2014/main" id="{CAE63CA5-2F0A-44E5-B414-CCCFEDA39532}"/>
               </a:ext>
             </a:extLst>
           </p:cNvPr>
@@ -1276,7 +1276,7 @@
           <p:cNvPr id="4" name="Date Placeholder 3">
             <a:extLst xmlns:a="http://schemas.openxmlformats.org/drawingml/2006/main">
               <a:ext uri="{FF2B5EF4-FFF2-40B4-BE49-F238E27FC236}">
-                <a16:creationId xmlns:a16="http://schemas.microsoft.com/office/drawing/2014/main" id="{91B2CF3B-89CA-4721-A6C3-EB5394642860}"/>
+                <a16:creationId xmlns:a16="http://schemas.microsoft.com/office/drawing/2014/main" id="{0CC67EB3-BBFF-4464-B8BC-D188098149E4}"/>
               </a:ext>
             </a:extLst>
           </p:cNvPr>
@@ -1303,7 +1303,7 @@
           <p:cNvPr id="5" name="Footer Placeholder 4">
             <a:extLst xmlns:a="http://schemas.openxmlformats.org/drawingml/2006/main">
               <a:ext uri="{FF2B5EF4-FFF2-40B4-BE49-F238E27FC236}">
-                <a16:creationId xmlns:a16="http://schemas.microsoft.com/office/drawing/2014/main" id="{56D43F21-795E-4A97-B6A5-CDF4D864340E}"/>
+                <a16:creationId xmlns:a16="http://schemas.microsoft.com/office/drawing/2014/main" id="{7D41E6AF-E16B-4ACE-9EC8-F32552C6ADC7}"/>
               </a:ext>
             </a:extLst>
           </p:cNvPr>
@@ -1326,7 +1326,7 @@
           <p:cNvPr id="6" name="Slide Number Placeholder 5">
             <a:extLst xmlns:a="http://schemas.openxmlformats.org/drawingml/2006/main">
               <a:ext uri="{FF2B5EF4-FFF2-40B4-BE49-F238E27FC236}">
-                <a16:creationId xmlns:a16="http://schemas.microsoft.com/office/drawing/2014/main" id="{3459AC88-3B49-4F46-8E5A-E528CE52355E}"/>
+                <a16:creationId xmlns:a16="http://schemas.microsoft.com/office/drawing/2014/main" id="{BF299D5A-2D46-498E-B88D-DEFE6C8F3B2F}"/>
               </a:ext>
             </a:extLst>
           </p:cNvPr>
@@ -1370,7 +1370,7 @@
           <p:cNvPr id="2" name="Vertical Title 1">
             <a:extLst xmlns:a="http://schemas.openxmlformats.org/drawingml/2006/main">
               <a:ext uri="{FF2B5EF4-FFF2-40B4-BE49-F238E27FC236}">
-                <a16:creationId xmlns:a16="http://schemas.microsoft.com/office/drawing/2014/main" id="{C06E3DE0-4502-41E2-8147-4BC8A3D2A051}"/>
+                <a16:creationId xmlns:a16="http://schemas.microsoft.com/office/drawing/2014/main" id="{42870529-2DC0-4C9C-B0D6-C0BFD3896BDA}"/>
               </a:ext>
             </a:extLst>
           </p:cNvPr>
@@ -1402,7 +1402,7 @@
           <p:cNvPr id="3" name="Vertical Text Placeholder 2">
             <a:extLst xmlns:a="http://schemas.openxmlformats.org/drawingml/2006/main">
               <a:ext uri="{FF2B5EF4-FFF2-40B4-BE49-F238E27FC236}">
-                <a16:creationId xmlns:a16="http://schemas.microsoft.com/office/drawing/2014/main" id="{8083354F-A186-42AE-A301-72C3F2FEACA1}"/>
+                <a16:creationId xmlns:a16="http://schemas.microsoft.com/office/drawing/2014/main" id="{54A6D5D5-BA07-4ADB-A476-A58230A7069B}"/>
               </a:ext>
             </a:extLst>
           </p:cNvPr>
@@ -1469,7 +1469,7 @@
           <p:cNvPr id="4" name="Date Placeholder 3">
             <a:extLst xmlns:a="http://schemas.openxmlformats.org/drawingml/2006/main">
               <a:ext uri="{FF2B5EF4-FFF2-40B4-BE49-F238E27FC236}">
-                <a16:creationId xmlns:a16="http://schemas.microsoft.com/office/drawing/2014/main" id="{CE6EDE88-9CF7-402F-A974-B21412BC7BBC}"/>
+                <a16:creationId xmlns:a16="http://schemas.microsoft.com/office/drawing/2014/main" id="{B99643EF-E106-44C0-BC4C-F222E935F5E4}"/>
               </a:ext>
             </a:extLst>
           </p:cNvPr>
@@ -1496,7 +1496,7 @@
           <p:cNvPr id="5" name="Footer Placeholder 4">
             <a:extLst xmlns:a="http://schemas.openxmlformats.org/drawingml/2006/main">
               <a:ext uri="{FF2B5EF4-FFF2-40B4-BE49-F238E27FC236}">
-                <a16:creationId xmlns:a16="http://schemas.microsoft.com/office/drawing/2014/main" id="{7846A21D-DE6A-4AD9-BFBC-8A2300494F4C}"/>
+                <a16:creationId xmlns:a16="http://schemas.microsoft.com/office/drawing/2014/main" id="{CEB33112-3B09-4AC2-8B1F-ED8116CAD2F6}"/>
               </a:ext>
             </a:extLst>
           </p:cNvPr>
@@ -1519,7 +1519,7 @@
           <p:cNvPr id="6" name="Slide Number Placeholder 5">
             <a:extLst xmlns:a="http://schemas.openxmlformats.org/drawingml/2006/main">
               <a:ext uri="{FF2B5EF4-FFF2-40B4-BE49-F238E27FC236}">
-                <a16:creationId xmlns:a16="http://schemas.microsoft.com/office/drawing/2014/main" id="{BF63BA9B-B22E-4A5D-9CEC-1ADF34BAF905}"/>
+                <a16:creationId xmlns:a16="http://schemas.microsoft.com/office/drawing/2014/main" id="{EC049F6D-2E8A-4B23-9462-1F6FAD541DA8}"/>
               </a:ext>
             </a:extLst>
           </p:cNvPr>
@@ -1563,7 +1563,7 @@
           <p:cNvPr id="2" name="Title 1">
             <a:extLst xmlns:a="http://schemas.openxmlformats.org/drawingml/2006/main">
               <a:ext uri="{FF2B5EF4-FFF2-40B4-BE49-F238E27FC236}">
-                <a16:creationId xmlns:a16="http://schemas.microsoft.com/office/drawing/2014/main" id="{BBA4BD7C-84B3-4B04-BA31-91A975D5138C}"/>
+                <a16:creationId xmlns:a16="http://schemas.microsoft.com/office/drawing/2014/main" id="{63F5CE0E-D04D-4A61-BB0D-80ACF6A4C90A}"/>
               </a:ext>
             </a:extLst>
           </p:cNvPr>
@@ -1590,7 +1590,7 @@
           <p:cNvPr id="3" name="Content Placeholder 2">
             <a:extLst xmlns:a="http://schemas.openxmlformats.org/drawingml/2006/main">
               <a:ext uri="{FF2B5EF4-FFF2-40B4-BE49-F238E27FC236}">
-                <a16:creationId xmlns:a16="http://schemas.microsoft.com/office/drawing/2014/main" id="{5CA0C136-8E32-4549-8861-087BF879E769}"/>
+                <a16:creationId xmlns:a16="http://schemas.microsoft.com/office/drawing/2014/main" id="{9ABCBA36-AA9D-49C2-8ED0-19F072435B44}"/>
               </a:ext>
             </a:extLst>
           </p:cNvPr>
@@ -1652,7 +1652,7 @@
           <p:cNvPr id="4" name="Date Placeholder 3">
             <a:extLst xmlns:a="http://schemas.openxmlformats.org/drawingml/2006/main">
               <a:ext uri="{FF2B5EF4-FFF2-40B4-BE49-F238E27FC236}">
-                <a16:creationId xmlns:a16="http://schemas.microsoft.com/office/drawing/2014/main" id="{E0B4E4CF-DA58-4A5F-A2BC-E99B36F4119F}"/>
+                <a16:creationId xmlns:a16="http://schemas.microsoft.com/office/drawing/2014/main" id="{6755B9DD-8A7A-4EA4-803B-ACADC3395680}"/>
               </a:ext>
             </a:extLst>
           </p:cNvPr>
@@ -1679,7 +1679,7 @@
           <p:cNvPr id="5" name="Footer Placeholder 4">
             <a:extLst xmlns:a="http://schemas.openxmlformats.org/drawingml/2006/main">
               <a:ext uri="{FF2B5EF4-FFF2-40B4-BE49-F238E27FC236}">
-                <a16:creationId xmlns:a16="http://schemas.microsoft.com/office/drawing/2014/main" id="{C1062963-8485-4FC2-858A-4F754C213DF0}"/>
+                <a16:creationId xmlns:a16="http://schemas.microsoft.com/office/drawing/2014/main" id="{F3C3BCD5-9311-42AA-9182-55D4F957B721}"/>
               </a:ext>
             </a:extLst>
           </p:cNvPr>
@@ -1702,7 +1702,7 @@
           <p:cNvPr id="6" name="Slide Number Placeholder 5">
             <a:extLst xmlns:a="http://schemas.openxmlformats.org/drawingml/2006/main">
               <a:ext uri="{FF2B5EF4-FFF2-40B4-BE49-F238E27FC236}">
-                <a16:creationId xmlns:a16="http://schemas.microsoft.com/office/drawing/2014/main" id="{B3B1CD7D-F822-41CE-B95A-9BF8275B43C4}"/>
+                <a16:creationId xmlns:a16="http://schemas.microsoft.com/office/drawing/2014/main" id="{2F2FCDC9-DD3D-4241-BA57-EB328A7FADD9}"/>
               </a:ext>
             </a:extLst>
           </p:cNvPr>
@@ -1746,7 +1746,7 @@
           <p:cNvPr id="2" name="Title 1">
             <a:extLst xmlns:a="http://schemas.openxmlformats.org/drawingml/2006/main">
               <a:ext uri="{FF2B5EF4-FFF2-40B4-BE49-F238E27FC236}">
-                <a16:creationId xmlns:a16="http://schemas.microsoft.com/office/drawing/2014/main" id="{CA5592C4-4447-4F1A-ADC8-0E36345703D7}"/>
+                <a16:creationId xmlns:a16="http://schemas.microsoft.com/office/drawing/2014/main" id="{1EC236EB-D977-4EE7-B238-27488C6DD1C3}"/>
               </a:ext>
             </a:extLst>
           </p:cNvPr>
@@ -1783,7 +1783,7 @@
           <p:cNvPr id="3" name="Text Placeholder 2">
             <a:extLst xmlns:a="http://schemas.openxmlformats.org/drawingml/2006/main">
               <a:ext uri="{FF2B5EF4-FFF2-40B4-BE49-F238E27FC236}">
-                <a16:creationId xmlns:a16="http://schemas.microsoft.com/office/drawing/2014/main" id="{9D4F4712-2619-4E25-B9E3-352F57097784}"/>
+                <a16:creationId xmlns:a16="http://schemas.microsoft.com/office/drawing/2014/main" id="{51CC5855-5DED-49D8-B087-9223F5CB9EEE}"/>
               </a:ext>
             </a:extLst>
           </p:cNvPr>
@@ -1909,7 +1909,7 @@
           <p:cNvPr id="4" name="Date Placeholder 3">
             <a:extLst xmlns:a="http://schemas.openxmlformats.org/drawingml/2006/main">
               <a:ext uri="{FF2B5EF4-FFF2-40B4-BE49-F238E27FC236}">
-                <a16:creationId xmlns:a16="http://schemas.microsoft.com/office/drawing/2014/main" id="{355A523D-1AA4-4EC2-8845-EFAB77298844}"/>
+                <a16:creationId xmlns:a16="http://schemas.microsoft.com/office/drawing/2014/main" id="{2FA58122-CE50-4781-A888-56C8262623DD}"/>
               </a:ext>
             </a:extLst>
           </p:cNvPr>
@@ -1936,7 +1936,7 @@
           <p:cNvPr id="5" name="Footer Placeholder 4">
             <a:extLst xmlns:a="http://schemas.openxmlformats.org/drawingml/2006/main">
               <a:ext uri="{FF2B5EF4-FFF2-40B4-BE49-F238E27FC236}">
-                <a16:creationId xmlns:a16="http://schemas.microsoft.com/office/drawing/2014/main" id="{D2B31AB3-E4E6-4968-ABE2-B55730542438}"/>
+                <a16:creationId xmlns:a16="http://schemas.microsoft.com/office/drawing/2014/main" id="{F8847F71-E5C9-464F-98BC-7F0D02CC1E62}"/>
               </a:ext>
             </a:extLst>
           </p:cNvPr>
@@ -1959,7 +1959,7 @@
           <p:cNvPr id="6" name="Slide Number Placeholder 5">
             <a:extLst xmlns:a="http://schemas.openxmlformats.org/drawingml/2006/main">
               <a:ext uri="{FF2B5EF4-FFF2-40B4-BE49-F238E27FC236}">
-                <a16:creationId xmlns:a16="http://schemas.microsoft.com/office/drawing/2014/main" id="{64325564-63D9-4A87-B135-1CBC3A19BEE3}"/>
+                <a16:creationId xmlns:a16="http://schemas.microsoft.com/office/drawing/2014/main" id="{78FE34E3-A156-466E-B07A-852AC996AE72}"/>
               </a:ext>
             </a:extLst>
           </p:cNvPr>
@@ -2003,7 +2003,7 @@
           <p:cNvPr id="2" name="Title 1">
             <a:extLst xmlns:a="http://schemas.openxmlformats.org/drawingml/2006/main">
               <a:ext uri="{FF2B5EF4-FFF2-40B4-BE49-F238E27FC236}">
-                <a16:creationId xmlns:a16="http://schemas.microsoft.com/office/drawing/2014/main" id="{9C6D0857-8E64-45B6-8B14-97272C592B54}"/>
+                <a16:creationId xmlns:a16="http://schemas.microsoft.com/office/drawing/2014/main" id="{83851FF2-6E35-4FFF-A9C6-6EC999CDAD15}"/>
               </a:ext>
             </a:extLst>
           </p:cNvPr>
@@ -2030,7 +2030,7 @@
           <p:cNvPr id="3" name="Content Placeholder 2">
             <a:extLst xmlns:a="http://schemas.openxmlformats.org/drawingml/2006/main">
               <a:ext uri="{FF2B5EF4-FFF2-40B4-BE49-F238E27FC236}">
-                <a16:creationId xmlns:a16="http://schemas.microsoft.com/office/drawing/2014/main" id="{76E72E0B-9656-4549-AAD3-39EF0F63C6DB}"/>
+                <a16:creationId xmlns:a16="http://schemas.microsoft.com/office/drawing/2014/main" id="{7A8A4BCA-43BE-4A60-A08A-5999C6D334AD}"/>
               </a:ext>
             </a:extLst>
           </p:cNvPr>
@@ -2134,7 +2134,7 @@
           <p:cNvPr id="4" name="Content Placeholder 3">
             <a:extLst xmlns:a="http://schemas.openxmlformats.org/drawingml/2006/main">
               <a:ext uri="{FF2B5EF4-FFF2-40B4-BE49-F238E27FC236}">
-                <a16:creationId xmlns:a16="http://schemas.microsoft.com/office/drawing/2014/main" id="{D7DCEA17-2B9E-4E13-A30C-029DDA0599BA}"/>
+                <a16:creationId xmlns:a16="http://schemas.microsoft.com/office/drawing/2014/main" id="{D3FB2B58-4A1A-47BE-9667-E4F5ACB938CD}"/>
               </a:ext>
             </a:extLst>
           </p:cNvPr>
@@ -2238,7 +2238,7 @@
           <p:cNvPr id="5" name="Date Placeholder 4">
             <a:extLst xmlns:a="http://schemas.openxmlformats.org/drawingml/2006/main">
               <a:ext uri="{FF2B5EF4-FFF2-40B4-BE49-F238E27FC236}">
-                <a16:creationId xmlns:a16="http://schemas.microsoft.com/office/drawing/2014/main" id="{7F0DF7D3-ACF5-4820-AC8F-D51B7F345CCB}"/>
+                <a16:creationId xmlns:a16="http://schemas.microsoft.com/office/drawing/2014/main" id="{F33514DF-9C27-4543-937B-817CD47CA1C9}"/>
               </a:ext>
             </a:extLst>
           </p:cNvPr>
@@ -2265,7 +2265,7 @@
           <p:cNvPr id="6" name="Footer Placeholder 5">
             <a:extLst xmlns:a="http://schemas.openxmlformats.org/drawingml/2006/main">
               <a:ext uri="{FF2B5EF4-FFF2-40B4-BE49-F238E27FC236}">
-                <a16:creationId xmlns:a16="http://schemas.microsoft.com/office/drawing/2014/main" id="{8BCBF542-CB8B-47C4-AEC1-B36F1DC5E329}"/>
+                <a16:creationId xmlns:a16="http://schemas.microsoft.com/office/drawing/2014/main" id="{4E64F08A-4E76-4972-8115-2B85C8C136D8}"/>
               </a:ext>
             </a:extLst>
           </p:cNvPr>
@@ -2288,7 +2288,7 @@
           <p:cNvPr id="7" name="Slide Number Placeholder 6">
             <a:extLst xmlns:a="http://schemas.openxmlformats.org/drawingml/2006/main">
               <a:ext uri="{FF2B5EF4-FFF2-40B4-BE49-F238E27FC236}">
-                <a16:creationId xmlns:a16="http://schemas.microsoft.com/office/drawing/2014/main" id="{95766F49-437C-4581-B851-AC53932C3293}"/>
+                <a16:creationId xmlns:a16="http://schemas.microsoft.com/office/drawing/2014/main" id="{208FEC53-C063-444A-B9B5-C7F5B2C5BDA7}"/>
               </a:ext>
             </a:extLst>
           </p:cNvPr>
@@ -2332,7 +2332,7 @@
           <p:cNvPr id="2" name="Title 1">
             <a:extLst xmlns:a="http://schemas.openxmlformats.org/drawingml/2006/main">
               <a:ext uri="{FF2B5EF4-FFF2-40B4-BE49-F238E27FC236}">
-                <a16:creationId xmlns:a16="http://schemas.microsoft.com/office/drawing/2014/main" id="{8E75B867-9121-4D2A-807A-651F9884E465}"/>
+                <a16:creationId xmlns:a16="http://schemas.microsoft.com/office/drawing/2014/main" id="{203208E7-942F-4C4E-AAF1-22CFA8F3C2BC}"/>
               </a:ext>
             </a:extLst>
           </p:cNvPr>
@@ -2364,7 +2364,7 @@
           <p:cNvPr id="3" name="Text Placeholder 2">
             <a:extLst xmlns:a="http://schemas.openxmlformats.org/drawingml/2006/main">
               <a:ext uri="{FF2B5EF4-FFF2-40B4-BE49-F238E27FC236}">
-                <a16:creationId xmlns:a16="http://schemas.microsoft.com/office/drawing/2014/main" id="{FD409BA6-9F2C-4E55-8624-D0FEE0C9AF67}"/>
+                <a16:creationId xmlns:a16="http://schemas.microsoft.com/office/drawing/2014/main" id="{570688BF-AD70-4D41-977B-74D4D6720161}"/>
               </a:ext>
             </a:extLst>
           </p:cNvPr>
@@ -2436,7 +2436,7 @@
           <p:cNvPr id="4" name="Content Placeholder 3">
             <a:extLst xmlns:a="http://schemas.openxmlformats.org/drawingml/2006/main">
               <a:ext uri="{FF2B5EF4-FFF2-40B4-BE49-F238E27FC236}">
-                <a16:creationId xmlns:a16="http://schemas.microsoft.com/office/drawing/2014/main" id="{EBB4D37D-0595-4C91-8130-6689C36873AB}"/>
+                <a16:creationId xmlns:a16="http://schemas.microsoft.com/office/drawing/2014/main" id="{BAA5BBA8-E066-47C1-A4B0-C0F97E45AF11}"/>
               </a:ext>
             </a:extLst>
           </p:cNvPr>
@@ -2540,7 +2540,7 @@
           <p:cNvPr id="5" name="Text Placeholder 4">
             <a:extLst xmlns:a="http://schemas.openxmlformats.org/drawingml/2006/main">
               <a:ext uri="{FF2B5EF4-FFF2-40B4-BE49-F238E27FC236}">
-                <a16:creationId xmlns:a16="http://schemas.microsoft.com/office/drawing/2014/main" id="{D21EA9E0-FC0B-42BB-BF4D-BBE9AD9033C4}"/>
+                <a16:creationId xmlns:a16="http://schemas.microsoft.com/office/drawing/2014/main" id="{14BA6B51-FA6B-44E0-95A2-7B9380B0B989}"/>
               </a:ext>
             </a:extLst>
           </p:cNvPr>
@@ -2612,7 +2612,7 @@
           <p:cNvPr id="6" name="Content Placeholder 5">
             <a:extLst xmlns:a="http://schemas.openxmlformats.org/drawingml/2006/main">
               <a:ext uri="{FF2B5EF4-FFF2-40B4-BE49-F238E27FC236}">
-                <a16:creationId xmlns:a16="http://schemas.microsoft.com/office/drawing/2014/main" id="{97B5CBC9-3722-49F9-819A-F5FA5B2C44C0}"/>
+                <a16:creationId xmlns:a16="http://schemas.microsoft.com/office/drawing/2014/main" id="{6D5FD611-2BBF-4C47-926E-E2A681CC21DD}"/>
               </a:ext>
             </a:extLst>
           </p:cNvPr>
@@ -2716,7 +2716,7 @@
           <p:cNvPr id="7" name="Date Placeholder 6">
             <a:extLst xmlns:a="http://schemas.openxmlformats.org/drawingml/2006/main">
               <a:ext uri="{FF2B5EF4-FFF2-40B4-BE49-F238E27FC236}">
-                <a16:creationId xmlns:a16="http://schemas.microsoft.com/office/drawing/2014/main" id="{D28CF272-DB37-4A68-9365-2610DA5E8F9B}"/>
+                <a16:creationId xmlns:a16="http://schemas.microsoft.com/office/drawing/2014/main" id="{0EB9CB78-687D-48E6-806A-25679B727A93}"/>
               </a:ext>
             </a:extLst>
           </p:cNvPr>
@@ -2743,7 +2743,7 @@
           <p:cNvPr id="8" name="Footer Placeholder 7">
             <a:extLst xmlns:a="http://schemas.openxmlformats.org/drawingml/2006/main">
               <a:ext uri="{FF2B5EF4-FFF2-40B4-BE49-F238E27FC236}">
-                <a16:creationId xmlns:a16="http://schemas.microsoft.com/office/drawing/2014/main" id="{FD29D15C-0546-40B8-B8D9-FB05D937D888}"/>
+                <a16:creationId xmlns:a16="http://schemas.microsoft.com/office/drawing/2014/main" id="{353FA93A-9512-4734-A841-3AA3585DBEE4}"/>
               </a:ext>
             </a:extLst>
           </p:cNvPr>
@@ -2766,7 +2766,7 @@
           <p:cNvPr id="9" name="Slide Number Placeholder 8">
             <a:extLst xmlns:a="http://schemas.openxmlformats.org/drawingml/2006/main">
               <a:ext uri="{FF2B5EF4-FFF2-40B4-BE49-F238E27FC236}">
-                <a16:creationId xmlns:a16="http://schemas.microsoft.com/office/drawing/2014/main" id="{091932F7-EF88-4EEA-8A36-95B68EAD9C73}"/>
+                <a16:creationId xmlns:a16="http://schemas.microsoft.com/office/drawing/2014/main" id="{05FF34A3-7DEF-49F7-8B5E-C3C22221C381}"/>
               </a:ext>
             </a:extLst>
           </p:cNvPr>
@@ -2810,7 +2810,7 @@
           <p:cNvPr id="2" name="Title 1">
             <a:extLst xmlns:a="http://schemas.openxmlformats.org/drawingml/2006/main">
               <a:ext uri="{FF2B5EF4-FFF2-40B4-BE49-F238E27FC236}">
-                <a16:creationId xmlns:a16="http://schemas.microsoft.com/office/drawing/2014/main" id="{BBAD239D-C1A4-42CC-9D44-E7C553CC518D}"/>
+                <a16:creationId xmlns:a16="http://schemas.microsoft.com/office/drawing/2014/main" id="{FA3AF86C-95E8-487A-8A4B-5D995F01B425}"/>
               </a:ext>
             </a:extLst>
           </p:cNvPr>
@@ -2837,7 +2837,7 @@
           <p:cNvPr id="3" name="Date Placeholder 2">
             <a:extLst xmlns:a="http://schemas.openxmlformats.org/drawingml/2006/main">
               <a:ext uri="{FF2B5EF4-FFF2-40B4-BE49-F238E27FC236}">
-                <a16:creationId xmlns:a16="http://schemas.microsoft.com/office/drawing/2014/main" id="{765968C1-281D-400C-8F70-D2B56326DAF3}"/>
+                <a16:creationId xmlns:a16="http://schemas.microsoft.com/office/drawing/2014/main" id="{5A8B844D-D186-475B-AF92-F82C1D81FDB5}"/>
               </a:ext>
             </a:extLst>
           </p:cNvPr>
@@ -2864,7 +2864,7 @@
           <p:cNvPr id="4" name="Footer Placeholder 3">
             <a:extLst xmlns:a="http://schemas.openxmlformats.org/drawingml/2006/main">
               <a:ext uri="{FF2B5EF4-FFF2-40B4-BE49-F238E27FC236}">
-                <a16:creationId xmlns:a16="http://schemas.microsoft.com/office/drawing/2014/main" id="{45EEC144-2CD1-4035-AB98-6C39E426BE85}"/>
+                <a16:creationId xmlns:a16="http://schemas.microsoft.com/office/drawing/2014/main" id="{D6A6DAAD-72B0-4812-965E-D2FBFC01AB69}"/>
               </a:ext>
             </a:extLst>
           </p:cNvPr>
@@ -2887,7 +2887,7 @@
           <p:cNvPr id="5" name="Slide Number Placeholder 4">
             <a:extLst xmlns:a="http://schemas.openxmlformats.org/drawingml/2006/main">
               <a:ext uri="{FF2B5EF4-FFF2-40B4-BE49-F238E27FC236}">
-                <a16:creationId xmlns:a16="http://schemas.microsoft.com/office/drawing/2014/main" id="{24201EB7-74BA-4E3C-B294-EF9FF7E8759E}"/>
+                <a16:creationId xmlns:a16="http://schemas.microsoft.com/office/drawing/2014/main" id="{CE3462AB-1EE5-4902-9F0E-194028083A41}"/>
               </a:ext>
             </a:extLst>
           </p:cNvPr>
@@ -2931,7 +2931,7 @@
           <p:cNvPr id="2" name="Date Placeholder 1">
             <a:extLst xmlns:a="http://schemas.openxmlformats.org/drawingml/2006/main">
               <a:ext uri="{FF2B5EF4-FFF2-40B4-BE49-F238E27FC236}">
-                <a16:creationId xmlns:a16="http://schemas.microsoft.com/office/drawing/2014/main" id="{1E240DB3-FC8B-450D-9F4F-9B02335FE611}"/>
+                <a16:creationId xmlns:a16="http://schemas.microsoft.com/office/drawing/2014/main" id="{C4B67777-AB97-4359-B68A-4C7CAEFBE5FD}"/>
               </a:ext>
             </a:extLst>
           </p:cNvPr>
@@ -2958,7 +2958,7 @@
           <p:cNvPr id="3" name="Footer Placeholder 2">
             <a:extLst xmlns:a="http://schemas.openxmlformats.org/drawingml/2006/main">
               <a:ext uri="{FF2B5EF4-FFF2-40B4-BE49-F238E27FC236}">
-                <a16:creationId xmlns:a16="http://schemas.microsoft.com/office/drawing/2014/main" id="{B1E2DC12-11D0-4D63-AD9D-9419786B5F2A}"/>
+                <a16:creationId xmlns:a16="http://schemas.microsoft.com/office/drawing/2014/main" id="{B957BA20-E01D-41D5-A29B-4D106E9164D3}"/>
               </a:ext>
             </a:extLst>
           </p:cNvPr>
@@ -2981,7 +2981,7 @@
           <p:cNvPr id="4" name="Slide Number Placeholder 3">
             <a:extLst xmlns:a="http://schemas.openxmlformats.org/drawingml/2006/main">
               <a:ext uri="{FF2B5EF4-FFF2-40B4-BE49-F238E27FC236}">
-                <a16:creationId xmlns:a16="http://schemas.microsoft.com/office/drawing/2014/main" id="{796BC317-23D1-4B87-AD63-0A67FFEF1778}"/>
+                <a16:creationId xmlns:a16="http://schemas.microsoft.com/office/drawing/2014/main" id="{00CB7944-A62F-42EC-977E-B67879161811}"/>
               </a:ext>
             </a:extLst>
           </p:cNvPr>
@@ -3025,7 +3025,7 @@
           <p:cNvPr id="2" name="Title 1">
             <a:extLst xmlns:a="http://schemas.openxmlformats.org/drawingml/2006/main">
               <a:ext uri="{FF2B5EF4-FFF2-40B4-BE49-F238E27FC236}">
-                <a16:creationId xmlns:a16="http://schemas.microsoft.com/office/drawing/2014/main" id="{E250CEBC-E1BD-4DB5-A599-3964899691C1}"/>
+                <a16:creationId xmlns:a16="http://schemas.microsoft.com/office/drawing/2014/main" id="{F4272D63-CEE0-414D-94B1-2FAE231DBC14}"/>
               </a:ext>
             </a:extLst>
           </p:cNvPr>
@@ -3062,7 +3062,7 @@
           <p:cNvPr id="3" name="Content Placeholder 2">
             <a:extLst xmlns:a="http://schemas.openxmlformats.org/drawingml/2006/main">
               <a:ext uri="{FF2B5EF4-FFF2-40B4-BE49-F238E27FC236}">
-                <a16:creationId xmlns:a16="http://schemas.microsoft.com/office/drawing/2014/main" id="{94BACB43-6D55-4440-B110-7AAB431660E8}"/>
+                <a16:creationId xmlns:a16="http://schemas.microsoft.com/office/drawing/2014/main" id="{762DDF8E-A76F-46EE-9AE6-88EEFC8E117E}"/>
               </a:ext>
             </a:extLst>
           </p:cNvPr>
@@ -3166,7 +3166,7 @@
           <p:cNvPr id="4" name="Text Placeholder 3">
             <a:extLst xmlns:a="http://schemas.openxmlformats.org/drawingml/2006/main">
               <a:ext uri="{FF2B5EF4-FFF2-40B4-BE49-F238E27FC236}">
-                <a16:creationId xmlns:a16="http://schemas.microsoft.com/office/drawing/2014/main" id="{8E7FD84C-CB18-4028-8042-C641D6A5E94F}"/>
+                <a16:creationId xmlns:a16="http://schemas.microsoft.com/office/drawing/2014/main" id="{A156E65F-AD2B-470A-8946-E96FE692F6EC}"/>
               </a:ext>
             </a:extLst>
           </p:cNvPr>
@@ -3238,7 +3238,7 @@
           <p:cNvPr id="5" name="Date Placeholder 4">
             <a:extLst xmlns:a="http://schemas.openxmlformats.org/drawingml/2006/main">
               <a:ext uri="{FF2B5EF4-FFF2-40B4-BE49-F238E27FC236}">
-                <a16:creationId xmlns:a16="http://schemas.microsoft.com/office/drawing/2014/main" id="{942B5CC9-D665-43A8-9AA2-DF48DD2F7437}"/>
+                <a16:creationId xmlns:a16="http://schemas.microsoft.com/office/drawing/2014/main" id="{F52BBD58-E938-4B8F-9153-9446104F10C5}"/>
               </a:ext>
             </a:extLst>
           </p:cNvPr>
@@ -3265,7 +3265,7 @@
           <p:cNvPr id="6" name="Footer Placeholder 5">
             <a:extLst xmlns:a="http://schemas.openxmlformats.org/drawingml/2006/main">
               <a:ext uri="{FF2B5EF4-FFF2-40B4-BE49-F238E27FC236}">
-                <a16:creationId xmlns:a16="http://schemas.microsoft.com/office/drawing/2014/main" id="{30F10630-C897-4F70-88A5-2AB94A8C0AFC}"/>
+                <a16:creationId xmlns:a16="http://schemas.microsoft.com/office/drawing/2014/main" id="{86D6727C-82C1-4C35-BD7B-DC3FA8576B04}"/>
               </a:ext>
             </a:extLst>
           </p:cNvPr>
@@ -3288,7 +3288,7 @@
           <p:cNvPr id="7" name="Slide Number Placeholder 6">
             <a:extLst xmlns:a="http://schemas.openxmlformats.org/drawingml/2006/main">
               <a:ext uri="{FF2B5EF4-FFF2-40B4-BE49-F238E27FC236}">
-                <a16:creationId xmlns:a16="http://schemas.microsoft.com/office/drawing/2014/main" id="{95F1A869-0C28-4B3A-BAC0-792EE31FFAAB}"/>
+                <a16:creationId xmlns:a16="http://schemas.microsoft.com/office/drawing/2014/main" id="{574979CB-2483-4CE9-A0EF-D1BF4F64CA20}"/>
               </a:ext>
             </a:extLst>
           </p:cNvPr>
@@ -3332,7 +3332,7 @@
           <p:cNvPr id="2" name="Title 1">
             <a:extLst xmlns:a="http://schemas.openxmlformats.org/drawingml/2006/main">
               <a:ext uri="{FF2B5EF4-FFF2-40B4-BE49-F238E27FC236}">
-                <a16:creationId xmlns:a16="http://schemas.microsoft.com/office/drawing/2014/main" id="{0A8AAD03-121B-476A-802F-6C72D906BE52}"/>
+                <a16:creationId xmlns:a16="http://schemas.microsoft.com/office/drawing/2014/main" id="{979D5BB3-BCD4-4BA9-B742-7EC71E1ADBA0}"/>
               </a:ext>
             </a:extLst>
           </p:cNvPr>
@@ -3369,7 +3369,7 @@
           <p:cNvPr id="3" name="Picture Placeholder 2">
             <a:extLst xmlns:a="http://schemas.openxmlformats.org/drawingml/2006/main">
               <a:ext uri="{FF2B5EF4-FFF2-40B4-BE49-F238E27FC236}">
-                <a16:creationId xmlns:a16="http://schemas.microsoft.com/office/drawing/2014/main" id="{077E2F19-1FB5-44A0-ABCE-5978A68CBAF2}"/>
+                <a16:creationId xmlns:a16="http://schemas.microsoft.com/office/drawing/2014/main" id="{0580563A-F6CA-49B5-B13A-ED49CB022091}"/>
               </a:ext>
             </a:extLst>
           </p:cNvPr>
@@ -3434,7 +3434,7 @@
           <p:cNvPr id="4" name="Text Placeholder 3">
             <a:extLst xmlns:a="http://schemas.openxmlformats.org/drawingml/2006/main">
               <a:ext uri="{FF2B5EF4-FFF2-40B4-BE49-F238E27FC236}">
-                <a16:creationId xmlns:a16="http://schemas.microsoft.com/office/drawing/2014/main" id="{E5F73A3B-9C7B-48E2-A3A6-FC7EA4B25AB5}"/>
+                <a16:creationId xmlns:a16="http://schemas.microsoft.com/office/drawing/2014/main" id="{0288E696-AD14-4AA6-8E75-A3A8B173D8EF}"/>
               </a:ext>
             </a:extLst>
           </p:cNvPr>
@@ -3506,7 +3506,7 @@
           <p:cNvPr id="5" name="Date Placeholder 4">
             <a:extLst xmlns:a="http://schemas.openxmlformats.org/drawingml/2006/main">
               <a:ext uri="{FF2B5EF4-FFF2-40B4-BE49-F238E27FC236}">
-                <a16:creationId xmlns:a16="http://schemas.microsoft.com/office/drawing/2014/main" id="{BC78620B-7A7C-498B-BD77-06F2DAE59179}"/>
+                <a16:creationId xmlns:a16="http://schemas.microsoft.com/office/drawing/2014/main" id="{C9E75687-F240-4C38-9681-C681C46782D4}"/>
               </a:ext>
             </a:extLst>
           </p:cNvPr>
@@ -3533,7 +3533,7 @@
           <p:cNvPr id="6" name="Footer Placeholder 5">
             <a:extLst xmlns:a="http://schemas.openxmlformats.org/drawingml/2006/main">
               <a:ext uri="{FF2B5EF4-FFF2-40B4-BE49-F238E27FC236}">
-                <a16:creationId xmlns:a16="http://schemas.microsoft.com/office/drawing/2014/main" id="{2C85AE89-031B-448B-AD8C-D50D22DC1083}"/>
+                <a16:creationId xmlns:a16="http://schemas.microsoft.com/office/drawing/2014/main" id="{0332126B-3B4E-4C3B-8F8F-CA13BBB8D214}"/>
               </a:ext>
             </a:extLst>
           </p:cNvPr>
@@ -3556,7 +3556,7 @@
           <p:cNvPr id="7" name="Slide Number Placeholder 6">
             <a:extLst xmlns:a="http://schemas.openxmlformats.org/drawingml/2006/main">
               <a:ext uri="{FF2B5EF4-FFF2-40B4-BE49-F238E27FC236}">
-                <a16:creationId xmlns:a16="http://schemas.microsoft.com/office/drawing/2014/main" id="{CA728745-B4AC-430C-920E-2E4E35A0FA3C}"/>
+                <a16:creationId xmlns:a16="http://schemas.microsoft.com/office/drawing/2014/main" id="{636A8153-2246-4E83-8EEB-A63ABC36125B}"/>
               </a:ext>
             </a:extLst>
           </p:cNvPr>
@@ -3605,7 +3605,7 @@
           <p:cNvPr id="2" name="Title Placeholder 1">
             <a:extLst xmlns:a="http://schemas.openxmlformats.org/drawingml/2006/main">
               <a:ext uri="{FF2B5EF4-FFF2-40B4-BE49-F238E27FC236}">
-                <a16:creationId xmlns:a16="http://schemas.microsoft.com/office/drawing/2014/main" id="{DD0E9099-BFE5-4CDD-BEC6-8B8FA3BC3A8A}"/>
+                <a16:creationId xmlns:a16="http://schemas.microsoft.com/office/drawing/2014/main" id="{3FF196DD-E358-426C-895F-016AF50D0DAC}"/>
               </a:ext>
             </a:extLst>
           </p:cNvPr>
@@ -3642,7 +3642,7 @@
           <p:cNvPr id="3" name="Text Placeholder 2">
             <a:extLst xmlns:a="http://schemas.openxmlformats.org/drawingml/2006/main">
               <a:ext uri="{FF2B5EF4-FFF2-40B4-BE49-F238E27FC236}">
-                <a16:creationId xmlns:a16="http://schemas.microsoft.com/office/drawing/2014/main" id="{A52DF361-892B-466F-8145-62405A5EDCD9}"/>
+                <a16:creationId xmlns:a16="http://schemas.microsoft.com/office/drawing/2014/main" id="{D80DBC08-DB36-42B4-B2E3-34AA894211BB}"/>
               </a:ext>
             </a:extLst>
           </p:cNvPr>
@@ -3714,7 +3714,7 @@
           <p:cNvPr id="4" name="Date Placeholder 3">
             <a:extLst xmlns:a="http://schemas.openxmlformats.org/drawingml/2006/main">
               <a:ext uri="{FF2B5EF4-FFF2-40B4-BE49-F238E27FC236}">
-                <a16:creationId xmlns:a16="http://schemas.microsoft.com/office/drawing/2014/main" id="{CE29FA4F-C9C9-411A-B592-BFF0464F1D49}"/>
+                <a16:creationId xmlns:a16="http://schemas.microsoft.com/office/drawing/2014/main" id="{0A9303B0-3B0E-468D-A929-3EE351A6FCB8}"/>
               </a:ext>
             </a:extLst>
           </p:cNvPr>
@@ -3760,7 +3760,7 @@
           <p:cNvPr id="5" name="Footer Placeholder 4">
             <a:extLst xmlns:a="http://schemas.openxmlformats.org/drawingml/2006/main">
               <a:ext uri="{FF2B5EF4-FFF2-40B4-BE49-F238E27FC236}">
-                <a16:creationId xmlns:a16="http://schemas.microsoft.com/office/drawing/2014/main" id="{8F92BF90-A9DC-4F80-BB3F-680DBF108211}"/>
+                <a16:creationId xmlns:a16="http://schemas.microsoft.com/office/drawing/2014/main" id="{C95EC4F5-A516-43A4-8C20-8D1D261E4A28}"/>
               </a:ext>
             </a:extLst>
           </p:cNvPr>
@@ -3802,7 +3802,7 @@
           <p:cNvPr id="6" name="Slide Number Placeholder 5">
             <a:extLst xmlns:a="http://schemas.openxmlformats.org/drawingml/2006/main">
               <a:ext uri="{FF2B5EF4-FFF2-40B4-BE49-F238E27FC236}">
-                <a16:creationId xmlns:a16="http://schemas.microsoft.com/office/drawing/2014/main" id="{27759EAB-4AD6-4F1A-A454-D143A65AA9B4}"/>
+                <a16:creationId xmlns:a16="http://schemas.microsoft.com/office/drawing/2014/main" id="{4A434B43-9528-45E8-B0B5-9C61EDB6698E}"/>
               </a:ext>
             </a:extLst>
           </p:cNvPr>
@@ -3847,17 +3847,17 @@
   </p:cSld>
   <p:clrMap bg1="lt1" tx1="dk1" bg2="lt2" tx2="dk2" accent1="accent1" accent2="accent2" accent3="accent3" accent4="accent4" accent5="accent5" accent6="accent6" hlink="hlink" folHlink="folHlink"/>
   <p:sldLayoutIdLst>
-    <p:sldLayoutId xmlns:r="http://schemas.openxmlformats.org/officeDocument/2006/relationships" id="2147483649" r:id="R72c5a973a09a4604"/>
-    <p:sldLayoutId xmlns:r="http://schemas.openxmlformats.org/officeDocument/2006/relationships" id="2147483650" r:id="R49b02a13600f4139"/>
-    <p:sldLayoutId xmlns:r="http://schemas.openxmlformats.org/officeDocument/2006/relationships" id="2147483651" r:id="R6eaf4bf16efa4f51"/>
-    <p:sldLayoutId xmlns:r="http://schemas.openxmlformats.org/officeDocument/2006/relationships" id="2147483652" r:id="R566fb9cd470d4954"/>
-    <p:sldLayoutId xmlns:r="http://schemas.openxmlformats.org/officeDocument/2006/relationships" id="2147483653" r:id="Rdf9118a83b504464"/>
-    <p:sldLayoutId xmlns:r="http://schemas.openxmlformats.org/officeDocument/2006/relationships" id="2147483654" r:id="Rdb83120caa454f54"/>
-    <p:sldLayoutId xmlns:r="http://schemas.openxmlformats.org/officeDocument/2006/relationships" id="2147483655" r:id="R5c67d96f8e384ecb"/>
-    <p:sldLayoutId xmlns:r="http://schemas.openxmlformats.org/officeDocument/2006/relationships" id="2147483656" r:id="Rd91fb71e72a546b3"/>
-    <p:sldLayoutId xmlns:r="http://schemas.openxmlformats.org/officeDocument/2006/relationships" id="2147483657" r:id="R10287c2e10064389"/>
-    <p:sldLayoutId xmlns:r="http://schemas.openxmlformats.org/officeDocument/2006/relationships" id="2147483658" r:id="Ra5ffc35a54c04aee"/>
-    <p:sldLayoutId xmlns:r="http://schemas.openxmlformats.org/officeDocument/2006/relationships" id="2147483659" r:id="Rfc6b0d0ea5ef440b"/>
+    <p:sldLayoutId xmlns:r="http://schemas.openxmlformats.org/officeDocument/2006/relationships" id="2147483649" r:id="Ra7cb2f64426545fc"/>
+    <p:sldLayoutId xmlns:r="http://schemas.openxmlformats.org/officeDocument/2006/relationships" id="2147483650" r:id="R64da783551574c22"/>
+    <p:sldLayoutId xmlns:r="http://schemas.openxmlformats.org/officeDocument/2006/relationships" id="2147483651" r:id="R43d64ba4fc5c4ec6"/>
+    <p:sldLayoutId xmlns:r="http://schemas.openxmlformats.org/officeDocument/2006/relationships" id="2147483652" r:id="R1a17a776f49747a0"/>
+    <p:sldLayoutId xmlns:r="http://schemas.openxmlformats.org/officeDocument/2006/relationships" id="2147483653" r:id="Rdee44365587c47a4"/>
+    <p:sldLayoutId xmlns:r="http://schemas.openxmlformats.org/officeDocument/2006/relationships" id="2147483654" r:id="R8d73caff7a134117"/>
+    <p:sldLayoutId xmlns:r="http://schemas.openxmlformats.org/officeDocument/2006/relationships" id="2147483655" r:id="Rdc5bd48eca8a4444"/>
+    <p:sldLayoutId xmlns:r="http://schemas.openxmlformats.org/officeDocument/2006/relationships" id="2147483656" r:id="Rd390f2fb42924241"/>
+    <p:sldLayoutId xmlns:r="http://schemas.openxmlformats.org/officeDocument/2006/relationships" id="2147483657" r:id="R98162967c2514973"/>
+    <p:sldLayoutId xmlns:r="http://schemas.openxmlformats.org/officeDocument/2006/relationships" id="2147483658" r:id="R76a3e1a14e2c41f8"/>
+    <p:sldLayoutId xmlns:r="http://schemas.openxmlformats.org/officeDocument/2006/relationships" id="2147483659" r:id="R0e9f9e31f4334b9c"/>
   </p:sldLayoutIdLst>
   <p:txStyles>
     <p:titleStyle>
@@ -4410,7 +4410,7 @@
           <p:cNvPr id="2" name="Rectangle 1">
             <a:extLst xmlns:a="http://schemas.openxmlformats.org/drawingml/2006/main">
               <a:ext uri="{FF2B5EF4-FFF2-40B4-BE49-F238E27FC236}">
-                <a16:creationId xmlns:a16="http://schemas.microsoft.com/office/drawing/2014/main" id="{CC4BCE45-E21A-40DE-96D4-9ADB8DD9D6C1}"/>
+                <a16:creationId xmlns:a16="http://schemas.microsoft.com/office/drawing/2014/main" id="{8B37FBDA-6E72-47F6-BABF-C30967F62187}"/>
               </a:ext>
             </a:extLst>
           </p:cNvPr>
@@ -4465,7 +4465,7 @@
           <p:cNvPr id="3" name="TextBox 2">
             <a:extLst xmlns:a="http://schemas.openxmlformats.org/drawingml/2006/main">
               <a:ext uri="{FF2B5EF4-FFF2-40B4-BE49-F238E27FC236}">
-                <a16:creationId xmlns:a16="http://schemas.microsoft.com/office/drawing/2014/main" id="{4915E6A0-3662-4887-A1AA-95CCF6B84859}"/>
+                <a16:creationId xmlns:a16="http://schemas.microsoft.com/office/drawing/2014/main" id="{3C9C3E62-CF55-4712-B5BE-D0B7BB8CCCEA}"/>
               </a:ext>
             </a:extLst>
           </p:cNvPr>
@@ -4512,7 +4512,7 @@
           <p:cNvPr id="4" name="TextBox 3">
             <a:extLst xmlns:a="http://schemas.openxmlformats.org/drawingml/2006/main">
               <a:ext uri="{FF2B5EF4-FFF2-40B4-BE49-F238E27FC236}">
-                <a16:creationId xmlns:a16="http://schemas.microsoft.com/office/drawing/2014/main" id="{BBAEB5A2-233C-4C2A-AC2D-0BBE21A9C4E6}"/>
+                <a16:creationId xmlns:a16="http://schemas.microsoft.com/office/drawing/2014/main" id="{3F2F84F5-CAB7-4300-A63C-FF5154B8BD5B}"/>
               </a:ext>
             </a:extLst>
           </p:cNvPr>
@@ -4580,7 +4580,7 @@
           <p:cNvPr id="5" name="TextBox 4">
             <a:extLst xmlns:a="http://schemas.openxmlformats.org/drawingml/2006/main">
               <a:ext uri="{FF2B5EF4-FFF2-40B4-BE49-F238E27FC236}">
-                <a16:creationId xmlns:a16="http://schemas.microsoft.com/office/drawing/2014/main" id="{C511D7E1-91E5-4E61-B18A-A3206D742FC7}"/>
+                <a16:creationId xmlns:a16="http://schemas.microsoft.com/office/drawing/2014/main" id="{BA35D780-FC7C-470A-976E-91AE51EBE492}"/>
               </a:ext>
             </a:extLst>
           </p:cNvPr>
@@ -4627,7 +4627,7 @@
           <p:cNvPr id="6" name="Rectangle 5">
             <a:extLst xmlns:a="http://schemas.openxmlformats.org/drawingml/2006/main">
               <a:ext uri="{FF2B5EF4-FFF2-40B4-BE49-F238E27FC236}">
-                <a16:creationId xmlns:a16="http://schemas.microsoft.com/office/drawing/2014/main" id="{263B7F7C-ABFF-48E7-BB18-2DE744F425C4}"/>
+                <a16:creationId xmlns:a16="http://schemas.microsoft.com/office/drawing/2014/main" id="{8191FF0B-E65B-438D-AEE5-96076BD3F22A}"/>
               </a:ext>
             </a:extLst>
           </p:cNvPr>
@@ -4682,7 +4682,7 @@
           <p:cNvPr id="7" name="TextBox 6">
             <a:extLst xmlns:a="http://schemas.openxmlformats.org/drawingml/2006/main">
               <a:ext uri="{FF2B5EF4-FFF2-40B4-BE49-F238E27FC236}">
-                <a16:creationId xmlns:a16="http://schemas.microsoft.com/office/drawing/2014/main" id="{A5C5A2B7-177D-4C4D-80B6-9CC6392515B3}"/>
+                <a16:creationId xmlns:a16="http://schemas.microsoft.com/office/drawing/2014/main" id="{0555D7DB-2813-429A-B67D-15FEEAF5A7AE}"/>
               </a:ext>
             </a:extLst>
           </p:cNvPr>
@@ -4729,7 +4729,7 @@
           <p:cNvPr id="8" name="TextBox 7">
             <a:extLst xmlns:a="http://schemas.openxmlformats.org/drawingml/2006/main">
               <a:ext uri="{FF2B5EF4-FFF2-40B4-BE49-F238E27FC236}">
-                <a16:creationId xmlns:a16="http://schemas.microsoft.com/office/drawing/2014/main" id="{BD1119BA-680E-46F8-9402-4D73AB0F14A8}"/>
+                <a16:creationId xmlns:a16="http://schemas.microsoft.com/office/drawing/2014/main" id="{0684661C-FC81-4817-BA2A-201D043FE7FE}"/>
               </a:ext>
             </a:extLst>
           </p:cNvPr>
@@ -4766,7 +4766,7 @@
                 <a:ea typeface="Aptos"/>
                 <a:cs typeface="Aptos"/>
               </a:rPr>
-              <a:t>2026.07.22-8</a:t>
+              <a:t>2026.07.22-9</a:t>
             </a:r>
           </a:p>
         </p:txBody>
@@ -4776,7 +4776,7 @@
           <p:cNvPr id="9" name="TextBox 8">
             <a:extLst xmlns:a="http://schemas.openxmlformats.org/drawingml/2006/main">
               <a:ext uri="{FF2B5EF4-FFF2-40B4-BE49-F238E27FC236}">
-                <a16:creationId xmlns:a16="http://schemas.microsoft.com/office/drawing/2014/main" id="{AB298094-97B8-4E19-9914-410B884850C1}"/>
+                <a16:creationId xmlns:a16="http://schemas.microsoft.com/office/drawing/2014/main" id="{5DBB9FEE-84A2-41AF-8D3E-695D61DDFA3F}"/>
               </a:ext>
             </a:extLst>
           </p:cNvPr>
@@ -4844,7 +4844,7 @@
           <p:cNvPr id="10" name="TextBox 9">
             <a:extLst xmlns:a="http://schemas.openxmlformats.org/drawingml/2006/main">
               <a:ext uri="{FF2B5EF4-FFF2-40B4-BE49-F238E27FC236}">
-                <a16:creationId xmlns:a16="http://schemas.microsoft.com/office/drawing/2014/main" id="{F17EE58C-E2BE-418F-81A3-71C66710F6B2}"/>
+                <a16:creationId xmlns:a16="http://schemas.microsoft.com/office/drawing/2014/main" id="{263D2CDC-3493-4A4F-8419-8058FF27858D}"/>
               </a:ext>
             </a:extLst>
           </p:cNvPr>
@@ -4891,7 +4891,7 @@
           <p:cNvPr id="11" name="TextBox 10">
             <a:extLst xmlns:a="http://schemas.openxmlformats.org/drawingml/2006/main">
               <a:ext uri="{FF2B5EF4-FFF2-40B4-BE49-F238E27FC236}">
-                <a16:creationId xmlns:a16="http://schemas.microsoft.com/office/drawing/2014/main" id="{00B0754A-1042-4AC1-ACE0-039438F99842}"/>
+                <a16:creationId xmlns:a16="http://schemas.microsoft.com/office/drawing/2014/main" id="{37248C4F-88E1-445A-8445-1847481D8FF9}"/>
               </a:ext>
             </a:extLst>
           </p:cNvPr>
@@ -4938,7 +4938,7 @@
           <p:cNvPr id="12" name="TextBox 11">
             <a:extLst xmlns:a="http://schemas.openxmlformats.org/drawingml/2006/main">
               <a:ext uri="{FF2B5EF4-FFF2-40B4-BE49-F238E27FC236}">
-                <a16:creationId xmlns:a16="http://schemas.microsoft.com/office/drawing/2014/main" id="{2EBEBCE0-D1C3-4658-BEDC-0AEC5427A40F}"/>
+                <a16:creationId xmlns:a16="http://schemas.microsoft.com/office/drawing/2014/main" id="{732496F6-EDEA-467E-8BB2-90DED9DAF54E}"/>
               </a:ext>
             </a:extLst>
           </p:cNvPr>
@@ -4983,7 +4983,7 @@
     </p:spTree>
     <p:extLst>
       <p:ext uri="{BB962C8B-B14F-4D97-AF65-F5344CB8AC3E}">
-        <p14:creationId xmlns:p14="http://schemas.microsoft.com/office/powerpoint/2010/main" val="161644078"/>
+        <p14:creationId xmlns:p14="http://schemas.microsoft.com/office/powerpoint/2010/main" val="28822536"/>
       </p:ext>
     </p:extLst>
   </p:cSld>
@@ -5007,7 +5007,7 @@
           <p:cNvPr id="2" name="TextBox 1">
             <a:extLst xmlns:a="http://schemas.openxmlformats.org/drawingml/2006/main">
               <a:ext uri="{FF2B5EF4-FFF2-40B4-BE49-F238E27FC236}">
-                <a16:creationId xmlns:a16="http://schemas.microsoft.com/office/drawing/2014/main" id="{7356F807-27C4-4D56-948A-3B4815BF768A}"/>
+                <a16:creationId xmlns:a16="http://schemas.microsoft.com/office/drawing/2014/main" id="{CC007704-345F-436F-A363-451E04055149}"/>
               </a:ext>
             </a:extLst>
           </p:cNvPr>
@@ -5054,7 +5054,7 @@
           <p:cNvPr id="3" name="TextBox 2">
             <a:extLst xmlns:a="http://schemas.openxmlformats.org/drawingml/2006/main">
               <a:ext uri="{FF2B5EF4-FFF2-40B4-BE49-F238E27FC236}">
-                <a16:creationId xmlns:a16="http://schemas.microsoft.com/office/drawing/2014/main" id="{E5F52078-D360-4097-B9E1-F9020EA8B983}"/>
+                <a16:creationId xmlns:a16="http://schemas.microsoft.com/office/drawing/2014/main" id="{01011576-CB50-4141-A614-1116447C4BAB}"/>
               </a:ext>
             </a:extLst>
           </p:cNvPr>
@@ -5101,7 +5101,7 @@
           <p:cNvPr id="4" name="Rectangle 3">
             <a:extLst xmlns:a="http://schemas.openxmlformats.org/drawingml/2006/main">
               <a:ext uri="{FF2B5EF4-FFF2-40B4-BE49-F238E27FC236}">
-                <a16:creationId xmlns:a16="http://schemas.microsoft.com/office/drawing/2014/main" id="{CB5E2D4D-1B45-4C59-9F47-12B24F24284E}"/>
+                <a16:creationId xmlns:a16="http://schemas.microsoft.com/office/drawing/2014/main" id="{E32ED0BA-7EEA-4684-861B-4478577A88C5}"/>
               </a:ext>
             </a:extLst>
           </p:cNvPr>
@@ -5156,7 +5156,7 @@
           <p:cNvPr id="5" name="Rectangle 4">
             <a:extLst xmlns:a="http://schemas.openxmlformats.org/drawingml/2006/main">
               <a:ext uri="{FF2B5EF4-FFF2-40B4-BE49-F238E27FC236}">
-                <a16:creationId xmlns:a16="http://schemas.microsoft.com/office/drawing/2014/main" id="{594A76A5-862F-4E9E-9CC6-1637E133A3E2}"/>
+                <a16:creationId xmlns:a16="http://schemas.microsoft.com/office/drawing/2014/main" id="{DBB0D292-4C5C-412C-8B7C-4E4015C33590}"/>
               </a:ext>
             </a:extLst>
           </p:cNvPr>
@@ -5211,7 +5211,7 @@
           <p:cNvPr id="6" name="TextBox 5">
             <a:extLst xmlns:a="http://schemas.openxmlformats.org/drawingml/2006/main">
               <a:ext uri="{FF2B5EF4-FFF2-40B4-BE49-F238E27FC236}">
-                <a16:creationId xmlns:a16="http://schemas.microsoft.com/office/drawing/2014/main" id="{509AEEBA-6A30-4291-89E0-85BD4B2FD99C}"/>
+                <a16:creationId xmlns:a16="http://schemas.microsoft.com/office/drawing/2014/main" id="{6911CC37-0A64-4C12-808E-BAC787C18D70}"/>
               </a:ext>
             </a:extLst>
           </p:cNvPr>
@@ -5248,7 +5248,7 @@
                 <a:ea typeface="Aptos"/>
                 <a:cs typeface="Aptos"/>
               </a:rPr>
-              <a:t>Independent public evidence summary · 2026.07.22-8 · 2026-07-22 · Sources: EPO; Germany — official judgments; WIPO</a:t>
+              <a:t>Independent public evidence summary · 2026.07.22-9 · 2026-07-22 · Sources: EPO; Germany — official judgments; WIPO</a:t>
             </a:r>
           </a:p>
         </p:txBody>
@@ -5258,7 +5258,7 @@
           <p:cNvPr id="7" name="TextBox 6">
             <a:extLst xmlns:a="http://schemas.openxmlformats.org/drawingml/2006/main">
               <a:ext uri="{FF2B5EF4-FFF2-40B4-BE49-F238E27FC236}">
-                <a16:creationId xmlns:a16="http://schemas.microsoft.com/office/drawing/2014/main" id="{87B79AEA-D774-4A85-95B5-B15AB0A434F2}"/>
+                <a16:creationId xmlns:a16="http://schemas.microsoft.com/office/drawing/2014/main" id="{3B5FC97A-5D32-4DF7-8BEE-67013ECF8E60}"/>
               </a:ext>
             </a:extLst>
           </p:cNvPr>
@@ -5305,7 +5305,7 @@
           <p:cNvPr id="8" name="TextBox 7">
             <a:extLst xmlns:a="http://schemas.openxmlformats.org/drawingml/2006/main">
               <a:ext uri="{FF2B5EF4-FFF2-40B4-BE49-F238E27FC236}">
-                <a16:creationId xmlns:a16="http://schemas.microsoft.com/office/drawing/2014/main" id="{2C719182-7E31-4660-A94F-4338677D0DA4}"/>
+                <a16:creationId xmlns:a16="http://schemas.microsoft.com/office/drawing/2014/main" id="{45FD80B2-C052-480D-BF7C-67BFCCB0FB8D}"/>
               </a:ext>
             </a:extLst>
           </p:cNvPr>
@@ -5352,7 +5352,7 @@
           <p:cNvPr id="9" name="TextBox 8">
             <a:extLst xmlns:a="http://schemas.openxmlformats.org/drawingml/2006/main">
               <a:ext uri="{FF2B5EF4-FFF2-40B4-BE49-F238E27FC236}">
-                <a16:creationId xmlns:a16="http://schemas.microsoft.com/office/drawing/2014/main" id="{6D9CA75A-61E0-4F50-B377-DFEA86D551DF}"/>
+                <a16:creationId xmlns:a16="http://schemas.microsoft.com/office/drawing/2014/main" id="{667A4BBE-AB15-4F44-81B1-445D2FB1A10B}"/>
               </a:ext>
             </a:extLst>
           </p:cNvPr>
@@ -5449,7 +5449,7 @@
           <p:cNvPr id="10" name="Rounded Rectangle 9">
             <a:extLst xmlns:a="http://schemas.openxmlformats.org/drawingml/2006/main">
               <a:ext uri="{FF2B5EF4-FFF2-40B4-BE49-F238E27FC236}">
-                <a16:creationId xmlns:a16="http://schemas.microsoft.com/office/drawing/2014/main" id="{BBAFD4EC-AC9F-4B20-AB0A-8DE4E07924C9}"/>
+                <a16:creationId xmlns:a16="http://schemas.microsoft.com/office/drawing/2014/main" id="{126EC1F1-3786-4B93-91DE-EB251CF8E870}"/>
               </a:ext>
             </a:extLst>
           </p:cNvPr>
@@ -5506,7 +5506,7 @@
           <p:cNvPr id="11" name="TextBox 10">
             <a:extLst xmlns:a="http://schemas.openxmlformats.org/drawingml/2006/main">
               <a:ext uri="{FF2B5EF4-FFF2-40B4-BE49-F238E27FC236}">
-                <a16:creationId xmlns:a16="http://schemas.microsoft.com/office/drawing/2014/main" id="{A1A98C02-3540-4A95-83CD-8B1A664EDFFD}"/>
+                <a16:creationId xmlns:a16="http://schemas.microsoft.com/office/drawing/2014/main" id="{8D43D07A-CF04-4B1F-AA18-62F06D459428}"/>
               </a:ext>
             </a:extLst>
           </p:cNvPr>
@@ -5553,7 +5553,7 @@
           <p:cNvPr id="12" name="TextBox 11">
             <a:extLst xmlns:a="http://schemas.openxmlformats.org/drawingml/2006/main">
               <a:ext uri="{FF2B5EF4-FFF2-40B4-BE49-F238E27FC236}">
-                <a16:creationId xmlns:a16="http://schemas.microsoft.com/office/drawing/2014/main" id="{DF95B1A9-CA94-470A-892D-93B977D75B90}"/>
+                <a16:creationId xmlns:a16="http://schemas.microsoft.com/office/drawing/2014/main" id="{8FCB24E3-EFCF-463D-885B-1128519822B0}"/>
               </a:ext>
             </a:extLst>
           </p:cNvPr>
@@ -5598,7 +5598,7 @@
     </p:spTree>
     <p:extLst>
       <p:ext uri="{BB962C8B-B14F-4D97-AF65-F5344CB8AC3E}">
-        <p14:creationId xmlns:p14="http://schemas.microsoft.com/office/powerpoint/2010/main" val="2034217518"/>
+        <p14:creationId xmlns:p14="http://schemas.microsoft.com/office/powerpoint/2010/main" val="1197376623"/>
       </p:ext>
     </p:extLst>
   </p:cSld>
@@ -5622,7 +5622,7 @@
           <p:cNvPr id="2" name="TextBox 1">
             <a:extLst xmlns:a="http://schemas.openxmlformats.org/drawingml/2006/main">
               <a:ext uri="{FF2B5EF4-FFF2-40B4-BE49-F238E27FC236}">
-                <a16:creationId xmlns:a16="http://schemas.microsoft.com/office/drawing/2014/main" id="{CC19B91B-FDB1-4DAD-823C-E88B8C6B14EF}"/>
+                <a16:creationId xmlns:a16="http://schemas.microsoft.com/office/drawing/2014/main" id="{DA07926C-6A6B-46CC-9468-A0D8D6FF423E}"/>
               </a:ext>
             </a:extLst>
           </p:cNvPr>
@@ -5669,7 +5669,7 @@
           <p:cNvPr id="3" name="TextBox 2">
             <a:extLst xmlns:a="http://schemas.openxmlformats.org/drawingml/2006/main">
               <a:ext uri="{FF2B5EF4-FFF2-40B4-BE49-F238E27FC236}">
-                <a16:creationId xmlns:a16="http://schemas.microsoft.com/office/drawing/2014/main" id="{A0F1BE20-226A-4D78-ADC8-72752734D0AE}"/>
+                <a16:creationId xmlns:a16="http://schemas.microsoft.com/office/drawing/2014/main" id="{0C92FEA0-CC96-4D40-A0CE-14A6C77C759B}"/>
               </a:ext>
             </a:extLst>
           </p:cNvPr>
@@ -5716,7 +5716,7 @@
           <p:cNvPr id="4" name="Rectangle 3">
             <a:extLst xmlns:a="http://schemas.openxmlformats.org/drawingml/2006/main">
               <a:ext uri="{FF2B5EF4-FFF2-40B4-BE49-F238E27FC236}">
-                <a16:creationId xmlns:a16="http://schemas.microsoft.com/office/drawing/2014/main" id="{19AB80FA-98CB-4E65-8803-6B7559756456}"/>
+                <a16:creationId xmlns:a16="http://schemas.microsoft.com/office/drawing/2014/main" id="{CC67173B-44C1-48F6-98A1-4AB1492F9713}"/>
               </a:ext>
             </a:extLst>
           </p:cNvPr>
@@ -5771,7 +5771,7 @@
           <p:cNvPr id="5" name="Rectangle 4">
             <a:extLst xmlns:a="http://schemas.openxmlformats.org/drawingml/2006/main">
               <a:ext uri="{FF2B5EF4-FFF2-40B4-BE49-F238E27FC236}">
-                <a16:creationId xmlns:a16="http://schemas.microsoft.com/office/drawing/2014/main" id="{B9026A37-0DE4-4937-BF27-A21F72466709}"/>
+                <a16:creationId xmlns:a16="http://schemas.microsoft.com/office/drawing/2014/main" id="{F771ED69-3219-4D37-A75D-24E990614A90}"/>
               </a:ext>
             </a:extLst>
           </p:cNvPr>
@@ -5826,7 +5826,7 @@
           <p:cNvPr id="6" name="TextBox 5">
             <a:extLst xmlns:a="http://schemas.openxmlformats.org/drawingml/2006/main">
               <a:ext uri="{FF2B5EF4-FFF2-40B4-BE49-F238E27FC236}">
-                <a16:creationId xmlns:a16="http://schemas.microsoft.com/office/drawing/2014/main" id="{FB62069F-CCAE-47A2-A1B6-CBEB2DFAEB6E}"/>
+                <a16:creationId xmlns:a16="http://schemas.microsoft.com/office/drawing/2014/main" id="{BFF47B25-34C6-44B4-B340-394B03FDA063}"/>
               </a:ext>
             </a:extLst>
           </p:cNvPr>
@@ -5863,7 +5863,7 @@
                 <a:ea typeface="Aptos"/>
                 <a:cs typeface="Aptos"/>
               </a:rPr>
-              <a:t>Independent public evidence summary · 2026.07.22-8 · 2026-07-22 · Sources: EPO Register; EP3032975B2; 8 Ni 18/24 (EP); 7 O 3341/24</a:t>
+              <a:t>Independent public evidence summary · 2026.07.22-9 · 2026-07-22 · Sources: EPO Register; EP3032975B2; 8 Ni 18/24 (EP); 7 O 3341/24</a:t>
             </a:r>
           </a:p>
         </p:txBody>
@@ -5873,7 +5873,7 @@
           <p:cNvPr id="7" name="TextBox 6">
             <a:extLst xmlns:a="http://schemas.openxmlformats.org/drawingml/2006/main">
               <a:ext uri="{FF2B5EF4-FFF2-40B4-BE49-F238E27FC236}">
-                <a16:creationId xmlns:a16="http://schemas.microsoft.com/office/drawing/2014/main" id="{4407D9F9-8178-40C3-9FEC-356407A79351}"/>
+                <a16:creationId xmlns:a16="http://schemas.microsoft.com/office/drawing/2014/main" id="{282B918C-8A28-45CD-9F59-94DDE3518754}"/>
               </a:ext>
             </a:extLst>
           </p:cNvPr>
@@ -5920,7 +5920,7 @@
           <p:cNvPr id="8" name="Rounded Rectangle 7">
             <a:extLst xmlns:a="http://schemas.openxmlformats.org/drawingml/2006/main">
               <a:ext uri="{FF2B5EF4-FFF2-40B4-BE49-F238E27FC236}">
-                <a16:creationId xmlns:a16="http://schemas.microsoft.com/office/drawing/2014/main" id="{FF172DF0-3893-468B-8457-B6977D00B242}"/>
+                <a16:creationId xmlns:a16="http://schemas.microsoft.com/office/drawing/2014/main" id="{F780F7D8-2D7D-4E26-90DA-A58D11FA8C51}"/>
               </a:ext>
             </a:extLst>
           </p:cNvPr>
@@ -5977,7 +5977,7 @@
           <p:cNvPr id="9" name="TextBox 8">
             <a:extLst xmlns:a="http://schemas.openxmlformats.org/drawingml/2006/main">
               <a:ext uri="{FF2B5EF4-FFF2-40B4-BE49-F238E27FC236}">
-                <a16:creationId xmlns:a16="http://schemas.microsoft.com/office/drawing/2014/main" id="{798A5F37-5E9B-46CC-8387-C8FD40CB6F5B}"/>
+                <a16:creationId xmlns:a16="http://schemas.microsoft.com/office/drawing/2014/main" id="{9E006B2A-2E3E-4AEB-8EE6-DF5F91EBCFCA}"/>
               </a:ext>
             </a:extLst>
           </p:cNvPr>
@@ -6024,7 +6024,7 @@
           <p:cNvPr id="10" name="TextBox 9">
             <a:extLst xmlns:a="http://schemas.openxmlformats.org/drawingml/2006/main">
               <a:ext uri="{FF2B5EF4-FFF2-40B4-BE49-F238E27FC236}">
-                <a16:creationId xmlns:a16="http://schemas.microsoft.com/office/drawing/2014/main" id="{DFB7B862-9225-4C56-9A69-DE46B46E05F3}"/>
+                <a16:creationId xmlns:a16="http://schemas.microsoft.com/office/drawing/2014/main" id="{2515E939-DC0E-465A-AD1D-238625394CF3}"/>
               </a:ext>
             </a:extLst>
           </p:cNvPr>
@@ -6071,7 +6071,7 @@
           <p:cNvPr id="11" name="Rounded Rectangle 10">
             <a:extLst xmlns:a="http://schemas.openxmlformats.org/drawingml/2006/main">
               <a:ext uri="{FF2B5EF4-FFF2-40B4-BE49-F238E27FC236}">
-                <a16:creationId xmlns:a16="http://schemas.microsoft.com/office/drawing/2014/main" id="{A26D83B6-43ED-4AA1-8A9A-D42F187A981F}"/>
+                <a16:creationId xmlns:a16="http://schemas.microsoft.com/office/drawing/2014/main" id="{A64A3BF0-47F9-4DD9-84D3-1220ADE88C65}"/>
               </a:ext>
             </a:extLst>
           </p:cNvPr>
@@ -6128,7 +6128,7 @@
           <p:cNvPr id="12" name="TextBox 11">
             <a:extLst xmlns:a="http://schemas.openxmlformats.org/drawingml/2006/main">
               <a:ext uri="{FF2B5EF4-FFF2-40B4-BE49-F238E27FC236}">
-                <a16:creationId xmlns:a16="http://schemas.microsoft.com/office/drawing/2014/main" id="{3AC730EC-7B4E-47AD-8AB5-AA22A7E6757D}"/>
+                <a16:creationId xmlns:a16="http://schemas.microsoft.com/office/drawing/2014/main" id="{4B72C06C-62AE-4EC0-A48F-B443F08B4488}"/>
               </a:ext>
             </a:extLst>
           </p:cNvPr>
@@ -6175,7 +6175,7 @@
           <p:cNvPr id="13" name="TextBox 12">
             <a:extLst xmlns:a="http://schemas.openxmlformats.org/drawingml/2006/main">
               <a:ext uri="{FF2B5EF4-FFF2-40B4-BE49-F238E27FC236}">
-                <a16:creationId xmlns:a16="http://schemas.microsoft.com/office/drawing/2014/main" id="{81DB7EA3-2AE4-40D7-8554-8203A0858F7C}"/>
+                <a16:creationId xmlns:a16="http://schemas.microsoft.com/office/drawing/2014/main" id="{956D6182-DAF8-4B2E-A1D5-A7922FEC5659}"/>
               </a:ext>
             </a:extLst>
           </p:cNvPr>
@@ -6222,7 +6222,7 @@
           <p:cNvPr id="14" name="Rounded Rectangle 13">
             <a:extLst xmlns:a="http://schemas.openxmlformats.org/drawingml/2006/main">
               <a:ext uri="{FF2B5EF4-FFF2-40B4-BE49-F238E27FC236}">
-                <a16:creationId xmlns:a16="http://schemas.microsoft.com/office/drawing/2014/main" id="{AFFB0E67-6FC2-4A02-863E-48FA333CF47D}"/>
+                <a16:creationId xmlns:a16="http://schemas.microsoft.com/office/drawing/2014/main" id="{997BD297-FECE-45F6-952A-BB2EACA8C2AA}"/>
               </a:ext>
             </a:extLst>
           </p:cNvPr>
@@ -6279,7 +6279,7 @@
           <p:cNvPr id="15" name="TextBox 14">
             <a:extLst xmlns:a="http://schemas.openxmlformats.org/drawingml/2006/main">
               <a:ext uri="{FF2B5EF4-FFF2-40B4-BE49-F238E27FC236}">
-                <a16:creationId xmlns:a16="http://schemas.microsoft.com/office/drawing/2014/main" id="{42607154-9B8B-440D-BC0F-A7D216043B8D}"/>
+                <a16:creationId xmlns:a16="http://schemas.microsoft.com/office/drawing/2014/main" id="{F180AA30-92E0-41C3-91E3-C9CC202F9973}"/>
               </a:ext>
             </a:extLst>
           </p:cNvPr>
@@ -6326,7 +6326,7 @@
           <p:cNvPr id="16" name="TextBox 15">
             <a:extLst xmlns:a="http://schemas.openxmlformats.org/drawingml/2006/main">
               <a:ext uri="{FF2B5EF4-FFF2-40B4-BE49-F238E27FC236}">
-                <a16:creationId xmlns:a16="http://schemas.microsoft.com/office/drawing/2014/main" id="{C5CEF7A6-0391-48A0-9EED-157A1B265481}"/>
+                <a16:creationId xmlns:a16="http://schemas.microsoft.com/office/drawing/2014/main" id="{FABE974C-FE57-444B-88A1-0F362929E6B9}"/>
               </a:ext>
             </a:extLst>
           </p:cNvPr>
@@ -6373,7 +6373,7 @@
           <p:cNvPr id="17" name="TextBox 16">
             <a:extLst xmlns:a="http://schemas.openxmlformats.org/drawingml/2006/main">
               <a:ext uri="{FF2B5EF4-FFF2-40B4-BE49-F238E27FC236}">
-                <a16:creationId xmlns:a16="http://schemas.microsoft.com/office/drawing/2014/main" id="{1519B726-C1B1-4698-90C2-FE8E9E82CE5F}"/>
+                <a16:creationId xmlns:a16="http://schemas.microsoft.com/office/drawing/2014/main" id="{065D97A7-803E-4EE2-A404-E8E1697535CA}"/>
               </a:ext>
             </a:extLst>
           </p:cNvPr>
@@ -6420,7 +6420,7 @@
           <p:cNvPr id="18" name="Rounded Rectangle 17">
             <a:extLst xmlns:a="http://schemas.openxmlformats.org/drawingml/2006/main">
               <a:ext uri="{FF2B5EF4-FFF2-40B4-BE49-F238E27FC236}">
-                <a16:creationId xmlns:a16="http://schemas.microsoft.com/office/drawing/2014/main" id="{B6352F9B-386A-44DD-B3D0-CA1FEABA4AAC}"/>
+                <a16:creationId xmlns:a16="http://schemas.microsoft.com/office/drawing/2014/main" id="{23ED6392-F5EB-4E6F-A7FD-113487C9046D}"/>
               </a:ext>
             </a:extLst>
           </p:cNvPr>
@@ -6477,7 +6477,7 @@
           <p:cNvPr id="19" name="TextBox 18">
             <a:extLst xmlns:a="http://schemas.openxmlformats.org/drawingml/2006/main">
               <a:ext uri="{FF2B5EF4-FFF2-40B4-BE49-F238E27FC236}">
-                <a16:creationId xmlns:a16="http://schemas.microsoft.com/office/drawing/2014/main" id="{C76159D1-4B35-4DA8-8B9B-EE623276EB5E}"/>
+                <a16:creationId xmlns:a16="http://schemas.microsoft.com/office/drawing/2014/main" id="{DACD41C2-D20F-4FC5-B8E1-271119D43E48}"/>
               </a:ext>
             </a:extLst>
           </p:cNvPr>
@@ -6524,7 +6524,7 @@
           <p:cNvPr id="20" name="TextBox 19">
             <a:extLst xmlns:a="http://schemas.openxmlformats.org/drawingml/2006/main">
               <a:ext uri="{FF2B5EF4-FFF2-40B4-BE49-F238E27FC236}">
-                <a16:creationId xmlns:a16="http://schemas.microsoft.com/office/drawing/2014/main" id="{1F6EE1DE-0650-499A-822C-0EE82EBC705F}"/>
+                <a16:creationId xmlns:a16="http://schemas.microsoft.com/office/drawing/2014/main" id="{B36617E7-147C-4F6C-9D24-AF8F6E78298A}"/>
               </a:ext>
             </a:extLst>
           </p:cNvPr>
@@ -6569,7 +6569,7 @@
     </p:spTree>
     <p:extLst>
       <p:ext uri="{BB962C8B-B14F-4D97-AF65-F5344CB8AC3E}">
-        <p14:creationId xmlns:p14="http://schemas.microsoft.com/office/powerpoint/2010/main" val="172775669"/>
+        <p14:creationId xmlns:p14="http://schemas.microsoft.com/office/powerpoint/2010/main" val="2086847604"/>
       </p:ext>
     </p:extLst>
   </p:cSld>
@@ -6593,7 +6593,7 @@
           <p:cNvPr id="2" name="TextBox 1">
             <a:extLst xmlns:a="http://schemas.openxmlformats.org/drawingml/2006/main">
               <a:ext uri="{FF2B5EF4-FFF2-40B4-BE49-F238E27FC236}">
-                <a16:creationId xmlns:a16="http://schemas.microsoft.com/office/drawing/2014/main" id="{E3C1446B-8891-4D90-AE27-056828033755}"/>
+                <a16:creationId xmlns:a16="http://schemas.microsoft.com/office/drawing/2014/main" id="{F9232686-C6EB-4FA0-BDF3-EB2EB3BEE1ED}"/>
               </a:ext>
             </a:extLst>
           </p:cNvPr>
@@ -6640,7 +6640,7 @@
           <p:cNvPr id="3" name="TextBox 2">
             <a:extLst xmlns:a="http://schemas.openxmlformats.org/drawingml/2006/main">
               <a:ext uri="{FF2B5EF4-FFF2-40B4-BE49-F238E27FC236}">
-                <a16:creationId xmlns:a16="http://schemas.microsoft.com/office/drawing/2014/main" id="{F852DC27-BA46-4113-9CE7-8F4270AEE03E}"/>
+                <a16:creationId xmlns:a16="http://schemas.microsoft.com/office/drawing/2014/main" id="{0FC9B79B-04EB-4BDE-BF03-D9590D034F27}"/>
               </a:ext>
             </a:extLst>
           </p:cNvPr>
@@ -6687,7 +6687,7 @@
           <p:cNvPr id="4" name="Rectangle 3">
             <a:extLst xmlns:a="http://schemas.openxmlformats.org/drawingml/2006/main">
               <a:ext uri="{FF2B5EF4-FFF2-40B4-BE49-F238E27FC236}">
-                <a16:creationId xmlns:a16="http://schemas.microsoft.com/office/drawing/2014/main" id="{E1F9F84B-3ED8-4E64-98F8-1C3808BA23F3}"/>
+                <a16:creationId xmlns:a16="http://schemas.microsoft.com/office/drawing/2014/main" id="{5904951D-B900-4DC1-ACB0-39BCD6065971}"/>
               </a:ext>
             </a:extLst>
           </p:cNvPr>
@@ -6742,7 +6742,7 @@
           <p:cNvPr id="5" name="Rectangle 4">
             <a:extLst xmlns:a="http://schemas.openxmlformats.org/drawingml/2006/main">
               <a:ext uri="{FF2B5EF4-FFF2-40B4-BE49-F238E27FC236}">
-                <a16:creationId xmlns:a16="http://schemas.microsoft.com/office/drawing/2014/main" id="{17D38B77-96CB-415C-9728-98F2C285A1E4}"/>
+                <a16:creationId xmlns:a16="http://schemas.microsoft.com/office/drawing/2014/main" id="{FE1B1753-73C3-472B-9909-B759B1BE4EAE}"/>
               </a:ext>
             </a:extLst>
           </p:cNvPr>
@@ -6797,7 +6797,7 @@
           <p:cNvPr id="6" name="TextBox 5">
             <a:extLst xmlns:a="http://schemas.openxmlformats.org/drawingml/2006/main">
               <a:ext uri="{FF2B5EF4-FFF2-40B4-BE49-F238E27FC236}">
-                <a16:creationId xmlns:a16="http://schemas.microsoft.com/office/drawing/2014/main" id="{4E0059FC-D8CE-4AF1-9894-577B9652E339}"/>
+                <a16:creationId xmlns:a16="http://schemas.microsoft.com/office/drawing/2014/main" id="{049A4F62-FF5F-47E6-AB16-5A24A91E95FE}"/>
               </a:ext>
             </a:extLst>
           </p:cNvPr>
@@ -6834,7 +6834,7 @@
                 <a:ea typeface="Aptos"/>
                 <a:cs typeface="Aptos"/>
               </a:rPr>
-              <a:t>Independent public evidence summary · 2026.07.22-8 · 2026-07-22 · Sources: Health Canada; Destatis; Vero; Sejm; Swedish Government</a:t>
+              <a:t>Independent public evidence summary · 2026.07.22-9 · 2026-07-22 · Sources: Health Canada; Destatis; Vero; Sejm; Swedish Government</a:t>
             </a:r>
           </a:p>
         </p:txBody>
@@ -6844,7 +6844,7 @@
           <p:cNvPr id="7" name="TextBox 6">
             <a:extLst xmlns:a="http://schemas.openxmlformats.org/drawingml/2006/main">
               <a:ext uri="{FF2B5EF4-FFF2-40B4-BE49-F238E27FC236}">
-                <a16:creationId xmlns:a16="http://schemas.microsoft.com/office/drawing/2014/main" id="{128BEFFE-72A6-480D-BDBA-9C5E916C674A}"/>
+                <a16:creationId xmlns:a16="http://schemas.microsoft.com/office/drawing/2014/main" id="{2F36332A-451A-4416-8CD4-3DEBDC4450B6}"/>
               </a:ext>
             </a:extLst>
           </p:cNvPr>
@@ -6891,7 +6891,7 @@
           <p:cNvPr id="8" name="Rounded Rectangle 7">
             <a:extLst xmlns:a="http://schemas.openxmlformats.org/drawingml/2006/main">
               <a:ext uri="{FF2B5EF4-FFF2-40B4-BE49-F238E27FC236}">
-                <a16:creationId xmlns:a16="http://schemas.microsoft.com/office/drawing/2014/main" id="{69C78691-C070-408A-A348-3997CDBC7CA6}"/>
+                <a16:creationId xmlns:a16="http://schemas.microsoft.com/office/drawing/2014/main" id="{D45CF709-C7E6-467E-9353-5FC4579E9C21}"/>
               </a:ext>
             </a:extLst>
           </p:cNvPr>
@@ -6948,7 +6948,7 @@
           <p:cNvPr id="9" name="TextBox 8">
             <a:extLst xmlns:a="http://schemas.openxmlformats.org/drawingml/2006/main">
               <a:ext uri="{FF2B5EF4-FFF2-40B4-BE49-F238E27FC236}">
-                <a16:creationId xmlns:a16="http://schemas.microsoft.com/office/drawing/2014/main" id="{6051BBEA-AD5A-44B6-B383-0D6122DDA285}"/>
+                <a16:creationId xmlns:a16="http://schemas.microsoft.com/office/drawing/2014/main" id="{9ED03B72-D9EF-432F-962E-1DE59FC3F9B9}"/>
               </a:ext>
             </a:extLst>
           </p:cNvPr>
@@ -6995,7 +6995,7 @@
           <p:cNvPr id="10" name="TextBox 9">
             <a:extLst xmlns:a="http://schemas.openxmlformats.org/drawingml/2006/main">
               <a:ext uri="{FF2B5EF4-FFF2-40B4-BE49-F238E27FC236}">
-                <a16:creationId xmlns:a16="http://schemas.microsoft.com/office/drawing/2014/main" id="{F42E5182-7E91-4B30-B49A-FB9E6BD3DB33}"/>
+                <a16:creationId xmlns:a16="http://schemas.microsoft.com/office/drawing/2014/main" id="{F6280BBD-B863-46A7-9999-5A81351DC53D}"/>
               </a:ext>
             </a:extLst>
           </p:cNvPr>
@@ -7042,7 +7042,7 @@
           <p:cNvPr id="11" name="Rounded Rectangle 10">
             <a:extLst xmlns:a="http://schemas.openxmlformats.org/drawingml/2006/main">
               <a:ext uri="{FF2B5EF4-FFF2-40B4-BE49-F238E27FC236}">
-                <a16:creationId xmlns:a16="http://schemas.microsoft.com/office/drawing/2014/main" id="{5943F29A-9C5F-43E2-9AA5-67DD52D90198}"/>
+                <a16:creationId xmlns:a16="http://schemas.microsoft.com/office/drawing/2014/main" id="{2AB4CBB9-11A3-499D-958F-F0D9926EDD2C}"/>
               </a:ext>
             </a:extLst>
           </p:cNvPr>
@@ -7099,7 +7099,7 @@
           <p:cNvPr id="12" name="TextBox 11">
             <a:extLst xmlns:a="http://schemas.openxmlformats.org/drawingml/2006/main">
               <a:ext uri="{FF2B5EF4-FFF2-40B4-BE49-F238E27FC236}">
-                <a16:creationId xmlns:a16="http://schemas.microsoft.com/office/drawing/2014/main" id="{44BF0AD0-FF98-4101-94E0-108A8EC936AC}"/>
+                <a16:creationId xmlns:a16="http://schemas.microsoft.com/office/drawing/2014/main" id="{B683617B-D766-4A82-8BF1-16E1B62E7ED4}"/>
               </a:ext>
             </a:extLst>
           </p:cNvPr>
@@ -7146,7 +7146,7 @@
           <p:cNvPr id="13" name="TextBox 12">
             <a:extLst xmlns:a="http://schemas.openxmlformats.org/drawingml/2006/main">
               <a:ext uri="{FF2B5EF4-FFF2-40B4-BE49-F238E27FC236}">
-                <a16:creationId xmlns:a16="http://schemas.microsoft.com/office/drawing/2014/main" id="{83BF40B3-88CD-46AB-A463-62509A868CAB}"/>
+                <a16:creationId xmlns:a16="http://schemas.microsoft.com/office/drawing/2014/main" id="{0BC76F3F-2F57-462D-BD74-F88B02E3AC58}"/>
               </a:ext>
             </a:extLst>
           </p:cNvPr>
@@ -7193,7 +7193,7 @@
           <p:cNvPr id="14" name="Rounded Rectangle 13">
             <a:extLst xmlns:a="http://schemas.openxmlformats.org/drawingml/2006/main">
               <a:ext uri="{FF2B5EF4-FFF2-40B4-BE49-F238E27FC236}">
-                <a16:creationId xmlns:a16="http://schemas.microsoft.com/office/drawing/2014/main" id="{7E585C26-EB0E-4C01-A497-C92620E5E943}"/>
+                <a16:creationId xmlns:a16="http://schemas.microsoft.com/office/drawing/2014/main" id="{17999C87-7EB9-4916-B7EC-81ED2C31C72F}"/>
               </a:ext>
             </a:extLst>
           </p:cNvPr>
@@ -7250,7 +7250,7 @@
           <p:cNvPr id="15" name="TextBox 14">
             <a:extLst xmlns:a="http://schemas.openxmlformats.org/drawingml/2006/main">
               <a:ext uri="{FF2B5EF4-FFF2-40B4-BE49-F238E27FC236}">
-                <a16:creationId xmlns:a16="http://schemas.microsoft.com/office/drawing/2014/main" id="{B1D0EE6C-C544-4CC1-90E6-02260052EC82}"/>
+                <a16:creationId xmlns:a16="http://schemas.microsoft.com/office/drawing/2014/main" id="{BD2C1A32-A482-499C-A004-65253E45F85D}"/>
               </a:ext>
             </a:extLst>
           </p:cNvPr>
@@ -7297,7 +7297,7 @@
           <p:cNvPr id="16" name="TextBox 15">
             <a:extLst xmlns:a="http://schemas.openxmlformats.org/drawingml/2006/main">
               <a:ext uri="{FF2B5EF4-FFF2-40B4-BE49-F238E27FC236}">
-                <a16:creationId xmlns:a16="http://schemas.microsoft.com/office/drawing/2014/main" id="{00835E35-8E65-44CF-8DDF-174DC7F7F25D}"/>
+                <a16:creationId xmlns:a16="http://schemas.microsoft.com/office/drawing/2014/main" id="{C975BD27-685B-490C-9530-D0208E424E45}"/>
               </a:ext>
             </a:extLst>
           </p:cNvPr>
@@ -7344,7 +7344,7 @@
           <p:cNvPr id="17" name="TextBox 16">
             <a:extLst xmlns:a="http://schemas.openxmlformats.org/drawingml/2006/main">
               <a:ext uri="{FF2B5EF4-FFF2-40B4-BE49-F238E27FC236}">
-                <a16:creationId xmlns:a16="http://schemas.microsoft.com/office/drawing/2014/main" id="{01E299AE-51CC-4E91-9556-EA4520C7834A}"/>
+                <a16:creationId xmlns:a16="http://schemas.microsoft.com/office/drawing/2014/main" id="{B88BDC42-4E3F-4C78-971D-99B3F292D028}"/>
               </a:ext>
             </a:extLst>
           </p:cNvPr>
@@ -7391,7 +7391,7 @@
           <p:cNvPr id="18" name="Rounded Rectangle 17">
             <a:extLst xmlns:a="http://schemas.openxmlformats.org/drawingml/2006/main">
               <a:ext uri="{FF2B5EF4-FFF2-40B4-BE49-F238E27FC236}">
-                <a16:creationId xmlns:a16="http://schemas.microsoft.com/office/drawing/2014/main" id="{B8339178-6220-430F-9BD7-83058712F9B9}"/>
+                <a16:creationId xmlns:a16="http://schemas.microsoft.com/office/drawing/2014/main" id="{B50850AE-EF88-4A81-AEB5-CA5E79984000}"/>
               </a:ext>
             </a:extLst>
           </p:cNvPr>
@@ -7448,7 +7448,7 @@
           <p:cNvPr id="19" name="TextBox 18">
             <a:extLst xmlns:a="http://schemas.openxmlformats.org/drawingml/2006/main">
               <a:ext uri="{FF2B5EF4-FFF2-40B4-BE49-F238E27FC236}">
-                <a16:creationId xmlns:a16="http://schemas.microsoft.com/office/drawing/2014/main" id="{6475339B-06CC-4F4F-BA12-BC6455FD2D0C}"/>
+                <a16:creationId xmlns:a16="http://schemas.microsoft.com/office/drawing/2014/main" id="{2499D8A3-BE54-4D60-9BEB-EA568310667B}"/>
               </a:ext>
             </a:extLst>
           </p:cNvPr>
@@ -7495,7 +7495,7 @@
           <p:cNvPr id="20" name="TextBox 19">
             <a:extLst xmlns:a="http://schemas.openxmlformats.org/drawingml/2006/main">
               <a:ext uri="{FF2B5EF4-FFF2-40B4-BE49-F238E27FC236}">
-                <a16:creationId xmlns:a16="http://schemas.microsoft.com/office/drawing/2014/main" id="{6FF31657-696F-43DD-9AD9-08BA1076D150}"/>
+                <a16:creationId xmlns:a16="http://schemas.microsoft.com/office/drawing/2014/main" id="{CE42CFB7-3DA7-411C-9545-9052E983C936}"/>
               </a:ext>
             </a:extLst>
           </p:cNvPr>
@@ -7540,7 +7540,7 @@
     </p:spTree>
     <p:extLst>
       <p:ext uri="{BB962C8B-B14F-4D97-AF65-F5344CB8AC3E}">
-        <p14:creationId xmlns:p14="http://schemas.microsoft.com/office/powerpoint/2010/main" val="90213868"/>
+        <p14:creationId xmlns:p14="http://schemas.microsoft.com/office/powerpoint/2010/main" val="1955267742"/>
       </p:ext>
     </p:extLst>
   </p:cSld>
@@ -7564,7 +7564,7 @@
           <p:cNvPr id="2" name="TextBox 1">
             <a:extLst xmlns:a="http://schemas.openxmlformats.org/drawingml/2006/main">
               <a:ext uri="{FF2B5EF4-FFF2-40B4-BE49-F238E27FC236}">
-                <a16:creationId xmlns:a16="http://schemas.microsoft.com/office/drawing/2014/main" id="{EB6FC083-C9BA-4541-9D0D-79E046BCDFBC}"/>
+                <a16:creationId xmlns:a16="http://schemas.microsoft.com/office/drawing/2014/main" id="{45F8A69F-D474-447B-B2A8-CD3B75E905ED}"/>
               </a:ext>
             </a:extLst>
           </p:cNvPr>
@@ -7611,7 +7611,7 @@
           <p:cNvPr id="3" name="TextBox 2">
             <a:extLst xmlns:a="http://schemas.openxmlformats.org/drawingml/2006/main">
               <a:ext uri="{FF2B5EF4-FFF2-40B4-BE49-F238E27FC236}">
-                <a16:creationId xmlns:a16="http://schemas.microsoft.com/office/drawing/2014/main" id="{E1BD7C49-2014-4391-999E-34A3A4E30C92}"/>
+                <a16:creationId xmlns:a16="http://schemas.microsoft.com/office/drawing/2014/main" id="{4EDC7E89-0C0B-4F5E-9585-14BABA8955BB}"/>
               </a:ext>
             </a:extLst>
           </p:cNvPr>
@@ -7658,7 +7658,7 @@
           <p:cNvPr id="4" name="Rectangle 3">
             <a:extLst xmlns:a="http://schemas.openxmlformats.org/drawingml/2006/main">
               <a:ext uri="{FF2B5EF4-FFF2-40B4-BE49-F238E27FC236}">
-                <a16:creationId xmlns:a16="http://schemas.microsoft.com/office/drawing/2014/main" id="{5E35EC6D-FA4A-4376-BB67-A4988E6C2ACE}"/>
+                <a16:creationId xmlns:a16="http://schemas.microsoft.com/office/drawing/2014/main" id="{F6F0F1E9-9F86-4EAC-BE91-089F288D00E9}"/>
               </a:ext>
             </a:extLst>
           </p:cNvPr>
@@ -7713,7 +7713,7 @@
           <p:cNvPr id="5" name="Rectangle 4">
             <a:extLst xmlns:a="http://schemas.openxmlformats.org/drawingml/2006/main">
               <a:ext uri="{FF2B5EF4-FFF2-40B4-BE49-F238E27FC236}">
-                <a16:creationId xmlns:a16="http://schemas.microsoft.com/office/drawing/2014/main" id="{52330AFE-F678-4FE2-B2CE-1199802DEDE3}"/>
+                <a16:creationId xmlns:a16="http://schemas.microsoft.com/office/drawing/2014/main" id="{73593C71-533E-4B71-92D6-6B7E2C6F9CF4}"/>
               </a:ext>
             </a:extLst>
           </p:cNvPr>
@@ -7768,7 +7768,7 @@
           <p:cNvPr id="6" name="TextBox 5">
             <a:extLst xmlns:a="http://schemas.openxmlformats.org/drawingml/2006/main">
               <a:ext uri="{FF2B5EF4-FFF2-40B4-BE49-F238E27FC236}">
-                <a16:creationId xmlns:a16="http://schemas.microsoft.com/office/drawing/2014/main" id="{13DB3623-AA58-4FBF-8AE9-731ED11D013E}"/>
+                <a16:creationId xmlns:a16="http://schemas.microsoft.com/office/drawing/2014/main" id="{12C7A025-166F-41EE-B069-705DEED2B596}"/>
               </a:ext>
             </a:extLst>
           </p:cNvPr>
@@ -7805,7 +7805,7 @@
                 <a:ea typeface="Aptos"/>
                 <a:cs typeface="Aptos"/>
               </a:rPr>
-              <a:t>Independent public evidence summary · 2026.07.22-8 · 2026-07-22 · Sources: Evidence Register; WIPO IP valuation</a:t>
+              <a:t>Independent public evidence summary · 2026.07.22-9 · 2026-07-22 · Sources: Evidence Register; WIPO IP valuation</a:t>
             </a:r>
           </a:p>
         </p:txBody>
@@ -7815,7 +7815,7 @@
           <p:cNvPr id="7" name="TextBox 6">
             <a:extLst xmlns:a="http://schemas.openxmlformats.org/drawingml/2006/main">
               <a:ext uri="{FF2B5EF4-FFF2-40B4-BE49-F238E27FC236}">
-                <a16:creationId xmlns:a16="http://schemas.microsoft.com/office/drawing/2014/main" id="{CAE614BF-2DC9-4A36-9BF7-3DF16638BC61}"/>
+                <a16:creationId xmlns:a16="http://schemas.microsoft.com/office/drawing/2014/main" id="{7D55CEC4-E748-4D66-8C68-7153E08A9F2A}"/>
               </a:ext>
             </a:extLst>
           </p:cNvPr>
@@ -8302,7 +8302,7 @@
           <p:cNvPr id="9" name="TextBox 8">
             <a:extLst xmlns:a="http://schemas.openxmlformats.org/drawingml/2006/main">
               <a:ext uri="{FF2B5EF4-FFF2-40B4-BE49-F238E27FC236}">
-                <a16:creationId xmlns:a16="http://schemas.microsoft.com/office/drawing/2014/main" id="{2A026985-6BE3-4976-9E01-34BC9378E165}"/>
+                <a16:creationId xmlns:a16="http://schemas.microsoft.com/office/drawing/2014/main" id="{CF5D54D2-EBF5-48A9-AEB2-E9634399F324}"/>
               </a:ext>
             </a:extLst>
           </p:cNvPr>
@@ -8347,7 +8347,7 @@
     </p:spTree>
     <p:extLst>
       <p:ext uri="{BB962C8B-B14F-4D97-AF65-F5344CB8AC3E}">
-        <p14:creationId xmlns:p14="http://schemas.microsoft.com/office/powerpoint/2010/main" val="1422226103"/>
+        <p14:creationId xmlns:p14="http://schemas.microsoft.com/office/powerpoint/2010/main" val="1313280652"/>
       </p:ext>
     </p:extLst>
   </p:cSld>
@@ -8378,7 +8378,7 @@
           <p:cNvPr id="2" name="TextBox 1">
             <a:extLst xmlns:a="http://schemas.openxmlformats.org/drawingml/2006/main">
               <a:ext uri="{FF2B5EF4-FFF2-40B4-BE49-F238E27FC236}">
-                <a16:creationId xmlns:a16="http://schemas.microsoft.com/office/drawing/2014/main" id="{214094DC-D6EA-4764-B0B1-1C036AACB60C}"/>
+                <a16:creationId xmlns:a16="http://schemas.microsoft.com/office/drawing/2014/main" id="{931BF2D0-B564-465A-8FDE-BD8C8AFB7888}"/>
               </a:ext>
             </a:extLst>
           </p:cNvPr>
@@ -8425,7 +8425,7 @@
           <p:cNvPr id="3" name="TextBox 2">
             <a:extLst xmlns:a="http://schemas.openxmlformats.org/drawingml/2006/main">
               <a:ext uri="{FF2B5EF4-FFF2-40B4-BE49-F238E27FC236}">
-                <a16:creationId xmlns:a16="http://schemas.microsoft.com/office/drawing/2014/main" id="{E4730B95-3D6E-40B9-9180-0A506D6081FA}"/>
+                <a16:creationId xmlns:a16="http://schemas.microsoft.com/office/drawing/2014/main" id="{F6E4D08F-80EB-48AF-B260-339134B2785E}"/>
               </a:ext>
             </a:extLst>
           </p:cNvPr>
@@ -8472,7 +8472,7 @@
           <p:cNvPr id="4" name="TextBox 3">
             <a:extLst xmlns:a="http://schemas.openxmlformats.org/drawingml/2006/main">
               <a:ext uri="{FF2B5EF4-FFF2-40B4-BE49-F238E27FC236}">
-                <a16:creationId xmlns:a16="http://schemas.microsoft.com/office/drawing/2014/main" id="{9A6461B3-11DF-4FB5-A690-959C0F5BA5FE}"/>
+                <a16:creationId xmlns:a16="http://schemas.microsoft.com/office/drawing/2014/main" id="{5A2B246C-2C5F-4165-A276-4421ACBCDFA7}"/>
               </a:ext>
             </a:extLst>
           </p:cNvPr>
@@ -8591,7 +8591,7 @@
           <p:cNvPr id="5" name="TextBox 4">
             <a:extLst xmlns:a="http://schemas.openxmlformats.org/drawingml/2006/main">
               <a:ext uri="{FF2B5EF4-FFF2-40B4-BE49-F238E27FC236}">
-                <a16:creationId xmlns:a16="http://schemas.microsoft.com/office/drawing/2014/main" id="{E392CB45-3A9D-4DDB-8E37-FF7BA97E2DE9}"/>
+                <a16:creationId xmlns:a16="http://schemas.microsoft.com/office/drawing/2014/main" id="{41A48112-A672-458D-A5AD-FB19FF03355B}"/>
               </a:ext>
             </a:extLst>
           </p:cNvPr>
@@ -8628,7 +8628,7 @@
                 <a:ea typeface="Aptos"/>
                 <a:cs typeface="Aptos"/>
               </a:rPr>
-              <a:t>Version 2026.07.22-8 · 2026-07-22 · 6 / 6</a:t>
+              <a:t>Version 2026.07.22-9 · 2026-07-22 · 6 / 6</a:t>
             </a:r>
           </a:p>
         </p:txBody>
@@ -8636,7 +8636,7 @@
     </p:spTree>
     <p:extLst>
       <p:ext uri="{BB962C8B-B14F-4D97-AF65-F5344CB8AC3E}">
-        <p14:creationId xmlns:p14="http://schemas.microsoft.com/office/powerpoint/2010/main" val="1800708213"/>
+        <p14:creationId xmlns:p14="http://schemas.microsoft.com/office/powerpoint/2010/main" val="1606639561"/>
       </p:ext>
     </p:extLst>
   </p:cSld>

--- a/site/downloads/pixan-bank-deck-short-en.pptx
+++ b/site/downloads/pixan-bank-deck-short-en.pptx
@@ -2,18 +2,18 @@
 <file path=ppt/presentation.xml><?xml version="1.0" encoding="utf-8"?>
 <p:presentation xmlns:p="http://schemas.openxmlformats.org/presentationml/2006/main">
   <p:sldMasterIdLst>
-    <p:sldMasterId xmlns:r="http://schemas.openxmlformats.org/officeDocument/2006/relationships" id="2147483648" r:id="Rf528da79ce52438a"/>
+    <p:sldMasterId xmlns:r="http://schemas.openxmlformats.org/officeDocument/2006/relationships" id="2147483648" r:id="Rbd73139a5c0e41ba"/>
   </p:sldMasterIdLst>
   <p:notesMasterIdLst>
-    <p:notesMasterId xmlns:r="http://schemas.openxmlformats.org/officeDocument/2006/relationships" r:id="Ra30521dd1a1c431f"/>
+    <p:notesMasterId xmlns:r="http://schemas.openxmlformats.org/officeDocument/2006/relationships" r:id="Rd4fcf366c895476c"/>
   </p:notesMasterIdLst>
   <p:sldIdLst>
-    <p:sldId xmlns:r="http://schemas.openxmlformats.org/officeDocument/2006/relationships" id="256" r:id="Rbcc44debce8e4347"/>
-    <p:sldId xmlns:r="http://schemas.openxmlformats.org/officeDocument/2006/relationships" id="257" r:id="R893822e60fec419e"/>
-    <p:sldId xmlns:r="http://schemas.openxmlformats.org/officeDocument/2006/relationships" id="258" r:id="R47149a7f7a9d4b27"/>
-    <p:sldId xmlns:r="http://schemas.openxmlformats.org/officeDocument/2006/relationships" id="259" r:id="R84167868bd0c469d"/>
-    <p:sldId xmlns:r="http://schemas.openxmlformats.org/officeDocument/2006/relationships" id="260" r:id="R4bada82ab4224ec0"/>
-    <p:sldId xmlns:r="http://schemas.openxmlformats.org/officeDocument/2006/relationships" id="261" r:id="R4adb563756f948df"/>
+    <p:sldId xmlns:r="http://schemas.openxmlformats.org/officeDocument/2006/relationships" id="256" r:id="R12e6b2683f2b4be8"/>
+    <p:sldId xmlns:r="http://schemas.openxmlformats.org/officeDocument/2006/relationships" id="257" r:id="Refcd70a0d01d4dc3"/>
+    <p:sldId xmlns:r="http://schemas.openxmlformats.org/officeDocument/2006/relationships" id="258" r:id="R1e1db9843a134709"/>
+    <p:sldId xmlns:r="http://schemas.openxmlformats.org/officeDocument/2006/relationships" id="259" r:id="R76b5f1fa3e3942e5"/>
+    <p:sldId xmlns:r="http://schemas.openxmlformats.org/officeDocument/2006/relationships" id="260" r:id="R06278abcd9064d2a"/>
+    <p:sldId xmlns:r="http://schemas.openxmlformats.org/officeDocument/2006/relationships" id="261" r:id="R0e4d434499e44eb2"/>
   </p:sldIdLst>
   <p:sldSz cx="12191999" cy="6858000"/>
   <p:notesSz cx="6858000" cy="9144000"/>
@@ -938,7 +938,7 @@
           <p:cNvPr id="2" name="Title 1">
             <a:extLst xmlns:a="http://schemas.openxmlformats.org/drawingml/2006/main">
               <a:ext uri="{FF2B5EF4-FFF2-40B4-BE49-F238E27FC236}">
-                <a16:creationId xmlns:a16="http://schemas.microsoft.com/office/drawing/2014/main" id="{4D13879F-626F-4A62-B69D-E76CE0C6DE3A}"/>
+                <a16:creationId xmlns:a16="http://schemas.microsoft.com/office/drawing/2014/main" id="{B3DD249A-B478-4FD4-9EFD-DA8220D97A57}"/>
               </a:ext>
             </a:extLst>
           </p:cNvPr>
@@ -970,7 +970,7 @@
           <p:cNvPr id="3" name="Subtitle 2">
             <a:extLst xmlns:a="http://schemas.openxmlformats.org/drawingml/2006/main">
               <a:ext uri="{FF2B5EF4-FFF2-40B4-BE49-F238E27FC236}">
-                <a16:creationId xmlns:a16="http://schemas.microsoft.com/office/drawing/2014/main" id="{AC40EDFB-6DF6-4AF8-B545-13A4CAED9947}"/>
+                <a16:creationId xmlns:a16="http://schemas.microsoft.com/office/drawing/2014/main" id="{C8EE8BFB-2052-4B58-B840-A1EB5AD5CA7B}"/>
               </a:ext>
             </a:extLst>
           </p:cNvPr>
@@ -1093,7 +1093,7 @@
           <p:cNvPr id="4" name="Date Placeholder 3">
             <a:extLst xmlns:a="http://schemas.openxmlformats.org/drawingml/2006/main">
               <a:ext uri="{FF2B5EF4-FFF2-40B4-BE49-F238E27FC236}">
-                <a16:creationId xmlns:a16="http://schemas.microsoft.com/office/drawing/2014/main" id="{DD20F384-BCE5-4C10-B118-C5331475A1A4}"/>
+                <a16:creationId xmlns:a16="http://schemas.microsoft.com/office/drawing/2014/main" id="{5B5BA057-588C-462D-AE49-9B805A94CC2C}"/>
               </a:ext>
             </a:extLst>
           </p:cNvPr>
@@ -1120,7 +1120,7 @@
           <p:cNvPr id="5" name="Footer Placeholder 4">
             <a:extLst xmlns:a="http://schemas.openxmlformats.org/drawingml/2006/main">
               <a:ext uri="{FF2B5EF4-FFF2-40B4-BE49-F238E27FC236}">
-                <a16:creationId xmlns:a16="http://schemas.microsoft.com/office/drawing/2014/main" id="{CEF0A10A-2FAD-4722-855C-36FC71528D95}"/>
+                <a16:creationId xmlns:a16="http://schemas.microsoft.com/office/drawing/2014/main" id="{85C44C9E-A082-4F51-A792-1560CF66D2E0}"/>
               </a:ext>
             </a:extLst>
           </p:cNvPr>
@@ -1143,7 +1143,7 @@
           <p:cNvPr id="6" name="Slide Number Placeholder 5">
             <a:extLst xmlns:a="http://schemas.openxmlformats.org/drawingml/2006/main">
               <a:ext uri="{FF2B5EF4-FFF2-40B4-BE49-F238E27FC236}">
-                <a16:creationId xmlns:a16="http://schemas.microsoft.com/office/drawing/2014/main" id="{FBC0A956-3102-413F-8786-C7D4912B85B3}"/>
+                <a16:creationId xmlns:a16="http://schemas.microsoft.com/office/drawing/2014/main" id="{6203553D-7D51-4D92-9EA3-DBCDC14D4922}"/>
               </a:ext>
             </a:extLst>
           </p:cNvPr>
@@ -1187,7 +1187,7 @@
           <p:cNvPr id="2" name="Title 1">
             <a:extLst xmlns:a="http://schemas.openxmlformats.org/drawingml/2006/main">
               <a:ext uri="{FF2B5EF4-FFF2-40B4-BE49-F238E27FC236}">
-                <a16:creationId xmlns:a16="http://schemas.microsoft.com/office/drawing/2014/main" id="{5989B70F-87BD-4CA7-A8F2-D3D28537C475}"/>
+                <a16:creationId xmlns:a16="http://schemas.microsoft.com/office/drawing/2014/main" id="{A31E5958-4453-4976-9ABC-E958B589DF7B}"/>
               </a:ext>
             </a:extLst>
           </p:cNvPr>
@@ -1214,7 +1214,7 @@
           <p:cNvPr id="3" name="Vertical Text Placeholder 2">
             <a:extLst xmlns:a="http://schemas.openxmlformats.org/drawingml/2006/main">
               <a:ext uri="{FF2B5EF4-FFF2-40B4-BE49-F238E27FC236}">
-                <a16:creationId xmlns:a16="http://schemas.microsoft.com/office/drawing/2014/main" id="{CAE63CA5-2F0A-44E5-B414-CCCFEDA39532}"/>
+                <a16:creationId xmlns:a16="http://schemas.microsoft.com/office/drawing/2014/main" id="{ED123BAD-8403-4DE9-BE6E-68A9131E0500}"/>
               </a:ext>
             </a:extLst>
           </p:cNvPr>
@@ -1276,7 +1276,7 @@
           <p:cNvPr id="4" name="Date Placeholder 3">
             <a:extLst xmlns:a="http://schemas.openxmlformats.org/drawingml/2006/main">
               <a:ext uri="{FF2B5EF4-FFF2-40B4-BE49-F238E27FC236}">
-                <a16:creationId xmlns:a16="http://schemas.microsoft.com/office/drawing/2014/main" id="{0CC67EB3-BBFF-4464-B8BC-D188098149E4}"/>
+                <a16:creationId xmlns:a16="http://schemas.microsoft.com/office/drawing/2014/main" id="{D6C7CA43-6BCA-4B6A-9A3E-6F2108E67A24}"/>
               </a:ext>
             </a:extLst>
           </p:cNvPr>
@@ -1303,7 +1303,7 @@
           <p:cNvPr id="5" name="Footer Placeholder 4">
             <a:extLst xmlns:a="http://schemas.openxmlformats.org/drawingml/2006/main">
               <a:ext uri="{FF2B5EF4-FFF2-40B4-BE49-F238E27FC236}">
-                <a16:creationId xmlns:a16="http://schemas.microsoft.com/office/drawing/2014/main" id="{7D41E6AF-E16B-4ACE-9EC8-F32552C6ADC7}"/>
+                <a16:creationId xmlns:a16="http://schemas.microsoft.com/office/drawing/2014/main" id="{45586E2F-D23B-4A90-B08D-84F8E91F4A89}"/>
               </a:ext>
             </a:extLst>
           </p:cNvPr>
@@ -1326,7 +1326,7 @@
           <p:cNvPr id="6" name="Slide Number Placeholder 5">
             <a:extLst xmlns:a="http://schemas.openxmlformats.org/drawingml/2006/main">
               <a:ext uri="{FF2B5EF4-FFF2-40B4-BE49-F238E27FC236}">
-                <a16:creationId xmlns:a16="http://schemas.microsoft.com/office/drawing/2014/main" id="{BF299D5A-2D46-498E-B88D-DEFE6C8F3B2F}"/>
+                <a16:creationId xmlns:a16="http://schemas.microsoft.com/office/drawing/2014/main" id="{A01C8D6F-8D51-4979-B1DA-21B8F5257A9E}"/>
               </a:ext>
             </a:extLst>
           </p:cNvPr>
@@ -1370,7 +1370,7 @@
           <p:cNvPr id="2" name="Vertical Title 1">
             <a:extLst xmlns:a="http://schemas.openxmlformats.org/drawingml/2006/main">
               <a:ext uri="{FF2B5EF4-FFF2-40B4-BE49-F238E27FC236}">
-                <a16:creationId xmlns:a16="http://schemas.microsoft.com/office/drawing/2014/main" id="{42870529-2DC0-4C9C-B0D6-C0BFD3896BDA}"/>
+                <a16:creationId xmlns:a16="http://schemas.microsoft.com/office/drawing/2014/main" id="{B2C1DD69-4E2D-41E1-9885-ADDC7B21E4AE}"/>
               </a:ext>
             </a:extLst>
           </p:cNvPr>
@@ -1402,7 +1402,7 @@
           <p:cNvPr id="3" name="Vertical Text Placeholder 2">
             <a:extLst xmlns:a="http://schemas.openxmlformats.org/drawingml/2006/main">
               <a:ext uri="{FF2B5EF4-FFF2-40B4-BE49-F238E27FC236}">
-                <a16:creationId xmlns:a16="http://schemas.microsoft.com/office/drawing/2014/main" id="{54A6D5D5-BA07-4ADB-A476-A58230A7069B}"/>
+                <a16:creationId xmlns:a16="http://schemas.microsoft.com/office/drawing/2014/main" id="{D764CFC1-16CA-4F85-9CD9-539A8AF6927E}"/>
               </a:ext>
             </a:extLst>
           </p:cNvPr>
@@ -1469,7 +1469,7 @@
           <p:cNvPr id="4" name="Date Placeholder 3">
             <a:extLst xmlns:a="http://schemas.openxmlformats.org/drawingml/2006/main">
               <a:ext uri="{FF2B5EF4-FFF2-40B4-BE49-F238E27FC236}">
-                <a16:creationId xmlns:a16="http://schemas.microsoft.com/office/drawing/2014/main" id="{B99643EF-E106-44C0-BC4C-F222E935F5E4}"/>
+                <a16:creationId xmlns:a16="http://schemas.microsoft.com/office/drawing/2014/main" id="{577BF62C-7BDF-465F-8A89-8B1E4A74D8F5}"/>
               </a:ext>
             </a:extLst>
           </p:cNvPr>
@@ -1496,7 +1496,7 @@
           <p:cNvPr id="5" name="Footer Placeholder 4">
             <a:extLst xmlns:a="http://schemas.openxmlformats.org/drawingml/2006/main">
               <a:ext uri="{FF2B5EF4-FFF2-40B4-BE49-F238E27FC236}">
-                <a16:creationId xmlns:a16="http://schemas.microsoft.com/office/drawing/2014/main" id="{CEB33112-3B09-4AC2-8B1F-ED8116CAD2F6}"/>
+                <a16:creationId xmlns:a16="http://schemas.microsoft.com/office/drawing/2014/main" id="{4FC882BD-C2FA-4D19-BBEE-9F1B38CDDB10}"/>
               </a:ext>
             </a:extLst>
           </p:cNvPr>
@@ -1519,7 +1519,7 @@
           <p:cNvPr id="6" name="Slide Number Placeholder 5">
             <a:extLst xmlns:a="http://schemas.openxmlformats.org/drawingml/2006/main">
               <a:ext uri="{FF2B5EF4-FFF2-40B4-BE49-F238E27FC236}">
-                <a16:creationId xmlns:a16="http://schemas.microsoft.com/office/drawing/2014/main" id="{EC049F6D-2E8A-4B23-9462-1F6FAD541DA8}"/>
+                <a16:creationId xmlns:a16="http://schemas.microsoft.com/office/drawing/2014/main" id="{C4949CAD-B2AF-43D3-B0B3-9E13C332FDAF}"/>
               </a:ext>
             </a:extLst>
           </p:cNvPr>
@@ -1563,7 +1563,7 @@
           <p:cNvPr id="2" name="Title 1">
             <a:extLst xmlns:a="http://schemas.openxmlformats.org/drawingml/2006/main">
               <a:ext uri="{FF2B5EF4-FFF2-40B4-BE49-F238E27FC236}">
-                <a16:creationId xmlns:a16="http://schemas.microsoft.com/office/drawing/2014/main" id="{63F5CE0E-D04D-4A61-BB0D-80ACF6A4C90A}"/>
+                <a16:creationId xmlns:a16="http://schemas.microsoft.com/office/drawing/2014/main" id="{EAEB985E-B143-4393-BA7B-5E9B5DC3AF47}"/>
               </a:ext>
             </a:extLst>
           </p:cNvPr>
@@ -1590,7 +1590,7 @@
           <p:cNvPr id="3" name="Content Placeholder 2">
             <a:extLst xmlns:a="http://schemas.openxmlformats.org/drawingml/2006/main">
               <a:ext uri="{FF2B5EF4-FFF2-40B4-BE49-F238E27FC236}">
-                <a16:creationId xmlns:a16="http://schemas.microsoft.com/office/drawing/2014/main" id="{9ABCBA36-AA9D-49C2-8ED0-19F072435B44}"/>
+                <a16:creationId xmlns:a16="http://schemas.microsoft.com/office/drawing/2014/main" id="{46713EF8-D091-4FF1-A980-0512F9F5BDDF}"/>
               </a:ext>
             </a:extLst>
           </p:cNvPr>
@@ -1652,7 +1652,7 @@
           <p:cNvPr id="4" name="Date Placeholder 3">
             <a:extLst xmlns:a="http://schemas.openxmlformats.org/drawingml/2006/main">
               <a:ext uri="{FF2B5EF4-FFF2-40B4-BE49-F238E27FC236}">
-                <a16:creationId xmlns:a16="http://schemas.microsoft.com/office/drawing/2014/main" id="{6755B9DD-8A7A-4EA4-803B-ACADC3395680}"/>
+                <a16:creationId xmlns:a16="http://schemas.microsoft.com/office/drawing/2014/main" id="{B17C4C02-D79B-434B-ABF9-0455EC6517EB}"/>
               </a:ext>
             </a:extLst>
           </p:cNvPr>
@@ -1679,7 +1679,7 @@
           <p:cNvPr id="5" name="Footer Placeholder 4">
             <a:extLst xmlns:a="http://schemas.openxmlformats.org/drawingml/2006/main">
               <a:ext uri="{FF2B5EF4-FFF2-40B4-BE49-F238E27FC236}">
-                <a16:creationId xmlns:a16="http://schemas.microsoft.com/office/drawing/2014/main" id="{F3C3BCD5-9311-42AA-9182-55D4F957B721}"/>
+                <a16:creationId xmlns:a16="http://schemas.microsoft.com/office/drawing/2014/main" id="{2BC1EE98-1EAE-4F23-86F1-B254BE50D2A7}"/>
               </a:ext>
             </a:extLst>
           </p:cNvPr>
@@ -1702,7 +1702,7 @@
           <p:cNvPr id="6" name="Slide Number Placeholder 5">
             <a:extLst xmlns:a="http://schemas.openxmlformats.org/drawingml/2006/main">
               <a:ext uri="{FF2B5EF4-FFF2-40B4-BE49-F238E27FC236}">
-                <a16:creationId xmlns:a16="http://schemas.microsoft.com/office/drawing/2014/main" id="{2F2FCDC9-DD3D-4241-BA57-EB328A7FADD9}"/>
+                <a16:creationId xmlns:a16="http://schemas.microsoft.com/office/drawing/2014/main" id="{F933BF99-F6B6-403F-A5E5-5CFED1FC3C0D}"/>
               </a:ext>
             </a:extLst>
           </p:cNvPr>
@@ -1746,7 +1746,7 @@
           <p:cNvPr id="2" name="Title 1">
             <a:extLst xmlns:a="http://schemas.openxmlformats.org/drawingml/2006/main">
               <a:ext uri="{FF2B5EF4-FFF2-40B4-BE49-F238E27FC236}">
-                <a16:creationId xmlns:a16="http://schemas.microsoft.com/office/drawing/2014/main" id="{1EC236EB-D977-4EE7-B238-27488C6DD1C3}"/>
+                <a16:creationId xmlns:a16="http://schemas.microsoft.com/office/drawing/2014/main" id="{A671EA8D-054E-4DDC-B4E8-C0295C710983}"/>
               </a:ext>
             </a:extLst>
           </p:cNvPr>
@@ -1783,7 +1783,7 @@
           <p:cNvPr id="3" name="Text Placeholder 2">
             <a:extLst xmlns:a="http://schemas.openxmlformats.org/drawingml/2006/main">
               <a:ext uri="{FF2B5EF4-FFF2-40B4-BE49-F238E27FC236}">
-                <a16:creationId xmlns:a16="http://schemas.microsoft.com/office/drawing/2014/main" id="{51CC5855-5DED-49D8-B087-9223F5CB9EEE}"/>
+                <a16:creationId xmlns:a16="http://schemas.microsoft.com/office/drawing/2014/main" id="{7EC2BFB0-C304-4761-A30A-AFEA07C7645D}"/>
               </a:ext>
             </a:extLst>
           </p:cNvPr>
@@ -1909,7 +1909,7 @@
           <p:cNvPr id="4" name="Date Placeholder 3">
             <a:extLst xmlns:a="http://schemas.openxmlformats.org/drawingml/2006/main">
               <a:ext uri="{FF2B5EF4-FFF2-40B4-BE49-F238E27FC236}">
-                <a16:creationId xmlns:a16="http://schemas.microsoft.com/office/drawing/2014/main" id="{2FA58122-CE50-4781-A888-56C8262623DD}"/>
+                <a16:creationId xmlns:a16="http://schemas.microsoft.com/office/drawing/2014/main" id="{96E1A876-F228-44D2-87FA-598FB58187E4}"/>
               </a:ext>
             </a:extLst>
           </p:cNvPr>
@@ -1936,7 +1936,7 @@
           <p:cNvPr id="5" name="Footer Placeholder 4">
             <a:extLst xmlns:a="http://schemas.openxmlformats.org/drawingml/2006/main">
               <a:ext uri="{FF2B5EF4-FFF2-40B4-BE49-F238E27FC236}">
-                <a16:creationId xmlns:a16="http://schemas.microsoft.com/office/drawing/2014/main" id="{F8847F71-E5C9-464F-98BC-7F0D02CC1E62}"/>
+                <a16:creationId xmlns:a16="http://schemas.microsoft.com/office/drawing/2014/main" id="{B585BF48-DD8A-4B18-9A4B-AE614E73923A}"/>
               </a:ext>
             </a:extLst>
           </p:cNvPr>
@@ -1959,7 +1959,7 @@
           <p:cNvPr id="6" name="Slide Number Placeholder 5">
             <a:extLst xmlns:a="http://schemas.openxmlformats.org/drawingml/2006/main">
               <a:ext uri="{FF2B5EF4-FFF2-40B4-BE49-F238E27FC236}">
-                <a16:creationId xmlns:a16="http://schemas.microsoft.com/office/drawing/2014/main" id="{78FE34E3-A156-466E-B07A-852AC996AE72}"/>
+                <a16:creationId xmlns:a16="http://schemas.microsoft.com/office/drawing/2014/main" id="{91E5EF77-99C7-4BFF-B82F-98F4E71478BF}"/>
               </a:ext>
             </a:extLst>
           </p:cNvPr>
@@ -2003,7 +2003,7 @@
           <p:cNvPr id="2" name="Title 1">
             <a:extLst xmlns:a="http://schemas.openxmlformats.org/drawingml/2006/main">
               <a:ext uri="{FF2B5EF4-FFF2-40B4-BE49-F238E27FC236}">
-                <a16:creationId xmlns:a16="http://schemas.microsoft.com/office/drawing/2014/main" id="{83851FF2-6E35-4FFF-A9C6-6EC999CDAD15}"/>
+                <a16:creationId xmlns:a16="http://schemas.microsoft.com/office/drawing/2014/main" id="{CAA53049-941B-47CB-B9BD-7F8D87EF7C26}"/>
               </a:ext>
             </a:extLst>
           </p:cNvPr>
@@ -2030,7 +2030,7 @@
           <p:cNvPr id="3" name="Content Placeholder 2">
             <a:extLst xmlns:a="http://schemas.openxmlformats.org/drawingml/2006/main">
               <a:ext uri="{FF2B5EF4-FFF2-40B4-BE49-F238E27FC236}">
-                <a16:creationId xmlns:a16="http://schemas.microsoft.com/office/drawing/2014/main" id="{7A8A4BCA-43BE-4A60-A08A-5999C6D334AD}"/>
+                <a16:creationId xmlns:a16="http://schemas.microsoft.com/office/drawing/2014/main" id="{C83C0B3F-B190-4582-832D-4587BA70A6A9}"/>
               </a:ext>
             </a:extLst>
           </p:cNvPr>
@@ -2134,7 +2134,7 @@
           <p:cNvPr id="4" name="Content Placeholder 3">
             <a:extLst xmlns:a="http://schemas.openxmlformats.org/drawingml/2006/main">
               <a:ext uri="{FF2B5EF4-FFF2-40B4-BE49-F238E27FC236}">
-                <a16:creationId xmlns:a16="http://schemas.microsoft.com/office/drawing/2014/main" id="{D3FB2B58-4A1A-47BE-9667-E4F5ACB938CD}"/>
+                <a16:creationId xmlns:a16="http://schemas.microsoft.com/office/drawing/2014/main" id="{C8CDDC9E-E2A1-44FF-9876-38A378828916}"/>
               </a:ext>
             </a:extLst>
           </p:cNvPr>
@@ -2238,7 +2238,7 @@
           <p:cNvPr id="5" name="Date Placeholder 4">
             <a:extLst xmlns:a="http://schemas.openxmlformats.org/drawingml/2006/main">
               <a:ext uri="{FF2B5EF4-FFF2-40B4-BE49-F238E27FC236}">
-                <a16:creationId xmlns:a16="http://schemas.microsoft.com/office/drawing/2014/main" id="{F33514DF-9C27-4543-937B-817CD47CA1C9}"/>
+                <a16:creationId xmlns:a16="http://schemas.microsoft.com/office/drawing/2014/main" id="{40B9FF8F-7C01-4235-9069-EE61C9F8402C}"/>
               </a:ext>
             </a:extLst>
           </p:cNvPr>
@@ -2265,7 +2265,7 @@
           <p:cNvPr id="6" name="Footer Placeholder 5">
             <a:extLst xmlns:a="http://schemas.openxmlformats.org/drawingml/2006/main">
               <a:ext uri="{FF2B5EF4-FFF2-40B4-BE49-F238E27FC236}">
-                <a16:creationId xmlns:a16="http://schemas.microsoft.com/office/drawing/2014/main" id="{4E64F08A-4E76-4972-8115-2B85C8C136D8}"/>
+                <a16:creationId xmlns:a16="http://schemas.microsoft.com/office/drawing/2014/main" id="{637997F0-1F18-4C51-B334-370161252308}"/>
               </a:ext>
             </a:extLst>
           </p:cNvPr>
@@ -2288,7 +2288,7 @@
           <p:cNvPr id="7" name="Slide Number Placeholder 6">
             <a:extLst xmlns:a="http://schemas.openxmlformats.org/drawingml/2006/main">
               <a:ext uri="{FF2B5EF4-FFF2-40B4-BE49-F238E27FC236}">
-                <a16:creationId xmlns:a16="http://schemas.microsoft.com/office/drawing/2014/main" id="{208FEC53-C063-444A-B9B5-C7F5B2C5BDA7}"/>
+                <a16:creationId xmlns:a16="http://schemas.microsoft.com/office/drawing/2014/main" id="{8BCDB2FD-2DAB-4753-B1D2-B3AC76C200F6}"/>
               </a:ext>
             </a:extLst>
           </p:cNvPr>
@@ -2332,7 +2332,7 @@
           <p:cNvPr id="2" name="Title 1">
             <a:extLst xmlns:a="http://schemas.openxmlformats.org/drawingml/2006/main">
               <a:ext uri="{FF2B5EF4-FFF2-40B4-BE49-F238E27FC236}">
-                <a16:creationId xmlns:a16="http://schemas.microsoft.com/office/drawing/2014/main" id="{203208E7-942F-4C4E-AAF1-22CFA8F3C2BC}"/>
+                <a16:creationId xmlns:a16="http://schemas.microsoft.com/office/drawing/2014/main" id="{9D4DDBF1-A4EA-4AD9-8DA1-3C141B31C9E4}"/>
               </a:ext>
             </a:extLst>
           </p:cNvPr>
@@ -2364,7 +2364,7 @@
           <p:cNvPr id="3" name="Text Placeholder 2">
             <a:extLst xmlns:a="http://schemas.openxmlformats.org/drawingml/2006/main">
               <a:ext uri="{FF2B5EF4-FFF2-40B4-BE49-F238E27FC236}">
-                <a16:creationId xmlns:a16="http://schemas.microsoft.com/office/drawing/2014/main" id="{570688BF-AD70-4D41-977B-74D4D6720161}"/>
+                <a16:creationId xmlns:a16="http://schemas.microsoft.com/office/drawing/2014/main" id="{E46059DE-ADAB-493E-B20E-466AA36D9334}"/>
               </a:ext>
             </a:extLst>
           </p:cNvPr>
@@ -2436,7 +2436,7 @@
           <p:cNvPr id="4" name="Content Placeholder 3">
             <a:extLst xmlns:a="http://schemas.openxmlformats.org/drawingml/2006/main">
               <a:ext uri="{FF2B5EF4-FFF2-40B4-BE49-F238E27FC236}">
-                <a16:creationId xmlns:a16="http://schemas.microsoft.com/office/drawing/2014/main" id="{BAA5BBA8-E066-47C1-A4B0-C0F97E45AF11}"/>
+                <a16:creationId xmlns:a16="http://schemas.microsoft.com/office/drawing/2014/main" id="{525EBE74-AE6E-478C-A619-ED79DAFE86AB}"/>
               </a:ext>
             </a:extLst>
           </p:cNvPr>
@@ -2540,7 +2540,7 @@
           <p:cNvPr id="5" name="Text Placeholder 4">
             <a:extLst xmlns:a="http://schemas.openxmlformats.org/drawingml/2006/main">
               <a:ext uri="{FF2B5EF4-FFF2-40B4-BE49-F238E27FC236}">
-                <a16:creationId xmlns:a16="http://schemas.microsoft.com/office/drawing/2014/main" id="{14BA6B51-FA6B-44E0-95A2-7B9380B0B989}"/>
+                <a16:creationId xmlns:a16="http://schemas.microsoft.com/office/drawing/2014/main" id="{54E715C4-D895-4C02-860B-563839F61246}"/>
               </a:ext>
             </a:extLst>
           </p:cNvPr>
@@ -2612,7 +2612,7 @@
           <p:cNvPr id="6" name="Content Placeholder 5">
             <a:extLst xmlns:a="http://schemas.openxmlformats.org/drawingml/2006/main">
               <a:ext uri="{FF2B5EF4-FFF2-40B4-BE49-F238E27FC236}">
-                <a16:creationId xmlns:a16="http://schemas.microsoft.com/office/drawing/2014/main" id="{6D5FD611-2BBF-4C47-926E-E2A681CC21DD}"/>
+                <a16:creationId xmlns:a16="http://schemas.microsoft.com/office/drawing/2014/main" id="{E7E411F3-483A-4E11-8597-9AD52EDD539C}"/>
               </a:ext>
             </a:extLst>
           </p:cNvPr>
@@ -2716,7 +2716,7 @@
           <p:cNvPr id="7" name="Date Placeholder 6">
             <a:extLst xmlns:a="http://schemas.openxmlformats.org/drawingml/2006/main">
               <a:ext uri="{FF2B5EF4-FFF2-40B4-BE49-F238E27FC236}">
-                <a16:creationId xmlns:a16="http://schemas.microsoft.com/office/drawing/2014/main" id="{0EB9CB78-687D-48E6-806A-25679B727A93}"/>
+                <a16:creationId xmlns:a16="http://schemas.microsoft.com/office/drawing/2014/main" id="{ABC901E2-D8F6-4C13-A375-E48C7BBE4463}"/>
               </a:ext>
             </a:extLst>
           </p:cNvPr>
@@ -2743,7 +2743,7 @@
           <p:cNvPr id="8" name="Footer Placeholder 7">
             <a:extLst xmlns:a="http://schemas.openxmlformats.org/drawingml/2006/main">
               <a:ext uri="{FF2B5EF4-FFF2-40B4-BE49-F238E27FC236}">
-                <a16:creationId xmlns:a16="http://schemas.microsoft.com/office/drawing/2014/main" id="{353FA93A-9512-4734-A841-3AA3585DBEE4}"/>
+                <a16:creationId xmlns:a16="http://schemas.microsoft.com/office/drawing/2014/main" id="{9CE75E6D-13A9-4E9D-8332-A0BB10AE684C}"/>
               </a:ext>
             </a:extLst>
           </p:cNvPr>
@@ -2766,7 +2766,7 @@
           <p:cNvPr id="9" name="Slide Number Placeholder 8">
             <a:extLst xmlns:a="http://schemas.openxmlformats.org/drawingml/2006/main">
               <a:ext uri="{FF2B5EF4-FFF2-40B4-BE49-F238E27FC236}">
-                <a16:creationId xmlns:a16="http://schemas.microsoft.com/office/drawing/2014/main" id="{05FF34A3-7DEF-49F7-8B5E-C3C22221C381}"/>
+                <a16:creationId xmlns:a16="http://schemas.microsoft.com/office/drawing/2014/main" id="{8ACA2837-EEAD-4D61-AE1E-37101690D3FB}"/>
               </a:ext>
             </a:extLst>
           </p:cNvPr>
@@ -2810,7 +2810,7 @@
           <p:cNvPr id="2" name="Title 1">
             <a:extLst xmlns:a="http://schemas.openxmlformats.org/drawingml/2006/main">
               <a:ext uri="{FF2B5EF4-FFF2-40B4-BE49-F238E27FC236}">
-                <a16:creationId xmlns:a16="http://schemas.microsoft.com/office/drawing/2014/main" id="{FA3AF86C-95E8-487A-8A4B-5D995F01B425}"/>
+                <a16:creationId xmlns:a16="http://schemas.microsoft.com/office/drawing/2014/main" id="{9954A8A0-3C75-4CB5-9B35-50980A70F3A1}"/>
               </a:ext>
             </a:extLst>
           </p:cNvPr>
@@ -2837,7 +2837,7 @@
           <p:cNvPr id="3" name="Date Placeholder 2">
             <a:extLst xmlns:a="http://schemas.openxmlformats.org/drawingml/2006/main">
               <a:ext uri="{FF2B5EF4-FFF2-40B4-BE49-F238E27FC236}">
-                <a16:creationId xmlns:a16="http://schemas.microsoft.com/office/drawing/2014/main" id="{5A8B844D-D186-475B-AF92-F82C1D81FDB5}"/>
+                <a16:creationId xmlns:a16="http://schemas.microsoft.com/office/drawing/2014/main" id="{F004C029-B5DE-41F5-A5B8-90F82703A520}"/>
               </a:ext>
             </a:extLst>
           </p:cNvPr>
@@ -2864,7 +2864,7 @@
           <p:cNvPr id="4" name="Footer Placeholder 3">
             <a:extLst xmlns:a="http://schemas.openxmlformats.org/drawingml/2006/main">
               <a:ext uri="{FF2B5EF4-FFF2-40B4-BE49-F238E27FC236}">
-                <a16:creationId xmlns:a16="http://schemas.microsoft.com/office/drawing/2014/main" id="{D6A6DAAD-72B0-4812-965E-D2FBFC01AB69}"/>
+                <a16:creationId xmlns:a16="http://schemas.microsoft.com/office/drawing/2014/main" id="{77DE1465-8EBE-40FD-9697-DCD4D3E98396}"/>
               </a:ext>
             </a:extLst>
           </p:cNvPr>
@@ -2887,7 +2887,7 @@
           <p:cNvPr id="5" name="Slide Number Placeholder 4">
             <a:extLst xmlns:a="http://schemas.openxmlformats.org/drawingml/2006/main">
               <a:ext uri="{FF2B5EF4-FFF2-40B4-BE49-F238E27FC236}">
-                <a16:creationId xmlns:a16="http://schemas.microsoft.com/office/drawing/2014/main" id="{CE3462AB-1EE5-4902-9F0E-194028083A41}"/>
+                <a16:creationId xmlns:a16="http://schemas.microsoft.com/office/drawing/2014/main" id="{BA82DBF7-9E57-4C5A-9F7B-777D0B5BC11F}"/>
               </a:ext>
             </a:extLst>
           </p:cNvPr>
@@ -2931,7 +2931,7 @@
           <p:cNvPr id="2" name="Date Placeholder 1">
             <a:extLst xmlns:a="http://schemas.openxmlformats.org/drawingml/2006/main">
               <a:ext uri="{FF2B5EF4-FFF2-40B4-BE49-F238E27FC236}">
-                <a16:creationId xmlns:a16="http://schemas.microsoft.com/office/drawing/2014/main" id="{C4B67777-AB97-4359-B68A-4C7CAEFBE5FD}"/>
+                <a16:creationId xmlns:a16="http://schemas.microsoft.com/office/drawing/2014/main" id="{078D49F2-DF9C-4D95-ADC2-3CC1E4172B3A}"/>
               </a:ext>
             </a:extLst>
           </p:cNvPr>
@@ -2958,7 +2958,7 @@
           <p:cNvPr id="3" name="Footer Placeholder 2">
             <a:extLst xmlns:a="http://schemas.openxmlformats.org/drawingml/2006/main">
               <a:ext uri="{FF2B5EF4-FFF2-40B4-BE49-F238E27FC236}">
-                <a16:creationId xmlns:a16="http://schemas.microsoft.com/office/drawing/2014/main" id="{B957BA20-E01D-41D5-A29B-4D106E9164D3}"/>
+                <a16:creationId xmlns:a16="http://schemas.microsoft.com/office/drawing/2014/main" id="{9C57C159-3C8D-44B4-A767-09DC7F54D348}"/>
               </a:ext>
             </a:extLst>
           </p:cNvPr>
@@ -2981,7 +2981,7 @@
           <p:cNvPr id="4" name="Slide Number Placeholder 3">
             <a:extLst xmlns:a="http://schemas.openxmlformats.org/drawingml/2006/main">
               <a:ext uri="{FF2B5EF4-FFF2-40B4-BE49-F238E27FC236}">
-                <a16:creationId xmlns:a16="http://schemas.microsoft.com/office/drawing/2014/main" id="{00CB7944-A62F-42EC-977E-B67879161811}"/>
+                <a16:creationId xmlns:a16="http://schemas.microsoft.com/office/drawing/2014/main" id="{6520C707-DC7E-4E9F-901C-999D95D4BF4D}"/>
               </a:ext>
             </a:extLst>
           </p:cNvPr>
@@ -3025,7 +3025,7 @@
           <p:cNvPr id="2" name="Title 1">
             <a:extLst xmlns:a="http://schemas.openxmlformats.org/drawingml/2006/main">
               <a:ext uri="{FF2B5EF4-FFF2-40B4-BE49-F238E27FC236}">
-                <a16:creationId xmlns:a16="http://schemas.microsoft.com/office/drawing/2014/main" id="{F4272D63-CEE0-414D-94B1-2FAE231DBC14}"/>
+                <a16:creationId xmlns:a16="http://schemas.microsoft.com/office/drawing/2014/main" id="{486E587C-F680-4765-86D2-30717D1E8F5E}"/>
               </a:ext>
             </a:extLst>
           </p:cNvPr>
@@ -3062,7 +3062,7 @@
           <p:cNvPr id="3" name="Content Placeholder 2">
             <a:extLst xmlns:a="http://schemas.openxmlformats.org/drawingml/2006/main">
               <a:ext uri="{FF2B5EF4-FFF2-40B4-BE49-F238E27FC236}">
-                <a16:creationId xmlns:a16="http://schemas.microsoft.com/office/drawing/2014/main" id="{762DDF8E-A76F-46EE-9AE6-88EEFC8E117E}"/>
+                <a16:creationId xmlns:a16="http://schemas.microsoft.com/office/drawing/2014/main" id="{AD2DEF8B-E32C-47EE-BC3E-5ED2172CFC65}"/>
               </a:ext>
             </a:extLst>
           </p:cNvPr>
@@ -3166,7 +3166,7 @@
           <p:cNvPr id="4" name="Text Placeholder 3">
             <a:extLst xmlns:a="http://schemas.openxmlformats.org/drawingml/2006/main">
               <a:ext uri="{FF2B5EF4-FFF2-40B4-BE49-F238E27FC236}">
-                <a16:creationId xmlns:a16="http://schemas.microsoft.com/office/drawing/2014/main" id="{A156E65F-AD2B-470A-8946-E96FE692F6EC}"/>
+                <a16:creationId xmlns:a16="http://schemas.microsoft.com/office/drawing/2014/main" id="{2BBB9C0A-C415-41FD-B780-6E70DE85501A}"/>
               </a:ext>
             </a:extLst>
           </p:cNvPr>
@@ -3238,7 +3238,7 @@
           <p:cNvPr id="5" name="Date Placeholder 4">
             <a:extLst xmlns:a="http://schemas.openxmlformats.org/drawingml/2006/main">
               <a:ext uri="{FF2B5EF4-FFF2-40B4-BE49-F238E27FC236}">
-                <a16:creationId xmlns:a16="http://schemas.microsoft.com/office/drawing/2014/main" id="{F52BBD58-E938-4B8F-9153-9446104F10C5}"/>
+                <a16:creationId xmlns:a16="http://schemas.microsoft.com/office/drawing/2014/main" id="{42AEB680-CDC2-4677-9AC1-C5FEE225FB5B}"/>
               </a:ext>
             </a:extLst>
           </p:cNvPr>
@@ -3265,7 +3265,7 @@
           <p:cNvPr id="6" name="Footer Placeholder 5">
             <a:extLst xmlns:a="http://schemas.openxmlformats.org/drawingml/2006/main">
               <a:ext uri="{FF2B5EF4-FFF2-40B4-BE49-F238E27FC236}">
-                <a16:creationId xmlns:a16="http://schemas.microsoft.com/office/drawing/2014/main" id="{86D6727C-82C1-4C35-BD7B-DC3FA8576B04}"/>
+                <a16:creationId xmlns:a16="http://schemas.microsoft.com/office/drawing/2014/main" id="{876F8D54-025E-409F-9DFC-79CEEC893087}"/>
               </a:ext>
             </a:extLst>
           </p:cNvPr>
@@ -3288,7 +3288,7 @@
           <p:cNvPr id="7" name="Slide Number Placeholder 6">
             <a:extLst xmlns:a="http://schemas.openxmlformats.org/drawingml/2006/main">
               <a:ext uri="{FF2B5EF4-FFF2-40B4-BE49-F238E27FC236}">
-                <a16:creationId xmlns:a16="http://schemas.microsoft.com/office/drawing/2014/main" id="{574979CB-2483-4CE9-A0EF-D1BF4F64CA20}"/>
+                <a16:creationId xmlns:a16="http://schemas.microsoft.com/office/drawing/2014/main" id="{27856734-3642-4299-8FC0-191C5453699D}"/>
               </a:ext>
             </a:extLst>
           </p:cNvPr>
@@ -3332,7 +3332,7 @@
           <p:cNvPr id="2" name="Title 1">
             <a:extLst xmlns:a="http://schemas.openxmlformats.org/drawingml/2006/main">
               <a:ext uri="{FF2B5EF4-FFF2-40B4-BE49-F238E27FC236}">
-                <a16:creationId xmlns:a16="http://schemas.microsoft.com/office/drawing/2014/main" id="{979D5BB3-BCD4-4BA9-B742-7EC71E1ADBA0}"/>
+                <a16:creationId xmlns:a16="http://schemas.microsoft.com/office/drawing/2014/main" id="{9ADDBA91-FA60-458F-8DB3-33F4755EEA08}"/>
               </a:ext>
             </a:extLst>
           </p:cNvPr>
@@ -3369,7 +3369,7 @@
           <p:cNvPr id="3" name="Picture Placeholder 2">
             <a:extLst xmlns:a="http://schemas.openxmlformats.org/drawingml/2006/main">
               <a:ext uri="{FF2B5EF4-FFF2-40B4-BE49-F238E27FC236}">
-                <a16:creationId xmlns:a16="http://schemas.microsoft.com/office/drawing/2014/main" id="{0580563A-F6CA-49B5-B13A-ED49CB022091}"/>
+                <a16:creationId xmlns:a16="http://schemas.microsoft.com/office/drawing/2014/main" id="{E2EFB459-D552-469B-BF18-4E4758E9AC0C}"/>
               </a:ext>
             </a:extLst>
           </p:cNvPr>
@@ -3434,7 +3434,7 @@
           <p:cNvPr id="4" name="Text Placeholder 3">
             <a:extLst xmlns:a="http://schemas.openxmlformats.org/drawingml/2006/main">
               <a:ext uri="{FF2B5EF4-FFF2-40B4-BE49-F238E27FC236}">
-                <a16:creationId xmlns:a16="http://schemas.microsoft.com/office/drawing/2014/main" id="{0288E696-AD14-4AA6-8E75-A3A8B173D8EF}"/>
+                <a16:creationId xmlns:a16="http://schemas.microsoft.com/office/drawing/2014/main" id="{B8391B98-3DA5-4996-BD5A-E9147538EE7D}"/>
               </a:ext>
             </a:extLst>
           </p:cNvPr>
@@ -3506,7 +3506,7 @@
           <p:cNvPr id="5" name="Date Placeholder 4">
             <a:extLst xmlns:a="http://schemas.openxmlformats.org/drawingml/2006/main">
               <a:ext uri="{FF2B5EF4-FFF2-40B4-BE49-F238E27FC236}">
-                <a16:creationId xmlns:a16="http://schemas.microsoft.com/office/drawing/2014/main" id="{C9E75687-F240-4C38-9681-C681C46782D4}"/>
+                <a16:creationId xmlns:a16="http://schemas.microsoft.com/office/drawing/2014/main" id="{D34884D0-C75D-4E5C-A550-733A866A0860}"/>
               </a:ext>
             </a:extLst>
           </p:cNvPr>
@@ -3533,7 +3533,7 @@
           <p:cNvPr id="6" name="Footer Placeholder 5">
             <a:extLst xmlns:a="http://schemas.openxmlformats.org/drawingml/2006/main">
               <a:ext uri="{FF2B5EF4-FFF2-40B4-BE49-F238E27FC236}">
-                <a16:creationId xmlns:a16="http://schemas.microsoft.com/office/drawing/2014/main" id="{0332126B-3B4E-4C3B-8F8F-CA13BBB8D214}"/>
+                <a16:creationId xmlns:a16="http://schemas.microsoft.com/office/drawing/2014/main" id="{EC82E478-1B58-4923-A2DC-8010B2747173}"/>
               </a:ext>
             </a:extLst>
           </p:cNvPr>
@@ -3556,7 +3556,7 @@
           <p:cNvPr id="7" name="Slide Number Placeholder 6">
             <a:extLst xmlns:a="http://schemas.openxmlformats.org/drawingml/2006/main">
               <a:ext uri="{FF2B5EF4-FFF2-40B4-BE49-F238E27FC236}">
-                <a16:creationId xmlns:a16="http://schemas.microsoft.com/office/drawing/2014/main" id="{636A8153-2246-4E83-8EEB-A63ABC36125B}"/>
+                <a16:creationId xmlns:a16="http://schemas.microsoft.com/office/drawing/2014/main" id="{12594374-4D2C-4D81-ABC6-CA65D8A9A27C}"/>
               </a:ext>
             </a:extLst>
           </p:cNvPr>
@@ -3605,7 +3605,7 @@
           <p:cNvPr id="2" name="Title Placeholder 1">
             <a:extLst xmlns:a="http://schemas.openxmlformats.org/drawingml/2006/main">
               <a:ext uri="{FF2B5EF4-FFF2-40B4-BE49-F238E27FC236}">
-                <a16:creationId xmlns:a16="http://schemas.microsoft.com/office/drawing/2014/main" id="{3FF196DD-E358-426C-895F-016AF50D0DAC}"/>
+                <a16:creationId xmlns:a16="http://schemas.microsoft.com/office/drawing/2014/main" id="{7E286A80-1075-45D6-BE0A-F64C832B54DD}"/>
               </a:ext>
             </a:extLst>
           </p:cNvPr>
@@ -3642,7 +3642,7 @@
           <p:cNvPr id="3" name="Text Placeholder 2">
             <a:extLst xmlns:a="http://schemas.openxmlformats.org/drawingml/2006/main">
               <a:ext uri="{FF2B5EF4-FFF2-40B4-BE49-F238E27FC236}">
-                <a16:creationId xmlns:a16="http://schemas.microsoft.com/office/drawing/2014/main" id="{D80DBC08-DB36-42B4-B2E3-34AA894211BB}"/>
+                <a16:creationId xmlns:a16="http://schemas.microsoft.com/office/drawing/2014/main" id="{43CFA997-0AEB-452D-8BC4-E46B832701F3}"/>
               </a:ext>
             </a:extLst>
           </p:cNvPr>
@@ -3714,7 +3714,7 @@
           <p:cNvPr id="4" name="Date Placeholder 3">
             <a:extLst xmlns:a="http://schemas.openxmlformats.org/drawingml/2006/main">
               <a:ext uri="{FF2B5EF4-FFF2-40B4-BE49-F238E27FC236}">
-                <a16:creationId xmlns:a16="http://schemas.microsoft.com/office/drawing/2014/main" id="{0A9303B0-3B0E-468D-A929-3EE351A6FCB8}"/>
+                <a16:creationId xmlns:a16="http://schemas.microsoft.com/office/drawing/2014/main" id="{C934CD9D-3AB1-4125-AA9D-3E2DA886EAE4}"/>
               </a:ext>
             </a:extLst>
           </p:cNvPr>
@@ -3760,7 +3760,7 @@
           <p:cNvPr id="5" name="Footer Placeholder 4">
             <a:extLst xmlns:a="http://schemas.openxmlformats.org/drawingml/2006/main">
               <a:ext uri="{FF2B5EF4-FFF2-40B4-BE49-F238E27FC236}">
-                <a16:creationId xmlns:a16="http://schemas.microsoft.com/office/drawing/2014/main" id="{C95EC4F5-A516-43A4-8C20-8D1D261E4A28}"/>
+                <a16:creationId xmlns:a16="http://schemas.microsoft.com/office/drawing/2014/main" id="{0227A70B-897E-4766-853D-B41C8FBF6C11}"/>
               </a:ext>
             </a:extLst>
           </p:cNvPr>
@@ -3802,7 +3802,7 @@
           <p:cNvPr id="6" name="Slide Number Placeholder 5">
             <a:extLst xmlns:a="http://schemas.openxmlformats.org/drawingml/2006/main">
               <a:ext uri="{FF2B5EF4-FFF2-40B4-BE49-F238E27FC236}">
-                <a16:creationId xmlns:a16="http://schemas.microsoft.com/office/drawing/2014/main" id="{4A434B43-9528-45E8-B0B5-9C61EDB6698E}"/>
+                <a16:creationId xmlns:a16="http://schemas.microsoft.com/office/drawing/2014/main" id="{C74CF3EA-557E-48AC-AE00-0FE07B535F2E}"/>
               </a:ext>
             </a:extLst>
           </p:cNvPr>
@@ -3847,17 +3847,17 @@
   </p:cSld>
   <p:clrMap bg1="lt1" tx1="dk1" bg2="lt2" tx2="dk2" accent1="accent1" accent2="accent2" accent3="accent3" accent4="accent4" accent5="accent5" accent6="accent6" hlink="hlink" folHlink="folHlink"/>
   <p:sldLayoutIdLst>
-    <p:sldLayoutId xmlns:r="http://schemas.openxmlformats.org/officeDocument/2006/relationships" id="2147483649" r:id="Ra7cb2f64426545fc"/>
-    <p:sldLayoutId xmlns:r="http://schemas.openxmlformats.org/officeDocument/2006/relationships" id="2147483650" r:id="R64da783551574c22"/>
-    <p:sldLayoutId xmlns:r="http://schemas.openxmlformats.org/officeDocument/2006/relationships" id="2147483651" r:id="R43d64ba4fc5c4ec6"/>
-    <p:sldLayoutId xmlns:r="http://schemas.openxmlformats.org/officeDocument/2006/relationships" id="2147483652" r:id="R1a17a776f49747a0"/>
-    <p:sldLayoutId xmlns:r="http://schemas.openxmlformats.org/officeDocument/2006/relationships" id="2147483653" r:id="Rdee44365587c47a4"/>
-    <p:sldLayoutId xmlns:r="http://schemas.openxmlformats.org/officeDocument/2006/relationships" id="2147483654" r:id="R8d73caff7a134117"/>
-    <p:sldLayoutId xmlns:r="http://schemas.openxmlformats.org/officeDocument/2006/relationships" id="2147483655" r:id="Rdc5bd48eca8a4444"/>
-    <p:sldLayoutId xmlns:r="http://schemas.openxmlformats.org/officeDocument/2006/relationships" id="2147483656" r:id="Rd390f2fb42924241"/>
-    <p:sldLayoutId xmlns:r="http://schemas.openxmlformats.org/officeDocument/2006/relationships" id="2147483657" r:id="R98162967c2514973"/>
-    <p:sldLayoutId xmlns:r="http://schemas.openxmlformats.org/officeDocument/2006/relationships" id="2147483658" r:id="R76a3e1a14e2c41f8"/>
-    <p:sldLayoutId xmlns:r="http://schemas.openxmlformats.org/officeDocument/2006/relationships" id="2147483659" r:id="R0e9f9e31f4334b9c"/>
+    <p:sldLayoutId xmlns:r="http://schemas.openxmlformats.org/officeDocument/2006/relationships" id="2147483649" r:id="Rc728c456b9f544ae"/>
+    <p:sldLayoutId xmlns:r="http://schemas.openxmlformats.org/officeDocument/2006/relationships" id="2147483650" r:id="R29d592f2d46c48c1"/>
+    <p:sldLayoutId xmlns:r="http://schemas.openxmlformats.org/officeDocument/2006/relationships" id="2147483651" r:id="R630946af37e04ca5"/>
+    <p:sldLayoutId xmlns:r="http://schemas.openxmlformats.org/officeDocument/2006/relationships" id="2147483652" r:id="R2913747249844f10"/>
+    <p:sldLayoutId xmlns:r="http://schemas.openxmlformats.org/officeDocument/2006/relationships" id="2147483653" r:id="R8d2702ad5f8a4b68"/>
+    <p:sldLayoutId xmlns:r="http://schemas.openxmlformats.org/officeDocument/2006/relationships" id="2147483654" r:id="Rcff53d9c67714dda"/>
+    <p:sldLayoutId xmlns:r="http://schemas.openxmlformats.org/officeDocument/2006/relationships" id="2147483655" r:id="Re221b716230844d5"/>
+    <p:sldLayoutId xmlns:r="http://schemas.openxmlformats.org/officeDocument/2006/relationships" id="2147483656" r:id="Re09ed32a86cd4cf5"/>
+    <p:sldLayoutId xmlns:r="http://schemas.openxmlformats.org/officeDocument/2006/relationships" id="2147483657" r:id="Reb32572ddb654371"/>
+    <p:sldLayoutId xmlns:r="http://schemas.openxmlformats.org/officeDocument/2006/relationships" id="2147483658" r:id="R9d6fc4321caa45a8"/>
+    <p:sldLayoutId xmlns:r="http://schemas.openxmlformats.org/officeDocument/2006/relationships" id="2147483659" r:id="R2aa25080a54f45c3"/>
   </p:sldLayoutIdLst>
   <p:txStyles>
     <p:titleStyle>
@@ -4410,7 +4410,7 @@
           <p:cNvPr id="2" name="Rectangle 1">
             <a:extLst xmlns:a="http://schemas.openxmlformats.org/drawingml/2006/main">
               <a:ext uri="{FF2B5EF4-FFF2-40B4-BE49-F238E27FC236}">
-                <a16:creationId xmlns:a16="http://schemas.microsoft.com/office/drawing/2014/main" id="{8B37FBDA-6E72-47F6-BABF-C30967F62187}"/>
+                <a16:creationId xmlns:a16="http://schemas.microsoft.com/office/drawing/2014/main" id="{3A802FC1-DD42-40F7-882D-A4F10A5D4385}"/>
               </a:ext>
             </a:extLst>
           </p:cNvPr>
@@ -4465,7 +4465,7 @@
           <p:cNvPr id="3" name="TextBox 2">
             <a:extLst xmlns:a="http://schemas.openxmlformats.org/drawingml/2006/main">
               <a:ext uri="{FF2B5EF4-FFF2-40B4-BE49-F238E27FC236}">
-                <a16:creationId xmlns:a16="http://schemas.microsoft.com/office/drawing/2014/main" id="{3C9C3E62-CF55-4712-B5BE-D0B7BB8CCCEA}"/>
+                <a16:creationId xmlns:a16="http://schemas.microsoft.com/office/drawing/2014/main" id="{2F41E7E5-491E-4A97-AE6C-DDFCF62DA180}"/>
               </a:ext>
             </a:extLst>
           </p:cNvPr>
@@ -4512,7 +4512,7 @@
           <p:cNvPr id="4" name="TextBox 3">
             <a:extLst xmlns:a="http://schemas.openxmlformats.org/drawingml/2006/main">
               <a:ext uri="{FF2B5EF4-FFF2-40B4-BE49-F238E27FC236}">
-                <a16:creationId xmlns:a16="http://schemas.microsoft.com/office/drawing/2014/main" id="{3F2F84F5-CAB7-4300-A63C-FF5154B8BD5B}"/>
+                <a16:creationId xmlns:a16="http://schemas.microsoft.com/office/drawing/2014/main" id="{CC609B19-3EF3-4301-ACEA-94F0B28A4182}"/>
               </a:ext>
             </a:extLst>
           </p:cNvPr>
@@ -4580,7 +4580,7 @@
           <p:cNvPr id="5" name="TextBox 4">
             <a:extLst xmlns:a="http://schemas.openxmlformats.org/drawingml/2006/main">
               <a:ext uri="{FF2B5EF4-FFF2-40B4-BE49-F238E27FC236}">
-                <a16:creationId xmlns:a16="http://schemas.microsoft.com/office/drawing/2014/main" id="{BA35D780-FC7C-470A-976E-91AE51EBE492}"/>
+                <a16:creationId xmlns:a16="http://schemas.microsoft.com/office/drawing/2014/main" id="{E36EB339-34E8-4E64-B076-B7908F9F9D3B}"/>
               </a:ext>
             </a:extLst>
           </p:cNvPr>
@@ -4627,7 +4627,7 @@
           <p:cNvPr id="6" name="Rectangle 5">
             <a:extLst xmlns:a="http://schemas.openxmlformats.org/drawingml/2006/main">
               <a:ext uri="{FF2B5EF4-FFF2-40B4-BE49-F238E27FC236}">
-                <a16:creationId xmlns:a16="http://schemas.microsoft.com/office/drawing/2014/main" id="{8191FF0B-E65B-438D-AEE5-96076BD3F22A}"/>
+                <a16:creationId xmlns:a16="http://schemas.microsoft.com/office/drawing/2014/main" id="{F1266609-51AC-4AA2-B8ED-052D94A5ED81}"/>
               </a:ext>
             </a:extLst>
           </p:cNvPr>
@@ -4682,7 +4682,7 @@
           <p:cNvPr id="7" name="TextBox 6">
             <a:extLst xmlns:a="http://schemas.openxmlformats.org/drawingml/2006/main">
               <a:ext uri="{FF2B5EF4-FFF2-40B4-BE49-F238E27FC236}">
-                <a16:creationId xmlns:a16="http://schemas.microsoft.com/office/drawing/2014/main" id="{0555D7DB-2813-429A-B67D-15FEEAF5A7AE}"/>
+                <a16:creationId xmlns:a16="http://schemas.microsoft.com/office/drawing/2014/main" id="{A0AC0A77-102F-42DF-9483-EAA23A373449}"/>
               </a:ext>
             </a:extLst>
           </p:cNvPr>
@@ -4729,7 +4729,7 @@
           <p:cNvPr id="8" name="TextBox 7">
             <a:extLst xmlns:a="http://schemas.openxmlformats.org/drawingml/2006/main">
               <a:ext uri="{FF2B5EF4-FFF2-40B4-BE49-F238E27FC236}">
-                <a16:creationId xmlns:a16="http://schemas.microsoft.com/office/drawing/2014/main" id="{0684661C-FC81-4817-BA2A-201D043FE7FE}"/>
+                <a16:creationId xmlns:a16="http://schemas.microsoft.com/office/drawing/2014/main" id="{09859C1D-9383-4317-AF2D-85985F71E035}"/>
               </a:ext>
             </a:extLst>
           </p:cNvPr>
@@ -4766,7 +4766,7 @@
                 <a:ea typeface="Aptos"/>
                 <a:cs typeface="Aptos"/>
               </a:rPr>
-              <a:t>2026.07.22-9</a:t>
+              <a:t>2026.07.23-10</a:t>
             </a:r>
           </a:p>
         </p:txBody>
@@ -4776,7 +4776,7 @@
           <p:cNvPr id="9" name="TextBox 8">
             <a:extLst xmlns:a="http://schemas.openxmlformats.org/drawingml/2006/main">
               <a:ext uri="{FF2B5EF4-FFF2-40B4-BE49-F238E27FC236}">
-                <a16:creationId xmlns:a16="http://schemas.microsoft.com/office/drawing/2014/main" id="{5DBB9FEE-84A2-41AF-8D3E-695D61DDFA3F}"/>
+                <a16:creationId xmlns:a16="http://schemas.microsoft.com/office/drawing/2014/main" id="{C5618F25-16BD-409D-979D-43321B5460D4}"/>
               </a:ext>
             </a:extLst>
           </p:cNvPr>
@@ -4844,7 +4844,7 @@
           <p:cNvPr id="10" name="TextBox 9">
             <a:extLst xmlns:a="http://schemas.openxmlformats.org/drawingml/2006/main">
               <a:ext uri="{FF2B5EF4-FFF2-40B4-BE49-F238E27FC236}">
-                <a16:creationId xmlns:a16="http://schemas.microsoft.com/office/drawing/2014/main" id="{263D2CDC-3493-4A4F-8419-8058FF27858D}"/>
+                <a16:creationId xmlns:a16="http://schemas.microsoft.com/office/drawing/2014/main" id="{8D7FF5CD-5DC8-4683-BF04-635BA754A745}"/>
               </a:ext>
             </a:extLst>
           </p:cNvPr>
@@ -4891,7 +4891,7 @@
           <p:cNvPr id="11" name="TextBox 10">
             <a:extLst xmlns:a="http://schemas.openxmlformats.org/drawingml/2006/main">
               <a:ext uri="{FF2B5EF4-FFF2-40B4-BE49-F238E27FC236}">
-                <a16:creationId xmlns:a16="http://schemas.microsoft.com/office/drawing/2014/main" id="{37248C4F-88E1-445A-8445-1847481D8FF9}"/>
+                <a16:creationId xmlns:a16="http://schemas.microsoft.com/office/drawing/2014/main" id="{F9593B6C-5399-4D03-9248-D50D68285725}"/>
               </a:ext>
             </a:extLst>
           </p:cNvPr>
@@ -4938,7 +4938,7 @@
           <p:cNvPr id="12" name="TextBox 11">
             <a:extLst xmlns:a="http://schemas.openxmlformats.org/drawingml/2006/main">
               <a:ext uri="{FF2B5EF4-FFF2-40B4-BE49-F238E27FC236}">
-                <a16:creationId xmlns:a16="http://schemas.microsoft.com/office/drawing/2014/main" id="{732496F6-EDEA-467E-8BB2-90DED9DAF54E}"/>
+                <a16:creationId xmlns:a16="http://schemas.microsoft.com/office/drawing/2014/main" id="{4E64A404-A657-4747-B8EC-2293B4E56B5D}"/>
               </a:ext>
             </a:extLst>
           </p:cNvPr>
@@ -4983,7 +4983,7 @@
     </p:spTree>
     <p:extLst>
       <p:ext uri="{BB962C8B-B14F-4D97-AF65-F5344CB8AC3E}">
-        <p14:creationId xmlns:p14="http://schemas.microsoft.com/office/powerpoint/2010/main" val="28822536"/>
+        <p14:creationId xmlns:p14="http://schemas.microsoft.com/office/powerpoint/2010/main" val="1938237846"/>
       </p:ext>
     </p:extLst>
   </p:cSld>
@@ -5007,7 +5007,7 @@
           <p:cNvPr id="2" name="TextBox 1">
             <a:extLst xmlns:a="http://schemas.openxmlformats.org/drawingml/2006/main">
               <a:ext uri="{FF2B5EF4-FFF2-40B4-BE49-F238E27FC236}">
-                <a16:creationId xmlns:a16="http://schemas.microsoft.com/office/drawing/2014/main" id="{CC007704-345F-436F-A363-451E04055149}"/>
+                <a16:creationId xmlns:a16="http://schemas.microsoft.com/office/drawing/2014/main" id="{919E7138-22D0-4A43-902D-3362EB82BAF4}"/>
               </a:ext>
             </a:extLst>
           </p:cNvPr>
@@ -5054,7 +5054,7 @@
           <p:cNvPr id="3" name="TextBox 2">
             <a:extLst xmlns:a="http://schemas.openxmlformats.org/drawingml/2006/main">
               <a:ext uri="{FF2B5EF4-FFF2-40B4-BE49-F238E27FC236}">
-                <a16:creationId xmlns:a16="http://schemas.microsoft.com/office/drawing/2014/main" id="{01011576-CB50-4141-A614-1116447C4BAB}"/>
+                <a16:creationId xmlns:a16="http://schemas.microsoft.com/office/drawing/2014/main" id="{B3047D91-2D04-4767-86EB-A86A7A5E2C8F}"/>
               </a:ext>
             </a:extLst>
           </p:cNvPr>
@@ -5101,7 +5101,7 @@
           <p:cNvPr id="4" name="Rectangle 3">
             <a:extLst xmlns:a="http://schemas.openxmlformats.org/drawingml/2006/main">
               <a:ext uri="{FF2B5EF4-FFF2-40B4-BE49-F238E27FC236}">
-                <a16:creationId xmlns:a16="http://schemas.microsoft.com/office/drawing/2014/main" id="{E32ED0BA-7EEA-4684-861B-4478577A88C5}"/>
+                <a16:creationId xmlns:a16="http://schemas.microsoft.com/office/drawing/2014/main" id="{F1F9DF7F-035E-45C9-8502-2DB4BFEB638C}"/>
               </a:ext>
             </a:extLst>
           </p:cNvPr>
@@ -5156,7 +5156,7 @@
           <p:cNvPr id="5" name="Rectangle 4">
             <a:extLst xmlns:a="http://schemas.openxmlformats.org/drawingml/2006/main">
               <a:ext uri="{FF2B5EF4-FFF2-40B4-BE49-F238E27FC236}">
-                <a16:creationId xmlns:a16="http://schemas.microsoft.com/office/drawing/2014/main" id="{DBB0D292-4C5C-412C-8B7C-4E4015C33590}"/>
+                <a16:creationId xmlns:a16="http://schemas.microsoft.com/office/drawing/2014/main" id="{A33AF9FF-B92D-4B13-B21B-3652995735CE}"/>
               </a:ext>
             </a:extLst>
           </p:cNvPr>
@@ -5211,7 +5211,7 @@
           <p:cNvPr id="6" name="TextBox 5">
             <a:extLst xmlns:a="http://schemas.openxmlformats.org/drawingml/2006/main">
               <a:ext uri="{FF2B5EF4-FFF2-40B4-BE49-F238E27FC236}">
-                <a16:creationId xmlns:a16="http://schemas.microsoft.com/office/drawing/2014/main" id="{6911CC37-0A64-4C12-808E-BAC787C18D70}"/>
+                <a16:creationId xmlns:a16="http://schemas.microsoft.com/office/drawing/2014/main" id="{CD24E779-5A34-4ABD-A272-802C0C0F0BEB}"/>
               </a:ext>
             </a:extLst>
           </p:cNvPr>
@@ -5248,7 +5248,7 @@
                 <a:ea typeface="Aptos"/>
                 <a:cs typeface="Aptos"/>
               </a:rPr>
-              <a:t>Independent public evidence summary · 2026.07.22-9 · 2026-07-22 · Sources: EPO; Germany — official judgments; WIPO</a:t>
+              <a:t>Independent public evidence summary · 2026.07.23-10 · 2026-07-22 · Sources: EPO; Germany — official judgments; WIPO</a:t>
             </a:r>
           </a:p>
         </p:txBody>
@@ -5258,7 +5258,7 @@
           <p:cNvPr id="7" name="TextBox 6">
             <a:extLst xmlns:a="http://schemas.openxmlformats.org/drawingml/2006/main">
               <a:ext uri="{FF2B5EF4-FFF2-40B4-BE49-F238E27FC236}">
-                <a16:creationId xmlns:a16="http://schemas.microsoft.com/office/drawing/2014/main" id="{3B5FC97A-5D32-4DF7-8BEE-67013ECF8E60}"/>
+                <a16:creationId xmlns:a16="http://schemas.microsoft.com/office/drawing/2014/main" id="{0A0F4D25-34AD-4E7C-AB78-8CFFADDA7E11}"/>
               </a:ext>
             </a:extLst>
           </p:cNvPr>
@@ -5305,7 +5305,7 @@
           <p:cNvPr id="8" name="TextBox 7">
             <a:extLst xmlns:a="http://schemas.openxmlformats.org/drawingml/2006/main">
               <a:ext uri="{FF2B5EF4-FFF2-40B4-BE49-F238E27FC236}">
-                <a16:creationId xmlns:a16="http://schemas.microsoft.com/office/drawing/2014/main" id="{45FD80B2-C052-480D-BF7C-67BFCCB0FB8D}"/>
+                <a16:creationId xmlns:a16="http://schemas.microsoft.com/office/drawing/2014/main" id="{1A0AF63C-21FA-4092-B1AC-D1291AEEF601}"/>
               </a:ext>
             </a:extLst>
           </p:cNvPr>
@@ -5352,7 +5352,7 @@
           <p:cNvPr id="9" name="TextBox 8">
             <a:extLst xmlns:a="http://schemas.openxmlformats.org/drawingml/2006/main">
               <a:ext uri="{FF2B5EF4-FFF2-40B4-BE49-F238E27FC236}">
-                <a16:creationId xmlns:a16="http://schemas.microsoft.com/office/drawing/2014/main" id="{667A4BBE-AB15-4F44-81B1-445D2FB1A10B}"/>
+                <a16:creationId xmlns:a16="http://schemas.microsoft.com/office/drawing/2014/main" id="{B5241BC5-3ED8-4EC8-AADC-3DD4CFD2767C}"/>
               </a:ext>
             </a:extLst>
           </p:cNvPr>
@@ -5449,7 +5449,7 @@
           <p:cNvPr id="10" name="Rounded Rectangle 9">
             <a:extLst xmlns:a="http://schemas.openxmlformats.org/drawingml/2006/main">
               <a:ext uri="{FF2B5EF4-FFF2-40B4-BE49-F238E27FC236}">
-                <a16:creationId xmlns:a16="http://schemas.microsoft.com/office/drawing/2014/main" id="{126EC1F1-3786-4B93-91DE-EB251CF8E870}"/>
+                <a16:creationId xmlns:a16="http://schemas.microsoft.com/office/drawing/2014/main" id="{B1438402-381B-4AAD-9676-85A4DD63DE4B}"/>
               </a:ext>
             </a:extLst>
           </p:cNvPr>
@@ -5506,7 +5506,7 @@
           <p:cNvPr id="11" name="TextBox 10">
             <a:extLst xmlns:a="http://schemas.openxmlformats.org/drawingml/2006/main">
               <a:ext uri="{FF2B5EF4-FFF2-40B4-BE49-F238E27FC236}">
-                <a16:creationId xmlns:a16="http://schemas.microsoft.com/office/drawing/2014/main" id="{8D43D07A-CF04-4B1F-AA18-62F06D459428}"/>
+                <a16:creationId xmlns:a16="http://schemas.microsoft.com/office/drawing/2014/main" id="{108BE035-9AC2-43F4-9DF3-E1F47F20DC2D}"/>
               </a:ext>
             </a:extLst>
           </p:cNvPr>
@@ -5553,7 +5553,7 @@
           <p:cNvPr id="12" name="TextBox 11">
             <a:extLst xmlns:a="http://schemas.openxmlformats.org/drawingml/2006/main">
               <a:ext uri="{FF2B5EF4-FFF2-40B4-BE49-F238E27FC236}">
-                <a16:creationId xmlns:a16="http://schemas.microsoft.com/office/drawing/2014/main" id="{8FCB24E3-EFCF-463D-885B-1128519822B0}"/>
+                <a16:creationId xmlns:a16="http://schemas.microsoft.com/office/drawing/2014/main" id="{D6C38CB4-B4E2-430C-BC1E-D49DA5ED5712}"/>
               </a:ext>
             </a:extLst>
           </p:cNvPr>
@@ -5598,7 +5598,7 @@
     </p:spTree>
     <p:extLst>
       <p:ext uri="{BB962C8B-B14F-4D97-AF65-F5344CB8AC3E}">
-        <p14:creationId xmlns:p14="http://schemas.microsoft.com/office/powerpoint/2010/main" val="1197376623"/>
+        <p14:creationId xmlns:p14="http://schemas.microsoft.com/office/powerpoint/2010/main" val="592291305"/>
       </p:ext>
     </p:extLst>
   </p:cSld>
@@ -5622,7 +5622,7 @@
           <p:cNvPr id="2" name="TextBox 1">
             <a:extLst xmlns:a="http://schemas.openxmlformats.org/drawingml/2006/main">
               <a:ext uri="{FF2B5EF4-FFF2-40B4-BE49-F238E27FC236}">
-                <a16:creationId xmlns:a16="http://schemas.microsoft.com/office/drawing/2014/main" id="{DA07926C-6A6B-46CC-9468-A0D8D6FF423E}"/>
+                <a16:creationId xmlns:a16="http://schemas.microsoft.com/office/drawing/2014/main" id="{2A44A638-96B0-4A07-87B7-BB6B394805B1}"/>
               </a:ext>
             </a:extLst>
           </p:cNvPr>
@@ -5669,7 +5669,7 @@
           <p:cNvPr id="3" name="TextBox 2">
             <a:extLst xmlns:a="http://schemas.openxmlformats.org/drawingml/2006/main">
               <a:ext uri="{FF2B5EF4-FFF2-40B4-BE49-F238E27FC236}">
-                <a16:creationId xmlns:a16="http://schemas.microsoft.com/office/drawing/2014/main" id="{0C92FEA0-CC96-4D40-A0CE-14A6C77C759B}"/>
+                <a16:creationId xmlns:a16="http://schemas.microsoft.com/office/drawing/2014/main" id="{5CFC33C6-740C-4AFB-B44C-24C65963B123}"/>
               </a:ext>
             </a:extLst>
           </p:cNvPr>
@@ -5716,7 +5716,7 @@
           <p:cNvPr id="4" name="Rectangle 3">
             <a:extLst xmlns:a="http://schemas.openxmlformats.org/drawingml/2006/main">
               <a:ext uri="{FF2B5EF4-FFF2-40B4-BE49-F238E27FC236}">
-                <a16:creationId xmlns:a16="http://schemas.microsoft.com/office/drawing/2014/main" id="{CC67173B-44C1-48F6-98A1-4AB1492F9713}"/>
+                <a16:creationId xmlns:a16="http://schemas.microsoft.com/office/drawing/2014/main" id="{81574271-502F-47E1-8976-A2CDAA299D6B}"/>
               </a:ext>
             </a:extLst>
           </p:cNvPr>
@@ -5771,7 +5771,7 @@
           <p:cNvPr id="5" name="Rectangle 4">
             <a:extLst xmlns:a="http://schemas.openxmlformats.org/drawingml/2006/main">
               <a:ext uri="{FF2B5EF4-FFF2-40B4-BE49-F238E27FC236}">
-                <a16:creationId xmlns:a16="http://schemas.microsoft.com/office/drawing/2014/main" id="{F771ED69-3219-4D37-A75D-24E990614A90}"/>
+                <a16:creationId xmlns:a16="http://schemas.microsoft.com/office/drawing/2014/main" id="{20EA3862-2E07-49EA-9213-61FB411FA095}"/>
               </a:ext>
             </a:extLst>
           </p:cNvPr>
@@ -5826,7 +5826,7 @@
           <p:cNvPr id="6" name="TextBox 5">
             <a:extLst xmlns:a="http://schemas.openxmlformats.org/drawingml/2006/main">
               <a:ext uri="{FF2B5EF4-FFF2-40B4-BE49-F238E27FC236}">
-                <a16:creationId xmlns:a16="http://schemas.microsoft.com/office/drawing/2014/main" id="{BFF47B25-34C6-44B4-B340-394B03FDA063}"/>
+                <a16:creationId xmlns:a16="http://schemas.microsoft.com/office/drawing/2014/main" id="{2D711961-EF14-4778-BE07-F026DD717C95}"/>
               </a:ext>
             </a:extLst>
           </p:cNvPr>
@@ -5863,7 +5863,7 @@
                 <a:ea typeface="Aptos"/>
                 <a:cs typeface="Aptos"/>
               </a:rPr>
-              <a:t>Independent public evidence summary · 2026.07.22-9 · 2026-07-22 · Sources: EPO Register; EP3032975B2; 8 Ni 18/24 (EP); 7 O 3341/24</a:t>
+              <a:t>Independent public evidence summary · 2026.07.23-10 · 2026-07-22 · Sources: EPO Register; EP3032975B2; 8 Ni 18/24 (EP); 7 O 3341/24</a:t>
             </a:r>
           </a:p>
         </p:txBody>
@@ -5873,7 +5873,7 @@
           <p:cNvPr id="7" name="TextBox 6">
             <a:extLst xmlns:a="http://schemas.openxmlformats.org/drawingml/2006/main">
               <a:ext uri="{FF2B5EF4-FFF2-40B4-BE49-F238E27FC236}">
-                <a16:creationId xmlns:a16="http://schemas.microsoft.com/office/drawing/2014/main" id="{282B918C-8A28-45CD-9F59-94DDE3518754}"/>
+                <a16:creationId xmlns:a16="http://schemas.microsoft.com/office/drawing/2014/main" id="{A64C8169-10FC-45CE-A2BB-9B638BB9E399}"/>
               </a:ext>
             </a:extLst>
           </p:cNvPr>
@@ -5920,7 +5920,7 @@
           <p:cNvPr id="8" name="Rounded Rectangle 7">
             <a:extLst xmlns:a="http://schemas.openxmlformats.org/drawingml/2006/main">
               <a:ext uri="{FF2B5EF4-FFF2-40B4-BE49-F238E27FC236}">
-                <a16:creationId xmlns:a16="http://schemas.microsoft.com/office/drawing/2014/main" id="{F780F7D8-2D7D-4E26-90DA-A58D11FA8C51}"/>
+                <a16:creationId xmlns:a16="http://schemas.microsoft.com/office/drawing/2014/main" id="{8B8B9891-D724-4DB8-8244-539A8919496A}"/>
               </a:ext>
             </a:extLst>
           </p:cNvPr>
@@ -5977,7 +5977,7 @@
           <p:cNvPr id="9" name="TextBox 8">
             <a:extLst xmlns:a="http://schemas.openxmlformats.org/drawingml/2006/main">
               <a:ext uri="{FF2B5EF4-FFF2-40B4-BE49-F238E27FC236}">
-                <a16:creationId xmlns:a16="http://schemas.microsoft.com/office/drawing/2014/main" id="{9E006B2A-2E3E-4AEB-8EE6-DF5F91EBCFCA}"/>
+                <a16:creationId xmlns:a16="http://schemas.microsoft.com/office/drawing/2014/main" id="{0925C8EF-F62A-4275-A6B7-1CC129C5F91C}"/>
               </a:ext>
             </a:extLst>
           </p:cNvPr>
@@ -6024,7 +6024,7 @@
           <p:cNvPr id="10" name="TextBox 9">
             <a:extLst xmlns:a="http://schemas.openxmlformats.org/drawingml/2006/main">
               <a:ext uri="{FF2B5EF4-FFF2-40B4-BE49-F238E27FC236}">
-                <a16:creationId xmlns:a16="http://schemas.microsoft.com/office/drawing/2014/main" id="{2515E939-DC0E-465A-AD1D-238625394CF3}"/>
+                <a16:creationId xmlns:a16="http://schemas.microsoft.com/office/drawing/2014/main" id="{6D039891-5AAC-43AC-8074-CE6992596835}"/>
               </a:ext>
             </a:extLst>
           </p:cNvPr>
@@ -6071,7 +6071,7 @@
           <p:cNvPr id="11" name="Rounded Rectangle 10">
             <a:extLst xmlns:a="http://schemas.openxmlformats.org/drawingml/2006/main">
               <a:ext uri="{FF2B5EF4-FFF2-40B4-BE49-F238E27FC236}">
-                <a16:creationId xmlns:a16="http://schemas.microsoft.com/office/drawing/2014/main" id="{A64A3BF0-47F9-4DD9-84D3-1220ADE88C65}"/>
+                <a16:creationId xmlns:a16="http://schemas.microsoft.com/office/drawing/2014/main" id="{94F3168C-B480-421E-B0E9-8FD27D28910E}"/>
               </a:ext>
             </a:extLst>
           </p:cNvPr>
@@ -6128,7 +6128,7 @@
           <p:cNvPr id="12" name="TextBox 11">
             <a:extLst xmlns:a="http://schemas.openxmlformats.org/drawingml/2006/main">
               <a:ext uri="{FF2B5EF4-FFF2-40B4-BE49-F238E27FC236}">
-                <a16:creationId xmlns:a16="http://schemas.microsoft.com/office/drawing/2014/main" id="{4B72C06C-62AE-4EC0-A48F-B443F08B4488}"/>
+                <a16:creationId xmlns:a16="http://schemas.microsoft.com/office/drawing/2014/main" id="{76F2D5F0-A244-417E-BE34-DDA2C829CC0D}"/>
               </a:ext>
             </a:extLst>
           </p:cNvPr>
@@ -6175,7 +6175,7 @@
           <p:cNvPr id="13" name="TextBox 12">
             <a:extLst xmlns:a="http://schemas.openxmlformats.org/drawingml/2006/main">
               <a:ext uri="{FF2B5EF4-FFF2-40B4-BE49-F238E27FC236}">
-                <a16:creationId xmlns:a16="http://schemas.microsoft.com/office/drawing/2014/main" id="{956D6182-DAF8-4B2E-A1D5-A7922FEC5659}"/>
+                <a16:creationId xmlns:a16="http://schemas.microsoft.com/office/drawing/2014/main" id="{56AD8AF2-257C-4F3F-B36A-906A59B089CF}"/>
               </a:ext>
             </a:extLst>
           </p:cNvPr>
@@ -6222,7 +6222,7 @@
           <p:cNvPr id="14" name="Rounded Rectangle 13">
             <a:extLst xmlns:a="http://schemas.openxmlformats.org/drawingml/2006/main">
               <a:ext uri="{FF2B5EF4-FFF2-40B4-BE49-F238E27FC236}">
-                <a16:creationId xmlns:a16="http://schemas.microsoft.com/office/drawing/2014/main" id="{997BD297-FECE-45F6-952A-BB2EACA8C2AA}"/>
+                <a16:creationId xmlns:a16="http://schemas.microsoft.com/office/drawing/2014/main" id="{AF3FB22C-C0A5-4277-96BE-7BEC2C7B9CAD}"/>
               </a:ext>
             </a:extLst>
           </p:cNvPr>
@@ -6279,7 +6279,7 @@
           <p:cNvPr id="15" name="TextBox 14">
             <a:extLst xmlns:a="http://schemas.openxmlformats.org/drawingml/2006/main">
               <a:ext uri="{FF2B5EF4-FFF2-40B4-BE49-F238E27FC236}">
-                <a16:creationId xmlns:a16="http://schemas.microsoft.com/office/drawing/2014/main" id="{F180AA30-92E0-41C3-91E3-C9CC202F9973}"/>
+                <a16:creationId xmlns:a16="http://schemas.microsoft.com/office/drawing/2014/main" id="{68C453CA-6B8A-43A6-8A70-E4B8434079B4}"/>
               </a:ext>
             </a:extLst>
           </p:cNvPr>
@@ -6326,7 +6326,7 @@
           <p:cNvPr id="16" name="TextBox 15">
             <a:extLst xmlns:a="http://schemas.openxmlformats.org/drawingml/2006/main">
               <a:ext uri="{FF2B5EF4-FFF2-40B4-BE49-F238E27FC236}">
-                <a16:creationId xmlns:a16="http://schemas.microsoft.com/office/drawing/2014/main" id="{FABE974C-FE57-444B-88A1-0F362929E6B9}"/>
+                <a16:creationId xmlns:a16="http://schemas.microsoft.com/office/drawing/2014/main" id="{A0D16503-B7B4-431F-9594-5E6A6ECC4828}"/>
               </a:ext>
             </a:extLst>
           </p:cNvPr>
@@ -6373,7 +6373,7 @@
           <p:cNvPr id="17" name="TextBox 16">
             <a:extLst xmlns:a="http://schemas.openxmlformats.org/drawingml/2006/main">
               <a:ext uri="{FF2B5EF4-FFF2-40B4-BE49-F238E27FC236}">
-                <a16:creationId xmlns:a16="http://schemas.microsoft.com/office/drawing/2014/main" id="{065D97A7-803E-4EE2-A404-E8E1697535CA}"/>
+                <a16:creationId xmlns:a16="http://schemas.microsoft.com/office/drawing/2014/main" id="{D87A0843-393B-447A-AFE8-671995CF0342}"/>
               </a:ext>
             </a:extLst>
           </p:cNvPr>
@@ -6420,7 +6420,7 @@
           <p:cNvPr id="18" name="Rounded Rectangle 17">
             <a:extLst xmlns:a="http://schemas.openxmlformats.org/drawingml/2006/main">
               <a:ext uri="{FF2B5EF4-FFF2-40B4-BE49-F238E27FC236}">
-                <a16:creationId xmlns:a16="http://schemas.microsoft.com/office/drawing/2014/main" id="{23ED6392-F5EB-4E6F-A7FD-113487C9046D}"/>
+                <a16:creationId xmlns:a16="http://schemas.microsoft.com/office/drawing/2014/main" id="{FD70CBDF-24C5-4571-B209-6C9C42ACBD8B}"/>
               </a:ext>
             </a:extLst>
           </p:cNvPr>
@@ -6477,7 +6477,7 @@
           <p:cNvPr id="19" name="TextBox 18">
             <a:extLst xmlns:a="http://schemas.openxmlformats.org/drawingml/2006/main">
               <a:ext uri="{FF2B5EF4-FFF2-40B4-BE49-F238E27FC236}">
-                <a16:creationId xmlns:a16="http://schemas.microsoft.com/office/drawing/2014/main" id="{DACD41C2-D20F-4FC5-B8E1-271119D43E48}"/>
+                <a16:creationId xmlns:a16="http://schemas.microsoft.com/office/drawing/2014/main" id="{E070718B-C479-4E89-B4AF-1B575BE0E651}"/>
               </a:ext>
             </a:extLst>
           </p:cNvPr>
@@ -6524,7 +6524,7 @@
           <p:cNvPr id="20" name="TextBox 19">
             <a:extLst xmlns:a="http://schemas.openxmlformats.org/drawingml/2006/main">
               <a:ext uri="{FF2B5EF4-FFF2-40B4-BE49-F238E27FC236}">
-                <a16:creationId xmlns:a16="http://schemas.microsoft.com/office/drawing/2014/main" id="{B36617E7-147C-4F6C-9D24-AF8F6E78298A}"/>
+                <a16:creationId xmlns:a16="http://schemas.microsoft.com/office/drawing/2014/main" id="{0AA090C4-3905-45E2-83FD-E072300308FA}"/>
               </a:ext>
             </a:extLst>
           </p:cNvPr>
@@ -6569,7 +6569,7 @@
     </p:spTree>
     <p:extLst>
       <p:ext uri="{BB962C8B-B14F-4D97-AF65-F5344CB8AC3E}">
-        <p14:creationId xmlns:p14="http://schemas.microsoft.com/office/powerpoint/2010/main" val="2086847604"/>
+        <p14:creationId xmlns:p14="http://schemas.microsoft.com/office/powerpoint/2010/main" val="1254080820"/>
       </p:ext>
     </p:extLst>
   </p:cSld>
@@ -6593,7 +6593,7 @@
           <p:cNvPr id="2" name="TextBox 1">
             <a:extLst xmlns:a="http://schemas.openxmlformats.org/drawingml/2006/main">
               <a:ext uri="{FF2B5EF4-FFF2-40B4-BE49-F238E27FC236}">
-                <a16:creationId xmlns:a16="http://schemas.microsoft.com/office/drawing/2014/main" id="{F9232686-C6EB-4FA0-BDF3-EB2EB3BEE1ED}"/>
+                <a16:creationId xmlns:a16="http://schemas.microsoft.com/office/drawing/2014/main" id="{F2C8F1F9-B1F4-40CF-A4EB-27AA0893B800}"/>
               </a:ext>
             </a:extLst>
           </p:cNvPr>
@@ -6640,7 +6640,7 @@
           <p:cNvPr id="3" name="TextBox 2">
             <a:extLst xmlns:a="http://schemas.openxmlformats.org/drawingml/2006/main">
               <a:ext uri="{FF2B5EF4-FFF2-40B4-BE49-F238E27FC236}">
-                <a16:creationId xmlns:a16="http://schemas.microsoft.com/office/drawing/2014/main" id="{0FC9B79B-04EB-4BDE-BF03-D9590D034F27}"/>
+                <a16:creationId xmlns:a16="http://schemas.microsoft.com/office/drawing/2014/main" id="{5922A290-1A4B-487C-899B-F3621CE4718A}"/>
               </a:ext>
             </a:extLst>
           </p:cNvPr>
@@ -6687,7 +6687,7 @@
           <p:cNvPr id="4" name="Rectangle 3">
             <a:extLst xmlns:a="http://schemas.openxmlformats.org/drawingml/2006/main">
               <a:ext uri="{FF2B5EF4-FFF2-40B4-BE49-F238E27FC236}">
-                <a16:creationId xmlns:a16="http://schemas.microsoft.com/office/drawing/2014/main" id="{5904951D-B900-4DC1-ACB0-39BCD6065971}"/>
+                <a16:creationId xmlns:a16="http://schemas.microsoft.com/office/drawing/2014/main" id="{DF723E84-2318-4E70-A83B-24A9C634FB69}"/>
               </a:ext>
             </a:extLst>
           </p:cNvPr>
@@ -6742,7 +6742,7 @@
           <p:cNvPr id="5" name="Rectangle 4">
             <a:extLst xmlns:a="http://schemas.openxmlformats.org/drawingml/2006/main">
               <a:ext uri="{FF2B5EF4-FFF2-40B4-BE49-F238E27FC236}">
-                <a16:creationId xmlns:a16="http://schemas.microsoft.com/office/drawing/2014/main" id="{FE1B1753-73C3-472B-9909-B759B1BE4EAE}"/>
+                <a16:creationId xmlns:a16="http://schemas.microsoft.com/office/drawing/2014/main" id="{A15A2EED-891D-4183-A516-0B150305D33F}"/>
               </a:ext>
             </a:extLst>
           </p:cNvPr>
@@ -6797,7 +6797,7 @@
           <p:cNvPr id="6" name="TextBox 5">
             <a:extLst xmlns:a="http://schemas.openxmlformats.org/drawingml/2006/main">
               <a:ext uri="{FF2B5EF4-FFF2-40B4-BE49-F238E27FC236}">
-                <a16:creationId xmlns:a16="http://schemas.microsoft.com/office/drawing/2014/main" id="{049A4F62-FF5F-47E6-AB16-5A24A91E95FE}"/>
+                <a16:creationId xmlns:a16="http://schemas.microsoft.com/office/drawing/2014/main" id="{39D4DEE9-2672-461A-AF23-3B0C25BF7BB4}"/>
               </a:ext>
             </a:extLst>
           </p:cNvPr>
@@ -6834,7 +6834,7 @@
                 <a:ea typeface="Aptos"/>
                 <a:cs typeface="Aptos"/>
               </a:rPr>
-              <a:t>Independent public evidence summary · 2026.07.22-9 · 2026-07-22 · Sources: Health Canada; Destatis; Vero; Sejm; Swedish Government</a:t>
+              <a:t>Independent public evidence summary · 2026.07.23-10 · 2026-07-22 · Sources: Health Canada; Destatis; Vero; Sejm; Swedish Government</a:t>
             </a:r>
           </a:p>
         </p:txBody>
@@ -6844,7 +6844,7 @@
           <p:cNvPr id="7" name="TextBox 6">
             <a:extLst xmlns:a="http://schemas.openxmlformats.org/drawingml/2006/main">
               <a:ext uri="{FF2B5EF4-FFF2-40B4-BE49-F238E27FC236}">
-                <a16:creationId xmlns:a16="http://schemas.microsoft.com/office/drawing/2014/main" id="{2F36332A-451A-4416-8CD4-3DEBDC4450B6}"/>
+                <a16:creationId xmlns:a16="http://schemas.microsoft.com/office/drawing/2014/main" id="{1629768B-50DF-4F99-8EC9-BB032509ECA0}"/>
               </a:ext>
             </a:extLst>
           </p:cNvPr>
@@ -6891,7 +6891,7 @@
           <p:cNvPr id="8" name="Rounded Rectangle 7">
             <a:extLst xmlns:a="http://schemas.openxmlformats.org/drawingml/2006/main">
               <a:ext uri="{FF2B5EF4-FFF2-40B4-BE49-F238E27FC236}">
-                <a16:creationId xmlns:a16="http://schemas.microsoft.com/office/drawing/2014/main" id="{D45CF709-C7E6-467E-9353-5FC4579E9C21}"/>
+                <a16:creationId xmlns:a16="http://schemas.microsoft.com/office/drawing/2014/main" id="{10D39267-5180-40B2-A495-B8B07F997D03}"/>
               </a:ext>
             </a:extLst>
           </p:cNvPr>
@@ -6948,7 +6948,7 @@
           <p:cNvPr id="9" name="TextBox 8">
             <a:extLst xmlns:a="http://schemas.openxmlformats.org/drawingml/2006/main">
               <a:ext uri="{FF2B5EF4-FFF2-40B4-BE49-F238E27FC236}">
-                <a16:creationId xmlns:a16="http://schemas.microsoft.com/office/drawing/2014/main" id="{9ED03B72-D9EF-432F-962E-1DE59FC3F9B9}"/>
+                <a16:creationId xmlns:a16="http://schemas.microsoft.com/office/drawing/2014/main" id="{045908B1-4A8E-4F2E-B63E-C59244E9E610}"/>
               </a:ext>
             </a:extLst>
           </p:cNvPr>
@@ -6995,7 +6995,7 @@
           <p:cNvPr id="10" name="TextBox 9">
             <a:extLst xmlns:a="http://schemas.openxmlformats.org/drawingml/2006/main">
               <a:ext uri="{FF2B5EF4-FFF2-40B4-BE49-F238E27FC236}">
-                <a16:creationId xmlns:a16="http://schemas.microsoft.com/office/drawing/2014/main" id="{F6280BBD-B863-46A7-9999-5A81351DC53D}"/>
+                <a16:creationId xmlns:a16="http://schemas.microsoft.com/office/drawing/2014/main" id="{006E405A-41A3-429F-8458-9E255268AEBA}"/>
               </a:ext>
             </a:extLst>
           </p:cNvPr>
@@ -7042,7 +7042,7 @@
           <p:cNvPr id="11" name="Rounded Rectangle 10">
             <a:extLst xmlns:a="http://schemas.openxmlformats.org/drawingml/2006/main">
               <a:ext uri="{FF2B5EF4-FFF2-40B4-BE49-F238E27FC236}">
-                <a16:creationId xmlns:a16="http://schemas.microsoft.com/office/drawing/2014/main" id="{2AB4CBB9-11A3-499D-958F-F0D9926EDD2C}"/>
+                <a16:creationId xmlns:a16="http://schemas.microsoft.com/office/drawing/2014/main" id="{AE0CD9D3-8FC3-483A-B81B-DE383B2AA18D}"/>
               </a:ext>
             </a:extLst>
           </p:cNvPr>
@@ -7099,7 +7099,7 @@
           <p:cNvPr id="12" name="TextBox 11">
             <a:extLst xmlns:a="http://schemas.openxmlformats.org/drawingml/2006/main">
               <a:ext uri="{FF2B5EF4-FFF2-40B4-BE49-F238E27FC236}">
-                <a16:creationId xmlns:a16="http://schemas.microsoft.com/office/drawing/2014/main" id="{B683617B-D766-4A82-8BF1-16E1B62E7ED4}"/>
+                <a16:creationId xmlns:a16="http://schemas.microsoft.com/office/drawing/2014/main" id="{DA18ED43-5A7D-4030-B178-71221044C2FA}"/>
               </a:ext>
             </a:extLst>
           </p:cNvPr>
@@ -7146,7 +7146,7 @@
           <p:cNvPr id="13" name="TextBox 12">
             <a:extLst xmlns:a="http://schemas.openxmlformats.org/drawingml/2006/main">
               <a:ext uri="{FF2B5EF4-FFF2-40B4-BE49-F238E27FC236}">
-                <a16:creationId xmlns:a16="http://schemas.microsoft.com/office/drawing/2014/main" id="{0BC76F3F-2F57-462D-BD74-F88B02E3AC58}"/>
+                <a16:creationId xmlns:a16="http://schemas.microsoft.com/office/drawing/2014/main" id="{620A6D3A-6459-42E4-9C1C-29F45398A9E6}"/>
               </a:ext>
             </a:extLst>
           </p:cNvPr>
@@ -7193,7 +7193,7 @@
           <p:cNvPr id="14" name="Rounded Rectangle 13">
             <a:extLst xmlns:a="http://schemas.openxmlformats.org/drawingml/2006/main">
               <a:ext uri="{FF2B5EF4-FFF2-40B4-BE49-F238E27FC236}">
-                <a16:creationId xmlns:a16="http://schemas.microsoft.com/office/drawing/2014/main" id="{17999C87-7EB9-4916-B7EC-81ED2C31C72F}"/>
+                <a16:creationId xmlns:a16="http://schemas.microsoft.com/office/drawing/2014/main" id="{CE710A4D-B382-4A8E-9B7A-368CC18765CE}"/>
               </a:ext>
             </a:extLst>
           </p:cNvPr>
@@ -7250,7 +7250,7 @@
           <p:cNvPr id="15" name="TextBox 14">
             <a:extLst xmlns:a="http://schemas.openxmlformats.org/drawingml/2006/main">
               <a:ext uri="{FF2B5EF4-FFF2-40B4-BE49-F238E27FC236}">
-                <a16:creationId xmlns:a16="http://schemas.microsoft.com/office/drawing/2014/main" id="{BD2C1A32-A482-499C-A004-65253E45F85D}"/>
+                <a16:creationId xmlns:a16="http://schemas.microsoft.com/office/drawing/2014/main" id="{67720A0B-B011-4D24-B4C2-899E0B82A0CF}"/>
               </a:ext>
             </a:extLst>
           </p:cNvPr>
@@ -7297,7 +7297,7 @@
           <p:cNvPr id="16" name="TextBox 15">
             <a:extLst xmlns:a="http://schemas.openxmlformats.org/drawingml/2006/main">
               <a:ext uri="{FF2B5EF4-FFF2-40B4-BE49-F238E27FC236}">
-                <a16:creationId xmlns:a16="http://schemas.microsoft.com/office/drawing/2014/main" id="{C975BD27-685B-490C-9530-D0208E424E45}"/>
+                <a16:creationId xmlns:a16="http://schemas.microsoft.com/office/drawing/2014/main" id="{3C87B847-5CE5-413A-985D-52DA7EE00725}"/>
               </a:ext>
             </a:extLst>
           </p:cNvPr>
@@ -7344,7 +7344,7 @@
           <p:cNvPr id="17" name="TextBox 16">
             <a:extLst xmlns:a="http://schemas.openxmlformats.org/drawingml/2006/main">
               <a:ext uri="{FF2B5EF4-FFF2-40B4-BE49-F238E27FC236}">
-                <a16:creationId xmlns:a16="http://schemas.microsoft.com/office/drawing/2014/main" id="{B88BDC42-4E3F-4C78-971D-99B3F292D028}"/>
+                <a16:creationId xmlns:a16="http://schemas.microsoft.com/office/drawing/2014/main" id="{261D6E23-7389-4601-8BE3-9E6C2C4EA65A}"/>
               </a:ext>
             </a:extLst>
           </p:cNvPr>
@@ -7391,7 +7391,7 @@
           <p:cNvPr id="18" name="Rounded Rectangle 17">
             <a:extLst xmlns:a="http://schemas.openxmlformats.org/drawingml/2006/main">
               <a:ext uri="{FF2B5EF4-FFF2-40B4-BE49-F238E27FC236}">
-                <a16:creationId xmlns:a16="http://schemas.microsoft.com/office/drawing/2014/main" id="{B50850AE-EF88-4A81-AEB5-CA5E79984000}"/>
+                <a16:creationId xmlns:a16="http://schemas.microsoft.com/office/drawing/2014/main" id="{7294CEF8-8E51-43D1-B636-BAEB0C63292B}"/>
               </a:ext>
             </a:extLst>
           </p:cNvPr>
@@ -7448,7 +7448,7 @@
           <p:cNvPr id="19" name="TextBox 18">
             <a:extLst xmlns:a="http://schemas.openxmlformats.org/drawingml/2006/main">
               <a:ext uri="{FF2B5EF4-FFF2-40B4-BE49-F238E27FC236}">
-                <a16:creationId xmlns:a16="http://schemas.microsoft.com/office/drawing/2014/main" id="{2499D8A3-BE54-4D60-9BEB-EA568310667B}"/>
+                <a16:creationId xmlns:a16="http://schemas.microsoft.com/office/drawing/2014/main" id="{BCE3C00A-1C67-4ED2-BAAF-486190B5E4C7}"/>
               </a:ext>
             </a:extLst>
           </p:cNvPr>
@@ -7495,7 +7495,7 @@
           <p:cNvPr id="20" name="TextBox 19">
             <a:extLst xmlns:a="http://schemas.openxmlformats.org/drawingml/2006/main">
               <a:ext uri="{FF2B5EF4-FFF2-40B4-BE49-F238E27FC236}">
-                <a16:creationId xmlns:a16="http://schemas.microsoft.com/office/drawing/2014/main" id="{CE42CFB7-3DA7-411C-9545-9052E983C936}"/>
+                <a16:creationId xmlns:a16="http://schemas.microsoft.com/office/drawing/2014/main" id="{486C52A2-2198-4A27-8DDC-11CCA78DA5B5}"/>
               </a:ext>
             </a:extLst>
           </p:cNvPr>
@@ -7540,7 +7540,7 @@
     </p:spTree>
     <p:extLst>
       <p:ext uri="{BB962C8B-B14F-4D97-AF65-F5344CB8AC3E}">
-        <p14:creationId xmlns:p14="http://schemas.microsoft.com/office/powerpoint/2010/main" val="1955267742"/>
+        <p14:creationId xmlns:p14="http://schemas.microsoft.com/office/powerpoint/2010/main" val="1523538277"/>
       </p:ext>
     </p:extLst>
   </p:cSld>
@@ -7564,7 +7564,7 @@
           <p:cNvPr id="2" name="TextBox 1">
             <a:extLst xmlns:a="http://schemas.openxmlformats.org/drawingml/2006/main">
               <a:ext uri="{FF2B5EF4-FFF2-40B4-BE49-F238E27FC236}">
-                <a16:creationId xmlns:a16="http://schemas.microsoft.com/office/drawing/2014/main" id="{45F8A69F-D474-447B-B2A8-CD3B75E905ED}"/>
+                <a16:creationId xmlns:a16="http://schemas.microsoft.com/office/drawing/2014/main" id="{5BA90B0D-1243-4BE1-B232-8198019FC7DC}"/>
               </a:ext>
             </a:extLst>
           </p:cNvPr>
@@ -7611,7 +7611,7 @@
           <p:cNvPr id="3" name="TextBox 2">
             <a:extLst xmlns:a="http://schemas.openxmlformats.org/drawingml/2006/main">
               <a:ext uri="{FF2B5EF4-FFF2-40B4-BE49-F238E27FC236}">
-                <a16:creationId xmlns:a16="http://schemas.microsoft.com/office/drawing/2014/main" id="{4EDC7E89-0C0B-4F5E-9585-14BABA8955BB}"/>
+                <a16:creationId xmlns:a16="http://schemas.microsoft.com/office/drawing/2014/main" id="{0A934446-7634-4C07-9713-6E6D8B613FFF}"/>
               </a:ext>
             </a:extLst>
           </p:cNvPr>
@@ -7658,7 +7658,7 @@
           <p:cNvPr id="4" name="Rectangle 3">
             <a:extLst xmlns:a="http://schemas.openxmlformats.org/drawingml/2006/main">
               <a:ext uri="{FF2B5EF4-FFF2-40B4-BE49-F238E27FC236}">
-                <a16:creationId xmlns:a16="http://schemas.microsoft.com/office/drawing/2014/main" id="{F6F0F1E9-9F86-4EAC-BE91-089F288D00E9}"/>
+                <a16:creationId xmlns:a16="http://schemas.microsoft.com/office/drawing/2014/main" id="{6B162241-EFF5-4E3A-B62D-A4FC3BD6FAF7}"/>
               </a:ext>
             </a:extLst>
           </p:cNvPr>
@@ -7713,7 +7713,7 @@
           <p:cNvPr id="5" name="Rectangle 4">
             <a:extLst xmlns:a="http://schemas.openxmlformats.org/drawingml/2006/main">
               <a:ext uri="{FF2B5EF4-FFF2-40B4-BE49-F238E27FC236}">
-                <a16:creationId xmlns:a16="http://schemas.microsoft.com/office/drawing/2014/main" id="{73593C71-533E-4B71-92D6-6B7E2C6F9CF4}"/>
+                <a16:creationId xmlns:a16="http://schemas.microsoft.com/office/drawing/2014/main" id="{A1A633AF-DE20-4B81-B3EC-A81A378DCA2E}"/>
               </a:ext>
             </a:extLst>
           </p:cNvPr>
@@ -7768,7 +7768,7 @@
           <p:cNvPr id="6" name="TextBox 5">
             <a:extLst xmlns:a="http://schemas.openxmlformats.org/drawingml/2006/main">
               <a:ext uri="{FF2B5EF4-FFF2-40B4-BE49-F238E27FC236}">
-                <a16:creationId xmlns:a16="http://schemas.microsoft.com/office/drawing/2014/main" id="{12C7A025-166F-41EE-B069-705DEED2B596}"/>
+                <a16:creationId xmlns:a16="http://schemas.microsoft.com/office/drawing/2014/main" id="{79BBF3C4-D5E2-424D-9F4D-7E7FC3798E19}"/>
               </a:ext>
             </a:extLst>
           </p:cNvPr>
@@ -7805,7 +7805,7 @@
                 <a:ea typeface="Aptos"/>
                 <a:cs typeface="Aptos"/>
               </a:rPr>
-              <a:t>Independent public evidence summary · 2026.07.22-9 · 2026-07-22 · Sources: Evidence Register; WIPO IP valuation</a:t>
+              <a:t>Independent public evidence summary · 2026.07.23-10 · 2026-07-22 · Sources: Evidence Register; WIPO IP valuation</a:t>
             </a:r>
           </a:p>
         </p:txBody>
@@ -7815,7 +7815,7 @@
           <p:cNvPr id="7" name="TextBox 6">
             <a:extLst xmlns:a="http://schemas.openxmlformats.org/drawingml/2006/main">
               <a:ext uri="{FF2B5EF4-FFF2-40B4-BE49-F238E27FC236}">
-                <a16:creationId xmlns:a16="http://schemas.microsoft.com/office/drawing/2014/main" id="{7D55CEC4-E748-4D66-8C68-7153E08A9F2A}"/>
+                <a16:creationId xmlns:a16="http://schemas.microsoft.com/office/drawing/2014/main" id="{0A71BFF2-D693-4CDD-929C-6BF3FC521320}"/>
               </a:ext>
             </a:extLst>
           </p:cNvPr>
@@ -8302,7 +8302,7 @@
           <p:cNvPr id="9" name="TextBox 8">
             <a:extLst xmlns:a="http://schemas.openxmlformats.org/drawingml/2006/main">
               <a:ext uri="{FF2B5EF4-FFF2-40B4-BE49-F238E27FC236}">
-                <a16:creationId xmlns:a16="http://schemas.microsoft.com/office/drawing/2014/main" id="{CF5D54D2-EBF5-48A9-AEB2-E9634399F324}"/>
+                <a16:creationId xmlns:a16="http://schemas.microsoft.com/office/drawing/2014/main" id="{5C5B60B2-CD26-43CE-BA2D-23FEAC0A9318}"/>
               </a:ext>
             </a:extLst>
           </p:cNvPr>
@@ -8347,7 +8347,7 @@
     </p:spTree>
     <p:extLst>
       <p:ext uri="{BB962C8B-B14F-4D97-AF65-F5344CB8AC3E}">
-        <p14:creationId xmlns:p14="http://schemas.microsoft.com/office/powerpoint/2010/main" val="1313280652"/>
+        <p14:creationId xmlns:p14="http://schemas.microsoft.com/office/powerpoint/2010/main" val="235243580"/>
       </p:ext>
     </p:extLst>
   </p:cSld>
@@ -8378,7 +8378,7 @@
           <p:cNvPr id="2" name="TextBox 1">
             <a:extLst xmlns:a="http://schemas.openxmlformats.org/drawingml/2006/main">
               <a:ext uri="{FF2B5EF4-FFF2-40B4-BE49-F238E27FC236}">
-                <a16:creationId xmlns:a16="http://schemas.microsoft.com/office/drawing/2014/main" id="{931BF2D0-B564-465A-8FDE-BD8C8AFB7888}"/>
+                <a16:creationId xmlns:a16="http://schemas.microsoft.com/office/drawing/2014/main" id="{D5DDF54B-C7A6-48F0-BD80-7D202DF1DB28}"/>
               </a:ext>
             </a:extLst>
           </p:cNvPr>
@@ -8425,7 +8425,7 @@
           <p:cNvPr id="3" name="TextBox 2">
             <a:extLst xmlns:a="http://schemas.openxmlformats.org/drawingml/2006/main">
               <a:ext uri="{FF2B5EF4-FFF2-40B4-BE49-F238E27FC236}">
-                <a16:creationId xmlns:a16="http://schemas.microsoft.com/office/drawing/2014/main" id="{F6E4D08F-80EB-48AF-B260-339134B2785E}"/>
+                <a16:creationId xmlns:a16="http://schemas.microsoft.com/office/drawing/2014/main" id="{3FE039D2-A44A-4077-91B6-78DC1DF2A38D}"/>
               </a:ext>
             </a:extLst>
           </p:cNvPr>
@@ -8472,7 +8472,7 @@
           <p:cNvPr id="4" name="TextBox 3">
             <a:extLst xmlns:a="http://schemas.openxmlformats.org/drawingml/2006/main">
               <a:ext uri="{FF2B5EF4-FFF2-40B4-BE49-F238E27FC236}">
-                <a16:creationId xmlns:a16="http://schemas.microsoft.com/office/drawing/2014/main" id="{5A2B246C-2C5F-4165-A276-4421ACBCDFA7}"/>
+                <a16:creationId xmlns:a16="http://schemas.microsoft.com/office/drawing/2014/main" id="{5DBB164A-F8C0-4DEB-93F6-FD438558A25D}"/>
               </a:ext>
             </a:extLst>
           </p:cNvPr>
@@ -8591,7 +8591,7 @@
           <p:cNvPr id="5" name="TextBox 4">
             <a:extLst xmlns:a="http://schemas.openxmlformats.org/drawingml/2006/main">
               <a:ext uri="{FF2B5EF4-FFF2-40B4-BE49-F238E27FC236}">
-                <a16:creationId xmlns:a16="http://schemas.microsoft.com/office/drawing/2014/main" id="{41A48112-A672-458D-A5AD-FB19FF03355B}"/>
+                <a16:creationId xmlns:a16="http://schemas.microsoft.com/office/drawing/2014/main" id="{20FB4B4B-0893-48C8-9210-20BCAD1349F0}"/>
               </a:ext>
             </a:extLst>
           </p:cNvPr>
@@ -8628,7 +8628,7 @@
                 <a:ea typeface="Aptos"/>
                 <a:cs typeface="Aptos"/>
               </a:rPr>
-              <a:t>Version 2026.07.22-9 · 2026-07-22 · 6 / 6</a:t>
+              <a:t>Version 2026.07.23-10 · 2026-07-22 · 6 / 6</a:t>
             </a:r>
           </a:p>
         </p:txBody>
@@ -8636,7 +8636,7 @@
     </p:spTree>
     <p:extLst>
       <p:ext uri="{BB962C8B-B14F-4D97-AF65-F5344CB8AC3E}">
-        <p14:creationId xmlns:p14="http://schemas.microsoft.com/office/powerpoint/2010/main" val="1606639561"/>
+        <p14:creationId xmlns:p14="http://schemas.microsoft.com/office/powerpoint/2010/main" val="1296176178"/>
       </p:ext>
     </p:extLst>
   </p:cSld>

--- a/site/downloads/pixan-bank-deck-short-en.pptx
+++ b/site/downloads/pixan-bank-deck-short-en.pptx
@@ -2,18 +2,18 @@
 <file path=ppt/presentation.xml><?xml version="1.0" encoding="utf-8"?>
 <p:presentation xmlns:p="http://schemas.openxmlformats.org/presentationml/2006/main">
   <p:sldMasterIdLst>
-    <p:sldMasterId xmlns:r="http://schemas.openxmlformats.org/officeDocument/2006/relationships" id="2147483648" r:id="Rbd73139a5c0e41ba"/>
+    <p:sldMasterId xmlns:r="http://schemas.openxmlformats.org/officeDocument/2006/relationships" id="2147483648" r:id="R753660a6b94f4321"/>
   </p:sldMasterIdLst>
   <p:notesMasterIdLst>
-    <p:notesMasterId xmlns:r="http://schemas.openxmlformats.org/officeDocument/2006/relationships" r:id="Rd4fcf366c895476c"/>
+    <p:notesMasterId xmlns:r="http://schemas.openxmlformats.org/officeDocument/2006/relationships" r:id="R9156afa3e0a749fc"/>
   </p:notesMasterIdLst>
   <p:sldIdLst>
-    <p:sldId xmlns:r="http://schemas.openxmlformats.org/officeDocument/2006/relationships" id="256" r:id="R12e6b2683f2b4be8"/>
-    <p:sldId xmlns:r="http://schemas.openxmlformats.org/officeDocument/2006/relationships" id="257" r:id="Refcd70a0d01d4dc3"/>
-    <p:sldId xmlns:r="http://schemas.openxmlformats.org/officeDocument/2006/relationships" id="258" r:id="R1e1db9843a134709"/>
-    <p:sldId xmlns:r="http://schemas.openxmlformats.org/officeDocument/2006/relationships" id="259" r:id="R76b5f1fa3e3942e5"/>
-    <p:sldId xmlns:r="http://schemas.openxmlformats.org/officeDocument/2006/relationships" id="260" r:id="R06278abcd9064d2a"/>
-    <p:sldId xmlns:r="http://schemas.openxmlformats.org/officeDocument/2006/relationships" id="261" r:id="R0e4d434499e44eb2"/>
+    <p:sldId xmlns:r="http://schemas.openxmlformats.org/officeDocument/2006/relationships" id="256" r:id="Rab97ebb492004932"/>
+    <p:sldId xmlns:r="http://schemas.openxmlformats.org/officeDocument/2006/relationships" id="257" r:id="R8c9720c18c1946b8"/>
+    <p:sldId xmlns:r="http://schemas.openxmlformats.org/officeDocument/2006/relationships" id="258" r:id="R3a20329b16e8470b"/>
+    <p:sldId xmlns:r="http://schemas.openxmlformats.org/officeDocument/2006/relationships" id="259" r:id="R7adcdeb8b442427e"/>
+    <p:sldId xmlns:r="http://schemas.openxmlformats.org/officeDocument/2006/relationships" id="260" r:id="Rff612b1b0bc94cfb"/>
+    <p:sldId xmlns:r="http://schemas.openxmlformats.org/officeDocument/2006/relationships" id="261" r:id="R95d5ed6d30474a90"/>
   </p:sldIdLst>
   <p:sldSz cx="12191999" cy="6858000"/>
   <p:notesSz cx="6858000" cy="9144000"/>
@@ -938,7 +938,7 @@
           <p:cNvPr id="2" name="Title 1">
             <a:extLst xmlns:a="http://schemas.openxmlformats.org/drawingml/2006/main">
               <a:ext uri="{FF2B5EF4-FFF2-40B4-BE49-F238E27FC236}">
-                <a16:creationId xmlns:a16="http://schemas.microsoft.com/office/drawing/2014/main" id="{B3DD249A-B478-4FD4-9EFD-DA8220D97A57}"/>
+                <a16:creationId xmlns:a16="http://schemas.microsoft.com/office/drawing/2014/main" id="{85235AEF-00F2-41F1-972A-10B5DA30FB22}"/>
               </a:ext>
             </a:extLst>
           </p:cNvPr>
@@ -970,7 +970,7 @@
           <p:cNvPr id="3" name="Subtitle 2">
             <a:extLst xmlns:a="http://schemas.openxmlformats.org/drawingml/2006/main">
               <a:ext uri="{FF2B5EF4-FFF2-40B4-BE49-F238E27FC236}">
-                <a16:creationId xmlns:a16="http://schemas.microsoft.com/office/drawing/2014/main" id="{C8EE8BFB-2052-4B58-B840-A1EB5AD5CA7B}"/>
+                <a16:creationId xmlns:a16="http://schemas.microsoft.com/office/drawing/2014/main" id="{192CAB94-798E-450A-B2CF-C13F0E71788E}"/>
               </a:ext>
             </a:extLst>
           </p:cNvPr>
@@ -1093,7 +1093,7 @@
           <p:cNvPr id="4" name="Date Placeholder 3">
             <a:extLst xmlns:a="http://schemas.openxmlformats.org/drawingml/2006/main">
               <a:ext uri="{FF2B5EF4-FFF2-40B4-BE49-F238E27FC236}">
-                <a16:creationId xmlns:a16="http://schemas.microsoft.com/office/drawing/2014/main" id="{5B5BA057-588C-462D-AE49-9B805A94CC2C}"/>
+                <a16:creationId xmlns:a16="http://schemas.microsoft.com/office/drawing/2014/main" id="{16100ACC-4EF4-4922-99A1-4E2CF85B688F}"/>
               </a:ext>
             </a:extLst>
           </p:cNvPr>
@@ -1120,7 +1120,7 @@
           <p:cNvPr id="5" name="Footer Placeholder 4">
             <a:extLst xmlns:a="http://schemas.openxmlformats.org/drawingml/2006/main">
               <a:ext uri="{FF2B5EF4-FFF2-40B4-BE49-F238E27FC236}">
-                <a16:creationId xmlns:a16="http://schemas.microsoft.com/office/drawing/2014/main" id="{85C44C9E-A082-4F51-A792-1560CF66D2E0}"/>
+                <a16:creationId xmlns:a16="http://schemas.microsoft.com/office/drawing/2014/main" id="{1DB839A8-FADE-4FDA-8507-E547F49A06C0}"/>
               </a:ext>
             </a:extLst>
           </p:cNvPr>
@@ -1143,7 +1143,7 @@
           <p:cNvPr id="6" name="Slide Number Placeholder 5">
             <a:extLst xmlns:a="http://schemas.openxmlformats.org/drawingml/2006/main">
               <a:ext uri="{FF2B5EF4-FFF2-40B4-BE49-F238E27FC236}">
-                <a16:creationId xmlns:a16="http://schemas.microsoft.com/office/drawing/2014/main" id="{6203553D-7D51-4D92-9EA3-DBCDC14D4922}"/>
+                <a16:creationId xmlns:a16="http://schemas.microsoft.com/office/drawing/2014/main" id="{77FB9BE1-474F-41E6-93C6-B97FB669FCF0}"/>
               </a:ext>
             </a:extLst>
           </p:cNvPr>
@@ -1187,7 +1187,7 @@
           <p:cNvPr id="2" name="Title 1">
             <a:extLst xmlns:a="http://schemas.openxmlformats.org/drawingml/2006/main">
               <a:ext uri="{FF2B5EF4-FFF2-40B4-BE49-F238E27FC236}">
-                <a16:creationId xmlns:a16="http://schemas.microsoft.com/office/drawing/2014/main" id="{A31E5958-4453-4976-9ABC-E958B589DF7B}"/>
+                <a16:creationId xmlns:a16="http://schemas.microsoft.com/office/drawing/2014/main" id="{851E99B8-FEBC-48FA-AE5C-221BD7ADDD58}"/>
               </a:ext>
             </a:extLst>
           </p:cNvPr>
@@ -1214,7 +1214,7 @@
           <p:cNvPr id="3" name="Vertical Text Placeholder 2">
             <a:extLst xmlns:a="http://schemas.openxmlformats.org/drawingml/2006/main">
               <a:ext uri="{FF2B5EF4-FFF2-40B4-BE49-F238E27FC236}">
-                <a16:creationId xmlns:a16="http://schemas.microsoft.com/office/drawing/2014/main" id="{ED123BAD-8403-4DE9-BE6E-68A9131E0500}"/>
+                <a16:creationId xmlns:a16="http://schemas.microsoft.com/office/drawing/2014/main" id="{FEDAA48A-38CE-403E-B88C-1EDF719B307E}"/>
               </a:ext>
             </a:extLst>
           </p:cNvPr>
@@ -1276,7 +1276,7 @@
           <p:cNvPr id="4" name="Date Placeholder 3">
             <a:extLst xmlns:a="http://schemas.openxmlformats.org/drawingml/2006/main">
               <a:ext uri="{FF2B5EF4-FFF2-40B4-BE49-F238E27FC236}">
-                <a16:creationId xmlns:a16="http://schemas.microsoft.com/office/drawing/2014/main" id="{D6C7CA43-6BCA-4B6A-9A3E-6F2108E67A24}"/>
+                <a16:creationId xmlns:a16="http://schemas.microsoft.com/office/drawing/2014/main" id="{7B36C936-EC6C-4864-9EED-AAA79A65B11C}"/>
               </a:ext>
             </a:extLst>
           </p:cNvPr>
@@ -1303,7 +1303,7 @@
           <p:cNvPr id="5" name="Footer Placeholder 4">
             <a:extLst xmlns:a="http://schemas.openxmlformats.org/drawingml/2006/main">
               <a:ext uri="{FF2B5EF4-FFF2-40B4-BE49-F238E27FC236}">
-                <a16:creationId xmlns:a16="http://schemas.microsoft.com/office/drawing/2014/main" id="{45586E2F-D23B-4A90-B08D-84F8E91F4A89}"/>
+                <a16:creationId xmlns:a16="http://schemas.microsoft.com/office/drawing/2014/main" id="{D12ACB0E-FAB6-4DEB-A252-75AB252ECFF1}"/>
               </a:ext>
             </a:extLst>
           </p:cNvPr>
@@ -1326,7 +1326,7 @@
           <p:cNvPr id="6" name="Slide Number Placeholder 5">
             <a:extLst xmlns:a="http://schemas.openxmlformats.org/drawingml/2006/main">
               <a:ext uri="{FF2B5EF4-FFF2-40B4-BE49-F238E27FC236}">
-                <a16:creationId xmlns:a16="http://schemas.microsoft.com/office/drawing/2014/main" id="{A01C8D6F-8D51-4979-B1DA-21B8F5257A9E}"/>
+                <a16:creationId xmlns:a16="http://schemas.microsoft.com/office/drawing/2014/main" id="{10203A56-1AFD-4639-99F7-E3ED01442685}"/>
               </a:ext>
             </a:extLst>
           </p:cNvPr>
@@ -1370,7 +1370,7 @@
           <p:cNvPr id="2" name="Vertical Title 1">
             <a:extLst xmlns:a="http://schemas.openxmlformats.org/drawingml/2006/main">
               <a:ext uri="{FF2B5EF4-FFF2-40B4-BE49-F238E27FC236}">
-                <a16:creationId xmlns:a16="http://schemas.microsoft.com/office/drawing/2014/main" id="{B2C1DD69-4E2D-41E1-9885-ADDC7B21E4AE}"/>
+                <a16:creationId xmlns:a16="http://schemas.microsoft.com/office/drawing/2014/main" id="{8C79245D-99D8-4442-9634-9F025C0C1F3E}"/>
               </a:ext>
             </a:extLst>
           </p:cNvPr>
@@ -1402,7 +1402,7 @@
           <p:cNvPr id="3" name="Vertical Text Placeholder 2">
             <a:extLst xmlns:a="http://schemas.openxmlformats.org/drawingml/2006/main">
               <a:ext uri="{FF2B5EF4-FFF2-40B4-BE49-F238E27FC236}">
-                <a16:creationId xmlns:a16="http://schemas.microsoft.com/office/drawing/2014/main" id="{D764CFC1-16CA-4F85-9CD9-539A8AF6927E}"/>
+                <a16:creationId xmlns:a16="http://schemas.microsoft.com/office/drawing/2014/main" id="{1205D342-7250-4780-9D49-CCB3B0998E64}"/>
               </a:ext>
             </a:extLst>
           </p:cNvPr>
@@ -1469,7 +1469,7 @@
           <p:cNvPr id="4" name="Date Placeholder 3">
             <a:extLst xmlns:a="http://schemas.openxmlformats.org/drawingml/2006/main">
               <a:ext uri="{FF2B5EF4-FFF2-40B4-BE49-F238E27FC236}">
-                <a16:creationId xmlns:a16="http://schemas.microsoft.com/office/drawing/2014/main" id="{577BF62C-7BDF-465F-8A89-8B1E4A74D8F5}"/>
+                <a16:creationId xmlns:a16="http://schemas.microsoft.com/office/drawing/2014/main" id="{52305666-C3B4-446C-B1EA-779B7D885E43}"/>
               </a:ext>
             </a:extLst>
           </p:cNvPr>
@@ -1496,7 +1496,7 @@
           <p:cNvPr id="5" name="Footer Placeholder 4">
             <a:extLst xmlns:a="http://schemas.openxmlformats.org/drawingml/2006/main">
               <a:ext uri="{FF2B5EF4-FFF2-40B4-BE49-F238E27FC236}">
-                <a16:creationId xmlns:a16="http://schemas.microsoft.com/office/drawing/2014/main" id="{4FC882BD-C2FA-4D19-BBEE-9F1B38CDDB10}"/>
+                <a16:creationId xmlns:a16="http://schemas.microsoft.com/office/drawing/2014/main" id="{C97A9D2D-D65B-4EF8-BF3E-3C4EA6E050E1}"/>
               </a:ext>
             </a:extLst>
           </p:cNvPr>
@@ -1519,7 +1519,7 @@
           <p:cNvPr id="6" name="Slide Number Placeholder 5">
             <a:extLst xmlns:a="http://schemas.openxmlformats.org/drawingml/2006/main">
               <a:ext uri="{FF2B5EF4-FFF2-40B4-BE49-F238E27FC236}">
-                <a16:creationId xmlns:a16="http://schemas.microsoft.com/office/drawing/2014/main" id="{C4949CAD-B2AF-43D3-B0B3-9E13C332FDAF}"/>
+                <a16:creationId xmlns:a16="http://schemas.microsoft.com/office/drawing/2014/main" id="{84CCFC4D-B005-42C9-8DF5-022A3FC55A42}"/>
               </a:ext>
             </a:extLst>
           </p:cNvPr>
@@ -1563,7 +1563,7 @@
           <p:cNvPr id="2" name="Title 1">
             <a:extLst xmlns:a="http://schemas.openxmlformats.org/drawingml/2006/main">
               <a:ext uri="{FF2B5EF4-FFF2-40B4-BE49-F238E27FC236}">
-                <a16:creationId xmlns:a16="http://schemas.microsoft.com/office/drawing/2014/main" id="{EAEB985E-B143-4393-BA7B-5E9B5DC3AF47}"/>
+                <a16:creationId xmlns:a16="http://schemas.microsoft.com/office/drawing/2014/main" id="{8276E23D-4EF1-427A-AA2E-A445DB9CCC6F}"/>
               </a:ext>
             </a:extLst>
           </p:cNvPr>
@@ -1590,7 +1590,7 @@
           <p:cNvPr id="3" name="Content Placeholder 2">
             <a:extLst xmlns:a="http://schemas.openxmlformats.org/drawingml/2006/main">
               <a:ext uri="{FF2B5EF4-FFF2-40B4-BE49-F238E27FC236}">
-                <a16:creationId xmlns:a16="http://schemas.microsoft.com/office/drawing/2014/main" id="{46713EF8-D091-4FF1-A980-0512F9F5BDDF}"/>
+                <a16:creationId xmlns:a16="http://schemas.microsoft.com/office/drawing/2014/main" id="{37839BA9-A066-4507-8561-3FC5A4FA47D3}"/>
               </a:ext>
             </a:extLst>
           </p:cNvPr>
@@ -1652,7 +1652,7 @@
           <p:cNvPr id="4" name="Date Placeholder 3">
             <a:extLst xmlns:a="http://schemas.openxmlformats.org/drawingml/2006/main">
               <a:ext uri="{FF2B5EF4-FFF2-40B4-BE49-F238E27FC236}">
-                <a16:creationId xmlns:a16="http://schemas.microsoft.com/office/drawing/2014/main" id="{B17C4C02-D79B-434B-ABF9-0455EC6517EB}"/>
+                <a16:creationId xmlns:a16="http://schemas.microsoft.com/office/drawing/2014/main" id="{626AC5DA-35B7-47B4-B597-3EEDF949147D}"/>
               </a:ext>
             </a:extLst>
           </p:cNvPr>
@@ -1679,7 +1679,7 @@
           <p:cNvPr id="5" name="Footer Placeholder 4">
             <a:extLst xmlns:a="http://schemas.openxmlformats.org/drawingml/2006/main">
               <a:ext uri="{FF2B5EF4-FFF2-40B4-BE49-F238E27FC236}">
-                <a16:creationId xmlns:a16="http://schemas.microsoft.com/office/drawing/2014/main" id="{2BC1EE98-1EAE-4F23-86F1-B254BE50D2A7}"/>
+                <a16:creationId xmlns:a16="http://schemas.microsoft.com/office/drawing/2014/main" id="{C8F6F398-2731-4A1A-A114-079B4EC8749F}"/>
               </a:ext>
             </a:extLst>
           </p:cNvPr>
@@ -1702,7 +1702,7 @@
           <p:cNvPr id="6" name="Slide Number Placeholder 5">
             <a:extLst xmlns:a="http://schemas.openxmlformats.org/drawingml/2006/main">
               <a:ext uri="{FF2B5EF4-FFF2-40B4-BE49-F238E27FC236}">
-                <a16:creationId xmlns:a16="http://schemas.microsoft.com/office/drawing/2014/main" id="{F933BF99-F6B6-403F-A5E5-5CFED1FC3C0D}"/>
+                <a16:creationId xmlns:a16="http://schemas.microsoft.com/office/drawing/2014/main" id="{ED03C032-D150-43FB-9B85-DD86938CDF20}"/>
               </a:ext>
             </a:extLst>
           </p:cNvPr>
@@ -1746,7 +1746,7 @@
           <p:cNvPr id="2" name="Title 1">
             <a:extLst xmlns:a="http://schemas.openxmlformats.org/drawingml/2006/main">
               <a:ext uri="{FF2B5EF4-FFF2-40B4-BE49-F238E27FC236}">
-                <a16:creationId xmlns:a16="http://schemas.microsoft.com/office/drawing/2014/main" id="{A671EA8D-054E-4DDC-B4E8-C0295C710983}"/>
+                <a16:creationId xmlns:a16="http://schemas.microsoft.com/office/drawing/2014/main" id="{CF213A8D-FFF5-4792-ABD9-0CDCF9FC6B5F}"/>
               </a:ext>
             </a:extLst>
           </p:cNvPr>
@@ -1783,7 +1783,7 @@
           <p:cNvPr id="3" name="Text Placeholder 2">
             <a:extLst xmlns:a="http://schemas.openxmlformats.org/drawingml/2006/main">
               <a:ext uri="{FF2B5EF4-FFF2-40B4-BE49-F238E27FC236}">
-                <a16:creationId xmlns:a16="http://schemas.microsoft.com/office/drawing/2014/main" id="{7EC2BFB0-C304-4761-A30A-AFEA07C7645D}"/>
+                <a16:creationId xmlns:a16="http://schemas.microsoft.com/office/drawing/2014/main" id="{BAC7F3D2-5E63-49A4-AC94-151903625874}"/>
               </a:ext>
             </a:extLst>
           </p:cNvPr>
@@ -1909,7 +1909,7 @@
           <p:cNvPr id="4" name="Date Placeholder 3">
             <a:extLst xmlns:a="http://schemas.openxmlformats.org/drawingml/2006/main">
               <a:ext uri="{FF2B5EF4-FFF2-40B4-BE49-F238E27FC236}">
-                <a16:creationId xmlns:a16="http://schemas.microsoft.com/office/drawing/2014/main" id="{96E1A876-F228-44D2-87FA-598FB58187E4}"/>
+                <a16:creationId xmlns:a16="http://schemas.microsoft.com/office/drawing/2014/main" id="{B5045156-42B9-42CA-A421-3479B0CE440B}"/>
               </a:ext>
             </a:extLst>
           </p:cNvPr>
@@ -1936,7 +1936,7 @@
           <p:cNvPr id="5" name="Footer Placeholder 4">
             <a:extLst xmlns:a="http://schemas.openxmlformats.org/drawingml/2006/main">
               <a:ext uri="{FF2B5EF4-FFF2-40B4-BE49-F238E27FC236}">
-                <a16:creationId xmlns:a16="http://schemas.microsoft.com/office/drawing/2014/main" id="{B585BF48-DD8A-4B18-9A4B-AE614E73923A}"/>
+                <a16:creationId xmlns:a16="http://schemas.microsoft.com/office/drawing/2014/main" id="{A0385B04-2741-4C53-85EB-7CB12D4B7EF2}"/>
               </a:ext>
             </a:extLst>
           </p:cNvPr>
@@ -1959,7 +1959,7 @@
           <p:cNvPr id="6" name="Slide Number Placeholder 5">
             <a:extLst xmlns:a="http://schemas.openxmlformats.org/drawingml/2006/main">
               <a:ext uri="{FF2B5EF4-FFF2-40B4-BE49-F238E27FC236}">
-                <a16:creationId xmlns:a16="http://schemas.microsoft.com/office/drawing/2014/main" id="{91E5EF77-99C7-4BFF-B82F-98F4E71478BF}"/>
+                <a16:creationId xmlns:a16="http://schemas.microsoft.com/office/drawing/2014/main" id="{F8F009ED-9555-49BD-ABA0-C6C45F5B23B6}"/>
               </a:ext>
             </a:extLst>
           </p:cNvPr>
@@ -2003,7 +2003,7 @@
           <p:cNvPr id="2" name="Title 1">
             <a:extLst xmlns:a="http://schemas.openxmlformats.org/drawingml/2006/main">
               <a:ext uri="{FF2B5EF4-FFF2-40B4-BE49-F238E27FC236}">
-                <a16:creationId xmlns:a16="http://schemas.microsoft.com/office/drawing/2014/main" id="{CAA53049-941B-47CB-B9BD-7F8D87EF7C26}"/>
+                <a16:creationId xmlns:a16="http://schemas.microsoft.com/office/drawing/2014/main" id="{F5168754-1D3F-4A53-B196-455B4B474F9C}"/>
               </a:ext>
             </a:extLst>
           </p:cNvPr>
@@ -2030,7 +2030,7 @@
           <p:cNvPr id="3" name="Content Placeholder 2">
             <a:extLst xmlns:a="http://schemas.openxmlformats.org/drawingml/2006/main">
               <a:ext uri="{FF2B5EF4-FFF2-40B4-BE49-F238E27FC236}">
-                <a16:creationId xmlns:a16="http://schemas.microsoft.com/office/drawing/2014/main" id="{C83C0B3F-B190-4582-832D-4587BA70A6A9}"/>
+                <a16:creationId xmlns:a16="http://schemas.microsoft.com/office/drawing/2014/main" id="{D0E831ED-7B6F-4817-BF28-A992CD453F5F}"/>
               </a:ext>
             </a:extLst>
           </p:cNvPr>
@@ -2134,7 +2134,7 @@
           <p:cNvPr id="4" name="Content Placeholder 3">
             <a:extLst xmlns:a="http://schemas.openxmlformats.org/drawingml/2006/main">
               <a:ext uri="{FF2B5EF4-FFF2-40B4-BE49-F238E27FC236}">
-                <a16:creationId xmlns:a16="http://schemas.microsoft.com/office/drawing/2014/main" id="{C8CDDC9E-E2A1-44FF-9876-38A378828916}"/>
+                <a16:creationId xmlns:a16="http://schemas.microsoft.com/office/drawing/2014/main" id="{70D2A3EE-DDDA-4D1A-97E3-573CA63F1DE1}"/>
               </a:ext>
             </a:extLst>
           </p:cNvPr>
@@ -2238,7 +2238,7 @@
           <p:cNvPr id="5" name="Date Placeholder 4">
             <a:extLst xmlns:a="http://schemas.openxmlformats.org/drawingml/2006/main">
               <a:ext uri="{FF2B5EF4-FFF2-40B4-BE49-F238E27FC236}">
-                <a16:creationId xmlns:a16="http://schemas.microsoft.com/office/drawing/2014/main" id="{40B9FF8F-7C01-4235-9069-EE61C9F8402C}"/>
+                <a16:creationId xmlns:a16="http://schemas.microsoft.com/office/drawing/2014/main" id="{F9128057-D0C3-4848-8C4C-43CFD46CF490}"/>
               </a:ext>
             </a:extLst>
           </p:cNvPr>
@@ -2265,7 +2265,7 @@
           <p:cNvPr id="6" name="Footer Placeholder 5">
             <a:extLst xmlns:a="http://schemas.openxmlformats.org/drawingml/2006/main">
               <a:ext uri="{FF2B5EF4-FFF2-40B4-BE49-F238E27FC236}">
-                <a16:creationId xmlns:a16="http://schemas.microsoft.com/office/drawing/2014/main" id="{637997F0-1F18-4C51-B334-370161252308}"/>
+                <a16:creationId xmlns:a16="http://schemas.microsoft.com/office/drawing/2014/main" id="{694B529D-C3AB-4605-A1BD-BC86AD877CD1}"/>
               </a:ext>
             </a:extLst>
           </p:cNvPr>
@@ -2288,7 +2288,7 @@
           <p:cNvPr id="7" name="Slide Number Placeholder 6">
             <a:extLst xmlns:a="http://schemas.openxmlformats.org/drawingml/2006/main">
               <a:ext uri="{FF2B5EF4-FFF2-40B4-BE49-F238E27FC236}">
-                <a16:creationId xmlns:a16="http://schemas.microsoft.com/office/drawing/2014/main" id="{8BCDB2FD-2DAB-4753-B1D2-B3AC76C200F6}"/>
+                <a16:creationId xmlns:a16="http://schemas.microsoft.com/office/drawing/2014/main" id="{1BE3F1C6-9A8C-4410-8E2B-049FEC2F9CF5}"/>
               </a:ext>
             </a:extLst>
           </p:cNvPr>
@@ -2332,7 +2332,7 @@
           <p:cNvPr id="2" name="Title 1">
             <a:extLst xmlns:a="http://schemas.openxmlformats.org/drawingml/2006/main">
               <a:ext uri="{FF2B5EF4-FFF2-40B4-BE49-F238E27FC236}">
-                <a16:creationId xmlns:a16="http://schemas.microsoft.com/office/drawing/2014/main" id="{9D4DDBF1-A4EA-4AD9-8DA1-3C141B31C9E4}"/>
+                <a16:creationId xmlns:a16="http://schemas.microsoft.com/office/drawing/2014/main" id="{995D3EC4-20DA-41F9-B84E-E07F9D33F530}"/>
               </a:ext>
             </a:extLst>
           </p:cNvPr>
@@ -2364,7 +2364,7 @@
           <p:cNvPr id="3" name="Text Placeholder 2">
             <a:extLst xmlns:a="http://schemas.openxmlformats.org/drawingml/2006/main">
               <a:ext uri="{FF2B5EF4-FFF2-40B4-BE49-F238E27FC236}">
-                <a16:creationId xmlns:a16="http://schemas.microsoft.com/office/drawing/2014/main" id="{E46059DE-ADAB-493E-B20E-466AA36D9334}"/>
+                <a16:creationId xmlns:a16="http://schemas.microsoft.com/office/drawing/2014/main" id="{0393E8A2-36F7-4232-B356-6D022617ED09}"/>
               </a:ext>
             </a:extLst>
           </p:cNvPr>
@@ -2436,7 +2436,7 @@
           <p:cNvPr id="4" name="Content Placeholder 3">
             <a:extLst xmlns:a="http://schemas.openxmlformats.org/drawingml/2006/main">
               <a:ext uri="{FF2B5EF4-FFF2-40B4-BE49-F238E27FC236}">
-                <a16:creationId xmlns:a16="http://schemas.microsoft.com/office/drawing/2014/main" id="{525EBE74-AE6E-478C-A619-ED79DAFE86AB}"/>
+                <a16:creationId xmlns:a16="http://schemas.microsoft.com/office/drawing/2014/main" id="{F499EB6E-70D6-4A17-BD05-2C9B4270CB49}"/>
               </a:ext>
             </a:extLst>
           </p:cNvPr>
@@ -2540,7 +2540,7 @@
           <p:cNvPr id="5" name="Text Placeholder 4">
             <a:extLst xmlns:a="http://schemas.openxmlformats.org/drawingml/2006/main">
               <a:ext uri="{FF2B5EF4-FFF2-40B4-BE49-F238E27FC236}">
-                <a16:creationId xmlns:a16="http://schemas.microsoft.com/office/drawing/2014/main" id="{54E715C4-D895-4C02-860B-563839F61246}"/>
+                <a16:creationId xmlns:a16="http://schemas.microsoft.com/office/drawing/2014/main" id="{D6CA97CB-C6EB-4394-AC6E-17C8CE30DDAB}"/>
               </a:ext>
             </a:extLst>
           </p:cNvPr>
@@ -2612,7 +2612,7 @@
           <p:cNvPr id="6" name="Content Placeholder 5">
             <a:extLst xmlns:a="http://schemas.openxmlformats.org/drawingml/2006/main">
               <a:ext uri="{FF2B5EF4-FFF2-40B4-BE49-F238E27FC236}">
-                <a16:creationId xmlns:a16="http://schemas.microsoft.com/office/drawing/2014/main" id="{E7E411F3-483A-4E11-8597-9AD52EDD539C}"/>
+                <a16:creationId xmlns:a16="http://schemas.microsoft.com/office/drawing/2014/main" id="{8AF1FE10-F726-4B8D-87CC-44F326E57F8B}"/>
               </a:ext>
             </a:extLst>
           </p:cNvPr>
@@ -2716,7 +2716,7 @@
           <p:cNvPr id="7" name="Date Placeholder 6">
             <a:extLst xmlns:a="http://schemas.openxmlformats.org/drawingml/2006/main">
               <a:ext uri="{FF2B5EF4-FFF2-40B4-BE49-F238E27FC236}">
-                <a16:creationId xmlns:a16="http://schemas.microsoft.com/office/drawing/2014/main" id="{ABC901E2-D8F6-4C13-A375-E48C7BBE4463}"/>
+                <a16:creationId xmlns:a16="http://schemas.microsoft.com/office/drawing/2014/main" id="{300D3E7F-D638-485E-B9DE-9882971E795E}"/>
               </a:ext>
             </a:extLst>
           </p:cNvPr>
@@ -2743,7 +2743,7 @@
           <p:cNvPr id="8" name="Footer Placeholder 7">
             <a:extLst xmlns:a="http://schemas.openxmlformats.org/drawingml/2006/main">
               <a:ext uri="{FF2B5EF4-FFF2-40B4-BE49-F238E27FC236}">
-                <a16:creationId xmlns:a16="http://schemas.microsoft.com/office/drawing/2014/main" id="{9CE75E6D-13A9-4E9D-8332-A0BB10AE684C}"/>
+                <a16:creationId xmlns:a16="http://schemas.microsoft.com/office/drawing/2014/main" id="{37A918EE-3E4B-4163-88B2-A0F531986CAF}"/>
               </a:ext>
             </a:extLst>
           </p:cNvPr>
@@ -2766,7 +2766,7 @@
           <p:cNvPr id="9" name="Slide Number Placeholder 8">
             <a:extLst xmlns:a="http://schemas.openxmlformats.org/drawingml/2006/main">
               <a:ext uri="{FF2B5EF4-FFF2-40B4-BE49-F238E27FC236}">
-                <a16:creationId xmlns:a16="http://schemas.microsoft.com/office/drawing/2014/main" id="{8ACA2837-EEAD-4D61-AE1E-37101690D3FB}"/>
+                <a16:creationId xmlns:a16="http://schemas.microsoft.com/office/drawing/2014/main" id="{232A643C-2F04-43CA-9A2E-EDF1079EF196}"/>
               </a:ext>
             </a:extLst>
           </p:cNvPr>
@@ -2810,7 +2810,7 @@
           <p:cNvPr id="2" name="Title 1">
             <a:extLst xmlns:a="http://schemas.openxmlformats.org/drawingml/2006/main">
               <a:ext uri="{FF2B5EF4-FFF2-40B4-BE49-F238E27FC236}">
-                <a16:creationId xmlns:a16="http://schemas.microsoft.com/office/drawing/2014/main" id="{9954A8A0-3C75-4CB5-9B35-50980A70F3A1}"/>
+                <a16:creationId xmlns:a16="http://schemas.microsoft.com/office/drawing/2014/main" id="{C0EC6A60-FAB6-430C-BD29-3BB46673AA90}"/>
               </a:ext>
             </a:extLst>
           </p:cNvPr>
@@ -2837,7 +2837,7 @@
           <p:cNvPr id="3" name="Date Placeholder 2">
             <a:extLst xmlns:a="http://schemas.openxmlformats.org/drawingml/2006/main">
               <a:ext uri="{FF2B5EF4-FFF2-40B4-BE49-F238E27FC236}">
-                <a16:creationId xmlns:a16="http://schemas.microsoft.com/office/drawing/2014/main" id="{F004C029-B5DE-41F5-A5B8-90F82703A520}"/>
+                <a16:creationId xmlns:a16="http://schemas.microsoft.com/office/drawing/2014/main" id="{A83276EF-6CDD-406E-AADF-267B57484EB4}"/>
               </a:ext>
             </a:extLst>
           </p:cNvPr>
@@ -2864,7 +2864,7 @@
           <p:cNvPr id="4" name="Footer Placeholder 3">
             <a:extLst xmlns:a="http://schemas.openxmlformats.org/drawingml/2006/main">
               <a:ext uri="{FF2B5EF4-FFF2-40B4-BE49-F238E27FC236}">
-                <a16:creationId xmlns:a16="http://schemas.microsoft.com/office/drawing/2014/main" id="{77DE1465-8EBE-40FD-9697-DCD4D3E98396}"/>
+                <a16:creationId xmlns:a16="http://schemas.microsoft.com/office/drawing/2014/main" id="{6F0CF609-DDD8-4E95-87EE-7A9203238B45}"/>
               </a:ext>
             </a:extLst>
           </p:cNvPr>
@@ -2887,7 +2887,7 @@
           <p:cNvPr id="5" name="Slide Number Placeholder 4">
             <a:extLst xmlns:a="http://schemas.openxmlformats.org/drawingml/2006/main">
               <a:ext uri="{FF2B5EF4-FFF2-40B4-BE49-F238E27FC236}">
-                <a16:creationId xmlns:a16="http://schemas.microsoft.com/office/drawing/2014/main" id="{BA82DBF7-9E57-4C5A-9F7B-777D0B5BC11F}"/>
+                <a16:creationId xmlns:a16="http://schemas.microsoft.com/office/drawing/2014/main" id="{62FD5ABC-DE45-42BE-A16A-15AC79E0CF51}"/>
               </a:ext>
             </a:extLst>
           </p:cNvPr>
@@ -2931,7 +2931,7 @@
           <p:cNvPr id="2" name="Date Placeholder 1">
             <a:extLst xmlns:a="http://schemas.openxmlformats.org/drawingml/2006/main">
               <a:ext uri="{FF2B5EF4-FFF2-40B4-BE49-F238E27FC236}">
-                <a16:creationId xmlns:a16="http://schemas.microsoft.com/office/drawing/2014/main" id="{078D49F2-DF9C-4D95-ADC2-3CC1E4172B3A}"/>
+                <a16:creationId xmlns:a16="http://schemas.microsoft.com/office/drawing/2014/main" id="{6323B773-BF87-4641-B264-1EB782C6C314}"/>
               </a:ext>
             </a:extLst>
           </p:cNvPr>
@@ -2958,7 +2958,7 @@
           <p:cNvPr id="3" name="Footer Placeholder 2">
             <a:extLst xmlns:a="http://schemas.openxmlformats.org/drawingml/2006/main">
               <a:ext uri="{FF2B5EF4-FFF2-40B4-BE49-F238E27FC236}">
-                <a16:creationId xmlns:a16="http://schemas.microsoft.com/office/drawing/2014/main" id="{9C57C159-3C8D-44B4-A767-09DC7F54D348}"/>
+                <a16:creationId xmlns:a16="http://schemas.microsoft.com/office/drawing/2014/main" id="{E937A554-670C-4089-A5E6-0DACF7200DBF}"/>
               </a:ext>
             </a:extLst>
           </p:cNvPr>
@@ -2981,7 +2981,7 @@
           <p:cNvPr id="4" name="Slide Number Placeholder 3">
             <a:extLst xmlns:a="http://schemas.openxmlformats.org/drawingml/2006/main">
               <a:ext uri="{FF2B5EF4-FFF2-40B4-BE49-F238E27FC236}">
-                <a16:creationId xmlns:a16="http://schemas.microsoft.com/office/drawing/2014/main" id="{6520C707-DC7E-4E9F-901C-999D95D4BF4D}"/>
+                <a16:creationId xmlns:a16="http://schemas.microsoft.com/office/drawing/2014/main" id="{384EA80B-40C9-4F61-AF8A-9F72EB8D59F0}"/>
               </a:ext>
             </a:extLst>
           </p:cNvPr>
@@ -3025,7 +3025,7 @@
           <p:cNvPr id="2" name="Title 1">
             <a:extLst xmlns:a="http://schemas.openxmlformats.org/drawingml/2006/main">
               <a:ext uri="{FF2B5EF4-FFF2-40B4-BE49-F238E27FC236}">
-                <a16:creationId xmlns:a16="http://schemas.microsoft.com/office/drawing/2014/main" id="{486E587C-F680-4765-86D2-30717D1E8F5E}"/>
+                <a16:creationId xmlns:a16="http://schemas.microsoft.com/office/drawing/2014/main" id="{F89EECAC-04A6-4E5A-B8CB-1D614CBA2971}"/>
               </a:ext>
             </a:extLst>
           </p:cNvPr>
@@ -3062,7 +3062,7 @@
           <p:cNvPr id="3" name="Content Placeholder 2">
             <a:extLst xmlns:a="http://schemas.openxmlformats.org/drawingml/2006/main">
               <a:ext uri="{FF2B5EF4-FFF2-40B4-BE49-F238E27FC236}">
-                <a16:creationId xmlns:a16="http://schemas.microsoft.com/office/drawing/2014/main" id="{AD2DEF8B-E32C-47EE-BC3E-5ED2172CFC65}"/>
+                <a16:creationId xmlns:a16="http://schemas.microsoft.com/office/drawing/2014/main" id="{877B83A3-9D00-4DE6-810C-7E8070B7BF83}"/>
               </a:ext>
             </a:extLst>
           </p:cNvPr>
@@ -3166,7 +3166,7 @@
           <p:cNvPr id="4" name="Text Placeholder 3">
             <a:extLst xmlns:a="http://schemas.openxmlformats.org/drawingml/2006/main">
               <a:ext uri="{FF2B5EF4-FFF2-40B4-BE49-F238E27FC236}">
-                <a16:creationId xmlns:a16="http://schemas.microsoft.com/office/drawing/2014/main" id="{2BBB9C0A-C415-41FD-B780-6E70DE85501A}"/>
+                <a16:creationId xmlns:a16="http://schemas.microsoft.com/office/drawing/2014/main" id="{482E1E9F-C7B2-4ABB-B1AC-C16E226DCAB4}"/>
               </a:ext>
             </a:extLst>
           </p:cNvPr>
@@ -3238,7 +3238,7 @@
           <p:cNvPr id="5" name="Date Placeholder 4">
             <a:extLst xmlns:a="http://schemas.openxmlformats.org/drawingml/2006/main">
               <a:ext uri="{FF2B5EF4-FFF2-40B4-BE49-F238E27FC236}">
-                <a16:creationId xmlns:a16="http://schemas.microsoft.com/office/drawing/2014/main" id="{42AEB680-CDC2-4677-9AC1-C5FEE225FB5B}"/>
+                <a16:creationId xmlns:a16="http://schemas.microsoft.com/office/drawing/2014/main" id="{17B2F304-BC0B-444A-83FF-CE215B983B8D}"/>
               </a:ext>
             </a:extLst>
           </p:cNvPr>
@@ -3265,7 +3265,7 @@
           <p:cNvPr id="6" name="Footer Placeholder 5">
             <a:extLst xmlns:a="http://schemas.openxmlformats.org/drawingml/2006/main">
               <a:ext uri="{FF2B5EF4-FFF2-40B4-BE49-F238E27FC236}">
-                <a16:creationId xmlns:a16="http://schemas.microsoft.com/office/drawing/2014/main" id="{876F8D54-025E-409F-9DFC-79CEEC893087}"/>
+                <a16:creationId xmlns:a16="http://schemas.microsoft.com/office/drawing/2014/main" id="{6DDA0298-3BC4-464A-9C1B-4859338487E8}"/>
               </a:ext>
             </a:extLst>
           </p:cNvPr>
@@ -3288,7 +3288,7 @@
           <p:cNvPr id="7" name="Slide Number Placeholder 6">
             <a:extLst xmlns:a="http://schemas.openxmlformats.org/drawingml/2006/main">
               <a:ext uri="{FF2B5EF4-FFF2-40B4-BE49-F238E27FC236}">
-                <a16:creationId xmlns:a16="http://schemas.microsoft.com/office/drawing/2014/main" id="{27856734-3642-4299-8FC0-191C5453699D}"/>
+                <a16:creationId xmlns:a16="http://schemas.microsoft.com/office/drawing/2014/main" id="{04E8FB30-E301-4025-9652-64B0A5601F18}"/>
               </a:ext>
             </a:extLst>
           </p:cNvPr>
@@ -3332,7 +3332,7 @@
           <p:cNvPr id="2" name="Title 1">
             <a:extLst xmlns:a="http://schemas.openxmlformats.org/drawingml/2006/main">
               <a:ext uri="{FF2B5EF4-FFF2-40B4-BE49-F238E27FC236}">
-                <a16:creationId xmlns:a16="http://schemas.microsoft.com/office/drawing/2014/main" id="{9ADDBA91-FA60-458F-8DB3-33F4755EEA08}"/>
+                <a16:creationId xmlns:a16="http://schemas.microsoft.com/office/drawing/2014/main" id="{058CA13B-21F0-4D10-8F51-D20C3D5CBAC3}"/>
               </a:ext>
             </a:extLst>
           </p:cNvPr>
@@ -3369,7 +3369,7 @@
           <p:cNvPr id="3" name="Picture Placeholder 2">
             <a:extLst xmlns:a="http://schemas.openxmlformats.org/drawingml/2006/main">
               <a:ext uri="{FF2B5EF4-FFF2-40B4-BE49-F238E27FC236}">
-                <a16:creationId xmlns:a16="http://schemas.microsoft.com/office/drawing/2014/main" id="{E2EFB459-D552-469B-BF18-4E4758E9AC0C}"/>
+                <a16:creationId xmlns:a16="http://schemas.microsoft.com/office/drawing/2014/main" id="{EEB7A2CB-1F1E-4D0F-8642-4095DA80D909}"/>
               </a:ext>
             </a:extLst>
           </p:cNvPr>
@@ -3434,7 +3434,7 @@
           <p:cNvPr id="4" name="Text Placeholder 3">
             <a:extLst xmlns:a="http://schemas.openxmlformats.org/drawingml/2006/main">
               <a:ext uri="{FF2B5EF4-FFF2-40B4-BE49-F238E27FC236}">
-                <a16:creationId xmlns:a16="http://schemas.microsoft.com/office/drawing/2014/main" id="{B8391B98-3DA5-4996-BD5A-E9147538EE7D}"/>
+                <a16:creationId xmlns:a16="http://schemas.microsoft.com/office/drawing/2014/main" id="{19F26E93-180A-4327-A535-EC27257650F6}"/>
               </a:ext>
             </a:extLst>
           </p:cNvPr>
@@ -3506,7 +3506,7 @@
           <p:cNvPr id="5" name="Date Placeholder 4">
             <a:extLst xmlns:a="http://schemas.openxmlformats.org/drawingml/2006/main">
               <a:ext uri="{FF2B5EF4-FFF2-40B4-BE49-F238E27FC236}">
-                <a16:creationId xmlns:a16="http://schemas.microsoft.com/office/drawing/2014/main" id="{D34884D0-C75D-4E5C-A550-733A866A0860}"/>
+                <a16:creationId xmlns:a16="http://schemas.microsoft.com/office/drawing/2014/main" id="{59A8F921-A694-4782-B97D-14ADE1CC94CA}"/>
               </a:ext>
             </a:extLst>
           </p:cNvPr>
@@ -3533,7 +3533,7 @@
           <p:cNvPr id="6" name="Footer Placeholder 5">
             <a:extLst xmlns:a="http://schemas.openxmlformats.org/drawingml/2006/main">
               <a:ext uri="{FF2B5EF4-FFF2-40B4-BE49-F238E27FC236}">
-                <a16:creationId xmlns:a16="http://schemas.microsoft.com/office/drawing/2014/main" id="{EC82E478-1B58-4923-A2DC-8010B2747173}"/>
+                <a16:creationId xmlns:a16="http://schemas.microsoft.com/office/drawing/2014/main" id="{E1C39C2F-3C81-46A1-B7B5-292E3B6A91EE}"/>
               </a:ext>
             </a:extLst>
           </p:cNvPr>
@@ -3556,7 +3556,7 @@
           <p:cNvPr id="7" name="Slide Number Placeholder 6">
             <a:extLst xmlns:a="http://schemas.openxmlformats.org/drawingml/2006/main">
               <a:ext uri="{FF2B5EF4-FFF2-40B4-BE49-F238E27FC236}">
-                <a16:creationId xmlns:a16="http://schemas.microsoft.com/office/drawing/2014/main" id="{12594374-4D2C-4D81-ABC6-CA65D8A9A27C}"/>
+                <a16:creationId xmlns:a16="http://schemas.microsoft.com/office/drawing/2014/main" id="{6589E8C4-8CCA-4368-86A8-EEED4A7BE6EA}"/>
               </a:ext>
             </a:extLst>
           </p:cNvPr>
@@ -3605,7 +3605,7 @@
           <p:cNvPr id="2" name="Title Placeholder 1">
             <a:extLst xmlns:a="http://schemas.openxmlformats.org/drawingml/2006/main">
               <a:ext uri="{FF2B5EF4-FFF2-40B4-BE49-F238E27FC236}">
-                <a16:creationId xmlns:a16="http://schemas.microsoft.com/office/drawing/2014/main" id="{7E286A80-1075-45D6-BE0A-F64C832B54DD}"/>
+                <a16:creationId xmlns:a16="http://schemas.microsoft.com/office/drawing/2014/main" id="{943A4892-1F9E-4FC1-BE16-00B9E8601532}"/>
               </a:ext>
             </a:extLst>
           </p:cNvPr>
@@ -3642,7 +3642,7 @@
           <p:cNvPr id="3" name="Text Placeholder 2">
             <a:extLst xmlns:a="http://schemas.openxmlformats.org/drawingml/2006/main">
               <a:ext uri="{FF2B5EF4-FFF2-40B4-BE49-F238E27FC236}">
-                <a16:creationId xmlns:a16="http://schemas.microsoft.com/office/drawing/2014/main" id="{43CFA997-0AEB-452D-8BC4-E46B832701F3}"/>
+                <a16:creationId xmlns:a16="http://schemas.microsoft.com/office/drawing/2014/main" id="{738D891C-6895-4B2F-B8FB-A799F29ED0D8}"/>
               </a:ext>
             </a:extLst>
           </p:cNvPr>
@@ -3714,7 +3714,7 @@
           <p:cNvPr id="4" name="Date Placeholder 3">
             <a:extLst xmlns:a="http://schemas.openxmlformats.org/drawingml/2006/main">
               <a:ext uri="{FF2B5EF4-FFF2-40B4-BE49-F238E27FC236}">
-                <a16:creationId xmlns:a16="http://schemas.microsoft.com/office/drawing/2014/main" id="{C934CD9D-3AB1-4125-AA9D-3E2DA886EAE4}"/>
+                <a16:creationId xmlns:a16="http://schemas.microsoft.com/office/drawing/2014/main" id="{075FD636-437C-439B-AE5C-120D09CD33A7}"/>
               </a:ext>
             </a:extLst>
           </p:cNvPr>
@@ -3760,7 +3760,7 @@
           <p:cNvPr id="5" name="Footer Placeholder 4">
             <a:extLst xmlns:a="http://schemas.openxmlformats.org/drawingml/2006/main">
               <a:ext uri="{FF2B5EF4-FFF2-40B4-BE49-F238E27FC236}">
-                <a16:creationId xmlns:a16="http://schemas.microsoft.com/office/drawing/2014/main" id="{0227A70B-897E-4766-853D-B41C8FBF6C11}"/>
+                <a16:creationId xmlns:a16="http://schemas.microsoft.com/office/drawing/2014/main" id="{A850C797-DA58-4970-9205-9AD6922E6A4A}"/>
               </a:ext>
             </a:extLst>
           </p:cNvPr>
@@ -3802,7 +3802,7 @@
           <p:cNvPr id="6" name="Slide Number Placeholder 5">
             <a:extLst xmlns:a="http://schemas.openxmlformats.org/drawingml/2006/main">
               <a:ext uri="{FF2B5EF4-FFF2-40B4-BE49-F238E27FC236}">
-                <a16:creationId xmlns:a16="http://schemas.microsoft.com/office/drawing/2014/main" id="{C74CF3EA-557E-48AC-AE00-0FE07B535F2E}"/>
+                <a16:creationId xmlns:a16="http://schemas.microsoft.com/office/drawing/2014/main" id="{69ED1C28-3CF2-492C-B20F-0E0684861B1B}"/>
               </a:ext>
             </a:extLst>
           </p:cNvPr>
@@ -3847,17 +3847,17 @@
   </p:cSld>
   <p:clrMap bg1="lt1" tx1="dk1" bg2="lt2" tx2="dk2" accent1="accent1" accent2="accent2" accent3="accent3" accent4="accent4" accent5="accent5" accent6="accent6" hlink="hlink" folHlink="folHlink"/>
   <p:sldLayoutIdLst>
-    <p:sldLayoutId xmlns:r="http://schemas.openxmlformats.org/officeDocument/2006/relationships" id="2147483649" r:id="Rc728c456b9f544ae"/>
-    <p:sldLayoutId xmlns:r="http://schemas.openxmlformats.org/officeDocument/2006/relationships" id="2147483650" r:id="R29d592f2d46c48c1"/>
-    <p:sldLayoutId xmlns:r="http://schemas.openxmlformats.org/officeDocument/2006/relationships" id="2147483651" r:id="R630946af37e04ca5"/>
-    <p:sldLayoutId xmlns:r="http://schemas.openxmlformats.org/officeDocument/2006/relationships" id="2147483652" r:id="R2913747249844f10"/>
-    <p:sldLayoutId xmlns:r="http://schemas.openxmlformats.org/officeDocument/2006/relationships" id="2147483653" r:id="R8d2702ad5f8a4b68"/>
-    <p:sldLayoutId xmlns:r="http://schemas.openxmlformats.org/officeDocument/2006/relationships" id="2147483654" r:id="Rcff53d9c67714dda"/>
-    <p:sldLayoutId xmlns:r="http://schemas.openxmlformats.org/officeDocument/2006/relationships" id="2147483655" r:id="Re221b716230844d5"/>
-    <p:sldLayoutId xmlns:r="http://schemas.openxmlformats.org/officeDocument/2006/relationships" id="2147483656" r:id="Re09ed32a86cd4cf5"/>
-    <p:sldLayoutId xmlns:r="http://schemas.openxmlformats.org/officeDocument/2006/relationships" id="2147483657" r:id="Reb32572ddb654371"/>
-    <p:sldLayoutId xmlns:r="http://schemas.openxmlformats.org/officeDocument/2006/relationships" id="2147483658" r:id="R9d6fc4321caa45a8"/>
-    <p:sldLayoutId xmlns:r="http://schemas.openxmlformats.org/officeDocument/2006/relationships" id="2147483659" r:id="R2aa25080a54f45c3"/>
+    <p:sldLayoutId xmlns:r="http://schemas.openxmlformats.org/officeDocument/2006/relationships" id="2147483649" r:id="R3fdfcbceb0b64bb8"/>
+    <p:sldLayoutId xmlns:r="http://schemas.openxmlformats.org/officeDocument/2006/relationships" id="2147483650" r:id="Rbb1df45825a04161"/>
+    <p:sldLayoutId xmlns:r="http://schemas.openxmlformats.org/officeDocument/2006/relationships" id="2147483651" r:id="Rb4ade24127e245a1"/>
+    <p:sldLayoutId xmlns:r="http://schemas.openxmlformats.org/officeDocument/2006/relationships" id="2147483652" r:id="Re90c8173a7be4fd3"/>
+    <p:sldLayoutId xmlns:r="http://schemas.openxmlformats.org/officeDocument/2006/relationships" id="2147483653" r:id="R7a31e01b3ecb4f1e"/>
+    <p:sldLayoutId xmlns:r="http://schemas.openxmlformats.org/officeDocument/2006/relationships" id="2147483654" r:id="Rbf58d5adaf524807"/>
+    <p:sldLayoutId xmlns:r="http://schemas.openxmlformats.org/officeDocument/2006/relationships" id="2147483655" r:id="Re36c2615705c448a"/>
+    <p:sldLayoutId xmlns:r="http://schemas.openxmlformats.org/officeDocument/2006/relationships" id="2147483656" r:id="R619c0990c8f04ec7"/>
+    <p:sldLayoutId xmlns:r="http://schemas.openxmlformats.org/officeDocument/2006/relationships" id="2147483657" r:id="R3dd997277de74a62"/>
+    <p:sldLayoutId xmlns:r="http://schemas.openxmlformats.org/officeDocument/2006/relationships" id="2147483658" r:id="R1aefe21521ea4a64"/>
+    <p:sldLayoutId xmlns:r="http://schemas.openxmlformats.org/officeDocument/2006/relationships" id="2147483659" r:id="R0af4bd139b9a4abf"/>
   </p:sldLayoutIdLst>
   <p:txStyles>
     <p:titleStyle>
@@ -4410,7 +4410,7 @@
           <p:cNvPr id="2" name="Rectangle 1">
             <a:extLst xmlns:a="http://schemas.openxmlformats.org/drawingml/2006/main">
               <a:ext uri="{FF2B5EF4-FFF2-40B4-BE49-F238E27FC236}">
-                <a16:creationId xmlns:a16="http://schemas.microsoft.com/office/drawing/2014/main" id="{3A802FC1-DD42-40F7-882D-A4F10A5D4385}"/>
+                <a16:creationId xmlns:a16="http://schemas.microsoft.com/office/drawing/2014/main" id="{29E4B705-EEBE-42D9-AC3B-BCAD9849810A}"/>
               </a:ext>
             </a:extLst>
           </p:cNvPr>
@@ -4465,7 +4465,7 @@
           <p:cNvPr id="3" name="TextBox 2">
             <a:extLst xmlns:a="http://schemas.openxmlformats.org/drawingml/2006/main">
               <a:ext uri="{FF2B5EF4-FFF2-40B4-BE49-F238E27FC236}">
-                <a16:creationId xmlns:a16="http://schemas.microsoft.com/office/drawing/2014/main" id="{2F41E7E5-491E-4A97-AE6C-DDFCF62DA180}"/>
+                <a16:creationId xmlns:a16="http://schemas.microsoft.com/office/drawing/2014/main" id="{6C0A384D-962E-43F3-B174-16FCB40E4209}"/>
               </a:ext>
             </a:extLst>
           </p:cNvPr>
@@ -4512,7 +4512,7 @@
           <p:cNvPr id="4" name="TextBox 3">
             <a:extLst xmlns:a="http://schemas.openxmlformats.org/drawingml/2006/main">
               <a:ext uri="{FF2B5EF4-FFF2-40B4-BE49-F238E27FC236}">
-                <a16:creationId xmlns:a16="http://schemas.microsoft.com/office/drawing/2014/main" id="{CC609B19-3EF3-4301-ACEA-94F0B28A4182}"/>
+                <a16:creationId xmlns:a16="http://schemas.microsoft.com/office/drawing/2014/main" id="{234A5B92-F947-4472-B88C-20E48ED2875A}"/>
               </a:ext>
             </a:extLst>
           </p:cNvPr>
@@ -4580,7 +4580,7 @@
           <p:cNvPr id="5" name="TextBox 4">
             <a:extLst xmlns:a="http://schemas.openxmlformats.org/drawingml/2006/main">
               <a:ext uri="{FF2B5EF4-FFF2-40B4-BE49-F238E27FC236}">
-                <a16:creationId xmlns:a16="http://schemas.microsoft.com/office/drawing/2014/main" id="{E36EB339-34E8-4E64-B076-B7908F9F9D3B}"/>
+                <a16:creationId xmlns:a16="http://schemas.microsoft.com/office/drawing/2014/main" id="{8E413A5C-86D5-4DD4-BA34-6BCAA176834F}"/>
               </a:ext>
             </a:extLst>
           </p:cNvPr>
@@ -4627,7 +4627,7 @@
           <p:cNvPr id="6" name="Rectangle 5">
             <a:extLst xmlns:a="http://schemas.openxmlformats.org/drawingml/2006/main">
               <a:ext uri="{FF2B5EF4-FFF2-40B4-BE49-F238E27FC236}">
-                <a16:creationId xmlns:a16="http://schemas.microsoft.com/office/drawing/2014/main" id="{F1266609-51AC-4AA2-B8ED-052D94A5ED81}"/>
+                <a16:creationId xmlns:a16="http://schemas.microsoft.com/office/drawing/2014/main" id="{EAEA0DF9-4A2D-49FF-97E0-99FD89855FAA}"/>
               </a:ext>
             </a:extLst>
           </p:cNvPr>
@@ -4682,7 +4682,7 @@
           <p:cNvPr id="7" name="TextBox 6">
             <a:extLst xmlns:a="http://schemas.openxmlformats.org/drawingml/2006/main">
               <a:ext uri="{FF2B5EF4-FFF2-40B4-BE49-F238E27FC236}">
-                <a16:creationId xmlns:a16="http://schemas.microsoft.com/office/drawing/2014/main" id="{A0AC0A77-102F-42DF-9483-EAA23A373449}"/>
+                <a16:creationId xmlns:a16="http://schemas.microsoft.com/office/drawing/2014/main" id="{C571D4DC-D040-4AF5-8E2B-B31E633F1FD3}"/>
               </a:ext>
             </a:extLst>
           </p:cNvPr>
@@ -4729,7 +4729,7 @@
           <p:cNvPr id="8" name="TextBox 7">
             <a:extLst xmlns:a="http://schemas.openxmlformats.org/drawingml/2006/main">
               <a:ext uri="{FF2B5EF4-FFF2-40B4-BE49-F238E27FC236}">
-                <a16:creationId xmlns:a16="http://schemas.microsoft.com/office/drawing/2014/main" id="{09859C1D-9383-4317-AF2D-85985F71E035}"/>
+                <a16:creationId xmlns:a16="http://schemas.microsoft.com/office/drawing/2014/main" id="{EE424507-2247-40D7-8718-00F083161A05}"/>
               </a:ext>
             </a:extLst>
           </p:cNvPr>
@@ -4741,7 +4741,7 @@
         <p:spPr>
           <a:xfrm xmlns:a="http://schemas.openxmlformats.org/drawingml/2006/main">
             <a:off x="8732520" y="1700784"/>
-            <a:ext cx="2880360" cy="502920"/>
+            <a:ext cx="2880360" cy="515112"/>
           </a:xfrm>
           <a:prstGeom xmlns:a="http://schemas.openxmlformats.org/drawingml/2006/main" prst="rect">
             <a:avLst/>
@@ -4766,7 +4766,7 @@
                 <a:ea typeface="Aptos"/>
                 <a:cs typeface="Aptos"/>
               </a:rPr>
-              <a:t>2026.07.23-10</a:t>
+              <a:t>2026.07.23-11</a:t>
             </a:r>
           </a:p>
         </p:txBody>
@@ -4776,7 +4776,7 @@
           <p:cNvPr id="9" name="TextBox 8">
             <a:extLst xmlns:a="http://schemas.openxmlformats.org/drawingml/2006/main">
               <a:ext uri="{FF2B5EF4-FFF2-40B4-BE49-F238E27FC236}">
-                <a16:creationId xmlns:a16="http://schemas.microsoft.com/office/drawing/2014/main" id="{C5618F25-16BD-409D-979D-43321B5460D4}"/>
+                <a16:creationId xmlns:a16="http://schemas.microsoft.com/office/drawing/2014/main" id="{BBBBC098-8E09-4026-AD22-4E9149D8F15B}"/>
               </a:ext>
             </a:extLst>
           </p:cNvPr>
@@ -4844,7 +4844,7 @@
           <p:cNvPr id="10" name="TextBox 9">
             <a:extLst xmlns:a="http://schemas.openxmlformats.org/drawingml/2006/main">
               <a:ext uri="{FF2B5EF4-FFF2-40B4-BE49-F238E27FC236}">
-                <a16:creationId xmlns:a16="http://schemas.microsoft.com/office/drawing/2014/main" id="{8D7FF5CD-5DC8-4683-BF04-635BA754A745}"/>
+                <a16:creationId xmlns:a16="http://schemas.microsoft.com/office/drawing/2014/main" id="{AB4102BF-6240-4164-B5F3-1DED30625091}"/>
               </a:ext>
             </a:extLst>
           </p:cNvPr>
@@ -4891,7 +4891,7 @@
           <p:cNvPr id="11" name="TextBox 10">
             <a:extLst xmlns:a="http://schemas.openxmlformats.org/drawingml/2006/main">
               <a:ext uri="{FF2B5EF4-FFF2-40B4-BE49-F238E27FC236}">
-                <a16:creationId xmlns:a16="http://schemas.microsoft.com/office/drawing/2014/main" id="{F9593B6C-5399-4D03-9248-D50D68285725}"/>
+                <a16:creationId xmlns:a16="http://schemas.microsoft.com/office/drawing/2014/main" id="{50473676-FF63-4423-B6E0-710162F4D74E}"/>
               </a:ext>
             </a:extLst>
           </p:cNvPr>
@@ -4938,7 +4938,7 @@
           <p:cNvPr id="12" name="TextBox 11">
             <a:extLst xmlns:a="http://schemas.openxmlformats.org/drawingml/2006/main">
               <a:ext uri="{FF2B5EF4-FFF2-40B4-BE49-F238E27FC236}">
-                <a16:creationId xmlns:a16="http://schemas.microsoft.com/office/drawing/2014/main" id="{4E64A404-A657-4747-B8EC-2293B4E56B5D}"/>
+                <a16:creationId xmlns:a16="http://schemas.microsoft.com/office/drawing/2014/main" id="{6E5B62EA-260B-4FB3-8CE0-A78453F63F02}"/>
               </a:ext>
             </a:extLst>
           </p:cNvPr>
@@ -4983,7 +4983,7 @@
     </p:spTree>
     <p:extLst>
       <p:ext uri="{BB962C8B-B14F-4D97-AF65-F5344CB8AC3E}">
-        <p14:creationId xmlns:p14="http://schemas.microsoft.com/office/powerpoint/2010/main" val="1938237846"/>
+        <p14:creationId xmlns:p14="http://schemas.microsoft.com/office/powerpoint/2010/main" val="1871162585"/>
       </p:ext>
     </p:extLst>
   </p:cSld>
@@ -5007,7 +5007,7 @@
           <p:cNvPr id="2" name="TextBox 1">
             <a:extLst xmlns:a="http://schemas.openxmlformats.org/drawingml/2006/main">
               <a:ext uri="{FF2B5EF4-FFF2-40B4-BE49-F238E27FC236}">
-                <a16:creationId xmlns:a16="http://schemas.microsoft.com/office/drawing/2014/main" id="{919E7138-22D0-4A43-902D-3362EB82BAF4}"/>
+                <a16:creationId xmlns:a16="http://schemas.microsoft.com/office/drawing/2014/main" id="{4061435B-403C-41EE-882F-4DCA3305C83D}"/>
               </a:ext>
             </a:extLst>
           </p:cNvPr>
@@ -5054,7 +5054,7 @@
           <p:cNvPr id="3" name="TextBox 2">
             <a:extLst xmlns:a="http://schemas.openxmlformats.org/drawingml/2006/main">
               <a:ext uri="{FF2B5EF4-FFF2-40B4-BE49-F238E27FC236}">
-                <a16:creationId xmlns:a16="http://schemas.microsoft.com/office/drawing/2014/main" id="{B3047D91-2D04-4767-86EB-A86A7A5E2C8F}"/>
+                <a16:creationId xmlns:a16="http://schemas.microsoft.com/office/drawing/2014/main" id="{13E66D01-A8BC-4CEF-904C-0AA0ED8CCF0E}"/>
               </a:ext>
             </a:extLst>
           </p:cNvPr>
@@ -5101,7 +5101,7 @@
           <p:cNvPr id="4" name="Rectangle 3">
             <a:extLst xmlns:a="http://schemas.openxmlformats.org/drawingml/2006/main">
               <a:ext uri="{FF2B5EF4-FFF2-40B4-BE49-F238E27FC236}">
-                <a16:creationId xmlns:a16="http://schemas.microsoft.com/office/drawing/2014/main" id="{F1F9DF7F-035E-45C9-8502-2DB4BFEB638C}"/>
+                <a16:creationId xmlns:a16="http://schemas.microsoft.com/office/drawing/2014/main" id="{118805B5-E92E-4BCF-AC31-9222A0154BA4}"/>
               </a:ext>
             </a:extLst>
           </p:cNvPr>
@@ -5156,7 +5156,7 @@
           <p:cNvPr id="5" name="Rectangle 4">
             <a:extLst xmlns:a="http://schemas.openxmlformats.org/drawingml/2006/main">
               <a:ext uri="{FF2B5EF4-FFF2-40B4-BE49-F238E27FC236}">
-                <a16:creationId xmlns:a16="http://schemas.microsoft.com/office/drawing/2014/main" id="{A33AF9FF-B92D-4B13-B21B-3652995735CE}"/>
+                <a16:creationId xmlns:a16="http://schemas.microsoft.com/office/drawing/2014/main" id="{58BF5723-FC6C-465B-81ED-95F776B91723}"/>
               </a:ext>
             </a:extLst>
           </p:cNvPr>
@@ -5211,7 +5211,7 @@
           <p:cNvPr id="6" name="TextBox 5">
             <a:extLst xmlns:a="http://schemas.openxmlformats.org/drawingml/2006/main">
               <a:ext uri="{FF2B5EF4-FFF2-40B4-BE49-F238E27FC236}">
-                <a16:creationId xmlns:a16="http://schemas.microsoft.com/office/drawing/2014/main" id="{CD24E779-5A34-4ABD-A272-802C0C0F0BEB}"/>
+                <a16:creationId xmlns:a16="http://schemas.microsoft.com/office/drawing/2014/main" id="{5C524E3B-0E1F-4EB2-A6C7-2926486806F9}"/>
               </a:ext>
             </a:extLst>
           </p:cNvPr>
@@ -5248,7 +5248,7 @@
                 <a:ea typeface="Aptos"/>
                 <a:cs typeface="Aptos"/>
               </a:rPr>
-              <a:t>Independent public evidence summary · 2026.07.23-10 · 2026-07-22 · Sources: EPO; Germany — official judgments; WIPO</a:t>
+              <a:t>Independent public evidence summary · 2026.07.23-11 · 2026-07-22 · Sources: EPO; Germany — official judgments; WIPO</a:t>
             </a:r>
           </a:p>
         </p:txBody>
@@ -5258,7 +5258,7 @@
           <p:cNvPr id="7" name="TextBox 6">
             <a:extLst xmlns:a="http://schemas.openxmlformats.org/drawingml/2006/main">
               <a:ext uri="{FF2B5EF4-FFF2-40B4-BE49-F238E27FC236}">
-                <a16:creationId xmlns:a16="http://schemas.microsoft.com/office/drawing/2014/main" id="{0A0F4D25-34AD-4E7C-AB78-8CFFADDA7E11}"/>
+                <a16:creationId xmlns:a16="http://schemas.microsoft.com/office/drawing/2014/main" id="{0CA9C8C8-D447-4886-BF19-4E01CC4E0AA8}"/>
               </a:ext>
             </a:extLst>
           </p:cNvPr>
@@ -5305,7 +5305,7 @@
           <p:cNvPr id="8" name="TextBox 7">
             <a:extLst xmlns:a="http://schemas.openxmlformats.org/drawingml/2006/main">
               <a:ext uri="{FF2B5EF4-FFF2-40B4-BE49-F238E27FC236}">
-                <a16:creationId xmlns:a16="http://schemas.microsoft.com/office/drawing/2014/main" id="{1A0AF63C-21FA-4092-B1AC-D1291AEEF601}"/>
+                <a16:creationId xmlns:a16="http://schemas.microsoft.com/office/drawing/2014/main" id="{D842F3C5-2175-4B43-A863-FF18D71790D3}"/>
               </a:ext>
             </a:extLst>
           </p:cNvPr>
@@ -5352,7 +5352,7 @@
           <p:cNvPr id="9" name="TextBox 8">
             <a:extLst xmlns:a="http://schemas.openxmlformats.org/drawingml/2006/main">
               <a:ext uri="{FF2B5EF4-FFF2-40B4-BE49-F238E27FC236}">
-                <a16:creationId xmlns:a16="http://schemas.microsoft.com/office/drawing/2014/main" id="{B5241BC5-3ED8-4EC8-AADC-3DD4CFD2767C}"/>
+                <a16:creationId xmlns:a16="http://schemas.microsoft.com/office/drawing/2014/main" id="{CB029BF5-8853-47D6-A275-2CC3EC2A5974}"/>
               </a:ext>
             </a:extLst>
           </p:cNvPr>
@@ -5449,7 +5449,7 @@
           <p:cNvPr id="10" name="Rounded Rectangle 9">
             <a:extLst xmlns:a="http://schemas.openxmlformats.org/drawingml/2006/main">
               <a:ext uri="{FF2B5EF4-FFF2-40B4-BE49-F238E27FC236}">
-                <a16:creationId xmlns:a16="http://schemas.microsoft.com/office/drawing/2014/main" id="{B1438402-381B-4AAD-9676-85A4DD63DE4B}"/>
+                <a16:creationId xmlns:a16="http://schemas.microsoft.com/office/drawing/2014/main" id="{B13824C7-7E33-43FD-A332-AF4A291D325C}"/>
               </a:ext>
             </a:extLst>
           </p:cNvPr>
@@ -5506,7 +5506,7 @@
           <p:cNvPr id="11" name="TextBox 10">
             <a:extLst xmlns:a="http://schemas.openxmlformats.org/drawingml/2006/main">
               <a:ext uri="{FF2B5EF4-FFF2-40B4-BE49-F238E27FC236}">
-                <a16:creationId xmlns:a16="http://schemas.microsoft.com/office/drawing/2014/main" id="{108BE035-9AC2-43F4-9DF3-E1F47F20DC2D}"/>
+                <a16:creationId xmlns:a16="http://schemas.microsoft.com/office/drawing/2014/main" id="{27E63F7D-BEDE-4368-93BF-17232098DB47}"/>
               </a:ext>
             </a:extLst>
           </p:cNvPr>
@@ -5553,7 +5553,7 @@
           <p:cNvPr id="12" name="TextBox 11">
             <a:extLst xmlns:a="http://schemas.openxmlformats.org/drawingml/2006/main">
               <a:ext uri="{FF2B5EF4-FFF2-40B4-BE49-F238E27FC236}">
-                <a16:creationId xmlns:a16="http://schemas.microsoft.com/office/drawing/2014/main" id="{D6C38CB4-B4E2-430C-BC1E-D49DA5ED5712}"/>
+                <a16:creationId xmlns:a16="http://schemas.microsoft.com/office/drawing/2014/main" id="{5C88AB4F-B0A1-4CF7-BCF3-3E89C2E99B84}"/>
               </a:ext>
             </a:extLst>
           </p:cNvPr>
@@ -5598,7 +5598,7 @@
     </p:spTree>
     <p:extLst>
       <p:ext uri="{BB962C8B-B14F-4D97-AF65-F5344CB8AC3E}">
-        <p14:creationId xmlns:p14="http://schemas.microsoft.com/office/powerpoint/2010/main" val="592291305"/>
+        <p14:creationId xmlns:p14="http://schemas.microsoft.com/office/powerpoint/2010/main" val="2147409095"/>
       </p:ext>
     </p:extLst>
   </p:cSld>
@@ -5622,7 +5622,7 @@
           <p:cNvPr id="2" name="TextBox 1">
             <a:extLst xmlns:a="http://schemas.openxmlformats.org/drawingml/2006/main">
               <a:ext uri="{FF2B5EF4-FFF2-40B4-BE49-F238E27FC236}">
-                <a16:creationId xmlns:a16="http://schemas.microsoft.com/office/drawing/2014/main" id="{2A44A638-96B0-4A07-87B7-BB6B394805B1}"/>
+                <a16:creationId xmlns:a16="http://schemas.microsoft.com/office/drawing/2014/main" id="{E1EECEAC-1FD4-4D7C-B18E-1AEA683D573F}"/>
               </a:ext>
             </a:extLst>
           </p:cNvPr>
@@ -5669,7 +5669,7 @@
           <p:cNvPr id="3" name="TextBox 2">
             <a:extLst xmlns:a="http://schemas.openxmlformats.org/drawingml/2006/main">
               <a:ext uri="{FF2B5EF4-FFF2-40B4-BE49-F238E27FC236}">
-                <a16:creationId xmlns:a16="http://schemas.microsoft.com/office/drawing/2014/main" id="{5CFC33C6-740C-4AFB-B44C-24C65963B123}"/>
+                <a16:creationId xmlns:a16="http://schemas.microsoft.com/office/drawing/2014/main" id="{0F960ED2-99D8-4D40-B0D7-5BD1ACC3B3E1}"/>
               </a:ext>
             </a:extLst>
           </p:cNvPr>
@@ -5716,7 +5716,7 @@
           <p:cNvPr id="4" name="Rectangle 3">
             <a:extLst xmlns:a="http://schemas.openxmlformats.org/drawingml/2006/main">
               <a:ext uri="{FF2B5EF4-FFF2-40B4-BE49-F238E27FC236}">
-                <a16:creationId xmlns:a16="http://schemas.microsoft.com/office/drawing/2014/main" id="{81574271-502F-47E1-8976-A2CDAA299D6B}"/>
+                <a16:creationId xmlns:a16="http://schemas.microsoft.com/office/drawing/2014/main" id="{0852A895-512A-4AB3-9480-2D373D027287}"/>
               </a:ext>
             </a:extLst>
           </p:cNvPr>
@@ -5771,7 +5771,7 @@
           <p:cNvPr id="5" name="Rectangle 4">
             <a:extLst xmlns:a="http://schemas.openxmlformats.org/drawingml/2006/main">
               <a:ext uri="{FF2B5EF4-FFF2-40B4-BE49-F238E27FC236}">
-                <a16:creationId xmlns:a16="http://schemas.microsoft.com/office/drawing/2014/main" id="{20EA3862-2E07-49EA-9213-61FB411FA095}"/>
+                <a16:creationId xmlns:a16="http://schemas.microsoft.com/office/drawing/2014/main" id="{D3AF4404-1FC8-4AA5-AE3E-3BEB6388E34E}"/>
               </a:ext>
             </a:extLst>
           </p:cNvPr>
@@ -5826,7 +5826,7 @@
           <p:cNvPr id="6" name="TextBox 5">
             <a:extLst xmlns:a="http://schemas.openxmlformats.org/drawingml/2006/main">
               <a:ext uri="{FF2B5EF4-FFF2-40B4-BE49-F238E27FC236}">
-                <a16:creationId xmlns:a16="http://schemas.microsoft.com/office/drawing/2014/main" id="{2D711961-EF14-4778-BE07-F026DD717C95}"/>
+                <a16:creationId xmlns:a16="http://schemas.microsoft.com/office/drawing/2014/main" id="{98FB1572-A2E0-4099-B715-728E4D6D4D6B}"/>
               </a:ext>
             </a:extLst>
           </p:cNvPr>
@@ -5863,7 +5863,7 @@
                 <a:ea typeface="Aptos"/>
                 <a:cs typeface="Aptos"/>
               </a:rPr>
-              <a:t>Independent public evidence summary · 2026.07.23-10 · 2026-07-22 · Sources: EPO Register; EP3032975B2; 8 Ni 18/24 (EP); 7 O 3341/24</a:t>
+              <a:t>Independent public evidence summary · 2026.07.23-11 · 2026-07-22 · Sources: EPO Register; EP3032975B2; 8 Ni 18/24 (EP); 7 O 3341/24</a:t>
             </a:r>
           </a:p>
         </p:txBody>
@@ -5873,7 +5873,7 @@
           <p:cNvPr id="7" name="TextBox 6">
             <a:extLst xmlns:a="http://schemas.openxmlformats.org/drawingml/2006/main">
               <a:ext uri="{FF2B5EF4-FFF2-40B4-BE49-F238E27FC236}">
-                <a16:creationId xmlns:a16="http://schemas.microsoft.com/office/drawing/2014/main" id="{A64C8169-10FC-45CE-A2BB-9B638BB9E399}"/>
+                <a16:creationId xmlns:a16="http://schemas.microsoft.com/office/drawing/2014/main" id="{2226E46E-671A-49C4-9E94-1DE640E3597F}"/>
               </a:ext>
             </a:extLst>
           </p:cNvPr>
@@ -5920,7 +5920,7 @@
           <p:cNvPr id="8" name="Rounded Rectangle 7">
             <a:extLst xmlns:a="http://schemas.openxmlformats.org/drawingml/2006/main">
               <a:ext uri="{FF2B5EF4-FFF2-40B4-BE49-F238E27FC236}">
-                <a16:creationId xmlns:a16="http://schemas.microsoft.com/office/drawing/2014/main" id="{8B8B9891-D724-4DB8-8244-539A8919496A}"/>
+                <a16:creationId xmlns:a16="http://schemas.microsoft.com/office/drawing/2014/main" id="{0AF286D4-76C3-4B65-8DD5-906BF002308B}"/>
               </a:ext>
             </a:extLst>
           </p:cNvPr>
@@ -5977,7 +5977,7 @@
           <p:cNvPr id="9" name="TextBox 8">
             <a:extLst xmlns:a="http://schemas.openxmlformats.org/drawingml/2006/main">
               <a:ext uri="{FF2B5EF4-FFF2-40B4-BE49-F238E27FC236}">
-                <a16:creationId xmlns:a16="http://schemas.microsoft.com/office/drawing/2014/main" id="{0925C8EF-F62A-4275-A6B7-1CC129C5F91C}"/>
+                <a16:creationId xmlns:a16="http://schemas.microsoft.com/office/drawing/2014/main" id="{6452B88C-981F-49DD-811B-E8EE2DF08711}"/>
               </a:ext>
             </a:extLst>
           </p:cNvPr>
@@ -6024,7 +6024,7 @@
           <p:cNvPr id="10" name="TextBox 9">
             <a:extLst xmlns:a="http://schemas.openxmlformats.org/drawingml/2006/main">
               <a:ext uri="{FF2B5EF4-FFF2-40B4-BE49-F238E27FC236}">
-                <a16:creationId xmlns:a16="http://schemas.microsoft.com/office/drawing/2014/main" id="{6D039891-5AAC-43AC-8074-CE6992596835}"/>
+                <a16:creationId xmlns:a16="http://schemas.microsoft.com/office/drawing/2014/main" id="{81E2BAC7-5A18-4CED-A687-30B8141DE3EE}"/>
               </a:ext>
             </a:extLst>
           </p:cNvPr>
@@ -6071,7 +6071,7 @@
           <p:cNvPr id="11" name="Rounded Rectangle 10">
             <a:extLst xmlns:a="http://schemas.openxmlformats.org/drawingml/2006/main">
               <a:ext uri="{FF2B5EF4-FFF2-40B4-BE49-F238E27FC236}">
-                <a16:creationId xmlns:a16="http://schemas.microsoft.com/office/drawing/2014/main" id="{94F3168C-B480-421E-B0E9-8FD27D28910E}"/>
+                <a16:creationId xmlns:a16="http://schemas.microsoft.com/office/drawing/2014/main" id="{66E7F67F-98E7-4D2B-B3B3-35A34B9B3800}"/>
               </a:ext>
             </a:extLst>
           </p:cNvPr>
@@ -6128,7 +6128,7 @@
           <p:cNvPr id="12" name="TextBox 11">
             <a:extLst xmlns:a="http://schemas.openxmlformats.org/drawingml/2006/main">
               <a:ext uri="{FF2B5EF4-FFF2-40B4-BE49-F238E27FC236}">
-                <a16:creationId xmlns:a16="http://schemas.microsoft.com/office/drawing/2014/main" id="{76F2D5F0-A244-417E-BE34-DDA2C829CC0D}"/>
+                <a16:creationId xmlns:a16="http://schemas.microsoft.com/office/drawing/2014/main" id="{3C3212C9-59A9-4E55-8EA9-878025D3B0E3}"/>
               </a:ext>
             </a:extLst>
           </p:cNvPr>
@@ -6175,7 +6175,7 @@
           <p:cNvPr id="13" name="TextBox 12">
             <a:extLst xmlns:a="http://schemas.openxmlformats.org/drawingml/2006/main">
               <a:ext uri="{FF2B5EF4-FFF2-40B4-BE49-F238E27FC236}">
-                <a16:creationId xmlns:a16="http://schemas.microsoft.com/office/drawing/2014/main" id="{56AD8AF2-257C-4F3F-B36A-906A59B089CF}"/>
+                <a16:creationId xmlns:a16="http://schemas.microsoft.com/office/drawing/2014/main" id="{C814BBFB-3CD9-48BE-948D-3B31C596F468}"/>
               </a:ext>
             </a:extLst>
           </p:cNvPr>
@@ -6222,7 +6222,7 @@
           <p:cNvPr id="14" name="Rounded Rectangle 13">
             <a:extLst xmlns:a="http://schemas.openxmlformats.org/drawingml/2006/main">
               <a:ext uri="{FF2B5EF4-FFF2-40B4-BE49-F238E27FC236}">
-                <a16:creationId xmlns:a16="http://schemas.microsoft.com/office/drawing/2014/main" id="{AF3FB22C-C0A5-4277-96BE-7BEC2C7B9CAD}"/>
+                <a16:creationId xmlns:a16="http://schemas.microsoft.com/office/drawing/2014/main" id="{6A57FC91-2FD6-4B4D-BD23-1CC8D547D5EA}"/>
               </a:ext>
             </a:extLst>
           </p:cNvPr>
@@ -6279,7 +6279,7 @@
           <p:cNvPr id="15" name="TextBox 14">
             <a:extLst xmlns:a="http://schemas.openxmlformats.org/drawingml/2006/main">
               <a:ext uri="{FF2B5EF4-FFF2-40B4-BE49-F238E27FC236}">
-                <a16:creationId xmlns:a16="http://schemas.microsoft.com/office/drawing/2014/main" id="{68C453CA-6B8A-43A6-8A70-E4B8434079B4}"/>
+                <a16:creationId xmlns:a16="http://schemas.microsoft.com/office/drawing/2014/main" id="{FC7C19EF-5C92-45E3-A3A6-C88C0CAD8975}"/>
               </a:ext>
             </a:extLst>
           </p:cNvPr>
@@ -6326,7 +6326,7 @@
           <p:cNvPr id="16" name="TextBox 15">
             <a:extLst xmlns:a="http://schemas.openxmlformats.org/drawingml/2006/main">
               <a:ext uri="{FF2B5EF4-FFF2-40B4-BE49-F238E27FC236}">
-                <a16:creationId xmlns:a16="http://schemas.microsoft.com/office/drawing/2014/main" id="{A0D16503-B7B4-431F-9594-5E6A6ECC4828}"/>
+                <a16:creationId xmlns:a16="http://schemas.microsoft.com/office/drawing/2014/main" id="{2C40F79D-950F-472E-9541-28B5E053D4B8}"/>
               </a:ext>
             </a:extLst>
           </p:cNvPr>
@@ -6373,7 +6373,7 @@
           <p:cNvPr id="17" name="TextBox 16">
             <a:extLst xmlns:a="http://schemas.openxmlformats.org/drawingml/2006/main">
               <a:ext uri="{FF2B5EF4-FFF2-40B4-BE49-F238E27FC236}">
-                <a16:creationId xmlns:a16="http://schemas.microsoft.com/office/drawing/2014/main" id="{D87A0843-393B-447A-AFE8-671995CF0342}"/>
+                <a16:creationId xmlns:a16="http://schemas.microsoft.com/office/drawing/2014/main" id="{F649F69B-8149-4AA4-A732-B45B0F590AF0}"/>
               </a:ext>
             </a:extLst>
           </p:cNvPr>
@@ -6420,7 +6420,7 @@
           <p:cNvPr id="18" name="Rounded Rectangle 17">
             <a:extLst xmlns:a="http://schemas.openxmlformats.org/drawingml/2006/main">
               <a:ext uri="{FF2B5EF4-FFF2-40B4-BE49-F238E27FC236}">
-                <a16:creationId xmlns:a16="http://schemas.microsoft.com/office/drawing/2014/main" id="{FD70CBDF-24C5-4571-B209-6C9C42ACBD8B}"/>
+                <a16:creationId xmlns:a16="http://schemas.microsoft.com/office/drawing/2014/main" id="{993766B0-BAA2-4B3C-B3C4-61ED4F252BA7}"/>
               </a:ext>
             </a:extLst>
           </p:cNvPr>
@@ -6477,7 +6477,7 @@
           <p:cNvPr id="19" name="TextBox 18">
             <a:extLst xmlns:a="http://schemas.openxmlformats.org/drawingml/2006/main">
               <a:ext uri="{FF2B5EF4-FFF2-40B4-BE49-F238E27FC236}">
-                <a16:creationId xmlns:a16="http://schemas.microsoft.com/office/drawing/2014/main" id="{E070718B-C479-4E89-B4AF-1B575BE0E651}"/>
+                <a16:creationId xmlns:a16="http://schemas.microsoft.com/office/drawing/2014/main" id="{0E2F635B-1951-4774-8030-EDEF56E4DE30}"/>
               </a:ext>
             </a:extLst>
           </p:cNvPr>
@@ -6524,7 +6524,7 @@
           <p:cNvPr id="20" name="TextBox 19">
             <a:extLst xmlns:a="http://schemas.openxmlformats.org/drawingml/2006/main">
               <a:ext uri="{FF2B5EF4-FFF2-40B4-BE49-F238E27FC236}">
-                <a16:creationId xmlns:a16="http://schemas.microsoft.com/office/drawing/2014/main" id="{0AA090C4-3905-45E2-83FD-E072300308FA}"/>
+                <a16:creationId xmlns:a16="http://schemas.microsoft.com/office/drawing/2014/main" id="{EFD13F05-A033-49F2-9D69-144B02F586B3}"/>
               </a:ext>
             </a:extLst>
           </p:cNvPr>
@@ -6569,7 +6569,7 @@
     </p:spTree>
     <p:extLst>
       <p:ext uri="{BB962C8B-B14F-4D97-AF65-F5344CB8AC3E}">
-        <p14:creationId xmlns:p14="http://schemas.microsoft.com/office/powerpoint/2010/main" val="1254080820"/>
+        <p14:creationId xmlns:p14="http://schemas.microsoft.com/office/powerpoint/2010/main" val="1132169893"/>
       </p:ext>
     </p:extLst>
   </p:cSld>
@@ -6593,7 +6593,7 @@
           <p:cNvPr id="2" name="TextBox 1">
             <a:extLst xmlns:a="http://schemas.openxmlformats.org/drawingml/2006/main">
               <a:ext uri="{FF2B5EF4-FFF2-40B4-BE49-F238E27FC236}">
-                <a16:creationId xmlns:a16="http://schemas.microsoft.com/office/drawing/2014/main" id="{F2C8F1F9-B1F4-40CF-A4EB-27AA0893B800}"/>
+                <a16:creationId xmlns:a16="http://schemas.microsoft.com/office/drawing/2014/main" id="{4E079688-BF07-446D-9678-3F6713926CC4}"/>
               </a:ext>
             </a:extLst>
           </p:cNvPr>
@@ -6640,7 +6640,7 @@
           <p:cNvPr id="3" name="TextBox 2">
             <a:extLst xmlns:a="http://schemas.openxmlformats.org/drawingml/2006/main">
               <a:ext uri="{FF2B5EF4-FFF2-40B4-BE49-F238E27FC236}">
-                <a16:creationId xmlns:a16="http://schemas.microsoft.com/office/drawing/2014/main" id="{5922A290-1A4B-487C-899B-F3621CE4718A}"/>
+                <a16:creationId xmlns:a16="http://schemas.microsoft.com/office/drawing/2014/main" id="{052193B6-06CC-427D-969B-9D9A4C455EA3}"/>
               </a:ext>
             </a:extLst>
           </p:cNvPr>
@@ -6687,7 +6687,7 @@
           <p:cNvPr id="4" name="Rectangle 3">
             <a:extLst xmlns:a="http://schemas.openxmlformats.org/drawingml/2006/main">
               <a:ext uri="{FF2B5EF4-FFF2-40B4-BE49-F238E27FC236}">
-                <a16:creationId xmlns:a16="http://schemas.microsoft.com/office/drawing/2014/main" id="{DF723E84-2318-4E70-A83B-24A9C634FB69}"/>
+                <a16:creationId xmlns:a16="http://schemas.microsoft.com/office/drawing/2014/main" id="{D120C76E-1463-42A7-87EF-AB7EB64BBA43}"/>
               </a:ext>
             </a:extLst>
           </p:cNvPr>
@@ -6742,7 +6742,7 @@
           <p:cNvPr id="5" name="Rectangle 4">
             <a:extLst xmlns:a="http://schemas.openxmlformats.org/drawingml/2006/main">
               <a:ext uri="{FF2B5EF4-FFF2-40B4-BE49-F238E27FC236}">
-                <a16:creationId xmlns:a16="http://schemas.microsoft.com/office/drawing/2014/main" id="{A15A2EED-891D-4183-A516-0B150305D33F}"/>
+                <a16:creationId xmlns:a16="http://schemas.microsoft.com/office/drawing/2014/main" id="{F68AB2E1-94A0-4CA5-9A7E-A92585C59B03}"/>
               </a:ext>
             </a:extLst>
           </p:cNvPr>
@@ -6797,7 +6797,7 @@
           <p:cNvPr id="6" name="TextBox 5">
             <a:extLst xmlns:a="http://schemas.openxmlformats.org/drawingml/2006/main">
               <a:ext uri="{FF2B5EF4-FFF2-40B4-BE49-F238E27FC236}">
-                <a16:creationId xmlns:a16="http://schemas.microsoft.com/office/drawing/2014/main" id="{39D4DEE9-2672-461A-AF23-3B0C25BF7BB4}"/>
+                <a16:creationId xmlns:a16="http://schemas.microsoft.com/office/drawing/2014/main" id="{B465759E-99F7-4227-95B9-1DAC6BFA6152}"/>
               </a:ext>
             </a:extLst>
           </p:cNvPr>
@@ -6834,7 +6834,7 @@
                 <a:ea typeface="Aptos"/>
                 <a:cs typeface="Aptos"/>
               </a:rPr>
-              <a:t>Independent public evidence summary · 2026.07.23-10 · 2026-07-22 · Sources: Health Canada; Destatis; Vero; Sejm; Swedish Government</a:t>
+              <a:t>Independent public evidence summary · 2026.07.23-11 · 2026-07-22 · Sources: Health Canada; Destatis; Vero; Sejm; Swedish Government</a:t>
             </a:r>
           </a:p>
         </p:txBody>
@@ -6844,7 +6844,7 @@
           <p:cNvPr id="7" name="TextBox 6">
             <a:extLst xmlns:a="http://schemas.openxmlformats.org/drawingml/2006/main">
               <a:ext uri="{FF2B5EF4-FFF2-40B4-BE49-F238E27FC236}">
-                <a16:creationId xmlns:a16="http://schemas.microsoft.com/office/drawing/2014/main" id="{1629768B-50DF-4F99-8EC9-BB032509ECA0}"/>
+                <a16:creationId xmlns:a16="http://schemas.microsoft.com/office/drawing/2014/main" id="{2EEE4178-CDDA-4AF1-8761-BD3A6D7C44C0}"/>
               </a:ext>
             </a:extLst>
           </p:cNvPr>
@@ -6891,7 +6891,7 @@
           <p:cNvPr id="8" name="Rounded Rectangle 7">
             <a:extLst xmlns:a="http://schemas.openxmlformats.org/drawingml/2006/main">
               <a:ext uri="{FF2B5EF4-FFF2-40B4-BE49-F238E27FC236}">
-                <a16:creationId xmlns:a16="http://schemas.microsoft.com/office/drawing/2014/main" id="{10D39267-5180-40B2-A495-B8B07F997D03}"/>
+                <a16:creationId xmlns:a16="http://schemas.microsoft.com/office/drawing/2014/main" id="{A0E70488-21A1-4FCC-9992-6A8DE519EB31}"/>
               </a:ext>
             </a:extLst>
           </p:cNvPr>
@@ -6948,7 +6948,7 @@
           <p:cNvPr id="9" name="TextBox 8">
             <a:extLst xmlns:a="http://schemas.openxmlformats.org/drawingml/2006/main">
               <a:ext uri="{FF2B5EF4-FFF2-40B4-BE49-F238E27FC236}">
-                <a16:creationId xmlns:a16="http://schemas.microsoft.com/office/drawing/2014/main" id="{045908B1-4A8E-4F2E-B63E-C59244E9E610}"/>
+                <a16:creationId xmlns:a16="http://schemas.microsoft.com/office/drawing/2014/main" id="{B7AD90F4-9F67-49BE-B5B9-C2916BF111A0}"/>
               </a:ext>
             </a:extLst>
           </p:cNvPr>
@@ -6995,7 +6995,7 @@
           <p:cNvPr id="10" name="TextBox 9">
             <a:extLst xmlns:a="http://schemas.openxmlformats.org/drawingml/2006/main">
               <a:ext uri="{FF2B5EF4-FFF2-40B4-BE49-F238E27FC236}">
-                <a16:creationId xmlns:a16="http://schemas.microsoft.com/office/drawing/2014/main" id="{006E405A-41A3-429F-8458-9E255268AEBA}"/>
+                <a16:creationId xmlns:a16="http://schemas.microsoft.com/office/drawing/2014/main" id="{39EF60C0-64E5-40BE-996F-315C2907FC42}"/>
               </a:ext>
             </a:extLst>
           </p:cNvPr>
@@ -7042,7 +7042,7 @@
           <p:cNvPr id="11" name="Rounded Rectangle 10">
             <a:extLst xmlns:a="http://schemas.openxmlformats.org/drawingml/2006/main">
               <a:ext uri="{FF2B5EF4-FFF2-40B4-BE49-F238E27FC236}">
-                <a16:creationId xmlns:a16="http://schemas.microsoft.com/office/drawing/2014/main" id="{AE0CD9D3-8FC3-483A-B81B-DE383B2AA18D}"/>
+                <a16:creationId xmlns:a16="http://schemas.microsoft.com/office/drawing/2014/main" id="{447341AE-D232-4BAA-BE3B-748DE4A33A9E}"/>
               </a:ext>
             </a:extLst>
           </p:cNvPr>
@@ -7099,7 +7099,7 @@
           <p:cNvPr id="12" name="TextBox 11">
             <a:extLst xmlns:a="http://schemas.openxmlformats.org/drawingml/2006/main">
               <a:ext uri="{FF2B5EF4-FFF2-40B4-BE49-F238E27FC236}">
-                <a16:creationId xmlns:a16="http://schemas.microsoft.com/office/drawing/2014/main" id="{DA18ED43-5A7D-4030-B178-71221044C2FA}"/>
+                <a16:creationId xmlns:a16="http://schemas.microsoft.com/office/drawing/2014/main" id="{2354F33C-816A-40BF-A21E-C81A7F35EB60}"/>
               </a:ext>
             </a:extLst>
           </p:cNvPr>
@@ -7146,7 +7146,7 @@
           <p:cNvPr id="13" name="TextBox 12">
             <a:extLst xmlns:a="http://schemas.openxmlformats.org/drawingml/2006/main">
               <a:ext uri="{FF2B5EF4-FFF2-40B4-BE49-F238E27FC236}">
-                <a16:creationId xmlns:a16="http://schemas.microsoft.com/office/drawing/2014/main" id="{620A6D3A-6459-42E4-9C1C-29F45398A9E6}"/>
+                <a16:creationId xmlns:a16="http://schemas.microsoft.com/office/drawing/2014/main" id="{164BD196-CE64-4DBE-BB7A-322C38F87AD8}"/>
               </a:ext>
             </a:extLst>
           </p:cNvPr>
@@ -7193,7 +7193,7 @@
           <p:cNvPr id="14" name="Rounded Rectangle 13">
             <a:extLst xmlns:a="http://schemas.openxmlformats.org/drawingml/2006/main">
               <a:ext uri="{FF2B5EF4-FFF2-40B4-BE49-F238E27FC236}">
-                <a16:creationId xmlns:a16="http://schemas.microsoft.com/office/drawing/2014/main" id="{CE710A4D-B382-4A8E-9B7A-368CC18765CE}"/>
+                <a16:creationId xmlns:a16="http://schemas.microsoft.com/office/drawing/2014/main" id="{05832718-8791-43AE-ABBA-6D2D0A272AB2}"/>
               </a:ext>
             </a:extLst>
           </p:cNvPr>
@@ -7250,7 +7250,7 @@
           <p:cNvPr id="15" name="TextBox 14">
             <a:extLst xmlns:a="http://schemas.openxmlformats.org/drawingml/2006/main">
               <a:ext uri="{FF2B5EF4-FFF2-40B4-BE49-F238E27FC236}">
-                <a16:creationId xmlns:a16="http://schemas.microsoft.com/office/drawing/2014/main" id="{67720A0B-B011-4D24-B4C2-899E0B82A0CF}"/>
+                <a16:creationId xmlns:a16="http://schemas.microsoft.com/office/drawing/2014/main" id="{F6733F4D-2562-4DA8-BFDD-452BCC03B569}"/>
               </a:ext>
             </a:extLst>
           </p:cNvPr>
@@ -7297,7 +7297,7 @@
           <p:cNvPr id="16" name="TextBox 15">
             <a:extLst xmlns:a="http://schemas.openxmlformats.org/drawingml/2006/main">
               <a:ext uri="{FF2B5EF4-FFF2-40B4-BE49-F238E27FC236}">
-                <a16:creationId xmlns:a16="http://schemas.microsoft.com/office/drawing/2014/main" id="{3C87B847-5CE5-413A-985D-52DA7EE00725}"/>
+                <a16:creationId xmlns:a16="http://schemas.microsoft.com/office/drawing/2014/main" id="{6D00179F-81CE-4D6D-8533-B7C74902EF7D}"/>
               </a:ext>
             </a:extLst>
           </p:cNvPr>
@@ -7344,7 +7344,7 @@
           <p:cNvPr id="17" name="TextBox 16">
             <a:extLst xmlns:a="http://schemas.openxmlformats.org/drawingml/2006/main">
               <a:ext uri="{FF2B5EF4-FFF2-40B4-BE49-F238E27FC236}">
-                <a16:creationId xmlns:a16="http://schemas.microsoft.com/office/drawing/2014/main" id="{261D6E23-7389-4601-8BE3-9E6C2C4EA65A}"/>
+                <a16:creationId xmlns:a16="http://schemas.microsoft.com/office/drawing/2014/main" id="{E02825AE-1693-46BA-B1C4-A86CA0FFC218}"/>
               </a:ext>
             </a:extLst>
           </p:cNvPr>
@@ -7391,7 +7391,7 @@
           <p:cNvPr id="18" name="Rounded Rectangle 17">
             <a:extLst xmlns:a="http://schemas.openxmlformats.org/drawingml/2006/main">
               <a:ext uri="{FF2B5EF4-FFF2-40B4-BE49-F238E27FC236}">
-                <a16:creationId xmlns:a16="http://schemas.microsoft.com/office/drawing/2014/main" id="{7294CEF8-8E51-43D1-B636-BAEB0C63292B}"/>
+                <a16:creationId xmlns:a16="http://schemas.microsoft.com/office/drawing/2014/main" id="{154F2797-8AE4-4348-A3B6-F484B4B37CB7}"/>
               </a:ext>
             </a:extLst>
           </p:cNvPr>
@@ -7448,7 +7448,7 @@
           <p:cNvPr id="19" name="TextBox 18">
             <a:extLst xmlns:a="http://schemas.openxmlformats.org/drawingml/2006/main">
               <a:ext uri="{FF2B5EF4-FFF2-40B4-BE49-F238E27FC236}">
-                <a16:creationId xmlns:a16="http://schemas.microsoft.com/office/drawing/2014/main" id="{BCE3C00A-1C67-4ED2-BAAF-486190B5E4C7}"/>
+                <a16:creationId xmlns:a16="http://schemas.microsoft.com/office/drawing/2014/main" id="{AC0983E9-A2BD-483E-893E-6F38397AAAFE}"/>
               </a:ext>
             </a:extLst>
           </p:cNvPr>
@@ -7495,7 +7495,7 @@
           <p:cNvPr id="20" name="TextBox 19">
             <a:extLst xmlns:a="http://schemas.openxmlformats.org/drawingml/2006/main">
               <a:ext uri="{FF2B5EF4-FFF2-40B4-BE49-F238E27FC236}">
-                <a16:creationId xmlns:a16="http://schemas.microsoft.com/office/drawing/2014/main" id="{486C52A2-2198-4A27-8DDC-11CCA78DA5B5}"/>
+                <a16:creationId xmlns:a16="http://schemas.microsoft.com/office/drawing/2014/main" id="{226308D1-ED76-454B-BF1E-CBE945B155BF}"/>
               </a:ext>
             </a:extLst>
           </p:cNvPr>
@@ -7540,7 +7540,7 @@
     </p:spTree>
     <p:extLst>
       <p:ext uri="{BB962C8B-B14F-4D97-AF65-F5344CB8AC3E}">
-        <p14:creationId xmlns:p14="http://schemas.microsoft.com/office/powerpoint/2010/main" val="1523538277"/>
+        <p14:creationId xmlns:p14="http://schemas.microsoft.com/office/powerpoint/2010/main" val="1001486093"/>
       </p:ext>
     </p:extLst>
   </p:cSld>
@@ -7564,7 +7564,7 @@
           <p:cNvPr id="2" name="TextBox 1">
             <a:extLst xmlns:a="http://schemas.openxmlformats.org/drawingml/2006/main">
               <a:ext uri="{FF2B5EF4-FFF2-40B4-BE49-F238E27FC236}">
-                <a16:creationId xmlns:a16="http://schemas.microsoft.com/office/drawing/2014/main" id="{5BA90B0D-1243-4BE1-B232-8198019FC7DC}"/>
+                <a16:creationId xmlns:a16="http://schemas.microsoft.com/office/drawing/2014/main" id="{7F2FE077-6ECB-44B2-8836-45EDA80448DD}"/>
               </a:ext>
             </a:extLst>
           </p:cNvPr>
@@ -7611,7 +7611,7 @@
           <p:cNvPr id="3" name="TextBox 2">
             <a:extLst xmlns:a="http://schemas.openxmlformats.org/drawingml/2006/main">
               <a:ext uri="{FF2B5EF4-FFF2-40B4-BE49-F238E27FC236}">
-                <a16:creationId xmlns:a16="http://schemas.microsoft.com/office/drawing/2014/main" id="{0A934446-7634-4C07-9713-6E6D8B613FFF}"/>
+                <a16:creationId xmlns:a16="http://schemas.microsoft.com/office/drawing/2014/main" id="{FA8F4BB8-9A3C-46DF-8680-BAEAE419D2AB}"/>
               </a:ext>
             </a:extLst>
           </p:cNvPr>
@@ -7658,7 +7658,7 @@
           <p:cNvPr id="4" name="Rectangle 3">
             <a:extLst xmlns:a="http://schemas.openxmlformats.org/drawingml/2006/main">
               <a:ext uri="{FF2B5EF4-FFF2-40B4-BE49-F238E27FC236}">
-                <a16:creationId xmlns:a16="http://schemas.microsoft.com/office/drawing/2014/main" id="{6B162241-EFF5-4E3A-B62D-A4FC3BD6FAF7}"/>
+                <a16:creationId xmlns:a16="http://schemas.microsoft.com/office/drawing/2014/main" id="{349591EF-D4B6-4787-B95F-89C468527464}"/>
               </a:ext>
             </a:extLst>
           </p:cNvPr>
@@ -7713,7 +7713,7 @@
           <p:cNvPr id="5" name="Rectangle 4">
             <a:extLst xmlns:a="http://schemas.openxmlformats.org/drawingml/2006/main">
               <a:ext uri="{FF2B5EF4-FFF2-40B4-BE49-F238E27FC236}">
-                <a16:creationId xmlns:a16="http://schemas.microsoft.com/office/drawing/2014/main" id="{A1A633AF-DE20-4B81-B3EC-A81A378DCA2E}"/>
+                <a16:creationId xmlns:a16="http://schemas.microsoft.com/office/drawing/2014/main" id="{5B8D72AD-0981-42EA-934C-37897550EA02}"/>
               </a:ext>
             </a:extLst>
           </p:cNvPr>
@@ -7768,7 +7768,7 @@
           <p:cNvPr id="6" name="TextBox 5">
             <a:extLst xmlns:a="http://schemas.openxmlformats.org/drawingml/2006/main">
               <a:ext uri="{FF2B5EF4-FFF2-40B4-BE49-F238E27FC236}">
-                <a16:creationId xmlns:a16="http://schemas.microsoft.com/office/drawing/2014/main" id="{79BBF3C4-D5E2-424D-9F4D-7E7FC3798E19}"/>
+                <a16:creationId xmlns:a16="http://schemas.microsoft.com/office/drawing/2014/main" id="{159E51FB-9DD2-4180-A46B-0FB2B5A9FC43}"/>
               </a:ext>
             </a:extLst>
           </p:cNvPr>
@@ -7805,7 +7805,7 @@
                 <a:ea typeface="Aptos"/>
                 <a:cs typeface="Aptos"/>
               </a:rPr>
-              <a:t>Independent public evidence summary · 2026.07.23-10 · 2026-07-22 · Sources: Evidence Register; WIPO IP valuation</a:t>
+              <a:t>Independent public evidence summary · 2026.07.23-11 · 2026-07-22 · Sources: Evidence Register; WIPO IP valuation</a:t>
             </a:r>
           </a:p>
         </p:txBody>
@@ -7815,7 +7815,7 @@
           <p:cNvPr id="7" name="TextBox 6">
             <a:extLst xmlns:a="http://schemas.openxmlformats.org/drawingml/2006/main">
               <a:ext uri="{FF2B5EF4-FFF2-40B4-BE49-F238E27FC236}">
-                <a16:creationId xmlns:a16="http://schemas.microsoft.com/office/drawing/2014/main" id="{0A71BFF2-D693-4CDD-929C-6BF3FC521320}"/>
+                <a16:creationId xmlns:a16="http://schemas.microsoft.com/office/drawing/2014/main" id="{D19F94AE-DE63-4EA0-9F59-691B1536568F}"/>
               </a:ext>
             </a:extLst>
           </p:cNvPr>
@@ -8302,7 +8302,7 @@
           <p:cNvPr id="9" name="TextBox 8">
             <a:extLst xmlns:a="http://schemas.openxmlformats.org/drawingml/2006/main">
               <a:ext uri="{FF2B5EF4-FFF2-40B4-BE49-F238E27FC236}">
-                <a16:creationId xmlns:a16="http://schemas.microsoft.com/office/drawing/2014/main" id="{5C5B60B2-CD26-43CE-BA2D-23FEAC0A9318}"/>
+                <a16:creationId xmlns:a16="http://schemas.microsoft.com/office/drawing/2014/main" id="{BEADA579-0CD7-4555-9BEA-E750F35782C1}"/>
               </a:ext>
             </a:extLst>
           </p:cNvPr>
@@ -8347,7 +8347,7 @@
     </p:spTree>
     <p:extLst>
       <p:ext uri="{BB962C8B-B14F-4D97-AF65-F5344CB8AC3E}">
-        <p14:creationId xmlns:p14="http://schemas.microsoft.com/office/powerpoint/2010/main" val="235243580"/>
+        <p14:creationId xmlns:p14="http://schemas.microsoft.com/office/powerpoint/2010/main" val="1185813116"/>
       </p:ext>
     </p:extLst>
   </p:cSld>
@@ -8378,7 +8378,7 @@
           <p:cNvPr id="2" name="TextBox 1">
             <a:extLst xmlns:a="http://schemas.openxmlformats.org/drawingml/2006/main">
               <a:ext uri="{FF2B5EF4-FFF2-40B4-BE49-F238E27FC236}">
-                <a16:creationId xmlns:a16="http://schemas.microsoft.com/office/drawing/2014/main" id="{D5DDF54B-C7A6-48F0-BD80-7D202DF1DB28}"/>
+                <a16:creationId xmlns:a16="http://schemas.microsoft.com/office/drawing/2014/main" id="{4489C5AF-52E3-4E34-93F9-2346463CAEE0}"/>
               </a:ext>
             </a:extLst>
           </p:cNvPr>
@@ -8425,7 +8425,7 @@
           <p:cNvPr id="3" name="TextBox 2">
             <a:extLst xmlns:a="http://schemas.openxmlformats.org/drawingml/2006/main">
               <a:ext uri="{FF2B5EF4-FFF2-40B4-BE49-F238E27FC236}">
-                <a16:creationId xmlns:a16="http://schemas.microsoft.com/office/drawing/2014/main" id="{3FE039D2-A44A-4077-91B6-78DC1DF2A38D}"/>
+                <a16:creationId xmlns:a16="http://schemas.microsoft.com/office/drawing/2014/main" id="{991F07A9-BDED-42EE-8BEF-7958BFD38B07}"/>
               </a:ext>
             </a:extLst>
           </p:cNvPr>
@@ -8472,7 +8472,7 @@
           <p:cNvPr id="4" name="TextBox 3">
             <a:extLst xmlns:a="http://schemas.openxmlformats.org/drawingml/2006/main">
               <a:ext uri="{FF2B5EF4-FFF2-40B4-BE49-F238E27FC236}">
-                <a16:creationId xmlns:a16="http://schemas.microsoft.com/office/drawing/2014/main" id="{5DBB164A-F8C0-4DEB-93F6-FD438558A25D}"/>
+                <a16:creationId xmlns:a16="http://schemas.microsoft.com/office/drawing/2014/main" id="{63A35927-9CC7-4026-8CEA-425F211BEB1A}"/>
               </a:ext>
             </a:extLst>
           </p:cNvPr>
@@ -8591,7 +8591,7 @@
           <p:cNvPr id="5" name="TextBox 4">
             <a:extLst xmlns:a="http://schemas.openxmlformats.org/drawingml/2006/main">
               <a:ext uri="{FF2B5EF4-FFF2-40B4-BE49-F238E27FC236}">
-                <a16:creationId xmlns:a16="http://schemas.microsoft.com/office/drawing/2014/main" id="{20FB4B4B-0893-48C8-9210-20BCAD1349F0}"/>
+                <a16:creationId xmlns:a16="http://schemas.microsoft.com/office/drawing/2014/main" id="{775F1994-12BD-4D3B-9F2F-75F326B49BA2}"/>
               </a:ext>
             </a:extLst>
           </p:cNvPr>
@@ -8628,7 +8628,7 @@
                 <a:ea typeface="Aptos"/>
                 <a:cs typeface="Aptos"/>
               </a:rPr>
-              <a:t>Version 2026.07.23-10 · 2026-07-22 · 6 / 6</a:t>
+              <a:t>Version 2026.07.23-11 · 2026-07-22 · 6 / 6</a:t>
             </a:r>
           </a:p>
         </p:txBody>
@@ -8636,7 +8636,7 @@
     </p:spTree>
     <p:extLst>
       <p:ext uri="{BB962C8B-B14F-4D97-AF65-F5344CB8AC3E}">
-        <p14:creationId xmlns:p14="http://schemas.microsoft.com/office/powerpoint/2010/main" val="1296176178"/>
+        <p14:creationId xmlns:p14="http://schemas.microsoft.com/office/powerpoint/2010/main" val="2122550790"/>
       </p:ext>
     </p:extLst>
   </p:cSld>

--- a/site/downloads/pixan-bank-deck-short-en.pptx
+++ b/site/downloads/pixan-bank-deck-short-en.pptx
@@ -2,18 +2,18 @@
 <file path=ppt/presentation.xml><?xml version="1.0" encoding="utf-8"?>
 <p:presentation xmlns:p="http://schemas.openxmlformats.org/presentationml/2006/main">
   <p:sldMasterIdLst>
-    <p:sldMasterId xmlns:r="http://schemas.openxmlformats.org/officeDocument/2006/relationships" id="2147483648" r:id="R753660a6b94f4321"/>
+    <p:sldMasterId xmlns:r="http://schemas.openxmlformats.org/officeDocument/2006/relationships" id="2147483648" r:id="Rf8cf10c6d54e49bf"/>
   </p:sldMasterIdLst>
   <p:notesMasterIdLst>
-    <p:notesMasterId xmlns:r="http://schemas.openxmlformats.org/officeDocument/2006/relationships" r:id="R9156afa3e0a749fc"/>
+    <p:notesMasterId xmlns:r="http://schemas.openxmlformats.org/officeDocument/2006/relationships" r:id="R77d5ea235bb346c4"/>
   </p:notesMasterIdLst>
   <p:sldIdLst>
-    <p:sldId xmlns:r="http://schemas.openxmlformats.org/officeDocument/2006/relationships" id="256" r:id="Rab97ebb492004932"/>
-    <p:sldId xmlns:r="http://schemas.openxmlformats.org/officeDocument/2006/relationships" id="257" r:id="R8c9720c18c1946b8"/>
-    <p:sldId xmlns:r="http://schemas.openxmlformats.org/officeDocument/2006/relationships" id="258" r:id="R3a20329b16e8470b"/>
-    <p:sldId xmlns:r="http://schemas.openxmlformats.org/officeDocument/2006/relationships" id="259" r:id="R7adcdeb8b442427e"/>
-    <p:sldId xmlns:r="http://schemas.openxmlformats.org/officeDocument/2006/relationships" id="260" r:id="Rff612b1b0bc94cfb"/>
-    <p:sldId xmlns:r="http://schemas.openxmlformats.org/officeDocument/2006/relationships" id="261" r:id="R95d5ed6d30474a90"/>
+    <p:sldId xmlns:r="http://schemas.openxmlformats.org/officeDocument/2006/relationships" id="256" r:id="Rec0464b36dbb44ae"/>
+    <p:sldId xmlns:r="http://schemas.openxmlformats.org/officeDocument/2006/relationships" id="257" r:id="R5b0f1f32a2b64b2f"/>
+    <p:sldId xmlns:r="http://schemas.openxmlformats.org/officeDocument/2006/relationships" id="258" r:id="R221ef66725f54157"/>
+    <p:sldId xmlns:r="http://schemas.openxmlformats.org/officeDocument/2006/relationships" id="259" r:id="R84c41592e5fe4813"/>
+    <p:sldId xmlns:r="http://schemas.openxmlformats.org/officeDocument/2006/relationships" id="260" r:id="R161de8cfdb9f41b7"/>
+    <p:sldId xmlns:r="http://schemas.openxmlformats.org/officeDocument/2006/relationships" id="261" r:id="R7e27fa962ad24941"/>
   </p:sldIdLst>
   <p:sldSz cx="12191999" cy="6858000"/>
   <p:notesSz cx="6858000" cy="9144000"/>
@@ -938,7 +938,7 @@
           <p:cNvPr id="2" name="Title 1">
             <a:extLst xmlns:a="http://schemas.openxmlformats.org/drawingml/2006/main">
               <a:ext uri="{FF2B5EF4-FFF2-40B4-BE49-F238E27FC236}">
-                <a16:creationId xmlns:a16="http://schemas.microsoft.com/office/drawing/2014/main" id="{85235AEF-00F2-41F1-972A-10B5DA30FB22}"/>
+                <a16:creationId xmlns:a16="http://schemas.microsoft.com/office/drawing/2014/main" id="{510A7F97-6283-4026-B25C-27859AF3CF17}"/>
               </a:ext>
             </a:extLst>
           </p:cNvPr>
@@ -970,7 +970,7 @@
           <p:cNvPr id="3" name="Subtitle 2">
             <a:extLst xmlns:a="http://schemas.openxmlformats.org/drawingml/2006/main">
               <a:ext uri="{FF2B5EF4-FFF2-40B4-BE49-F238E27FC236}">
-                <a16:creationId xmlns:a16="http://schemas.microsoft.com/office/drawing/2014/main" id="{192CAB94-798E-450A-B2CF-C13F0E71788E}"/>
+                <a16:creationId xmlns:a16="http://schemas.microsoft.com/office/drawing/2014/main" id="{A938CC42-730A-4DF7-A278-9CC09A281BEF}"/>
               </a:ext>
             </a:extLst>
           </p:cNvPr>
@@ -1093,7 +1093,7 @@
           <p:cNvPr id="4" name="Date Placeholder 3">
             <a:extLst xmlns:a="http://schemas.openxmlformats.org/drawingml/2006/main">
               <a:ext uri="{FF2B5EF4-FFF2-40B4-BE49-F238E27FC236}">
-                <a16:creationId xmlns:a16="http://schemas.microsoft.com/office/drawing/2014/main" id="{16100ACC-4EF4-4922-99A1-4E2CF85B688F}"/>
+                <a16:creationId xmlns:a16="http://schemas.microsoft.com/office/drawing/2014/main" id="{30B0715B-321D-452C-9390-98F5621A486C}"/>
               </a:ext>
             </a:extLst>
           </p:cNvPr>
@@ -1120,7 +1120,7 @@
           <p:cNvPr id="5" name="Footer Placeholder 4">
             <a:extLst xmlns:a="http://schemas.openxmlformats.org/drawingml/2006/main">
               <a:ext uri="{FF2B5EF4-FFF2-40B4-BE49-F238E27FC236}">
-                <a16:creationId xmlns:a16="http://schemas.microsoft.com/office/drawing/2014/main" id="{1DB839A8-FADE-4FDA-8507-E547F49A06C0}"/>
+                <a16:creationId xmlns:a16="http://schemas.microsoft.com/office/drawing/2014/main" id="{2831C525-8602-4AF0-878B-FE09A01B21B4}"/>
               </a:ext>
             </a:extLst>
           </p:cNvPr>
@@ -1143,7 +1143,7 @@
           <p:cNvPr id="6" name="Slide Number Placeholder 5">
             <a:extLst xmlns:a="http://schemas.openxmlformats.org/drawingml/2006/main">
               <a:ext uri="{FF2B5EF4-FFF2-40B4-BE49-F238E27FC236}">
-                <a16:creationId xmlns:a16="http://schemas.microsoft.com/office/drawing/2014/main" id="{77FB9BE1-474F-41E6-93C6-B97FB669FCF0}"/>
+                <a16:creationId xmlns:a16="http://schemas.microsoft.com/office/drawing/2014/main" id="{0F425E9E-8CE5-45BE-8FD3-0CA0EBF3EA70}"/>
               </a:ext>
             </a:extLst>
           </p:cNvPr>
@@ -1187,7 +1187,7 @@
           <p:cNvPr id="2" name="Title 1">
             <a:extLst xmlns:a="http://schemas.openxmlformats.org/drawingml/2006/main">
               <a:ext uri="{FF2B5EF4-FFF2-40B4-BE49-F238E27FC236}">
-                <a16:creationId xmlns:a16="http://schemas.microsoft.com/office/drawing/2014/main" id="{851E99B8-FEBC-48FA-AE5C-221BD7ADDD58}"/>
+                <a16:creationId xmlns:a16="http://schemas.microsoft.com/office/drawing/2014/main" id="{3FE97F49-B088-4C8F-B250-D03A98CC36B8}"/>
               </a:ext>
             </a:extLst>
           </p:cNvPr>
@@ -1214,7 +1214,7 @@
           <p:cNvPr id="3" name="Vertical Text Placeholder 2">
             <a:extLst xmlns:a="http://schemas.openxmlformats.org/drawingml/2006/main">
               <a:ext uri="{FF2B5EF4-FFF2-40B4-BE49-F238E27FC236}">
-                <a16:creationId xmlns:a16="http://schemas.microsoft.com/office/drawing/2014/main" id="{FEDAA48A-38CE-403E-B88C-1EDF719B307E}"/>
+                <a16:creationId xmlns:a16="http://schemas.microsoft.com/office/drawing/2014/main" id="{121037C2-66E7-4284-BF9A-146BA3CC45F6}"/>
               </a:ext>
             </a:extLst>
           </p:cNvPr>
@@ -1276,7 +1276,7 @@
           <p:cNvPr id="4" name="Date Placeholder 3">
             <a:extLst xmlns:a="http://schemas.openxmlformats.org/drawingml/2006/main">
               <a:ext uri="{FF2B5EF4-FFF2-40B4-BE49-F238E27FC236}">
-                <a16:creationId xmlns:a16="http://schemas.microsoft.com/office/drawing/2014/main" id="{7B36C936-EC6C-4864-9EED-AAA79A65B11C}"/>
+                <a16:creationId xmlns:a16="http://schemas.microsoft.com/office/drawing/2014/main" id="{15E77A23-7F74-4D45-B917-30EA90C9F1AD}"/>
               </a:ext>
             </a:extLst>
           </p:cNvPr>
@@ -1303,7 +1303,7 @@
           <p:cNvPr id="5" name="Footer Placeholder 4">
             <a:extLst xmlns:a="http://schemas.openxmlformats.org/drawingml/2006/main">
               <a:ext uri="{FF2B5EF4-FFF2-40B4-BE49-F238E27FC236}">
-                <a16:creationId xmlns:a16="http://schemas.microsoft.com/office/drawing/2014/main" id="{D12ACB0E-FAB6-4DEB-A252-75AB252ECFF1}"/>
+                <a16:creationId xmlns:a16="http://schemas.microsoft.com/office/drawing/2014/main" id="{023DA2FD-8331-46CB-B173-8AFF5F7EED6B}"/>
               </a:ext>
             </a:extLst>
           </p:cNvPr>
@@ -1326,7 +1326,7 @@
           <p:cNvPr id="6" name="Slide Number Placeholder 5">
             <a:extLst xmlns:a="http://schemas.openxmlformats.org/drawingml/2006/main">
               <a:ext uri="{FF2B5EF4-FFF2-40B4-BE49-F238E27FC236}">
-                <a16:creationId xmlns:a16="http://schemas.microsoft.com/office/drawing/2014/main" id="{10203A56-1AFD-4639-99F7-E3ED01442685}"/>
+                <a16:creationId xmlns:a16="http://schemas.microsoft.com/office/drawing/2014/main" id="{304BC274-784D-4CE3-B69D-0F1FC9E1EC5E}"/>
               </a:ext>
             </a:extLst>
           </p:cNvPr>
@@ -1370,7 +1370,7 @@
           <p:cNvPr id="2" name="Vertical Title 1">
             <a:extLst xmlns:a="http://schemas.openxmlformats.org/drawingml/2006/main">
               <a:ext uri="{FF2B5EF4-FFF2-40B4-BE49-F238E27FC236}">
-                <a16:creationId xmlns:a16="http://schemas.microsoft.com/office/drawing/2014/main" id="{8C79245D-99D8-4442-9634-9F025C0C1F3E}"/>
+                <a16:creationId xmlns:a16="http://schemas.microsoft.com/office/drawing/2014/main" id="{194FD65A-0021-41E2-A067-4631DA7DAF67}"/>
               </a:ext>
             </a:extLst>
           </p:cNvPr>
@@ -1402,7 +1402,7 @@
           <p:cNvPr id="3" name="Vertical Text Placeholder 2">
             <a:extLst xmlns:a="http://schemas.openxmlformats.org/drawingml/2006/main">
               <a:ext uri="{FF2B5EF4-FFF2-40B4-BE49-F238E27FC236}">
-                <a16:creationId xmlns:a16="http://schemas.microsoft.com/office/drawing/2014/main" id="{1205D342-7250-4780-9D49-CCB3B0998E64}"/>
+                <a16:creationId xmlns:a16="http://schemas.microsoft.com/office/drawing/2014/main" id="{78DE22BA-5105-4B81-8060-DF4667162E89}"/>
               </a:ext>
             </a:extLst>
           </p:cNvPr>
@@ -1469,7 +1469,7 @@
           <p:cNvPr id="4" name="Date Placeholder 3">
             <a:extLst xmlns:a="http://schemas.openxmlformats.org/drawingml/2006/main">
               <a:ext uri="{FF2B5EF4-FFF2-40B4-BE49-F238E27FC236}">
-                <a16:creationId xmlns:a16="http://schemas.microsoft.com/office/drawing/2014/main" id="{52305666-C3B4-446C-B1EA-779B7D885E43}"/>
+                <a16:creationId xmlns:a16="http://schemas.microsoft.com/office/drawing/2014/main" id="{1E30EB37-E9C9-4D78-8BD1-A5CE963B055E}"/>
               </a:ext>
             </a:extLst>
           </p:cNvPr>
@@ -1496,7 +1496,7 @@
           <p:cNvPr id="5" name="Footer Placeholder 4">
             <a:extLst xmlns:a="http://schemas.openxmlformats.org/drawingml/2006/main">
               <a:ext uri="{FF2B5EF4-FFF2-40B4-BE49-F238E27FC236}">
-                <a16:creationId xmlns:a16="http://schemas.microsoft.com/office/drawing/2014/main" id="{C97A9D2D-D65B-4EF8-BF3E-3C4EA6E050E1}"/>
+                <a16:creationId xmlns:a16="http://schemas.microsoft.com/office/drawing/2014/main" id="{C1577F94-D72E-4D0F-80D3-333EF2CC4CE8}"/>
               </a:ext>
             </a:extLst>
           </p:cNvPr>
@@ -1519,7 +1519,7 @@
           <p:cNvPr id="6" name="Slide Number Placeholder 5">
             <a:extLst xmlns:a="http://schemas.openxmlformats.org/drawingml/2006/main">
               <a:ext uri="{FF2B5EF4-FFF2-40B4-BE49-F238E27FC236}">
-                <a16:creationId xmlns:a16="http://schemas.microsoft.com/office/drawing/2014/main" id="{84CCFC4D-B005-42C9-8DF5-022A3FC55A42}"/>
+                <a16:creationId xmlns:a16="http://schemas.microsoft.com/office/drawing/2014/main" id="{4D978F31-16DD-46E0-B27E-530C99F7965C}"/>
               </a:ext>
             </a:extLst>
           </p:cNvPr>
@@ -1563,7 +1563,7 @@
           <p:cNvPr id="2" name="Title 1">
             <a:extLst xmlns:a="http://schemas.openxmlformats.org/drawingml/2006/main">
               <a:ext uri="{FF2B5EF4-FFF2-40B4-BE49-F238E27FC236}">
-                <a16:creationId xmlns:a16="http://schemas.microsoft.com/office/drawing/2014/main" id="{8276E23D-4EF1-427A-AA2E-A445DB9CCC6F}"/>
+                <a16:creationId xmlns:a16="http://schemas.microsoft.com/office/drawing/2014/main" id="{B7AE7001-7FD6-45B4-B221-A5EE8B26EBC2}"/>
               </a:ext>
             </a:extLst>
           </p:cNvPr>
@@ -1590,7 +1590,7 @@
           <p:cNvPr id="3" name="Content Placeholder 2">
             <a:extLst xmlns:a="http://schemas.openxmlformats.org/drawingml/2006/main">
               <a:ext uri="{FF2B5EF4-FFF2-40B4-BE49-F238E27FC236}">
-                <a16:creationId xmlns:a16="http://schemas.microsoft.com/office/drawing/2014/main" id="{37839BA9-A066-4507-8561-3FC5A4FA47D3}"/>
+                <a16:creationId xmlns:a16="http://schemas.microsoft.com/office/drawing/2014/main" id="{FA34BB33-47AF-4D90-9ED7-F4DAC6E6615C}"/>
               </a:ext>
             </a:extLst>
           </p:cNvPr>
@@ -1652,7 +1652,7 @@
           <p:cNvPr id="4" name="Date Placeholder 3">
             <a:extLst xmlns:a="http://schemas.openxmlformats.org/drawingml/2006/main">
               <a:ext uri="{FF2B5EF4-FFF2-40B4-BE49-F238E27FC236}">
-                <a16:creationId xmlns:a16="http://schemas.microsoft.com/office/drawing/2014/main" id="{626AC5DA-35B7-47B4-B597-3EEDF949147D}"/>
+                <a16:creationId xmlns:a16="http://schemas.microsoft.com/office/drawing/2014/main" id="{2B838F0F-B790-46F6-8A51-4DB72C1F3507}"/>
               </a:ext>
             </a:extLst>
           </p:cNvPr>
@@ -1679,7 +1679,7 @@
           <p:cNvPr id="5" name="Footer Placeholder 4">
             <a:extLst xmlns:a="http://schemas.openxmlformats.org/drawingml/2006/main">
               <a:ext uri="{FF2B5EF4-FFF2-40B4-BE49-F238E27FC236}">
-                <a16:creationId xmlns:a16="http://schemas.microsoft.com/office/drawing/2014/main" id="{C8F6F398-2731-4A1A-A114-079B4EC8749F}"/>
+                <a16:creationId xmlns:a16="http://schemas.microsoft.com/office/drawing/2014/main" id="{164A92F3-0D11-4982-AA58-5A940209E256}"/>
               </a:ext>
             </a:extLst>
           </p:cNvPr>
@@ -1702,7 +1702,7 @@
           <p:cNvPr id="6" name="Slide Number Placeholder 5">
             <a:extLst xmlns:a="http://schemas.openxmlformats.org/drawingml/2006/main">
               <a:ext uri="{FF2B5EF4-FFF2-40B4-BE49-F238E27FC236}">
-                <a16:creationId xmlns:a16="http://schemas.microsoft.com/office/drawing/2014/main" id="{ED03C032-D150-43FB-9B85-DD86938CDF20}"/>
+                <a16:creationId xmlns:a16="http://schemas.microsoft.com/office/drawing/2014/main" id="{ABF0A250-A89A-4FAE-8EE7-2646CA837848}"/>
               </a:ext>
             </a:extLst>
           </p:cNvPr>
@@ -1746,7 +1746,7 @@
           <p:cNvPr id="2" name="Title 1">
             <a:extLst xmlns:a="http://schemas.openxmlformats.org/drawingml/2006/main">
               <a:ext uri="{FF2B5EF4-FFF2-40B4-BE49-F238E27FC236}">
-                <a16:creationId xmlns:a16="http://schemas.microsoft.com/office/drawing/2014/main" id="{CF213A8D-FFF5-4792-ABD9-0CDCF9FC6B5F}"/>
+                <a16:creationId xmlns:a16="http://schemas.microsoft.com/office/drawing/2014/main" id="{F8BFAF40-10FC-447A-B0F0-04D76D22E6F5}"/>
               </a:ext>
             </a:extLst>
           </p:cNvPr>
@@ -1783,7 +1783,7 @@
           <p:cNvPr id="3" name="Text Placeholder 2">
             <a:extLst xmlns:a="http://schemas.openxmlformats.org/drawingml/2006/main">
               <a:ext uri="{FF2B5EF4-FFF2-40B4-BE49-F238E27FC236}">
-                <a16:creationId xmlns:a16="http://schemas.microsoft.com/office/drawing/2014/main" id="{BAC7F3D2-5E63-49A4-AC94-151903625874}"/>
+                <a16:creationId xmlns:a16="http://schemas.microsoft.com/office/drawing/2014/main" id="{A2F2F2CB-457F-4705-9FB5-1CB19D7E365E}"/>
               </a:ext>
             </a:extLst>
           </p:cNvPr>
@@ -1909,7 +1909,7 @@
           <p:cNvPr id="4" name="Date Placeholder 3">
             <a:extLst xmlns:a="http://schemas.openxmlformats.org/drawingml/2006/main">
               <a:ext uri="{FF2B5EF4-FFF2-40B4-BE49-F238E27FC236}">
-                <a16:creationId xmlns:a16="http://schemas.microsoft.com/office/drawing/2014/main" id="{B5045156-42B9-42CA-A421-3479B0CE440B}"/>
+                <a16:creationId xmlns:a16="http://schemas.microsoft.com/office/drawing/2014/main" id="{58CB1EF7-BF50-4067-8086-C7731A11C223}"/>
               </a:ext>
             </a:extLst>
           </p:cNvPr>
@@ -1936,7 +1936,7 @@
           <p:cNvPr id="5" name="Footer Placeholder 4">
             <a:extLst xmlns:a="http://schemas.openxmlformats.org/drawingml/2006/main">
               <a:ext uri="{FF2B5EF4-FFF2-40B4-BE49-F238E27FC236}">
-                <a16:creationId xmlns:a16="http://schemas.microsoft.com/office/drawing/2014/main" id="{A0385B04-2741-4C53-85EB-7CB12D4B7EF2}"/>
+                <a16:creationId xmlns:a16="http://schemas.microsoft.com/office/drawing/2014/main" id="{8E09B473-3A8E-4CF4-A84E-61CE7AA70F62}"/>
               </a:ext>
             </a:extLst>
           </p:cNvPr>
@@ -1959,7 +1959,7 @@
           <p:cNvPr id="6" name="Slide Number Placeholder 5">
             <a:extLst xmlns:a="http://schemas.openxmlformats.org/drawingml/2006/main">
               <a:ext uri="{FF2B5EF4-FFF2-40B4-BE49-F238E27FC236}">
-                <a16:creationId xmlns:a16="http://schemas.microsoft.com/office/drawing/2014/main" id="{F8F009ED-9555-49BD-ABA0-C6C45F5B23B6}"/>
+                <a16:creationId xmlns:a16="http://schemas.microsoft.com/office/drawing/2014/main" id="{B99DD48C-08FE-4C20-928A-9108FAE78B09}"/>
               </a:ext>
             </a:extLst>
           </p:cNvPr>
@@ -2003,7 +2003,7 @@
           <p:cNvPr id="2" name="Title 1">
             <a:extLst xmlns:a="http://schemas.openxmlformats.org/drawingml/2006/main">
               <a:ext uri="{FF2B5EF4-FFF2-40B4-BE49-F238E27FC236}">
-                <a16:creationId xmlns:a16="http://schemas.microsoft.com/office/drawing/2014/main" id="{F5168754-1D3F-4A53-B196-455B4B474F9C}"/>
+                <a16:creationId xmlns:a16="http://schemas.microsoft.com/office/drawing/2014/main" id="{C1C08D0E-0FE6-4A7A-AA13-37E5CB7ECCD2}"/>
               </a:ext>
             </a:extLst>
           </p:cNvPr>
@@ -2030,7 +2030,7 @@
           <p:cNvPr id="3" name="Content Placeholder 2">
             <a:extLst xmlns:a="http://schemas.openxmlformats.org/drawingml/2006/main">
               <a:ext uri="{FF2B5EF4-FFF2-40B4-BE49-F238E27FC236}">
-                <a16:creationId xmlns:a16="http://schemas.microsoft.com/office/drawing/2014/main" id="{D0E831ED-7B6F-4817-BF28-A992CD453F5F}"/>
+                <a16:creationId xmlns:a16="http://schemas.microsoft.com/office/drawing/2014/main" id="{E2F6C995-F2D2-459F-BB36-B8C79C2245CE}"/>
               </a:ext>
             </a:extLst>
           </p:cNvPr>
@@ -2134,7 +2134,7 @@
           <p:cNvPr id="4" name="Content Placeholder 3">
             <a:extLst xmlns:a="http://schemas.openxmlformats.org/drawingml/2006/main">
               <a:ext uri="{FF2B5EF4-FFF2-40B4-BE49-F238E27FC236}">
-                <a16:creationId xmlns:a16="http://schemas.microsoft.com/office/drawing/2014/main" id="{70D2A3EE-DDDA-4D1A-97E3-573CA63F1DE1}"/>
+                <a16:creationId xmlns:a16="http://schemas.microsoft.com/office/drawing/2014/main" id="{756B2FB6-2991-44C7-BDE0-C2DB12D5F607}"/>
               </a:ext>
             </a:extLst>
           </p:cNvPr>
@@ -2238,7 +2238,7 @@
           <p:cNvPr id="5" name="Date Placeholder 4">
             <a:extLst xmlns:a="http://schemas.openxmlformats.org/drawingml/2006/main">
               <a:ext uri="{FF2B5EF4-FFF2-40B4-BE49-F238E27FC236}">
-                <a16:creationId xmlns:a16="http://schemas.microsoft.com/office/drawing/2014/main" id="{F9128057-D0C3-4848-8C4C-43CFD46CF490}"/>
+                <a16:creationId xmlns:a16="http://schemas.microsoft.com/office/drawing/2014/main" id="{A2FA532B-53E6-4F71-8382-A05D135E8848}"/>
               </a:ext>
             </a:extLst>
           </p:cNvPr>
@@ -2265,7 +2265,7 @@
           <p:cNvPr id="6" name="Footer Placeholder 5">
             <a:extLst xmlns:a="http://schemas.openxmlformats.org/drawingml/2006/main">
               <a:ext uri="{FF2B5EF4-FFF2-40B4-BE49-F238E27FC236}">
-                <a16:creationId xmlns:a16="http://schemas.microsoft.com/office/drawing/2014/main" id="{694B529D-C3AB-4605-A1BD-BC86AD877CD1}"/>
+                <a16:creationId xmlns:a16="http://schemas.microsoft.com/office/drawing/2014/main" id="{504CFA52-64A0-4B55-80F3-FB3DEACB6EBA}"/>
               </a:ext>
             </a:extLst>
           </p:cNvPr>
@@ -2288,7 +2288,7 @@
           <p:cNvPr id="7" name="Slide Number Placeholder 6">
             <a:extLst xmlns:a="http://schemas.openxmlformats.org/drawingml/2006/main">
               <a:ext uri="{FF2B5EF4-FFF2-40B4-BE49-F238E27FC236}">
-                <a16:creationId xmlns:a16="http://schemas.microsoft.com/office/drawing/2014/main" id="{1BE3F1C6-9A8C-4410-8E2B-049FEC2F9CF5}"/>
+                <a16:creationId xmlns:a16="http://schemas.microsoft.com/office/drawing/2014/main" id="{1CCB1E8B-3E17-4168-A392-306C13223362}"/>
               </a:ext>
             </a:extLst>
           </p:cNvPr>
@@ -2332,7 +2332,7 @@
           <p:cNvPr id="2" name="Title 1">
             <a:extLst xmlns:a="http://schemas.openxmlformats.org/drawingml/2006/main">
               <a:ext uri="{FF2B5EF4-FFF2-40B4-BE49-F238E27FC236}">
-                <a16:creationId xmlns:a16="http://schemas.microsoft.com/office/drawing/2014/main" id="{995D3EC4-20DA-41F9-B84E-E07F9D33F530}"/>
+                <a16:creationId xmlns:a16="http://schemas.microsoft.com/office/drawing/2014/main" id="{6EF0456A-29C1-41CF-8666-2B16CA80CCB9}"/>
               </a:ext>
             </a:extLst>
           </p:cNvPr>
@@ -2364,7 +2364,7 @@
           <p:cNvPr id="3" name="Text Placeholder 2">
             <a:extLst xmlns:a="http://schemas.openxmlformats.org/drawingml/2006/main">
               <a:ext uri="{FF2B5EF4-FFF2-40B4-BE49-F238E27FC236}">
-                <a16:creationId xmlns:a16="http://schemas.microsoft.com/office/drawing/2014/main" id="{0393E8A2-36F7-4232-B356-6D022617ED09}"/>
+                <a16:creationId xmlns:a16="http://schemas.microsoft.com/office/drawing/2014/main" id="{5391F218-07AA-41AC-A083-4C948548C6DF}"/>
               </a:ext>
             </a:extLst>
           </p:cNvPr>
@@ -2436,7 +2436,7 @@
           <p:cNvPr id="4" name="Content Placeholder 3">
             <a:extLst xmlns:a="http://schemas.openxmlformats.org/drawingml/2006/main">
               <a:ext uri="{FF2B5EF4-FFF2-40B4-BE49-F238E27FC236}">
-                <a16:creationId xmlns:a16="http://schemas.microsoft.com/office/drawing/2014/main" id="{F499EB6E-70D6-4A17-BD05-2C9B4270CB49}"/>
+                <a16:creationId xmlns:a16="http://schemas.microsoft.com/office/drawing/2014/main" id="{4BEA1343-42BF-4F8D-94A2-EF93CD549E39}"/>
               </a:ext>
             </a:extLst>
           </p:cNvPr>
@@ -2540,7 +2540,7 @@
           <p:cNvPr id="5" name="Text Placeholder 4">
             <a:extLst xmlns:a="http://schemas.openxmlformats.org/drawingml/2006/main">
               <a:ext uri="{FF2B5EF4-FFF2-40B4-BE49-F238E27FC236}">
-                <a16:creationId xmlns:a16="http://schemas.microsoft.com/office/drawing/2014/main" id="{D6CA97CB-C6EB-4394-AC6E-17C8CE30DDAB}"/>
+                <a16:creationId xmlns:a16="http://schemas.microsoft.com/office/drawing/2014/main" id="{6DFE16A4-B17D-4A8D-B1C6-1CAA00DAC1B9}"/>
               </a:ext>
             </a:extLst>
           </p:cNvPr>
@@ -2612,7 +2612,7 @@
           <p:cNvPr id="6" name="Content Placeholder 5">
             <a:extLst xmlns:a="http://schemas.openxmlformats.org/drawingml/2006/main">
               <a:ext uri="{FF2B5EF4-FFF2-40B4-BE49-F238E27FC236}">
-                <a16:creationId xmlns:a16="http://schemas.microsoft.com/office/drawing/2014/main" id="{8AF1FE10-F726-4B8D-87CC-44F326E57F8B}"/>
+                <a16:creationId xmlns:a16="http://schemas.microsoft.com/office/drawing/2014/main" id="{0C84404A-A011-4E20-8080-A3D195878A0D}"/>
               </a:ext>
             </a:extLst>
           </p:cNvPr>
@@ -2716,7 +2716,7 @@
           <p:cNvPr id="7" name="Date Placeholder 6">
             <a:extLst xmlns:a="http://schemas.openxmlformats.org/drawingml/2006/main">
               <a:ext uri="{FF2B5EF4-FFF2-40B4-BE49-F238E27FC236}">
-                <a16:creationId xmlns:a16="http://schemas.microsoft.com/office/drawing/2014/main" id="{300D3E7F-D638-485E-B9DE-9882971E795E}"/>
+                <a16:creationId xmlns:a16="http://schemas.microsoft.com/office/drawing/2014/main" id="{23EE77B2-6B8D-4FB0-9CFB-7614F9F1C70D}"/>
               </a:ext>
             </a:extLst>
           </p:cNvPr>
@@ -2743,7 +2743,7 @@
           <p:cNvPr id="8" name="Footer Placeholder 7">
             <a:extLst xmlns:a="http://schemas.openxmlformats.org/drawingml/2006/main">
               <a:ext uri="{FF2B5EF4-FFF2-40B4-BE49-F238E27FC236}">
-                <a16:creationId xmlns:a16="http://schemas.microsoft.com/office/drawing/2014/main" id="{37A918EE-3E4B-4163-88B2-A0F531986CAF}"/>
+                <a16:creationId xmlns:a16="http://schemas.microsoft.com/office/drawing/2014/main" id="{33DB195A-61C5-48A9-B231-B2419A18B98F}"/>
               </a:ext>
             </a:extLst>
           </p:cNvPr>
@@ -2766,7 +2766,7 @@
           <p:cNvPr id="9" name="Slide Number Placeholder 8">
             <a:extLst xmlns:a="http://schemas.openxmlformats.org/drawingml/2006/main">
               <a:ext uri="{FF2B5EF4-FFF2-40B4-BE49-F238E27FC236}">
-                <a16:creationId xmlns:a16="http://schemas.microsoft.com/office/drawing/2014/main" id="{232A643C-2F04-43CA-9A2E-EDF1079EF196}"/>
+                <a16:creationId xmlns:a16="http://schemas.microsoft.com/office/drawing/2014/main" id="{B55BA604-7B25-4F43-94CE-A60B9F8AE9EA}"/>
               </a:ext>
             </a:extLst>
           </p:cNvPr>
@@ -2810,7 +2810,7 @@
           <p:cNvPr id="2" name="Title 1">
             <a:extLst xmlns:a="http://schemas.openxmlformats.org/drawingml/2006/main">
               <a:ext uri="{FF2B5EF4-FFF2-40B4-BE49-F238E27FC236}">
-                <a16:creationId xmlns:a16="http://schemas.microsoft.com/office/drawing/2014/main" id="{C0EC6A60-FAB6-430C-BD29-3BB46673AA90}"/>
+                <a16:creationId xmlns:a16="http://schemas.microsoft.com/office/drawing/2014/main" id="{71BCC77A-190B-472F-AE05-A11E5E428E23}"/>
               </a:ext>
             </a:extLst>
           </p:cNvPr>
@@ -2837,7 +2837,7 @@
           <p:cNvPr id="3" name="Date Placeholder 2">
             <a:extLst xmlns:a="http://schemas.openxmlformats.org/drawingml/2006/main">
               <a:ext uri="{FF2B5EF4-FFF2-40B4-BE49-F238E27FC236}">
-                <a16:creationId xmlns:a16="http://schemas.microsoft.com/office/drawing/2014/main" id="{A83276EF-6CDD-406E-AADF-267B57484EB4}"/>
+                <a16:creationId xmlns:a16="http://schemas.microsoft.com/office/drawing/2014/main" id="{C923F922-5C63-447B-81F3-BD9DDA2A8F25}"/>
               </a:ext>
             </a:extLst>
           </p:cNvPr>
@@ -2864,7 +2864,7 @@
           <p:cNvPr id="4" name="Footer Placeholder 3">
             <a:extLst xmlns:a="http://schemas.openxmlformats.org/drawingml/2006/main">
               <a:ext uri="{FF2B5EF4-FFF2-40B4-BE49-F238E27FC236}">
-                <a16:creationId xmlns:a16="http://schemas.microsoft.com/office/drawing/2014/main" id="{6F0CF609-DDD8-4E95-87EE-7A9203238B45}"/>
+                <a16:creationId xmlns:a16="http://schemas.microsoft.com/office/drawing/2014/main" id="{33187AE4-7B91-462E-9260-C5E5A05F394A}"/>
               </a:ext>
             </a:extLst>
           </p:cNvPr>
@@ -2887,7 +2887,7 @@
           <p:cNvPr id="5" name="Slide Number Placeholder 4">
             <a:extLst xmlns:a="http://schemas.openxmlformats.org/drawingml/2006/main">
               <a:ext uri="{FF2B5EF4-FFF2-40B4-BE49-F238E27FC236}">
-                <a16:creationId xmlns:a16="http://schemas.microsoft.com/office/drawing/2014/main" id="{62FD5ABC-DE45-42BE-A16A-15AC79E0CF51}"/>
+                <a16:creationId xmlns:a16="http://schemas.microsoft.com/office/drawing/2014/main" id="{DE782A5C-5ECE-4A86-9B8C-72FCCEB0B7DB}"/>
               </a:ext>
             </a:extLst>
           </p:cNvPr>
@@ -2931,7 +2931,7 @@
           <p:cNvPr id="2" name="Date Placeholder 1">
             <a:extLst xmlns:a="http://schemas.openxmlformats.org/drawingml/2006/main">
               <a:ext uri="{FF2B5EF4-FFF2-40B4-BE49-F238E27FC236}">
-                <a16:creationId xmlns:a16="http://schemas.microsoft.com/office/drawing/2014/main" id="{6323B773-BF87-4641-B264-1EB782C6C314}"/>
+                <a16:creationId xmlns:a16="http://schemas.microsoft.com/office/drawing/2014/main" id="{F3E0289C-D136-4387-B484-55B22FE3EFAD}"/>
               </a:ext>
             </a:extLst>
           </p:cNvPr>
@@ -2958,7 +2958,7 @@
           <p:cNvPr id="3" name="Footer Placeholder 2">
             <a:extLst xmlns:a="http://schemas.openxmlformats.org/drawingml/2006/main">
               <a:ext uri="{FF2B5EF4-FFF2-40B4-BE49-F238E27FC236}">
-                <a16:creationId xmlns:a16="http://schemas.microsoft.com/office/drawing/2014/main" id="{E937A554-670C-4089-A5E6-0DACF7200DBF}"/>
+                <a16:creationId xmlns:a16="http://schemas.microsoft.com/office/drawing/2014/main" id="{86DCACE9-1EC6-4194-A315-07060787A757}"/>
               </a:ext>
             </a:extLst>
           </p:cNvPr>
@@ -2981,7 +2981,7 @@
           <p:cNvPr id="4" name="Slide Number Placeholder 3">
             <a:extLst xmlns:a="http://schemas.openxmlformats.org/drawingml/2006/main">
               <a:ext uri="{FF2B5EF4-FFF2-40B4-BE49-F238E27FC236}">
-                <a16:creationId xmlns:a16="http://schemas.microsoft.com/office/drawing/2014/main" id="{384EA80B-40C9-4F61-AF8A-9F72EB8D59F0}"/>
+                <a16:creationId xmlns:a16="http://schemas.microsoft.com/office/drawing/2014/main" id="{4F5CBF09-7499-4FF3-96F8-35AB4FF5B014}"/>
               </a:ext>
             </a:extLst>
           </p:cNvPr>
@@ -3025,7 +3025,7 @@
           <p:cNvPr id="2" name="Title 1">
             <a:extLst xmlns:a="http://schemas.openxmlformats.org/drawingml/2006/main">
               <a:ext uri="{FF2B5EF4-FFF2-40B4-BE49-F238E27FC236}">
-                <a16:creationId xmlns:a16="http://schemas.microsoft.com/office/drawing/2014/main" id="{F89EECAC-04A6-4E5A-B8CB-1D614CBA2971}"/>
+                <a16:creationId xmlns:a16="http://schemas.microsoft.com/office/drawing/2014/main" id="{410BF151-6DE2-432E-B470-38041DD10E43}"/>
               </a:ext>
             </a:extLst>
           </p:cNvPr>
@@ -3062,7 +3062,7 @@
           <p:cNvPr id="3" name="Content Placeholder 2">
             <a:extLst xmlns:a="http://schemas.openxmlformats.org/drawingml/2006/main">
               <a:ext uri="{FF2B5EF4-FFF2-40B4-BE49-F238E27FC236}">
-                <a16:creationId xmlns:a16="http://schemas.microsoft.com/office/drawing/2014/main" id="{877B83A3-9D00-4DE6-810C-7E8070B7BF83}"/>
+                <a16:creationId xmlns:a16="http://schemas.microsoft.com/office/drawing/2014/main" id="{1569A06E-C7BA-4F60-94FF-D0A3EB618B40}"/>
               </a:ext>
             </a:extLst>
           </p:cNvPr>
@@ -3166,7 +3166,7 @@
           <p:cNvPr id="4" name="Text Placeholder 3">
             <a:extLst xmlns:a="http://schemas.openxmlformats.org/drawingml/2006/main">
               <a:ext uri="{FF2B5EF4-FFF2-40B4-BE49-F238E27FC236}">
-                <a16:creationId xmlns:a16="http://schemas.microsoft.com/office/drawing/2014/main" id="{482E1E9F-C7B2-4ABB-B1AC-C16E226DCAB4}"/>
+                <a16:creationId xmlns:a16="http://schemas.microsoft.com/office/drawing/2014/main" id="{41096D99-5DCE-4D51-A6E6-18E5E840B4E8}"/>
               </a:ext>
             </a:extLst>
           </p:cNvPr>
@@ -3238,7 +3238,7 @@
           <p:cNvPr id="5" name="Date Placeholder 4">
             <a:extLst xmlns:a="http://schemas.openxmlformats.org/drawingml/2006/main">
               <a:ext uri="{FF2B5EF4-FFF2-40B4-BE49-F238E27FC236}">
-                <a16:creationId xmlns:a16="http://schemas.microsoft.com/office/drawing/2014/main" id="{17B2F304-BC0B-444A-83FF-CE215B983B8D}"/>
+                <a16:creationId xmlns:a16="http://schemas.microsoft.com/office/drawing/2014/main" id="{638DEB1A-A8ED-406E-BB3E-5E732520E060}"/>
               </a:ext>
             </a:extLst>
           </p:cNvPr>
@@ -3265,7 +3265,7 @@
           <p:cNvPr id="6" name="Footer Placeholder 5">
             <a:extLst xmlns:a="http://schemas.openxmlformats.org/drawingml/2006/main">
               <a:ext uri="{FF2B5EF4-FFF2-40B4-BE49-F238E27FC236}">
-                <a16:creationId xmlns:a16="http://schemas.microsoft.com/office/drawing/2014/main" id="{6DDA0298-3BC4-464A-9C1B-4859338487E8}"/>
+                <a16:creationId xmlns:a16="http://schemas.microsoft.com/office/drawing/2014/main" id="{7314666E-80AA-4FA5-8DD3-A29A769BB880}"/>
               </a:ext>
             </a:extLst>
           </p:cNvPr>
@@ -3288,7 +3288,7 @@
           <p:cNvPr id="7" name="Slide Number Placeholder 6">
             <a:extLst xmlns:a="http://schemas.openxmlformats.org/drawingml/2006/main">
               <a:ext uri="{FF2B5EF4-FFF2-40B4-BE49-F238E27FC236}">
-                <a16:creationId xmlns:a16="http://schemas.microsoft.com/office/drawing/2014/main" id="{04E8FB30-E301-4025-9652-64B0A5601F18}"/>
+                <a16:creationId xmlns:a16="http://schemas.microsoft.com/office/drawing/2014/main" id="{2CD175C9-B907-49EE-B403-C227674448B5}"/>
               </a:ext>
             </a:extLst>
           </p:cNvPr>
@@ -3332,7 +3332,7 @@
           <p:cNvPr id="2" name="Title 1">
             <a:extLst xmlns:a="http://schemas.openxmlformats.org/drawingml/2006/main">
               <a:ext uri="{FF2B5EF4-FFF2-40B4-BE49-F238E27FC236}">
-                <a16:creationId xmlns:a16="http://schemas.microsoft.com/office/drawing/2014/main" id="{058CA13B-21F0-4D10-8F51-D20C3D5CBAC3}"/>
+                <a16:creationId xmlns:a16="http://schemas.microsoft.com/office/drawing/2014/main" id="{ADE51156-7383-4F63-A5AC-72F160709ED6}"/>
               </a:ext>
             </a:extLst>
           </p:cNvPr>
@@ -3369,7 +3369,7 @@
           <p:cNvPr id="3" name="Picture Placeholder 2">
             <a:extLst xmlns:a="http://schemas.openxmlformats.org/drawingml/2006/main">
               <a:ext uri="{FF2B5EF4-FFF2-40B4-BE49-F238E27FC236}">
-                <a16:creationId xmlns:a16="http://schemas.microsoft.com/office/drawing/2014/main" id="{EEB7A2CB-1F1E-4D0F-8642-4095DA80D909}"/>
+                <a16:creationId xmlns:a16="http://schemas.microsoft.com/office/drawing/2014/main" id="{9F2FA8F8-B5EE-4269-B327-FB63E0320293}"/>
               </a:ext>
             </a:extLst>
           </p:cNvPr>
@@ -3434,7 +3434,7 @@
           <p:cNvPr id="4" name="Text Placeholder 3">
             <a:extLst xmlns:a="http://schemas.openxmlformats.org/drawingml/2006/main">
               <a:ext uri="{FF2B5EF4-FFF2-40B4-BE49-F238E27FC236}">
-                <a16:creationId xmlns:a16="http://schemas.microsoft.com/office/drawing/2014/main" id="{19F26E93-180A-4327-A535-EC27257650F6}"/>
+                <a16:creationId xmlns:a16="http://schemas.microsoft.com/office/drawing/2014/main" id="{91A5E4B3-804B-475B-9E5D-4F434A383241}"/>
               </a:ext>
             </a:extLst>
           </p:cNvPr>
@@ -3506,7 +3506,7 @@
           <p:cNvPr id="5" name="Date Placeholder 4">
             <a:extLst xmlns:a="http://schemas.openxmlformats.org/drawingml/2006/main">
               <a:ext uri="{FF2B5EF4-FFF2-40B4-BE49-F238E27FC236}">
-                <a16:creationId xmlns:a16="http://schemas.microsoft.com/office/drawing/2014/main" id="{59A8F921-A694-4782-B97D-14ADE1CC94CA}"/>
+                <a16:creationId xmlns:a16="http://schemas.microsoft.com/office/drawing/2014/main" id="{126A60F4-51C3-4634-9B56-37D4D3D01753}"/>
               </a:ext>
             </a:extLst>
           </p:cNvPr>
@@ -3533,7 +3533,7 @@
           <p:cNvPr id="6" name="Footer Placeholder 5">
             <a:extLst xmlns:a="http://schemas.openxmlformats.org/drawingml/2006/main">
               <a:ext uri="{FF2B5EF4-FFF2-40B4-BE49-F238E27FC236}">
-                <a16:creationId xmlns:a16="http://schemas.microsoft.com/office/drawing/2014/main" id="{E1C39C2F-3C81-46A1-B7B5-292E3B6A91EE}"/>
+                <a16:creationId xmlns:a16="http://schemas.microsoft.com/office/drawing/2014/main" id="{CE017018-79B3-4F02-A048-115B61C40090}"/>
               </a:ext>
             </a:extLst>
           </p:cNvPr>
@@ -3556,7 +3556,7 @@
           <p:cNvPr id="7" name="Slide Number Placeholder 6">
             <a:extLst xmlns:a="http://schemas.openxmlformats.org/drawingml/2006/main">
               <a:ext uri="{FF2B5EF4-FFF2-40B4-BE49-F238E27FC236}">
-                <a16:creationId xmlns:a16="http://schemas.microsoft.com/office/drawing/2014/main" id="{6589E8C4-8CCA-4368-86A8-EEED4A7BE6EA}"/>
+                <a16:creationId xmlns:a16="http://schemas.microsoft.com/office/drawing/2014/main" id="{4E85CC3A-93FB-48EE-B03E-AC48C386E0CB}"/>
               </a:ext>
             </a:extLst>
           </p:cNvPr>
@@ -3605,7 +3605,7 @@
           <p:cNvPr id="2" name="Title Placeholder 1">
             <a:extLst xmlns:a="http://schemas.openxmlformats.org/drawingml/2006/main">
               <a:ext uri="{FF2B5EF4-FFF2-40B4-BE49-F238E27FC236}">
-                <a16:creationId xmlns:a16="http://schemas.microsoft.com/office/drawing/2014/main" id="{943A4892-1F9E-4FC1-BE16-00B9E8601532}"/>
+                <a16:creationId xmlns:a16="http://schemas.microsoft.com/office/drawing/2014/main" id="{523C36C7-9931-446E-B129-4690E54932BB}"/>
               </a:ext>
             </a:extLst>
           </p:cNvPr>
@@ -3642,7 +3642,7 @@
           <p:cNvPr id="3" name="Text Placeholder 2">
             <a:extLst xmlns:a="http://schemas.openxmlformats.org/drawingml/2006/main">
               <a:ext uri="{FF2B5EF4-FFF2-40B4-BE49-F238E27FC236}">
-                <a16:creationId xmlns:a16="http://schemas.microsoft.com/office/drawing/2014/main" id="{738D891C-6895-4B2F-B8FB-A799F29ED0D8}"/>
+                <a16:creationId xmlns:a16="http://schemas.microsoft.com/office/drawing/2014/main" id="{4CBDB43D-E9C6-4865-96F0-8A0B609D516E}"/>
               </a:ext>
             </a:extLst>
           </p:cNvPr>
@@ -3714,7 +3714,7 @@
           <p:cNvPr id="4" name="Date Placeholder 3">
             <a:extLst xmlns:a="http://schemas.openxmlformats.org/drawingml/2006/main">
               <a:ext uri="{FF2B5EF4-FFF2-40B4-BE49-F238E27FC236}">
-                <a16:creationId xmlns:a16="http://schemas.microsoft.com/office/drawing/2014/main" id="{075FD636-437C-439B-AE5C-120D09CD33A7}"/>
+                <a16:creationId xmlns:a16="http://schemas.microsoft.com/office/drawing/2014/main" id="{DCB18A3C-CDB0-422D-A118-B63E0FAAD598}"/>
               </a:ext>
             </a:extLst>
           </p:cNvPr>
@@ -3760,7 +3760,7 @@
           <p:cNvPr id="5" name="Footer Placeholder 4">
             <a:extLst xmlns:a="http://schemas.openxmlformats.org/drawingml/2006/main">
               <a:ext uri="{FF2B5EF4-FFF2-40B4-BE49-F238E27FC236}">
-                <a16:creationId xmlns:a16="http://schemas.microsoft.com/office/drawing/2014/main" id="{A850C797-DA58-4970-9205-9AD6922E6A4A}"/>
+                <a16:creationId xmlns:a16="http://schemas.microsoft.com/office/drawing/2014/main" id="{5C0E614C-C6CD-4EF2-871E-CEE058D2FF7C}"/>
               </a:ext>
             </a:extLst>
           </p:cNvPr>
@@ -3802,7 +3802,7 @@
           <p:cNvPr id="6" name="Slide Number Placeholder 5">
             <a:extLst xmlns:a="http://schemas.openxmlformats.org/drawingml/2006/main">
               <a:ext uri="{FF2B5EF4-FFF2-40B4-BE49-F238E27FC236}">
-                <a16:creationId xmlns:a16="http://schemas.microsoft.com/office/drawing/2014/main" id="{69ED1C28-3CF2-492C-B20F-0E0684861B1B}"/>
+                <a16:creationId xmlns:a16="http://schemas.microsoft.com/office/drawing/2014/main" id="{14FAD9DF-D556-411F-A841-A9D6803AA441}"/>
               </a:ext>
             </a:extLst>
           </p:cNvPr>
@@ -3847,17 +3847,17 @@
   </p:cSld>
   <p:clrMap bg1="lt1" tx1="dk1" bg2="lt2" tx2="dk2" accent1="accent1" accent2="accent2" accent3="accent3" accent4="accent4" accent5="accent5" accent6="accent6" hlink="hlink" folHlink="folHlink"/>
   <p:sldLayoutIdLst>
-    <p:sldLayoutId xmlns:r="http://schemas.openxmlformats.org/officeDocument/2006/relationships" id="2147483649" r:id="R3fdfcbceb0b64bb8"/>
-    <p:sldLayoutId xmlns:r="http://schemas.openxmlformats.org/officeDocument/2006/relationships" id="2147483650" r:id="Rbb1df45825a04161"/>
-    <p:sldLayoutId xmlns:r="http://schemas.openxmlformats.org/officeDocument/2006/relationships" id="2147483651" r:id="Rb4ade24127e245a1"/>
-    <p:sldLayoutId xmlns:r="http://schemas.openxmlformats.org/officeDocument/2006/relationships" id="2147483652" r:id="Re90c8173a7be4fd3"/>
-    <p:sldLayoutId xmlns:r="http://schemas.openxmlformats.org/officeDocument/2006/relationships" id="2147483653" r:id="R7a31e01b3ecb4f1e"/>
-    <p:sldLayoutId xmlns:r="http://schemas.openxmlformats.org/officeDocument/2006/relationships" id="2147483654" r:id="Rbf58d5adaf524807"/>
-    <p:sldLayoutId xmlns:r="http://schemas.openxmlformats.org/officeDocument/2006/relationships" id="2147483655" r:id="Re36c2615705c448a"/>
-    <p:sldLayoutId xmlns:r="http://schemas.openxmlformats.org/officeDocument/2006/relationships" id="2147483656" r:id="R619c0990c8f04ec7"/>
-    <p:sldLayoutId xmlns:r="http://schemas.openxmlformats.org/officeDocument/2006/relationships" id="2147483657" r:id="R3dd997277de74a62"/>
-    <p:sldLayoutId xmlns:r="http://schemas.openxmlformats.org/officeDocument/2006/relationships" id="2147483658" r:id="R1aefe21521ea4a64"/>
-    <p:sldLayoutId xmlns:r="http://schemas.openxmlformats.org/officeDocument/2006/relationships" id="2147483659" r:id="R0af4bd139b9a4abf"/>
+    <p:sldLayoutId xmlns:r="http://schemas.openxmlformats.org/officeDocument/2006/relationships" id="2147483649" r:id="Rd16218fde2674fb7"/>
+    <p:sldLayoutId xmlns:r="http://schemas.openxmlformats.org/officeDocument/2006/relationships" id="2147483650" r:id="R539c8bb5a6eb4f22"/>
+    <p:sldLayoutId xmlns:r="http://schemas.openxmlformats.org/officeDocument/2006/relationships" id="2147483651" r:id="Rfb32d89930f84a4c"/>
+    <p:sldLayoutId xmlns:r="http://schemas.openxmlformats.org/officeDocument/2006/relationships" id="2147483652" r:id="R46b025eb94a94502"/>
+    <p:sldLayoutId xmlns:r="http://schemas.openxmlformats.org/officeDocument/2006/relationships" id="2147483653" r:id="R2e3cce2d659b4e5a"/>
+    <p:sldLayoutId xmlns:r="http://schemas.openxmlformats.org/officeDocument/2006/relationships" id="2147483654" r:id="R7a115b5b61a042ee"/>
+    <p:sldLayoutId xmlns:r="http://schemas.openxmlformats.org/officeDocument/2006/relationships" id="2147483655" r:id="R9ba7da2a3b714271"/>
+    <p:sldLayoutId xmlns:r="http://schemas.openxmlformats.org/officeDocument/2006/relationships" id="2147483656" r:id="R6d279a6682d54da9"/>
+    <p:sldLayoutId xmlns:r="http://schemas.openxmlformats.org/officeDocument/2006/relationships" id="2147483657" r:id="R9de73f1c24c6404e"/>
+    <p:sldLayoutId xmlns:r="http://schemas.openxmlformats.org/officeDocument/2006/relationships" id="2147483658" r:id="R8c191ca0ee1d4940"/>
+    <p:sldLayoutId xmlns:r="http://schemas.openxmlformats.org/officeDocument/2006/relationships" id="2147483659" r:id="R03a4325ebef3433e"/>
   </p:sldLayoutIdLst>
   <p:txStyles>
     <p:titleStyle>
@@ -4410,7 +4410,7 @@
           <p:cNvPr id="2" name="Rectangle 1">
             <a:extLst xmlns:a="http://schemas.openxmlformats.org/drawingml/2006/main">
               <a:ext uri="{FF2B5EF4-FFF2-40B4-BE49-F238E27FC236}">
-                <a16:creationId xmlns:a16="http://schemas.microsoft.com/office/drawing/2014/main" id="{29E4B705-EEBE-42D9-AC3B-BCAD9849810A}"/>
+                <a16:creationId xmlns:a16="http://schemas.microsoft.com/office/drawing/2014/main" id="{50B7B704-F7A0-47D6-B36D-A77E4B5D57AB}"/>
               </a:ext>
             </a:extLst>
           </p:cNvPr>
@@ -4465,7 +4465,7 @@
           <p:cNvPr id="3" name="TextBox 2">
             <a:extLst xmlns:a="http://schemas.openxmlformats.org/drawingml/2006/main">
               <a:ext uri="{FF2B5EF4-FFF2-40B4-BE49-F238E27FC236}">
-                <a16:creationId xmlns:a16="http://schemas.microsoft.com/office/drawing/2014/main" id="{6C0A384D-962E-43F3-B174-16FCB40E4209}"/>
+                <a16:creationId xmlns:a16="http://schemas.microsoft.com/office/drawing/2014/main" id="{1EC172A2-717B-404C-917E-03D2CE40A229}"/>
               </a:ext>
             </a:extLst>
           </p:cNvPr>
@@ -4512,7 +4512,7 @@
           <p:cNvPr id="4" name="TextBox 3">
             <a:extLst xmlns:a="http://schemas.openxmlformats.org/drawingml/2006/main">
               <a:ext uri="{FF2B5EF4-FFF2-40B4-BE49-F238E27FC236}">
-                <a16:creationId xmlns:a16="http://schemas.microsoft.com/office/drawing/2014/main" id="{234A5B92-F947-4472-B88C-20E48ED2875A}"/>
+                <a16:creationId xmlns:a16="http://schemas.microsoft.com/office/drawing/2014/main" id="{C071F8CD-9A0A-40FD-A628-637E7C82C622}"/>
               </a:ext>
             </a:extLst>
           </p:cNvPr>
@@ -4580,7 +4580,7 @@
           <p:cNvPr id="5" name="TextBox 4">
             <a:extLst xmlns:a="http://schemas.openxmlformats.org/drawingml/2006/main">
               <a:ext uri="{FF2B5EF4-FFF2-40B4-BE49-F238E27FC236}">
-                <a16:creationId xmlns:a16="http://schemas.microsoft.com/office/drawing/2014/main" id="{8E413A5C-86D5-4DD4-BA34-6BCAA176834F}"/>
+                <a16:creationId xmlns:a16="http://schemas.microsoft.com/office/drawing/2014/main" id="{0E72FD87-9B2C-45B0-9DF6-424531CE52C3}"/>
               </a:ext>
             </a:extLst>
           </p:cNvPr>
@@ -4627,7 +4627,7 @@
           <p:cNvPr id="6" name="Rectangle 5">
             <a:extLst xmlns:a="http://schemas.openxmlformats.org/drawingml/2006/main">
               <a:ext uri="{FF2B5EF4-FFF2-40B4-BE49-F238E27FC236}">
-                <a16:creationId xmlns:a16="http://schemas.microsoft.com/office/drawing/2014/main" id="{EAEA0DF9-4A2D-49FF-97E0-99FD89855FAA}"/>
+                <a16:creationId xmlns:a16="http://schemas.microsoft.com/office/drawing/2014/main" id="{313A6C7F-FDCD-429D-928A-CB5685FBFFD7}"/>
               </a:ext>
             </a:extLst>
           </p:cNvPr>
@@ -4682,7 +4682,7 @@
           <p:cNvPr id="7" name="TextBox 6">
             <a:extLst xmlns:a="http://schemas.openxmlformats.org/drawingml/2006/main">
               <a:ext uri="{FF2B5EF4-FFF2-40B4-BE49-F238E27FC236}">
-                <a16:creationId xmlns:a16="http://schemas.microsoft.com/office/drawing/2014/main" id="{C571D4DC-D040-4AF5-8E2B-B31E633F1FD3}"/>
+                <a16:creationId xmlns:a16="http://schemas.microsoft.com/office/drawing/2014/main" id="{7AE7C839-23E7-4B74-A43E-2CC1285046BC}"/>
               </a:ext>
             </a:extLst>
           </p:cNvPr>
@@ -4729,7 +4729,7 @@
           <p:cNvPr id="8" name="TextBox 7">
             <a:extLst xmlns:a="http://schemas.openxmlformats.org/drawingml/2006/main">
               <a:ext uri="{FF2B5EF4-FFF2-40B4-BE49-F238E27FC236}">
-                <a16:creationId xmlns:a16="http://schemas.microsoft.com/office/drawing/2014/main" id="{EE424507-2247-40D7-8718-00F083161A05}"/>
+                <a16:creationId xmlns:a16="http://schemas.microsoft.com/office/drawing/2014/main" id="{B56B9D8F-2618-4E5E-B5CA-BA5277A70188}"/>
               </a:ext>
             </a:extLst>
           </p:cNvPr>
@@ -4766,7 +4766,7 @@
                 <a:ea typeface="Aptos"/>
                 <a:cs typeface="Aptos"/>
               </a:rPr>
-              <a:t>2026.07.23-11</a:t>
+              <a:t>2026.07.23-12</a:t>
             </a:r>
           </a:p>
         </p:txBody>
@@ -4776,7 +4776,7 @@
           <p:cNvPr id="9" name="TextBox 8">
             <a:extLst xmlns:a="http://schemas.openxmlformats.org/drawingml/2006/main">
               <a:ext uri="{FF2B5EF4-FFF2-40B4-BE49-F238E27FC236}">
-                <a16:creationId xmlns:a16="http://schemas.microsoft.com/office/drawing/2014/main" id="{BBBBC098-8E09-4026-AD22-4E9149D8F15B}"/>
+                <a16:creationId xmlns:a16="http://schemas.microsoft.com/office/drawing/2014/main" id="{5A7D2873-325B-4CD2-BB3F-4C1DD6B8FE83}"/>
               </a:ext>
             </a:extLst>
           </p:cNvPr>
@@ -4844,7 +4844,7 @@
           <p:cNvPr id="10" name="TextBox 9">
             <a:extLst xmlns:a="http://schemas.openxmlformats.org/drawingml/2006/main">
               <a:ext uri="{FF2B5EF4-FFF2-40B4-BE49-F238E27FC236}">
-                <a16:creationId xmlns:a16="http://schemas.microsoft.com/office/drawing/2014/main" id="{AB4102BF-6240-4164-B5F3-1DED30625091}"/>
+                <a16:creationId xmlns:a16="http://schemas.microsoft.com/office/drawing/2014/main" id="{5C460A13-E484-4D14-9390-75E9AFC4632D}"/>
               </a:ext>
             </a:extLst>
           </p:cNvPr>
@@ -4891,7 +4891,7 @@
           <p:cNvPr id="11" name="TextBox 10">
             <a:extLst xmlns:a="http://schemas.openxmlformats.org/drawingml/2006/main">
               <a:ext uri="{FF2B5EF4-FFF2-40B4-BE49-F238E27FC236}">
-                <a16:creationId xmlns:a16="http://schemas.microsoft.com/office/drawing/2014/main" id="{50473676-FF63-4423-B6E0-710162F4D74E}"/>
+                <a16:creationId xmlns:a16="http://schemas.microsoft.com/office/drawing/2014/main" id="{877651A1-7686-4E0D-BDD2-17337B58A301}"/>
               </a:ext>
             </a:extLst>
           </p:cNvPr>
@@ -4938,7 +4938,7 @@
           <p:cNvPr id="12" name="TextBox 11">
             <a:extLst xmlns:a="http://schemas.openxmlformats.org/drawingml/2006/main">
               <a:ext uri="{FF2B5EF4-FFF2-40B4-BE49-F238E27FC236}">
-                <a16:creationId xmlns:a16="http://schemas.microsoft.com/office/drawing/2014/main" id="{6E5B62EA-260B-4FB3-8CE0-A78453F63F02}"/>
+                <a16:creationId xmlns:a16="http://schemas.microsoft.com/office/drawing/2014/main" id="{7D521D91-7A88-4759-8EDC-691A428C3101}"/>
               </a:ext>
             </a:extLst>
           </p:cNvPr>
@@ -4983,7 +4983,7 @@
     </p:spTree>
     <p:extLst>
       <p:ext uri="{BB962C8B-B14F-4D97-AF65-F5344CB8AC3E}">
-        <p14:creationId xmlns:p14="http://schemas.microsoft.com/office/powerpoint/2010/main" val="1871162585"/>
+        <p14:creationId xmlns:p14="http://schemas.microsoft.com/office/powerpoint/2010/main" val="40755812"/>
       </p:ext>
     </p:extLst>
   </p:cSld>
@@ -5007,7 +5007,7 @@
           <p:cNvPr id="2" name="TextBox 1">
             <a:extLst xmlns:a="http://schemas.openxmlformats.org/drawingml/2006/main">
               <a:ext uri="{FF2B5EF4-FFF2-40B4-BE49-F238E27FC236}">
-                <a16:creationId xmlns:a16="http://schemas.microsoft.com/office/drawing/2014/main" id="{4061435B-403C-41EE-882F-4DCA3305C83D}"/>
+                <a16:creationId xmlns:a16="http://schemas.microsoft.com/office/drawing/2014/main" id="{9AD9DD73-1C27-49EC-B4A6-DC1A259F5DD8}"/>
               </a:ext>
             </a:extLst>
           </p:cNvPr>
@@ -5054,7 +5054,7 @@
           <p:cNvPr id="3" name="TextBox 2">
             <a:extLst xmlns:a="http://schemas.openxmlformats.org/drawingml/2006/main">
               <a:ext uri="{FF2B5EF4-FFF2-40B4-BE49-F238E27FC236}">
-                <a16:creationId xmlns:a16="http://schemas.microsoft.com/office/drawing/2014/main" id="{13E66D01-A8BC-4CEF-904C-0AA0ED8CCF0E}"/>
+                <a16:creationId xmlns:a16="http://schemas.microsoft.com/office/drawing/2014/main" id="{4E28873F-2D06-46DE-8BFF-6D293D2AFEA9}"/>
               </a:ext>
             </a:extLst>
           </p:cNvPr>
@@ -5074,8 +5074,8 @@
           <a:noFill xmlns:a="http://schemas.openxmlformats.org/drawingml/2006/main"/>
         </p:spPr>
         <p:txBody>
-          <a:bodyPr xmlns:a="http://schemas.openxmlformats.org/drawingml/2006/main" wrap="square" lIns="36576" tIns="36576" rIns="36576" bIns="36576" anchor="t">
-            <a:spAutoFit/>
+          <a:bodyPr xmlns:a="http://schemas.openxmlformats.org/drawingml/2006/main" wrap="none" lIns="36576" tIns="36576" rIns="36576" bIns="36576" anchor="t">
+            <a:noAutofit/>
           </a:bodyPr>
           <a:lstStyle xmlns:a="http://schemas.openxmlformats.org/drawingml/2006/main"/>
           <a:p xmlns:a="http://schemas.openxmlformats.org/drawingml/2006/main">
@@ -5083,7 +5083,7 @@
               <a:buNone/>
             </a:pPr>
             <a:r>
-              <a:rPr sz="3400" b="1">
+              <a:rPr sz="2850" b="1">
                 <a:solidFill>
                   <a:srgbClr val="071A2B"/>
                 </a:solidFill>
@@ -5101,7 +5101,7 @@
           <p:cNvPr id="4" name="Rectangle 3">
             <a:extLst xmlns:a="http://schemas.openxmlformats.org/drawingml/2006/main">
               <a:ext uri="{FF2B5EF4-FFF2-40B4-BE49-F238E27FC236}">
-                <a16:creationId xmlns:a16="http://schemas.microsoft.com/office/drawing/2014/main" id="{118805B5-E92E-4BCF-AC31-9222A0154BA4}"/>
+                <a16:creationId xmlns:a16="http://schemas.microsoft.com/office/drawing/2014/main" id="{13B84510-4920-4816-96E7-289ED8E59D80}"/>
               </a:ext>
             </a:extLst>
           </p:cNvPr>
@@ -5156,7 +5156,7 @@
           <p:cNvPr id="5" name="Rectangle 4">
             <a:extLst xmlns:a="http://schemas.openxmlformats.org/drawingml/2006/main">
               <a:ext uri="{FF2B5EF4-FFF2-40B4-BE49-F238E27FC236}">
-                <a16:creationId xmlns:a16="http://schemas.microsoft.com/office/drawing/2014/main" id="{58BF5723-FC6C-465B-81ED-95F776B91723}"/>
+                <a16:creationId xmlns:a16="http://schemas.microsoft.com/office/drawing/2014/main" id="{96B391EF-8EDB-408B-A741-2FC6C743D44E}"/>
               </a:ext>
             </a:extLst>
           </p:cNvPr>
@@ -5211,7 +5211,7 @@
           <p:cNvPr id="6" name="TextBox 5">
             <a:extLst xmlns:a="http://schemas.openxmlformats.org/drawingml/2006/main">
               <a:ext uri="{FF2B5EF4-FFF2-40B4-BE49-F238E27FC236}">
-                <a16:creationId xmlns:a16="http://schemas.microsoft.com/office/drawing/2014/main" id="{5C524E3B-0E1F-4EB2-A6C7-2926486806F9}"/>
+                <a16:creationId xmlns:a16="http://schemas.microsoft.com/office/drawing/2014/main" id="{58BEFE1D-72B1-47D5-A03D-B1D9D0809CE7}"/>
               </a:ext>
             </a:extLst>
           </p:cNvPr>
@@ -5248,7 +5248,7 @@
                 <a:ea typeface="Aptos"/>
                 <a:cs typeface="Aptos"/>
               </a:rPr>
-              <a:t>Independent public evidence summary · 2026.07.23-11 · 2026-07-22 · Sources: EPO; Germany — official judgments; WIPO</a:t>
+              <a:t>Independent public evidence summary · 2026.07.23-12 · 2026-07-22 · Sources: EPO; Germany — official judgments; WIPO</a:t>
             </a:r>
           </a:p>
         </p:txBody>
@@ -5258,7 +5258,7 @@
           <p:cNvPr id="7" name="TextBox 6">
             <a:extLst xmlns:a="http://schemas.openxmlformats.org/drawingml/2006/main">
               <a:ext uri="{FF2B5EF4-FFF2-40B4-BE49-F238E27FC236}">
-                <a16:creationId xmlns:a16="http://schemas.microsoft.com/office/drawing/2014/main" id="{0CA9C8C8-D447-4886-BF19-4E01CC4E0AA8}"/>
+                <a16:creationId xmlns:a16="http://schemas.microsoft.com/office/drawing/2014/main" id="{5A89F13A-78E8-4C0A-A5F2-81C6FD41ADB5}"/>
               </a:ext>
             </a:extLst>
           </p:cNvPr>
@@ -5305,7 +5305,7 @@
           <p:cNvPr id="8" name="TextBox 7">
             <a:extLst xmlns:a="http://schemas.openxmlformats.org/drawingml/2006/main">
               <a:ext uri="{FF2B5EF4-FFF2-40B4-BE49-F238E27FC236}">
-                <a16:creationId xmlns:a16="http://schemas.microsoft.com/office/drawing/2014/main" id="{D842F3C5-2175-4B43-A863-FF18D71790D3}"/>
+                <a16:creationId xmlns:a16="http://schemas.microsoft.com/office/drawing/2014/main" id="{40ABEB6F-1E6E-4F65-B4A9-9C34046E27BD}"/>
               </a:ext>
             </a:extLst>
           </p:cNvPr>
@@ -5352,7 +5352,7 @@
           <p:cNvPr id="9" name="TextBox 8">
             <a:extLst xmlns:a="http://schemas.openxmlformats.org/drawingml/2006/main">
               <a:ext uri="{FF2B5EF4-FFF2-40B4-BE49-F238E27FC236}">
-                <a16:creationId xmlns:a16="http://schemas.microsoft.com/office/drawing/2014/main" id="{CB029BF5-8853-47D6-A275-2CC3EC2A5974}"/>
+                <a16:creationId xmlns:a16="http://schemas.microsoft.com/office/drawing/2014/main" id="{45296315-CE26-4FE0-A9D9-9B6D06247BC6}"/>
               </a:ext>
             </a:extLst>
           </p:cNvPr>
@@ -5449,7 +5449,7 @@
           <p:cNvPr id="10" name="Rounded Rectangle 9">
             <a:extLst xmlns:a="http://schemas.openxmlformats.org/drawingml/2006/main">
               <a:ext uri="{FF2B5EF4-FFF2-40B4-BE49-F238E27FC236}">
-                <a16:creationId xmlns:a16="http://schemas.microsoft.com/office/drawing/2014/main" id="{B13824C7-7E33-43FD-A332-AF4A291D325C}"/>
+                <a16:creationId xmlns:a16="http://schemas.microsoft.com/office/drawing/2014/main" id="{BA05F62D-2FB8-4C52-822A-CF68D6239355}"/>
               </a:ext>
             </a:extLst>
           </p:cNvPr>
@@ -5506,7 +5506,7 @@
           <p:cNvPr id="11" name="TextBox 10">
             <a:extLst xmlns:a="http://schemas.openxmlformats.org/drawingml/2006/main">
               <a:ext uri="{FF2B5EF4-FFF2-40B4-BE49-F238E27FC236}">
-                <a16:creationId xmlns:a16="http://schemas.microsoft.com/office/drawing/2014/main" id="{27E63F7D-BEDE-4368-93BF-17232098DB47}"/>
+                <a16:creationId xmlns:a16="http://schemas.microsoft.com/office/drawing/2014/main" id="{5E554DE0-1C60-40EE-AF4E-6CE61F732696}"/>
               </a:ext>
             </a:extLst>
           </p:cNvPr>
@@ -5553,7 +5553,7 @@
           <p:cNvPr id="12" name="TextBox 11">
             <a:extLst xmlns:a="http://schemas.openxmlformats.org/drawingml/2006/main">
               <a:ext uri="{FF2B5EF4-FFF2-40B4-BE49-F238E27FC236}">
-                <a16:creationId xmlns:a16="http://schemas.microsoft.com/office/drawing/2014/main" id="{5C88AB4F-B0A1-4CF7-BCF3-3E89C2E99B84}"/>
+                <a16:creationId xmlns:a16="http://schemas.microsoft.com/office/drawing/2014/main" id="{2F46D4FA-8064-42D3-814C-404EBC3AF9E4}"/>
               </a:ext>
             </a:extLst>
           </p:cNvPr>
@@ -5598,7 +5598,7 @@
     </p:spTree>
     <p:extLst>
       <p:ext uri="{BB962C8B-B14F-4D97-AF65-F5344CB8AC3E}">
-        <p14:creationId xmlns:p14="http://schemas.microsoft.com/office/powerpoint/2010/main" val="2147409095"/>
+        <p14:creationId xmlns:p14="http://schemas.microsoft.com/office/powerpoint/2010/main" val="474319197"/>
       </p:ext>
     </p:extLst>
   </p:cSld>
@@ -5622,7 +5622,7 @@
           <p:cNvPr id="2" name="TextBox 1">
             <a:extLst xmlns:a="http://schemas.openxmlformats.org/drawingml/2006/main">
               <a:ext uri="{FF2B5EF4-FFF2-40B4-BE49-F238E27FC236}">
-                <a16:creationId xmlns:a16="http://schemas.microsoft.com/office/drawing/2014/main" id="{E1EECEAC-1FD4-4D7C-B18E-1AEA683D573F}"/>
+                <a16:creationId xmlns:a16="http://schemas.microsoft.com/office/drawing/2014/main" id="{FEA59409-E1A5-4624-B68F-DE6BCEBBCA82}"/>
               </a:ext>
             </a:extLst>
           </p:cNvPr>
@@ -5669,7 +5669,7 @@
           <p:cNvPr id="3" name="TextBox 2">
             <a:extLst xmlns:a="http://schemas.openxmlformats.org/drawingml/2006/main">
               <a:ext uri="{FF2B5EF4-FFF2-40B4-BE49-F238E27FC236}">
-                <a16:creationId xmlns:a16="http://schemas.microsoft.com/office/drawing/2014/main" id="{0F960ED2-99D8-4D40-B0D7-5BD1ACC3B3E1}"/>
+                <a16:creationId xmlns:a16="http://schemas.microsoft.com/office/drawing/2014/main" id="{47370A13-C368-4944-A5E1-6E7067052C80}"/>
               </a:ext>
             </a:extLst>
           </p:cNvPr>
@@ -5716,7 +5716,7 @@
           <p:cNvPr id="4" name="Rectangle 3">
             <a:extLst xmlns:a="http://schemas.openxmlformats.org/drawingml/2006/main">
               <a:ext uri="{FF2B5EF4-FFF2-40B4-BE49-F238E27FC236}">
-                <a16:creationId xmlns:a16="http://schemas.microsoft.com/office/drawing/2014/main" id="{0852A895-512A-4AB3-9480-2D373D027287}"/>
+                <a16:creationId xmlns:a16="http://schemas.microsoft.com/office/drawing/2014/main" id="{8A72F6F3-24B8-42AC-9679-B485BB6AC9DD}"/>
               </a:ext>
             </a:extLst>
           </p:cNvPr>
@@ -5771,7 +5771,7 @@
           <p:cNvPr id="5" name="Rectangle 4">
             <a:extLst xmlns:a="http://schemas.openxmlformats.org/drawingml/2006/main">
               <a:ext uri="{FF2B5EF4-FFF2-40B4-BE49-F238E27FC236}">
-                <a16:creationId xmlns:a16="http://schemas.microsoft.com/office/drawing/2014/main" id="{D3AF4404-1FC8-4AA5-AE3E-3BEB6388E34E}"/>
+                <a16:creationId xmlns:a16="http://schemas.microsoft.com/office/drawing/2014/main" id="{0990455C-C191-47B2-9F43-CC9E85C6CBB2}"/>
               </a:ext>
             </a:extLst>
           </p:cNvPr>
@@ -5826,7 +5826,7 @@
           <p:cNvPr id="6" name="TextBox 5">
             <a:extLst xmlns:a="http://schemas.openxmlformats.org/drawingml/2006/main">
               <a:ext uri="{FF2B5EF4-FFF2-40B4-BE49-F238E27FC236}">
-                <a16:creationId xmlns:a16="http://schemas.microsoft.com/office/drawing/2014/main" id="{98FB1572-A2E0-4099-B715-728E4D6D4D6B}"/>
+                <a16:creationId xmlns:a16="http://schemas.microsoft.com/office/drawing/2014/main" id="{EEBBB0F5-DAE2-4335-9356-3E821424E1B3}"/>
               </a:ext>
             </a:extLst>
           </p:cNvPr>
@@ -5863,7 +5863,7 @@
                 <a:ea typeface="Aptos"/>
                 <a:cs typeface="Aptos"/>
               </a:rPr>
-              <a:t>Independent public evidence summary · 2026.07.23-11 · 2026-07-22 · Sources: EPO Register; EP3032975B2; 8 Ni 18/24 (EP); 7 O 3341/24</a:t>
+              <a:t>Independent public evidence summary · 2026.07.23-12 · 2026-07-22 · Sources: EPO Register; EP3032975B2; 8 Ni 18/24 (EP); 7 O 3341/24</a:t>
             </a:r>
           </a:p>
         </p:txBody>
@@ -5873,7 +5873,7 @@
           <p:cNvPr id="7" name="TextBox 6">
             <a:extLst xmlns:a="http://schemas.openxmlformats.org/drawingml/2006/main">
               <a:ext uri="{FF2B5EF4-FFF2-40B4-BE49-F238E27FC236}">
-                <a16:creationId xmlns:a16="http://schemas.microsoft.com/office/drawing/2014/main" id="{2226E46E-671A-49C4-9E94-1DE640E3597F}"/>
+                <a16:creationId xmlns:a16="http://schemas.microsoft.com/office/drawing/2014/main" id="{649CFE01-9F9B-47E1-9F9F-956F1749628E}"/>
               </a:ext>
             </a:extLst>
           </p:cNvPr>
@@ -5920,7 +5920,7 @@
           <p:cNvPr id="8" name="Rounded Rectangle 7">
             <a:extLst xmlns:a="http://schemas.openxmlformats.org/drawingml/2006/main">
               <a:ext uri="{FF2B5EF4-FFF2-40B4-BE49-F238E27FC236}">
-                <a16:creationId xmlns:a16="http://schemas.microsoft.com/office/drawing/2014/main" id="{0AF286D4-76C3-4B65-8DD5-906BF002308B}"/>
+                <a16:creationId xmlns:a16="http://schemas.microsoft.com/office/drawing/2014/main" id="{8694A321-C4B9-4E14-B50C-4743DB7CCD81}"/>
               </a:ext>
             </a:extLst>
           </p:cNvPr>
@@ -5977,7 +5977,7 @@
           <p:cNvPr id="9" name="TextBox 8">
             <a:extLst xmlns:a="http://schemas.openxmlformats.org/drawingml/2006/main">
               <a:ext uri="{FF2B5EF4-FFF2-40B4-BE49-F238E27FC236}">
-                <a16:creationId xmlns:a16="http://schemas.microsoft.com/office/drawing/2014/main" id="{6452B88C-981F-49DD-811B-E8EE2DF08711}"/>
+                <a16:creationId xmlns:a16="http://schemas.microsoft.com/office/drawing/2014/main" id="{14821B0D-1FC5-4DDD-AEC9-3B2F7BB636A9}"/>
               </a:ext>
             </a:extLst>
           </p:cNvPr>
@@ -6024,7 +6024,7 @@
           <p:cNvPr id="10" name="TextBox 9">
             <a:extLst xmlns:a="http://schemas.openxmlformats.org/drawingml/2006/main">
               <a:ext uri="{FF2B5EF4-FFF2-40B4-BE49-F238E27FC236}">
-                <a16:creationId xmlns:a16="http://schemas.microsoft.com/office/drawing/2014/main" id="{81E2BAC7-5A18-4CED-A687-30B8141DE3EE}"/>
+                <a16:creationId xmlns:a16="http://schemas.microsoft.com/office/drawing/2014/main" id="{229FE5A4-E638-40F7-B7D2-1CC222DD2AA9}"/>
               </a:ext>
             </a:extLst>
           </p:cNvPr>
@@ -6071,7 +6071,7 @@
           <p:cNvPr id="11" name="Rounded Rectangle 10">
             <a:extLst xmlns:a="http://schemas.openxmlformats.org/drawingml/2006/main">
               <a:ext uri="{FF2B5EF4-FFF2-40B4-BE49-F238E27FC236}">
-                <a16:creationId xmlns:a16="http://schemas.microsoft.com/office/drawing/2014/main" id="{66E7F67F-98E7-4D2B-B3B3-35A34B9B3800}"/>
+                <a16:creationId xmlns:a16="http://schemas.microsoft.com/office/drawing/2014/main" id="{E2AB3107-1BF1-4896-B357-9E982162F8E2}"/>
               </a:ext>
             </a:extLst>
           </p:cNvPr>
@@ -6128,7 +6128,7 @@
           <p:cNvPr id="12" name="TextBox 11">
             <a:extLst xmlns:a="http://schemas.openxmlformats.org/drawingml/2006/main">
               <a:ext uri="{FF2B5EF4-FFF2-40B4-BE49-F238E27FC236}">
-                <a16:creationId xmlns:a16="http://schemas.microsoft.com/office/drawing/2014/main" id="{3C3212C9-59A9-4E55-8EA9-878025D3B0E3}"/>
+                <a16:creationId xmlns:a16="http://schemas.microsoft.com/office/drawing/2014/main" id="{0EFFE8CA-B42E-496E-B42C-4BD35C8B12C1}"/>
               </a:ext>
             </a:extLst>
           </p:cNvPr>
@@ -6175,7 +6175,7 @@
           <p:cNvPr id="13" name="TextBox 12">
             <a:extLst xmlns:a="http://schemas.openxmlformats.org/drawingml/2006/main">
               <a:ext uri="{FF2B5EF4-FFF2-40B4-BE49-F238E27FC236}">
-                <a16:creationId xmlns:a16="http://schemas.microsoft.com/office/drawing/2014/main" id="{C814BBFB-3CD9-48BE-948D-3B31C596F468}"/>
+                <a16:creationId xmlns:a16="http://schemas.microsoft.com/office/drawing/2014/main" id="{F5315F3D-94C6-4E0E-9ED2-88A6AB9663A5}"/>
               </a:ext>
             </a:extLst>
           </p:cNvPr>
@@ -6222,7 +6222,7 @@
           <p:cNvPr id="14" name="Rounded Rectangle 13">
             <a:extLst xmlns:a="http://schemas.openxmlformats.org/drawingml/2006/main">
               <a:ext uri="{FF2B5EF4-FFF2-40B4-BE49-F238E27FC236}">
-                <a16:creationId xmlns:a16="http://schemas.microsoft.com/office/drawing/2014/main" id="{6A57FC91-2FD6-4B4D-BD23-1CC8D547D5EA}"/>
+                <a16:creationId xmlns:a16="http://schemas.microsoft.com/office/drawing/2014/main" id="{144EADEB-9C77-4A7E-BE80-66E2A277F0C0}"/>
               </a:ext>
             </a:extLst>
           </p:cNvPr>
@@ -6279,7 +6279,7 @@
           <p:cNvPr id="15" name="TextBox 14">
             <a:extLst xmlns:a="http://schemas.openxmlformats.org/drawingml/2006/main">
               <a:ext uri="{FF2B5EF4-FFF2-40B4-BE49-F238E27FC236}">
-                <a16:creationId xmlns:a16="http://schemas.microsoft.com/office/drawing/2014/main" id="{FC7C19EF-5C92-45E3-A3A6-C88C0CAD8975}"/>
+                <a16:creationId xmlns:a16="http://schemas.microsoft.com/office/drawing/2014/main" id="{EA4090AD-B092-4AAA-BF32-F178BCEE884E}"/>
               </a:ext>
             </a:extLst>
           </p:cNvPr>
@@ -6326,7 +6326,7 @@
           <p:cNvPr id="16" name="TextBox 15">
             <a:extLst xmlns:a="http://schemas.openxmlformats.org/drawingml/2006/main">
               <a:ext uri="{FF2B5EF4-FFF2-40B4-BE49-F238E27FC236}">
-                <a16:creationId xmlns:a16="http://schemas.microsoft.com/office/drawing/2014/main" id="{2C40F79D-950F-472E-9541-28B5E053D4B8}"/>
+                <a16:creationId xmlns:a16="http://schemas.microsoft.com/office/drawing/2014/main" id="{3CA4A3A5-297C-4810-BE51-DF1C840B2306}"/>
               </a:ext>
             </a:extLst>
           </p:cNvPr>
@@ -6373,7 +6373,7 @@
           <p:cNvPr id="17" name="TextBox 16">
             <a:extLst xmlns:a="http://schemas.openxmlformats.org/drawingml/2006/main">
               <a:ext uri="{FF2B5EF4-FFF2-40B4-BE49-F238E27FC236}">
-                <a16:creationId xmlns:a16="http://schemas.microsoft.com/office/drawing/2014/main" id="{F649F69B-8149-4AA4-A732-B45B0F590AF0}"/>
+                <a16:creationId xmlns:a16="http://schemas.microsoft.com/office/drawing/2014/main" id="{959B5B45-1AD2-4CF7-97AE-DEB081C27855}"/>
               </a:ext>
             </a:extLst>
           </p:cNvPr>
@@ -6420,7 +6420,7 @@
           <p:cNvPr id="18" name="Rounded Rectangle 17">
             <a:extLst xmlns:a="http://schemas.openxmlformats.org/drawingml/2006/main">
               <a:ext uri="{FF2B5EF4-FFF2-40B4-BE49-F238E27FC236}">
-                <a16:creationId xmlns:a16="http://schemas.microsoft.com/office/drawing/2014/main" id="{993766B0-BAA2-4B3C-B3C4-61ED4F252BA7}"/>
+                <a16:creationId xmlns:a16="http://schemas.microsoft.com/office/drawing/2014/main" id="{6B546696-368C-4D46-BB06-120A5B058D92}"/>
               </a:ext>
             </a:extLst>
           </p:cNvPr>
@@ -6477,7 +6477,7 @@
           <p:cNvPr id="19" name="TextBox 18">
             <a:extLst xmlns:a="http://schemas.openxmlformats.org/drawingml/2006/main">
               <a:ext uri="{FF2B5EF4-FFF2-40B4-BE49-F238E27FC236}">
-                <a16:creationId xmlns:a16="http://schemas.microsoft.com/office/drawing/2014/main" id="{0E2F635B-1951-4774-8030-EDEF56E4DE30}"/>
+                <a16:creationId xmlns:a16="http://schemas.microsoft.com/office/drawing/2014/main" id="{7AD66CDC-7371-49DD-A287-5E36C0B11876}"/>
               </a:ext>
             </a:extLst>
           </p:cNvPr>
@@ -6524,7 +6524,7 @@
           <p:cNvPr id="20" name="TextBox 19">
             <a:extLst xmlns:a="http://schemas.openxmlformats.org/drawingml/2006/main">
               <a:ext uri="{FF2B5EF4-FFF2-40B4-BE49-F238E27FC236}">
-                <a16:creationId xmlns:a16="http://schemas.microsoft.com/office/drawing/2014/main" id="{EFD13F05-A033-49F2-9D69-144B02F586B3}"/>
+                <a16:creationId xmlns:a16="http://schemas.microsoft.com/office/drawing/2014/main" id="{2631E047-DD0B-49E3-9DC9-A5509E2DCBC4}"/>
               </a:ext>
             </a:extLst>
           </p:cNvPr>
@@ -6569,7 +6569,7 @@
     </p:spTree>
     <p:extLst>
       <p:ext uri="{BB962C8B-B14F-4D97-AF65-F5344CB8AC3E}">
-        <p14:creationId xmlns:p14="http://schemas.microsoft.com/office/powerpoint/2010/main" val="1132169893"/>
+        <p14:creationId xmlns:p14="http://schemas.microsoft.com/office/powerpoint/2010/main" val="666233458"/>
       </p:ext>
     </p:extLst>
   </p:cSld>
@@ -6593,7 +6593,7 @@
           <p:cNvPr id="2" name="TextBox 1">
             <a:extLst xmlns:a="http://schemas.openxmlformats.org/drawingml/2006/main">
               <a:ext uri="{FF2B5EF4-FFF2-40B4-BE49-F238E27FC236}">
-                <a16:creationId xmlns:a16="http://schemas.microsoft.com/office/drawing/2014/main" id="{4E079688-BF07-446D-9678-3F6713926CC4}"/>
+                <a16:creationId xmlns:a16="http://schemas.microsoft.com/office/drawing/2014/main" id="{244442BF-5CE8-4A1A-A6EC-87E4558575C8}"/>
               </a:ext>
             </a:extLst>
           </p:cNvPr>
@@ -6640,7 +6640,7 @@
           <p:cNvPr id="3" name="TextBox 2">
             <a:extLst xmlns:a="http://schemas.openxmlformats.org/drawingml/2006/main">
               <a:ext uri="{FF2B5EF4-FFF2-40B4-BE49-F238E27FC236}">
-                <a16:creationId xmlns:a16="http://schemas.microsoft.com/office/drawing/2014/main" id="{052193B6-06CC-427D-969B-9D9A4C455EA3}"/>
+                <a16:creationId xmlns:a16="http://schemas.microsoft.com/office/drawing/2014/main" id="{641C5736-78FC-480B-A5EA-18255A993C8D}"/>
               </a:ext>
             </a:extLst>
           </p:cNvPr>
@@ -6660,8 +6660,8 @@
           <a:noFill xmlns:a="http://schemas.openxmlformats.org/drawingml/2006/main"/>
         </p:spPr>
         <p:txBody>
-          <a:bodyPr xmlns:a="http://schemas.openxmlformats.org/drawingml/2006/main" wrap="square" lIns="36576" tIns="36576" rIns="36576" bIns="36576" anchor="t">
-            <a:spAutoFit/>
+          <a:bodyPr xmlns:a="http://schemas.openxmlformats.org/drawingml/2006/main" wrap="none" lIns="36576" tIns="36576" rIns="36576" bIns="36576" anchor="t">
+            <a:noAutofit/>
           </a:bodyPr>
           <a:lstStyle xmlns:a="http://schemas.openxmlformats.org/drawingml/2006/main"/>
           <a:p xmlns:a="http://schemas.openxmlformats.org/drawingml/2006/main">
@@ -6669,7 +6669,7 @@
               <a:buNone/>
             </a:pPr>
             <a:r>
-              <a:rPr sz="3400" b="1">
+              <a:rPr sz="2475" b="1">
                 <a:solidFill>
                   <a:srgbClr val="071A2B"/>
                 </a:solidFill>
@@ -6687,7 +6687,7 @@
           <p:cNvPr id="4" name="Rectangle 3">
             <a:extLst xmlns:a="http://schemas.openxmlformats.org/drawingml/2006/main">
               <a:ext uri="{FF2B5EF4-FFF2-40B4-BE49-F238E27FC236}">
-                <a16:creationId xmlns:a16="http://schemas.microsoft.com/office/drawing/2014/main" id="{D120C76E-1463-42A7-87EF-AB7EB64BBA43}"/>
+                <a16:creationId xmlns:a16="http://schemas.microsoft.com/office/drawing/2014/main" id="{55CAACA3-5EB7-421E-A695-2E85181BE867}"/>
               </a:ext>
             </a:extLst>
           </p:cNvPr>
@@ -6742,7 +6742,7 @@
           <p:cNvPr id="5" name="Rectangle 4">
             <a:extLst xmlns:a="http://schemas.openxmlformats.org/drawingml/2006/main">
               <a:ext uri="{FF2B5EF4-FFF2-40B4-BE49-F238E27FC236}">
-                <a16:creationId xmlns:a16="http://schemas.microsoft.com/office/drawing/2014/main" id="{F68AB2E1-94A0-4CA5-9A7E-A92585C59B03}"/>
+                <a16:creationId xmlns:a16="http://schemas.microsoft.com/office/drawing/2014/main" id="{A93654F8-38B8-4996-B525-B3F5D5B9DC26}"/>
               </a:ext>
             </a:extLst>
           </p:cNvPr>
@@ -6797,7 +6797,7 @@
           <p:cNvPr id="6" name="TextBox 5">
             <a:extLst xmlns:a="http://schemas.openxmlformats.org/drawingml/2006/main">
               <a:ext uri="{FF2B5EF4-FFF2-40B4-BE49-F238E27FC236}">
-                <a16:creationId xmlns:a16="http://schemas.microsoft.com/office/drawing/2014/main" id="{B465759E-99F7-4227-95B9-1DAC6BFA6152}"/>
+                <a16:creationId xmlns:a16="http://schemas.microsoft.com/office/drawing/2014/main" id="{1094FAAD-E34C-4813-84A5-CEB77335A9C5}"/>
               </a:ext>
             </a:extLst>
           </p:cNvPr>
@@ -6834,7 +6834,7 @@
                 <a:ea typeface="Aptos"/>
                 <a:cs typeface="Aptos"/>
               </a:rPr>
-              <a:t>Independent public evidence summary · 2026.07.23-11 · 2026-07-22 · Sources: Health Canada; Destatis; Vero; Sejm; Swedish Government</a:t>
+              <a:t>Independent public evidence summary · 2026.07.23-12 · 2026-07-22 · Sources: Health Canada; Destatis; Vero; Sejm; Swedish Government</a:t>
             </a:r>
           </a:p>
         </p:txBody>
@@ -6844,7 +6844,7 @@
           <p:cNvPr id="7" name="TextBox 6">
             <a:extLst xmlns:a="http://schemas.openxmlformats.org/drawingml/2006/main">
               <a:ext uri="{FF2B5EF4-FFF2-40B4-BE49-F238E27FC236}">
-                <a16:creationId xmlns:a16="http://schemas.microsoft.com/office/drawing/2014/main" id="{2EEE4178-CDDA-4AF1-8761-BD3A6D7C44C0}"/>
+                <a16:creationId xmlns:a16="http://schemas.microsoft.com/office/drawing/2014/main" id="{CADFF026-4ECF-413B-BEE5-4AAC73B6F43D}"/>
               </a:ext>
             </a:extLst>
           </p:cNvPr>
@@ -6891,7 +6891,7 @@
           <p:cNvPr id="8" name="Rounded Rectangle 7">
             <a:extLst xmlns:a="http://schemas.openxmlformats.org/drawingml/2006/main">
               <a:ext uri="{FF2B5EF4-FFF2-40B4-BE49-F238E27FC236}">
-                <a16:creationId xmlns:a16="http://schemas.microsoft.com/office/drawing/2014/main" id="{A0E70488-21A1-4FCC-9992-6A8DE519EB31}"/>
+                <a16:creationId xmlns:a16="http://schemas.microsoft.com/office/drawing/2014/main" id="{27404C93-0A9B-456A-BDD4-977B7C39E376}"/>
               </a:ext>
             </a:extLst>
           </p:cNvPr>
@@ -6948,7 +6948,7 @@
           <p:cNvPr id="9" name="TextBox 8">
             <a:extLst xmlns:a="http://schemas.openxmlformats.org/drawingml/2006/main">
               <a:ext uri="{FF2B5EF4-FFF2-40B4-BE49-F238E27FC236}">
-                <a16:creationId xmlns:a16="http://schemas.microsoft.com/office/drawing/2014/main" id="{B7AD90F4-9F67-49BE-B5B9-C2916BF111A0}"/>
+                <a16:creationId xmlns:a16="http://schemas.microsoft.com/office/drawing/2014/main" id="{48180A8E-5072-49A2-8FCE-497C74D4039B}"/>
               </a:ext>
             </a:extLst>
           </p:cNvPr>
@@ -6995,7 +6995,7 @@
           <p:cNvPr id="10" name="TextBox 9">
             <a:extLst xmlns:a="http://schemas.openxmlformats.org/drawingml/2006/main">
               <a:ext uri="{FF2B5EF4-FFF2-40B4-BE49-F238E27FC236}">
-                <a16:creationId xmlns:a16="http://schemas.microsoft.com/office/drawing/2014/main" id="{39EF60C0-64E5-40BE-996F-315C2907FC42}"/>
+                <a16:creationId xmlns:a16="http://schemas.microsoft.com/office/drawing/2014/main" id="{01A72669-0AA3-49CD-A433-430EE2CD02A6}"/>
               </a:ext>
             </a:extLst>
           </p:cNvPr>
@@ -7042,7 +7042,7 @@
           <p:cNvPr id="11" name="Rounded Rectangle 10">
             <a:extLst xmlns:a="http://schemas.openxmlformats.org/drawingml/2006/main">
               <a:ext uri="{FF2B5EF4-FFF2-40B4-BE49-F238E27FC236}">
-                <a16:creationId xmlns:a16="http://schemas.microsoft.com/office/drawing/2014/main" id="{447341AE-D232-4BAA-BE3B-748DE4A33A9E}"/>
+                <a16:creationId xmlns:a16="http://schemas.microsoft.com/office/drawing/2014/main" id="{7BF99253-A7AD-4F44-9188-39D6C03D7DF4}"/>
               </a:ext>
             </a:extLst>
           </p:cNvPr>
@@ -7099,7 +7099,7 @@
           <p:cNvPr id="12" name="TextBox 11">
             <a:extLst xmlns:a="http://schemas.openxmlformats.org/drawingml/2006/main">
               <a:ext uri="{FF2B5EF4-FFF2-40B4-BE49-F238E27FC236}">
-                <a16:creationId xmlns:a16="http://schemas.microsoft.com/office/drawing/2014/main" id="{2354F33C-816A-40BF-A21E-C81A7F35EB60}"/>
+                <a16:creationId xmlns:a16="http://schemas.microsoft.com/office/drawing/2014/main" id="{DE5A58F0-9ADF-4B92-84A7-978F21ADA257}"/>
               </a:ext>
             </a:extLst>
           </p:cNvPr>
@@ -7146,7 +7146,7 @@
           <p:cNvPr id="13" name="TextBox 12">
             <a:extLst xmlns:a="http://schemas.openxmlformats.org/drawingml/2006/main">
               <a:ext uri="{FF2B5EF4-FFF2-40B4-BE49-F238E27FC236}">
-                <a16:creationId xmlns:a16="http://schemas.microsoft.com/office/drawing/2014/main" id="{164BD196-CE64-4DBE-BB7A-322C38F87AD8}"/>
+                <a16:creationId xmlns:a16="http://schemas.microsoft.com/office/drawing/2014/main" id="{9500F128-1548-4B0B-9B3B-66B05C66671C}"/>
               </a:ext>
             </a:extLst>
           </p:cNvPr>
@@ -7193,7 +7193,7 @@
           <p:cNvPr id="14" name="Rounded Rectangle 13">
             <a:extLst xmlns:a="http://schemas.openxmlformats.org/drawingml/2006/main">
               <a:ext uri="{FF2B5EF4-FFF2-40B4-BE49-F238E27FC236}">
-                <a16:creationId xmlns:a16="http://schemas.microsoft.com/office/drawing/2014/main" id="{05832718-8791-43AE-ABBA-6D2D0A272AB2}"/>
+                <a16:creationId xmlns:a16="http://schemas.microsoft.com/office/drawing/2014/main" id="{09F7AC2F-3A84-4712-9716-2B5300983CA0}"/>
               </a:ext>
             </a:extLst>
           </p:cNvPr>
@@ -7250,7 +7250,7 @@
           <p:cNvPr id="15" name="TextBox 14">
             <a:extLst xmlns:a="http://schemas.openxmlformats.org/drawingml/2006/main">
               <a:ext uri="{FF2B5EF4-FFF2-40B4-BE49-F238E27FC236}">
-                <a16:creationId xmlns:a16="http://schemas.microsoft.com/office/drawing/2014/main" id="{F6733F4D-2562-4DA8-BFDD-452BCC03B569}"/>
+                <a16:creationId xmlns:a16="http://schemas.microsoft.com/office/drawing/2014/main" id="{E5B8178E-91E8-4D1C-AB94-DCD3A70151CB}"/>
               </a:ext>
             </a:extLst>
           </p:cNvPr>
@@ -7297,7 +7297,7 @@
           <p:cNvPr id="16" name="TextBox 15">
             <a:extLst xmlns:a="http://schemas.openxmlformats.org/drawingml/2006/main">
               <a:ext uri="{FF2B5EF4-FFF2-40B4-BE49-F238E27FC236}">
-                <a16:creationId xmlns:a16="http://schemas.microsoft.com/office/drawing/2014/main" id="{6D00179F-81CE-4D6D-8533-B7C74902EF7D}"/>
+                <a16:creationId xmlns:a16="http://schemas.microsoft.com/office/drawing/2014/main" id="{32D93B3F-E7B1-4E92-AF92-25DE533A02B3}"/>
               </a:ext>
             </a:extLst>
           </p:cNvPr>
@@ -7344,7 +7344,7 @@
           <p:cNvPr id="17" name="TextBox 16">
             <a:extLst xmlns:a="http://schemas.openxmlformats.org/drawingml/2006/main">
               <a:ext uri="{FF2B5EF4-FFF2-40B4-BE49-F238E27FC236}">
-                <a16:creationId xmlns:a16="http://schemas.microsoft.com/office/drawing/2014/main" id="{E02825AE-1693-46BA-B1C4-A86CA0FFC218}"/>
+                <a16:creationId xmlns:a16="http://schemas.microsoft.com/office/drawing/2014/main" id="{98B7349B-0F73-4200-AF3F-B18873FE9618}"/>
               </a:ext>
             </a:extLst>
           </p:cNvPr>
@@ -7391,7 +7391,7 @@
           <p:cNvPr id="18" name="Rounded Rectangle 17">
             <a:extLst xmlns:a="http://schemas.openxmlformats.org/drawingml/2006/main">
               <a:ext uri="{FF2B5EF4-FFF2-40B4-BE49-F238E27FC236}">
-                <a16:creationId xmlns:a16="http://schemas.microsoft.com/office/drawing/2014/main" id="{154F2797-8AE4-4348-A3B6-F484B4B37CB7}"/>
+                <a16:creationId xmlns:a16="http://schemas.microsoft.com/office/drawing/2014/main" id="{9A11A85D-4BCA-459F-9CAF-28EE5AED365E}"/>
               </a:ext>
             </a:extLst>
           </p:cNvPr>
@@ -7448,7 +7448,7 @@
           <p:cNvPr id="19" name="TextBox 18">
             <a:extLst xmlns:a="http://schemas.openxmlformats.org/drawingml/2006/main">
               <a:ext uri="{FF2B5EF4-FFF2-40B4-BE49-F238E27FC236}">
-                <a16:creationId xmlns:a16="http://schemas.microsoft.com/office/drawing/2014/main" id="{AC0983E9-A2BD-483E-893E-6F38397AAAFE}"/>
+                <a16:creationId xmlns:a16="http://schemas.microsoft.com/office/drawing/2014/main" id="{EA34E1BB-92AE-4C25-9ED1-E4B7489B114C}"/>
               </a:ext>
             </a:extLst>
           </p:cNvPr>
@@ -7495,7 +7495,7 @@
           <p:cNvPr id="20" name="TextBox 19">
             <a:extLst xmlns:a="http://schemas.openxmlformats.org/drawingml/2006/main">
               <a:ext uri="{FF2B5EF4-FFF2-40B4-BE49-F238E27FC236}">
-                <a16:creationId xmlns:a16="http://schemas.microsoft.com/office/drawing/2014/main" id="{226308D1-ED76-454B-BF1E-CBE945B155BF}"/>
+                <a16:creationId xmlns:a16="http://schemas.microsoft.com/office/drawing/2014/main" id="{23EF08A5-B174-46E5-BB19-D294502ABBFF}"/>
               </a:ext>
             </a:extLst>
           </p:cNvPr>
@@ -7540,7 +7540,7 @@
     </p:spTree>
     <p:extLst>
       <p:ext uri="{BB962C8B-B14F-4D97-AF65-F5344CB8AC3E}">
-        <p14:creationId xmlns:p14="http://schemas.microsoft.com/office/powerpoint/2010/main" val="1001486093"/>
+        <p14:creationId xmlns:p14="http://schemas.microsoft.com/office/powerpoint/2010/main" val="1958011293"/>
       </p:ext>
     </p:extLst>
   </p:cSld>
@@ -7564,7 +7564,7 @@
           <p:cNvPr id="2" name="TextBox 1">
             <a:extLst xmlns:a="http://schemas.openxmlformats.org/drawingml/2006/main">
               <a:ext uri="{FF2B5EF4-FFF2-40B4-BE49-F238E27FC236}">
-                <a16:creationId xmlns:a16="http://schemas.microsoft.com/office/drawing/2014/main" id="{7F2FE077-6ECB-44B2-8836-45EDA80448DD}"/>
+                <a16:creationId xmlns:a16="http://schemas.microsoft.com/office/drawing/2014/main" id="{C2169F50-3121-4404-B80C-2C9363777881}"/>
               </a:ext>
             </a:extLst>
           </p:cNvPr>
@@ -7611,7 +7611,7 @@
           <p:cNvPr id="3" name="TextBox 2">
             <a:extLst xmlns:a="http://schemas.openxmlformats.org/drawingml/2006/main">
               <a:ext uri="{FF2B5EF4-FFF2-40B4-BE49-F238E27FC236}">
-                <a16:creationId xmlns:a16="http://schemas.microsoft.com/office/drawing/2014/main" id="{FA8F4BB8-9A3C-46DF-8680-BAEAE419D2AB}"/>
+                <a16:creationId xmlns:a16="http://schemas.microsoft.com/office/drawing/2014/main" id="{BB7895B2-A611-4D41-BA77-F5C192917DAF}"/>
               </a:ext>
             </a:extLst>
           </p:cNvPr>
@@ -7631,8 +7631,8 @@
           <a:noFill xmlns:a="http://schemas.openxmlformats.org/drawingml/2006/main"/>
         </p:spPr>
         <p:txBody>
-          <a:bodyPr xmlns:a="http://schemas.openxmlformats.org/drawingml/2006/main" wrap="square" lIns="36576" tIns="36576" rIns="36576" bIns="36576" anchor="t">
-            <a:spAutoFit/>
+          <a:bodyPr xmlns:a="http://schemas.openxmlformats.org/drawingml/2006/main" wrap="none" lIns="36576" tIns="36576" rIns="36576" bIns="36576" anchor="t">
+            <a:noAutofit/>
           </a:bodyPr>
           <a:lstStyle xmlns:a="http://schemas.openxmlformats.org/drawingml/2006/main"/>
           <a:p xmlns:a="http://schemas.openxmlformats.org/drawingml/2006/main">
@@ -7640,7 +7640,7 @@
               <a:buNone/>
             </a:pPr>
             <a:r>
-              <a:rPr sz="3400" b="1">
+              <a:rPr sz="3000" b="1">
                 <a:solidFill>
                   <a:srgbClr val="071A2B"/>
                 </a:solidFill>
@@ -7658,7 +7658,7 @@
           <p:cNvPr id="4" name="Rectangle 3">
             <a:extLst xmlns:a="http://schemas.openxmlformats.org/drawingml/2006/main">
               <a:ext uri="{FF2B5EF4-FFF2-40B4-BE49-F238E27FC236}">
-                <a16:creationId xmlns:a16="http://schemas.microsoft.com/office/drawing/2014/main" id="{349591EF-D4B6-4787-B95F-89C468527464}"/>
+                <a16:creationId xmlns:a16="http://schemas.microsoft.com/office/drawing/2014/main" id="{1E37B97E-B412-4A20-ABB5-17777011E41E}"/>
               </a:ext>
             </a:extLst>
           </p:cNvPr>
@@ -7713,7 +7713,7 @@
           <p:cNvPr id="5" name="Rectangle 4">
             <a:extLst xmlns:a="http://schemas.openxmlformats.org/drawingml/2006/main">
               <a:ext uri="{FF2B5EF4-FFF2-40B4-BE49-F238E27FC236}">
-                <a16:creationId xmlns:a16="http://schemas.microsoft.com/office/drawing/2014/main" id="{5B8D72AD-0981-42EA-934C-37897550EA02}"/>
+                <a16:creationId xmlns:a16="http://schemas.microsoft.com/office/drawing/2014/main" id="{599E574E-D537-4652-A587-1AD1FF3966AB}"/>
               </a:ext>
             </a:extLst>
           </p:cNvPr>
@@ -7768,7 +7768,7 @@
           <p:cNvPr id="6" name="TextBox 5">
             <a:extLst xmlns:a="http://schemas.openxmlformats.org/drawingml/2006/main">
               <a:ext uri="{FF2B5EF4-FFF2-40B4-BE49-F238E27FC236}">
-                <a16:creationId xmlns:a16="http://schemas.microsoft.com/office/drawing/2014/main" id="{159E51FB-9DD2-4180-A46B-0FB2B5A9FC43}"/>
+                <a16:creationId xmlns:a16="http://schemas.microsoft.com/office/drawing/2014/main" id="{1B9511EF-B0F3-4A6E-9573-12E77B76A686}"/>
               </a:ext>
             </a:extLst>
           </p:cNvPr>
@@ -7805,7 +7805,7 @@
                 <a:ea typeface="Aptos"/>
                 <a:cs typeface="Aptos"/>
               </a:rPr>
-              <a:t>Independent public evidence summary · 2026.07.23-11 · 2026-07-22 · Sources: Evidence Register; WIPO IP valuation</a:t>
+              <a:t>Independent public evidence summary · 2026.07.23-12 · 2026-07-22 · Sources: Evidence Register; WIPO IP valuation</a:t>
             </a:r>
           </a:p>
         </p:txBody>
@@ -7815,7 +7815,7 @@
           <p:cNvPr id="7" name="TextBox 6">
             <a:extLst xmlns:a="http://schemas.openxmlformats.org/drawingml/2006/main">
               <a:ext uri="{FF2B5EF4-FFF2-40B4-BE49-F238E27FC236}">
-                <a16:creationId xmlns:a16="http://schemas.microsoft.com/office/drawing/2014/main" id="{D19F94AE-DE63-4EA0-9F59-691B1536568F}"/>
+                <a16:creationId xmlns:a16="http://schemas.microsoft.com/office/drawing/2014/main" id="{1247A057-8F2B-4694-A237-12D4B920F0EA}"/>
               </a:ext>
             </a:extLst>
           </p:cNvPr>
@@ -8302,7 +8302,7 @@
           <p:cNvPr id="9" name="TextBox 8">
             <a:extLst xmlns:a="http://schemas.openxmlformats.org/drawingml/2006/main">
               <a:ext uri="{FF2B5EF4-FFF2-40B4-BE49-F238E27FC236}">
-                <a16:creationId xmlns:a16="http://schemas.microsoft.com/office/drawing/2014/main" id="{BEADA579-0CD7-4555-9BEA-E750F35782C1}"/>
+                <a16:creationId xmlns:a16="http://schemas.microsoft.com/office/drawing/2014/main" id="{F0A75BC2-810C-4A76-B5D2-E312C65F2F77}"/>
               </a:ext>
             </a:extLst>
           </p:cNvPr>
@@ -8347,7 +8347,7 @@
     </p:spTree>
     <p:extLst>
       <p:ext uri="{BB962C8B-B14F-4D97-AF65-F5344CB8AC3E}">
-        <p14:creationId xmlns:p14="http://schemas.microsoft.com/office/powerpoint/2010/main" val="1185813116"/>
+        <p14:creationId xmlns:p14="http://schemas.microsoft.com/office/powerpoint/2010/main" val="2136085335"/>
       </p:ext>
     </p:extLst>
   </p:cSld>
@@ -8378,7 +8378,7 @@
           <p:cNvPr id="2" name="TextBox 1">
             <a:extLst xmlns:a="http://schemas.openxmlformats.org/drawingml/2006/main">
               <a:ext uri="{FF2B5EF4-FFF2-40B4-BE49-F238E27FC236}">
-                <a16:creationId xmlns:a16="http://schemas.microsoft.com/office/drawing/2014/main" id="{4489C5AF-52E3-4E34-93F9-2346463CAEE0}"/>
+                <a16:creationId xmlns:a16="http://schemas.microsoft.com/office/drawing/2014/main" id="{81DA0C60-5004-4A35-8B95-92DDA43A14DB}"/>
               </a:ext>
             </a:extLst>
           </p:cNvPr>
@@ -8425,7 +8425,7 @@
           <p:cNvPr id="3" name="TextBox 2">
             <a:extLst xmlns:a="http://schemas.openxmlformats.org/drawingml/2006/main">
               <a:ext uri="{FF2B5EF4-FFF2-40B4-BE49-F238E27FC236}">
-                <a16:creationId xmlns:a16="http://schemas.microsoft.com/office/drawing/2014/main" id="{991F07A9-BDED-42EE-8BEF-7958BFD38B07}"/>
+                <a16:creationId xmlns:a16="http://schemas.microsoft.com/office/drawing/2014/main" id="{F2E50E83-1D0D-4424-8B7B-02445DD6B6DC}"/>
               </a:ext>
             </a:extLst>
           </p:cNvPr>
@@ -8472,7 +8472,7 @@
           <p:cNvPr id="4" name="TextBox 3">
             <a:extLst xmlns:a="http://schemas.openxmlformats.org/drawingml/2006/main">
               <a:ext uri="{FF2B5EF4-FFF2-40B4-BE49-F238E27FC236}">
-                <a16:creationId xmlns:a16="http://schemas.microsoft.com/office/drawing/2014/main" id="{63A35927-9CC7-4026-8CEA-425F211BEB1A}"/>
+                <a16:creationId xmlns:a16="http://schemas.microsoft.com/office/drawing/2014/main" id="{6D8FBBCB-7B19-4E31-82A7-5FFD19C2689F}"/>
               </a:ext>
             </a:extLst>
           </p:cNvPr>
@@ -8591,7 +8591,7 @@
           <p:cNvPr id="5" name="TextBox 4">
             <a:extLst xmlns:a="http://schemas.openxmlformats.org/drawingml/2006/main">
               <a:ext uri="{FF2B5EF4-FFF2-40B4-BE49-F238E27FC236}">
-                <a16:creationId xmlns:a16="http://schemas.microsoft.com/office/drawing/2014/main" id="{775F1994-12BD-4D3B-9F2F-75F326B49BA2}"/>
+                <a16:creationId xmlns:a16="http://schemas.microsoft.com/office/drawing/2014/main" id="{F85C972A-D891-4897-BEF2-27514DBEC055}"/>
               </a:ext>
             </a:extLst>
           </p:cNvPr>
@@ -8628,7 +8628,7 @@
                 <a:ea typeface="Aptos"/>
                 <a:cs typeface="Aptos"/>
               </a:rPr>
-              <a:t>Version 2026.07.23-11 · 2026-07-22 · 6 / 6</a:t>
+              <a:t>Version 2026.07.23-12 · 2026-07-22 · 6 / 6</a:t>
             </a:r>
           </a:p>
         </p:txBody>
@@ -8636,7 +8636,7 @@
     </p:spTree>
     <p:extLst>
       <p:ext uri="{BB962C8B-B14F-4D97-AF65-F5344CB8AC3E}">
-        <p14:creationId xmlns:p14="http://schemas.microsoft.com/office/powerpoint/2010/main" val="2122550790"/>
+        <p14:creationId xmlns:p14="http://schemas.microsoft.com/office/powerpoint/2010/main" val="1334153608"/>
       </p:ext>
     </p:extLst>
   </p:cSld>

--- a/site/downloads/pixan-bank-deck-short-en.pptx
+++ b/site/downloads/pixan-bank-deck-short-en.pptx
@@ -2,18 +2,18 @@
 <file path=ppt/presentation.xml><?xml version="1.0" encoding="utf-8"?>
 <p:presentation xmlns:p="http://schemas.openxmlformats.org/presentationml/2006/main">
   <p:sldMasterIdLst>
-    <p:sldMasterId xmlns:r="http://schemas.openxmlformats.org/officeDocument/2006/relationships" id="2147483648" r:id="Rf8cf10c6d54e49bf"/>
+    <p:sldMasterId xmlns:r="http://schemas.openxmlformats.org/officeDocument/2006/relationships" id="2147483648" r:id="R80d2fce8490e4d54"/>
   </p:sldMasterIdLst>
   <p:notesMasterIdLst>
-    <p:notesMasterId xmlns:r="http://schemas.openxmlformats.org/officeDocument/2006/relationships" r:id="R77d5ea235bb346c4"/>
+    <p:notesMasterId xmlns:r="http://schemas.openxmlformats.org/officeDocument/2006/relationships" r:id="R6810c77e19d6465f"/>
   </p:notesMasterIdLst>
   <p:sldIdLst>
-    <p:sldId xmlns:r="http://schemas.openxmlformats.org/officeDocument/2006/relationships" id="256" r:id="Rec0464b36dbb44ae"/>
-    <p:sldId xmlns:r="http://schemas.openxmlformats.org/officeDocument/2006/relationships" id="257" r:id="R5b0f1f32a2b64b2f"/>
-    <p:sldId xmlns:r="http://schemas.openxmlformats.org/officeDocument/2006/relationships" id="258" r:id="R221ef66725f54157"/>
-    <p:sldId xmlns:r="http://schemas.openxmlformats.org/officeDocument/2006/relationships" id="259" r:id="R84c41592e5fe4813"/>
-    <p:sldId xmlns:r="http://schemas.openxmlformats.org/officeDocument/2006/relationships" id="260" r:id="R161de8cfdb9f41b7"/>
-    <p:sldId xmlns:r="http://schemas.openxmlformats.org/officeDocument/2006/relationships" id="261" r:id="R7e27fa962ad24941"/>
+    <p:sldId xmlns:r="http://schemas.openxmlformats.org/officeDocument/2006/relationships" id="256" r:id="R576bc8de19d445c2"/>
+    <p:sldId xmlns:r="http://schemas.openxmlformats.org/officeDocument/2006/relationships" id="257" r:id="Rb640c40d1215415f"/>
+    <p:sldId xmlns:r="http://schemas.openxmlformats.org/officeDocument/2006/relationships" id="258" r:id="Rb2a536f52b4e4a16"/>
+    <p:sldId xmlns:r="http://schemas.openxmlformats.org/officeDocument/2006/relationships" id="259" r:id="Rb4345e52b126472f"/>
+    <p:sldId xmlns:r="http://schemas.openxmlformats.org/officeDocument/2006/relationships" id="260" r:id="R6784066015554fc3"/>
+    <p:sldId xmlns:r="http://schemas.openxmlformats.org/officeDocument/2006/relationships" id="261" r:id="R1bda9b5e956c43d4"/>
   </p:sldIdLst>
   <p:sldSz cx="12191999" cy="6858000"/>
   <p:notesSz cx="6858000" cy="9144000"/>
@@ -938,7 +938,7 @@
           <p:cNvPr id="2" name="Title 1">
             <a:extLst xmlns:a="http://schemas.openxmlformats.org/drawingml/2006/main">
               <a:ext uri="{FF2B5EF4-FFF2-40B4-BE49-F238E27FC236}">
-                <a16:creationId xmlns:a16="http://schemas.microsoft.com/office/drawing/2014/main" id="{510A7F97-6283-4026-B25C-27859AF3CF17}"/>
+                <a16:creationId xmlns:a16="http://schemas.microsoft.com/office/drawing/2014/main" id="{A0B7829F-A6AE-4FAB-BAFD-73B92482F763}"/>
               </a:ext>
             </a:extLst>
           </p:cNvPr>
@@ -970,7 +970,7 @@
           <p:cNvPr id="3" name="Subtitle 2">
             <a:extLst xmlns:a="http://schemas.openxmlformats.org/drawingml/2006/main">
               <a:ext uri="{FF2B5EF4-FFF2-40B4-BE49-F238E27FC236}">
-                <a16:creationId xmlns:a16="http://schemas.microsoft.com/office/drawing/2014/main" id="{A938CC42-730A-4DF7-A278-9CC09A281BEF}"/>
+                <a16:creationId xmlns:a16="http://schemas.microsoft.com/office/drawing/2014/main" id="{FFF52152-2FFA-4A63-82A0-558E1BC8995C}"/>
               </a:ext>
             </a:extLst>
           </p:cNvPr>
@@ -1093,7 +1093,7 @@
           <p:cNvPr id="4" name="Date Placeholder 3">
             <a:extLst xmlns:a="http://schemas.openxmlformats.org/drawingml/2006/main">
               <a:ext uri="{FF2B5EF4-FFF2-40B4-BE49-F238E27FC236}">
-                <a16:creationId xmlns:a16="http://schemas.microsoft.com/office/drawing/2014/main" id="{30B0715B-321D-452C-9390-98F5621A486C}"/>
+                <a16:creationId xmlns:a16="http://schemas.microsoft.com/office/drawing/2014/main" id="{151DA39E-CE0A-4EFC-BE51-154729A882C5}"/>
               </a:ext>
             </a:extLst>
           </p:cNvPr>
@@ -1120,7 +1120,7 @@
           <p:cNvPr id="5" name="Footer Placeholder 4">
             <a:extLst xmlns:a="http://schemas.openxmlformats.org/drawingml/2006/main">
               <a:ext uri="{FF2B5EF4-FFF2-40B4-BE49-F238E27FC236}">
-                <a16:creationId xmlns:a16="http://schemas.microsoft.com/office/drawing/2014/main" id="{2831C525-8602-4AF0-878B-FE09A01B21B4}"/>
+                <a16:creationId xmlns:a16="http://schemas.microsoft.com/office/drawing/2014/main" id="{87114BA5-E662-45D2-8E11-9257B28A0561}"/>
               </a:ext>
             </a:extLst>
           </p:cNvPr>
@@ -1143,7 +1143,7 @@
           <p:cNvPr id="6" name="Slide Number Placeholder 5">
             <a:extLst xmlns:a="http://schemas.openxmlformats.org/drawingml/2006/main">
               <a:ext uri="{FF2B5EF4-FFF2-40B4-BE49-F238E27FC236}">
-                <a16:creationId xmlns:a16="http://schemas.microsoft.com/office/drawing/2014/main" id="{0F425E9E-8CE5-45BE-8FD3-0CA0EBF3EA70}"/>
+                <a16:creationId xmlns:a16="http://schemas.microsoft.com/office/drawing/2014/main" id="{4145C895-B8EE-421E-9377-5663EE7726A2}"/>
               </a:ext>
             </a:extLst>
           </p:cNvPr>
@@ -1187,7 +1187,7 @@
           <p:cNvPr id="2" name="Title 1">
             <a:extLst xmlns:a="http://schemas.openxmlformats.org/drawingml/2006/main">
               <a:ext uri="{FF2B5EF4-FFF2-40B4-BE49-F238E27FC236}">
-                <a16:creationId xmlns:a16="http://schemas.microsoft.com/office/drawing/2014/main" id="{3FE97F49-B088-4C8F-B250-D03A98CC36B8}"/>
+                <a16:creationId xmlns:a16="http://schemas.microsoft.com/office/drawing/2014/main" id="{F60A6E85-A202-425B-88F2-F053D06B974B}"/>
               </a:ext>
             </a:extLst>
           </p:cNvPr>
@@ -1214,7 +1214,7 @@
           <p:cNvPr id="3" name="Vertical Text Placeholder 2">
             <a:extLst xmlns:a="http://schemas.openxmlformats.org/drawingml/2006/main">
               <a:ext uri="{FF2B5EF4-FFF2-40B4-BE49-F238E27FC236}">
-                <a16:creationId xmlns:a16="http://schemas.microsoft.com/office/drawing/2014/main" id="{121037C2-66E7-4284-BF9A-146BA3CC45F6}"/>
+                <a16:creationId xmlns:a16="http://schemas.microsoft.com/office/drawing/2014/main" id="{92CF9E5B-23EB-4113-B090-50E58DDDDB05}"/>
               </a:ext>
             </a:extLst>
           </p:cNvPr>
@@ -1276,7 +1276,7 @@
           <p:cNvPr id="4" name="Date Placeholder 3">
             <a:extLst xmlns:a="http://schemas.openxmlformats.org/drawingml/2006/main">
               <a:ext uri="{FF2B5EF4-FFF2-40B4-BE49-F238E27FC236}">
-                <a16:creationId xmlns:a16="http://schemas.microsoft.com/office/drawing/2014/main" id="{15E77A23-7F74-4D45-B917-30EA90C9F1AD}"/>
+                <a16:creationId xmlns:a16="http://schemas.microsoft.com/office/drawing/2014/main" id="{2B3DD9A8-AEEB-4C30-B4E5-82E3248C568C}"/>
               </a:ext>
             </a:extLst>
           </p:cNvPr>
@@ -1303,7 +1303,7 @@
           <p:cNvPr id="5" name="Footer Placeholder 4">
             <a:extLst xmlns:a="http://schemas.openxmlformats.org/drawingml/2006/main">
               <a:ext uri="{FF2B5EF4-FFF2-40B4-BE49-F238E27FC236}">
-                <a16:creationId xmlns:a16="http://schemas.microsoft.com/office/drawing/2014/main" id="{023DA2FD-8331-46CB-B173-8AFF5F7EED6B}"/>
+                <a16:creationId xmlns:a16="http://schemas.microsoft.com/office/drawing/2014/main" id="{F72EB215-A5DC-4F67-A368-9D602E10AC78}"/>
               </a:ext>
             </a:extLst>
           </p:cNvPr>
@@ -1326,7 +1326,7 @@
           <p:cNvPr id="6" name="Slide Number Placeholder 5">
             <a:extLst xmlns:a="http://schemas.openxmlformats.org/drawingml/2006/main">
               <a:ext uri="{FF2B5EF4-FFF2-40B4-BE49-F238E27FC236}">
-                <a16:creationId xmlns:a16="http://schemas.microsoft.com/office/drawing/2014/main" id="{304BC274-784D-4CE3-B69D-0F1FC9E1EC5E}"/>
+                <a16:creationId xmlns:a16="http://schemas.microsoft.com/office/drawing/2014/main" id="{58F8A63D-3896-4AD9-98A0-65EB07DCC6DE}"/>
               </a:ext>
             </a:extLst>
           </p:cNvPr>
@@ -1370,7 +1370,7 @@
           <p:cNvPr id="2" name="Vertical Title 1">
             <a:extLst xmlns:a="http://schemas.openxmlformats.org/drawingml/2006/main">
               <a:ext uri="{FF2B5EF4-FFF2-40B4-BE49-F238E27FC236}">
-                <a16:creationId xmlns:a16="http://schemas.microsoft.com/office/drawing/2014/main" id="{194FD65A-0021-41E2-A067-4631DA7DAF67}"/>
+                <a16:creationId xmlns:a16="http://schemas.microsoft.com/office/drawing/2014/main" id="{B26CFFD3-ADF0-4829-8549-EBFED316594F}"/>
               </a:ext>
             </a:extLst>
           </p:cNvPr>
@@ -1402,7 +1402,7 @@
           <p:cNvPr id="3" name="Vertical Text Placeholder 2">
             <a:extLst xmlns:a="http://schemas.openxmlformats.org/drawingml/2006/main">
               <a:ext uri="{FF2B5EF4-FFF2-40B4-BE49-F238E27FC236}">
-                <a16:creationId xmlns:a16="http://schemas.microsoft.com/office/drawing/2014/main" id="{78DE22BA-5105-4B81-8060-DF4667162E89}"/>
+                <a16:creationId xmlns:a16="http://schemas.microsoft.com/office/drawing/2014/main" id="{B50FF6A8-1473-40E9-94C6-8B3C294B9098}"/>
               </a:ext>
             </a:extLst>
           </p:cNvPr>
@@ -1469,7 +1469,7 @@
           <p:cNvPr id="4" name="Date Placeholder 3">
             <a:extLst xmlns:a="http://schemas.openxmlformats.org/drawingml/2006/main">
               <a:ext uri="{FF2B5EF4-FFF2-40B4-BE49-F238E27FC236}">
-                <a16:creationId xmlns:a16="http://schemas.microsoft.com/office/drawing/2014/main" id="{1E30EB37-E9C9-4D78-8BD1-A5CE963B055E}"/>
+                <a16:creationId xmlns:a16="http://schemas.microsoft.com/office/drawing/2014/main" id="{DC164715-0FFD-4E5E-8045-11D39CD4E275}"/>
               </a:ext>
             </a:extLst>
           </p:cNvPr>
@@ -1496,7 +1496,7 @@
           <p:cNvPr id="5" name="Footer Placeholder 4">
             <a:extLst xmlns:a="http://schemas.openxmlformats.org/drawingml/2006/main">
               <a:ext uri="{FF2B5EF4-FFF2-40B4-BE49-F238E27FC236}">
-                <a16:creationId xmlns:a16="http://schemas.microsoft.com/office/drawing/2014/main" id="{C1577F94-D72E-4D0F-80D3-333EF2CC4CE8}"/>
+                <a16:creationId xmlns:a16="http://schemas.microsoft.com/office/drawing/2014/main" id="{767E1697-C6B2-40E8-8D1E-16F8BF5D703A}"/>
               </a:ext>
             </a:extLst>
           </p:cNvPr>
@@ -1519,7 +1519,7 @@
           <p:cNvPr id="6" name="Slide Number Placeholder 5">
             <a:extLst xmlns:a="http://schemas.openxmlformats.org/drawingml/2006/main">
               <a:ext uri="{FF2B5EF4-FFF2-40B4-BE49-F238E27FC236}">
-                <a16:creationId xmlns:a16="http://schemas.microsoft.com/office/drawing/2014/main" id="{4D978F31-16DD-46E0-B27E-530C99F7965C}"/>
+                <a16:creationId xmlns:a16="http://schemas.microsoft.com/office/drawing/2014/main" id="{6FACDDE7-B970-4DE5-9C1B-F3900BB69299}"/>
               </a:ext>
             </a:extLst>
           </p:cNvPr>
@@ -1563,7 +1563,7 @@
           <p:cNvPr id="2" name="Title 1">
             <a:extLst xmlns:a="http://schemas.openxmlformats.org/drawingml/2006/main">
               <a:ext uri="{FF2B5EF4-FFF2-40B4-BE49-F238E27FC236}">
-                <a16:creationId xmlns:a16="http://schemas.microsoft.com/office/drawing/2014/main" id="{B7AE7001-7FD6-45B4-B221-A5EE8B26EBC2}"/>
+                <a16:creationId xmlns:a16="http://schemas.microsoft.com/office/drawing/2014/main" id="{BB5B17EC-7DEA-4B0F-AFA5-2AFEED8437E8}"/>
               </a:ext>
             </a:extLst>
           </p:cNvPr>
@@ -1590,7 +1590,7 @@
           <p:cNvPr id="3" name="Content Placeholder 2">
             <a:extLst xmlns:a="http://schemas.openxmlformats.org/drawingml/2006/main">
               <a:ext uri="{FF2B5EF4-FFF2-40B4-BE49-F238E27FC236}">
-                <a16:creationId xmlns:a16="http://schemas.microsoft.com/office/drawing/2014/main" id="{FA34BB33-47AF-4D90-9ED7-F4DAC6E6615C}"/>
+                <a16:creationId xmlns:a16="http://schemas.microsoft.com/office/drawing/2014/main" id="{636634E7-D38E-4CB9-B476-E176E7DC86ED}"/>
               </a:ext>
             </a:extLst>
           </p:cNvPr>
@@ -1652,7 +1652,7 @@
           <p:cNvPr id="4" name="Date Placeholder 3">
             <a:extLst xmlns:a="http://schemas.openxmlformats.org/drawingml/2006/main">
               <a:ext uri="{FF2B5EF4-FFF2-40B4-BE49-F238E27FC236}">
-                <a16:creationId xmlns:a16="http://schemas.microsoft.com/office/drawing/2014/main" id="{2B838F0F-B790-46F6-8A51-4DB72C1F3507}"/>
+                <a16:creationId xmlns:a16="http://schemas.microsoft.com/office/drawing/2014/main" id="{92316B89-D773-4D72-ACB8-DDD8273BC09A}"/>
               </a:ext>
             </a:extLst>
           </p:cNvPr>
@@ -1679,7 +1679,7 @@
           <p:cNvPr id="5" name="Footer Placeholder 4">
             <a:extLst xmlns:a="http://schemas.openxmlformats.org/drawingml/2006/main">
               <a:ext uri="{FF2B5EF4-FFF2-40B4-BE49-F238E27FC236}">
-                <a16:creationId xmlns:a16="http://schemas.microsoft.com/office/drawing/2014/main" id="{164A92F3-0D11-4982-AA58-5A940209E256}"/>
+                <a16:creationId xmlns:a16="http://schemas.microsoft.com/office/drawing/2014/main" id="{480AF6B7-A82A-4DC4-B378-7FF0BEC82454}"/>
               </a:ext>
             </a:extLst>
           </p:cNvPr>
@@ -1702,7 +1702,7 @@
           <p:cNvPr id="6" name="Slide Number Placeholder 5">
             <a:extLst xmlns:a="http://schemas.openxmlformats.org/drawingml/2006/main">
               <a:ext uri="{FF2B5EF4-FFF2-40B4-BE49-F238E27FC236}">
-                <a16:creationId xmlns:a16="http://schemas.microsoft.com/office/drawing/2014/main" id="{ABF0A250-A89A-4FAE-8EE7-2646CA837848}"/>
+                <a16:creationId xmlns:a16="http://schemas.microsoft.com/office/drawing/2014/main" id="{B871A19D-10FA-4518-A6D6-06B1F7823B93}"/>
               </a:ext>
             </a:extLst>
           </p:cNvPr>
@@ -1746,7 +1746,7 @@
           <p:cNvPr id="2" name="Title 1">
             <a:extLst xmlns:a="http://schemas.openxmlformats.org/drawingml/2006/main">
               <a:ext uri="{FF2B5EF4-FFF2-40B4-BE49-F238E27FC236}">
-                <a16:creationId xmlns:a16="http://schemas.microsoft.com/office/drawing/2014/main" id="{F8BFAF40-10FC-447A-B0F0-04D76D22E6F5}"/>
+                <a16:creationId xmlns:a16="http://schemas.microsoft.com/office/drawing/2014/main" id="{04ED274C-1F72-4960-9E6F-7ECE0B1B7F77}"/>
               </a:ext>
             </a:extLst>
           </p:cNvPr>
@@ -1783,7 +1783,7 @@
           <p:cNvPr id="3" name="Text Placeholder 2">
             <a:extLst xmlns:a="http://schemas.openxmlformats.org/drawingml/2006/main">
               <a:ext uri="{FF2B5EF4-FFF2-40B4-BE49-F238E27FC236}">
-                <a16:creationId xmlns:a16="http://schemas.microsoft.com/office/drawing/2014/main" id="{A2F2F2CB-457F-4705-9FB5-1CB19D7E365E}"/>
+                <a16:creationId xmlns:a16="http://schemas.microsoft.com/office/drawing/2014/main" id="{32B9B1DA-A2E2-4CCB-8FED-5488E8AA4BB8}"/>
               </a:ext>
             </a:extLst>
           </p:cNvPr>
@@ -1909,7 +1909,7 @@
           <p:cNvPr id="4" name="Date Placeholder 3">
             <a:extLst xmlns:a="http://schemas.openxmlformats.org/drawingml/2006/main">
               <a:ext uri="{FF2B5EF4-FFF2-40B4-BE49-F238E27FC236}">
-                <a16:creationId xmlns:a16="http://schemas.microsoft.com/office/drawing/2014/main" id="{58CB1EF7-BF50-4067-8086-C7731A11C223}"/>
+                <a16:creationId xmlns:a16="http://schemas.microsoft.com/office/drawing/2014/main" id="{50B6CFFA-0F7A-46F0-BE95-A82CCFC10CD5}"/>
               </a:ext>
             </a:extLst>
           </p:cNvPr>
@@ -1936,7 +1936,7 @@
           <p:cNvPr id="5" name="Footer Placeholder 4">
             <a:extLst xmlns:a="http://schemas.openxmlformats.org/drawingml/2006/main">
               <a:ext uri="{FF2B5EF4-FFF2-40B4-BE49-F238E27FC236}">
-                <a16:creationId xmlns:a16="http://schemas.microsoft.com/office/drawing/2014/main" id="{8E09B473-3A8E-4CF4-A84E-61CE7AA70F62}"/>
+                <a16:creationId xmlns:a16="http://schemas.microsoft.com/office/drawing/2014/main" id="{8F0342D1-2F3D-498C-BDCA-E276F4E93EE7}"/>
               </a:ext>
             </a:extLst>
           </p:cNvPr>
@@ -1959,7 +1959,7 @@
           <p:cNvPr id="6" name="Slide Number Placeholder 5">
             <a:extLst xmlns:a="http://schemas.openxmlformats.org/drawingml/2006/main">
               <a:ext uri="{FF2B5EF4-FFF2-40B4-BE49-F238E27FC236}">
-                <a16:creationId xmlns:a16="http://schemas.microsoft.com/office/drawing/2014/main" id="{B99DD48C-08FE-4C20-928A-9108FAE78B09}"/>
+                <a16:creationId xmlns:a16="http://schemas.microsoft.com/office/drawing/2014/main" id="{993CE6A1-F2C7-400F-9DAA-7A687154433C}"/>
               </a:ext>
             </a:extLst>
           </p:cNvPr>
@@ -2003,7 +2003,7 @@
           <p:cNvPr id="2" name="Title 1">
             <a:extLst xmlns:a="http://schemas.openxmlformats.org/drawingml/2006/main">
               <a:ext uri="{FF2B5EF4-FFF2-40B4-BE49-F238E27FC236}">
-                <a16:creationId xmlns:a16="http://schemas.microsoft.com/office/drawing/2014/main" id="{C1C08D0E-0FE6-4A7A-AA13-37E5CB7ECCD2}"/>
+                <a16:creationId xmlns:a16="http://schemas.microsoft.com/office/drawing/2014/main" id="{9035F599-52A7-451C-BB89-2BBEFEF817AD}"/>
               </a:ext>
             </a:extLst>
           </p:cNvPr>
@@ -2030,7 +2030,7 @@
           <p:cNvPr id="3" name="Content Placeholder 2">
             <a:extLst xmlns:a="http://schemas.openxmlformats.org/drawingml/2006/main">
               <a:ext uri="{FF2B5EF4-FFF2-40B4-BE49-F238E27FC236}">
-                <a16:creationId xmlns:a16="http://schemas.microsoft.com/office/drawing/2014/main" id="{E2F6C995-F2D2-459F-BB36-B8C79C2245CE}"/>
+                <a16:creationId xmlns:a16="http://schemas.microsoft.com/office/drawing/2014/main" id="{44EA0985-C10C-49A2-9BE7-7F67FC943173}"/>
               </a:ext>
             </a:extLst>
           </p:cNvPr>
@@ -2134,7 +2134,7 @@
           <p:cNvPr id="4" name="Content Placeholder 3">
             <a:extLst xmlns:a="http://schemas.openxmlformats.org/drawingml/2006/main">
               <a:ext uri="{FF2B5EF4-FFF2-40B4-BE49-F238E27FC236}">
-                <a16:creationId xmlns:a16="http://schemas.microsoft.com/office/drawing/2014/main" id="{756B2FB6-2991-44C7-BDE0-C2DB12D5F607}"/>
+                <a16:creationId xmlns:a16="http://schemas.microsoft.com/office/drawing/2014/main" id="{29A99970-4D6C-4B4F-8992-F5A2CCB1FBCE}"/>
               </a:ext>
             </a:extLst>
           </p:cNvPr>
@@ -2238,7 +2238,7 @@
           <p:cNvPr id="5" name="Date Placeholder 4">
             <a:extLst xmlns:a="http://schemas.openxmlformats.org/drawingml/2006/main">
               <a:ext uri="{FF2B5EF4-FFF2-40B4-BE49-F238E27FC236}">
-                <a16:creationId xmlns:a16="http://schemas.microsoft.com/office/drawing/2014/main" id="{A2FA532B-53E6-4F71-8382-A05D135E8848}"/>
+                <a16:creationId xmlns:a16="http://schemas.microsoft.com/office/drawing/2014/main" id="{31CAA5E8-F933-40D8-914E-C0602AFF24C5}"/>
               </a:ext>
             </a:extLst>
           </p:cNvPr>
@@ -2265,7 +2265,7 @@
           <p:cNvPr id="6" name="Footer Placeholder 5">
             <a:extLst xmlns:a="http://schemas.openxmlformats.org/drawingml/2006/main">
               <a:ext uri="{FF2B5EF4-FFF2-40B4-BE49-F238E27FC236}">
-                <a16:creationId xmlns:a16="http://schemas.microsoft.com/office/drawing/2014/main" id="{504CFA52-64A0-4B55-80F3-FB3DEACB6EBA}"/>
+                <a16:creationId xmlns:a16="http://schemas.microsoft.com/office/drawing/2014/main" id="{2364585C-87D8-4CED-A0A2-C9E1CD9B31BE}"/>
               </a:ext>
             </a:extLst>
           </p:cNvPr>
@@ -2288,7 +2288,7 @@
           <p:cNvPr id="7" name="Slide Number Placeholder 6">
             <a:extLst xmlns:a="http://schemas.openxmlformats.org/drawingml/2006/main">
               <a:ext uri="{FF2B5EF4-FFF2-40B4-BE49-F238E27FC236}">
-                <a16:creationId xmlns:a16="http://schemas.microsoft.com/office/drawing/2014/main" id="{1CCB1E8B-3E17-4168-A392-306C13223362}"/>
+                <a16:creationId xmlns:a16="http://schemas.microsoft.com/office/drawing/2014/main" id="{6EC2FC5E-CE2A-477F-8274-F202338FDA90}"/>
               </a:ext>
             </a:extLst>
           </p:cNvPr>
@@ -2332,7 +2332,7 @@
           <p:cNvPr id="2" name="Title 1">
             <a:extLst xmlns:a="http://schemas.openxmlformats.org/drawingml/2006/main">
               <a:ext uri="{FF2B5EF4-FFF2-40B4-BE49-F238E27FC236}">
-                <a16:creationId xmlns:a16="http://schemas.microsoft.com/office/drawing/2014/main" id="{6EF0456A-29C1-41CF-8666-2B16CA80CCB9}"/>
+                <a16:creationId xmlns:a16="http://schemas.microsoft.com/office/drawing/2014/main" id="{9830C720-8AB6-46EB-BB48-BB3336DA826C}"/>
               </a:ext>
             </a:extLst>
           </p:cNvPr>
@@ -2364,7 +2364,7 @@
           <p:cNvPr id="3" name="Text Placeholder 2">
             <a:extLst xmlns:a="http://schemas.openxmlformats.org/drawingml/2006/main">
               <a:ext uri="{FF2B5EF4-FFF2-40B4-BE49-F238E27FC236}">
-                <a16:creationId xmlns:a16="http://schemas.microsoft.com/office/drawing/2014/main" id="{5391F218-07AA-41AC-A083-4C948548C6DF}"/>
+                <a16:creationId xmlns:a16="http://schemas.microsoft.com/office/drawing/2014/main" id="{DEC02756-FD90-4915-B8EA-0C59B44F7A9C}"/>
               </a:ext>
             </a:extLst>
           </p:cNvPr>
@@ -2436,7 +2436,7 @@
           <p:cNvPr id="4" name="Content Placeholder 3">
             <a:extLst xmlns:a="http://schemas.openxmlformats.org/drawingml/2006/main">
               <a:ext uri="{FF2B5EF4-FFF2-40B4-BE49-F238E27FC236}">
-                <a16:creationId xmlns:a16="http://schemas.microsoft.com/office/drawing/2014/main" id="{4BEA1343-42BF-4F8D-94A2-EF93CD549E39}"/>
+                <a16:creationId xmlns:a16="http://schemas.microsoft.com/office/drawing/2014/main" id="{BC584EE7-9C86-4035-9EA9-7C553FC6F9BD}"/>
               </a:ext>
             </a:extLst>
           </p:cNvPr>
@@ -2540,7 +2540,7 @@
           <p:cNvPr id="5" name="Text Placeholder 4">
             <a:extLst xmlns:a="http://schemas.openxmlformats.org/drawingml/2006/main">
               <a:ext uri="{FF2B5EF4-FFF2-40B4-BE49-F238E27FC236}">
-                <a16:creationId xmlns:a16="http://schemas.microsoft.com/office/drawing/2014/main" id="{6DFE16A4-B17D-4A8D-B1C6-1CAA00DAC1B9}"/>
+                <a16:creationId xmlns:a16="http://schemas.microsoft.com/office/drawing/2014/main" id="{2DBDF464-10BB-4947-8151-267549D43B84}"/>
               </a:ext>
             </a:extLst>
           </p:cNvPr>
@@ -2612,7 +2612,7 @@
           <p:cNvPr id="6" name="Content Placeholder 5">
             <a:extLst xmlns:a="http://schemas.openxmlformats.org/drawingml/2006/main">
               <a:ext uri="{FF2B5EF4-FFF2-40B4-BE49-F238E27FC236}">
-                <a16:creationId xmlns:a16="http://schemas.microsoft.com/office/drawing/2014/main" id="{0C84404A-A011-4E20-8080-A3D195878A0D}"/>
+                <a16:creationId xmlns:a16="http://schemas.microsoft.com/office/drawing/2014/main" id="{F62A4549-D2D4-4331-8880-C65341C0ED52}"/>
               </a:ext>
             </a:extLst>
           </p:cNvPr>
@@ -2716,7 +2716,7 @@
           <p:cNvPr id="7" name="Date Placeholder 6">
             <a:extLst xmlns:a="http://schemas.openxmlformats.org/drawingml/2006/main">
               <a:ext uri="{FF2B5EF4-FFF2-40B4-BE49-F238E27FC236}">
-                <a16:creationId xmlns:a16="http://schemas.microsoft.com/office/drawing/2014/main" id="{23EE77B2-6B8D-4FB0-9CFB-7614F9F1C70D}"/>
+                <a16:creationId xmlns:a16="http://schemas.microsoft.com/office/drawing/2014/main" id="{239A3897-C411-401A-B3A7-B36C7776697F}"/>
               </a:ext>
             </a:extLst>
           </p:cNvPr>
@@ -2743,7 +2743,7 @@
           <p:cNvPr id="8" name="Footer Placeholder 7">
             <a:extLst xmlns:a="http://schemas.openxmlformats.org/drawingml/2006/main">
               <a:ext uri="{FF2B5EF4-FFF2-40B4-BE49-F238E27FC236}">
-                <a16:creationId xmlns:a16="http://schemas.microsoft.com/office/drawing/2014/main" id="{33DB195A-61C5-48A9-B231-B2419A18B98F}"/>
+                <a16:creationId xmlns:a16="http://schemas.microsoft.com/office/drawing/2014/main" id="{93983D10-621A-4FB6-BA82-A5C527A1A6CE}"/>
               </a:ext>
             </a:extLst>
           </p:cNvPr>
@@ -2766,7 +2766,7 @@
           <p:cNvPr id="9" name="Slide Number Placeholder 8">
             <a:extLst xmlns:a="http://schemas.openxmlformats.org/drawingml/2006/main">
               <a:ext uri="{FF2B5EF4-FFF2-40B4-BE49-F238E27FC236}">
-                <a16:creationId xmlns:a16="http://schemas.microsoft.com/office/drawing/2014/main" id="{B55BA604-7B25-4F43-94CE-A60B9F8AE9EA}"/>
+                <a16:creationId xmlns:a16="http://schemas.microsoft.com/office/drawing/2014/main" id="{7B16657A-3128-4D42-936F-979D17DD680D}"/>
               </a:ext>
             </a:extLst>
           </p:cNvPr>
@@ -2810,7 +2810,7 @@
           <p:cNvPr id="2" name="Title 1">
             <a:extLst xmlns:a="http://schemas.openxmlformats.org/drawingml/2006/main">
               <a:ext uri="{FF2B5EF4-FFF2-40B4-BE49-F238E27FC236}">
-                <a16:creationId xmlns:a16="http://schemas.microsoft.com/office/drawing/2014/main" id="{71BCC77A-190B-472F-AE05-A11E5E428E23}"/>
+                <a16:creationId xmlns:a16="http://schemas.microsoft.com/office/drawing/2014/main" id="{50F5D65F-8F83-4E70-A75D-359683B92255}"/>
               </a:ext>
             </a:extLst>
           </p:cNvPr>
@@ -2837,7 +2837,7 @@
           <p:cNvPr id="3" name="Date Placeholder 2">
             <a:extLst xmlns:a="http://schemas.openxmlformats.org/drawingml/2006/main">
               <a:ext uri="{FF2B5EF4-FFF2-40B4-BE49-F238E27FC236}">
-                <a16:creationId xmlns:a16="http://schemas.microsoft.com/office/drawing/2014/main" id="{C923F922-5C63-447B-81F3-BD9DDA2A8F25}"/>
+                <a16:creationId xmlns:a16="http://schemas.microsoft.com/office/drawing/2014/main" id="{666FD0F7-C0D0-4EB7-ACF6-82CFAAA285FE}"/>
               </a:ext>
             </a:extLst>
           </p:cNvPr>
@@ -2864,7 +2864,7 @@
           <p:cNvPr id="4" name="Footer Placeholder 3">
             <a:extLst xmlns:a="http://schemas.openxmlformats.org/drawingml/2006/main">
               <a:ext uri="{FF2B5EF4-FFF2-40B4-BE49-F238E27FC236}">
-                <a16:creationId xmlns:a16="http://schemas.microsoft.com/office/drawing/2014/main" id="{33187AE4-7B91-462E-9260-C5E5A05F394A}"/>
+                <a16:creationId xmlns:a16="http://schemas.microsoft.com/office/drawing/2014/main" id="{D0F449CB-C8F9-45DE-BB16-F1AABBA91B05}"/>
               </a:ext>
             </a:extLst>
           </p:cNvPr>
@@ -2887,7 +2887,7 @@
           <p:cNvPr id="5" name="Slide Number Placeholder 4">
             <a:extLst xmlns:a="http://schemas.openxmlformats.org/drawingml/2006/main">
               <a:ext uri="{FF2B5EF4-FFF2-40B4-BE49-F238E27FC236}">
-                <a16:creationId xmlns:a16="http://schemas.microsoft.com/office/drawing/2014/main" id="{DE782A5C-5ECE-4A86-9B8C-72FCCEB0B7DB}"/>
+                <a16:creationId xmlns:a16="http://schemas.microsoft.com/office/drawing/2014/main" id="{F96BEFA6-FA16-4E60-8B20-11C2E58FCB3D}"/>
               </a:ext>
             </a:extLst>
           </p:cNvPr>
@@ -2931,7 +2931,7 @@
           <p:cNvPr id="2" name="Date Placeholder 1">
             <a:extLst xmlns:a="http://schemas.openxmlformats.org/drawingml/2006/main">
               <a:ext uri="{FF2B5EF4-FFF2-40B4-BE49-F238E27FC236}">
-                <a16:creationId xmlns:a16="http://schemas.microsoft.com/office/drawing/2014/main" id="{F3E0289C-D136-4387-B484-55B22FE3EFAD}"/>
+                <a16:creationId xmlns:a16="http://schemas.microsoft.com/office/drawing/2014/main" id="{E7AED63B-8904-4BB7-999F-138A604F5AF7}"/>
               </a:ext>
             </a:extLst>
           </p:cNvPr>
@@ -2958,7 +2958,7 @@
           <p:cNvPr id="3" name="Footer Placeholder 2">
             <a:extLst xmlns:a="http://schemas.openxmlformats.org/drawingml/2006/main">
               <a:ext uri="{FF2B5EF4-FFF2-40B4-BE49-F238E27FC236}">
-                <a16:creationId xmlns:a16="http://schemas.microsoft.com/office/drawing/2014/main" id="{86DCACE9-1EC6-4194-A315-07060787A757}"/>
+                <a16:creationId xmlns:a16="http://schemas.microsoft.com/office/drawing/2014/main" id="{7374F8D4-7D36-44AA-94DA-1604660A5DBB}"/>
               </a:ext>
             </a:extLst>
           </p:cNvPr>
@@ -2981,7 +2981,7 @@
           <p:cNvPr id="4" name="Slide Number Placeholder 3">
             <a:extLst xmlns:a="http://schemas.openxmlformats.org/drawingml/2006/main">
               <a:ext uri="{FF2B5EF4-FFF2-40B4-BE49-F238E27FC236}">
-                <a16:creationId xmlns:a16="http://schemas.microsoft.com/office/drawing/2014/main" id="{4F5CBF09-7499-4FF3-96F8-35AB4FF5B014}"/>
+                <a16:creationId xmlns:a16="http://schemas.microsoft.com/office/drawing/2014/main" id="{19FCA347-86E2-4C08-A886-8E26FD0DDF53}"/>
               </a:ext>
             </a:extLst>
           </p:cNvPr>
@@ -3025,7 +3025,7 @@
           <p:cNvPr id="2" name="Title 1">
             <a:extLst xmlns:a="http://schemas.openxmlformats.org/drawingml/2006/main">
               <a:ext uri="{FF2B5EF4-FFF2-40B4-BE49-F238E27FC236}">
-                <a16:creationId xmlns:a16="http://schemas.microsoft.com/office/drawing/2014/main" id="{410BF151-6DE2-432E-B470-38041DD10E43}"/>
+                <a16:creationId xmlns:a16="http://schemas.microsoft.com/office/drawing/2014/main" id="{4617FDC5-85A2-4163-B540-E435C6290D6C}"/>
               </a:ext>
             </a:extLst>
           </p:cNvPr>
@@ -3062,7 +3062,7 @@
           <p:cNvPr id="3" name="Content Placeholder 2">
             <a:extLst xmlns:a="http://schemas.openxmlformats.org/drawingml/2006/main">
               <a:ext uri="{FF2B5EF4-FFF2-40B4-BE49-F238E27FC236}">
-                <a16:creationId xmlns:a16="http://schemas.microsoft.com/office/drawing/2014/main" id="{1569A06E-C7BA-4F60-94FF-D0A3EB618B40}"/>
+                <a16:creationId xmlns:a16="http://schemas.microsoft.com/office/drawing/2014/main" id="{AC425A14-9193-478B-8D51-E2FEBA2EAD25}"/>
               </a:ext>
             </a:extLst>
           </p:cNvPr>
@@ -3166,7 +3166,7 @@
           <p:cNvPr id="4" name="Text Placeholder 3">
             <a:extLst xmlns:a="http://schemas.openxmlformats.org/drawingml/2006/main">
               <a:ext uri="{FF2B5EF4-FFF2-40B4-BE49-F238E27FC236}">
-                <a16:creationId xmlns:a16="http://schemas.microsoft.com/office/drawing/2014/main" id="{41096D99-5DCE-4D51-A6E6-18E5E840B4E8}"/>
+                <a16:creationId xmlns:a16="http://schemas.microsoft.com/office/drawing/2014/main" id="{10A2C6AB-3183-47AC-A636-538C67F6928F}"/>
               </a:ext>
             </a:extLst>
           </p:cNvPr>
@@ -3238,7 +3238,7 @@
           <p:cNvPr id="5" name="Date Placeholder 4">
             <a:extLst xmlns:a="http://schemas.openxmlformats.org/drawingml/2006/main">
               <a:ext uri="{FF2B5EF4-FFF2-40B4-BE49-F238E27FC236}">
-                <a16:creationId xmlns:a16="http://schemas.microsoft.com/office/drawing/2014/main" id="{638DEB1A-A8ED-406E-BB3E-5E732520E060}"/>
+                <a16:creationId xmlns:a16="http://schemas.microsoft.com/office/drawing/2014/main" id="{34918323-FEDA-4312-A778-ADACDE78236A}"/>
               </a:ext>
             </a:extLst>
           </p:cNvPr>
@@ -3265,7 +3265,7 @@
           <p:cNvPr id="6" name="Footer Placeholder 5">
             <a:extLst xmlns:a="http://schemas.openxmlformats.org/drawingml/2006/main">
               <a:ext uri="{FF2B5EF4-FFF2-40B4-BE49-F238E27FC236}">
-                <a16:creationId xmlns:a16="http://schemas.microsoft.com/office/drawing/2014/main" id="{7314666E-80AA-4FA5-8DD3-A29A769BB880}"/>
+                <a16:creationId xmlns:a16="http://schemas.microsoft.com/office/drawing/2014/main" id="{1291CE4D-DB65-4553-926F-7DDC5273796E}"/>
               </a:ext>
             </a:extLst>
           </p:cNvPr>
@@ -3288,7 +3288,7 @@
           <p:cNvPr id="7" name="Slide Number Placeholder 6">
             <a:extLst xmlns:a="http://schemas.openxmlformats.org/drawingml/2006/main">
               <a:ext uri="{FF2B5EF4-FFF2-40B4-BE49-F238E27FC236}">
-                <a16:creationId xmlns:a16="http://schemas.microsoft.com/office/drawing/2014/main" id="{2CD175C9-B907-49EE-B403-C227674448B5}"/>
+                <a16:creationId xmlns:a16="http://schemas.microsoft.com/office/drawing/2014/main" id="{697B40C4-D6C8-4076-B8DC-88A19311DBDD}"/>
               </a:ext>
             </a:extLst>
           </p:cNvPr>
@@ -3332,7 +3332,7 @@
           <p:cNvPr id="2" name="Title 1">
             <a:extLst xmlns:a="http://schemas.openxmlformats.org/drawingml/2006/main">
               <a:ext uri="{FF2B5EF4-FFF2-40B4-BE49-F238E27FC236}">
-                <a16:creationId xmlns:a16="http://schemas.microsoft.com/office/drawing/2014/main" id="{ADE51156-7383-4F63-A5AC-72F160709ED6}"/>
+                <a16:creationId xmlns:a16="http://schemas.microsoft.com/office/drawing/2014/main" id="{D46B492A-C842-4AD2-8BBB-03DF1FCA59D6}"/>
               </a:ext>
             </a:extLst>
           </p:cNvPr>
@@ -3369,7 +3369,7 @@
           <p:cNvPr id="3" name="Picture Placeholder 2">
             <a:extLst xmlns:a="http://schemas.openxmlformats.org/drawingml/2006/main">
               <a:ext uri="{FF2B5EF4-FFF2-40B4-BE49-F238E27FC236}">
-                <a16:creationId xmlns:a16="http://schemas.microsoft.com/office/drawing/2014/main" id="{9F2FA8F8-B5EE-4269-B327-FB63E0320293}"/>
+                <a16:creationId xmlns:a16="http://schemas.microsoft.com/office/drawing/2014/main" id="{878C5B4D-8029-4255-8459-70CB87AB639F}"/>
               </a:ext>
             </a:extLst>
           </p:cNvPr>
@@ -3434,7 +3434,7 @@
           <p:cNvPr id="4" name="Text Placeholder 3">
             <a:extLst xmlns:a="http://schemas.openxmlformats.org/drawingml/2006/main">
               <a:ext uri="{FF2B5EF4-FFF2-40B4-BE49-F238E27FC236}">
-                <a16:creationId xmlns:a16="http://schemas.microsoft.com/office/drawing/2014/main" id="{91A5E4B3-804B-475B-9E5D-4F434A383241}"/>
+                <a16:creationId xmlns:a16="http://schemas.microsoft.com/office/drawing/2014/main" id="{35661599-D1DA-4B6C-92B2-B026079DF3AA}"/>
               </a:ext>
             </a:extLst>
           </p:cNvPr>
@@ -3506,7 +3506,7 @@
           <p:cNvPr id="5" name="Date Placeholder 4">
             <a:extLst xmlns:a="http://schemas.openxmlformats.org/drawingml/2006/main">
               <a:ext uri="{FF2B5EF4-FFF2-40B4-BE49-F238E27FC236}">
-                <a16:creationId xmlns:a16="http://schemas.microsoft.com/office/drawing/2014/main" id="{126A60F4-51C3-4634-9B56-37D4D3D01753}"/>
+                <a16:creationId xmlns:a16="http://schemas.microsoft.com/office/drawing/2014/main" id="{9E4FF21C-88A7-4D02-ACD0-85AC3AB0B3CC}"/>
               </a:ext>
             </a:extLst>
           </p:cNvPr>
@@ -3533,7 +3533,7 @@
           <p:cNvPr id="6" name="Footer Placeholder 5">
             <a:extLst xmlns:a="http://schemas.openxmlformats.org/drawingml/2006/main">
               <a:ext uri="{FF2B5EF4-FFF2-40B4-BE49-F238E27FC236}">
-                <a16:creationId xmlns:a16="http://schemas.microsoft.com/office/drawing/2014/main" id="{CE017018-79B3-4F02-A048-115B61C40090}"/>
+                <a16:creationId xmlns:a16="http://schemas.microsoft.com/office/drawing/2014/main" id="{6FB63653-928B-4CB8-AB85-F078713564E0}"/>
               </a:ext>
             </a:extLst>
           </p:cNvPr>
@@ -3556,7 +3556,7 @@
           <p:cNvPr id="7" name="Slide Number Placeholder 6">
             <a:extLst xmlns:a="http://schemas.openxmlformats.org/drawingml/2006/main">
               <a:ext uri="{FF2B5EF4-FFF2-40B4-BE49-F238E27FC236}">
-                <a16:creationId xmlns:a16="http://schemas.microsoft.com/office/drawing/2014/main" id="{4E85CC3A-93FB-48EE-B03E-AC48C386E0CB}"/>
+                <a16:creationId xmlns:a16="http://schemas.microsoft.com/office/drawing/2014/main" id="{CDA7FDE8-9E7D-4EDE-8A6E-F9344EAE62BB}"/>
               </a:ext>
             </a:extLst>
           </p:cNvPr>
@@ -3605,7 +3605,7 @@
           <p:cNvPr id="2" name="Title Placeholder 1">
             <a:extLst xmlns:a="http://schemas.openxmlformats.org/drawingml/2006/main">
               <a:ext uri="{FF2B5EF4-FFF2-40B4-BE49-F238E27FC236}">
-                <a16:creationId xmlns:a16="http://schemas.microsoft.com/office/drawing/2014/main" id="{523C36C7-9931-446E-B129-4690E54932BB}"/>
+                <a16:creationId xmlns:a16="http://schemas.microsoft.com/office/drawing/2014/main" id="{35999FEC-7DE6-4AAC-9ED9-26A4B65DFDD1}"/>
               </a:ext>
             </a:extLst>
           </p:cNvPr>
@@ -3642,7 +3642,7 @@
           <p:cNvPr id="3" name="Text Placeholder 2">
             <a:extLst xmlns:a="http://schemas.openxmlformats.org/drawingml/2006/main">
               <a:ext uri="{FF2B5EF4-FFF2-40B4-BE49-F238E27FC236}">
-                <a16:creationId xmlns:a16="http://schemas.microsoft.com/office/drawing/2014/main" id="{4CBDB43D-E9C6-4865-96F0-8A0B609D516E}"/>
+                <a16:creationId xmlns:a16="http://schemas.microsoft.com/office/drawing/2014/main" id="{8642CADE-25F4-4AD4-917F-497BEBA75501}"/>
               </a:ext>
             </a:extLst>
           </p:cNvPr>
@@ -3714,7 +3714,7 @@
           <p:cNvPr id="4" name="Date Placeholder 3">
             <a:extLst xmlns:a="http://schemas.openxmlformats.org/drawingml/2006/main">
               <a:ext uri="{FF2B5EF4-FFF2-40B4-BE49-F238E27FC236}">
-                <a16:creationId xmlns:a16="http://schemas.microsoft.com/office/drawing/2014/main" id="{DCB18A3C-CDB0-422D-A118-B63E0FAAD598}"/>
+                <a16:creationId xmlns:a16="http://schemas.microsoft.com/office/drawing/2014/main" id="{5DFF7733-C036-4C07-B015-98A9AC798306}"/>
               </a:ext>
             </a:extLst>
           </p:cNvPr>
@@ -3760,7 +3760,7 @@
           <p:cNvPr id="5" name="Footer Placeholder 4">
             <a:extLst xmlns:a="http://schemas.openxmlformats.org/drawingml/2006/main">
               <a:ext uri="{FF2B5EF4-FFF2-40B4-BE49-F238E27FC236}">
-                <a16:creationId xmlns:a16="http://schemas.microsoft.com/office/drawing/2014/main" id="{5C0E614C-C6CD-4EF2-871E-CEE058D2FF7C}"/>
+                <a16:creationId xmlns:a16="http://schemas.microsoft.com/office/drawing/2014/main" id="{24B0CE6B-B00E-4FDD-BD02-194A2AE238D3}"/>
               </a:ext>
             </a:extLst>
           </p:cNvPr>
@@ -3802,7 +3802,7 @@
           <p:cNvPr id="6" name="Slide Number Placeholder 5">
             <a:extLst xmlns:a="http://schemas.openxmlformats.org/drawingml/2006/main">
               <a:ext uri="{FF2B5EF4-FFF2-40B4-BE49-F238E27FC236}">
-                <a16:creationId xmlns:a16="http://schemas.microsoft.com/office/drawing/2014/main" id="{14FAD9DF-D556-411F-A841-A9D6803AA441}"/>
+                <a16:creationId xmlns:a16="http://schemas.microsoft.com/office/drawing/2014/main" id="{9A17F59E-E23F-4651-940B-06C9FA90E724}"/>
               </a:ext>
             </a:extLst>
           </p:cNvPr>
@@ -3847,17 +3847,17 @@
   </p:cSld>
   <p:clrMap bg1="lt1" tx1="dk1" bg2="lt2" tx2="dk2" accent1="accent1" accent2="accent2" accent3="accent3" accent4="accent4" accent5="accent5" accent6="accent6" hlink="hlink" folHlink="folHlink"/>
   <p:sldLayoutIdLst>
-    <p:sldLayoutId xmlns:r="http://schemas.openxmlformats.org/officeDocument/2006/relationships" id="2147483649" r:id="Rd16218fde2674fb7"/>
-    <p:sldLayoutId xmlns:r="http://schemas.openxmlformats.org/officeDocument/2006/relationships" id="2147483650" r:id="R539c8bb5a6eb4f22"/>
-    <p:sldLayoutId xmlns:r="http://schemas.openxmlformats.org/officeDocument/2006/relationships" id="2147483651" r:id="Rfb32d89930f84a4c"/>
-    <p:sldLayoutId xmlns:r="http://schemas.openxmlformats.org/officeDocument/2006/relationships" id="2147483652" r:id="R46b025eb94a94502"/>
-    <p:sldLayoutId xmlns:r="http://schemas.openxmlformats.org/officeDocument/2006/relationships" id="2147483653" r:id="R2e3cce2d659b4e5a"/>
-    <p:sldLayoutId xmlns:r="http://schemas.openxmlformats.org/officeDocument/2006/relationships" id="2147483654" r:id="R7a115b5b61a042ee"/>
-    <p:sldLayoutId xmlns:r="http://schemas.openxmlformats.org/officeDocument/2006/relationships" id="2147483655" r:id="R9ba7da2a3b714271"/>
-    <p:sldLayoutId xmlns:r="http://schemas.openxmlformats.org/officeDocument/2006/relationships" id="2147483656" r:id="R6d279a6682d54da9"/>
-    <p:sldLayoutId xmlns:r="http://schemas.openxmlformats.org/officeDocument/2006/relationships" id="2147483657" r:id="R9de73f1c24c6404e"/>
-    <p:sldLayoutId xmlns:r="http://schemas.openxmlformats.org/officeDocument/2006/relationships" id="2147483658" r:id="R8c191ca0ee1d4940"/>
-    <p:sldLayoutId xmlns:r="http://schemas.openxmlformats.org/officeDocument/2006/relationships" id="2147483659" r:id="R03a4325ebef3433e"/>
+    <p:sldLayoutId xmlns:r="http://schemas.openxmlformats.org/officeDocument/2006/relationships" id="2147483649" r:id="R46b601db86aa4d67"/>
+    <p:sldLayoutId xmlns:r="http://schemas.openxmlformats.org/officeDocument/2006/relationships" id="2147483650" r:id="Ra519ffdf303c4c5d"/>
+    <p:sldLayoutId xmlns:r="http://schemas.openxmlformats.org/officeDocument/2006/relationships" id="2147483651" r:id="R80b8192ddf9a4bfa"/>
+    <p:sldLayoutId xmlns:r="http://schemas.openxmlformats.org/officeDocument/2006/relationships" id="2147483652" r:id="R1b5e4311a1984c4a"/>
+    <p:sldLayoutId xmlns:r="http://schemas.openxmlformats.org/officeDocument/2006/relationships" id="2147483653" r:id="R58d0bbb301a54552"/>
+    <p:sldLayoutId xmlns:r="http://schemas.openxmlformats.org/officeDocument/2006/relationships" id="2147483654" r:id="Rfb873c08bde94759"/>
+    <p:sldLayoutId xmlns:r="http://schemas.openxmlformats.org/officeDocument/2006/relationships" id="2147483655" r:id="R6850ab4e42094425"/>
+    <p:sldLayoutId xmlns:r="http://schemas.openxmlformats.org/officeDocument/2006/relationships" id="2147483656" r:id="R99b4116678204191"/>
+    <p:sldLayoutId xmlns:r="http://schemas.openxmlformats.org/officeDocument/2006/relationships" id="2147483657" r:id="Rdb759a4738b54e41"/>
+    <p:sldLayoutId xmlns:r="http://schemas.openxmlformats.org/officeDocument/2006/relationships" id="2147483658" r:id="R767c539764324ec4"/>
+    <p:sldLayoutId xmlns:r="http://schemas.openxmlformats.org/officeDocument/2006/relationships" id="2147483659" r:id="Re58612e6f2554e2e"/>
   </p:sldLayoutIdLst>
   <p:txStyles>
     <p:titleStyle>
@@ -4410,7 +4410,7 @@
           <p:cNvPr id="2" name="Rectangle 1">
             <a:extLst xmlns:a="http://schemas.openxmlformats.org/drawingml/2006/main">
               <a:ext uri="{FF2B5EF4-FFF2-40B4-BE49-F238E27FC236}">
-                <a16:creationId xmlns:a16="http://schemas.microsoft.com/office/drawing/2014/main" id="{50B7B704-F7A0-47D6-B36D-A77E4B5D57AB}"/>
+                <a16:creationId xmlns:a16="http://schemas.microsoft.com/office/drawing/2014/main" id="{31D80225-9C3E-4E7E-9C68-888CA9DE73A4}"/>
               </a:ext>
             </a:extLst>
           </p:cNvPr>
@@ -4465,7 +4465,7 @@
           <p:cNvPr id="3" name="TextBox 2">
             <a:extLst xmlns:a="http://schemas.openxmlformats.org/drawingml/2006/main">
               <a:ext uri="{FF2B5EF4-FFF2-40B4-BE49-F238E27FC236}">
-                <a16:creationId xmlns:a16="http://schemas.microsoft.com/office/drawing/2014/main" id="{1EC172A2-717B-404C-917E-03D2CE40A229}"/>
+                <a16:creationId xmlns:a16="http://schemas.microsoft.com/office/drawing/2014/main" id="{F0B135EC-F78E-4DDB-A4B7-79E5CB05EB48}"/>
               </a:ext>
             </a:extLst>
           </p:cNvPr>
@@ -4512,7 +4512,7 @@
           <p:cNvPr id="4" name="TextBox 3">
             <a:extLst xmlns:a="http://schemas.openxmlformats.org/drawingml/2006/main">
               <a:ext uri="{FF2B5EF4-FFF2-40B4-BE49-F238E27FC236}">
-                <a16:creationId xmlns:a16="http://schemas.microsoft.com/office/drawing/2014/main" id="{C071F8CD-9A0A-40FD-A628-637E7C82C622}"/>
+                <a16:creationId xmlns:a16="http://schemas.microsoft.com/office/drawing/2014/main" id="{E5010FAC-367E-4AEF-AC39-328F5DBFF67E}"/>
               </a:ext>
             </a:extLst>
           </p:cNvPr>
@@ -4580,7 +4580,7 @@
           <p:cNvPr id="5" name="TextBox 4">
             <a:extLst xmlns:a="http://schemas.openxmlformats.org/drawingml/2006/main">
               <a:ext uri="{FF2B5EF4-FFF2-40B4-BE49-F238E27FC236}">
-                <a16:creationId xmlns:a16="http://schemas.microsoft.com/office/drawing/2014/main" id="{0E72FD87-9B2C-45B0-9DF6-424531CE52C3}"/>
+                <a16:creationId xmlns:a16="http://schemas.microsoft.com/office/drawing/2014/main" id="{F371D9F5-58CD-4675-A16E-45279509D283}"/>
               </a:ext>
             </a:extLst>
           </p:cNvPr>
@@ -4627,7 +4627,7 @@
           <p:cNvPr id="6" name="Rectangle 5">
             <a:extLst xmlns:a="http://schemas.openxmlformats.org/drawingml/2006/main">
               <a:ext uri="{FF2B5EF4-FFF2-40B4-BE49-F238E27FC236}">
-                <a16:creationId xmlns:a16="http://schemas.microsoft.com/office/drawing/2014/main" id="{313A6C7F-FDCD-429D-928A-CB5685FBFFD7}"/>
+                <a16:creationId xmlns:a16="http://schemas.microsoft.com/office/drawing/2014/main" id="{AADC59CD-22D3-4574-8739-EA5687F04329}"/>
               </a:ext>
             </a:extLst>
           </p:cNvPr>
@@ -4682,7 +4682,7 @@
           <p:cNvPr id="7" name="TextBox 6">
             <a:extLst xmlns:a="http://schemas.openxmlformats.org/drawingml/2006/main">
               <a:ext uri="{FF2B5EF4-FFF2-40B4-BE49-F238E27FC236}">
-                <a16:creationId xmlns:a16="http://schemas.microsoft.com/office/drawing/2014/main" id="{7AE7C839-23E7-4B74-A43E-2CC1285046BC}"/>
+                <a16:creationId xmlns:a16="http://schemas.microsoft.com/office/drawing/2014/main" id="{201372AD-EA7F-426E-8F1C-D5953BE0F155}"/>
               </a:ext>
             </a:extLst>
           </p:cNvPr>
@@ -4729,7 +4729,7 @@
           <p:cNvPr id="8" name="TextBox 7">
             <a:extLst xmlns:a="http://schemas.openxmlformats.org/drawingml/2006/main">
               <a:ext uri="{FF2B5EF4-FFF2-40B4-BE49-F238E27FC236}">
-                <a16:creationId xmlns:a16="http://schemas.microsoft.com/office/drawing/2014/main" id="{B56B9D8F-2618-4E5E-B5CA-BA5277A70188}"/>
+                <a16:creationId xmlns:a16="http://schemas.microsoft.com/office/drawing/2014/main" id="{101B65ED-1EF2-48C8-903F-442CC84162E2}"/>
               </a:ext>
             </a:extLst>
           </p:cNvPr>
@@ -4766,7 +4766,7 @@
                 <a:ea typeface="Aptos"/>
                 <a:cs typeface="Aptos"/>
               </a:rPr>
-              <a:t>2026.07.23-12</a:t>
+              <a:t>2026.07.23-13</a:t>
             </a:r>
           </a:p>
         </p:txBody>
@@ -4776,7 +4776,7 @@
           <p:cNvPr id="9" name="TextBox 8">
             <a:extLst xmlns:a="http://schemas.openxmlformats.org/drawingml/2006/main">
               <a:ext uri="{FF2B5EF4-FFF2-40B4-BE49-F238E27FC236}">
-                <a16:creationId xmlns:a16="http://schemas.microsoft.com/office/drawing/2014/main" id="{5A7D2873-325B-4CD2-BB3F-4C1DD6B8FE83}"/>
+                <a16:creationId xmlns:a16="http://schemas.microsoft.com/office/drawing/2014/main" id="{159CFDEC-C5D7-4487-8742-911BF9F547F1}"/>
               </a:ext>
             </a:extLst>
           </p:cNvPr>
@@ -4844,7 +4844,7 @@
           <p:cNvPr id="10" name="TextBox 9">
             <a:extLst xmlns:a="http://schemas.openxmlformats.org/drawingml/2006/main">
               <a:ext uri="{FF2B5EF4-FFF2-40B4-BE49-F238E27FC236}">
-                <a16:creationId xmlns:a16="http://schemas.microsoft.com/office/drawing/2014/main" id="{5C460A13-E484-4D14-9390-75E9AFC4632D}"/>
+                <a16:creationId xmlns:a16="http://schemas.microsoft.com/office/drawing/2014/main" id="{CF61A1B4-A850-49C1-87A1-6D45D3F61240}"/>
               </a:ext>
             </a:extLst>
           </p:cNvPr>
@@ -4891,7 +4891,7 @@
           <p:cNvPr id="11" name="TextBox 10">
             <a:extLst xmlns:a="http://schemas.openxmlformats.org/drawingml/2006/main">
               <a:ext uri="{FF2B5EF4-FFF2-40B4-BE49-F238E27FC236}">
-                <a16:creationId xmlns:a16="http://schemas.microsoft.com/office/drawing/2014/main" id="{877651A1-7686-4E0D-BDD2-17337B58A301}"/>
+                <a16:creationId xmlns:a16="http://schemas.microsoft.com/office/drawing/2014/main" id="{0F114E9C-2754-4023-A698-ED7731478F0B}"/>
               </a:ext>
             </a:extLst>
           </p:cNvPr>
@@ -4938,7 +4938,7 @@
           <p:cNvPr id="12" name="TextBox 11">
             <a:extLst xmlns:a="http://schemas.openxmlformats.org/drawingml/2006/main">
               <a:ext uri="{FF2B5EF4-FFF2-40B4-BE49-F238E27FC236}">
-                <a16:creationId xmlns:a16="http://schemas.microsoft.com/office/drawing/2014/main" id="{7D521D91-7A88-4759-8EDC-691A428C3101}"/>
+                <a16:creationId xmlns:a16="http://schemas.microsoft.com/office/drawing/2014/main" id="{17F9213B-8E6B-416D-82EB-FCC8364CAB67}"/>
               </a:ext>
             </a:extLst>
           </p:cNvPr>
@@ -4983,7 +4983,7 @@
     </p:spTree>
     <p:extLst>
       <p:ext uri="{BB962C8B-B14F-4D97-AF65-F5344CB8AC3E}">
-        <p14:creationId xmlns:p14="http://schemas.microsoft.com/office/powerpoint/2010/main" val="40755812"/>
+        <p14:creationId xmlns:p14="http://schemas.microsoft.com/office/powerpoint/2010/main" val="2054431231"/>
       </p:ext>
     </p:extLst>
   </p:cSld>
@@ -5007,7 +5007,7 @@
           <p:cNvPr id="2" name="TextBox 1">
             <a:extLst xmlns:a="http://schemas.openxmlformats.org/drawingml/2006/main">
               <a:ext uri="{FF2B5EF4-FFF2-40B4-BE49-F238E27FC236}">
-                <a16:creationId xmlns:a16="http://schemas.microsoft.com/office/drawing/2014/main" id="{9AD9DD73-1C27-49EC-B4A6-DC1A259F5DD8}"/>
+                <a16:creationId xmlns:a16="http://schemas.microsoft.com/office/drawing/2014/main" id="{3F78AC78-E5F3-4043-88A0-95458BF4AAB3}"/>
               </a:ext>
             </a:extLst>
           </p:cNvPr>
@@ -5054,7 +5054,7 @@
           <p:cNvPr id="3" name="TextBox 2">
             <a:extLst xmlns:a="http://schemas.openxmlformats.org/drawingml/2006/main">
               <a:ext uri="{FF2B5EF4-FFF2-40B4-BE49-F238E27FC236}">
-                <a16:creationId xmlns:a16="http://schemas.microsoft.com/office/drawing/2014/main" id="{4E28873F-2D06-46DE-8BFF-6D293D2AFEA9}"/>
+                <a16:creationId xmlns:a16="http://schemas.microsoft.com/office/drawing/2014/main" id="{A69ED12D-3D03-4F9C-9CD6-CF9B36C2940D}"/>
               </a:ext>
             </a:extLst>
           </p:cNvPr>
@@ -5101,7 +5101,7 @@
           <p:cNvPr id="4" name="Rectangle 3">
             <a:extLst xmlns:a="http://schemas.openxmlformats.org/drawingml/2006/main">
               <a:ext uri="{FF2B5EF4-FFF2-40B4-BE49-F238E27FC236}">
-                <a16:creationId xmlns:a16="http://schemas.microsoft.com/office/drawing/2014/main" id="{13B84510-4920-4816-96E7-289ED8E59D80}"/>
+                <a16:creationId xmlns:a16="http://schemas.microsoft.com/office/drawing/2014/main" id="{BCC508AE-F1A6-4951-83BD-ACBC651DF2FF}"/>
               </a:ext>
             </a:extLst>
           </p:cNvPr>
@@ -5156,7 +5156,7 @@
           <p:cNvPr id="5" name="Rectangle 4">
             <a:extLst xmlns:a="http://schemas.openxmlformats.org/drawingml/2006/main">
               <a:ext uri="{FF2B5EF4-FFF2-40B4-BE49-F238E27FC236}">
-                <a16:creationId xmlns:a16="http://schemas.microsoft.com/office/drawing/2014/main" id="{96B391EF-8EDB-408B-A741-2FC6C743D44E}"/>
+                <a16:creationId xmlns:a16="http://schemas.microsoft.com/office/drawing/2014/main" id="{EA3EBC36-0F6C-489A-9E99-A8E0AAA88052}"/>
               </a:ext>
             </a:extLst>
           </p:cNvPr>
@@ -5211,7 +5211,7 @@
           <p:cNvPr id="6" name="TextBox 5">
             <a:extLst xmlns:a="http://schemas.openxmlformats.org/drawingml/2006/main">
               <a:ext uri="{FF2B5EF4-FFF2-40B4-BE49-F238E27FC236}">
-                <a16:creationId xmlns:a16="http://schemas.microsoft.com/office/drawing/2014/main" id="{58BEFE1D-72B1-47D5-A03D-B1D9D0809CE7}"/>
+                <a16:creationId xmlns:a16="http://schemas.microsoft.com/office/drawing/2014/main" id="{0B51939A-ECFF-4498-8B06-005D5807C595}"/>
               </a:ext>
             </a:extLst>
           </p:cNvPr>
@@ -5248,7 +5248,7 @@
                 <a:ea typeface="Aptos"/>
                 <a:cs typeface="Aptos"/>
               </a:rPr>
-              <a:t>Independent public evidence summary · 2026.07.23-12 · 2026-07-22 · Sources: EPO; Germany — official judgments; WIPO</a:t>
+              <a:t>Independent public evidence summary · 2026.07.23-13 · 2026-07-22 · Sources: EPO; Germany — official judgments; WIPO</a:t>
             </a:r>
           </a:p>
         </p:txBody>
@@ -5258,7 +5258,7 @@
           <p:cNvPr id="7" name="TextBox 6">
             <a:extLst xmlns:a="http://schemas.openxmlformats.org/drawingml/2006/main">
               <a:ext uri="{FF2B5EF4-FFF2-40B4-BE49-F238E27FC236}">
-                <a16:creationId xmlns:a16="http://schemas.microsoft.com/office/drawing/2014/main" id="{5A89F13A-78E8-4C0A-A5F2-81C6FD41ADB5}"/>
+                <a16:creationId xmlns:a16="http://schemas.microsoft.com/office/drawing/2014/main" id="{8C21D801-BFD6-480A-9935-E5ECD200EFB1}"/>
               </a:ext>
             </a:extLst>
           </p:cNvPr>
@@ -5305,7 +5305,7 @@
           <p:cNvPr id="8" name="TextBox 7">
             <a:extLst xmlns:a="http://schemas.openxmlformats.org/drawingml/2006/main">
               <a:ext uri="{FF2B5EF4-FFF2-40B4-BE49-F238E27FC236}">
-                <a16:creationId xmlns:a16="http://schemas.microsoft.com/office/drawing/2014/main" id="{40ABEB6F-1E6E-4F65-B4A9-9C34046E27BD}"/>
+                <a16:creationId xmlns:a16="http://schemas.microsoft.com/office/drawing/2014/main" id="{0981CCA6-A8F5-4CD4-8402-FC2D34CBE625}"/>
               </a:ext>
             </a:extLst>
           </p:cNvPr>
@@ -5352,7 +5352,7 @@
           <p:cNvPr id="9" name="TextBox 8">
             <a:extLst xmlns:a="http://schemas.openxmlformats.org/drawingml/2006/main">
               <a:ext uri="{FF2B5EF4-FFF2-40B4-BE49-F238E27FC236}">
-                <a16:creationId xmlns:a16="http://schemas.microsoft.com/office/drawing/2014/main" id="{45296315-CE26-4FE0-A9D9-9B6D06247BC6}"/>
+                <a16:creationId xmlns:a16="http://schemas.microsoft.com/office/drawing/2014/main" id="{4F45AEB1-D72F-4F0B-BD1F-3FE92F670B6C}"/>
               </a:ext>
             </a:extLst>
           </p:cNvPr>
@@ -5449,7 +5449,7 @@
           <p:cNvPr id="10" name="Rounded Rectangle 9">
             <a:extLst xmlns:a="http://schemas.openxmlformats.org/drawingml/2006/main">
               <a:ext uri="{FF2B5EF4-FFF2-40B4-BE49-F238E27FC236}">
-                <a16:creationId xmlns:a16="http://schemas.microsoft.com/office/drawing/2014/main" id="{BA05F62D-2FB8-4C52-822A-CF68D6239355}"/>
+                <a16:creationId xmlns:a16="http://schemas.microsoft.com/office/drawing/2014/main" id="{B4566C98-113D-4AD3-8043-7A01B90BB9A0}"/>
               </a:ext>
             </a:extLst>
           </p:cNvPr>
@@ -5506,7 +5506,7 @@
           <p:cNvPr id="11" name="TextBox 10">
             <a:extLst xmlns:a="http://schemas.openxmlformats.org/drawingml/2006/main">
               <a:ext uri="{FF2B5EF4-FFF2-40B4-BE49-F238E27FC236}">
-                <a16:creationId xmlns:a16="http://schemas.microsoft.com/office/drawing/2014/main" id="{5E554DE0-1C60-40EE-AF4E-6CE61F732696}"/>
+                <a16:creationId xmlns:a16="http://schemas.microsoft.com/office/drawing/2014/main" id="{98BC33B7-E07B-447D-8387-EF6188747E94}"/>
               </a:ext>
             </a:extLst>
           </p:cNvPr>
@@ -5553,7 +5553,7 @@
           <p:cNvPr id="12" name="TextBox 11">
             <a:extLst xmlns:a="http://schemas.openxmlformats.org/drawingml/2006/main">
               <a:ext uri="{FF2B5EF4-FFF2-40B4-BE49-F238E27FC236}">
-                <a16:creationId xmlns:a16="http://schemas.microsoft.com/office/drawing/2014/main" id="{2F46D4FA-8064-42D3-814C-404EBC3AF9E4}"/>
+                <a16:creationId xmlns:a16="http://schemas.microsoft.com/office/drawing/2014/main" id="{A60F9CB6-C7F9-47F5-BC38-C85F3FD2AF1E}"/>
               </a:ext>
             </a:extLst>
           </p:cNvPr>
@@ -5598,7 +5598,7 @@
     </p:spTree>
     <p:extLst>
       <p:ext uri="{BB962C8B-B14F-4D97-AF65-F5344CB8AC3E}">
-        <p14:creationId xmlns:p14="http://schemas.microsoft.com/office/powerpoint/2010/main" val="474319197"/>
+        <p14:creationId xmlns:p14="http://schemas.microsoft.com/office/powerpoint/2010/main" val="1104369166"/>
       </p:ext>
     </p:extLst>
   </p:cSld>
@@ -5622,7 +5622,7 @@
           <p:cNvPr id="2" name="TextBox 1">
             <a:extLst xmlns:a="http://schemas.openxmlformats.org/drawingml/2006/main">
               <a:ext uri="{FF2B5EF4-FFF2-40B4-BE49-F238E27FC236}">
-                <a16:creationId xmlns:a16="http://schemas.microsoft.com/office/drawing/2014/main" id="{FEA59409-E1A5-4624-B68F-DE6BCEBBCA82}"/>
+                <a16:creationId xmlns:a16="http://schemas.microsoft.com/office/drawing/2014/main" id="{D42A98E1-30F5-45EE-B5D6-E897E58942FF}"/>
               </a:ext>
             </a:extLst>
           </p:cNvPr>
@@ -5669,7 +5669,7 @@
           <p:cNvPr id="3" name="TextBox 2">
             <a:extLst xmlns:a="http://schemas.openxmlformats.org/drawingml/2006/main">
               <a:ext uri="{FF2B5EF4-FFF2-40B4-BE49-F238E27FC236}">
-                <a16:creationId xmlns:a16="http://schemas.microsoft.com/office/drawing/2014/main" id="{47370A13-C368-4944-A5E1-6E7067052C80}"/>
+                <a16:creationId xmlns:a16="http://schemas.microsoft.com/office/drawing/2014/main" id="{7CCBD263-5834-499E-A7F8-658732ABA455}"/>
               </a:ext>
             </a:extLst>
           </p:cNvPr>
@@ -5716,7 +5716,7 @@
           <p:cNvPr id="4" name="Rectangle 3">
             <a:extLst xmlns:a="http://schemas.openxmlformats.org/drawingml/2006/main">
               <a:ext uri="{FF2B5EF4-FFF2-40B4-BE49-F238E27FC236}">
-                <a16:creationId xmlns:a16="http://schemas.microsoft.com/office/drawing/2014/main" id="{8A72F6F3-24B8-42AC-9679-B485BB6AC9DD}"/>
+                <a16:creationId xmlns:a16="http://schemas.microsoft.com/office/drawing/2014/main" id="{A2DDAE15-14BC-4E63-8E89-3A3504CCCB7D}"/>
               </a:ext>
             </a:extLst>
           </p:cNvPr>
@@ -5771,7 +5771,7 @@
           <p:cNvPr id="5" name="Rectangle 4">
             <a:extLst xmlns:a="http://schemas.openxmlformats.org/drawingml/2006/main">
               <a:ext uri="{FF2B5EF4-FFF2-40B4-BE49-F238E27FC236}">
-                <a16:creationId xmlns:a16="http://schemas.microsoft.com/office/drawing/2014/main" id="{0990455C-C191-47B2-9F43-CC9E85C6CBB2}"/>
+                <a16:creationId xmlns:a16="http://schemas.microsoft.com/office/drawing/2014/main" id="{91626ECC-6A54-4828-9335-00E792D8EEEA}"/>
               </a:ext>
             </a:extLst>
           </p:cNvPr>
@@ -5826,7 +5826,7 @@
           <p:cNvPr id="6" name="TextBox 5">
             <a:extLst xmlns:a="http://schemas.openxmlformats.org/drawingml/2006/main">
               <a:ext uri="{FF2B5EF4-FFF2-40B4-BE49-F238E27FC236}">
-                <a16:creationId xmlns:a16="http://schemas.microsoft.com/office/drawing/2014/main" id="{EEBBB0F5-DAE2-4335-9356-3E821424E1B3}"/>
+                <a16:creationId xmlns:a16="http://schemas.microsoft.com/office/drawing/2014/main" id="{54438A4D-45D1-4624-B977-7226836507FB}"/>
               </a:ext>
             </a:extLst>
           </p:cNvPr>
@@ -5863,7 +5863,7 @@
                 <a:ea typeface="Aptos"/>
                 <a:cs typeface="Aptos"/>
               </a:rPr>
-              <a:t>Independent public evidence summary · 2026.07.23-12 · 2026-07-22 · Sources: EPO Register; EP3032975B2; 8 Ni 18/24 (EP); 7 O 3341/24</a:t>
+              <a:t>Independent public evidence summary · 2026.07.23-13 · 2026-07-22 · Sources: EPO Register; EP3032975B2; 8 Ni 18/24 (EP); 7 O 3341/24</a:t>
             </a:r>
           </a:p>
         </p:txBody>
@@ -5873,7 +5873,7 @@
           <p:cNvPr id="7" name="TextBox 6">
             <a:extLst xmlns:a="http://schemas.openxmlformats.org/drawingml/2006/main">
               <a:ext uri="{FF2B5EF4-FFF2-40B4-BE49-F238E27FC236}">
-                <a16:creationId xmlns:a16="http://schemas.microsoft.com/office/drawing/2014/main" id="{649CFE01-9F9B-47E1-9F9F-956F1749628E}"/>
+                <a16:creationId xmlns:a16="http://schemas.microsoft.com/office/drawing/2014/main" id="{56705689-67CA-4BAE-BDAA-2229B094793D}"/>
               </a:ext>
             </a:extLst>
           </p:cNvPr>
@@ -5920,7 +5920,7 @@
           <p:cNvPr id="8" name="Rounded Rectangle 7">
             <a:extLst xmlns:a="http://schemas.openxmlformats.org/drawingml/2006/main">
               <a:ext uri="{FF2B5EF4-FFF2-40B4-BE49-F238E27FC236}">
-                <a16:creationId xmlns:a16="http://schemas.microsoft.com/office/drawing/2014/main" id="{8694A321-C4B9-4E14-B50C-4743DB7CCD81}"/>
+                <a16:creationId xmlns:a16="http://schemas.microsoft.com/office/drawing/2014/main" id="{2ADBB07F-2789-4B6B-B1BF-B3C6E110AC54}"/>
               </a:ext>
             </a:extLst>
           </p:cNvPr>
@@ -5977,7 +5977,7 @@
           <p:cNvPr id="9" name="TextBox 8">
             <a:extLst xmlns:a="http://schemas.openxmlformats.org/drawingml/2006/main">
               <a:ext uri="{FF2B5EF4-FFF2-40B4-BE49-F238E27FC236}">
-                <a16:creationId xmlns:a16="http://schemas.microsoft.com/office/drawing/2014/main" id="{14821B0D-1FC5-4DDD-AEC9-3B2F7BB636A9}"/>
+                <a16:creationId xmlns:a16="http://schemas.microsoft.com/office/drawing/2014/main" id="{192E45DF-2B14-45E9-A30B-593A83F7C77B}"/>
               </a:ext>
             </a:extLst>
           </p:cNvPr>
@@ -6024,7 +6024,7 @@
           <p:cNvPr id="10" name="TextBox 9">
             <a:extLst xmlns:a="http://schemas.openxmlformats.org/drawingml/2006/main">
               <a:ext uri="{FF2B5EF4-FFF2-40B4-BE49-F238E27FC236}">
-                <a16:creationId xmlns:a16="http://schemas.microsoft.com/office/drawing/2014/main" id="{229FE5A4-E638-40F7-B7D2-1CC222DD2AA9}"/>
+                <a16:creationId xmlns:a16="http://schemas.microsoft.com/office/drawing/2014/main" id="{F253A90E-47A5-4D24-9B8E-F36626E5CEEB}"/>
               </a:ext>
             </a:extLst>
           </p:cNvPr>
@@ -6071,7 +6071,7 @@
           <p:cNvPr id="11" name="Rounded Rectangle 10">
             <a:extLst xmlns:a="http://schemas.openxmlformats.org/drawingml/2006/main">
               <a:ext uri="{FF2B5EF4-FFF2-40B4-BE49-F238E27FC236}">
-                <a16:creationId xmlns:a16="http://schemas.microsoft.com/office/drawing/2014/main" id="{E2AB3107-1BF1-4896-B357-9E982162F8E2}"/>
+                <a16:creationId xmlns:a16="http://schemas.microsoft.com/office/drawing/2014/main" id="{DB33ADB4-E37F-4BCE-A4F1-D9FA9EBF6B39}"/>
               </a:ext>
             </a:extLst>
           </p:cNvPr>
@@ -6128,7 +6128,7 @@
           <p:cNvPr id="12" name="TextBox 11">
             <a:extLst xmlns:a="http://schemas.openxmlformats.org/drawingml/2006/main">
               <a:ext uri="{FF2B5EF4-FFF2-40B4-BE49-F238E27FC236}">
-                <a16:creationId xmlns:a16="http://schemas.microsoft.com/office/drawing/2014/main" id="{0EFFE8CA-B42E-496E-B42C-4BD35C8B12C1}"/>
+                <a16:creationId xmlns:a16="http://schemas.microsoft.com/office/drawing/2014/main" id="{ABAA75DB-74D7-483F-83A1-82F87F895E2B}"/>
               </a:ext>
             </a:extLst>
           </p:cNvPr>
@@ -6175,7 +6175,7 @@
           <p:cNvPr id="13" name="TextBox 12">
             <a:extLst xmlns:a="http://schemas.openxmlformats.org/drawingml/2006/main">
               <a:ext uri="{FF2B5EF4-FFF2-40B4-BE49-F238E27FC236}">
-                <a16:creationId xmlns:a16="http://schemas.microsoft.com/office/drawing/2014/main" id="{F5315F3D-94C6-4E0E-9ED2-88A6AB9663A5}"/>
+                <a16:creationId xmlns:a16="http://schemas.microsoft.com/office/drawing/2014/main" id="{9AC27EA2-7A83-454D-886A-F3332AB4FF02}"/>
               </a:ext>
             </a:extLst>
           </p:cNvPr>
@@ -6222,7 +6222,7 @@
           <p:cNvPr id="14" name="Rounded Rectangle 13">
             <a:extLst xmlns:a="http://schemas.openxmlformats.org/drawingml/2006/main">
               <a:ext uri="{FF2B5EF4-FFF2-40B4-BE49-F238E27FC236}">
-                <a16:creationId xmlns:a16="http://schemas.microsoft.com/office/drawing/2014/main" id="{144EADEB-9C77-4A7E-BE80-66E2A277F0C0}"/>
+                <a16:creationId xmlns:a16="http://schemas.microsoft.com/office/drawing/2014/main" id="{8ACA4972-3483-489D-A989-572285D9F5F2}"/>
               </a:ext>
             </a:extLst>
           </p:cNvPr>
@@ -6279,7 +6279,7 @@
           <p:cNvPr id="15" name="TextBox 14">
             <a:extLst xmlns:a="http://schemas.openxmlformats.org/drawingml/2006/main">
               <a:ext uri="{FF2B5EF4-FFF2-40B4-BE49-F238E27FC236}">
-                <a16:creationId xmlns:a16="http://schemas.microsoft.com/office/drawing/2014/main" id="{EA4090AD-B092-4AAA-BF32-F178BCEE884E}"/>
+                <a16:creationId xmlns:a16="http://schemas.microsoft.com/office/drawing/2014/main" id="{E3B1F5E2-4CAD-4F78-B2A4-290DB45A5F1E}"/>
               </a:ext>
             </a:extLst>
           </p:cNvPr>
@@ -6326,7 +6326,7 @@
           <p:cNvPr id="16" name="TextBox 15">
             <a:extLst xmlns:a="http://schemas.openxmlformats.org/drawingml/2006/main">
               <a:ext uri="{FF2B5EF4-FFF2-40B4-BE49-F238E27FC236}">
-                <a16:creationId xmlns:a16="http://schemas.microsoft.com/office/drawing/2014/main" id="{3CA4A3A5-297C-4810-BE51-DF1C840B2306}"/>
+                <a16:creationId xmlns:a16="http://schemas.microsoft.com/office/drawing/2014/main" id="{AAAE6087-A3B5-4756-8DD3-ECDA5FE49E4B}"/>
               </a:ext>
             </a:extLst>
           </p:cNvPr>
@@ -6373,7 +6373,7 @@
           <p:cNvPr id="17" name="TextBox 16">
             <a:extLst xmlns:a="http://schemas.openxmlformats.org/drawingml/2006/main">
               <a:ext uri="{FF2B5EF4-FFF2-40B4-BE49-F238E27FC236}">
-                <a16:creationId xmlns:a16="http://schemas.microsoft.com/office/drawing/2014/main" id="{959B5B45-1AD2-4CF7-97AE-DEB081C27855}"/>
+                <a16:creationId xmlns:a16="http://schemas.microsoft.com/office/drawing/2014/main" id="{085C339B-9CE9-44A9-B982-216DA9663A21}"/>
               </a:ext>
             </a:extLst>
           </p:cNvPr>
@@ -6420,7 +6420,7 @@
           <p:cNvPr id="18" name="Rounded Rectangle 17">
             <a:extLst xmlns:a="http://schemas.openxmlformats.org/drawingml/2006/main">
               <a:ext uri="{FF2B5EF4-FFF2-40B4-BE49-F238E27FC236}">
-                <a16:creationId xmlns:a16="http://schemas.microsoft.com/office/drawing/2014/main" id="{6B546696-368C-4D46-BB06-120A5B058D92}"/>
+                <a16:creationId xmlns:a16="http://schemas.microsoft.com/office/drawing/2014/main" id="{CA1F774D-CC19-4393-9812-728B51B54778}"/>
               </a:ext>
             </a:extLst>
           </p:cNvPr>
@@ -6477,7 +6477,7 @@
           <p:cNvPr id="19" name="TextBox 18">
             <a:extLst xmlns:a="http://schemas.openxmlformats.org/drawingml/2006/main">
               <a:ext uri="{FF2B5EF4-FFF2-40B4-BE49-F238E27FC236}">
-                <a16:creationId xmlns:a16="http://schemas.microsoft.com/office/drawing/2014/main" id="{7AD66CDC-7371-49DD-A287-5E36C0B11876}"/>
+                <a16:creationId xmlns:a16="http://schemas.microsoft.com/office/drawing/2014/main" id="{C85B7017-1251-420B-810C-172CB984478D}"/>
               </a:ext>
             </a:extLst>
           </p:cNvPr>
@@ -6524,7 +6524,7 @@
           <p:cNvPr id="20" name="TextBox 19">
             <a:extLst xmlns:a="http://schemas.openxmlformats.org/drawingml/2006/main">
               <a:ext uri="{FF2B5EF4-FFF2-40B4-BE49-F238E27FC236}">
-                <a16:creationId xmlns:a16="http://schemas.microsoft.com/office/drawing/2014/main" id="{2631E047-DD0B-49E3-9DC9-A5509E2DCBC4}"/>
+                <a16:creationId xmlns:a16="http://schemas.microsoft.com/office/drawing/2014/main" id="{B5DBC9CA-9248-427C-B6A9-4A8C176648C7}"/>
               </a:ext>
             </a:extLst>
           </p:cNvPr>
@@ -6569,7 +6569,7 @@
     </p:spTree>
     <p:extLst>
       <p:ext uri="{BB962C8B-B14F-4D97-AF65-F5344CB8AC3E}">
-        <p14:creationId xmlns:p14="http://schemas.microsoft.com/office/powerpoint/2010/main" val="666233458"/>
+        <p14:creationId xmlns:p14="http://schemas.microsoft.com/office/powerpoint/2010/main" val="556852532"/>
       </p:ext>
     </p:extLst>
   </p:cSld>
@@ -6593,7 +6593,7 @@
           <p:cNvPr id="2" name="TextBox 1">
             <a:extLst xmlns:a="http://schemas.openxmlformats.org/drawingml/2006/main">
               <a:ext uri="{FF2B5EF4-FFF2-40B4-BE49-F238E27FC236}">
-                <a16:creationId xmlns:a16="http://schemas.microsoft.com/office/drawing/2014/main" id="{244442BF-5CE8-4A1A-A6EC-87E4558575C8}"/>
+                <a16:creationId xmlns:a16="http://schemas.microsoft.com/office/drawing/2014/main" id="{815C70B7-74D8-41C8-B965-3B086D14AD58}"/>
               </a:ext>
             </a:extLst>
           </p:cNvPr>
@@ -6640,7 +6640,7 @@
           <p:cNvPr id="3" name="TextBox 2">
             <a:extLst xmlns:a="http://schemas.openxmlformats.org/drawingml/2006/main">
               <a:ext uri="{FF2B5EF4-FFF2-40B4-BE49-F238E27FC236}">
-                <a16:creationId xmlns:a16="http://schemas.microsoft.com/office/drawing/2014/main" id="{641C5736-78FC-480B-A5EA-18255A993C8D}"/>
+                <a16:creationId xmlns:a16="http://schemas.microsoft.com/office/drawing/2014/main" id="{D0D741ED-BEE7-411A-BA91-0AB6DC0C1BFA}"/>
               </a:ext>
             </a:extLst>
           </p:cNvPr>
@@ -6687,7 +6687,7 @@
           <p:cNvPr id="4" name="Rectangle 3">
             <a:extLst xmlns:a="http://schemas.openxmlformats.org/drawingml/2006/main">
               <a:ext uri="{FF2B5EF4-FFF2-40B4-BE49-F238E27FC236}">
-                <a16:creationId xmlns:a16="http://schemas.microsoft.com/office/drawing/2014/main" id="{55CAACA3-5EB7-421E-A695-2E85181BE867}"/>
+                <a16:creationId xmlns:a16="http://schemas.microsoft.com/office/drawing/2014/main" id="{1B796005-71A3-40AA-BF7D-87E43B730AD0}"/>
               </a:ext>
             </a:extLst>
           </p:cNvPr>
@@ -6742,7 +6742,7 @@
           <p:cNvPr id="5" name="Rectangle 4">
             <a:extLst xmlns:a="http://schemas.openxmlformats.org/drawingml/2006/main">
               <a:ext uri="{FF2B5EF4-FFF2-40B4-BE49-F238E27FC236}">
-                <a16:creationId xmlns:a16="http://schemas.microsoft.com/office/drawing/2014/main" id="{A93654F8-38B8-4996-B525-B3F5D5B9DC26}"/>
+                <a16:creationId xmlns:a16="http://schemas.microsoft.com/office/drawing/2014/main" id="{4C5C5F7C-13F4-4D15-9E6C-1103AE98545A}"/>
               </a:ext>
             </a:extLst>
           </p:cNvPr>
@@ -6797,7 +6797,7 @@
           <p:cNvPr id="6" name="TextBox 5">
             <a:extLst xmlns:a="http://schemas.openxmlformats.org/drawingml/2006/main">
               <a:ext uri="{FF2B5EF4-FFF2-40B4-BE49-F238E27FC236}">
-                <a16:creationId xmlns:a16="http://schemas.microsoft.com/office/drawing/2014/main" id="{1094FAAD-E34C-4813-84A5-CEB77335A9C5}"/>
+                <a16:creationId xmlns:a16="http://schemas.microsoft.com/office/drawing/2014/main" id="{3ED8176B-E985-4C41-969D-0B8F15FDB864}"/>
               </a:ext>
             </a:extLst>
           </p:cNvPr>
@@ -6834,7 +6834,7 @@
                 <a:ea typeface="Aptos"/>
                 <a:cs typeface="Aptos"/>
               </a:rPr>
-              <a:t>Independent public evidence summary · 2026.07.23-12 · 2026-07-22 · Sources: Health Canada; Destatis; Vero; Sejm; Swedish Government</a:t>
+              <a:t>Independent public evidence summary · 2026.07.23-13 · 2026-07-22 · Sources: Health Canada; Destatis; Vero; Sejm; Swedish Government</a:t>
             </a:r>
           </a:p>
         </p:txBody>
@@ -6844,7 +6844,7 @@
           <p:cNvPr id="7" name="TextBox 6">
             <a:extLst xmlns:a="http://schemas.openxmlformats.org/drawingml/2006/main">
               <a:ext uri="{FF2B5EF4-FFF2-40B4-BE49-F238E27FC236}">
-                <a16:creationId xmlns:a16="http://schemas.microsoft.com/office/drawing/2014/main" id="{CADFF026-4ECF-413B-BEE5-4AAC73B6F43D}"/>
+                <a16:creationId xmlns:a16="http://schemas.microsoft.com/office/drawing/2014/main" id="{9BBA81B3-5ED3-405B-8D23-2EEE2028FCCB}"/>
               </a:ext>
             </a:extLst>
           </p:cNvPr>
@@ -6891,7 +6891,7 @@
           <p:cNvPr id="8" name="Rounded Rectangle 7">
             <a:extLst xmlns:a="http://schemas.openxmlformats.org/drawingml/2006/main">
               <a:ext uri="{FF2B5EF4-FFF2-40B4-BE49-F238E27FC236}">
-                <a16:creationId xmlns:a16="http://schemas.microsoft.com/office/drawing/2014/main" id="{27404C93-0A9B-456A-BDD4-977B7C39E376}"/>
+                <a16:creationId xmlns:a16="http://schemas.microsoft.com/office/drawing/2014/main" id="{E7169650-2CEE-4F3D-833A-8F521F10E321}"/>
               </a:ext>
             </a:extLst>
           </p:cNvPr>
@@ -6948,7 +6948,7 @@
           <p:cNvPr id="9" name="TextBox 8">
             <a:extLst xmlns:a="http://schemas.openxmlformats.org/drawingml/2006/main">
               <a:ext uri="{FF2B5EF4-FFF2-40B4-BE49-F238E27FC236}">
-                <a16:creationId xmlns:a16="http://schemas.microsoft.com/office/drawing/2014/main" id="{48180A8E-5072-49A2-8FCE-497C74D4039B}"/>
+                <a16:creationId xmlns:a16="http://schemas.microsoft.com/office/drawing/2014/main" id="{9A1DBF0D-7811-446D-9D06-880E5A8BC720}"/>
               </a:ext>
             </a:extLst>
           </p:cNvPr>
@@ -6995,7 +6995,7 @@
           <p:cNvPr id="10" name="TextBox 9">
             <a:extLst xmlns:a="http://schemas.openxmlformats.org/drawingml/2006/main">
               <a:ext uri="{FF2B5EF4-FFF2-40B4-BE49-F238E27FC236}">
-                <a16:creationId xmlns:a16="http://schemas.microsoft.com/office/drawing/2014/main" id="{01A72669-0AA3-49CD-A433-430EE2CD02A6}"/>
+                <a16:creationId xmlns:a16="http://schemas.microsoft.com/office/drawing/2014/main" id="{0701DDE5-EF58-48A4-BFF1-76F0FBE311C6}"/>
               </a:ext>
             </a:extLst>
           </p:cNvPr>
@@ -7042,7 +7042,7 @@
           <p:cNvPr id="11" name="Rounded Rectangle 10">
             <a:extLst xmlns:a="http://schemas.openxmlformats.org/drawingml/2006/main">
               <a:ext uri="{FF2B5EF4-FFF2-40B4-BE49-F238E27FC236}">
-                <a16:creationId xmlns:a16="http://schemas.microsoft.com/office/drawing/2014/main" id="{7BF99253-A7AD-4F44-9188-39D6C03D7DF4}"/>
+                <a16:creationId xmlns:a16="http://schemas.microsoft.com/office/drawing/2014/main" id="{6DC40125-EC32-4741-8B18-2B648F3CBA0F}"/>
               </a:ext>
             </a:extLst>
           </p:cNvPr>
@@ -7099,7 +7099,7 @@
           <p:cNvPr id="12" name="TextBox 11">
             <a:extLst xmlns:a="http://schemas.openxmlformats.org/drawingml/2006/main">
               <a:ext uri="{FF2B5EF4-FFF2-40B4-BE49-F238E27FC236}">
-                <a16:creationId xmlns:a16="http://schemas.microsoft.com/office/drawing/2014/main" id="{DE5A58F0-9ADF-4B92-84A7-978F21ADA257}"/>
+                <a16:creationId xmlns:a16="http://schemas.microsoft.com/office/drawing/2014/main" id="{FB4756FE-238E-4F00-B97F-D868C55217AE}"/>
               </a:ext>
             </a:extLst>
           </p:cNvPr>
@@ -7146,7 +7146,7 @@
           <p:cNvPr id="13" name="TextBox 12">
             <a:extLst xmlns:a="http://schemas.openxmlformats.org/drawingml/2006/main">
               <a:ext uri="{FF2B5EF4-FFF2-40B4-BE49-F238E27FC236}">
-                <a16:creationId xmlns:a16="http://schemas.microsoft.com/office/drawing/2014/main" id="{9500F128-1548-4B0B-9B3B-66B05C66671C}"/>
+                <a16:creationId xmlns:a16="http://schemas.microsoft.com/office/drawing/2014/main" id="{C4B11368-4914-42EE-8A67-4A29BF49007D}"/>
               </a:ext>
             </a:extLst>
           </p:cNvPr>
@@ -7193,7 +7193,7 @@
           <p:cNvPr id="14" name="Rounded Rectangle 13">
             <a:extLst xmlns:a="http://schemas.openxmlformats.org/drawingml/2006/main">
               <a:ext uri="{FF2B5EF4-FFF2-40B4-BE49-F238E27FC236}">
-                <a16:creationId xmlns:a16="http://schemas.microsoft.com/office/drawing/2014/main" id="{09F7AC2F-3A84-4712-9716-2B5300983CA0}"/>
+                <a16:creationId xmlns:a16="http://schemas.microsoft.com/office/drawing/2014/main" id="{857AF993-6FE4-43B9-BA01-89DF20E8868D}"/>
               </a:ext>
             </a:extLst>
           </p:cNvPr>
@@ -7250,7 +7250,7 @@
           <p:cNvPr id="15" name="TextBox 14">
             <a:extLst xmlns:a="http://schemas.openxmlformats.org/drawingml/2006/main">
               <a:ext uri="{FF2B5EF4-FFF2-40B4-BE49-F238E27FC236}">
-                <a16:creationId xmlns:a16="http://schemas.microsoft.com/office/drawing/2014/main" id="{E5B8178E-91E8-4D1C-AB94-DCD3A70151CB}"/>
+                <a16:creationId xmlns:a16="http://schemas.microsoft.com/office/drawing/2014/main" id="{99CBCF59-E765-4A43-B26D-8785F5532520}"/>
               </a:ext>
             </a:extLst>
           </p:cNvPr>
@@ -7297,7 +7297,7 @@
           <p:cNvPr id="16" name="TextBox 15">
             <a:extLst xmlns:a="http://schemas.openxmlformats.org/drawingml/2006/main">
               <a:ext uri="{FF2B5EF4-FFF2-40B4-BE49-F238E27FC236}">
-                <a16:creationId xmlns:a16="http://schemas.microsoft.com/office/drawing/2014/main" id="{32D93B3F-E7B1-4E92-AF92-25DE533A02B3}"/>
+                <a16:creationId xmlns:a16="http://schemas.microsoft.com/office/drawing/2014/main" id="{F6330BE1-F5BB-4528-A3A6-394D469B91F1}"/>
               </a:ext>
             </a:extLst>
           </p:cNvPr>
@@ -7344,7 +7344,7 @@
           <p:cNvPr id="17" name="TextBox 16">
             <a:extLst xmlns:a="http://schemas.openxmlformats.org/drawingml/2006/main">
               <a:ext uri="{FF2B5EF4-FFF2-40B4-BE49-F238E27FC236}">
-                <a16:creationId xmlns:a16="http://schemas.microsoft.com/office/drawing/2014/main" id="{98B7349B-0F73-4200-AF3F-B18873FE9618}"/>
+                <a16:creationId xmlns:a16="http://schemas.microsoft.com/office/drawing/2014/main" id="{CBE87C5C-8A92-49A8-A971-C1C9A13EBB5C}"/>
               </a:ext>
             </a:extLst>
           </p:cNvPr>
@@ -7391,7 +7391,7 @@
           <p:cNvPr id="18" name="Rounded Rectangle 17">
             <a:extLst xmlns:a="http://schemas.openxmlformats.org/drawingml/2006/main">
               <a:ext uri="{FF2B5EF4-FFF2-40B4-BE49-F238E27FC236}">
-                <a16:creationId xmlns:a16="http://schemas.microsoft.com/office/drawing/2014/main" id="{9A11A85D-4BCA-459F-9CAF-28EE5AED365E}"/>
+                <a16:creationId xmlns:a16="http://schemas.microsoft.com/office/drawing/2014/main" id="{A3040436-59B2-4ED3-8442-4BEFCF37C52D}"/>
               </a:ext>
             </a:extLst>
           </p:cNvPr>
@@ -7448,7 +7448,7 @@
           <p:cNvPr id="19" name="TextBox 18">
             <a:extLst xmlns:a="http://schemas.openxmlformats.org/drawingml/2006/main">
               <a:ext uri="{FF2B5EF4-FFF2-40B4-BE49-F238E27FC236}">
-                <a16:creationId xmlns:a16="http://schemas.microsoft.com/office/drawing/2014/main" id="{EA34E1BB-92AE-4C25-9ED1-E4B7489B114C}"/>
+                <a16:creationId xmlns:a16="http://schemas.microsoft.com/office/drawing/2014/main" id="{DFF9D598-40DE-43E4-99D4-80099F63BD23}"/>
               </a:ext>
             </a:extLst>
           </p:cNvPr>
@@ -7495,7 +7495,7 @@
           <p:cNvPr id="20" name="TextBox 19">
             <a:extLst xmlns:a="http://schemas.openxmlformats.org/drawingml/2006/main">
               <a:ext uri="{FF2B5EF4-FFF2-40B4-BE49-F238E27FC236}">
-                <a16:creationId xmlns:a16="http://schemas.microsoft.com/office/drawing/2014/main" id="{23EF08A5-B174-46E5-BB19-D294502ABBFF}"/>
+                <a16:creationId xmlns:a16="http://schemas.microsoft.com/office/drawing/2014/main" id="{8B78D021-CB6F-4C42-96E7-F5DE4B8CBA6B}"/>
               </a:ext>
             </a:extLst>
           </p:cNvPr>
@@ -7540,7 +7540,7 @@
     </p:spTree>
     <p:extLst>
       <p:ext uri="{BB962C8B-B14F-4D97-AF65-F5344CB8AC3E}">
-        <p14:creationId xmlns:p14="http://schemas.microsoft.com/office/powerpoint/2010/main" val="1958011293"/>
+        <p14:creationId xmlns:p14="http://schemas.microsoft.com/office/powerpoint/2010/main" val="1606442365"/>
       </p:ext>
     </p:extLst>
   </p:cSld>
@@ -7564,7 +7564,7 @@
           <p:cNvPr id="2" name="TextBox 1">
             <a:extLst xmlns:a="http://schemas.openxmlformats.org/drawingml/2006/main">
               <a:ext uri="{FF2B5EF4-FFF2-40B4-BE49-F238E27FC236}">
-                <a16:creationId xmlns:a16="http://schemas.microsoft.com/office/drawing/2014/main" id="{C2169F50-3121-4404-B80C-2C9363777881}"/>
+                <a16:creationId xmlns:a16="http://schemas.microsoft.com/office/drawing/2014/main" id="{8FFC58DF-7445-455B-8C4D-23D1A66C365A}"/>
               </a:ext>
             </a:extLst>
           </p:cNvPr>
@@ -7611,7 +7611,7 @@
           <p:cNvPr id="3" name="TextBox 2">
             <a:extLst xmlns:a="http://schemas.openxmlformats.org/drawingml/2006/main">
               <a:ext uri="{FF2B5EF4-FFF2-40B4-BE49-F238E27FC236}">
-                <a16:creationId xmlns:a16="http://schemas.microsoft.com/office/drawing/2014/main" id="{BB7895B2-A611-4D41-BA77-F5C192917DAF}"/>
+                <a16:creationId xmlns:a16="http://schemas.microsoft.com/office/drawing/2014/main" id="{C9782C40-C992-4E46-BF76-C268AAB1F3F1}"/>
               </a:ext>
             </a:extLst>
           </p:cNvPr>
@@ -7658,7 +7658,7 @@
           <p:cNvPr id="4" name="Rectangle 3">
             <a:extLst xmlns:a="http://schemas.openxmlformats.org/drawingml/2006/main">
               <a:ext uri="{FF2B5EF4-FFF2-40B4-BE49-F238E27FC236}">
-                <a16:creationId xmlns:a16="http://schemas.microsoft.com/office/drawing/2014/main" id="{1E37B97E-B412-4A20-ABB5-17777011E41E}"/>
+                <a16:creationId xmlns:a16="http://schemas.microsoft.com/office/drawing/2014/main" id="{F96D1132-F820-41A0-9E98-AEFCD1CFB4BF}"/>
               </a:ext>
             </a:extLst>
           </p:cNvPr>
@@ -7713,7 +7713,7 @@
           <p:cNvPr id="5" name="Rectangle 4">
             <a:extLst xmlns:a="http://schemas.openxmlformats.org/drawingml/2006/main">
               <a:ext uri="{FF2B5EF4-FFF2-40B4-BE49-F238E27FC236}">
-                <a16:creationId xmlns:a16="http://schemas.microsoft.com/office/drawing/2014/main" id="{599E574E-D537-4652-A587-1AD1FF3966AB}"/>
+                <a16:creationId xmlns:a16="http://schemas.microsoft.com/office/drawing/2014/main" id="{83288006-60BA-44E1-821E-3E25FBE3DCC1}"/>
               </a:ext>
             </a:extLst>
           </p:cNvPr>
@@ -7768,7 +7768,7 @@
           <p:cNvPr id="6" name="TextBox 5">
             <a:extLst xmlns:a="http://schemas.openxmlformats.org/drawingml/2006/main">
               <a:ext uri="{FF2B5EF4-FFF2-40B4-BE49-F238E27FC236}">
-                <a16:creationId xmlns:a16="http://schemas.microsoft.com/office/drawing/2014/main" id="{1B9511EF-B0F3-4A6E-9573-12E77B76A686}"/>
+                <a16:creationId xmlns:a16="http://schemas.microsoft.com/office/drawing/2014/main" id="{73FF537C-8F7B-4FBA-9C74-601DB9E1EEEF}"/>
               </a:ext>
             </a:extLst>
           </p:cNvPr>
@@ -7805,7 +7805,7 @@
                 <a:ea typeface="Aptos"/>
                 <a:cs typeface="Aptos"/>
               </a:rPr>
-              <a:t>Independent public evidence summary · 2026.07.23-12 · 2026-07-22 · Sources: Evidence Register; WIPO IP valuation</a:t>
+              <a:t>Independent public evidence summary · 2026.07.23-13 · 2026-07-22 · Sources: Evidence Register; WIPO IP valuation</a:t>
             </a:r>
           </a:p>
         </p:txBody>
@@ -7815,7 +7815,7 @@
           <p:cNvPr id="7" name="TextBox 6">
             <a:extLst xmlns:a="http://schemas.openxmlformats.org/drawingml/2006/main">
               <a:ext uri="{FF2B5EF4-FFF2-40B4-BE49-F238E27FC236}">
-                <a16:creationId xmlns:a16="http://schemas.microsoft.com/office/drawing/2014/main" id="{1247A057-8F2B-4694-A237-12D4B920F0EA}"/>
+                <a16:creationId xmlns:a16="http://schemas.microsoft.com/office/drawing/2014/main" id="{E2E9D7D1-AEC0-4055-A5B9-B1E073549040}"/>
               </a:ext>
             </a:extLst>
           </p:cNvPr>
@@ -8302,7 +8302,7 @@
           <p:cNvPr id="9" name="TextBox 8">
             <a:extLst xmlns:a="http://schemas.openxmlformats.org/drawingml/2006/main">
               <a:ext uri="{FF2B5EF4-FFF2-40B4-BE49-F238E27FC236}">
-                <a16:creationId xmlns:a16="http://schemas.microsoft.com/office/drawing/2014/main" id="{F0A75BC2-810C-4A76-B5D2-E312C65F2F77}"/>
+                <a16:creationId xmlns:a16="http://schemas.microsoft.com/office/drawing/2014/main" id="{75BABA1D-13E7-4139-82B3-649561B15515}"/>
               </a:ext>
             </a:extLst>
           </p:cNvPr>
@@ -8347,7 +8347,7 @@
     </p:spTree>
     <p:extLst>
       <p:ext uri="{BB962C8B-B14F-4D97-AF65-F5344CB8AC3E}">
-        <p14:creationId xmlns:p14="http://schemas.microsoft.com/office/powerpoint/2010/main" val="2136085335"/>
+        <p14:creationId xmlns:p14="http://schemas.microsoft.com/office/powerpoint/2010/main" val="1114363768"/>
       </p:ext>
     </p:extLst>
   </p:cSld>
@@ -8378,7 +8378,7 @@
           <p:cNvPr id="2" name="TextBox 1">
             <a:extLst xmlns:a="http://schemas.openxmlformats.org/drawingml/2006/main">
               <a:ext uri="{FF2B5EF4-FFF2-40B4-BE49-F238E27FC236}">
-                <a16:creationId xmlns:a16="http://schemas.microsoft.com/office/drawing/2014/main" id="{81DA0C60-5004-4A35-8B95-92DDA43A14DB}"/>
+                <a16:creationId xmlns:a16="http://schemas.microsoft.com/office/drawing/2014/main" id="{76D0F7B8-DB2C-45CB-90BB-F1A58002401B}"/>
               </a:ext>
             </a:extLst>
           </p:cNvPr>
@@ -8425,7 +8425,7 @@
           <p:cNvPr id="3" name="TextBox 2">
             <a:extLst xmlns:a="http://schemas.openxmlformats.org/drawingml/2006/main">
               <a:ext uri="{FF2B5EF4-FFF2-40B4-BE49-F238E27FC236}">
-                <a16:creationId xmlns:a16="http://schemas.microsoft.com/office/drawing/2014/main" id="{F2E50E83-1D0D-4424-8B7B-02445DD6B6DC}"/>
+                <a16:creationId xmlns:a16="http://schemas.microsoft.com/office/drawing/2014/main" id="{5DB57E2C-E343-4649-91D7-DE3A4DD46875}"/>
               </a:ext>
             </a:extLst>
           </p:cNvPr>
@@ -8472,7 +8472,7 @@
           <p:cNvPr id="4" name="TextBox 3">
             <a:extLst xmlns:a="http://schemas.openxmlformats.org/drawingml/2006/main">
               <a:ext uri="{FF2B5EF4-FFF2-40B4-BE49-F238E27FC236}">
-                <a16:creationId xmlns:a16="http://schemas.microsoft.com/office/drawing/2014/main" id="{6D8FBBCB-7B19-4E31-82A7-5FFD19C2689F}"/>
+                <a16:creationId xmlns:a16="http://schemas.microsoft.com/office/drawing/2014/main" id="{49004043-4BDB-4724-8889-D6BF7AED0514}"/>
               </a:ext>
             </a:extLst>
           </p:cNvPr>
@@ -8591,7 +8591,7 @@
           <p:cNvPr id="5" name="TextBox 4">
             <a:extLst xmlns:a="http://schemas.openxmlformats.org/drawingml/2006/main">
               <a:ext uri="{FF2B5EF4-FFF2-40B4-BE49-F238E27FC236}">
-                <a16:creationId xmlns:a16="http://schemas.microsoft.com/office/drawing/2014/main" id="{F85C972A-D891-4897-BEF2-27514DBEC055}"/>
+                <a16:creationId xmlns:a16="http://schemas.microsoft.com/office/drawing/2014/main" id="{5BF842A1-ECA2-480D-B845-8D2E87BABD23}"/>
               </a:ext>
             </a:extLst>
           </p:cNvPr>
@@ -8628,7 +8628,7 @@
                 <a:ea typeface="Aptos"/>
                 <a:cs typeface="Aptos"/>
               </a:rPr>
-              <a:t>Version 2026.07.23-12 · 2026-07-22 · 6 / 6</a:t>
+              <a:t>Version 2026.07.23-13 · 2026-07-22 · 6 / 6</a:t>
             </a:r>
           </a:p>
         </p:txBody>
@@ -8636,7 +8636,7 @@
     </p:spTree>
     <p:extLst>
       <p:ext uri="{BB962C8B-B14F-4D97-AF65-F5344CB8AC3E}">
-        <p14:creationId xmlns:p14="http://schemas.microsoft.com/office/powerpoint/2010/main" val="1334153608"/>
+        <p14:creationId xmlns:p14="http://schemas.microsoft.com/office/powerpoint/2010/main" val="2130280645"/>
       </p:ext>
     </p:extLst>
   </p:cSld>

--- a/site/downloads/pixan-bank-deck-short-en.pptx
+++ b/site/downloads/pixan-bank-deck-short-en.pptx
@@ -2,18 +2,18 @@
 <file path=ppt/presentation.xml><?xml version="1.0" encoding="utf-8"?>
 <p:presentation xmlns:p="http://schemas.openxmlformats.org/presentationml/2006/main">
   <p:sldMasterIdLst>
-    <p:sldMasterId xmlns:r="http://schemas.openxmlformats.org/officeDocument/2006/relationships" id="2147483648" r:id="R80d2fce8490e4d54"/>
+    <p:sldMasterId xmlns:r="http://schemas.openxmlformats.org/officeDocument/2006/relationships" id="2147483648" r:id="Rc4d5e165336e463d"/>
   </p:sldMasterIdLst>
   <p:notesMasterIdLst>
-    <p:notesMasterId xmlns:r="http://schemas.openxmlformats.org/officeDocument/2006/relationships" r:id="R6810c77e19d6465f"/>
+    <p:notesMasterId xmlns:r="http://schemas.openxmlformats.org/officeDocument/2006/relationships" r:id="R345200cb73db4b80"/>
   </p:notesMasterIdLst>
   <p:sldIdLst>
-    <p:sldId xmlns:r="http://schemas.openxmlformats.org/officeDocument/2006/relationships" id="256" r:id="R576bc8de19d445c2"/>
-    <p:sldId xmlns:r="http://schemas.openxmlformats.org/officeDocument/2006/relationships" id="257" r:id="Rb640c40d1215415f"/>
-    <p:sldId xmlns:r="http://schemas.openxmlformats.org/officeDocument/2006/relationships" id="258" r:id="Rb2a536f52b4e4a16"/>
-    <p:sldId xmlns:r="http://schemas.openxmlformats.org/officeDocument/2006/relationships" id="259" r:id="Rb4345e52b126472f"/>
-    <p:sldId xmlns:r="http://schemas.openxmlformats.org/officeDocument/2006/relationships" id="260" r:id="R6784066015554fc3"/>
-    <p:sldId xmlns:r="http://schemas.openxmlformats.org/officeDocument/2006/relationships" id="261" r:id="R1bda9b5e956c43d4"/>
+    <p:sldId xmlns:r="http://schemas.openxmlformats.org/officeDocument/2006/relationships" id="256" r:id="R389b7ac30c084e26"/>
+    <p:sldId xmlns:r="http://schemas.openxmlformats.org/officeDocument/2006/relationships" id="257" r:id="Rad19adac8ea64257"/>
+    <p:sldId xmlns:r="http://schemas.openxmlformats.org/officeDocument/2006/relationships" id="258" r:id="Rfb541299e6d54366"/>
+    <p:sldId xmlns:r="http://schemas.openxmlformats.org/officeDocument/2006/relationships" id="259" r:id="R1b63c0281535424e"/>
+    <p:sldId xmlns:r="http://schemas.openxmlformats.org/officeDocument/2006/relationships" id="260" r:id="R9906e8dac6a6456b"/>
+    <p:sldId xmlns:r="http://schemas.openxmlformats.org/officeDocument/2006/relationships" id="261" r:id="R9fc680b5264c44e0"/>
   </p:sldIdLst>
   <p:sldSz cx="12191999" cy="6858000"/>
   <p:notesSz cx="6858000" cy="9144000"/>
@@ -938,7 +938,7 @@
           <p:cNvPr id="2" name="Title 1">
             <a:extLst xmlns:a="http://schemas.openxmlformats.org/drawingml/2006/main">
               <a:ext uri="{FF2B5EF4-FFF2-40B4-BE49-F238E27FC236}">
-                <a16:creationId xmlns:a16="http://schemas.microsoft.com/office/drawing/2014/main" id="{A0B7829F-A6AE-4FAB-BAFD-73B92482F763}"/>
+                <a16:creationId xmlns:a16="http://schemas.microsoft.com/office/drawing/2014/main" id="{5E16EC90-8F8F-4D27-B28F-0E628CA6EC09}"/>
               </a:ext>
             </a:extLst>
           </p:cNvPr>
@@ -970,7 +970,7 @@
           <p:cNvPr id="3" name="Subtitle 2">
             <a:extLst xmlns:a="http://schemas.openxmlformats.org/drawingml/2006/main">
               <a:ext uri="{FF2B5EF4-FFF2-40B4-BE49-F238E27FC236}">
-                <a16:creationId xmlns:a16="http://schemas.microsoft.com/office/drawing/2014/main" id="{FFF52152-2FFA-4A63-82A0-558E1BC8995C}"/>
+                <a16:creationId xmlns:a16="http://schemas.microsoft.com/office/drawing/2014/main" id="{5CBEB437-59A9-4133-AEFF-D44F427AA3B7}"/>
               </a:ext>
             </a:extLst>
           </p:cNvPr>
@@ -1093,7 +1093,7 @@
           <p:cNvPr id="4" name="Date Placeholder 3">
             <a:extLst xmlns:a="http://schemas.openxmlformats.org/drawingml/2006/main">
               <a:ext uri="{FF2B5EF4-FFF2-40B4-BE49-F238E27FC236}">
-                <a16:creationId xmlns:a16="http://schemas.microsoft.com/office/drawing/2014/main" id="{151DA39E-CE0A-4EFC-BE51-154729A882C5}"/>
+                <a16:creationId xmlns:a16="http://schemas.microsoft.com/office/drawing/2014/main" id="{96E770A2-D011-42E7-AB68-A4922D6545DE}"/>
               </a:ext>
             </a:extLst>
           </p:cNvPr>
@@ -1120,7 +1120,7 @@
           <p:cNvPr id="5" name="Footer Placeholder 4">
             <a:extLst xmlns:a="http://schemas.openxmlformats.org/drawingml/2006/main">
               <a:ext uri="{FF2B5EF4-FFF2-40B4-BE49-F238E27FC236}">
-                <a16:creationId xmlns:a16="http://schemas.microsoft.com/office/drawing/2014/main" id="{87114BA5-E662-45D2-8E11-9257B28A0561}"/>
+                <a16:creationId xmlns:a16="http://schemas.microsoft.com/office/drawing/2014/main" id="{4F3F6320-94D0-4F1F-82C1-0B111B3A0141}"/>
               </a:ext>
             </a:extLst>
           </p:cNvPr>
@@ -1143,7 +1143,7 @@
           <p:cNvPr id="6" name="Slide Number Placeholder 5">
             <a:extLst xmlns:a="http://schemas.openxmlformats.org/drawingml/2006/main">
               <a:ext uri="{FF2B5EF4-FFF2-40B4-BE49-F238E27FC236}">
-                <a16:creationId xmlns:a16="http://schemas.microsoft.com/office/drawing/2014/main" id="{4145C895-B8EE-421E-9377-5663EE7726A2}"/>
+                <a16:creationId xmlns:a16="http://schemas.microsoft.com/office/drawing/2014/main" id="{07FDE1BE-26BB-4737-94B6-416191D20434}"/>
               </a:ext>
             </a:extLst>
           </p:cNvPr>
@@ -1187,7 +1187,7 @@
           <p:cNvPr id="2" name="Title 1">
             <a:extLst xmlns:a="http://schemas.openxmlformats.org/drawingml/2006/main">
               <a:ext uri="{FF2B5EF4-FFF2-40B4-BE49-F238E27FC236}">
-                <a16:creationId xmlns:a16="http://schemas.microsoft.com/office/drawing/2014/main" id="{F60A6E85-A202-425B-88F2-F053D06B974B}"/>
+                <a16:creationId xmlns:a16="http://schemas.microsoft.com/office/drawing/2014/main" id="{778BB475-C546-472F-9CB9-ABF749C20DE7}"/>
               </a:ext>
             </a:extLst>
           </p:cNvPr>
@@ -1214,7 +1214,7 @@
           <p:cNvPr id="3" name="Vertical Text Placeholder 2">
             <a:extLst xmlns:a="http://schemas.openxmlformats.org/drawingml/2006/main">
               <a:ext uri="{FF2B5EF4-FFF2-40B4-BE49-F238E27FC236}">
-                <a16:creationId xmlns:a16="http://schemas.microsoft.com/office/drawing/2014/main" id="{92CF9E5B-23EB-4113-B090-50E58DDDDB05}"/>
+                <a16:creationId xmlns:a16="http://schemas.microsoft.com/office/drawing/2014/main" id="{FDB39FC0-78FE-4B11-B3BC-DE8BC24E34D3}"/>
               </a:ext>
             </a:extLst>
           </p:cNvPr>
@@ -1276,7 +1276,7 @@
           <p:cNvPr id="4" name="Date Placeholder 3">
             <a:extLst xmlns:a="http://schemas.openxmlformats.org/drawingml/2006/main">
               <a:ext uri="{FF2B5EF4-FFF2-40B4-BE49-F238E27FC236}">
-                <a16:creationId xmlns:a16="http://schemas.microsoft.com/office/drawing/2014/main" id="{2B3DD9A8-AEEB-4C30-B4E5-82E3248C568C}"/>
+                <a16:creationId xmlns:a16="http://schemas.microsoft.com/office/drawing/2014/main" id="{EA73FEA8-582B-48F9-8EBF-5A72A9292801}"/>
               </a:ext>
             </a:extLst>
           </p:cNvPr>
@@ -1303,7 +1303,7 @@
           <p:cNvPr id="5" name="Footer Placeholder 4">
             <a:extLst xmlns:a="http://schemas.openxmlformats.org/drawingml/2006/main">
               <a:ext uri="{FF2B5EF4-FFF2-40B4-BE49-F238E27FC236}">
-                <a16:creationId xmlns:a16="http://schemas.microsoft.com/office/drawing/2014/main" id="{F72EB215-A5DC-4F67-A368-9D602E10AC78}"/>
+                <a16:creationId xmlns:a16="http://schemas.microsoft.com/office/drawing/2014/main" id="{44291290-21FE-4182-A117-8128345817EF}"/>
               </a:ext>
             </a:extLst>
           </p:cNvPr>
@@ -1326,7 +1326,7 @@
           <p:cNvPr id="6" name="Slide Number Placeholder 5">
             <a:extLst xmlns:a="http://schemas.openxmlformats.org/drawingml/2006/main">
               <a:ext uri="{FF2B5EF4-FFF2-40B4-BE49-F238E27FC236}">
-                <a16:creationId xmlns:a16="http://schemas.microsoft.com/office/drawing/2014/main" id="{58F8A63D-3896-4AD9-98A0-65EB07DCC6DE}"/>
+                <a16:creationId xmlns:a16="http://schemas.microsoft.com/office/drawing/2014/main" id="{C89FC355-165C-4498-83EB-9805D641D733}"/>
               </a:ext>
             </a:extLst>
           </p:cNvPr>
@@ -1370,7 +1370,7 @@
           <p:cNvPr id="2" name="Vertical Title 1">
             <a:extLst xmlns:a="http://schemas.openxmlformats.org/drawingml/2006/main">
               <a:ext uri="{FF2B5EF4-FFF2-40B4-BE49-F238E27FC236}">
-                <a16:creationId xmlns:a16="http://schemas.microsoft.com/office/drawing/2014/main" id="{B26CFFD3-ADF0-4829-8549-EBFED316594F}"/>
+                <a16:creationId xmlns:a16="http://schemas.microsoft.com/office/drawing/2014/main" id="{755DE445-6EAF-4F3B-94F2-08318E7FEDD8}"/>
               </a:ext>
             </a:extLst>
           </p:cNvPr>
@@ -1402,7 +1402,7 @@
           <p:cNvPr id="3" name="Vertical Text Placeholder 2">
             <a:extLst xmlns:a="http://schemas.openxmlformats.org/drawingml/2006/main">
               <a:ext uri="{FF2B5EF4-FFF2-40B4-BE49-F238E27FC236}">
-                <a16:creationId xmlns:a16="http://schemas.microsoft.com/office/drawing/2014/main" id="{B50FF6A8-1473-40E9-94C6-8B3C294B9098}"/>
+                <a16:creationId xmlns:a16="http://schemas.microsoft.com/office/drawing/2014/main" id="{6B64BC19-CB11-412A-8603-11DF1C611437}"/>
               </a:ext>
             </a:extLst>
           </p:cNvPr>
@@ -1469,7 +1469,7 @@
           <p:cNvPr id="4" name="Date Placeholder 3">
             <a:extLst xmlns:a="http://schemas.openxmlformats.org/drawingml/2006/main">
               <a:ext uri="{FF2B5EF4-FFF2-40B4-BE49-F238E27FC236}">
-                <a16:creationId xmlns:a16="http://schemas.microsoft.com/office/drawing/2014/main" id="{DC164715-0FFD-4E5E-8045-11D39CD4E275}"/>
+                <a16:creationId xmlns:a16="http://schemas.microsoft.com/office/drawing/2014/main" id="{8B2BFC23-2457-4B3C-93AC-0ED4319FFD70}"/>
               </a:ext>
             </a:extLst>
           </p:cNvPr>
@@ -1496,7 +1496,7 @@
           <p:cNvPr id="5" name="Footer Placeholder 4">
             <a:extLst xmlns:a="http://schemas.openxmlformats.org/drawingml/2006/main">
               <a:ext uri="{FF2B5EF4-FFF2-40B4-BE49-F238E27FC236}">
-                <a16:creationId xmlns:a16="http://schemas.microsoft.com/office/drawing/2014/main" id="{767E1697-C6B2-40E8-8D1E-16F8BF5D703A}"/>
+                <a16:creationId xmlns:a16="http://schemas.microsoft.com/office/drawing/2014/main" id="{E1F219E0-E010-4C15-A529-DC42C335A432}"/>
               </a:ext>
             </a:extLst>
           </p:cNvPr>
@@ -1519,7 +1519,7 @@
           <p:cNvPr id="6" name="Slide Number Placeholder 5">
             <a:extLst xmlns:a="http://schemas.openxmlformats.org/drawingml/2006/main">
               <a:ext uri="{FF2B5EF4-FFF2-40B4-BE49-F238E27FC236}">
-                <a16:creationId xmlns:a16="http://schemas.microsoft.com/office/drawing/2014/main" id="{6FACDDE7-B970-4DE5-9C1B-F3900BB69299}"/>
+                <a16:creationId xmlns:a16="http://schemas.microsoft.com/office/drawing/2014/main" id="{3A80D715-B97F-47C8-BD66-BB6B0B7359DE}"/>
               </a:ext>
             </a:extLst>
           </p:cNvPr>
@@ -1563,7 +1563,7 @@
           <p:cNvPr id="2" name="Title 1">
             <a:extLst xmlns:a="http://schemas.openxmlformats.org/drawingml/2006/main">
               <a:ext uri="{FF2B5EF4-FFF2-40B4-BE49-F238E27FC236}">
-                <a16:creationId xmlns:a16="http://schemas.microsoft.com/office/drawing/2014/main" id="{BB5B17EC-7DEA-4B0F-AFA5-2AFEED8437E8}"/>
+                <a16:creationId xmlns:a16="http://schemas.microsoft.com/office/drawing/2014/main" id="{9C2BC0E6-1817-4F24-ACBC-5D0B06B7E391}"/>
               </a:ext>
             </a:extLst>
           </p:cNvPr>
@@ -1590,7 +1590,7 @@
           <p:cNvPr id="3" name="Content Placeholder 2">
             <a:extLst xmlns:a="http://schemas.openxmlformats.org/drawingml/2006/main">
               <a:ext uri="{FF2B5EF4-FFF2-40B4-BE49-F238E27FC236}">
-                <a16:creationId xmlns:a16="http://schemas.microsoft.com/office/drawing/2014/main" id="{636634E7-D38E-4CB9-B476-E176E7DC86ED}"/>
+                <a16:creationId xmlns:a16="http://schemas.microsoft.com/office/drawing/2014/main" id="{41E5811B-7CE3-4894-9A92-773F58BD7496}"/>
               </a:ext>
             </a:extLst>
           </p:cNvPr>
@@ -1652,7 +1652,7 @@
           <p:cNvPr id="4" name="Date Placeholder 3">
             <a:extLst xmlns:a="http://schemas.openxmlformats.org/drawingml/2006/main">
               <a:ext uri="{FF2B5EF4-FFF2-40B4-BE49-F238E27FC236}">
-                <a16:creationId xmlns:a16="http://schemas.microsoft.com/office/drawing/2014/main" id="{92316B89-D773-4D72-ACB8-DDD8273BC09A}"/>
+                <a16:creationId xmlns:a16="http://schemas.microsoft.com/office/drawing/2014/main" id="{770AD2DC-B139-4C71-AF34-C24B93B11C60}"/>
               </a:ext>
             </a:extLst>
           </p:cNvPr>
@@ -1679,7 +1679,7 @@
           <p:cNvPr id="5" name="Footer Placeholder 4">
             <a:extLst xmlns:a="http://schemas.openxmlformats.org/drawingml/2006/main">
               <a:ext uri="{FF2B5EF4-FFF2-40B4-BE49-F238E27FC236}">
-                <a16:creationId xmlns:a16="http://schemas.microsoft.com/office/drawing/2014/main" id="{480AF6B7-A82A-4DC4-B378-7FF0BEC82454}"/>
+                <a16:creationId xmlns:a16="http://schemas.microsoft.com/office/drawing/2014/main" id="{907F7BBA-9539-4F94-B2BD-2EA92D46BAB3}"/>
               </a:ext>
             </a:extLst>
           </p:cNvPr>
@@ -1702,7 +1702,7 @@
           <p:cNvPr id="6" name="Slide Number Placeholder 5">
             <a:extLst xmlns:a="http://schemas.openxmlformats.org/drawingml/2006/main">
               <a:ext uri="{FF2B5EF4-FFF2-40B4-BE49-F238E27FC236}">
-                <a16:creationId xmlns:a16="http://schemas.microsoft.com/office/drawing/2014/main" id="{B871A19D-10FA-4518-A6D6-06B1F7823B93}"/>
+                <a16:creationId xmlns:a16="http://schemas.microsoft.com/office/drawing/2014/main" id="{A5773CE0-82A2-4A2A-B14D-7BFF45B90FD7}"/>
               </a:ext>
             </a:extLst>
           </p:cNvPr>
@@ -1746,7 +1746,7 @@
           <p:cNvPr id="2" name="Title 1">
             <a:extLst xmlns:a="http://schemas.openxmlformats.org/drawingml/2006/main">
               <a:ext uri="{FF2B5EF4-FFF2-40B4-BE49-F238E27FC236}">
-                <a16:creationId xmlns:a16="http://schemas.microsoft.com/office/drawing/2014/main" id="{04ED274C-1F72-4960-9E6F-7ECE0B1B7F77}"/>
+                <a16:creationId xmlns:a16="http://schemas.microsoft.com/office/drawing/2014/main" id="{91913D06-1479-401A-9DC1-EAB0878A6BD8}"/>
               </a:ext>
             </a:extLst>
           </p:cNvPr>
@@ -1783,7 +1783,7 @@
           <p:cNvPr id="3" name="Text Placeholder 2">
             <a:extLst xmlns:a="http://schemas.openxmlformats.org/drawingml/2006/main">
               <a:ext uri="{FF2B5EF4-FFF2-40B4-BE49-F238E27FC236}">
-                <a16:creationId xmlns:a16="http://schemas.microsoft.com/office/drawing/2014/main" id="{32B9B1DA-A2E2-4CCB-8FED-5488E8AA4BB8}"/>
+                <a16:creationId xmlns:a16="http://schemas.microsoft.com/office/drawing/2014/main" id="{F10045F8-86DF-43DA-939C-F82D034558FF}"/>
               </a:ext>
             </a:extLst>
           </p:cNvPr>
@@ -1909,7 +1909,7 @@
           <p:cNvPr id="4" name="Date Placeholder 3">
             <a:extLst xmlns:a="http://schemas.openxmlformats.org/drawingml/2006/main">
               <a:ext uri="{FF2B5EF4-FFF2-40B4-BE49-F238E27FC236}">
-                <a16:creationId xmlns:a16="http://schemas.microsoft.com/office/drawing/2014/main" id="{50B6CFFA-0F7A-46F0-BE95-A82CCFC10CD5}"/>
+                <a16:creationId xmlns:a16="http://schemas.microsoft.com/office/drawing/2014/main" id="{A4CAB58E-D75E-45BB-83EF-3CB33FF3726B}"/>
               </a:ext>
             </a:extLst>
           </p:cNvPr>
@@ -1936,7 +1936,7 @@
           <p:cNvPr id="5" name="Footer Placeholder 4">
             <a:extLst xmlns:a="http://schemas.openxmlformats.org/drawingml/2006/main">
               <a:ext uri="{FF2B5EF4-FFF2-40B4-BE49-F238E27FC236}">
-                <a16:creationId xmlns:a16="http://schemas.microsoft.com/office/drawing/2014/main" id="{8F0342D1-2F3D-498C-BDCA-E276F4E93EE7}"/>
+                <a16:creationId xmlns:a16="http://schemas.microsoft.com/office/drawing/2014/main" id="{C9387314-E863-4288-B29E-77666C0A7F32}"/>
               </a:ext>
             </a:extLst>
           </p:cNvPr>
@@ -1959,7 +1959,7 @@
           <p:cNvPr id="6" name="Slide Number Placeholder 5">
             <a:extLst xmlns:a="http://schemas.openxmlformats.org/drawingml/2006/main">
               <a:ext uri="{FF2B5EF4-FFF2-40B4-BE49-F238E27FC236}">
-                <a16:creationId xmlns:a16="http://schemas.microsoft.com/office/drawing/2014/main" id="{993CE6A1-F2C7-400F-9DAA-7A687154433C}"/>
+                <a16:creationId xmlns:a16="http://schemas.microsoft.com/office/drawing/2014/main" id="{B9C66698-9B04-414C-B2A1-155BD21ADC7B}"/>
               </a:ext>
             </a:extLst>
           </p:cNvPr>
@@ -2003,7 +2003,7 @@
           <p:cNvPr id="2" name="Title 1">
             <a:extLst xmlns:a="http://schemas.openxmlformats.org/drawingml/2006/main">
               <a:ext uri="{FF2B5EF4-FFF2-40B4-BE49-F238E27FC236}">
-                <a16:creationId xmlns:a16="http://schemas.microsoft.com/office/drawing/2014/main" id="{9035F599-52A7-451C-BB89-2BBEFEF817AD}"/>
+                <a16:creationId xmlns:a16="http://schemas.microsoft.com/office/drawing/2014/main" id="{3DA390C9-F509-4064-8E32-E9411AF18C7E}"/>
               </a:ext>
             </a:extLst>
           </p:cNvPr>
@@ -2030,7 +2030,7 @@
           <p:cNvPr id="3" name="Content Placeholder 2">
             <a:extLst xmlns:a="http://schemas.openxmlformats.org/drawingml/2006/main">
               <a:ext uri="{FF2B5EF4-FFF2-40B4-BE49-F238E27FC236}">
-                <a16:creationId xmlns:a16="http://schemas.microsoft.com/office/drawing/2014/main" id="{44EA0985-C10C-49A2-9BE7-7F67FC943173}"/>
+                <a16:creationId xmlns:a16="http://schemas.microsoft.com/office/drawing/2014/main" id="{4F42225E-8409-4E77-A774-C769A5E9497B}"/>
               </a:ext>
             </a:extLst>
           </p:cNvPr>
@@ -2134,7 +2134,7 @@
           <p:cNvPr id="4" name="Content Placeholder 3">
             <a:extLst xmlns:a="http://schemas.openxmlformats.org/drawingml/2006/main">
               <a:ext uri="{FF2B5EF4-FFF2-40B4-BE49-F238E27FC236}">
-                <a16:creationId xmlns:a16="http://schemas.microsoft.com/office/drawing/2014/main" id="{29A99970-4D6C-4B4F-8992-F5A2CCB1FBCE}"/>
+                <a16:creationId xmlns:a16="http://schemas.microsoft.com/office/drawing/2014/main" id="{D60095E4-056B-4FA2-B29C-20A745A9CF99}"/>
               </a:ext>
             </a:extLst>
           </p:cNvPr>
@@ -2238,7 +2238,7 @@
           <p:cNvPr id="5" name="Date Placeholder 4">
             <a:extLst xmlns:a="http://schemas.openxmlformats.org/drawingml/2006/main">
               <a:ext uri="{FF2B5EF4-FFF2-40B4-BE49-F238E27FC236}">
-                <a16:creationId xmlns:a16="http://schemas.microsoft.com/office/drawing/2014/main" id="{31CAA5E8-F933-40D8-914E-C0602AFF24C5}"/>
+                <a16:creationId xmlns:a16="http://schemas.microsoft.com/office/drawing/2014/main" id="{BA68F35D-EA57-4CB3-B6DB-14C06F74FFAA}"/>
               </a:ext>
             </a:extLst>
           </p:cNvPr>
@@ -2265,7 +2265,7 @@
           <p:cNvPr id="6" name="Footer Placeholder 5">
             <a:extLst xmlns:a="http://schemas.openxmlformats.org/drawingml/2006/main">
               <a:ext uri="{FF2B5EF4-FFF2-40B4-BE49-F238E27FC236}">
-                <a16:creationId xmlns:a16="http://schemas.microsoft.com/office/drawing/2014/main" id="{2364585C-87D8-4CED-A0A2-C9E1CD9B31BE}"/>
+                <a16:creationId xmlns:a16="http://schemas.microsoft.com/office/drawing/2014/main" id="{55F5B29E-D204-45F9-8B81-409158B448B4}"/>
               </a:ext>
             </a:extLst>
           </p:cNvPr>
@@ -2288,7 +2288,7 @@
           <p:cNvPr id="7" name="Slide Number Placeholder 6">
             <a:extLst xmlns:a="http://schemas.openxmlformats.org/drawingml/2006/main">
               <a:ext uri="{FF2B5EF4-FFF2-40B4-BE49-F238E27FC236}">
-                <a16:creationId xmlns:a16="http://schemas.microsoft.com/office/drawing/2014/main" id="{6EC2FC5E-CE2A-477F-8274-F202338FDA90}"/>
+                <a16:creationId xmlns:a16="http://schemas.microsoft.com/office/drawing/2014/main" id="{A3379B3F-6A27-4960-A69C-2C3CCAC06184}"/>
               </a:ext>
             </a:extLst>
           </p:cNvPr>
@@ -2332,7 +2332,7 @@
           <p:cNvPr id="2" name="Title 1">
             <a:extLst xmlns:a="http://schemas.openxmlformats.org/drawingml/2006/main">
               <a:ext uri="{FF2B5EF4-FFF2-40B4-BE49-F238E27FC236}">
-                <a16:creationId xmlns:a16="http://schemas.microsoft.com/office/drawing/2014/main" id="{9830C720-8AB6-46EB-BB48-BB3336DA826C}"/>
+                <a16:creationId xmlns:a16="http://schemas.microsoft.com/office/drawing/2014/main" id="{DD9B0C5C-F305-4039-8392-637C44C04A4A}"/>
               </a:ext>
             </a:extLst>
           </p:cNvPr>
@@ -2364,7 +2364,7 @@
           <p:cNvPr id="3" name="Text Placeholder 2">
             <a:extLst xmlns:a="http://schemas.openxmlformats.org/drawingml/2006/main">
               <a:ext uri="{FF2B5EF4-FFF2-40B4-BE49-F238E27FC236}">
-                <a16:creationId xmlns:a16="http://schemas.microsoft.com/office/drawing/2014/main" id="{DEC02756-FD90-4915-B8EA-0C59B44F7A9C}"/>
+                <a16:creationId xmlns:a16="http://schemas.microsoft.com/office/drawing/2014/main" id="{6A713635-FEF0-475F-BD98-0887C24D5621}"/>
               </a:ext>
             </a:extLst>
           </p:cNvPr>
@@ -2436,7 +2436,7 @@
           <p:cNvPr id="4" name="Content Placeholder 3">
             <a:extLst xmlns:a="http://schemas.openxmlformats.org/drawingml/2006/main">
               <a:ext uri="{FF2B5EF4-FFF2-40B4-BE49-F238E27FC236}">
-                <a16:creationId xmlns:a16="http://schemas.microsoft.com/office/drawing/2014/main" id="{BC584EE7-9C86-4035-9EA9-7C553FC6F9BD}"/>
+                <a16:creationId xmlns:a16="http://schemas.microsoft.com/office/drawing/2014/main" id="{7D0941F4-15E3-486B-9189-6E7C11242807}"/>
               </a:ext>
             </a:extLst>
           </p:cNvPr>
@@ -2540,7 +2540,7 @@
           <p:cNvPr id="5" name="Text Placeholder 4">
             <a:extLst xmlns:a="http://schemas.openxmlformats.org/drawingml/2006/main">
               <a:ext uri="{FF2B5EF4-FFF2-40B4-BE49-F238E27FC236}">
-                <a16:creationId xmlns:a16="http://schemas.microsoft.com/office/drawing/2014/main" id="{2DBDF464-10BB-4947-8151-267549D43B84}"/>
+                <a16:creationId xmlns:a16="http://schemas.microsoft.com/office/drawing/2014/main" id="{A64CA659-A6B2-410F-9582-A3E48D3E4E0A}"/>
               </a:ext>
             </a:extLst>
           </p:cNvPr>
@@ -2612,7 +2612,7 @@
           <p:cNvPr id="6" name="Content Placeholder 5">
             <a:extLst xmlns:a="http://schemas.openxmlformats.org/drawingml/2006/main">
               <a:ext uri="{FF2B5EF4-FFF2-40B4-BE49-F238E27FC236}">
-                <a16:creationId xmlns:a16="http://schemas.microsoft.com/office/drawing/2014/main" id="{F62A4549-D2D4-4331-8880-C65341C0ED52}"/>
+                <a16:creationId xmlns:a16="http://schemas.microsoft.com/office/drawing/2014/main" id="{0345DF61-ABFE-441E-84D7-D4CAB5043009}"/>
               </a:ext>
             </a:extLst>
           </p:cNvPr>
@@ -2716,7 +2716,7 @@
           <p:cNvPr id="7" name="Date Placeholder 6">
             <a:extLst xmlns:a="http://schemas.openxmlformats.org/drawingml/2006/main">
               <a:ext uri="{FF2B5EF4-FFF2-40B4-BE49-F238E27FC236}">
-                <a16:creationId xmlns:a16="http://schemas.microsoft.com/office/drawing/2014/main" id="{239A3897-C411-401A-B3A7-B36C7776697F}"/>
+                <a16:creationId xmlns:a16="http://schemas.microsoft.com/office/drawing/2014/main" id="{F5F7B07C-6BF1-4716-A091-599F9ADE1859}"/>
               </a:ext>
             </a:extLst>
           </p:cNvPr>
@@ -2743,7 +2743,7 @@
           <p:cNvPr id="8" name="Footer Placeholder 7">
             <a:extLst xmlns:a="http://schemas.openxmlformats.org/drawingml/2006/main">
               <a:ext uri="{FF2B5EF4-FFF2-40B4-BE49-F238E27FC236}">
-                <a16:creationId xmlns:a16="http://schemas.microsoft.com/office/drawing/2014/main" id="{93983D10-621A-4FB6-BA82-A5C527A1A6CE}"/>
+                <a16:creationId xmlns:a16="http://schemas.microsoft.com/office/drawing/2014/main" id="{D17B1CBD-334B-4AF7-8777-6B87D249D2BE}"/>
               </a:ext>
             </a:extLst>
           </p:cNvPr>
@@ -2766,7 +2766,7 @@
           <p:cNvPr id="9" name="Slide Number Placeholder 8">
             <a:extLst xmlns:a="http://schemas.openxmlformats.org/drawingml/2006/main">
               <a:ext uri="{FF2B5EF4-FFF2-40B4-BE49-F238E27FC236}">
-                <a16:creationId xmlns:a16="http://schemas.microsoft.com/office/drawing/2014/main" id="{7B16657A-3128-4D42-936F-979D17DD680D}"/>
+                <a16:creationId xmlns:a16="http://schemas.microsoft.com/office/drawing/2014/main" id="{87D6A546-CA27-4D08-9E27-9621D4B570AE}"/>
               </a:ext>
             </a:extLst>
           </p:cNvPr>
@@ -2810,7 +2810,7 @@
           <p:cNvPr id="2" name="Title 1">
             <a:extLst xmlns:a="http://schemas.openxmlformats.org/drawingml/2006/main">
               <a:ext uri="{FF2B5EF4-FFF2-40B4-BE49-F238E27FC236}">
-                <a16:creationId xmlns:a16="http://schemas.microsoft.com/office/drawing/2014/main" id="{50F5D65F-8F83-4E70-A75D-359683B92255}"/>
+                <a16:creationId xmlns:a16="http://schemas.microsoft.com/office/drawing/2014/main" id="{D9B486CA-B5C1-4A55-8256-56B9EE734184}"/>
               </a:ext>
             </a:extLst>
           </p:cNvPr>
@@ -2837,7 +2837,7 @@
           <p:cNvPr id="3" name="Date Placeholder 2">
             <a:extLst xmlns:a="http://schemas.openxmlformats.org/drawingml/2006/main">
               <a:ext uri="{FF2B5EF4-FFF2-40B4-BE49-F238E27FC236}">
-                <a16:creationId xmlns:a16="http://schemas.microsoft.com/office/drawing/2014/main" id="{666FD0F7-C0D0-4EB7-ACF6-82CFAAA285FE}"/>
+                <a16:creationId xmlns:a16="http://schemas.microsoft.com/office/drawing/2014/main" id="{2621D26B-F29E-449E-927D-5C9C5C55A738}"/>
               </a:ext>
             </a:extLst>
           </p:cNvPr>
@@ -2864,7 +2864,7 @@
           <p:cNvPr id="4" name="Footer Placeholder 3">
             <a:extLst xmlns:a="http://schemas.openxmlformats.org/drawingml/2006/main">
               <a:ext uri="{FF2B5EF4-FFF2-40B4-BE49-F238E27FC236}">
-                <a16:creationId xmlns:a16="http://schemas.microsoft.com/office/drawing/2014/main" id="{D0F449CB-C8F9-45DE-BB16-F1AABBA91B05}"/>
+                <a16:creationId xmlns:a16="http://schemas.microsoft.com/office/drawing/2014/main" id="{9DA3AD45-76CD-4DF7-891B-CED08CBD6CF2}"/>
               </a:ext>
             </a:extLst>
           </p:cNvPr>
@@ -2887,7 +2887,7 @@
           <p:cNvPr id="5" name="Slide Number Placeholder 4">
             <a:extLst xmlns:a="http://schemas.openxmlformats.org/drawingml/2006/main">
               <a:ext uri="{FF2B5EF4-FFF2-40B4-BE49-F238E27FC236}">
-                <a16:creationId xmlns:a16="http://schemas.microsoft.com/office/drawing/2014/main" id="{F96BEFA6-FA16-4E60-8B20-11C2E58FCB3D}"/>
+                <a16:creationId xmlns:a16="http://schemas.microsoft.com/office/drawing/2014/main" id="{BCA18647-2198-406B-B8E6-A0D1DD2D27B1}"/>
               </a:ext>
             </a:extLst>
           </p:cNvPr>
@@ -2931,7 +2931,7 @@
           <p:cNvPr id="2" name="Date Placeholder 1">
             <a:extLst xmlns:a="http://schemas.openxmlformats.org/drawingml/2006/main">
               <a:ext uri="{FF2B5EF4-FFF2-40B4-BE49-F238E27FC236}">
-                <a16:creationId xmlns:a16="http://schemas.microsoft.com/office/drawing/2014/main" id="{E7AED63B-8904-4BB7-999F-138A604F5AF7}"/>
+                <a16:creationId xmlns:a16="http://schemas.microsoft.com/office/drawing/2014/main" id="{7C9CFBEF-AD30-45C6-9E51-83FDA30CFA18}"/>
               </a:ext>
             </a:extLst>
           </p:cNvPr>
@@ -2958,7 +2958,7 @@
           <p:cNvPr id="3" name="Footer Placeholder 2">
             <a:extLst xmlns:a="http://schemas.openxmlformats.org/drawingml/2006/main">
               <a:ext uri="{FF2B5EF4-FFF2-40B4-BE49-F238E27FC236}">
-                <a16:creationId xmlns:a16="http://schemas.microsoft.com/office/drawing/2014/main" id="{7374F8D4-7D36-44AA-94DA-1604660A5DBB}"/>
+                <a16:creationId xmlns:a16="http://schemas.microsoft.com/office/drawing/2014/main" id="{3DC37E82-F7E6-40AA-80D4-971A6FF89889}"/>
               </a:ext>
             </a:extLst>
           </p:cNvPr>
@@ -2981,7 +2981,7 @@
           <p:cNvPr id="4" name="Slide Number Placeholder 3">
             <a:extLst xmlns:a="http://schemas.openxmlformats.org/drawingml/2006/main">
               <a:ext uri="{FF2B5EF4-FFF2-40B4-BE49-F238E27FC236}">
-                <a16:creationId xmlns:a16="http://schemas.microsoft.com/office/drawing/2014/main" id="{19FCA347-86E2-4C08-A886-8E26FD0DDF53}"/>
+                <a16:creationId xmlns:a16="http://schemas.microsoft.com/office/drawing/2014/main" id="{18079136-678B-49C6-A18B-4657CB855484}"/>
               </a:ext>
             </a:extLst>
           </p:cNvPr>
@@ -3025,7 +3025,7 @@
           <p:cNvPr id="2" name="Title 1">
             <a:extLst xmlns:a="http://schemas.openxmlformats.org/drawingml/2006/main">
               <a:ext uri="{FF2B5EF4-FFF2-40B4-BE49-F238E27FC236}">
-                <a16:creationId xmlns:a16="http://schemas.microsoft.com/office/drawing/2014/main" id="{4617FDC5-85A2-4163-B540-E435C6290D6C}"/>
+                <a16:creationId xmlns:a16="http://schemas.microsoft.com/office/drawing/2014/main" id="{F7B9A6D1-6EBA-4628-9765-CE04B1CC3621}"/>
               </a:ext>
             </a:extLst>
           </p:cNvPr>
@@ -3062,7 +3062,7 @@
           <p:cNvPr id="3" name="Content Placeholder 2">
             <a:extLst xmlns:a="http://schemas.openxmlformats.org/drawingml/2006/main">
               <a:ext uri="{FF2B5EF4-FFF2-40B4-BE49-F238E27FC236}">
-                <a16:creationId xmlns:a16="http://schemas.microsoft.com/office/drawing/2014/main" id="{AC425A14-9193-478B-8D51-E2FEBA2EAD25}"/>
+                <a16:creationId xmlns:a16="http://schemas.microsoft.com/office/drawing/2014/main" id="{6C3A5550-A402-4EAA-82DE-76A123A94154}"/>
               </a:ext>
             </a:extLst>
           </p:cNvPr>
@@ -3166,7 +3166,7 @@
           <p:cNvPr id="4" name="Text Placeholder 3">
             <a:extLst xmlns:a="http://schemas.openxmlformats.org/drawingml/2006/main">
               <a:ext uri="{FF2B5EF4-FFF2-40B4-BE49-F238E27FC236}">
-                <a16:creationId xmlns:a16="http://schemas.microsoft.com/office/drawing/2014/main" id="{10A2C6AB-3183-47AC-A636-538C67F6928F}"/>
+                <a16:creationId xmlns:a16="http://schemas.microsoft.com/office/drawing/2014/main" id="{E0A14C34-6AC3-4CBB-9074-1C3F8CE03371}"/>
               </a:ext>
             </a:extLst>
           </p:cNvPr>
@@ -3238,7 +3238,7 @@
           <p:cNvPr id="5" name="Date Placeholder 4">
             <a:extLst xmlns:a="http://schemas.openxmlformats.org/drawingml/2006/main">
               <a:ext uri="{FF2B5EF4-FFF2-40B4-BE49-F238E27FC236}">
-                <a16:creationId xmlns:a16="http://schemas.microsoft.com/office/drawing/2014/main" id="{34918323-FEDA-4312-A778-ADACDE78236A}"/>
+                <a16:creationId xmlns:a16="http://schemas.microsoft.com/office/drawing/2014/main" id="{436F94D4-AFEF-4333-9A8B-B3F5D85ED510}"/>
               </a:ext>
             </a:extLst>
           </p:cNvPr>
@@ -3265,7 +3265,7 @@
           <p:cNvPr id="6" name="Footer Placeholder 5">
             <a:extLst xmlns:a="http://schemas.openxmlformats.org/drawingml/2006/main">
               <a:ext uri="{FF2B5EF4-FFF2-40B4-BE49-F238E27FC236}">
-                <a16:creationId xmlns:a16="http://schemas.microsoft.com/office/drawing/2014/main" id="{1291CE4D-DB65-4553-926F-7DDC5273796E}"/>
+                <a16:creationId xmlns:a16="http://schemas.microsoft.com/office/drawing/2014/main" id="{B18AB08A-C13C-4A7F-898C-29F7C488B214}"/>
               </a:ext>
             </a:extLst>
           </p:cNvPr>
@@ -3288,7 +3288,7 @@
           <p:cNvPr id="7" name="Slide Number Placeholder 6">
             <a:extLst xmlns:a="http://schemas.openxmlformats.org/drawingml/2006/main">
               <a:ext uri="{FF2B5EF4-FFF2-40B4-BE49-F238E27FC236}">
-                <a16:creationId xmlns:a16="http://schemas.microsoft.com/office/drawing/2014/main" id="{697B40C4-D6C8-4076-B8DC-88A19311DBDD}"/>
+                <a16:creationId xmlns:a16="http://schemas.microsoft.com/office/drawing/2014/main" id="{BC82DD91-A984-4EB1-879D-3B31D110E35C}"/>
               </a:ext>
             </a:extLst>
           </p:cNvPr>
@@ -3332,7 +3332,7 @@
           <p:cNvPr id="2" name="Title 1">
             <a:extLst xmlns:a="http://schemas.openxmlformats.org/drawingml/2006/main">
               <a:ext uri="{FF2B5EF4-FFF2-40B4-BE49-F238E27FC236}">
-                <a16:creationId xmlns:a16="http://schemas.microsoft.com/office/drawing/2014/main" id="{D46B492A-C842-4AD2-8BBB-03DF1FCA59D6}"/>
+                <a16:creationId xmlns:a16="http://schemas.microsoft.com/office/drawing/2014/main" id="{C6AEE8E1-3FA9-42C7-BC7A-2611AD7BA93D}"/>
               </a:ext>
             </a:extLst>
           </p:cNvPr>
@@ -3369,7 +3369,7 @@
           <p:cNvPr id="3" name="Picture Placeholder 2">
             <a:extLst xmlns:a="http://schemas.openxmlformats.org/drawingml/2006/main">
               <a:ext uri="{FF2B5EF4-FFF2-40B4-BE49-F238E27FC236}">
-                <a16:creationId xmlns:a16="http://schemas.microsoft.com/office/drawing/2014/main" id="{878C5B4D-8029-4255-8459-70CB87AB639F}"/>
+                <a16:creationId xmlns:a16="http://schemas.microsoft.com/office/drawing/2014/main" id="{A7AC7CB5-1B2E-40AC-8FF1-EB8BBDAB25D1}"/>
               </a:ext>
             </a:extLst>
           </p:cNvPr>
@@ -3434,7 +3434,7 @@
           <p:cNvPr id="4" name="Text Placeholder 3">
             <a:extLst xmlns:a="http://schemas.openxmlformats.org/drawingml/2006/main">
               <a:ext uri="{FF2B5EF4-FFF2-40B4-BE49-F238E27FC236}">
-                <a16:creationId xmlns:a16="http://schemas.microsoft.com/office/drawing/2014/main" id="{35661599-D1DA-4B6C-92B2-B026079DF3AA}"/>
+                <a16:creationId xmlns:a16="http://schemas.microsoft.com/office/drawing/2014/main" id="{A19BAD0A-694C-4D05-A0F1-C5EE1A84D363}"/>
               </a:ext>
             </a:extLst>
           </p:cNvPr>
@@ -3506,7 +3506,7 @@
           <p:cNvPr id="5" name="Date Placeholder 4">
             <a:extLst xmlns:a="http://schemas.openxmlformats.org/drawingml/2006/main">
               <a:ext uri="{FF2B5EF4-FFF2-40B4-BE49-F238E27FC236}">
-                <a16:creationId xmlns:a16="http://schemas.microsoft.com/office/drawing/2014/main" id="{9E4FF21C-88A7-4D02-ACD0-85AC3AB0B3CC}"/>
+                <a16:creationId xmlns:a16="http://schemas.microsoft.com/office/drawing/2014/main" id="{79CF5CA0-FD97-4D4C-AA16-7F677489B49F}"/>
               </a:ext>
             </a:extLst>
           </p:cNvPr>
@@ -3533,7 +3533,7 @@
           <p:cNvPr id="6" name="Footer Placeholder 5">
             <a:extLst xmlns:a="http://schemas.openxmlformats.org/drawingml/2006/main">
               <a:ext uri="{FF2B5EF4-FFF2-40B4-BE49-F238E27FC236}">
-                <a16:creationId xmlns:a16="http://schemas.microsoft.com/office/drawing/2014/main" id="{6FB63653-928B-4CB8-AB85-F078713564E0}"/>
+                <a16:creationId xmlns:a16="http://schemas.microsoft.com/office/drawing/2014/main" id="{BB342FE2-A0B4-49FE-9C1E-390445A44E48}"/>
               </a:ext>
             </a:extLst>
           </p:cNvPr>
@@ -3556,7 +3556,7 @@
           <p:cNvPr id="7" name="Slide Number Placeholder 6">
             <a:extLst xmlns:a="http://schemas.openxmlformats.org/drawingml/2006/main">
               <a:ext uri="{FF2B5EF4-FFF2-40B4-BE49-F238E27FC236}">
-                <a16:creationId xmlns:a16="http://schemas.microsoft.com/office/drawing/2014/main" id="{CDA7FDE8-9E7D-4EDE-8A6E-F9344EAE62BB}"/>
+                <a16:creationId xmlns:a16="http://schemas.microsoft.com/office/drawing/2014/main" id="{1E283066-BEE5-471C-86B0-4F4DC15BDD83}"/>
               </a:ext>
             </a:extLst>
           </p:cNvPr>
@@ -3605,7 +3605,7 @@
           <p:cNvPr id="2" name="Title Placeholder 1">
             <a:extLst xmlns:a="http://schemas.openxmlformats.org/drawingml/2006/main">
               <a:ext uri="{FF2B5EF4-FFF2-40B4-BE49-F238E27FC236}">
-                <a16:creationId xmlns:a16="http://schemas.microsoft.com/office/drawing/2014/main" id="{35999FEC-7DE6-4AAC-9ED9-26A4B65DFDD1}"/>
+                <a16:creationId xmlns:a16="http://schemas.microsoft.com/office/drawing/2014/main" id="{57324B10-2958-423F-B496-91E86E8574B3}"/>
               </a:ext>
             </a:extLst>
           </p:cNvPr>
@@ -3642,7 +3642,7 @@
           <p:cNvPr id="3" name="Text Placeholder 2">
             <a:extLst xmlns:a="http://schemas.openxmlformats.org/drawingml/2006/main">
               <a:ext uri="{FF2B5EF4-FFF2-40B4-BE49-F238E27FC236}">
-                <a16:creationId xmlns:a16="http://schemas.microsoft.com/office/drawing/2014/main" id="{8642CADE-25F4-4AD4-917F-497BEBA75501}"/>
+                <a16:creationId xmlns:a16="http://schemas.microsoft.com/office/drawing/2014/main" id="{F09BE6F9-01BD-44D2-BEF3-EDFB3279A986}"/>
               </a:ext>
             </a:extLst>
           </p:cNvPr>
@@ -3714,7 +3714,7 @@
           <p:cNvPr id="4" name="Date Placeholder 3">
             <a:extLst xmlns:a="http://schemas.openxmlformats.org/drawingml/2006/main">
               <a:ext uri="{FF2B5EF4-FFF2-40B4-BE49-F238E27FC236}">
-                <a16:creationId xmlns:a16="http://schemas.microsoft.com/office/drawing/2014/main" id="{5DFF7733-C036-4C07-B015-98A9AC798306}"/>
+                <a16:creationId xmlns:a16="http://schemas.microsoft.com/office/drawing/2014/main" id="{1F438F46-22C0-44B2-8866-FE0817125407}"/>
               </a:ext>
             </a:extLst>
           </p:cNvPr>
@@ -3760,7 +3760,7 @@
           <p:cNvPr id="5" name="Footer Placeholder 4">
             <a:extLst xmlns:a="http://schemas.openxmlformats.org/drawingml/2006/main">
               <a:ext uri="{FF2B5EF4-FFF2-40B4-BE49-F238E27FC236}">
-                <a16:creationId xmlns:a16="http://schemas.microsoft.com/office/drawing/2014/main" id="{24B0CE6B-B00E-4FDD-BD02-194A2AE238D3}"/>
+                <a16:creationId xmlns:a16="http://schemas.microsoft.com/office/drawing/2014/main" id="{B9BBA762-ACC5-4122-8388-CE2223AAD7F3}"/>
               </a:ext>
             </a:extLst>
           </p:cNvPr>
@@ -3802,7 +3802,7 @@
           <p:cNvPr id="6" name="Slide Number Placeholder 5">
             <a:extLst xmlns:a="http://schemas.openxmlformats.org/drawingml/2006/main">
               <a:ext uri="{FF2B5EF4-FFF2-40B4-BE49-F238E27FC236}">
-                <a16:creationId xmlns:a16="http://schemas.microsoft.com/office/drawing/2014/main" id="{9A17F59E-E23F-4651-940B-06C9FA90E724}"/>
+                <a16:creationId xmlns:a16="http://schemas.microsoft.com/office/drawing/2014/main" id="{BB563AEB-464B-434B-A04C-AABE6AE62D48}"/>
               </a:ext>
             </a:extLst>
           </p:cNvPr>
@@ -3847,17 +3847,17 @@
   </p:cSld>
   <p:clrMap bg1="lt1" tx1="dk1" bg2="lt2" tx2="dk2" accent1="accent1" accent2="accent2" accent3="accent3" accent4="accent4" accent5="accent5" accent6="accent6" hlink="hlink" folHlink="folHlink"/>
   <p:sldLayoutIdLst>
-    <p:sldLayoutId xmlns:r="http://schemas.openxmlformats.org/officeDocument/2006/relationships" id="2147483649" r:id="R46b601db86aa4d67"/>
-    <p:sldLayoutId xmlns:r="http://schemas.openxmlformats.org/officeDocument/2006/relationships" id="2147483650" r:id="Ra519ffdf303c4c5d"/>
-    <p:sldLayoutId xmlns:r="http://schemas.openxmlformats.org/officeDocument/2006/relationships" id="2147483651" r:id="R80b8192ddf9a4bfa"/>
-    <p:sldLayoutId xmlns:r="http://schemas.openxmlformats.org/officeDocument/2006/relationships" id="2147483652" r:id="R1b5e4311a1984c4a"/>
-    <p:sldLayoutId xmlns:r="http://schemas.openxmlformats.org/officeDocument/2006/relationships" id="2147483653" r:id="R58d0bbb301a54552"/>
-    <p:sldLayoutId xmlns:r="http://schemas.openxmlformats.org/officeDocument/2006/relationships" id="2147483654" r:id="Rfb873c08bde94759"/>
-    <p:sldLayoutId xmlns:r="http://schemas.openxmlformats.org/officeDocument/2006/relationships" id="2147483655" r:id="R6850ab4e42094425"/>
-    <p:sldLayoutId xmlns:r="http://schemas.openxmlformats.org/officeDocument/2006/relationships" id="2147483656" r:id="R99b4116678204191"/>
-    <p:sldLayoutId xmlns:r="http://schemas.openxmlformats.org/officeDocument/2006/relationships" id="2147483657" r:id="Rdb759a4738b54e41"/>
-    <p:sldLayoutId xmlns:r="http://schemas.openxmlformats.org/officeDocument/2006/relationships" id="2147483658" r:id="R767c539764324ec4"/>
-    <p:sldLayoutId xmlns:r="http://schemas.openxmlformats.org/officeDocument/2006/relationships" id="2147483659" r:id="Re58612e6f2554e2e"/>
+    <p:sldLayoutId xmlns:r="http://schemas.openxmlformats.org/officeDocument/2006/relationships" id="2147483649" r:id="R6e88b0897b33495f"/>
+    <p:sldLayoutId xmlns:r="http://schemas.openxmlformats.org/officeDocument/2006/relationships" id="2147483650" r:id="R96fb30aab4594725"/>
+    <p:sldLayoutId xmlns:r="http://schemas.openxmlformats.org/officeDocument/2006/relationships" id="2147483651" r:id="R7af996b1a5ed4d97"/>
+    <p:sldLayoutId xmlns:r="http://schemas.openxmlformats.org/officeDocument/2006/relationships" id="2147483652" r:id="Rf0b2e4c306634ea5"/>
+    <p:sldLayoutId xmlns:r="http://schemas.openxmlformats.org/officeDocument/2006/relationships" id="2147483653" r:id="R5c56d9bc1ac54382"/>
+    <p:sldLayoutId xmlns:r="http://schemas.openxmlformats.org/officeDocument/2006/relationships" id="2147483654" r:id="R1d5f559c190a4b15"/>
+    <p:sldLayoutId xmlns:r="http://schemas.openxmlformats.org/officeDocument/2006/relationships" id="2147483655" r:id="R3b043649a1f143f9"/>
+    <p:sldLayoutId xmlns:r="http://schemas.openxmlformats.org/officeDocument/2006/relationships" id="2147483656" r:id="R98aac1e207ff402d"/>
+    <p:sldLayoutId xmlns:r="http://schemas.openxmlformats.org/officeDocument/2006/relationships" id="2147483657" r:id="R757a1fbe9d744ee3"/>
+    <p:sldLayoutId xmlns:r="http://schemas.openxmlformats.org/officeDocument/2006/relationships" id="2147483658" r:id="R6acab05e586b48c4"/>
+    <p:sldLayoutId xmlns:r="http://schemas.openxmlformats.org/officeDocument/2006/relationships" id="2147483659" r:id="R5347d5447dc14ad0"/>
   </p:sldLayoutIdLst>
   <p:txStyles>
     <p:titleStyle>
@@ -4410,7 +4410,7 @@
           <p:cNvPr id="2" name="Rectangle 1">
             <a:extLst xmlns:a="http://schemas.openxmlformats.org/drawingml/2006/main">
               <a:ext uri="{FF2B5EF4-FFF2-40B4-BE49-F238E27FC236}">
-                <a16:creationId xmlns:a16="http://schemas.microsoft.com/office/drawing/2014/main" id="{31D80225-9C3E-4E7E-9C68-888CA9DE73A4}"/>
+                <a16:creationId xmlns:a16="http://schemas.microsoft.com/office/drawing/2014/main" id="{629D8E96-6A07-44F0-8DA4-66920062E7A2}"/>
               </a:ext>
             </a:extLst>
           </p:cNvPr>
@@ -4465,7 +4465,7 @@
           <p:cNvPr id="3" name="TextBox 2">
             <a:extLst xmlns:a="http://schemas.openxmlformats.org/drawingml/2006/main">
               <a:ext uri="{FF2B5EF4-FFF2-40B4-BE49-F238E27FC236}">
-                <a16:creationId xmlns:a16="http://schemas.microsoft.com/office/drawing/2014/main" id="{F0B135EC-F78E-4DDB-A4B7-79E5CB05EB48}"/>
+                <a16:creationId xmlns:a16="http://schemas.microsoft.com/office/drawing/2014/main" id="{0B0A281F-D795-4685-A40F-36B4A5D45610}"/>
               </a:ext>
             </a:extLst>
           </p:cNvPr>
@@ -4512,7 +4512,7 @@
           <p:cNvPr id="4" name="TextBox 3">
             <a:extLst xmlns:a="http://schemas.openxmlformats.org/drawingml/2006/main">
               <a:ext uri="{FF2B5EF4-FFF2-40B4-BE49-F238E27FC236}">
-                <a16:creationId xmlns:a16="http://schemas.microsoft.com/office/drawing/2014/main" id="{E5010FAC-367E-4AEF-AC39-328F5DBFF67E}"/>
+                <a16:creationId xmlns:a16="http://schemas.microsoft.com/office/drawing/2014/main" id="{61697D32-148A-4B6E-B955-6E65996228A6}"/>
               </a:ext>
             </a:extLst>
           </p:cNvPr>
@@ -4580,7 +4580,7 @@
           <p:cNvPr id="5" name="TextBox 4">
             <a:extLst xmlns:a="http://schemas.openxmlformats.org/drawingml/2006/main">
               <a:ext uri="{FF2B5EF4-FFF2-40B4-BE49-F238E27FC236}">
-                <a16:creationId xmlns:a16="http://schemas.microsoft.com/office/drawing/2014/main" id="{F371D9F5-58CD-4675-A16E-45279509D283}"/>
+                <a16:creationId xmlns:a16="http://schemas.microsoft.com/office/drawing/2014/main" id="{56E1F409-4265-4EF3-9281-56306C536A20}"/>
               </a:ext>
             </a:extLst>
           </p:cNvPr>
@@ -4627,7 +4627,7 @@
           <p:cNvPr id="6" name="Rectangle 5">
             <a:extLst xmlns:a="http://schemas.openxmlformats.org/drawingml/2006/main">
               <a:ext uri="{FF2B5EF4-FFF2-40B4-BE49-F238E27FC236}">
-                <a16:creationId xmlns:a16="http://schemas.microsoft.com/office/drawing/2014/main" id="{AADC59CD-22D3-4574-8739-EA5687F04329}"/>
+                <a16:creationId xmlns:a16="http://schemas.microsoft.com/office/drawing/2014/main" id="{8A116DFC-E20C-4A7F-AD5D-219E4538AB93}"/>
               </a:ext>
             </a:extLst>
           </p:cNvPr>
@@ -4682,7 +4682,7 @@
           <p:cNvPr id="7" name="TextBox 6">
             <a:extLst xmlns:a="http://schemas.openxmlformats.org/drawingml/2006/main">
               <a:ext uri="{FF2B5EF4-FFF2-40B4-BE49-F238E27FC236}">
-                <a16:creationId xmlns:a16="http://schemas.microsoft.com/office/drawing/2014/main" id="{201372AD-EA7F-426E-8F1C-D5953BE0F155}"/>
+                <a16:creationId xmlns:a16="http://schemas.microsoft.com/office/drawing/2014/main" id="{BF8F570F-5E67-4551-9527-5F2F99087F62}"/>
               </a:ext>
             </a:extLst>
           </p:cNvPr>
@@ -4729,7 +4729,7 @@
           <p:cNvPr id="8" name="TextBox 7">
             <a:extLst xmlns:a="http://schemas.openxmlformats.org/drawingml/2006/main">
               <a:ext uri="{FF2B5EF4-FFF2-40B4-BE49-F238E27FC236}">
-                <a16:creationId xmlns:a16="http://schemas.microsoft.com/office/drawing/2014/main" id="{101B65ED-1EF2-48C8-903F-442CC84162E2}"/>
+                <a16:creationId xmlns:a16="http://schemas.microsoft.com/office/drawing/2014/main" id="{92209B8F-B3DB-46D1-B8C2-593AB57BA184}"/>
               </a:ext>
             </a:extLst>
           </p:cNvPr>
@@ -4766,7 +4766,7 @@
                 <a:ea typeface="Aptos"/>
                 <a:cs typeface="Aptos"/>
               </a:rPr>
-              <a:t>2026.07.23-13</a:t>
+              <a:t>2026.07.23-14</a:t>
             </a:r>
           </a:p>
         </p:txBody>
@@ -4776,7 +4776,7 @@
           <p:cNvPr id="9" name="TextBox 8">
             <a:extLst xmlns:a="http://schemas.openxmlformats.org/drawingml/2006/main">
               <a:ext uri="{FF2B5EF4-FFF2-40B4-BE49-F238E27FC236}">
-                <a16:creationId xmlns:a16="http://schemas.microsoft.com/office/drawing/2014/main" id="{159CFDEC-C5D7-4487-8742-911BF9F547F1}"/>
+                <a16:creationId xmlns:a16="http://schemas.microsoft.com/office/drawing/2014/main" id="{177ECD66-FE6D-449C-A00A-35E95DB76537}"/>
               </a:ext>
             </a:extLst>
           </p:cNvPr>
@@ -4844,7 +4844,7 @@
           <p:cNvPr id="10" name="TextBox 9">
             <a:extLst xmlns:a="http://schemas.openxmlformats.org/drawingml/2006/main">
               <a:ext uri="{FF2B5EF4-FFF2-40B4-BE49-F238E27FC236}">
-                <a16:creationId xmlns:a16="http://schemas.microsoft.com/office/drawing/2014/main" id="{CF61A1B4-A850-49C1-87A1-6D45D3F61240}"/>
+                <a16:creationId xmlns:a16="http://schemas.microsoft.com/office/drawing/2014/main" id="{5743D524-2F6A-4C3D-9984-B30E1757DAF1}"/>
               </a:ext>
             </a:extLst>
           </p:cNvPr>
@@ -4891,7 +4891,7 @@
           <p:cNvPr id="11" name="TextBox 10">
             <a:extLst xmlns:a="http://schemas.openxmlformats.org/drawingml/2006/main">
               <a:ext uri="{FF2B5EF4-FFF2-40B4-BE49-F238E27FC236}">
-                <a16:creationId xmlns:a16="http://schemas.microsoft.com/office/drawing/2014/main" id="{0F114E9C-2754-4023-A698-ED7731478F0B}"/>
+                <a16:creationId xmlns:a16="http://schemas.microsoft.com/office/drawing/2014/main" id="{806C0D05-5B2E-48E1-9D99-3F67D53B3351}"/>
               </a:ext>
             </a:extLst>
           </p:cNvPr>
@@ -4938,7 +4938,7 @@
           <p:cNvPr id="12" name="TextBox 11">
             <a:extLst xmlns:a="http://schemas.openxmlformats.org/drawingml/2006/main">
               <a:ext uri="{FF2B5EF4-FFF2-40B4-BE49-F238E27FC236}">
-                <a16:creationId xmlns:a16="http://schemas.microsoft.com/office/drawing/2014/main" id="{17F9213B-8E6B-416D-82EB-FCC8364CAB67}"/>
+                <a16:creationId xmlns:a16="http://schemas.microsoft.com/office/drawing/2014/main" id="{6BA82E4F-6BA4-454F-A780-70D5B7E54DFC}"/>
               </a:ext>
             </a:extLst>
           </p:cNvPr>
@@ -4983,7 +4983,7 @@
     </p:spTree>
     <p:extLst>
       <p:ext uri="{BB962C8B-B14F-4D97-AF65-F5344CB8AC3E}">
-        <p14:creationId xmlns:p14="http://schemas.microsoft.com/office/powerpoint/2010/main" val="2054431231"/>
+        <p14:creationId xmlns:p14="http://schemas.microsoft.com/office/powerpoint/2010/main" val="270178177"/>
       </p:ext>
     </p:extLst>
   </p:cSld>
@@ -5007,7 +5007,7 @@
           <p:cNvPr id="2" name="TextBox 1">
             <a:extLst xmlns:a="http://schemas.openxmlformats.org/drawingml/2006/main">
               <a:ext uri="{FF2B5EF4-FFF2-40B4-BE49-F238E27FC236}">
-                <a16:creationId xmlns:a16="http://schemas.microsoft.com/office/drawing/2014/main" id="{3F78AC78-E5F3-4043-88A0-95458BF4AAB3}"/>
+                <a16:creationId xmlns:a16="http://schemas.microsoft.com/office/drawing/2014/main" id="{DC67C227-31BA-4005-9023-A98F7C169DED}"/>
               </a:ext>
             </a:extLst>
           </p:cNvPr>
@@ -5054,7 +5054,7 @@
           <p:cNvPr id="3" name="TextBox 2">
             <a:extLst xmlns:a="http://schemas.openxmlformats.org/drawingml/2006/main">
               <a:ext uri="{FF2B5EF4-FFF2-40B4-BE49-F238E27FC236}">
-                <a16:creationId xmlns:a16="http://schemas.microsoft.com/office/drawing/2014/main" id="{A69ED12D-3D03-4F9C-9CD6-CF9B36C2940D}"/>
+                <a16:creationId xmlns:a16="http://schemas.microsoft.com/office/drawing/2014/main" id="{6B0D2F18-1C55-4474-908D-A03988158693}"/>
               </a:ext>
             </a:extLst>
           </p:cNvPr>
@@ -5101,7 +5101,7 @@
           <p:cNvPr id="4" name="Rectangle 3">
             <a:extLst xmlns:a="http://schemas.openxmlformats.org/drawingml/2006/main">
               <a:ext uri="{FF2B5EF4-FFF2-40B4-BE49-F238E27FC236}">
-                <a16:creationId xmlns:a16="http://schemas.microsoft.com/office/drawing/2014/main" id="{BCC508AE-F1A6-4951-83BD-ACBC651DF2FF}"/>
+                <a16:creationId xmlns:a16="http://schemas.microsoft.com/office/drawing/2014/main" id="{88CA622E-E856-4212-AE95-0835831277E4}"/>
               </a:ext>
             </a:extLst>
           </p:cNvPr>
@@ -5156,7 +5156,7 @@
           <p:cNvPr id="5" name="Rectangle 4">
             <a:extLst xmlns:a="http://schemas.openxmlformats.org/drawingml/2006/main">
               <a:ext uri="{FF2B5EF4-FFF2-40B4-BE49-F238E27FC236}">
-                <a16:creationId xmlns:a16="http://schemas.microsoft.com/office/drawing/2014/main" id="{EA3EBC36-0F6C-489A-9E99-A8E0AAA88052}"/>
+                <a16:creationId xmlns:a16="http://schemas.microsoft.com/office/drawing/2014/main" id="{470865D5-302B-406A-B3C8-3C6AD166547D}"/>
               </a:ext>
             </a:extLst>
           </p:cNvPr>
@@ -5211,7 +5211,7 @@
           <p:cNvPr id="6" name="TextBox 5">
             <a:extLst xmlns:a="http://schemas.openxmlformats.org/drawingml/2006/main">
               <a:ext uri="{FF2B5EF4-FFF2-40B4-BE49-F238E27FC236}">
-                <a16:creationId xmlns:a16="http://schemas.microsoft.com/office/drawing/2014/main" id="{0B51939A-ECFF-4498-8B06-005D5807C595}"/>
+                <a16:creationId xmlns:a16="http://schemas.microsoft.com/office/drawing/2014/main" id="{D9F66B91-716D-4F63-AC3B-6F25B4AF349B}"/>
               </a:ext>
             </a:extLst>
           </p:cNvPr>
@@ -5248,7 +5248,7 @@
                 <a:ea typeface="Aptos"/>
                 <a:cs typeface="Aptos"/>
               </a:rPr>
-              <a:t>Independent public evidence summary · 2026.07.23-13 · 2026-07-22 · Sources: EPO; Germany — official judgments; WIPO</a:t>
+              <a:t>Independent public evidence summary · 2026.07.23-14 · 2026-07-22 · Sources: EPO; Germany — official judgments; WIPO</a:t>
             </a:r>
           </a:p>
         </p:txBody>
@@ -5258,7 +5258,7 @@
           <p:cNvPr id="7" name="TextBox 6">
             <a:extLst xmlns:a="http://schemas.openxmlformats.org/drawingml/2006/main">
               <a:ext uri="{FF2B5EF4-FFF2-40B4-BE49-F238E27FC236}">
-                <a16:creationId xmlns:a16="http://schemas.microsoft.com/office/drawing/2014/main" id="{8C21D801-BFD6-480A-9935-E5ECD200EFB1}"/>
+                <a16:creationId xmlns:a16="http://schemas.microsoft.com/office/drawing/2014/main" id="{0701AC34-9E29-47AD-836E-982D98E5C441}"/>
               </a:ext>
             </a:extLst>
           </p:cNvPr>
@@ -5305,7 +5305,7 @@
           <p:cNvPr id="8" name="TextBox 7">
             <a:extLst xmlns:a="http://schemas.openxmlformats.org/drawingml/2006/main">
               <a:ext uri="{FF2B5EF4-FFF2-40B4-BE49-F238E27FC236}">
-                <a16:creationId xmlns:a16="http://schemas.microsoft.com/office/drawing/2014/main" id="{0981CCA6-A8F5-4CD4-8402-FC2D34CBE625}"/>
+                <a16:creationId xmlns:a16="http://schemas.microsoft.com/office/drawing/2014/main" id="{78A956B1-0FDB-4E03-96D3-ED61BDEA310C}"/>
               </a:ext>
             </a:extLst>
           </p:cNvPr>
@@ -5352,7 +5352,7 @@
           <p:cNvPr id="9" name="TextBox 8">
             <a:extLst xmlns:a="http://schemas.openxmlformats.org/drawingml/2006/main">
               <a:ext uri="{FF2B5EF4-FFF2-40B4-BE49-F238E27FC236}">
-                <a16:creationId xmlns:a16="http://schemas.microsoft.com/office/drawing/2014/main" id="{4F45AEB1-D72F-4F0B-BD1F-3FE92F670B6C}"/>
+                <a16:creationId xmlns:a16="http://schemas.microsoft.com/office/drawing/2014/main" id="{D2F5D68A-2E94-49F8-9BBC-5677E6292085}"/>
               </a:ext>
             </a:extLst>
           </p:cNvPr>
@@ -5449,7 +5449,7 @@
           <p:cNvPr id="10" name="Rounded Rectangle 9">
             <a:extLst xmlns:a="http://schemas.openxmlformats.org/drawingml/2006/main">
               <a:ext uri="{FF2B5EF4-FFF2-40B4-BE49-F238E27FC236}">
-                <a16:creationId xmlns:a16="http://schemas.microsoft.com/office/drawing/2014/main" id="{B4566C98-113D-4AD3-8043-7A01B90BB9A0}"/>
+                <a16:creationId xmlns:a16="http://schemas.microsoft.com/office/drawing/2014/main" id="{4B2851EE-1BB0-4868-B1A8-4EE465E37EEC}"/>
               </a:ext>
             </a:extLst>
           </p:cNvPr>
@@ -5506,7 +5506,7 @@
           <p:cNvPr id="11" name="TextBox 10">
             <a:extLst xmlns:a="http://schemas.openxmlformats.org/drawingml/2006/main">
               <a:ext uri="{FF2B5EF4-FFF2-40B4-BE49-F238E27FC236}">
-                <a16:creationId xmlns:a16="http://schemas.microsoft.com/office/drawing/2014/main" id="{98BC33B7-E07B-447D-8387-EF6188747E94}"/>
+                <a16:creationId xmlns:a16="http://schemas.microsoft.com/office/drawing/2014/main" id="{3E7ACB82-E062-48D6-A08C-0B1EDD8F46B7}"/>
               </a:ext>
             </a:extLst>
           </p:cNvPr>
@@ -5553,7 +5553,7 @@
           <p:cNvPr id="12" name="TextBox 11">
             <a:extLst xmlns:a="http://schemas.openxmlformats.org/drawingml/2006/main">
               <a:ext uri="{FF2B5EF4-FFF2-40B4-BE49-F238E27FC236}">
-                <a16:creationId xmlns:a16="http://schemas.microsoft.com/office/drawing/2014/main" id="{A60F9CB6-C7F9-47F5-BC38-C85F3FD2AF1E}"/>
+                <a16:creationId xmlns:a16="http://schemas.microsoft.com/office/drawing/2014/main" id="{AC384901-CF13-4978-8B59-F8E99087D459}"/>
               </a:ext>
             </a:extLst>
           </p:cNvPr>
@@ -5598,7 +5598,7 @@
     </p:spTree>
     <p:extLst>
       <p:ext uri="{BB962C8B-B14F-4D97-AF65-F5344CB8AC3E}">
-        <p14:creationId xmlns:p14="http://schemas.microsoft.com/office/powerpoint/2010/main" val="1104369166"/>
+        <p14:creationId xmlns:p14="http://schemas.microsoft.com/office/powerpoint/2010/main" val="1953832549"/>
       </p:ext>
     </p:extLst>
   </p:cSld>
@@ -5622,7 +5622,7 @@
           <p:cNvPr id="2" name="TextBox 1">
             <a:extLst xmlns:a="http://schemas.openxmlformats.org/drawingml/2006/main">
               <a:ext uri="{FF2B5EF4-FFF2-40B4-BE49-F238E27FC236}">
-                <a16:creationId xmlns:a16="http://schemas.microsoft.com/office/drawing/2014/main" id="{D42A98E1-30F5-45EE-B5D6-E897E58942FF}"/>
+                <a16:creationId xmlns:a16="http://schemas.microsoft.com/office/drawing/2014/main" id="{F39B0505-57FB-427F-8F23-140DA331D69C}"/>
               </a:ext>
             </a:extLst>
           </p:cNvPr>
@@ -5669,7 +5669,7 @@
           <p:cNvPr id="3" name="TextBox 2">
             <a:extLst xmlns:a="http://schemas.openxmlformats.org/drawingml/2006/main">
               <a:ext uri="{FF2B5EF4-FFF2-40B4-BE49-F238E27FC236}">
-                <a16:creationId xmlns:a16="http://schemas.microsoft.com/office/drawing/2014/main" id="{7CCBD263-5834-499E-A7F8-658732ABA455}"/>
+                <a16:creationId xmlns:a16="http://schemas.microsoft.com/office/drawing/2014/main" id="{021AA4AD-76F3-4377-BFB1-7CB7EA61DC3A}"/>
               </a:ext>
             </a:extLst>
           </p:cNvPr>
@@ -5716,7 +5716,7 @@
           <p:cNvPr id="4" name="Rectangle 3">
             <a:extLst xmlns:a="http://schemas.openxmlformats.org/drawingml/2006/main">
               <a:ext uri="{FF2B5EF4-FFF2-40B4-BE49-F238E27FC236}">
-                <a16:creationId xmlns:a16="http://schemas.microsoft.com/office/drawing/2014/main" id="{A2DDAE15-14BC-4E63-8E89-3A3504CCCB7D}"/>
+                <a16:creationId xmlns:a16="http://schemas.microsoft.com/office/drawing/2014/main" id="{46A4C0B2-383E-423E-AA11-BFDD1D382180}"/>
               </a:ext>
             </a:extLst>
           </p:cNvPr>
@@ -5771,7 +5771,7 @@
           <p:cNvPr id="5" name="Rectangle 4">
             <a:extLst xmlns:a="http://schemas.openxmlformats.org/drawingml/2006/main">
               <a:ext uri="{FF2B5EF4-FFF2-40B4-BE49-F238E27FC236}">
-                <a16:creationId xmlns:a16="http://schemas.microsoft.com/office/drawing/2014/main" id="{91626ECC-6A54-4828-9335-00E792D8EEEA}"/>
+                <a16:creationId xmlns:a16="http://schemas.microsoft.com/office/drawing/2014/main" id="{22F7D311-26DF-4662-AFFD-C0C7E5B92BD1}"/>
               </a:ext>
             </a:extLst>
           </p:cNvPr>
@@ -5826,7 +5826,7 @@
           <p:cNvPr id="6" name="TextBox 5">
             <a:extLst xmlns:a="http://schemas.openxmlformats.org/drawingml/2006/main">
               <a:ext uri="{FF2B5EF4-FFF2-40B4-BE49-F238E27FC236}">
-                <a16:creationId xmlns:a16="http://schemas.microsoft.com/office/drawing/2014/main" id="{54438A4D-45D1-4624-B977-7226836507FB}"/>
+                <a16:creationId xmlns:a16="http://schemas.microsoft.com/office/drawing/2014/main" id="{2B1C6389-475A-4463-8199-E39E6A06385D}"/>
               </a:ext>
             </a:extLst>
           </p:cNvPr>
@@ -5863,7 +5863,7 @@
                 <a:ea typeface="Aptos"/>
                 <a:cs typeface="Aptos"/>
               </a:rPr>
-              <a:t>Independent public evidence summary · 2026.07.23-13 · 2026-07-22 · Sources: EPO Register; EP3032975B2; 8 Ni 18/24 (EP); 7 O 3341/24</a:t>
+              <a:t>Independent public evidence summary · 2026.07.23-14 · 2026-07-22 · Sources: EPO Register; EP3032975B2; 8 Ni 18/24 (EP); 7 O 3341/24</a:t>
             </a:r>
           </a:p>
         </p:txBody>
@@ -5873,7 +5873,7 @@
           <p:cNvPr id="7" name="TextBox 6">
             <a:extLst xmlns:a="http://schemas.openxmlformats.org/drawingml/2006/main">
               <a:ext uri="{FF2B5EF4-FFF2-40B4-BE49-F238E27FC236}">
-                <a16:creationId xmlns:a16="http://schemas.microsoft.com/office/drawing/2014/main" id="{56705689-67CA-4BAE-BDAA-2229B094793D}"/>
+                <a16:creationId xmlns:a16="http://schemas.microsoft.com/office/drawing/2014/main" id="{DDBDD68B-CB8F-4C50-9853-33878646730B}"/>
               </a:ext>
             </a:extLst>
           </p:cNvPr>
@@ -5920,7 +5920,7 @@
           <p:cNvPr id="8" name="Rounded Rectangle 7">
             <a:extLst xmlns:a="http://schemas.openxmlformats.org/drawingml/2006/main">
               <a:ext uri="{FF2B5EF4-FFF2-40B4-BE49-F238E27FC236}">
-                <a16:creationId xmlns:a16="http://schemas.microsoft.com/office/drawing/2014/main" id="{2ADBB07F-2789-4B6B-B1BF-B3C6E110AC54}"/>
+                <a16:creationId xmlns:a16="http://schemas.microsoft.com/office/drawing/2014/main" id="{D96C5DF8-CDD9-4865-82B2-22CF6ECB8F89}"/>
               </a:ext>
             </a:extLst>
           </p:cNvPr>
@@ -5977,7 +5977,7 @@
           <p:cNvPr id="9" name="TextBox 8">
             <a:extLst xmlns:a="http://schemas.openxmlformats.org/drawingml/2006/main">
               <a:ext uri="{FF2B5EF4-FFF2-40B4-BE49-F238E27FC236}">
-                <a16:creationId xmlns:a16="http://schemas.microsoft.com/office/drawing/2014/main" id="{192E45DF-2B14-45E9-A30B-593A83F7C77B}"/>
+                <a16:creationId xmlns:a16="http://schemas.microsoft.com/office/drawing/2014/main" id="{A8F66F57-D219-4D12-9F71-AAD22CDC6882}"/>
               </a:ext>
             </a:extLst>
           </p:cNvPr>
@@ -6024,7 +6024,7 @@
           <p:cNvPr id="10" name="TextBox 9">
             <a:extLst xmlns:a="http://schemas.openxmlformats.org/drawingml/2006/main">
               <a:ext uri="{FF2B5EF4-FFF2-40B4-BE49-F238E27FC236}">
-                <a16:creationId xmlns:a16="http://schemas.microsoft.com/office/drawing/2014/main" id="{F253A90E-47A5-4D24-9B8E-F36626E5CEEB}"/>
+                <a16:creationId xmlns:a16="http://schemas.microsoft.com/office/drawing/2014/main" id="{A0AC7041-2B8D-4EEB-94C3-A3B634B679FF}"/>
               </a:ext>
             </a:extLst>
           </p:cNvPr>
@@ -6071,7 +6071,7 @@
           <p:cNvPr id="11" name="Rounded Rectangle 10">
             <a:extLst xmlns:a="http://schemas.openxmlformats.org/drawingml/2006/main">
               <a:ext uri="{FF2B5EF4-FFF2-40B4-BE49-F238E27FC236}">
-                <a16:creationId xmlns:a16="http://schemas.microsoft.com/office/drawing/2014/main" id="{DB33ADB4-E37F-4BCE-A4F1-D9FA9EBF6B39}"/>
+                <a16:creationId xmlns:a16="http://schemas.microsoft.com/office/drawing/2014/main" id="{88302AB0-89A8-4715-9BC1-687AF35C8ACB}"/>
               </a:ext>
             </a:extLst>
           </p:cNvPr>
@@ -6128,7 +6128,7 @@
           <p:cNvPr id="12" name="TextBox 11">
             <a:extLst xmlns:a="http://schemas.openxmlformats.org/drawingml/2006/main">
               <a:ext uri="{FF2B5EF4-FFF2-40B4-BE49-F238E27FC236}">
-                <a16:creationId xmlns:a16="http://schemas.microsoft.com/office/drawing/2014/main" id="{ABAA75DB-74D7-483F-83A1-82F87F895E2B}"/>
+                <a16:creationId xmlns:a16="http://schemas.microsoft.com/office/drawing/2014/main" id="{0546F975-A99A-4252-B0EF-47D5A4B1589D}"/>
               </a:ext>
             </a:extLst>
           </p:cNvPr>
@@ -6175,7 +6175,7 @@
           <p:cNvPr id="13" name="TextBox 12">
             <a:extLst xmlns:a="http://schemas.openxmlformats.org/drawingml/2006/main">
               <a:ext uri="{FF2B5EF4-FFF2-40B4-BE49-F238E27FC236}">
-                <a16:creationId xmlns:a16="http://schemas.microsoft.com/office/drawing/2014/main" id="{9AC27EA2-7A83-454D-886A-F3332AB4FF02}"/>
+                <a16:creationId xmlns:a16="http://schemas.microsoft.com/office/drawing/2014/main" id="{7DFCA68F-9FEC-4076-88BB-08BB029550AD}"/>
               </a:ext>
             </a:extLst>
           </p:cNvPr>
@@ -6222,7 +6222,7 @@
           <p:cNvPr id="14" name="Rounded Rectangle 13">
             <a:extLst xmlns:a="http://schemas.openxmlformats.org/drawingml/2006/main">
               <a:ext uri="{FF2B5EF4-FFF2-40B4-BE49-F238E27FC236}">
-                <a16:creationId xmlns:a16="http://schemas.microsoft.com/office/drawing/2014/main" id="{8ACA4972-3483-489D-A989-572285D9F5F2}"/>
+                <a16:creationId xmlns:a16="http://schemas.microsoft.com/office/drawing/2014/main" id="{2083131B-2B2C-41D7-960D-5FA390D58702}"/>
               </a:ext>
             </a:extLst>
           </p:cNvPr>
@@ -6279,7 +6279,7 @@
           <p:cNvPr id="15" name="TextBox 14">
             <a:extLst xmlns:a="http://schemas.openxmlformats.org/drawingml/2006/main">
               <a:ext uri="{FF2B5EF4-FFF2-40B4-BE49-F238E27FC236}">
-                <a16:creationId xmlns:a16="http://schemas.microsoft.com/office/drawing/2014/main" id="{E3B1F5E2-4CAD-4F78-B2A4-290DB45A5F1E}"/>
+                <a16:creationId xmlns:a16="http://schemas.microsoft.com/office/drawing/2014/main" id="{1DBA44E3-7B1B-4AF8-AB0A-CFC0664E8391}"/>
               </a:ext>
             </a:extLst>
           </p:cNvPr>
@@ -6326,7 +6326,7 @@
           <p:cNvPr id="16" name="TextBox 15">
             <a:extLst xmlns:a="http://schemas.openxmlformats.org/drawingml/2006/main">
               <a:ext uri="{FF2B5EF4-FFF2-40B4-BE49-F238E27FC236}">
-                <a16:creationId xmlns:a16="http://schemas.microsoft.com/office/drawing/2014/main" id="{AAAE6087-A3B5-4756-8DD3-ECDA5FE49E4B}"/>
+                <a16:creationId xmlns:a16="http://schemas.microsoft.com/office/drawing/2014/main" id="{84537DE6-B8B0-4810-AF58-46F8E71FA475}"/>
               </a:ext>
             </a:extLst>
           </p:cNvPr>
@@ -6373,7 +6373,7 @@
           <p:cNvPr id="17" name="TextBox 16">
             <a:extLst xmlns:a="http://schemas.openxmlformats.org/drawingml/2006/main">
               <a:ext uri="{FF2B5EF4-FFF2-40B4-BE49-F238E27FC236}">
-                <a16:creationId xmlns:a16="http://schemas.microsoft.com/office/drawing/2014/main" id="{085C339B-9CE9-44A9-B982-216DA9663A21}"/>
+                <a16:creationId xmlns:a16="http://schemas.microsoft.com/office/drawing/2014/main" id="{48B4139B-9A8D-41F4-85E5-D8A5EBE03E53}"/>
               </a:ext>
             </a:extLst>
           </p:cNvPr>
@@ -6420,7 +6420,7 @@
           <p:cNvPr id="18" name="Rounded Rectangle 17">
             <a:extLst xmlns:a="http://schemas.openxmlformats.org/drawingml/2006/main">
               <a:ext uri="{FF2B5EF4-FFF2-40B4-BE49-F238E27FC236}">
-                <a16:creationId xmlns:a16="http://schemas.microsoft.com/office/drawing/2014/main" id="{CA1F774D-CC19-4393-9812-728B51B54778}"/>
+                <a16:creationId xmlns:a16="http://schemas.microsoft.com/office/drawing/2014/main" id="{6B07F1B5-B30E-456A-9AC0-55CADB08D9C8}"/>
               </a:ext>
             </a:extLst>
           </p:cNvPr>
@@ -6477,7 +6477,7 @@
           <p:cNvPr id="19" name="TextBox 18">
             <a:extLst xmlns:a="http://schemas.openxmlformats.org/drawingml/2006/main">
               <a:ext uri="{FF2B5EF4-FFF2-40B4-BE49-F238E27FC236}">
-                <a16:creationId xmlns:a16="http://schemas.microsoft.com/office/drawing/2014/main" id="{C85B7017-1251-420B-810C-172CB984478D}"/>
+                <a16:creationId xmlns:a16="http://schemas.microsoft.com/office/drawing/2014/main" id="{07B17E2C-6EB6-490D-BDC0-F05E764B23AF}"/>
               </a:ext>
             </a:extLst>
           </p:cNvPr>
@@ -6524,7 +6524,7 @@
           <p:cNvPr id="20" name="TextBox 19">
             <a:extLst xmlns:a="http://schemas.openxmlformats.org/drawingml/2006/main">
               <a:ext uri="{FF2B5EF4-FFF2-40B4-BE49-F238E27FC236}">
-                <a16:creationId xmlns:a16="http://schemas.microsoft.com/office/drawing/2014/main" id="{B5DBC9CA-9248-427C-B6A9-4A8C176648C7}"/>
+                <a16:creationId xmlns:a16="http://schemas.microsoft.com/office/drawing/2014/main" id="{6396ABC6-B647-4427-B7C6-1A0684699455}"/>
               </a:ext>
             </a:extLst>
           </p:cNvPr>
@@ -6569,7 +6569,7 @@
     </p:spTree>
     <p:extLst>
       <p:ext uri="{BB962C8B-B14F-4D97-AF65-F5344CB8AC3E}">
-        <p14:creationId xmlns:p14="http://schemas.microsoft.com/office/powerpoint/2010/main" val="556852532"/>
+        <p14:creationId xmlns:p14="http://schemas.microsoft.com/office/powerpoint/2010/main" val="636439170"/>
       </p:ext>
     </p:extLst>
   </p:cSld>
@@ -6593,7 +6593,7 @@
           <p:cNvPr id="2" name="TextBox 1">
             <a:extLst xmlns:a="http://schemas.openxmlformats.org/drawingml/2006/main">
               <a:ext uri="{FF2B5EF4-FFF2-40B4-BE49-F238E27FC236}">
-                <a16:creationId xmlns:a16="http://schemas.microsoft.com/office/drawing/2014/main" id="{815C70B7-74D8-41C8-B965-3B086D14AD58}"/>
+                <a16:creationId xmlns:a16="http://schemas.microsoft.com/office/drawing/2014/main" id="{6E88AAF1-3C71-4D14-94DD-8A61A98071A6}"/>
               </a:ext>
             </a:extLst>
           </p:cNvPr>
@@ -6640,7 +6640,7 @@
           <p:cNvPr id="3" name="TextBox 2">
             <a:extLst xmlns:a="http://schemas.openxmlformats.org/drawingml/2006/main">
               <a:ext uri="{FF2B5EF4-FFF2-40B4-BE49-F238E27FC236}">
-                <a16:creationId xmlns:a16="http://schemas.microsoft.com/office/drawing/2014/main" id="{D0D741ED-BEE7-411A-BA91-0AB6DC0C1BFA}"/>
+                <a16:creationId xmlns:a16="http://schemas.microsoft.com/office/drawing/2014/main" id="{F35A0DBD-E395-43F2-83D3-219C9F647AC2}"/>
               </a:ext>
             </a:extLst>
           </p:cNvPr>
@@ -6687,7 +6687,7 @@
           <p:cNvPr id="4" name="Rectangle 3">
             <a:extLst xmlns:a="http://schemas.openxmlformats.org/drawingml/2006/main">
               <a:ext uri="{FF2B5EF4-FFF2-40B4-BE49-F238E27FC236}">
-                <a16:creationId xmlns:a16="http://schemas.microsoft.com/office/drawing/2014/main" id="{1B796005-71A3-40AA-BF7D-87E43B730AD0}"/>
+                <a16:creationId xmlns:a16="http://schemas.microsoft.com/office/drawing/2014/main" id="{432FD948-E799-46A4-A39B-A8ECCE2782F8}"/>
               </a:ext>
             </a:extLst>
           </p:cNvPr>
@@ -6742,7 +6742,7 @@
           <p:cNvPr id="5" name="Rectangle 4">
             <a:extLst xmlns:a="http://schemas.openxmlformats.org/drawingml/2006/main">
               <a:ext uri="{FF2B5EF4-FFF2-40B4-BE49-F238E27FC236}">
-                <a16:creationId xmlns:a16="http://schemas.microsoft.com/office/drawing/2014/main" id="{4C5C5F7C-13F4-4D15-9E6C-1103AE98545A}"/>
+                <a16:creationId xmlns:a16="http://schemas.microsoft.com/office/drawing/2014/main" id="{1FC81528-FCFD-45EE-A091-84FD7F0770B7}"/>
               </a:ext>
             </a:extLst>
           </p:cNvPr>
@@ -6797,7 +6797,7 @@
           <p:cNvPr id="6" name="TextBox 5">
             <a:extLst xmlns:a="http://schemas.openxmlformats.org/drawingml/2006/main">
               <a:ext uri="{FF2B5EF4-FFF2-40B4-BE49-F238E27FC236}">
-                <a16:creationId xmlns:a16="http://schemas.microsoft.com/office/drawing/2014/main" id="{3ED8176B-E985-4C41-969D-0B8F15FDB864}"/>
+                <a16:creationId xmlns:a16="http://schemas.microsoft.com/office/drawing/2014/main" id="{6CADC298-4D3C-4AFB-A0BA-76D9DE744ADE}"/>
               </a:ext>
             </a:extLst>
           </p:cNvPr>
@@ -6834,7 +6834,7 @@
                 <a:ea typeface="Aptos"/>
                 <a:cs typeface="Aptos"/>
               </a:rPr>
-              <a:t>Independent public evidence summary · 2026.07.23-13 · 2026-07-22 · Sources: Health Canada; Destatis; Vero; Sejm; Swedish Government</a:t>
+              <a:t>Independent public evidence summary · 2026.07.23-14 · 2026-07-22 · Sources: Health Canada; Destatis; Vero; Sejm; Swedish Government</a:t>
             </a:r>
           </a:p>
         </p:txBody>
@@ -6844,7 +6844,7 @@
           <p:cNvPr id="7" name="TextBox 6">
             <a:extLst xmlns:a="http://schemas.openxmlformats.org/drawingml/2006/main">
               <a:ext uri="{FF2B5EF4-FFF2-40B4-BE49-F238E27FC236}">
-                <a16:creationId xmlns:a16="http://schemas.microsoft.com/office/drawing/2014/main" id="{9BBA81B3-5ED3-405B-8D23-2EEE2028FCCB}"/>
+                <a16:creationId xmlns:a16="http://schemas.microsoft.com/office/drawing/2014/main" id="{8239CB72-6E6D-45B2-A9F0-3964DEA88C43}"/>
               </a:ext>
             </a:extLst>
           </p:cNvPr>
@@ -6891,7 +6891,7 @@
           <p:cNvPr id="8" name="Rounded Rectangle 7">
             <a:extLst xmlns:a="http://schemas.openxmlformats.org/drawingml/2006/main">
               <a:ext uri="{FF2B5EF4-FFF2-40B4-BE49-F238E27FC236}">
-                <a16:creationId xmlns:a16="http://schemas.microsoft.com/office/drawing/2014/main" id="{E7169650-2CEE-4F3D-833A-8F521F10E321}"/>
+                <a16:creationId xmlns:a16="http://schemas.microsoft.com/office/drawing/2014/main" id="{AADC8F97-788E-4C77-AC4E-6FE3AA608478}"/>
               </a:ext>
             </a:extLst>
           </p:cNvPr>
@@ -6948,7 +6948,7 @@
           <p:cNvPr id="9" name="TextBox 8">
             <a:extLst xmlns:a="http://schemas.openxmlformats.org/drawingml/2006/main">
               <a:ext uri="{FF2B5EF4-FFF2-40B4-BE49-F238E27FC236}">
-                <a16:creationId xmlns:a16="http://schemas.microsoft.com/office/drawing/2014/main" id="{9A1DBF0D-7811-446D-9D06-880E5A8BC720}"/>
+                <a16:creationId xmlns:a16="http://schemas.microsoft.com/office/drawing/2014/main" id="{EFBFE9DF-FDFD-4569-ADAF-1750C383EDC7}"/>
               </a:ext>
             </a:extLst>
           </p:cNvPr>
@@ -6995,7 +6995,7 @@
           <p:cNvPr id="10" name="TextBox 9">
             <a:extLst xmlns:a="http://schemas.openxmlformats.org/drawingml/2006/main">
               <a:ext uri="{FF2B5EF4-FFF2-40B4-BE49-F238E27FC236}">
-                <a16:creationId xmlns:a16="http://schemas.microsoft.com/office/drawing/2014/main" id="{0701DDE5-EF58-48A4-BFF1-76F0FBE311C6}"/>
+                <a16:creationId xmlns:a16="http://schemas.microsoft.com/office/drawing/2014/main" id="{66E5B7FE-9B64-4304-A1BA-F4F3A17DC950}"/>
               </a:ext>
             </a:extLst>
           </p:cNvPr>
@@ -7042,7 +7042,7 @@
           <p:cNvPr id="11" name="Rounded Rectangle 10">
             <a:extLst xmlns:a="http://schemas.openxmlformats.org/drawingml/2006/main">
               <a:ext uri="{FF2B5EF4-FFF2-40B4-BE49-F238E27FC236}">
-                <a16:creationId xmlns:a16="http://schemas.microsoft.com/office/drawing/2014/main" id="{6DC40125-EC32-4741-8B18-2B648F3CBA0F}"/>
+                <a16:creationId xmlns:a16="http://schemas.microsoft.com/office/drawing/2014/main" id="{419B278C-9535-465A-9F6E-9BD680F55A41}"/>
               </a:ext>
             </a:extLst>
           </p:cNvPr>
@@ -7099,7 +7099,7 @@
           <p:cNvPr id="12" name="TextBox 11">
             <a:extLst xmlns:a="http://schemas.openxmlformats.org/drawingml/2006/main">
               <a:ext uri="{FF2B5EF4-FFF2-40B4-BE49-F238E27FC236}">
-                <a16:creationId xmlns:a16="http://schemas.microsoft.com/office/drawing/2014/main" id="{FB4756FE-238E-4F00-B97F-D868C55217AE}"/>
+                <a16:creationId xmlns:a16="http://schemas.microsoft.com/office/drawing/2014/main" id="{69E8CDC8-6034-4C57-B4E4-2BDC8A403A07}"/>
               </a:ext>
             </a:extLst>
           </p:cNvPr>
@@ -7146,7 +7146,7 @@
           <p:cNvPr id="13" name="TextBox 12">
             <a:extLst xmlns:a="http://schemas.openxmlformats.org/drawingml/2006/main">
               <a:ext uri="{FF2B5EF4-FFF2-40B4-BE49-F238E27FC236}">
-                <a16:creationId xmlns:a16="http://schemas.microsoft.com/office/drawing/2014/main" id="{C4B11368-4914-42EE-8A67-4A29BF49007D}"/>
+                <a16:creationId xmlns:a16="http://schemas.microsoft.com/office/drawing/2014/main" id="{625D087F-224D-49A3-872A-B96D6B0F802C}"/>
               </a:ext>
             </a:extLst>
           </p:cNvPr>
@@ -7193,7 +7193,7 @@
           <p:cNvPr id="14" name="Rounded Rectangle 13">
             <a:extLst xmlns:a="http://schemas.openxmlformats.org/drawingml/2006/main">
               <a:ext uri="{FF2B5EF4-FFF2-40B4-BE49-F238E27FC236}">
-                <a16:creationId xmlns:a16="http://schemas.microsoft.com/office/drawing/2014/main" id="{857AF993-6FE4-43B9-BA01-89DF20E8868D}"/>
+                <a16:creationId xmlns:a16="http://schemas.microsoft.com/office/drawing/2014/main" id="{E36DED0B-F0F0-46C9-80C1-36BA82879210}"/>
               </a:ext>
             </a:extLst>
           </p:cNvPr>
@@ -7250,7 +7250,7 @@
           <p:cNvPr id="15" name="TextBox 14">
             <a:extLst xmlns:a="http://schemas.openxmlformats.org/drawingml/2006/main">
               <a:ext uri="{FF2B5EF4-FFF2-40B4-BE49-F238E27FC236}">
-                <a16:creationId xmlns:a16="http://schemas.microsoft.com/office/drawing/2014/main" id="{99CBCF59-E765-4A43-B26D-8785F5532520}"/>
+                <a16:creationId xmlns:a16="http://schemas.microsoft.com/office/drawing/2014/main" id="{18E26B8B-C598-44E2-B550-0A829F6B551A}"/>
               </a:ext>
             </a:extLst>
           </p:cNvPr>
@@ -7297,7 +7297,7 @@
           <p:cNvPr id="16" name="TextBox 15">
             <a:extLst xmlns:a="http://schemas.openxmlformats.org/drawingml/2006/main">
               <a:ext uri="{FF2B5EF4-FFF2-40B4-BE49-F238E27FC236}">
-                <a16:creationId xmlns:a16="http://schemas.microsoft.com/office/drawing/2014/main" id="{F6330BE1-F5BB-4528-A3A6-394D469B91F1}"/>
+                <a16:creationId xmlns:a16="http://schemas.microsoft.com/office/drawing/2014/main" id="{A9DE27D2-4E94-4624-8EF5-3DF213DE2142}"/>
               </a:ext>
             </a:extLst>
           </p:cNvPr>
@@ -7344,7 +7344,7 @@
           <p:cNvPr id="17" name="TextBox 16">
             <a:extLst xmlns:a="http://schemas.openxmlformats.org/drawingml/2006/main">
               <a:ext uri="{FF2B5EF4-FFF2-40B4-BE49-F238E27FC236}">
-                <a16:creationId xmlns:a16="http://schemas.microsoft.com/office/drawing/2014/main" id="{CBE87C5C-8A92-49A8-A971-C1C9A13EBB5C}"/>
+                <a16:creationId xmlns:a16="http://schemas.microsoft.com/office/drawing/2014/main" id="{2934B6CA-D080-4BBB-8276-258217F2E33F}"/>
               </a:ext>
             </a:extLst>
           </p:cNvPr>
@@ -7391,7 +7391,7 @@
           <p:cNvPr id="18" name="Rounded Rectangle 17">
             <a:extLst xmlns:a="http://schemas.openxmlformats.org/drawingml/2006/main">
               <a:ext uri="{FF2B5EF4-FFF2-40B4-BE49-F238E27FC236}">
-                <a16:creationId xmlns:a16="http://schemas.microsoft.com/office/drawing/2014/main" id="{A3040436-59B2-4ED3-8442-4BEFCF37C52D}"/>
+                <a16:creationId xmlns:a16="http://schemas.microsoft.com/office/drawing/2014/main" id="{29B4DDC9-E93D-463B-ACD5-845DF194266A}"/>
               </a:ext>
             </a:extLst>
           </p:cNvPr>
@@ -7448,7 +7448,7 @@
           <p:cNvPr id="19" name="TextBox 18">
             <a:extLst xmlns:a="http://schemas.openxmlformats.org/drawingml/2006/main">
               <a:ext uri="{FF2B5EF4-FFF2-40B4-BE49-F238E27FC236}">
-                <a16:creationId xmlns:a16="http://schemas.microsoft.com/office/drawing/2014/main" id="{DFF9D598-40DE-43E4-99D4-80099F63BD23}"/>
+                <a16:creationId xmlns:a16="http://schemas.microsoft.com/office/drawing/2014/main" id="{D4B22E67-A601-4AF4-B7CB-47FAC065C424}"/>
               </a:ext>
             </a:extLst>
           </p:cNvPr>
@@ -7495,7 +7495,7 @@
           <p:cNvPr id="20" name="TextBox 19">
             <a:extLst xmlns:a="http://schemas.openxmlformats.org/drawingml/2006/main">
               <a:ext uri="{FF2B5EF4-FFF2-40B4-BE49-F238E27FC236}">
-                <a16:creationId xmlns:a16="http://schemas.microsoft.com/office/drawing/2014/main" id="{8B78D021-CB6F-4C42-96E7-F5DE4B8CBA6B}"/>
+                <a16:creationId xmlns:a16="http://schemas.microsoft.com/office/drawing/2014/main" id="{3D9DE68C-12AB-45FF-8884-9D378BF362B7}"/>
               </a:ext>
             </a:extLst>
           </p:cNvPr>
@@ -7540,7 +7540,7 @@
     </p:spTree>
     <p:extLst>
       <p:ext uri="{BB962C8B-B14F-4D97-AF65-F5344CB8AC3E}">
-        <p14:creationId xmlns:p14="http://schemas.microsoft.com/office/powerpoint/2010/main" val="1606442365"/>
+        <p14:creationId xmlns:p14="http://schemas.microsoft.com/office/powerpoint/2010/main" val="1490455825"/>
       </p:ext>
     </p:extLst>
   </p:cSld>
@@ -7564,7 +7564,7 @@
           <p:cNvPr id="2" name="TextBox 1">
             <a:extLst xmlns:a="http://schemas.openxmlformats.org/drawingml/2006/main">
               <a:ext uri="{FF2B5EF4-FFF2-40B4-BE49-F238E27FC236}">
-                <a16:creationId xmlns:a16="http://schemas.microsoft.com/office/drawing/2014/main" id="{8FFC58DF-7445-455B-8C4D-23D1A66C365A}"/>
+                <a16:creationId xmlns:a16="http://schemas.microsoft.com/office/drawing/2014/main" id="{527E269F-4DE9-4184-8FDA-68817049AB06}"/>
               </a:ext>
             </a:extLst>
           </p:cNvPr>
@@ -7611,7 +7611,7 @@
           <p:cNvPr id="3" name="TextBox 2">
             <a:extLst xmlns:a="http://schemas.openxmlformats.org/drawingml/2006/main">
               <a:ext uri="{FF2B5EF4-FFF2-40B4-BE49-F238E27FC236}">
-                <a16:creationId xmlns:a16="http://schemas.microsoft.com/office/drawing/2014/main" id="{C9782C40-C992-4E46-BF76-C268AAB1F3F1}"/>
+                <a16:creationId xmlns:a16="http://schemas.microsoft.com/office/drawing/2014/main" id="{3C180E8D-BCF9-4190-8064-1C838C39A9F0}"/>
               </a:ext>
             </a:extLst>
           </p:cNvPr>
@@ -7658,7 +7658,7 @@
           <p:cNvPr id="4" name="Rectangle 3">
             <a:extLst xmlns:a="http://schemas.openxmlformats.org/drawingml/2006/main">
               <a:ext uri="{FF2B5EF4-FFF2-40B4-BE49-F238E27FC236}">
-                <a16:creationId xmlns:a16="http://schemas.microsoft.com/office/drawing/2014/main" id="{F96D1132-F820-41A0-9E98-AEFCD1CFB4BF}"/>
+                <a16:creationId xmlns:a16="http://schemas.microsoft.com/office/drawing/2014/main" id="{47E37C94-A2C8-465E-9864-79453DFDB2F5}"/>
               </a:ext>
             </a:extLst>
           </p:cNvPr>
@@ -7713,7 +7713,7 @@
           <p:cNvPr id="5" name="Rectangle 4">
             <a:extLst xmlns:a="http://schemas.openxmlformats.org/drawingml/2006/main">
               <a:ext uri="{FF2B5EF4-FFF2-40B4-BE49-F238E27FC236}">
-                <a16:creationId xmlns:a16="http://schemas.microsoft.com/office/drawing/2014/main" id="{83288006-60BA-44E1-821E-3E25FBE3DCC1}"/>
+                <a16:creationId xmlns:a16="http://schemas.microsoft.com/office/drawing/2014/main" id="{2B54C041-E39C-4F99-9847-7908B78046E0}"/>
               </a:ext>
             </a:extLst>
           </p:cNvPr>
@@ -7768,7 +7768,7 @@
           <p:cNvPr id="6" name="TextBox 5">
             <a:extLst xmlns:a="http://schemas.openxmlformats.org/drawingml/2006/main">
               <a:ext uri="{FF2B5EF4-FFF2-40B4-BE49-F238E27FC236}">
-                <a16:creationId xmlns:a16="http://schemas.microsoft.com/office/drawing/2014/main" id="{73FF537C-8F7B-4FBA-9C74-601DB9E1EEEF}"/>
+                <a16:creationId xmlns:a16="http://schemas.microsoft.com/office/drawing/2014/main" id="{7184A1EB-A7B5-4A2F-90AD-0965FAD4C164}"/>
               </a:ext>
             </a:extLst>
           </p:cNvPr>
@@ -7805,7 +7805,7 @@
                 <a:ea typeface="Aptos"/>
                 <a:cs typeface="Aptos"/>
               </a:rPr>
-              <a:t>Independent public evidence summary · 2026.07.23-13 · 2026-07-22 · Sources: Evidence Register; WIPO IP valuation</a:t>
+              <a:t>Independent public evidence summary · 2026.07.23-14 · 2026-07-22 · Sources: Evidence Register; WIPO IP valuation</a:t>
             </a:r>
           </a:p>
         </p:txBody>
@@ -7815,7 +7815,7 @@
           <p:cNvPr id="7" name="TextBox 6">
             <a:extLst xmlns:a="http://schemas.openxmlformats.org/drawingml/2006/main">
               <a:ext uri="{FF2B5EF4-FFF2-40B4-BE49-F238E27FC236}">
-                <a16:creationId xmlns:a16="http://schemas.microsoft.com/office/drawing/2014/main" id="{E2E9D7D1-AEC0-4055-A5B9-B1E073549040}"/>
+                <a16:creationId xmlns:a16="http://schemas.microsoft.com/office/drawing/2014/main" id="{DD7DAC11-E4AA-4B5E-9DBF-B886B7D9CA7F}"/>
               </a:ext>
             </a:extLst>
           </p:cNvPr>
@@ -8302,7 +8302,7 @@
           <p:cNvPr id="9" name="TextBox 8">
             <a:extLst xmlns:a="http://schemas.openxmlformats.org/drawingml/2006/main">
               <a:ext uri="{FF2B5EF4-FFF2-40B4-BE49-F238E27FC236}">
-                <a16:creationId xmlns:a16="http://schemas.microsoft.com/office/drawing/2014/main" id="{75BABA1D-13E7-4139-82B3-649561B15515}"/>
+                <a16:creationId xmlns:a16="http://schemas.microsoft.com/office/drawing/2014/main" id="{7DBA80B7-2F20-4503-BB98-1BF24E594112}"/>
               </a:ext>
             </a:extLst>
           </p:cNvPr>
@@ -8347,7 +8347,7 @@
     </p:spTree>
     <p:extLst>
       <p:ext uri="{BB962C8B-B14F-4D97-AF65-F5344CB8AC3E}">
-        <p14:creationId xmlns:p14="http://schemas.microsoft.com/office/powerpoint/2010/main" val="1114363768"/>
+        <p14:creationId xmlns:p14="http://schemas.microsoft.com/office/powerpoint/2010/main" val="1967156752"/>
       </p:ext>
     </p:extLst>
   </p:cSld>
@@ -8378,7 +8378,7 @@
           <p:cNvPr id="2" name="TextBox 1">
             <a:extLst xmlns:a="http://schemas.openxmlformats.org/drawingml/2006/main">
               <a:ext uri="{FF2B5EF4-FFF2-40B4-BE49-F238E27FC236}">
-                <a16:creationId xmlns:a16="http://schemas.microsoft.com/office/drawing/2014/main" id="{76D0F7B8-DB2C-45CB-90BB-F1A58002401B}"/>
+                <a16:creationId xmlns:a16="http://schemas.microsoft.com/office/drawing/2014/main" id="{7B6998D8-CBB8-400F-86A6-5E669E38E672}"/>
               </a:ext>
             </a:extLst>
           </p:cNvPr>
@@ -8425,7 +8425,7 @@
           <p:cNvPr id="3" name="TextBox 2">
             <a:extLst xmlns:a="http://schemas.openxmlformats.org/drawingml/2006/main">
               <a:ext uri="{FF2B5EF4-FFF2-40B4-BE49-F238E27FC236}">
-                <a16:creationId xmlns:a16="http://schemas.microsoft.com/office/drawing/2014/main" id="{5DB57E2C-E343-4649-91D7-DE3A4DD46875}"/>
+                <a16:creationId xmlns:a16="http://schemas.microsoft.com/office/drawing/2014/main" id="{E19873B1-0C4A-4498-BE46-D254B973B8C4}"/>
               </a:ext>
             </a:extLst>
           </p:cNvPr>
@@ -8472,7 +8472,7 @@
           <p:cNvPr id="4" name="TextBox 3">
             <a:extLst xmlns:a="http://schemas.openxmlformats.org/drawingml/2006/main">
               <a:ext uri="{FF2B5EF4-FFF2-40B4-BE49-F238E27FC236}">
-                <a16:creationId xmlns:a16="http://schemas.microsoft.com/office/drawing/2014/main" id="{49004043-4BDB-4724-8889-D6BF7AED0514}"/>
+                <a16:creationId xmlns:a16="http://schemas.microsoft.com/office/drawing/2014/main" id="{68A6B01C-9545-4918-8A52-219C95A28D01}"/>
               </a:ext>
             </a:extLst>
           </p:cNvPr>
@@ -8591,7 +8591,7 @@
           <p:cNvPr id="5" name="TextBox 4">
             <a:extLst xmlns:a="http://schemas.openxmlformats.org/drawingml/2006/main">
               <a:ext uri="{FF2B5EF4-FFF2-40B4-BE49-F238E27FC236}">
-                <a16:creationId xmlns:a16="http://schemas.microsoft.com/office/drawing/2014/main" id="{5BF842A1-ECA2-480D-B845-8D2E87BABD23}"/>
+                <a16:creationId xmlns:a16="http://schemas.microsoft.com/office/drawing/2014/main" id="{1E52F9FC-8BBD-4874-98B8-D9D7BD7E5249}"/>
               </a:ext>
             </a:extLst>
           </p:cNvPr>
@@ -8628,7 +8628,7 @@
                 <a:ea typeface="Aptos"/>
                 <a:cs typeface="Aptos"/>
               </a:rPr>
-              <a:t>Version 2026.07.23-13 · 2026-07-22 · 6 / 6</a:t>
+              <a:t>Version 2026.07.23-14 · 2026-07-22 · 6 / 6</a:t>
             </a:r>
           </a:p>
         </p:txBody>
@@ -8636,7 +8636,7 @@
     </p:spTree>
     <p:extLst>
       <p:ext uri="{BB962C8B-B14F-4D97-AF65-F5344CB8AC3E}">
-        <p14:creationId xmlns:p14="http://schemas.microsoft.com/office/powerpoint/2010/main" val="2130280645"/>
+        <p14:creationId xmlns:p14="http://schemas.microsoft.com/office/powerpoint/2010/main" val="849816381"/>
       </p:ext>
     </p:extLst>
   </p:cSld>

--- a/site/downloads/pixan-bank-deck-short-en.pptx
+++ b/site/downloads/pixan-bank-deck-short-en.pptx
@@ -2,18 +2,18 @@
 <file path=ppt/presentation.xml><?xml version="1.0" encoding="utf-8"?>
 <p:presentation xmlns:p="http://schemas.openxmlformats.org/presentationml/2006/main">
   <p:sldMasterIdLst>
-    <p:sldMasterId xmlns:r="http://schemas.openxmlformats.org/officeDocument/2006/relationships" id="2147483648" r:id="Rc4d5e165336e463d"/>
+    <p:sldMasterId xmlns:r="http://schemas.openxmlformats.org/officeDocument/2006/relationships" id="2147483648" r:id="Rd719dab796ff465a"/>
   </p:sldMasterIdLst>
   <p:notesMasterIdLst>
-    <p:notesMasterId xmlns:r="http://schemas.openxmlformats.org/officeDocument/2006/relationships" r:id="R345200cb73db4b80"/>
+    <p:notesMasterId xmlns:r="http://schemas.openxmlformats.org/officeDocument/2006/relationships" r:id="R48e6b88040e84630"/>
   </p:notesMasterIdLst>
   <p:sldIdLst>
-    <p:sldId xmlns:r="http://schemas.openxmlformats.org/officeDocument/2006/relationships" id="256" r:id="R389b7ac30c084e26"/>
-    <p:sldId xmlns:r="http://schemas.openxmlformats.org/officeDocument/2006/relationships" id="257" r:id="Rad19adac8ea64257"/>
-    <p:sldId xmlns:r="http://schemas.openxmlformats.org/officeDocument/2006/relationships" id="258" r:id="Rfb541299e6d54366"/>
-    <p:sldId xmlns:r="http://schemas.openxmlformats.org/officeDocument/2006/relationships" id="259" r:id="R1b63c0281535424e"/>
-    <p:sldId xmlns:r="http://schemas.openxmlformats.org/officeDocument/2006/relationships" id="260" r:id="R9906e8dac6a6456b"/>
-    <p:sldId xmlns:r="http://schemas.openxmlformats.org/officeDocument/2006/relationships" id="261" r:id="R9fc680b5264c44e0"/>
+    <p:sldId xmlns:r="http://schemas.openxmlformats.org/officeDocument/2006/relationships" id="256" r:id="Rf0fbc980fbfc4362"/>
+    <p:sldId xmlns:r="http://schemas.openxmlformats.org/officeDocument/2006/relationships" id="257" r:id="R124e783b312d4c15"/>
+    <p:sldId xmlns:r="http://schemas.openxmlformats.org/officeDocument/2006/relationships" id="258" r:id="Rd383104d100349d5"/>
+    <p:sldId xmlns:r="http://schemas.openxmlformats.org/officeDocument/2006/relationships" id="259" r:id="Radd1a13871fc442f"/>
+    <p:sldId xmlns:r="http://schemas.openxmlformats.org/officeDocument/2006/relationships" id="260" r:id="R4401f692f56f4ea2"/>
+    <p:sldId xmlns:r="http://schemas.openxmlformats.org/officeDocument/2006/relationships" id="261" r:id="Ref014750f1a842dc"/>
   </p:sldIdLst>
   <p:sldSz cx="12191999" cy="6858000"/>
   <p:notesSz cx="6858000" cy="9144000"/>
@@ -938,7 +938,7 @@
           <p:cNvPr id="2" name="Title 1">
             <a:extLst xmlns:a="http://schemas.openxmlformats.org/drawingml/2006/main">
               <a:ext uri="{FF2B5EF4-FFF2-40B4-BE49-F238E27FC236}">
-                <a16:creationId xmlns:a16="http://schemas.microsoft.com/office/drawing/2014/main" id="{5E16EC90-8F8F-4D27-B28F-0E628CA6EC09}"/>
+                <a16:creationId xmlns:a16="http://schemas.microsoft.com/office/drawing/2014/main" id="{5EB2652D-8843-4B0C-AA7F-B38078FD7F1B}"/>
               </a:ext>
             </a:extLst>
           </p:cNvPr>
@@ -970,7 +970,7 @@
           <p:cNvPr id="3" name="Subtitle 2">
             <a:extLst xmlns:a="http://schemas.openxmlformats.org/drawingml/2006/main">
               <a:ext uri="{FF2B5EF4-FFF2-40B4-BE49-F238E27FC236}">
-                <a16:creationId xmlns:a16="http://schemas.microsoft.com/office/drawing/2014/main" id="{5CBEB437-59A9-4133-AEFF-D44F427AA3B7}"/>
+                <a16:creationId xmlns:a16="http://schemas.microsoft.com/office/drawing/2014/main" id="{E989D6A7-A8E2-4047-BDEE-1318187E7B37}"/>
               </a:ext>
             </a:extLst>
           </p:cNvPr>
@@ -1093,7 +1093,7 @@
           <p:cNvPr id="4" name="Date Placeholder 3">
             <a:extLst xmlns:a="http://schemas.openxmlformats.org/drawingml/2006/main">
               <a:ext uri="{FF2B5EF4-FFF2-40B4-BE49-F238E27FC236}">
-                <a16:creationId xmlns:a16="http://schemas.microsoft.com/office/drawing/2014/main" id="{96E770A2-D011-42E7-AB68-A4922D6545DE}"/>
+                <a16:creationId xmlns:a16="http://schemas.microsoft.com/office/drawing/2014/main" id="{7C360CF2-9C1A-4817-B50C-5800ADFBACF9}"/>
               </a:ext>
             </a:extLst>
           </p:cNvPr>
@@ -1120,7 +1120,7 @@
           <p:cNvPr id="5" name="Footer Placeholder 4">
             <a:extLst xmlns:a="http://schemas.openxmlformats.org/drawingml/2006/main">
               <a:ext uri="{FF2B5EF4-FFF2-40B4-BE49-F238E27FC236}">
-                <a16:creationId xmlns:a16="http://schemas.microsoft.com/office/drawing/2014/main" id="{4F3F6320-94D0-4F1F-82C1-0B111B3A0141}"/>
+                <a16:creationId xmlns:a16="http://schemas.microsoft.com/office/drawing/2014/main" id="{EA07B901-7F6E-4F25-9D05-E1B07E9BF094}"/>
               </a:ext>
             </a:extLst>
           </p:cNvPr>
@@ -1143,7 +1143,7 @@
           <p:cNvPr id="6" name="Slide Number Placeholder 5">
             <a:extLst xmlns:a="http://schemas.openxmlformats.org/drawingml/2006/main">
               <a:ext uri="{FF2B5EF4-FFF2-40B4-BE49-F238E27FC236}">
-                <a16:creationId xmlns:a16="http://schemas.microsoft.com/office/drawing/2014/main" id="{07FDE1BE-26BB-4737-94B6-416191D20434}"/>
+                <a16:creationId xmlns:a16="http://schemas.microsoft.com/office/drawing/2014/main" id="{66DA2D96-1B34-4E0A-845D-47908CF5187F}"/>
               </a:ext>
             </a:extLst>
           </p:cNvPr>
@@ -1187,7 +1187,7 @@
           <p:cNvPr id="2" name="Title 1">
             <a:extLst xmlns:a="http://schemas.openxmlformats.org/drawingml/2006/main">
               <a:ext uri="{FF2B5EF4-FFF2-40B4-BE49-F238E27FC236}">
-                <a16:creationId xmlns:a16="http://schemas.microsoft.com/office/drawing/2014/main" id="{778BB475-C546-472F-9CB9-ABF749C20DE7}"/>
+                <a16:creationId xmlns:a16="http://schemas.microsoft.com/office/drawing/2014/main" id="{4AA4146B-E058-4C3D-A6CD-48A452D3A0A0}"/>
               </a:ext>
             </a:extLst>
           </p:cNvPr>
@@ -1214,7 +1214,7 @@
           <p:cNvPr id="3" name="Vertical Text Placeholder 2">
             <a:extLst xmlns:a="http://schemas.openxmlformats.org/drawingml/2006/main">
               <a:ext uri="{FF2B5EF4-FFF2-40B4-BE49-F238E27FC236}">
-                <a16:creationId xmlns:a16="http://schemas.microsoft.com/office/drawing/2014/main" id="{FDB39FC0-78FE-4B11-B3BC-DE8BC24E34D3}"/>
+                <a16:creationId xmlns:a16="http://schemas.microsoft.com/office/drawing/2014/main" id="{98DD3404-1773-46D6-B0D9-2ED465FC904C}"/>
               </a:ext>
             </a:extLst>
           </p:cNvPr>
@@ -1276,7 +1276,7 @@
           <p:cNvPr id="4" name="Date Placeholder 3">
             <a:extLst xmlns:a="http://schemas.openxmlformats.org/drawingml/2006/main">
               <a:ext uri="{FF2B5EF4-FFF2-40B4-BE49-F238E27FC236}">
-                <a16:creationId xmlns:a16="http://schemas.microsoft.com/office/drawing/2014/main" id="{EA73FEA8-582B-48F9-8EBF-5A72A9292801}"/>
+                <a16:creationId xmlns:a16="http://schemas.microsoft.com/office/drawing/2014/main" id="{C73D37B0-A8E0-404F-AD9C-81029D5222F1}"/>
               </a:ext>
             </a:extLst>
           </p:cNvPr>
@@ -1303,7 +1303,7 @@
           <p:cNvPr id="5" name="Footer Placeholder 4">
             <a:extLst xmlns:a="http://schemas.openxmlformats.org/drawingml/2006/main">
               <a:ext uri="{FF2B5EF4-FFF2-40B4-BE49-F238E27FC236}">
-                <a16:creationId xmlns:a16="http://schemas.microsoft.com/office/drawing/2014/main" id="{44291290-21FE-4182-A117-8128345817EF}"/>
+                <a16:creationId xmlns:a16="http://schemas.microsoft.com/office/drawing/2014/main" id="{9ED56F62-CC86-46E6-8B9D-D30E3A0AA2F2}"/>
               </a:ext>
             </a:extLst>
           </p:cNvPr>
@@ -1326,7 +1326,7 @@
           <p:cNvPr id="6" name="Slide Number Placeholder 5">
             <a:extLst xmlns:a="http://schemas.openxmlformats.org/drawingml/2006/main">
               <a:ext uri="{FF2B5EF4-FFF2-40B4-BE49-F238E27FC236}">
-                <a16:creationId xmlns:a16="http://schemas.microsoft.com/office/drawing/2014/main" id="{C89FC355-165C-4498-83EB-9805D641D733}"/>
+                <a16:creationId xmlns:a16="http://schemas.microsoft.com/office/drawing/2014/main" id="{FBABE2C8-E444-40A6-8E01-4758BB85A21B}"/>
               </a:ext>
             </a:extLst>
           </p:cNvPr>
@@ -1370,7 +1370,7 @@
           <p:cNvPr id="2" name="Vertical Title 1">
             <a:extLst xmlns:a="http://schemas.openxmlformats.org/drawingml/2006/main">
               <a:ext uri="{FF2B5EF4-FFF2-40B4-BE49-F238E27FC236}">
-                <a16:creationId xmlns:a16="http://schemas.microsoft.com/office/drawing/2014/main" id="{755DE445-6EAF-4F3B-94F2-08318E7FEDD8}"/>
+                <a16:creationId xmlns:a16="http://schemas.microsoft.com/office/drawing/2014/main" id="{28F68CAD-8B71-4E48-B068-815B91356B29}"/>
               </a:ext>
             </a:extLst>
           </p:cNvPr>
@@ -1402,7 +1402,7 @@
           <p:cNvPr id="3" name="Vertical Text Placeholder 2">
             <a:extLst xmlns:a="http://schemas.openxmlformats.org/drawingml/2006/main">
               <a:ext uri="{FF2B5EF4-FFF2-40B4-BE49-F238E27FC236}">
-                <a16:creationId xmlns:a16="http://schemas.microsoft.com/office/drawing/2014/main" id="{6B64BC19-CB11-412A-8603-11DF1C611437}"/>
+                <a16:creationId xmlns:a16="http://schemas.microsoft.com/office/drawing/2014/main" id="{A676F59C-05E8-45AD-86A8-44149BD9BB1A}"/>
               </a:ext>
             </a:extLst>
           </p:cNvPr>
@@ -1469,7 +1469,7 @@
           <p:cNvPr id="4" name="Date Placeholder 3">
             <a:extLst xmlns:a="http://schemas.openxmlformats.org/drawingml/2006/main">
               <a:ext uri="{FF2B5EF4-FFF2-40B4-BE49-F238E27FC236}">
-                <a16:creationId xmlns:a16="http://schemas.microsoft.com/office/drawing/2014/main" id="{8B2BFC23-2457-4B3C-93AC-0ED4319FFD70}"/>
+                <a16:creationId xmlns:a16="http://schemas.microsoft.com/office/drawing/2014/main" id="{617840E7-2874-4C41-8B4D-E4DC764AECCD}"/>
               </a:ext>
             </a:extLst>
           </p:cNvPr>
@@ -1496,7 +1496,7 @@
           <p:cNvPr id="5" name="Footer Placeholder 4">
             <a:extLst xmlns:a="http://schemas.openxmlformats.org/drawingml/2006/main">
               <a:ext uri="{FF2B5EF4-FFF2-40B4-BE49-F238E27FC236}">
-                <a16:creationId xmlns:a16="http://schemas.microsoft.com/office/drawing/2014/main" id="{E1F219E0-E010-4C15-A529-DC42C335A432}"/>
+                <a16:creationId xmlns:a16="http://schemas.microsoft.com/office/drawing/2014/main" id="{9CF72118-B1A4-4C91-9906-AD10BCAE15F0}"/>
               </a:ext>
             </a:extLst>
           </p:cNvPr>
@@ -1519,7 +1519,7 @@
           <p:cNvPr id="6" name="Slide Number Placeholder 5">
             <a:extLst xmlns:a="http://schemas.openxmlformats.org/drawingml/2006/main">
               <a:ext uri="{FF2B5EF4-FFF2-40B4-BE49-F238E27FC236}">
-                <a16:creationId xmlns:a16="http://schemas.microsoft.com/office/drawing/2014/main" id="{3A80D715-B97F-47C8-BD66-BB6B0B7359DE}"/>
+                <a16:creationId xmlns:a16="http://schemas.microsoft.com/office/drawing/2014/main" id="{77C2A47E-E933-43ED-B1C5-9DB57FFA943E}"/>
               </a:ext>
             </a:extLst>
           </p:cNvPr>
@@ -1563,7 +1563,7 @@
           <p:cNvPr id="2" name="Title 1">
             <a:extLst xmlns:a="http://schemas.openxmlformats.org/drawingml/2006/main">
               <a:ext uri="{FF2B5EF4-FFF2-40B4-BE49-F238E27FC236}">
-                <a16:creationId xmlns:a16="http://schemas.microsoft.com/office/drawing/2014/main" id="{9C2BC0E6-1817-4F24-ACBC-5D0B06B7E391}"/>
+                <a16:creationId xmlns:a16="http://schemas.microsoft.com/office/drawing/2014/main" id="{F113F344-4B58-4C31-95EB-4F82BC888F69}"/>
               </a:ext>
             </a:extLst>
           </p:cNvPr>
@@ -1590,7 +1590,7 @@
           <p:cNvPr id="3" name="Content Placeholder 2">
             <a:extLst xmlns:a="http://schemas.openxmlformats.org/drawingml/2006/main">
               <a:ext uri="{FF2B5EF4-FFF2-40B4-BE49-F238E27FC236}">
-                <a16:creationId xmlns:a16="http://schemas.microsoft.com/office/drawing/2014/main" id="{41E5811B-7CE3-4894-9A92-773F58BD7496}"/>
+                <a16:creationId xmlns:a16="http://schemas.microsoft.com/office/drawing/2014/main" id="{D8F68E26-97B1-49F9-9773-BE2C5969BDE4}"/>
               </a:ext>
             </a:extLst>
           </p:cNvPr>
@@ -1652,7 +1652,7 @@
           <p:cNvPr id="4" name="Date Placeholder 3">
             <a:extLst xmlns:a="http://schemas.openxmlformats.org/drawingml/2006/main">
               <a:ext uri="{FF2B5EF4-FFF2-40B4-BE49-F238E27FC236}">
-                <a16:creationId xmlns:a16="http://schemas.microsoft.com/office/drawing/2014/main" id="{770AD2DC-B139-4C71-AF34-C24B93B11C60}"/>
+                <a16:creationId xmlns:a16="http://schemas.microsoft.com/office/drawing/2014/main" id="{9D5DF6BE-499B-4F10-9842-6AF9C01BCC0A}"/>
               </a:ext>
             </a:extLst>
           </p:cNvPr>
@@ -1679,7 +1679,7 @@
           <p:cNvPr id="5" name="Footer Placeholder 4">
             <a:extLst xmlns:a="http://schemas.openxmlformats.org/drawingml/2006/main">
               <a:ext uri="{FF2B5EF4-FFF2-40B4-BE49-F238E27FC236}">
-                <a16:creationId xmlns:a16="http://schemas.microsoft.com/office/drawing/2014/main" id="{907F7BBA-9539-4F94-B2BD-2EA92D46BAB3}"/>
+                <a16:creationId xmlns:a16="http://schemas.microsoft.com/office/drawing/2014/main" id="{6508B830-5CDC-4E77-A7F6-9594DB363EAA}"/>
               </a:ext>
             </a:extLst>
           </p:cNvPr>
@@ -1702,7 +1702,7 @@
           <p:cNvPr id="6" name="Slide Number Placeholder 5">
             <a:extLst xmlns:a="http://schemas.openxmlformats.org/drawingml/2006/main">
               <a:ext uri="{FF2B5EF4-FFF2-40B4-BE49-F238E27FC236}">
-                <a16:creationId xmlns:a16="http://schemas.microsoft.com/office/drawing/2014/main" id="{A5773CE0-82A2-4A2A-B14D-7BFF45B90FD7}"/>
+                <a16:creationId xmlns:a16="http://schemas.microsoft.com/office/drawing/2014/main" id="{A5032F53-960E-472F-AE91-99B62EF6EB2F}"/>
               </a:ext>
             </a:extLst>
           </p:cNvPr>
@@ -1746,7 +1746,7 @@
           <p:cNvPr id="2" name="Title 1">
             <a:extLst xmlns:a="http://schemas.openxmlformats.org/drawingml/2006/main">
               <a:ext uri="{FF2B5EF4-FFF2-40B4-BE49-F238E27FC236}">
-                <a16:creationId xmlns:a16="http://schemas.microsoft.com/office/drawing/2014/main" id="{91913D06-1479-401A-9DC1-EAB0878A6BD8}"/>
+                <a16:creationId xmlns:a16="http://schemas.microsoft.com/office/drawing/2014/main" id="{706947C4-CEEC-4F61-B4A7-8CB006EDAD67}"/>
               </a:ext>
             </a:extLst>
           </p:cNvPr>
@@ -1783,7 +1783,7 @@
           <p:cNvPr id="3" name="Text Placeholder 2">
             <a:extLst xmlns:a="http://schemas.openxmlformats.org/drawingml/2006/main">
               <a:ext uri="{FF2B5EF4-FFF2-40B4-BE49-F238E27FC236}">
-                <a16:creationId xmlns:a16="http://schemas.microsoft.com/office/drawing/2014/main" id="{F10045F8-86DF-43DA-939C-F82D034558FF}"/>
+                <a16:creationId xmlns:a16="http://schemas.microsoft.com/office/drawing/2014/main" id="{11BC3044-4FEC-4016-BF1D-FDFD124197EF}"/>
               </a:ext>
             </a:extLst>
           </p:cNvPr>
@@ -1909,7 +1909,7 @@
           <p:cNvPr id="4" name="Date Placeholder 3">
             <a:extLst xmlns:a="http://schemas.openxmlformats.org/drawingml/2006/main">
               <a:ext uri="{FF2B5EF4-FFF2-40B4-BE49-F238E27FC236}">
-                <a16:creationId xmlns:a16="http://schemas.microsoft.com/office/drawing/2014/main" id="{A4CAB58E-D75E-45BB-83EF-3CB33FF3726B}"/>
+                <a16:creationId xmlns:a16="http://schemas.microsoft.com/office/drawing/2014/main" id="{73EF337F-A34B-4DD8-B1B0-6ED2DD4E6208}"/>
               </a:ext>
             </a:extLst>
           </p:cNvPr>
@@ -1936,7 +1936,7 @@
           <p:cNvPr id="5" name="Footer Placeholder 4">
             <a:extLst xmlns:a="http://schemas.openxmlformats.org/drawingml/2006/main">
               <a:ext uri="{FF2B5EF4-FFF2-40B4-BE49-F238E27FC236}">
-                <a16:creationId xmlns:a16="http://schemas.microsoft.com/office/drawing/2014/main" id="{C9387314-E863-4288-B29E-77666C0A7F32}"/>
+                <a16:creationId xmlns:a16="http://schemas.microsoft.com/office/drawing/2014/main" id="{98926C7C-D70E-443A-9A47-5FA0173F8BA9}"/>
               </a:ext>
             </a:extLst>
           </p:cNvPr>
@@ -1959,7 +1959,7 @@
           <p:cNvPr id="6" name="Slide Number Placeholder 5">
             <a:extLst xmlns:a="http://schemas.openxmlformats.org/drawingml/2006/main">
               <a:ext uri="{FF2B5EF4-FFF2-40B4-BE49-F238E27FC236}">
-                <a16:creationId xmlns:a16="http://schemas.microsoft.com/office/drawing/2014/main" id="{B9C66698-9B04-414C-B2A1-155BD21ADC7B}"/>
+                <a16:creationId xmlns:a16="http://schemas.microsoft.com/office/drawing/2014/main" id="{A0466125-E76C-4A98-9C87-C42E5A0D57EB}"/>
               </a:ext>
             </a:extLst>
           </p:cNvPr>
@@ -2003,7 +2003,7 @@
           <p:cNvPr id="2" name="Title 1">
             <a:extLst xmlns:a="http://schemas.openxmlformats.org/drawingml/2006/main">
               <a:ext uri="{FF2B5EF4-FFF2-40B4-BE49-F238E27FC236}">
-                <a16:creationId xmlns:a16="http://schemas.microsoft.com/office/drawing/2014/main" id="{3DA390C9-F509-4064-8E32-E9411AF18C7E}"/>
+                <a16:creationId xmlns:a16="http://schemas.microsoft.com/office/drawing/2014/main" id="{3284B186-A5B8-43AA-8C70-DF6A98B2AF14}"/>
               </a:ext>
             </a:extLst>
           </p:cNvPr>
@@ -2030,7 +2030,7 @@
           <p:cNvPr id="3" name="Content Placeholder 2">
             <a:extLst xmlns:a="http://schemas.openxmlformats.org/drawingml/2006/main">
               <a:ext uri="{FF2B5EF4-FFF2-40B4-BE49-F238E27FC236}">
-                <a16:creationId xmlns:a16="http://schemas.microsoft.com/office/drawing/2014/main" id="{4F42225E-8409-4E77-A774-C769A5E9497B}"/>
+                <a16:creationId xmlns:a16="http://schemas.microsoft.com/office/drawing/2014/main" id="{4B1F6BB0-EBDA-4A76-B153-695E245BD272}"/>
               </a:ext>
             </a:extLst>
           </p:cNvPr>
@@ -2134,7 +2134,7 @@
           <p:cNvPr id="4" name="Content Placeholder 3">
             <a:extLst xmlns:a="http://schemas.openxmlformats.org/drawingml/2006/main">
               <a:ext uri="{FF2B5EF4-FFF2-40B4-BE49-F238E27FC236}">
-                <a16:creationId xmlns:a16="http://schemas.microsoft.com/office/drawing/2014/main" id="{D60095E4-056B-4FA2-B29C-20A745A9CF99}"/>
+                <a16:creationId xmlns:a16="http://schemas.microsoft.com/office/drawing/2014/main" id="{433F10E9-A582-47EB-914D-3B61B2F00EBE}"/>
               </a:ext>
             </a:extLst>
           </p:cNvPr>
@@ -2238,7 +2238,7 @@
           <p:cNvPr id="5" name="Date Placeholder 4">
             <a:extLst xmlns:a="http://schemas.openxmlformats.org/drawingml/2006/main">
               <a:ext uri="{FF2B5EF4-FFF2-40B4-BE49-F238E27FC236}">
-                <a16:creationId xmlns:a16="http://schemas.microsoft.com/office/drawing/2014/main" id="{BA68F35D-EA57-4CB3-B6DB-14C06F74FFAA}"/>
+                <a16:creationId xmlns:a16="http://schemas.microsoft.com/office/drawing/2014/main" id="{59958D28-F313-4961-8D73-588A4F61CBAC}"/>
               </a:ext>
             </a:extLst>
           </p:cNvPr>
@@ -2265,7 +2265,7 @@
           <p:cNvPr id="6" name="Footer Placeholder 5">
             <a:extLst xmlns:a="http://schemas.openxmlformats.org/drawingml/2006/main">
               <a:ext uri="{FF2B5EF4-FFF2-40B4-BE49-F238E27FC236}">
-                <a16:creationId xmlns:a16="http://schemas.microsoft.com/office/drawing/2014/main" id="{55F5B29E-D204-45F9-8B81-409158B448B4}"/>
+                <a16:creationId xmlns:a16="http://schemas.microsoft.com/office/drawing/2014/main" id="{6B54924A-C74F-4CEB-87CD-7D45256E05C6}"/>
               </a:ext>
             </a:extLst>
           </p:cNvPr>
@@ -2288,7 +2288,7 @@
           <p:cNvPr id="7" name="Slide Number Placeholder 6">
             <a:extLst xmlns:a="http://schemas.openxmlformats.org/drawingml/2006/main">
               <a:ext uri="{FF2B5EF4-FFF2-40B4-BE49-F238E27FC236}">
-                <a16:creationId xmlns:a16="http://schemas.microsoft.com/office/drawing/2014/main" id="{A3379B3F-6A27-4960-A69C-2C3CCAC06184}"/>
+                <a16:creationId xmlns:a16="http://schemas.microsoft.com/office/drawing/2014/main" id="{76079BFE-C50B-4F41-9020-A077C7F8A922}"/>
               </a:ext>
             </a:extLst>
           </p:cNvPr>
@@ -2332,7 +2332,7 @@
           <p:cNvPr id="2" name="Title 1">
             <a:extLst xmlns:a="http://schemas.openxmlformats.org/drawingml/2006/main">
               <a:ext uri="{FF2B5EF4-FFF2-40B4-BE49-F238E27FC236}">
-                <a16:creationId xmlns:a16="http://schemas.microsoft.com/office/drawing/2014/main" id="{DD9B0C5C-F305-4039-8392-637C44C04A4A}"/>
+                <a16:creationId xmlns:a16="http://schemas.microsoft.com/office/drawing/2014/main" id="{F69AE09A-4627-4FC6-9A3B-74D7EA02D03C}"/>
               </a:ext>
             </a:extLst>
           </p:cNvPr>
@@ -2364,7 +2364,7 @@
           <p:cNvPr id="3" name="Text Placeholder 2">
             <a:extLst xmlns:a="http://schemas.openxmlformats.org/drawingml/2006/main">
               <a:ext uri="{FF2B5EF4-FFF2-40B4-BE49-F238E27FC236}">
-                <a16:creationId xmlns:a16="http://schemas.microsoft.com/office/drawing/2014/main" id="{6A713635-FEF0-475F-BD98-0887C24D5621}"/>
+                <a16:creationId xmlns:a16="http://schemas.microsoft.com/office/drawing/2014/main" id="{E2A56503-49A4-4CDF-B15C-1B3F21B51825}"/>
               </a:ext>
             </a:extLst>
           </p:cNvPr>
@@ -2436,7 +2436,7 @@
           <p:cNvPr id="4" name="Content Placeholder 3">
             <a:extLst xmlns:a="http://schemas.openxmlformats.org/drawingml/2006/main">
               <a:ext uri="{FF2B5EF4-FFF2-40B4-BE49-F238E27FC236}">
-                <a16:creationId xmlns:a16="http://schemas.microsoft.com/office/drawing/2014/main" id="{7D0941F4-15E3-486B-9189-6E7C11242807}"/>
+                <a16:creationId xmlns:a16="http://schemas.microsoft.com/office/drawing/2014/main" id="{C13B2C04-E1D8-43B9-B896-B41CCDDA00B2}"/>
               </a:ext>
             </a:extLst>
           </p:cNvPr>
@@ -2540,7 +2540,7 @@
           <p:cNvPr id="5" name="Text Placeholder 4">
             <a:extLst xmlns:a="http://schemas.openxmlformats.org/drawingml/2006/main">
               <a:ext uri="{FF2B5EF4-FFF2-40B4-BE49-F238E27FC236}">
-                <a16:creationId xmlns:a16="http://schemas.microsoft.com/office/drawing/2014/main" id="{A64CA659-A6B2-410F-9582-A3E48D3E4E0A}"/>
+                <a16:creationId xmlns:a16="http://schemas.microsoft.com/office/drawing/2014/main" id="{4CDAC8A4-D7DF-4508-9CDE-7E9D3B43FF2D}"/>
               </a:ext>
             </a:extLst>
           </p:cNvPr>
@@ -2612,7 +2612,7 @@
           <p:cNvPr id="6" name="Content Placeholder 5">
             <a:extLst xmlns:a="http://schemas.openxmlformats.org/drawingml/2006/main">
               <a:ext uri="{FF2B5EF4-FFF2-40B4-BE49-F238E27FC236}">
-                <a16:creationId xmlns:a16="http://schemas.microsoft.com/office/drawing/2014/main" id="{0345DF61-ABFE-441E-84D7-D4CAB5043009}"/>
+                <a16:creationId xmlns:a16="http://schemas.microsoft.com/office/drawing/2014/main" id="{5365F492-A47A-41CB-99D7-1F5E89BB21AE}"/>
               </a:ext>
             </a:extLst>
           </p:cNvPr>
@@ -2716,7 +2716,7 @@
           <p:cNvPr id="7" name="Date Placeholder 6">
             <a:extLst xmlns:a="http://schemas.openxmlformats.org/drawingml/2006/main">
               <a:ext uri="{FF2B5EF4-FFF2-40B4-BE49-F238E27FC236}">
-                <a16:creationId xmlns:a16="http://schemas.microsoft.com/office/drawing/2014/main" id="{F5F7B07C-6BF1-4716-A091-599F9ADE1859}"/>
+                <a16:creationId xmlns:a16="http://schemas.microsoft.com/office/drawing/2014/main" id="{28FABE77-37AD-4935-A65B-3EDA4612B360}"/>
               </a:ext>
             </a:extLst>
           </p:cNvPr>
@@ -2743,7 +2743,7 @@
           <p:cNvPr id="8" name="Footer Placeholder 7">
             <a:extLst xmlns:a="http://schemas.openxmlformats.org/drawingml/2006/main">
               <a:ext uri="{FF2B5EF4-FFF2-40B4-BE49-F238E27FC236}">
-                <a16:creationId xmlns:a16="http://schemas.microsoft.com/office/drawing/2014/main" id="{D17B1CBD-334B-4AF7-8777-6B87D249D2BE}"/>
+                <a16:creationId xmlns:a16="http://schemas.microsoft.com/office/drawing/2014/main" id="{564994FD-7AF1-458C-8BEB-6B0D22480A1A}"/>
               </a:ext>
             </a:extLst>
           </p:cNvPr>
@@ -2766,7 +2766,7 @@
           <p:cNvPr id="9" name="Slide Number Placeholder 8">
             <a:extLst xmlns:a="http://schemas.openxmlformats.org/drawingml/2006/main">
               <a:ext uri="{FF2B5EF4-FFF2-40B4-BE49-F238E27FC236}">
-                <a16:creationId xmlns:a16="http://schemas.microsoft.com/office/drawing/2014/main" id="{87D6A546-CA27-4D08-9E27-9621D4B570AE}"/>
+                <a16:creationId xmlns:a16="http://schemas.microsoft.com/office/drawing/2014/main" id="{52C41FEF-94E4-4C91-9E32-38CD0868CEE2}"/>
               </a:ext>
             </a:extLst>
           </p:cNvPr>
@@ -2810,7 +2810,7 @@
           <p:cNvPr id="2" name="Title 1">
             <a:extLst xmlns:a="http://schemas.openxmlformats.org/drawingml/2006/main">
               <a:ext uri="{FF2B5EF4-FFF2-40B4-BE49-F238E27FC236}">
-                <a16:creationId xmlns:a16="http://schemas.microsoft.com/office/drawing/2014/main" id="{D9B486CA-B5C1-4A55-8256-56B9EE734184}"/>
+                <a16:creationId xmlns:a16="http://schemas.microsoft.com/office/drawing/2014/main" id="{647D0669-44A5-4B50-8160-719C6750EAA1}"/>
               </a:ext>
             </a:extLst>
           </p:cNvPr>
@@ -2837,7 +2837,7 @@
           <p:cNvPr id="3" name="Date Placeholder 2">
             <a:extLst xmlns:a="http://schemas.openxmlformats.org/drawingml/2006/main">
               <a:ext uri="{FF2B5EF4-FFF2-40B4-BE49-F238E27FC236}">
-                <a16:creationId xmlns:a16="http://schemas.microsoft.com/office/drawing/2014/main" id="{2621D26B-F29E-449E-927D-5C9C5C55A738}"/>
+                <a16:creationId xmlns:a16="http://schemas.microsoft.com/office/drawing/2014/main" id="{28291939-DE07-4BEF-9511-DD3EF0086F2B}"/>
               </a:ext>
             </a:extLst>
           </p:cNvPr>
@@ -2864,7 +2864,7 @@
           <p:cNvPr id="4" name="Footer Placeholder 3">
             <a:extLst xmlns:a="http://schemas.openxmlformats.org/drawingml/2006/main">
               <a:ext uri="{FF2B5EF4-FFF2-40B4-BE49-F238E27FC236}">
-                <a16:creationId xmlns:a16="http://schemas.microsoft.com/office/drawing/2014/main" id="{9DA3AD45-76CD-4DF7-891B-CED08CBD6CF2}"/>
+                <a16:creationId xmlns:a16="http://schemas.microsoft.com/office/drawing/2014/main" id="{95C99EFE-2FEC-4686-AB87-F05F15A0B40F}"/>
               </a:ext>
             </a:extLst>
           </p:cNvPr>
@@ -2887,7 +2887,7 @@
           <p:cNvPr id="5" name="Slide Number Placeholder 4">
             <a:extLst xmlns:a="http://schemas.openxmlformats.org/drawingml/2006/main">
               <a:ext uri="{FF2B5EF4-FFF2-40B4-BE49-F238E27FC236}">
-                <a16:creationId xmlns:a16="http://schemas.microsoft.com/office/drawing/2014/main" id="{BCA18647-2198-406B-B8E6-A0D1DD2D27B1}"/>
+                <a16:creationId xmlns:a16="http://schemas.microsoft.com/office/drawing/2014/main" id="{D798521E-A690-4B7F-9194-294B7AA0E0C1}"/>
               </a:ext>
             </a:extLst>
           </p:cNvPr>
@@ -2931,7 +2931,7 @@
           <p:cNvPr id="2" name="Date Placeholder 1">
             <a:extLst xmlns:a="http://schemas.openxmlformats.org/drawingml/2006/main">
               <a:ext uri="{FF2B5EF4-FFF2-40B4-BE49-F238E27FC236}">
-                <a16:creationId xmlns:a16="http://schemas.microsoft.com/office/drawing/2014/main" id="{7C9CFBEF-AD30-45C6-9E51-83FDA30CFA18}"/>
+                <a16:creationId xmlns:a16="http://schemas.microsoft.com/office/drawing/2014/main" id="{A8D17E7F-6C90-4D95-A2B5-D86384B8AFAC}"/>
               </a:ext>
             </a:extLst>
           </p:cNvPr>
@@ -2958,7 +2958,7 @@
           <p:cNvPr id="3" name="Footer Placeholder 2">
             <a:extLst xmlns:a="http://schemas.openxmlformats.org/drawingml/2006/main">
               <a:ext uri="{FF2B5EF4-FFF2-40B4-BE49-F238E27FC236}">
-                <a16:creationId xmlns:a16="http://schemas.microsoft.com/office/drawing/2014/main" id="{3DC37E82-F7E6-40AA-80D4-971A6FF89889}"/>
+                <a16:creationId xmlns:a16="http://schemas.microsoft.com/office/drawing/2014/main" id="{A1139B46-11C4-4130-B592-78C4D446B2A0}"/>
               </a:ext>
             </a:extLst>
           </p:cNvPr>
@@ -2981,7 +2981,7 @@
           <p:cNvPr id="4" name="Slide Number Placeholder 3">
             <a:extLst xmlns:a="http://schemas.openxmlformats.org/drawingml/2006/main">
               <a:ext uri="{FF2B5EF4-FFF2-40B4-BE49-F238E27FC236}">
-                <a16:creationId xmlns:a16="http://schemas.microsoft.com/office/drawing/2014/main" id="{18079136-678B-49C6-A18B-4657CB855484}"/>
+                <a16:creationId xmlns:a16="http://schemas.microsoft.com/office/drawing/2014/main" id="{D9B1329A-EC76-4B69-819E-A270FBD3CF41}"/>
               </a:ext>
             </a:extLst>
           </p:cNvPr>
@@ -3025,7 +3025,7 @@
           <p:cNvPr id="2" name="Title 1">
             <a:extLst xmlns:a="http://schemas.openxmlformats.org/drawingml/2006/main">
               <a:ext uri="{FF2B5EF4-FFF2-40B4-BE49-F238E27FC236}">
-                <a16:creationId xmlns:a16="http://schemas.microsoft.com/office/drawing/2014/main" id="{F7B9A6D1-6EBA-4628-9765-CE04B1CC3621}"/>
+                <a16:creationId xmlns:a16="http://schemas.microsoft.com/office/drawing/2014/main" id="{4EB21316-9745-4DEC-885A-AE317B6E4E18}"/>
               </a:ext>
             </a:extLst>
           </p:cNvPr>
@@ -3062,7 +3062,7 @@
           <p:cNvPr id="3" name="Content Placeholder 2">
             <a:extLst xmlns:a="http://schemas.openxmlformats.org/drawingml/2006/main">
               <a:ext uri="{FF2B5EF4-FFF2-40B4-BE49-F238E27FC236}">
-                <a16:creationId xmlns:a16="http://schemas.microsoft.com/office/drawing/2014/main" id="{6C3A5550-A402-4EAA-82DE-76A123A94154}"/>
+                <a16:creationId xmlns:a16="http://schemas.microsoft.com/office/drawing/2014/main" id="{33A2E532-FBF6-482B-A063-3926C1C389C8}"/>
               </a:ext>
             </a:extLst>
           </p:cNvPr>
@@ -3166,7 +3166,7 @@
           <p:cNvPr id="4" name="Text Placeholder 3">
             <a:extLst xmlns:a="http://schemas.openxmlformats.org/drawingml/2006/main">
               <a:ext uri="{FF2B5EF4-FFF2-40B4-BE49-F238E27FC236}">
-                <a16:creationId xmlns:a16="http://schemas.microsoft.com/office/drawing/2014/main" id="{E0A14C34-6AC3-4CBB-9074-1C3F8CE03371}"/>
+                <a16:creationId xmlns:a16="http://schemas.microsoft.com/office/drawing/2014/main" id="{C978B43F-BBE6-46A0-BAEF-3052C5181A3E}"/>
               </a:ext>
             </a:extLst>
           </p:cNvPr>
@@ -3238,7 +3238,7 @@
           <p:cNvPr id="5" name="Date Placeholder 4">
             <a:extLst xmlns:a="http://schemas.openxmlformats.org/drawingml/2006/main">
               <a:ext uri="{FF2B5EF4-FFF2-40B4-BE49-F238E27FC236}">
-                <a16:creationId xmlns:a16="http://schemas.microsoft.com/office/drawing/2014/main" id="{436F94D4-AFEF-4333-9A8B-B3F5D85ED510}"/>
+                <a16:creationId xmlns:a16="http://schemas.microsoft.com/office/drawing/2014/main" id="{0EE85029-CBD9-4175-B68B-B7C43C6A27B7}"/>
               </a:ext>
             </a:extLst>
           </p:cNvPr>
@@ -3265,7 +3265,7 @@
           <p:cNvPr id="6" name="Footer Placeholder 5">
             <a:extLst xmlns:a="http://schemas.openxmlformats.org/drawingml/2006/main">
               <a:ext uri="{FF2B5EF4-FFF2-40B4-BE49-F238E27FC236}">
-                <a16:creationId xmlns:a16="http://schemas.microsoft.com/office/drawing/2014/main" id="{B18AB08A-C13C-4A7F-898C-29F7C488B214}"/>
+                <a16:creationId xmlns:a16="http://schemas.microsoft.com/office/drawing/2014/main" id="{C6D92B07-6336-4C49-8200-ABBA776AA229}"/>
               </a:ext>
             </a:extLst>
           </p:cNvPr>
@@ -3288,7 +3288,7 @@
           <p:cNvPr id="7" name="Slide Number Placeholder 6">
             <a:extLst xmlns:a="http://schemas.openxmlformats.org/drawingml/2006/main">
               <a:ext uri="{FF2B5EF4-FFF2-40B4-BE49-F238E27FC236}">
-                <a16:creationId xmlns:a16="http://schemas.microsoft.com/office/drawing/2014/main" id="{BC82DD91-A984-4EB1-879D-3B31D110E35C}"/>
+                <a16:creationId xmlns:a16="http://schemas.microsoft.com/office/drawing/2014/main" id="{677339B3-2195-4369-860B-9E6216EC0635}"/>
               </a:ext>
             </a:extLst>
           </p:cNvPr>
@@ -3332,7 +3332,7 @@
           <p:cNvPr id="2" name="Title 1">
             <a:extLst xmlns:a="http://schemas.openxmlformats.org/drawingml/2006/main">
               <a:ext uri="{FF2B5EF4-FFF2-40B4-BE49-F238E27FC236}">
-                <a16:creationId xmlns:a16="http://schemas.microsoft.com/office/drawing/2014/main" id="{C6AEE8E1-3FA9-42C7-BC7A-2611AD7BA93D}"/>
+                <a16:creationId xmlns:a16="http://schemas.microsoft.com/office/drawing/2014/main" id="{2EE09357-D0A2-4F5F-8DCC-4BE1927C31EE}"/>
               </a:ext>
             </a:extLst>
           </p:cNvPr>
@@ -3369,7 +3369,7 @@
           <p:cNvPr id="3" name="Picture Placeholder 2">
             <a:extLst xmlns:a="http://schemas.openxmlformats.org/drawingml/2006/main">
               <a:ext uri="{FF2B5EF4-FFF2-40B4-BE49-F238E27FC236}">
-                <a16:creationId xmlns:a16="http://schemas.microsoft.com/office/drawing/2014/main" id="{A7AC7CB5-1B2E-40AC-8FF1-EB8BBDAB25D1}"/>
+                <a16:creationId xmlns:a16="http://schemas.microsoft.com/office/drawing/2014/main" id="{EF054827-CF2E-48A4-A382-7C8CE3DA2B1F}"/>
               </a:ext>
             </a:extLst>
           </p:cNvPr>
@@ -3434,7 +3434,7 @@
           <p:cNvPr id="4" name="Text Placeholder 3">
             <a:extLst xmlns:a="http://schemas.openxmlformats.org/drawingml/2006/main">
               <a:ext uri="{FF2B5EF4-FFF2-40B4-BE49-F238E27FC236}">
-                <a16:creationId xmlns:a16="http://schemas.microsoft.com/office/drawing/2014/main" id="{A19BAD0A-694C-4D05-A0F1-C5EE1A84D363}"/>
+                <a16:creationId xmlns:a16="http://schemas.microsoft.com/office/drawing/2014/main" id="{482AB492-CBD7-4C93-8EB7-3B1502EC5551}"/>
               </a:ext>
             </a:extLst>
           </p:cNvPr>
@@ -3506,7 +3506,7 @@
           <p:cNvPr id="5" name="Date Placeholder 4">
             <a:extLst xmlns:a="http://schemas.openxmlformats.org/drawingml/2006/main">
               <a:ext uri="{FF2B5EF4-FFF2-40B4-BE49-F238E27FC236}">
-                <a16:creationId xmlns:a16="http://schemas.microsoft.com/office/drawing/2014/main" id="{79CF5CA0-FD97-4D4C-AA16-7F677489B49F}"/>
+                <a16:creationId xmlns:a16="http://schemas.microsoft.com/office/drawing/2014/main" id="{939554FF-EA45-49EC-9A58-AFB384F16C7D}"/>
               </a:ext>
             </a:extLst>
           </p:cNvPr>
@@ -3533,7 +3533,7 @@
           <p:cNvPr id="6" name="Footer Placeholder 5">
             <a:extLst xmlns:a="http://schemas.openxmlformats.org/drawingml/2006/main">
               <a:ext uri="{FF2B5EF4-FFF2-40B4-BE49-F238E27FC236}">
-                <a16:creationId xmlns:a16="http://schemas.microsoft.com/office/drawing/2014/main" id="{BB342FE2-A0B4-49FE-9C1E-390445A44E48}"/>
+                <a16:creationId xmlns:a16="http://schemas.microsoft.com/office/drawing/2014/main" id="{46180FC4-D104-4954-A9B1-8D9A17F6EED0}"/>
               </a:ext>
             </a:extLst>
           </p:cNvPr>
@@ -3556,7 +3556,7 @@
           <p:cNvPr id="7" name="Slide Number Placeholder 6">
             <a:extLst xmlns:a="http://schemas.openxmlformats.org/drawingml/2006/main">
               <a:ext uri="{FF2B5EF4-FFF2-40B4-BE49-F238E27FC236}">
-                <a16:creationId xmlns:a16="http://schemas.microsoft.com/office/drawing/2014/main" id="{1E283066-BEE5-471C-86B0-4F4DC15BDD83}"/>
+                <a16:creationId xmlns:a16="http://schemas.microsoft.com/office/drawing/2014/main" id="{DD3DFA04-06F5-466D-99B2-9BC6DDD09AA7}"/>
               </a:ext>
             </a:extLst>
           </p:cNvPr>
@@ -3605,7 +3605,7 @@
           <p:cNvPr id="2" name="Title Placeholder 1">
             <a:extLst xmlns:a="http://schemas.openxmlformats.org/drawingml/2006/main">
               <a:ext uri="{FF2B5EF4-FFF2-40B4-BE49-F238E27FC236}">
-                <a16:creationId xmlns:a16="http://schemas.microsoft.com/office/drawing/2014/main" id="{57324B10-2958-423F-B496-91E86E8574B3}"/>
+                <a16:creationId xmlns:a16="http://schemas.microsoft.com/office/drawing/2014/main" id="{90C18CE3-7FDB-44EF-9442-DB1505F22654}"/>
               </a:ext>
             </a:extLst>
           </p:cNvPr>
@@ -3642,7 +3642,7 @@
           <p:cNvPr id="3" name="Text Placeholder 2">
             <a:extLst xmlns:a="http://schemas.openxmlformats.org/drawingml/2006/main">
               <a:ext uri="{FF2B5EF4-FFF2-40B4-BE49-F238E27FC236}">
-                <a16:creationId xmlns:a16="http://schemas.microsoft.com/office/drawing/2014/main" id="{F09BE6F9-01BD-44D2-BEF3-EDFB3279A986}"/>
+                <a16:creationId xmlns:a16="http://schemas.microsoft.com/office/drawing/2014/main" id="{E5D5E560-9D8F-43AE-B2BB-8F6F5BE2D7E5}"/>
               </a:ext>
             </a:extLst>
           </p:cNvPr>
@@ -3714,7 +3714,7 @@
           <p:cNvPr id="4" name="Date Placeholder 3">
             <a:extLst xmlns:a="http://schemas.openxmlformats.org/drawingml/2006/main">
               <a:ext uri="{FF2B5EF4-FFF2-40B4-BE49-F238E27FC236}">
-                <a16:creationId xmlns:a16="http://schemas.microsoft.com/office/drawing/2014/main" id="{1F438F46-22C0-44B2-8866-FE0817125407}"/>
+                <a16:creationId xmlns:a16="http://schemas.microsoft.com/office/drawing/2014/main" id="{07C9F6C9-1518-4CAF-A9DD-D01D86DBCA31}"/>
               </a:ext>
             </a:extLst>
           </p:cNvPr>
@@ -3760,7 +3760,7 @@
           <p:cNvPr id="5" name="Footer Placeholder 4">
             <a:extLst xmlns:a="http://schemas.openxmlformats.org/drawingml/2006/main">
               <a:ext uri="{FF2B5EF4-FFF2-40B4-BE49-F238E27FC236}">
-                <a16:creationId xmlns:a16="http://schemas.microsoft.com/office/drawing/2014/main" id="{B9BBA762-ACC5-4122-8388-CE2223AAD7F3}"/>
+                <a16:creationId xmlns:a16="http://schemas.microsoft.com/office/drawing/2014/main" id="{1F5E18CC-9BCC-4B48-8497-D726397AFD98}"/>
               </a:ext>
             </a:extLst>
           </p:cNvPr>
@@ -3802,7 +3802,7 @@
           <p:cNvPr id="6" name="Slide Number Placeholder 5">
             <a:extLst xmlns:a="http://schemas.openxmlformats.org/drawingml/2006/main">
               <a:ext uri="{FF2B5EF4-FFF2-40B4-BE49-F238E27FC236}">
-                <a16:creationId xmlns:a16="http://schemas.microsoft.com/office/drawing/2014/main" id="{BB563AEB-464B-434B-A04C-AABE6AE62D48}"/>
+                <a16:creationId xmlns:a16="http://schemas.microsoft.com/office/drawing/2014/main" id="{BE2EDA7D-18F5-4ABE-B7FE-0276B2DF69CC}"/>
               </a:ext>
             </a:extLst>
           </p:cNvPr>
@@ -3847,17 +3847,17 @@
   </p:cSld>
   <p:clrMap bg1="lt1" tx1="dk1" bg2="lt2" tx2="dk2" accent1="accent1" accent2="accent2" accent3="accent3" accent4="accent4" accent5="accent5" accent6="accent6" hlink="hlink" folHlink="folHlink"/>
   <p:sldLayoutIdLst>
-    <p:sldLayoutId xmlns:r="http://schemas.openxmlformats.org/officeDocument/2006/relationships" id="2147483649" r:id="R6e88b0897b33495f"/>
-    <p:sldLayoutId xmlns:r="http://schemas.openxmlformats.org/officeDocument/2006/relationships" id="2147483650" r:id="R96fb30aab4594725"/>
-    <p:sldLayoutId xmlns:r="http://schemas.openxmlformats.org/officeDocument/2006/relationships" id="2147483651" r:id="R7af996b1a5ed4d97"/>
-    <p:sldLayoutId xmlns:r="http://schemas.openxmlformats.org/officeDocument/2006/relationships" id="2147483652" r:id="Rf0b2e4c306634ea5"/>
-    <p:sldLayoutId xmlns:r="http://schemas.openxmlformats.org/officeDocument/2006/relationships" id="2147483653" r:id="R5c56d9bc1ac54382"/>
-    <p:sldLayoutId xmlns:r="http://schemas.openxmlformats.org/officeDocument/2006/relationships" id="2147483654" r:id="R1d5f559c190a4b15"/>
-    <p:sldLayoutId xmlns:r="http://schemas.openxmlformats.org/officeDocument/2006/relationships" id="2147483655" r:id="R3b043649a1f143f9"/>
-    <p:sldLayoutId xmlns:r="http://schemas.openxmlformats.org/officeDocument/2006/relationships" id="2147483656" r:id="R98aac1e207ff402d"/>
-    <p:sldLayoutId xmlns:r="http://schemas.openxmlformats.org/officeDocument/2006/relationships" id="2147483657" r:id="R757a1fbe9d744ee3"/>
-    <p:sldLayoutId xmlns:r="http://schemas.openxmlformats.org/officeDocument/2006/relationships" id="2147483658" r:id="R6acab05e586b48c4"/>
-    <p:sldLayoutId xmlns:r="http://schemas.openxmlformats.org/officeDocument/2006/relationships" id="2147483659" r:id="R5347d5447dc14ad0"/>
+    <p:sldLayoutId xmlns:r="http://schemas.openxmlformats.org/officeDocument/2006/relationships" id="2147483649" r:id="Rf381d3c10c1741eb"/>
+    <p:sldLayoutId xmlns:r="http://schemas.openxmlformats.org/officeDocument/2006/relationships" id="2147483650" r:id="R67da6943154040b5"/>
+    <p:sldLayoutId xmlns:r="http://schemas.openxmlformats.org/officeDocument/2006/relationships" id="2147483651" r:id="R7025c4ccffba4843"/>
+    <p:sldLayoutId xmlns:r="http://schemas.openxmlformats.org/officeDocument/2006/relationships" id="2147483652" r:id="R80cf027507ce4691"/>
+    <p:sldLayoutId xmlns:r="http://schemas.openxmlformats.org/officeDocument/2006/relationships" id="2147483653" r:id="R8e17744694f04e79"/>
+    <p:sldLayoutId xmlns:r="http://schemas.openxmlformats.org/officeDocument/2006/relationships" id="2147483654" r:id="R54bbf4e904834578"/>
+    <p:sldLayoutId xmlns:r="http://schemas.openxmlformats.org/officeDocument/2006/relationships" id="2147483655" r:id="R7134a574b32a4ab3"/>
+    <p:sldLayoutId xmlns:r="http://schemas.openxmlformats.org/officeDocument/2006/relationships" id="2147483656" r:id="Rd14a60afa23e4704"/>
+    <p:sldLayoutId xmlns:r="http://schemas.openxmlformats.org/officeDocument/2006/relationships" id="2147483657" r:id="Rd34b6da7c88c42ae"/>
+    <p:sldLayoutId xmlns:r="http://schemas.openxmlformats.org/officeDocument/2006/relationships" id="2147483658" r:id="R291949a9a9324403"/>
+    <p:sldLayoutId xmlns:r="http://schemas.openxmlformats.org/officeDocument/2006/relationships" id="2147483659" r:id="R5984dfb5fec249a6"/>
   </p:sldLayoutIdLst>
   <p:txStyles>
     <p:titleStyle>
@@ -4410,7 +4410,7 @@
           <p:cNvPr id="2" name="Rectangle 1">
             <a:extLst xmlns:a="http://schemas.openxmlformats.org/drawingml/2006/main">
               <a:ext uri="{FF2B5EF4-FFF2-40B4-BE49-F238E27FC236}">
-                <a16:creationId xmlns:a16="http://schemas.microsoft.com/office/drawing/2014/main" id="{629D8E96-6A07-44F0-8DA4-66920062E7A2}"/>
+                <a16:creationId xmlns:a16="http://schemas.microsoft.com/office/drawing/2014/main" id="{102104DC-19F5-4EB4-B8E5-3C6B18CC4821}"/>
               </a:ext>
             </a:extLst>
           </p:cNvPr>
@@ -4465,7 +4465,7 @@
           <p:cNvPr id="3" name="TextBox 2">
             <a:extLst xmlns:a="http://schemas.openxmlformats.org/drawingml/2006/main">
               <a:ext uri="{FF2B5EF4-FFF2-40B4-BE49-F238E27FC236}">
-                <a16:creationId xmlns:a16="http://schemas.microsoft.com/office/drawing/2014/main" id="{0B0A281F-D795-4685-A40F-36B4A5D45610}"/>
+                <a16:creationId xmlns:a16="http://schemas.microsoft.com/office/drawing/2014/main" id="{9F971783-B09D-403C-924B-57DE35701873}"/>
               </a:ext>
             </a:extLst>
           </p:cNvPr>
@@ -4512,7 +4512,7 @@
           <p:cNvPr id="4" name="TextBox 3">
             <a:extLst xmlns:a="http://schemas.openxmlformats.org/drawingml/2006/main">
               <a:ext uri="{FF2B5EF4-FFF2-40B4-BE49-F238E27FC236}">
-                <a16:creationId xmlns:a16="http://schemas.microsoft.com/office/drawing/2014/main" id="{61697D32-148A-4B6E-B955-6E65996228A6}"/>
+                <a16:creationId xmlns:a16="http://schemas.microsoft.com/office/drawing/2014/main" id="{FF035841-684F-4369-85E5-168CA8113F0D}"/>
               </a:ext>
             </a:extLst>
           </p:cNvPr>
@@ -4580,7 +4580,7 @@
           <p:cNvPr id="5" name="TextBox 4">
             <a:extLst xmlns:a="http://schemas.openxmlformats.org/drawingml/2006/main">
               <a:ext uri="{FF2B5EF4-FFF2-40B4-BE49-F238E27FC236}">
-                <a16:creationId xmlns:a16="http://schemas.microsoft.com/office/drawing/2014/main" id="{56E1F409-4265-4EF3-9281-56306C536A20}"/>
+                <a16:creationId xmlns:a16="http://schemas.microsoft.com/office/drawing/2014/main" id="{8191CFAC-3BFE-4F57-B559-8F7FBBB412C0}"/>
               </a:ext>
             </a:extLst>
           </p:cNvPr>
@@ -4627,7 +4627,7 @@
           <p:cNvPr id="6" name="Rectangle 5">
             <a:extLst xmlns:a="http://schemas.openxmlformats.org/drawingml/2006/main">
               <a:ext uri="{FF2B5EF4-FFF2-40B4-BE49-F238E27FC236}">
-                <a16:creationId xmlns:a16="http://schemas.microsoft.com/office/drawing/2014/main" id="{8A116DFC-E20C-4A7F-AD5D-219E4538AB93}"/>
+                <a16:creationId xmlns:a16="http://schemas.microsoft.com/office/drawing/2014/main" id="{0B40763A-3FBB-464E-8A89-BEA681B83B22}"/>
               </a:ext>
             </a:extLst>
           </p:cNvPr>
@@ -4682,7 +4682,7 @@
           <p:cNvPr id="7" name="TextBox 6">
             <a:extLst xmlns:a="http://schemas.openxmlformats.org/drawingml/2006/main">
               <a:ext uri="{FF2B5EF4-FFF2-40B4-BE49-F238E27FC236}">
-                <a16:creationId xmlns:a16="http://schemas.microsoft.com/office/drawing/2014/main" id="{BF8F570F-5E67-4551-9527-5F2F99087F62}"/>
+                <a16:creationId xmlns:a16="http://schemas.microsoft.com/office/drawing/2014/main" id="{61AED402-2B1F-46D3-9341-2FA1DF0912C5}"/>
               </a:ext>
             </a:extLst>
           </p:cNvPr>
@@ -4729,7 +4729,7 @@
           <p:cNvPr id="8" name="TextBox 7">
             <a:extLst xmlns:a="http://schemas.openxmlformats.org/drawingml/2006/main">
               <a:ext uri="{FF2B5EF4-FFF2-40B4-BE49-F238E27FC236}">
-                <a16:creationId xmlns:a16="http://schemas.microsoft.com/office/drawing/2014/main" id="{92209B8F-B3DB-46D1-B8C2-593AB57BA184}"/>
+                <a16:creationId xmlns:a16="http://schemas.microsoft.com/office/drawing/2014/main" id="{E806902E-37A7-4046-80BB-5DC99EADAD82}"/>
               </a:ext>
             </a:extLst>
           </p:cNvPr>
@@ -4766,7 +4766,7 @@
                 <a:ea typeface="Aptos"/>
                 <a:cs typeface="Aptos"/>
               </a:rPr>
-              <a:t>2026.07.23-14</a:t>
+              <a:t>2026.07.23-15</a:t>
             </a:r>
           </a:p>
         </p:txBody>
@@ -4776,7 +4776,7 @@
           <p:cNvPr id="9" name="TextBox 8">
             <a:extLst xmlns:a="http://schemas.openxmlformats.org/drawingml/2006/main">
               <a:ext uri="{FF2B5EF4-FFF2-40B4-BE49-F238E27FC236}">
-                <a16:creationId xmlns:a16="http://schemas.microsoft.com/office/drawing/2014/main" id="{177ECD66-FE6D-449C-A00A-35E95DB76537}"/>
+                <a16:creationId xmlns:a16="http://schemas.microsoft.com/office/drawing/2014/main" id="{F33EEB03-25C0-433B-B77F-278F4BED4839}"/>
               </a:ext>
             </a:extLst>
           </p:cNvPr>
@@ -4844,7 +4844,7 @@
           <p:cNvPr id="10" name="TextBox 9">
             <a:extLst xmlns:a="http://schemas.openxmlformats.org/drawingml/2006/main">
               <a:ext uri="{FF2B5EF4-FFF2-40B4-BE49-F238E27FC236}">
-                <a16:creationId xmlns:a16="http://schemas.microsoft.com/office/drawing/2014/main" id="{5743D524-2F6A-4C3D-9984-B30E1757DAF1}"/>
+                <a16:creationId xmlns:a16="http://schemas.microsoft.com/office/drawing/2014/main" id="{EA30598A-5721-42D2-9415-5FD8C7A50247}"/>
               </a:ext>
             </a:extLst>
           </p:cNvPr>
@@ -4891,7 +4891,7 @@
           <p:cNvPr id="11" name="TextBox 10">
             <a:extLst xmlns:a="http://schemas.openxmlformats.org/drawingml/2006/main">
               <a:ext uri="{FF2B5EF4-FFF2-40B4-BE49-F238E27FC236}">
-                <a16:creationId xmlns:a16="http://schemas.microsoft.com/office/drawing/2014/main" id="{806C0D05-5B2E-48E1-9D99-3F67D53B3351}"/>
+                <a16:creationId xmlns:a16="http://schemas.microsoft.com/office/drawing/2014/main" id="{48B1F8D6-45B2-4F4C-9BD1-7E3EC06806B6}"/>
               </a:ext>
             </a:extLst>
           </p:cNvPr>
@@ -4938,7 +4938,7 @@
           <p:cNvPr id="12" name="TextBox 11">
             <a:extLst xmlns:a="http://schemas.openxmlformats.org/drawingml/2006/main">
               <a:ext uri="{FF2B5EF4-FFF2-40B4-BE49-F238E27FC236}">
-                <a16:creationId xmlns:a16="http://schemas.microsoft.com/office/drawing/2014/main" id="{6BA82E4F-6BA4-454F-A780-70D5B7E54DFC}"/>
+                <a16:creationId xmlns:a16="http://schemas.microsoft.com/office/drawing/2014/main" id="{2CD25960-C32A-46C9-B0A8-D8390812F6BA}"/>
               </a:ext>
             </a:extLst>
           </p:cNvPr>
@@ -4983,7 +4983,7 @@
     </p:spTree>
     <p:extLst>
       <p:ext uri="{BB962C8B-B14F-4D97-AF65-F5344CB8AC3E}">
-        <p14:creationId xmlns:p14="http://schemas.microsoft.com/office/powerpoint/2010/main" val="270178177"/>
+        <p14:creationId xmlns:p14="http://schemas.microsoft.com/office/powerpoint/2010/main" val="1472000903"/>
       </p:ext>
     </p:extLst>
   </p:cSld>
@@ -5007,7 +5007,7 @@
           <p:cNvPr id="2" name="TextBox 1">
             <a:extLst xmlns:a="http://schemas.openxmlformats.org/drawingml/2006/main">
               <a:ext uri="{FF2B5EF4-FFF2-40B4-BE49-F238E27FC236}">
-                <a16:creationId xmlns:a16="http://schemas.microsoft.com/office/drawing/2014/main" id="{DC67C227-31BA-4005-9023-A98F7C169DED}"/>
+                <a16:creationId xmlns:a16="http://schemas.microsoft.com/office/drawing/2014/main" id="{9747DD21-6C9F-45EF-A98A-91EB361B19E1}"/>
               </a:ext>
             </a:extLst>
           </p:cNvPr>
@@ -5054,7 +5054,7 @@
           <p:cNvPr id="3" name="TextBox 2">
             <a:extLst xmlns:a="http://schemas.openxmlformats.org/drawingml/2006/main">
               <a:ext uri="{FF2B5EF4-FFF2-40B4-BE49-F238E27FC236}">
-                <a16:creationId xmlns:a16="http://schemas.microsoft.com/office/drawing/2014/main" id="{6B0D2F18-1C55-4474-908D-A03988158693}"/>
+                <a16:creationId xmlns:a16="http://schemas.microsoft.com/office/drawing/2014/main" id="{1EDE4DFA-6489-4B3A-A465-A512E720B70B}"/>
               </a:ext>
             </a:extLst>
           </p:cNvPr>
@@ -5101,7 +5101,7 @@
           <p:cNvPr id="4" name="Rectangle 3">
             <a:extLst xmlns:a="http://schemas.openxmlformats.org/drawingml/2006/main">
               <a:ext uri="{FF2B5EF4-FFF2-40B4-BE49-F238E27FC236}">
-                <a16:creationId xmlns:a16="http://schemas.microsoft.com/office/drawing/2014/main" id="{88CA622E-E856-4212-AE95-0835831277E4}"/>
+                <a16:creationId xmlns:a16="http://schemas.microsoft.com/office/drawing/2014/main" id="{22A51E57-132F-460D-94D5-D5F14AABB514}"/>
               </a:ext>
             </a:extLst>
           </p:cNvPr>
@@ -5156,7 +5156,7 @@
           <p:cNvPr id="5" name="Rectangle 4">
             <a:extLst xmlns:a="http://schemas.openxmlformats.org/drawingml/2006/main">
               <a:ext uri="{FF2B5EF4-FFF2-40B4-BE49-F238E27FC236}">
-                <a16:creationId xmlns:a16="http://schemas.microsoft.com/office/drawing/2014/main" id="{470865D5-302B-406A-B3C8-3C6AD166547D}"/>
+                <a16:creationId xmlns:a16="http://schemas.microsoft.com/office/drawing/2014/main" id="{78047D98-9B9C-4CFF-A05A-8A8066D02D84}"/>
               </a:ext>
             </a:extLst>
           </p:cNvPr>
@@ -5211,7 +5211,7 @@
           <p:cNvPr id="6" name="TextBox 5">
             <a:extLst xmlns:a="http://schemas.openxmlformats.org/drawingml/2006/main">
               <a:ext uri="{FF2B5EF4-FFF2-40B4-BE49-F238E27FC236}">
-                <a16:creationId xmlns:a16="http://schemas.microsoft.com/office/drawing/2014/main" id="{D9F66B91-716D-4F63-AC3B-6F25B4AF349B}"/>
+                <a16:creationId xmlns:a16="http://schemas.microsoft.com/office/drawing/2014/main" id="{51A8B9C4-A9B5-402A-ADEA-7117BA6DE4F9}"/>
               </a:ext>
             </a:extLst>
           </p:cNvPr>
@@ -5248,7 +5248,7 @@
                 <a:ea typeface="Aptos"/>
                 <a:cs typeface="Aptos"/>
               </a:rPr>
-              <a:t>Independent public evidence summary · 2026.07.23-14 · 2026-07-22 · Sources: EPO; Germany — official judgments; WIPO</a:t>
+              <a:t>Independent public evidence summary · 2026.07.23-15 · 2026-07-22 · Sources: EPO; Germany — official judgments; WIPO</a:t>
             </a:r>
           </a:p>
         </p:txBody>
@@ -5258,7 +5258,7 @@
           <p:cNvPr id="7" name="TextBox 6">
             <a:extLst xmlns:a="http://schemas.openxmlformats.org/drawingml/2006/main">
               <a:ext uri="{FF2B5EF4-FFF2-40B4-BE49-F238E27FC236}">
-                <a16:creationId xmlns:a16="http://schemas.microsoft.com/office/drawing/2014/main" id="{0701AC34-9E29-47AD-836E-982D98E5C441}"/>
+                <a16:creationId xmlns:a16="http://schemas.microsoft.com/office/drawing/2014/main" id="{0FCDFD0D-E5F1-401F-BA56-7CA116D3581F}"/>
               </a:ext>
             </a:extLst>
           </p:cNvPr>
@@ -5305,7 +5305,7 @@
           <p:cNvPr id="8" name="TextBox 7">
             <a:extLst xmlns:a="http://schemas.openxmlformats.org/drawingml/2006/main">
               <a:ext uri="{FF2B5EF4-FFF2-40B4-BE49-F238E27FC236}">
-                <a16:creationId xmlns:a16="http://schemas.microsoft.com/office/drawing/2014/main" id="{78A956B1-0FDB-4E03-96D3-ED61BDEA310C}"/>
+                <a16:creationId xmlns:a16="http://schemas.microsoft.com/office/drawing/2014/main" id="{629DD86B-28DC-4E32-AA5B-380FC837DBFB}"/>
               </a:ext>
             </a:extLst>
           </p:cNvPr>
@@ -5352,7 +5352,7 @@
           <p:cNvPr id="9" name="TextBox 8">
             <a:extLst xmlns:a="http://schemas.openxmlformats.org/drawingml/2006/main">
               <a:ext uri="{FF2B5EF4-FFF2-40B4-BE49-F238E27FC236}">
-                <a16:creationId xmlns:a16="http://schemas.microsoft.com/office/drawing/2014/main" id="{D2F5D68A-2E94-49F8-9BBC-5677E6292085}"/>
+                <a16:creationId xmlns:a16="http://schemas.microsoft.com/office/drawing/2014/main" id="{1B3F6FFF-B0F5-40FE-9931-81126283C55D}"/>
               </a:ext>
             </a:extLst>
           </p:cNvPr>
@@ -5449,7 +5449,7 @@
           <p:cNvPr id="10" name="Rounded Rectangle 9">
             <a:extLst xmlns:a="http://schemas.openxmlformats.org/drawingml/2006/main">
               <a:ext uri="{FF2B5EF4-FFF2-40B4-BE49-F238E27FC236}">
-                <a16:creationId xmlns:a16="http://schemas.microsoft.com/office/drawing/2014/main" id="{4B2851EE-1BB0-4868-B1A8-4EE465E37EEC}"/>
+                <a16:creationId xmlns:a16="http://schemas.microsoft.com/office/drawing/2014/main" id="{F35B44E9-A347-4532-BBDE-B7079689F611}"/>
               </a:ext>
             </a:extLst>
           </p:cNvPr>
@@ -5506,7 +5506,7 @@
           <p:cNvPr id="11" name="TextBox 10">
             <a:extLst xmlns:a="http://schemas.openxmlformats.org/drawingml/2006/main">
               <a:ext uri="{FF2B5EF4-FFF2-40B4-BE49-F238E27FC236}">
-                <a16:creationId xmlns:a16="http://schemas.microsoft.com/office/drawing/2014/main" id="{3E7ACB82-E062-48D6-A08C-0B1EDD8F46B7}"/>
+                <a16:creationId xmlns:a16="http://schemas.microsoft.com/office/drawing/2014/main" id="{FE3E7B2E-95A0-47AC-918A-B3F2B9882D59}"/>
               </a:ext>
             </a:extLst>
           </p:cNvPr>
@@ -5553,7 +5553,7 @@
           <p:cNvPr id="12" name="TextBox 11">
             <a:extLst xmlns:a="http://schemas.openxmlformats.org/drawingml/2006/main">
               <a:ext uri="{FF2B5EF4-FFF2-40B4-BE49-F238E27FC236}">
-                <a16:creationId xmlns:a16="http://schemas.microsoft.com/office/drawing/2014/main" id="{AC384901-CF13-4978-8B59-F8E99087D459}"/>
+                <a16:creationId xmlns:a16="http://schemas.microsoft.com/office/drawing/2014/main" id="{16A953A7-680D-4017-89C4-AF4DE2A50C70}"/>
               </a:ext>
             </a:extLst>
           </p:cNvPr>
@@ -5598,7 +5598,7 @@
     </p:spTree>
     <p:extLst>
       <p:ext uri="{BB962C8B-B14F-4D97-AF65-F5344CB8AC3E}">
-        <p14:creationId xmlns:p14="http://schemas.microsoft.com/office/powerpoint/2010/main" val="1953832549"/>
+        <p14:creationId xmlns:p14="http://schemas.microsoft.com/office/powerpoint/2010/main" val="264999062"/>
       </p:ext>
     </p:extLst>
   </p:cSld>
@@ -5622,7 +5622,7 @@
           <p:cNvPr id="2" name="TextBox 1">
             <a:extLst xmlns:a="http://schemas.openxmlformats.org/drawingml/2006/main">
               <a:ext uri="{FF2B5EF4-FFF2-40B4-BE49-F238E27FC236}">
-                <a16:creationId xmlns:a16="http://schemas.microsoft.com/office/drawing/2014/main" id="{F39B0505-57FB-427F-8F23-140DA331D69C}"/>
+                <a16:creationId xmlns:a16="http://schemas.microsoft.com/office/drawing/2014/main" id="{B835AF46-6BA6-4A76-9DF8-D79053C9ABF4}"/>
               </a:ext>
             </a:extLst>
           </p:cNvPr>
@@ -5669,7 +5669,7 @@
           <p:cNvPr id="3" name="TextBox 2">
             <a:extLst xmlns:a="http://schemas.openxmlformats.org/drawingml/2006/main">
               <a:ext uri="{FF2B5EF4-FFF2-40B4-BE49-F238E27FC236}">
-                <a16:creationId xmlns:a16="http://schemas.microsoft.com/office/drawing/2014/main" id="{021AA4AD-76F3-4377-BFB1-7CB7EA61DC3A}"/>
+                <a16:creationId xmlns:a16="http://schemas.microsoft.com/office/drawing/2014/main" id="{C1124CDC-AD43-4F59-AD32-5BC56FE07F41}"/>
               </a:ext>
             </a:extLst>
           </p:cNvPr>
@@ -5716,7 +5716,7 @@
           <p:cNvPr id="4" name="Rectangle 3">
             <a:extLst xmlns:a="http://schemas.openxmlformats.org/drawingml/2006/main">
               <a:ext uri="{FF2B5EF4-FFF2-40B4-BE49-F238E27FC236}">
-                <a16:creationId xmlns:a16="http://schemas.microsoft.com/office/drawing/2014/main" id="{46A4C0B2-383E-423E-AA11-BFDD1D382180}"/>
+                <a16:creationId xmlns:a16="http://schemas.microsoft.com/office/drawing/2014/main" id="{9BDBE8B1-CE79-4893-80FF-86E04A13D5F6}"/>
               </a:ext>
             </a:extLst>
           </p:cNvPr>
@@ -5771,7 +5771,7 @@
           <p:cNvPr id="5" name="Rectangle 4">
             <a:extLst xmlns:a="http://schemas.openxmlformats.org/drawingml/2006/main">
               <a:ext uri="{FF2B5EF4-FFF2-40B4-BE49-F238E27FC236}">
-                <a16:creationId xmlns:a16="http://schemas.microsoft.com/office/drawing/2014/main" id="{22F7D311-26DF-4662-AFFD-C0C7E5B92BD1}"/>
+                <a16:creationId xmlns:a16="http://schemas.microsoft.com/office/drawing/2014/main" id="{77569667-9464-4F93-8BF2-A318C65F4E3E}"/>
               </a:ext>
             </a:extLst>
           </p:cNvPr>
@@ -5826,7 +5826,7 @@
           <p:cNvPr id="6" name="TextBox 5">
             <a:extLst xmlns:a="http://schemas.openxmlformats.org/drawingml/2006/main">
               <a:ext uri="{FF2B5EF4-FFF2-40B4-BE49-F238E27FC236}">
-                <a16:creationId xmlns:a16="http://schemas.microsoft.com/office/drawing/2014/main" id="{2B1C6389-475A-4463-8199-E39E6A06385D}"/>
+                <a16:creationId xmlns:a16="http://schemas.microsoft.com/office/drawing/2014/main" id="{C0110485-5DC7-455A-B10C-77060305BC85}"/>
               </a:ext>
             </a:extLst>
           </p:cNvPr>
@@ -5863,7 +5863,7 @@
                 <a:ea typeface="Aptos"/>
                 <a:cs typeface="Aptos"/>
               </a:rPr>
-              <a:t>Independent public evidence summary · 2026.07.23-14 · 2026-07-22 · Sources: EPO Register; EP3032975B2; 8 Ni 18/24 (EP); 7 O 3341/24</a:t>
+              <a:t>Independent public evidence summary · 2026.07.23-15 · 2026-07-22 · Sources: EPO Register; EP3032975B2; 8 Ni 18/24 (EP); 7 O 3341/24</a:t>
             </a:r>
           </a:p>
         </p:txBody>
@@ -5873,7 +5873,7 @@
           <p:cNvPr id="7" name="TextBox 6">
             <a:extLst xmlns:a="http://schemas.openxmlformats.org/drawingml/2006/main">
               <a:ext uri="{FF2B5EF4-FFF2-40B4-BE49-F238E27FC236}">
-                <a16:creationId xmlns:a16="http://schemas.microsoft.com/office/drawing/2014/main" id="{DDBDD68B-CB8F-4C50-9853-33878646730B}"/>
+                <a16:creationId xmlns:a16="http://schemas.microsoft.com/office/drawing/2014/main" id="{69234F66-FDAD-4827-A132-27C71512319E}"/>
               </a:ext>
             </a:extLst>
           </p:cNvPr>
@@ -5920,7 +5920,7 @@
           <p:cNvPr id="8" name="Rounded Rectangle 7">
             <a:extLst xmlns:a="http://schemas.openxmlformats.org/drawingml/2006/main">
               <a:ext uri="{FF2B5EF4-FFF2-40B4-BE49-F238E27FC236}">
-                <a16:creationId xmlns:a16="http://schemas.microsoft.com/office/drawing/2014/main" id="{D96C5DF8-CDD9-4865-82B2-22CF6ECB8F89}"/>
+                <a16:creationId xmlns:a16="http://schemas.microsoft.com/office/drawing/2014/main" id="{4078A325-4A46-4DC9-B1F1-088E64F21C36}"/>
               </a:ext>
             </a:extLst>
           </p:cNvPr>
@@ -5977,7 +5977,7 @@
           <p:cNvPr id="9" name="TextBox 8">
             <a:extLst xmlns:a="http://schemas.openxmlformats.org/drawingml/2006/main">
               <a:ext uri="{FF2B5EF4-FFF2-40B4-BE49-F238E27FC236}">
-                <a16:creationId xmlns:a16="http://schemas.microsoft.com/office/drawing/2014/main" id="{A8F66F57-D219-4D12-9F71-AAD22CDC6882}"/>
+                <a16:creationId xmlns:a16="http://schemas.microsoft.com/office/drawing/2014/main" id="{4E0CF374-6EBF-4DBB-B3E1-93BB0CC9D094}"/>
               </a:ext>
             </a:extLst>
           </p:cNvPr>
@@ -6024,7 +6024,7 @@
           <p:cNvPr id="10" name="TextBox 9">
             <a:extLst xmlns:a="http://schemas.openxmlformats.org/drawingml/2006/main">
               <a:ext uri="{FF2B5EF4-FFF2-40B4-BE49-F238E27FC236}">
-                <a16:creationId xmlns:a16="http://schemas.microsoft.com/office/drawing/2014/main" id="{A0AC7041-2B8D-4EEB-94C3-A3B634B679FF}"/>
+                <a16:creationId xmlns:a16="http://schemas.microsoft.com/office/drawing/2014/main" id="{A459A245-ABEA-4A5B-A780-3B1300A56D2C}"/>
               </a:ext>
             </a:extLst>
           </p:cNvPr>
@@ -6071,7 +6071,7 @@
           <p:cNvPr id="11" name="Rounded Rectangle 10">
             <a:extLst xmlns:a="http://schemas.openxmlformats.org/drawingml/2006/main">
               <a:ext uri="{FF2B5EF4-FFF2-40B4-BE49-F238E27FC236}">
-                <a16:creationId xmlns:a16="http://schemas.microsoft.com/office/drawing/2014/main" id="{88302AB0-89A8-4715-9BC1-687AF35C8ACB}"/>
+                <a16:creationId xmlns:a16="http://schemas.microsoft.com/office/drawing/2014/main" id="{187111F3-F5BD-4350-8CA6-98BE02A9A311}"/>
               </a:ext>
             </a:extLst>
           </p:cNvPr>
@@ -6128,7 +6128,7 @@
           <p:cNvPr id="12" name="TextBox 11">
             <a:extLst xmlns:a="http://schemas.openxmlformats.org/drawingml/2006/main">
               <a:ext uri="{FF2B5EF4-FFF2-40B4-BE49-F238E27FC236}">
-                <a16:creationId xmlns:a16="http://schemas.microsoft.com/office/drawing/2014/main" id="{0546F975-A99A-4252-B0EF-47D5A4B1589D}"/>
+                <a16:creationId xmlns:a16="http://schemas.microsoft.com/office/drawing/2014/main" id="{E0844960-18E9-47AD-9379-FAEB9A735E15}"/>
               </a:ext>
             </a:extLst>
           </p:cNvPr>
@@ -6175,7 +6175,7 @@
           <p:cNvPr id="13" name="TextBox 12">
             <a:extLst xmlns:a="http://schemas.openxmlformats.org/drawingml/2006/main">
               <a:ext uri="{FF2B5EF4-FFF2-40B4-BE49-F238E27FC236}">
-                <a16:creationId xmlns:a16="http://schemas.microsoft.com/office/drawing/2014/main" id="{7DFCA68F-9FEC-4076-88BB-08BB029550AD}"/>
+                <a16:creationId xmlns:a16="http://schemas.microsoft.com/office/drawing/2014/main" id="{DF521F85-F04A-4B28-AD0A-218DC965EE1B}"/>
               </a:ext>
             </a:extLst>
           </p:cNvPr>
@@ -6222,7 +6222,7 @@
           <p:cNvPr id="14" name="Rounded Rectangle 13">
             <a:extLst xmlns:a="http://schemas.openxmlformats.org/drawingml/2006/main">
               <a:ext uri="{FF2B5EF4-FFF2-40B4-BE49-F238E27FC236}">
-                <a16:creationId xmlns:a16="http://schemas.microsoft.com/office/drawing/2014/main" id="{2083131B-2B2C-41D7-960D-5FA390D58702}"/>
+                <a16:creationId xmlns:a16="http://schemas.microsoft.com/office/drawing/2014/main" id="{F33B0A4F-F456-46B4-A648-3C765B5B9016}"/>
               </a:ext>
             </a:extLst>
           </p:cNvPr>
@@ -6279,7 +6279,7 @@
           <p:cNvPr id="15" name="TextBox 14">
             <a:extLst xmlns:a="http://schemas.openxmlformats.org/drawingml/2006/main">
               <a:ext uri="{FF2B5EF4-FFF2-40B4-BE49-F238E27FC236}">
-                <a16:creationId xmlns:a16="http://schemas.microsoft.com/office/drawing/2014/main" id="{1DBA44E3-7B1B-4AF8-AB0A-CFC0664E8391}"/>
+                <a16:creationId xmlns:a16="http://schemas.microsoft.com/office/drawing/2014/main" id="{009050D8-30F4-4863-B341-2C3292A010E3}"/>
               </a:ext>
             </a:extLst>
           </p:cNvPr>
@@ -6326,7 +6326,7 @@
           <p:cNvPr id="16" name="TextBox 15">
             <a:extLst xmlns:a="http://schemas.openxmlformats.org/drawingml/2006/main">
               <a:ext uri="{FF2B5EF4-FFF2-40B4-BE49-F238E27FC236}">
-                <a16:creationId xmlns:a16="http://schemas.microsoft.com/office/drawing/2014/main" id="{84537DE6-B8B0-4810-AF58-46F8E71FA475}"/>
+                <a16:creationId xmlns:a16="http://schemas.microsoft.com/office/drawing/2014/main" id="{11D08590-A768-4EEE-9A05-2D85EB720893}"/>
               </a:ext>
             </a:extLst>
           </p:cNvPr>
@@ -6373,7 +6373,7 @@
           <p:cNvPr id="17" name="TextBox 16">
             <a:extLst xmlns:a="http://schemas.openxmlformats.org/drawingml/2006/main">
               <a:ext uri="{FF2B5EF4-FFF2-40B4-BE49-F238E27FC236}">
-                <a16:creationId xmlns:a16="http://schemas.microsoft.com/office/drawing/2014/main" id="{48B4139B-9A8D-41F4-85E5-D8A5EBE03E53}"/>
+                <a16:creationId xmlns:a16="http://schemas.microsoft.com/office/drawing/2014/main" id="{95878311-0A86-41F0-993D-F2440B1DAB2E}"/>
               </a:ext>
             </a:extLst>
           </p:cNvPr>
@@ -6420,7 +6420,7 @@
           <p:cNvPr id="18" name="Rounded Rectangle 17">
             <a:extLst xmlns:a="http://schemas.openxmlformats.org/drawingml/2006/main">
               <a:ext uri="{FF2B5EF4-FFF2-40B4-BE49-F238E27FC236}">
-                <a16:creationId xmlns:a16="http://schemas.microsoft.com/office/drawing/2014/main" id="{6B07F1B5-B30E-456A-9AC0-55CADB08D9C8}"/>
+                <a16:creationId xmlns:a16="http://schemas.microsoft.com/office/drawing/2014/main" id="{25C52AD5-39D4-4630-A6E9-38BA6FCB2C34}"/>
               </a:ext>
             </a:extLst>
           </p:cNvPr>
@@ -6477,7 +6477,7 @@
           <p:cNvPr id="19" name="TextBox 18">
             <a:extLst xmlns:a="http://schemas.openxmlformats.org/drawingml/2006/main">
               <a:ext uri="{FF2B5EF4-FFF2-40B4-BE49-F238E27FC236}">
-                <a16:creationId xmlns:a16="http://schemas.microsoft.com/office/drawing/2014/main" id="{07B17E2C-6EB6-490D-BDC0-F05E764B23AF}"/>
+                <a16:creationId xmlns:a16="http://schemas.microsoft.com/office/drawing/2014/main" id="{91EA63DA-24A7-48DF-B007-D48E2D44678D}"/>
               </a:ext>
             </a:extLst>
           </p:cNvPr>
@@ -6524,7 +6524,7 @@
           <p:cNvPr id="20" name="TextBox 19">
             <a:extLst xmlns:a="http://schemas.openxmlformats.org/drawingml/2006/main">
               <a:ext uri="{FF2B5EF4-FFF2-40B4-BE49-F238E27FC236}">
-                <a16:creationId xmlns:a16="http://schemas.microsoft.com/office/drawing/2014/main" id="{6396ABC6-B647-4427-B7C6-1A0684699455}"/>
+                <a16:creationId xmlns:a16="http://schemas.microsoft.com/office/drawing/2014/main" id="{CD460F25-03E9-4432-97A4-160C3277F342}"/>
               </a:ext>
             </a:extLst>
           </p:cNvPr>
@@ -6569,7 +6569,7 @@
     </p:spTree>
     <p:extLst>
       <p:ext uri="{BB962C8B-B14F-4D97-AF65-F5344CB8AC3E}">
-        <p14:creationId xmlns:p14="http://schemas.microsoft.com/office/powerpoint/2010/main" val="636439170"/>
+        <p14:creationId xmlns:p14="http://schemas.microsoft.com/office/powerpoint/2010/main" val="1459978526"/>
       </p:ext>
     </p:extLst>
   </p:cSld>
@@ -6593,7 +6593,7 @@
           <p:cNvPr id="2" name="TextBox 1">
             <a:extLst xmlns:a="http://schemas.openxmlformats.org/drawingml/2006/main">
               <a:ext uri="{FF2B5EF4-FFF2-40B4-BE49-F238E27FC236}">
-                <a16:creationId xmlns:a16="http://schemas.microsoft.com/office/drawing/2014/main" id="{6E88AAF1-3C71-4D14-94DD-8A61A98071A6}"/>
+                <a16:creationId xmlns:a16="http://schemas.microsoft.com/office/drawing/2014/main" id="{445BAA12-5191-4027-BB3C-D783C27E9EBC}"/>
               </a:ext>
             </a:extLst>
           </p:cNvPr>
@@ -6640,7 +6640,7 @@
           <p:cNvPr id="3" name="TextBox 2">
             <a:extLst xmlns:a="http://schemas.openxmlformats.org/drawingml/2006/main">
               <a:ext uri="{FF2B5EF4-FFF2-40B4-BE49-F238E27FC236}">
-                <a16:creationId xmlns:a16="http://schemas.microsoft.com/office/drawing/2014/main" id="{F35A0DBD-E395-43F2-83D3-219C9F647AC2}"/>
+                <a16:creationId xmlns:a16="http://schemas.microsoft.com/office/drawing/2014/main" id="{76EF573C-BD8D-422B-8EC2-E8BA55CAABBF}"/>
               </a:ext>
             </a:extLst>
           </p:cNvPr>
@@ -6687,7 +6687,7 @@
           <p:cNvPr id="4" name="Rectangle 3">
             <a:extLst xmlns:a="http://schemas.openxmlformats.org/drawingml/2006/main">
               <a:ext uri="{FF2B5EF4-FFF2-40B4-BE49-F238E27FC236}">
-                <a16:creationId xmlns:a16="http://schemas.microsoft.com/office/drawing/2014/main" id="{432FD948-E799-46A4-A39B-A8ECCE2782F8}"/>
+                <a16:creationId xmlns:a16="http://schemas.microsoft.com/office/drawing/2014/main" id="{5BDAEB3A-48B9-4928-BD9C-0194447C15B3}"/>
               </a:ext>
             </a:extLst>
           </p:cNvPr>
@@ -6742,7 +6742,7 @@
           <p:cNvPr id="5" name="Rectangle 4">
             <a:extLst xmlns:a="http://schemas.openxmlformats.org/drawingml/2006/main">
               <a:ext uri="{FF2B5EF4-FFF2-40B4-BE49-F238E27FC236}">
-                <a16:creationId xmlns:a16="http://schemas.microsoft.com/office/drawing/2014/main" id="{1FC81528-FCFD-45EE-A091-84FD7F0770B7}"/>
+                <a16:creationId xmlns:a16="http://schemas.microsoft.com/office/drawing/2014/main" id="{32B3CF31-E3AD-4A68-9FE9-6D26504162DB}"/>
               </a:ext>
             </a:extLst>
           </p:cNvPr>
@@ -6797,7 +6797,7 @@
           <p:cNvPr id="6" name="TextBox 5">
             <a:extLst xmlns:a="http://schemas.openxmlformats.org/drawingml/2006/main">
               <a:ext uri="{FF2B5EF4-FFF2-40B4-BE49-F238E27FC236}">
-                <a16:creationId xmlns:a16="http://schemas.microsoft.com/office/drawing/2014/main" id="{6CADC298-4D3C-4AFB-A0BA-76D9DE744ADE}"/>
+                <a16:creationId xmlns:a16="http://schemas.microsoft.com/office/drawing/2014/main" id="{E1816B56-F9C3-414E-9776-C8CD614E7869}"/>
               </a:ext>
             </a:extLst>
           </p:cNvPr>
@@ -6834,7 +6834,7 @@
                 <a:ea typeface="Aptos"/>
                 <a:cs typeface="Aptos"/>
               </a:rPr>
-              <a:t>Independent public evidence summary · 2026.07.23-14 · 2026-07-22 · Sources: Health Canada; Destatis; Vero; Sejm; Swedish Government</a:t>
+              <a:t>Independent public evidence summary · 2026.07.23-15 · 2026-07-22 · Sources: Health Canada; Destatis; Vero; Sejm; Swedish Government</a:t>
             </a:r>
           </a:p>
         </p:txBody>
@@ -6844,7 +6844,7 @@
           <p:cNvPr id="7" name="TextBox 6">
             <a:extLst xmlns:a="http://schemas.openxmlformats.org/drawingml/2006/main">
               <a:ext uri="{FF2B5EF4-FFF2-40B4-BE49-F238E27FC236}">
-                <a16:creationId xmlns:a16="http://schemas.microsoft.com/office/drawing/2014/main" id="{8239CB72-6E6D-45B2-A9F0-3964DEA88C43}"/>
+                <a16:creationId xmlns:a16="http://schemas.microsoft.com/office/drawing/2014/main" id="{94764B69-FE2F-41BB-9AF5-34B5B8A1641D}"/>
               </a:ext>
             </a:extLst>
           </p:cNvPr>
@@ -6891,7 +6891,7 @@
           <p:cNvPr id="8" name="Rounded Rectangle 7">
             <a:extLst xmlns:a="http://schemas.openxmlformats.org/drawingml/2006/main">
               <a:ext uri="{FF2B5EF4-FFF2-40B4-BE49-F238E27FC236}">
-                <a16:creationId xmlns:a16="http://schemas.microsoft.com/office/drawing/2014/main" id="{AADC8F97-788E-4C77-AC4E-6FE3AA608478}"/>
+                <a16:creationId xmlns:a16="http://schemas.microsoft.com/office/drawing/2014/main" id="{6CD5E243-2A30-47D5-A571-DE3CFB0994FB}"/>
               </a:ext>
             </a:extLst>
           </p:cNvPr>
@@ -6948,7 +6948,7 @@
           <p:cNvPr id="9" name="TextBox 8">
             <a:extLst xmlns:a="http://schemas.openxmlformats.org/drawingml/2006/main">
               <a:ext uri="{FF2B5EF4-FFF2-40B4-BE49-F238E27FC236}">
-                <a16:creationId xmlns:a16="http://schemas.microsoft.com/office/drawing/2014/main" id="{EFBFE9DF-FDFD-4569-ADAF-1750C383EDC7}"/>
+                <a16:creationId xmlns:a16="http://schemas.microsoft.com/office/drawing/2014/main" id="{124DD633-BC02-4018-8B4A-38FF74B948C9}"/>
               </a:ext>
             </a:extLst>
           </p:cNvPr>
@@ -6995,7 +6995,7 @@
           <p:cNvPr id="10" name="TextBox 9">
             <a:extLst xmlns:a="http://schemas.openxmlformats.org/drawingml/2006/main">
               <a:ext uri="{FF2B5EF4-FFF2-40B4-BE49-F238E27FC236}">
-                <a16:creationId xmlns:a16="http://schemas.microsoft.com/office/drawing/2014/main" id="{66E5B7FE-9B64-4304-A1BA-F4F3A17DC950}"/>
+                <a16:creationId xmlns:a16="http://schemas.microsoft.com/office/drawing/2014/main" id="{A564D4FB-F7AC-4432-B84C-F6DB9665AECE}"/>
               </a:ext>
             </a:extLst>
           </p:cNvPr>
@@ -7042,7 +7042,7 @@
           <p:cNvPr id="11" name="Rounded Rectangle 10">
             <a:extLst xmlns:a="http://schemas.openxmlformats.org/drawingml/2006/main">
               <a:ext uri="{FF2B5EF4-FFF2-40B4-BE49-F238E27FC236}">
-                <a16:creationId xmlns:a16="http://schemas.microsoft.com/office/drawing/2014/main" id="{419B278C-9535-465A-9F6E-9BD680F55A41}"/>
+                <a16:creationId xmlns:a16="http://schemas.microsoft.com/office/drawing/2014/main" id="{A0DBACE4-FCD1-4A0C-8BEA-DA4941B2A039}"/>
               </a:ext>
             </a:extLst>
           </p:cNvPr>
@@ -7099,7 +7099,7 @@
           <p:cNvPr id="12" name="TextBox 11">
             <a:extLst xmlns:a="http://schemas.openxmlformats.org/drawingml/2006/main">
               <a:ext uri="{FF2B5EF4-FFF2-40B4-BE49-F238E27FC236}">
-                <a16:creationId xmlns:a16="http://schemas.microsoft.com/office/drawing/2014/main" id="{69E8CDC8-6034-4C57-B4E4-2BDC8A403A07}"/>
+                <a16:creationId xmlns:a16="http://schemas.microsoft.com/office/drawing/2014/main" id="{5924B28F-AAB6-4BC8-A0FD-CE811C11CB6F}"/>
               </a:ext>
             </a:extLst>
           </p:cNvPr>
@@ -7146,7 +7146,7 @@
           <p:cNvPr id="13" name="TextBox 12">
             <a:extLst xmlns:a="http://schemas.openxmlformats.org/drawingml/2006/main">
               <a:ext uri="{FF2B5EF4-FFF2-40B4-BE49-F238E27FC236}">
-                <a16:creationId xmlns:a16="http://schemas.microsoft.com/office/drawing/2014/main" id="{625D087F-224D-49A3-872A-B96D6B0F802C}"/>
+                <a16:creationId xmlns:a16="http://schemas.microsoft.com/office/drawing/2014/main" id="{8EAC5356-53F3-4E62-8D51-EE8D1F0D6483}"/>
               </a:ext>
             </a:extLst>
           </p:cNvPr>
@@ -7193,7 +7193,7 @@
           <p:cNvPr id="14" name="Rounded Rectangle 13">
             <a:extLst xmlns:a="http://schemas.openxmlformats.org/drawingml/2006/main">
               <a:ext uri="{FF2B5EF4-FFF2-40B4-BE49-F238E27FC236}">
-                <a16:creationId xmlns:a16="http://schemas.microsoft.com/office/drawing/2014/main" id="{E36DED0B-F0F0-46C9-80C1-36BA82879210}"/>
+                <a16:creationId xmlns:a16="http://schemas.microsoft.com/office/drawing/2014/main" id="{E16DCEC9-F926-4814-8C1D-E5BA5880EC79}"/>
               </a:ext>
             </a:extLst>
           </p:cNvPr>
@@ -7250,7 +7250,7 @@
           <p:cNvPr id="15" name="TextBox 14">
             <a:extLst xmlns:a="http://schemas.openxmlformats.org/drawingml/2006/main">
               <a:ext uri="{FF2B5EF4-FFF2-40B4-BE49-F238E27FC236}">
-                <a16:creationId xmlns:a16="http://schemas.microsoft.com/office/drawing/2014/main" id="{18E26B8B-C598-44E2-B550-0A829F6B551A}"/>
+                <a16:creationId xmlns:a16="http://schemas.microsoft.com/office/drawing/2014/main" id="{DFFFEB30-D1E4-4844-BC73-6916DD91A016}"/>
               </a:ext>
             </a:extLst>
           </p:cNvPr>
@@ -7297,7 +7297,7 @@
           <p:cNvPr id="16" name="TextBox 15">
             <a:extLst xmlns:a="http://schemas.openxmlformats.org/drawingml/2006/main">
               <a:ext uri="{FF2B5EF4-FFF2-40B4-BE49-F238E27FC236}">
-                <a16:creationId xmlns:a16="http://schemas.microsoft.com/office/drawing/2014/main" id="{A9DE27D2-4E94-4624-8EF5-3DF213DE2142}"/>
+                <a16:creationId xmlns:a16="http://schemas.microsoft.com/office/drawing/2014/main" id="{616626DD-4042-4F30-9238-64E4D00FA451}"/>
               </a:ext>
             </a:extLst>
           </p:cNvPr>
@@ -7344,7 +7344,7 @@
           <p:cNvPr id="17" name="TextBox 16">
             <a:extLst xmlns:a="http://schemas.openxmlformats.org/drawingml/2006/main">
               <a:ext uri="{FF2B5EF4-FFF2-40B4-BE49-F238E27FC236}">
-                <a16:creationId xmlns:a16="http://schemas.microsoft.com/office/drawing/2014/main" id="{2934B6CA-D080-4BBB-8276-258217F2E33F}"/>
+                <a16:creationId xmlns:a16="http://schemas.microsoft.com/office/drawing/2014/main" id="{6AA8C3C5-E246-4A26-8A03-88F9F0923501}"/>
               </a:ext>
             </a:extLst>
           </p:cNvPr>
@@ -7391,7 +7391,7 @@
           <p:cNvPr id="18" name="Rounded Rectangle 17">
             <a:extLst xmlns:a="http://schemas.openxmlformats.org/drawingml/2006/main">
               <a:ext uri="{FF2B5EF4-FFF2-40B4-BE49-F238E27FC236}">
-                <a16:creationId xmlns:a16="http://schemas.microsoft.com/office/drawing/2014/main" id="{29B4DDC9-E93D-463B-ACD5-845DF194266A}"/>
+                <a16:creationId xmlns:a16="http://schemas.microsoft.com/office/drawing/2014/main" id="{D5C658D0-808F-4344-8FCE-F68E661C05D5}"/>
               </a:ext>
             </a:extLst>
           </p:cNvPr>
@@ -7448,7 +7448,7 @@
           <p:cNvPr id="19" name="TextBox 18">
             <a:extLst xmlns:a="http://schemas.openxmlformats.org/drawingml/2006/main">
               <a:ext uri="{FF2B5EF4-FFF2-40B4-BE49-F238E27FC236}">
-                <a16:creationId xmlns:a16="http://schemas.microsoft.com/office/drawing/2014/main" id="{D4B22E67-A601-4AF4-B7CB-47FAC065C424}"/>
+                <a16:creationId xmlns:a16="http://schemas.microsoft.com/office/drawing/2014/main" id="{B25F7D39-E750-4851-AC17-339848D08048}"/>
               </a:ext>
             </a:extLst>
           </p:cNvPr>
@@ -7495,7 +7495,7 @@
           <p:cNvPr id="20" name="TextBox 19">
             <a:extLst xmlns:a="http://schemas.openxmlformats.org/drawingml/2006/main">
               <a:ext uri="{FF2B5EF4-FFF2-40B4-BE49-F238E27FC236}">
-                <a16:creationId xmlns:a16="http://schemas.microsoft.com/office/drawing/2014/main" id="{3D9DE68C-12AB-45FF-8884-9D378BF362B7}"/>
+                <a16:creationId xmlns:a16="http://schemas.microsoft.com/office/drawing/2014/main" id="{C1455665-EC4F-45A3-BE9F-FC8A4D1F43AF}"/>
               </a:ext>
             </a:extLst>
           </p:cNvPr>
@@ -7540,7 +7540,7 @@
     </p:spTree>
     <p:extLst>
       <p:ext uri="{BB962C8B-B14F-4D97-AF65-F5344CB8AC3E}">
-        <p14:creationId xmlns:p14="http://schemas.microsoft.com/office/powerpoint/2010/main" val="1490455825"/>
+        <p14:creationId xmlns:p14="http://schemas.microsoft.com/office/powerpoint/2010/main" val="307458197"/>
       </p:ext>
     </p:extLst>
   </p:cSld>
@@ -7564,7 +7564,7 @@
           <p:cNvPr id="2" name="TextBox 1">
             <a:extLst xmlns:a="http://schemas.openxmlformats.org/drawingml/2006/main">
               <a:ext uri="{FF2B5EF4-FFF2-40B4-BE49-F238E27FC236}">
-                <a16:creationId xmlns:a16="http://schemas.microsoft.com/office/drawing/2014/main" id="{527E269F-4DE9-4184-8FDA-68817049AB06}"/>
+                <a16:creationId xmlns:a16="http://schemas.microsoft.com/office/drawing/2014/main" id="{16D77420-F333-44B0-92FA-08DC9CAE447E}"/>
               </a:ext>
             </a:extLst>
           </p:cNvPr>
@@ -7611,7 +7611,7 @@
           <p:cNvPr id="3" name="TextBox 2">
             <a:extLst xmlns:a="http://schemas.openxmlformats.org/drawingml/2006/main">
               <a:ext uri="{FF2B5EF4-FFF2-40B4-BE49-F238E27FC236}">
-                <a16:creationId xmlns:a16="http://schemas.microsoft.com/office/drawing/2014/main" id="{3C180E8D-BCF9-4190-8064-1C838C39A9F0}"/>
+                <a16:creationId xmlns:a16="http://schemas.microsoft.com/office/drawing/2014/main" id="{1AFECCCF-E905-4BFA-845F-3253A43FFD57}"/>
               </a:ext>
             </a:extLst>
           </p:cNvPr>
@@ -7658,7 +7658,7 @@
           <p:cNvPr id="4" name="Rectangle 3">
             <a:extLst xmlns:a="http://schemas.openxmlformats.org/drawingml/2006/main">
               <a:ext uri="{FF2B5EF4-FFF2-40B4-BE49-F238E27FC236}">
-                <a16:creationId xmlns:a16="http://schemas.microsoft.com/office/drawing/2014/main" id="{47E37C94-A2C8-465E-9864-79453DFDB2F5}"/>
+                <a16:creationId xmlns:a16="http://schemas.microsoft.com/office/drawing/2014/main" id="{DA645E76-A893-4C5A-962C-A64B1C2A8ABE}"/>
               </a:ext>
             </a:extLst>
           </p:cNvPr>
@@ -7713,7 +7713,7 @@
           <p:cNvPr id="5" name="Rectangle 4">
             <a:extLst xmlns:a="http://schemas.openxmlformats.org/drawingml/2006/main">
               <a:ext uri="{FF2B5EF4-FFF2-40B4-BE49-F238E27FC236}">
-                <a16:creationId xmlns:a16="http://schemas.microsoft.com/office/drawing/2014/main" id="{2B54C041-E39C-4F99-9847-7908B78046E0}"/>
+                <a16:creationId xmlns:a16="http://schemas.microsoft.com/office/drawing/2014/main" id="{1F8EF8CB-CA51-48F3-A510-B66F9CDDE290}"/>
               </a:ext>
             </a:extLst>
           </p:cNvPr>
@@ -7768,7 +7768,7 @@
           <p:cNvPr id="6" name="TextBox 5">
             <a:extLst xmlns:a="http://schemas.openxmlformats.org/drawingml/2006/main">
               <a:ext uri="{FF2B5EF4-FFF2-40B4-BE49-F238E27FC236}">
-                <a16:creationId xmlns:a16="http://schemas.microsoft.com/office/drawing/2014/main" id="{7184A1EB-A7B5-4A2F-90AD-0965FAD4C164}"/>
+                <a16:creationId xmlns:a16="http://schemas.microsoft.com/office/drawing/2014/main" id="{E4CA2E9C-052F-4106-B419-0D971CEA7C25}"/>
               </a:ext>
             </a:extLst>
           </p:cNvPr>
@@ -7805,7 +7805,7 @@
                 <a:ea typeface="Aptos"/>
                 <a:cs typeface="Aptos"/>
               </a:rPr>
-              <a:t>Independent public evidence summary · 2026.07.23-14 · 2026-07-22 · Sources: Evidence Register; WIPO IP valuation</a:t>
+              <a:t>Independent public evidence summary · 2026.07.23-15 · 2026-07-22 · Sources: Evidence Register; WIPO IP valuation</a:t>
             </a:r>
           </a:p>
         </p:txBody>
@@ -7815,7 +7815,7 @@
           <p:cNvPr id="7" name="TextBox 6">
             <a:extLst xmlns:a="http://schemas.openxmlformats.org/drawingml/2006/main">
               <a:ext uri="{FF2B5EF4-FFF2-40B4-BE49-F238E27FC236}">
-                <a16:creationId xmlns:a16="http://schemas.microsoft.com/office/drawing/2014/main" id="{DD7DAC11-E4AA-4B5E-9DBF-B886B7D9CA7F}"/>
+                <a16:creationId xmlns:a16="http://schemas.microsoft.com/office/drawing/2014/main" id="{28F16221-ED62-4ED2-9FF2-34626EE804AF}"/>
               </a:ext>
             </a:extLst>
           </p:cNvPr>
@@ -8302,7 +8302,7 @@
           <p:cNvPr id="9" name="TextBox 8">
             <a:extLst xmlns:a="http://schemas.openxmlformats.org/drawingml/2006/main">
               <a:ext uri="{FF2B5EF4-FFF2-40B4-BE49-F238E27FC236}">
-                <a16:creationId xmlns:a16="http://schemas.microsoft.com/office/drawing/2014/main" id="{7DBA80B7-2F20-4503-BB98-1BF24E594112}"/>
+                <a16:creationId xmlns:a16="http://schemas.microsoft.com/office/drawing/2014/main" id="{07E0AD2B-0E5C-4477-848D-2AABA13BDC7D}"/>
               </a:ext>
             </a:extLst>
           </p:cNvPr>
@@ -8347,7 +8347,7 @@
     </p:spTree>
     <p:extLst>
       <p:ext uri="{BB962C8B-B14F-4D97-AF65-F5344CB8AC3E}">
-        <p14:creationId xmlns:p14="http://schemas.microsoft.com/office/powerpoint/2010/main" val="1967156752"/>
+        <p14:creationId xmlns:p14="http://schemas.microsoft.com/office/powerpoint/2010/main" val="1905071976"/>
       </p:ext>
     </p:extLst>
   </p:cSld>
@@ -8378,7 +8378,7 @@
           <p:cNvPr id="2" name="TextBox 1">
             <a:extLst xmlns:a="http://schemas.openxmlformats.org/drawingml/2006/main">
               <a:ext uri="{FF2B5EF4-FFF2-40B4-BE49-F238E27FC236}">
-                <a16:creationId xmlns:a16="http://schemas.microsoft.com/office/drawing/2014/main" id="{7B6998D8-CBB8-400F-86A6-5E669E38E672}"/>
+                <a16:creationId xmlns:a16="http://schemas.microsoft.com/office/drawing/2014/main" id="{2DCFCDBA-9DF3-46F8-AC41-E321F7CD922C}"/>
               </a:ext>
             </a:extLst>
           </p:cNvPr>
@@ -8425,7 +8425,7 @@
           <p:cNvPr id="3" name="TextBox 2">
             <a:extLst xmlns:a="http://schemas.openxmlformats.org/drawingml/2006/main">
               <a:ext uri="{FF2B5EF4-FFF2-40B4-BE49-F238E27FC236}">
-                <a16:creationId xmlns:a16="http://schemas.microsoft.com/office/drawing/2014/main" id="{E19873B1-0C4A-4498-BE46-D254B973B8C4}"/>
+                <a16:creationId xmlns:a16="http://schemas.microsoft.com/office/drawing/2014/main" id="{54D45D25-4C73-4B6F-A5F7-4AD2FB77DAD8}"/>
               </a:ext>
             </a:extLst>
           </p:cNvPr>
@@ -8472,7 +8472,7 @@
           <p:cNvPr id="4" name="TextBox 3">
             <a:extLst xmlns:a="http://schemas.openxmlformats.org/drawingml/2006/main">
               <a:ext uri="{FF2B5EF4-FFF2-40B4-BE49-F238E27FC236}">
-                <a16:creationId xmlns:a16="http://schemas.microsoft.com/office/drawing/2014/main" id="{68A6B01C-9545-4918-8A52-219C95A28D01}"/>
+                <a16:creationId xmlns:a16="http://schemas.microsoft.com/office/drawing/2014/main" id="{D146A3B9-F55D-49B4-A46E-67C4EC13BBCC}"/>
               </a:ext>
             </a:extLst>
           </p:cNvPr>
@@ -8591,7 +8591,7 @@
           <p:cNvPr id="5" name="TextBox 4">
             <a:extLst xmlns:a="http://schemas.openxmlformats.org/drawingml/2006/main">
               <a:ext uri="{FF2B5EF4-FFF2-40B4-BE49-F238E27FC236}">
-                <a16:creationId xmlns:a16="http://schemas.microsoft.com/office/drawing/2014/main" id="{1E52F9FC-8BBD-4874-98B8-D9D7BD7E5249}"/>
+                <a16:creationId xmlns:a16="http://schemas.microsoft.com/office/drawing/2014/main" id="{68B98204-2D10-4539-8309-AA5410A08772}"/>
               </a:ext>
             </a:extLst>
           </p:cNvPr>
@@ -8628,7 +8628,7 @@
                 <a:ea typeface="Aptos"/>
                 <a:cs typeface="Aptos"/>
               </a:rPr>
-              <a:t>Version 2026.07.23-14 · 2026-07-22 · 6 / 6</a:t>
+              <a:t>Version 2026.07.23-15 · 2026-07-22 · 6 / 6</a:t>
             </a:r>
           </a:p>
         </p:txBody>
@@ -8636,7 +8636,7 @@
     </p:spTree>
     <p:extLst>
       <p:ext uri="{BB962C8B-B14F-4D97-AF65-F5344CB8AC3E}">
-        <p14:creationId xmlns:p14="http://schemas.microsoft.com/office/powerpoint/2010/main" val="849816381"/>
+        <p14:creationId xmlns:p14="http://schemas.microsoft.com/office/powerpoint/2010/main" val="2067226160"/>
       </p:ext>
     </p:extLst>
   </p:cSld>

--- a/site/downloads/pixan-bank-deck-short-en.pptx
+++ b/site/downloads/pixan-bank-deck-short-en.pptx
@@ -2,18 +2,18 @@
 <file path=ppt/presentation.xml><?xml version="1.0" encoding="utf-8"?>
 <p:presentation xmlns:p="http://schemas.openxmlformats.org/presentationml/2006/main">
   <p:sldMasterIdLst>
-    <p:sldMasterId xmlns:r="http://schemas.openxmlformats.org/officeDocument/2006/relationships" id="2147483648" r:id="Rd719dab796ff465a"/>
+    <p:sldMasterId xmlns:r="http://schemas.openxmlformats.org/officeDocument/2006/relationships" id="2147483648" r:id="R6dc0193ffdcb4dd1"/>
   </p:sldMasterIdLst>
   <p:notesMasterIdLst>
-    <p:notesMasterId xmlns:r="http://schemas.openxmlformats.org/officeDocument/2006/relationships" r:id="R48e6b88040e84630"/>
+    <p:notesMasterId xmlns:r="http://schemas.openxmlformats.org/officeDocument/2006/relationships" r:id="R903f16c44ecc44df"/>
   </p:notesMasterIdLst>
   <p:sldIdLst>
-    <p:sldId xmlns:r="http://schemas.openxmlformats.org/officeDocument/2006/relationships" id="256" r:id="Rf0fbc980fbfc4362"/>
-    <p:sldId xmlns:r="http://schemas.openxmlformats.org/officeDocument/2006/relationships" id="257" r:id="R124e783b312d4c15"/>
-    <p:sldId xmlns:r="http://schemas.openxmlformats.org/officeDocument/2006/relationships" id="258" r:id="Rd383104d100349d5"/>
-    <p:sldId xmlns:r="http://schemas.openxmlformats.org/officeDocument/2006/relationships" id="259" r:id="Radd1a13871fc442f"/>
-    <p:sldId xmlns:r="http://schemas.openxmlformats.org/officeDocument/2006/relationships" id="260" r:id="R4401f692f56f4ea2"/>
-    <p:sldId xmlns:r="http://schemas.openxmlformats.org/officeDocument/2006/relationships" id="261" r:id="Ref014750f1a842dc"/>
+    <p:sldId xmlns:r="http://schemas.openxmlformats.org/officeDocument/2006/relationships" id="256" r:id="Rb5c1bc3c7ab04310"/>
+    <p:sldId xmlns:r="http://schemas.openxmlformats.org/officeDocument/2006/relationships" id="257" r:id="R76f72a194715407d"/>
+    <p:sldId xmlns:r="http://schemas.openxmlformats.org/officeDocument/2006/relationships" id="258" r:id="Reb225ff687784ae4"/>
+    <p:sldId xmlns:r="http://schemas.openxmlformats.org/officeDocument/2006/relationships" id="259" r:id="R82bbf6ec40f6488a"/>
+    <p:sldId xmlns:r="http://schemas.openxmlformats.org/officeDocument/2006/relationships" id="260" r:id="Rae05c9aa37e34b47"/>
+    <p:sldId xmlns:r="http://schemas.openxmlformats.org/officeDocument/2006/relationships" id="261" r:id="Ree60da22ec4b4426"/>
   </p:sldIdLst>
   <p:sldSz cx="12191999" cy="6858000"/>
   <p:notesSz cx="6858000" cy="9144000"/>
@@ -938,7 +938,7 @@
           <p:cNvPr id="2" name="Title 1">
             <a:extLst xmlns:a="http://schemas.openxmlformats.org/drawingml/2006/main">
               <a:ext uri="{FF2B5EF4-FFF2-40B4-BE49-F238E27FC236}">
-                <a16:creationId xmlns:a16="http://schemas.microsoft.com/office/drawing/2014/main" id="{5EB2652D-8843-4B0C-AA7F-B38078FD7F1B}"/>
+                <a16:creationId xmlns:a16="http://schemas.microsoft.com/office/drawing/2014/main" id="{BF052A4B-784C-4C97-9EC5-1F04AB033029}"/>
               </a:ext>
             </a:extLst>
           </p:cNvPr>
@@ -970,7 +970,7 @@
           <p:cNvPr id="3" name="Subtitle 2">
             <a:extLst xmlns:a="http://schemas.openxmlformats.org/drawingml/2006/main">
               <a:ext uri="{FF2B5EF4-FFF2-40B4-BE49-F238E27FC236}">
-                <a16:creationId xmlns:a16="http://schemas.microsoft.com/office/drawing/2014/main" id="{E989D6A7-A8E2-4047-BDEE-1318187E7B37}"/>
+                <a16:creationId xmlns:a16="http://schemas.microsoft.com/office/drawing/2014/main" id="{CA200091-EFA9-4E8B-BF20-310E666B3FA1}"/>
               </a:ext>
             </a:extLst>
           </p:cNvPr>
@@ -1093,7 +1093,7 @@
           <p:cNvPr id="4" name="Date Placeholder 3">
             <a:extLst xmlns:a="http://schemas.openxmlformats.org/drawingml/2006/main">
               <a:ext uri="{FF2B5EF4-FFF2-40B4-BE49-F238E27FC236}">
-                <a16:creationId xmlns:a16="http://schemas.microsoft.com/office/drawing/2014/main" id="{7C360CF2-9C1A-4817-B50C-5800ADFBACF9}"/>
+                <a16:creationId xmlns:a16="http://schemas.microsoft.com/office/drawing/2014/main" id="{C29513A2-A655-4363-AC7F-FF347B8B4092}"/>
               </a:ext>
             </a:extLst>
           </p:cNvPr>
@@ -1120,7 +1120,7 @@
           <p:cNvPr id="5" name="Footer Placeholder 4">
             <a:extLst xmlns:a="http://schemas.openxmlformats.org/drawingml/2006/main">
               <a:ext uri="{FF2B5EF4-FFF2-40B4-BE49-F238E27FC236}">
-                <a16:creationId xmlns:a16="http://schemas.microsoft.com/office/drawing/2014/main" id="{EA07B901-7F6E-4F25-9D05-E1B07E9BF094}"/>
+                <a16:creationId xmlns:a16="http://schemas.microsoft.com/office/drawing/2014/main" id="{C22FE2A0-C5B9-4B2E-8826-BF0D55070A52}"/>
               </a:ext>
             </a:extLst>
           </p:cNvPr>
@@ -1143,7 +1143,7 @@
           <p:cNvPr id="6" name="Slide Number Placeholder 5">
             <a:extLst xmlns:a="http://schemas.openxmlformats.org/drawingml/2006/main">
               <a:ext uri="{FF2B5EF4-FFF2-40B4-BE49-F238E27FC236}">
-                <a16:creationId xmlns:a16="http://schemas.microsoft.com/office/drawing/2014/main" id="{66DA2D96-1B34-4E0A-845D-47908CF5187F}"/>
+                <a16:creationId xmlns:a16="http://schemas.microsoft.com/office/drawing/2014/main" id="{710BF0C2-6407-4418-AF2D-618BE572AFC0}"/>
               </a:ext>
             </a:extLst>
           </p:cNvPr>
@@ -1187,7 +1187,7 @@
           <p:cNvPr id="2" name="Title 1">
             <a:extLst xmlns:a="http://schemas.openxmlformats.org/drawingml/2006/main">
               <a:ext uri="{FF2B5EF4-FFF2-40B4-BE49-F238E27FC236}">
-                <a16:creationId xmlns:a16="http://schemas.microsoft.com/office/drawing/2014/main" id="{4AA4146B-E058-4C3D-A6CD-48A452D3A0A0}"/>
+                <a16:creationId xmlns:a16="http://schemas.microsoft.com/office/drawing/2014/main" id="{97436AD1-FEB0-4219-B4FC-1075ABDF3F5B}"/>
               </a:ext>
             </a:extLst>
           </p:cNvPr>
@@ -1214,7 +1214,7 @@
           <p:cNvPr id="3" name="Vertical Text Placeholder 2">
             <a:extLst xmlns:a="http://schemas.openxmlformats.org/drawingml/2006/main">
               <a:ext uri="{FF2B5EF4-FFF2-40B4-BE49-F238E27FC236}">
-                <a16:creationId xmlns:a16="http://schemas.microsoft.com/office/drawing/2014/main" id="{98DD3404-1773-46D6-B0D9-2ED465FC904C}"/>
+                <a16:creationId xmlns:a16="http://schemas.microsoft.com/office/drawing/2014/main" id="{A954871F-9910-4470-8AAD-C7DD65438796}"/>
               </a:ext>
             </a:extLst>
           </p:cNvPr>
@@ -1276,7 +1276,7 @@
           <p:cNvPr id="4" name="Date Placeholder 3">
             <a:extLst xmlns:a="http://schemas.openxmlformats.org/drawingml/2006/main">
               <a:ext uri="{FF2B5EF4-FFF2-40B4-BE49-F238E27FC236}">
-                <a16:creationId xmlns:a16="http://schemas.microsoft.com/office/drawing/2014/main" id="{C73D37B0-A8E0-404F-AD9C-81029D5222F1}"/>
+                <a16:creationId xmlns:a16="http://schemas.microsoft.com/office/drawing/2014/main" id="{D11FA844-79F9-469C-ACBE-BF45924D4C02}"/>
               </a:ext>
             </a:extLst>
           </p:cNvPr>
@@ -1303,7 +1303,7 @@
           <p:cNvPr id="5" name="Footer Placeholder 4">
             <a:extLst xmlns:a="http://schemas.openxmlformats.org/drawingml/2006/main">
               <a:ext uri="{FF2B5EF4-FFF2-40B4-BE49-F238E27FC236}">
-                <a16:creationId xmlns:a16="http://schemas.microsoft.com/office/drawing/2014/main" id="{9ED56F62-CC86-46E6-8B9D-D30E3A0AA2F2}"/>
+                <a16:creationId xmlns:a16="http://schemas.microsoft.com/office/drawing/2014/main" id="{DFDD16C8-FEAC-45A0-B2AE-3280717CD9BC}"/>
               </a:ext>
             </a:extLst>
           </p:cNvPr>
@@ -1326,7 +1326,7 @@
           <p:cNvPr id="6" name="Slide Number Placeholder 5">
             <a:extLst xmlns:a="http://schemas.openxmlformats.org/drawingml/2006/main">
               <a:ext uri="{FF2B5EF4-FFF2-40B4-BE49-F238E27FC236}">
-                <a16:creationId xmlns:a16="http://schemas.microsoft.com/office/drawing/2014/main" id="{FBABE2C8-E444-40A6-8E01-4758BB85A21B}"/>
+                <a16:creationId xmlns:a16="http://schemas.microsoft.com/office/drawing/2014/main" id="{FF3FD832-F0C6-45FF-BFA3-92EA5CD1E717}"/>
               </a:ext>
             </a:extLst>
           </p:cNvPr>
@@ -1370,7 +1370,7 @@
           <p:cNvPr id="2" name="Vertical Title 1">
             <a:extLst xmlns:a="http://schemas.openxmlformats.org/drawingml/2006/main">
               <a:ext uri="{FF2B5EF4-FFF2-40B4-BE49-F238E27FC236}">
-                <a16:creationId xmlns:a16="http://schemas.microsoft.com/office/drawing/2014/main" id="{28F68CAD-8B71-4E48-B068-815B91356B29}"/>
+                <a16:creationId xmlns:a16="http://schemas.microsoft.com/office/drawing/2014/main" id="{1662083C-9E3D-4E63-9445-2F58CE0A2AB6}"/>
               </a:ext>
             </a:extLst>
           </p:cNvPr>
@@ -1402,7 +1402,7 @@
           <p:cNvPr id="3" name="Vertical Text Placeholder 2">
             <a:extLst xmlns:a="http://schemas.openxmlformats.org/drawingml/2006/main">
               <a:ext uri="{FF2B5EF4-FFF2-40B4-BE49-F238E27FC236}">
-                <a16:creationId xmlns:a16="http://schemas.microsoft.com/office/drawing/2014/main" id="{A676F59C-05E8-45AD-86A8-44149BD9BB1A}"/>
+                <a16:creationId xmlns:a16="http://schemas.microsoft.com/office/drawing/2014/main" id="{71C08300-9B42-4B11-9094-80E3EE7B1DD4}"/>
               </a:ext>
             </a:extLst>
           </p:cNvPr>
@@ -1469,7 +1469,7 @@
           <p:cNvPr id="4" name="Date Placeholder 3">
             <a:extLst xmlns:a="http://schemas.openxmlformats.org/drawingml/2006/main">
               <a:ext uri="{FF2B5EF4-FFF2-40B4-BE49-F238E27FC236}">
-                <a16:creationId xmlns:a16="http://schemas.microsoft.com/office/drawing/2014/main" id="{617840E7-2874-4C41-8B4D-E4DC764AECCD}"/>
+                <a16:creationId xmlns:a16="http://schemas.microsoft.com/office/drawing/2014/main" id="{BD38FA0E-D6F1-4025-ABB6-161626B5F719}"/>
               </a:ext>
             </a:extLst>
           </p:cNvPr>
@@ -1496,7 +1496,7 @@
           <p:cNvPr id="5" name="Footer Placeholder 4">
             <a:extLst xmlns:a="http://schemas.openxmlformats.org/drawingml/2006/main">
               <a:ext uri="{FF2B5EF4-FFF2-40B4-BE49-F238E27FC236}">
-                <a16:creationId xmlns:a16="http://schemas.microsoft.com/office/drawing/2014/main" id="{9CF72118-B1A4-4C91-9906-AD10BCAE15F0}"/>
+                <a16:creationId xmlns:a16="http://schemas.microsoft.com/office/drawing/2014/main" id="{4C4DBAE1-8FF2-4264-AA61-869A3D053DB5}"/>
               </a:ext>
             </a:extLst>
           </p:cNvPr>
@@ -1519,7 +1519,7 @@
           <p:cNvPr id="6" name="Slide Number Placeholder 5">
             <a:extLst xmlns:a="http://schemas.openxmlformats.org/drawingml/2006/main">
               <a:ext uri="{FF2B5EF4-FFF2-40B4-BE49-F238E27FC236}">
-                <a16:creationId xmlns:a16="http://schemas.microsoft.com/office/drawing/2014/main" id="{77C2A47E-E933-43ED-B1C5-9DB57FFA943E}"/>
+                <a16:creationId xmlns:a16="http://schemas.microsoft.com/office/drawing/2014/main" id="{17C6F992-4114-43AC-A3A5-6B35497FD9DD}"/>
               </a:ext>
             </a:extLst>
           </p:cNvPr>
@@ -1563,7 +1563,7 @@
           <p:cNvPr id="2" name="Title 1">
             <a:extLst xmlns:a="http://schemas.openxmlformats.org/drawingml/2006/main">
               <a:ext uri="{FF2B5EF4-FFF2-40B4-BE49-F238E27FC236}">
-                <a16:creationId xmlns:a16="http://schemas.microsoft.com/office/drawing/2014/main" id="{F113F344-4B58-4C31-95EB-4F82BC888F69}"/>
+                <a16:creationId xmlns:a16="http://schemas.microsoft.com/office/drawing/2014/main" id="{96CFCEBD-61CD-4150-93BD-0A8C9422BBF4}"/>
               </a:ext>
             </a:extLst>
           </p:cNvPr>
@@ -1590,7 +1590,7 @@
           <p:cNvPr id="3" name="Content Placeholder 2">
             <a:extLst xmlns:a="http://schemas.openxmlformats.org/drawingml/2006/main">
               <a:ext uri="{FF2B5EF4-FFF2-40B4-BE49-F238E27FC236}">
-                <a16:creationId xmlns:a16="http://schemas.microsoft.com/office/drawing/2014/main" id="{D8F68E26-97B1-49F9-9773-BE2C5969BDE4}"/>
+                <a16:creationId xmlns:a16="http://schemas.microsoft.com/office/drawing/2014/main" id="{EA93C8C9-B787-42CA-8048-38B203B76E2C}"/>
               </a:ext>
             </a:extLst>
           </p:cNvPr>
@@ -1652,7 +1652,7 @@
           <p:cNvPr id="4" name="Date Placeholder 3">
             <a:extLst xmlns:a="http://schemas.openxmlformats.org/drawingml/2006/main">
               <a:ext uri="{FF2B5EF4-FFF2-40B4-BE49-F238E27FC236}">
-                <a16:creationId xmlns:a16="http://schemas.microsoft.com/office/drawing/2014/main" id="{9D5DF6BE-499B-4F10-9842-6AF9C01BCC0A}"/>
+                <a16:creationId xmlns:a16="http://schemas.microsoft.com/office/drawing/2014/main" id="{007D4573-2141-4005-8862-05E0066628D7}"/>
               </a:ext>
             </a:extLst>
           </p:cNvPr>
@@ -1679,7 +1679,7 @@
           <p:cNvPr id="5" name="Footer Placeholder 4">
             <a:extLst xmlns:a="http://schemas.openxmlformats.org/drawingml/2006/main">
               <a:ext uri="{FF2B5EF4-FFF2-40B4-BE49-F238E27FC236}">
-                <a16:creationId xmlns:a16="http://schemas.microsoft.com/office/drawing/2014/main" id="{6508B830-5CDC-4E77-A7F6-9594DB363EAA}"/>
+                <a16:creationId xmlns:a16="http://schemas.microsoft.com/office/drawing/2014/main" id="{5924F374-6B2D-4A65-8E70-2305BAFB1397}"/>
               </a:ext>
             </a:extLst>
           </p:cNvPr>
@@ -1702,7 +1702,7 @@
           <p:cNvPr id="6" name="Slide Number Placeholder 5">
             <a:extLst xmlns:a="http://schemas.openxmlformats.org/drawingml/2006/main">
               <a:ext uri="{FF2B5EF4-FFF2-40B4-BE49-F238E27FC236}">
-                <a16:creationId xmlns:a16="http://schemas.microsoft.com/office/drawing/2014/main" id="{A5032F53-960E-472F-AE91-99B62EF6EB2F}"/>
+                <a16:creationId xmlns:a16="http://schemas.microsoft.com/office/drawing/2014/main" id="{BEDB18D0-8101-435F-B7C0-79D09D6FE959}"/>
               </a:ext>
             </a:extLst>
           </p:cNvPr>
@@ -1746,7 +1746,7 @@
           <p:cNvPr id="2" name="Title 1">
             <a:extLst xmlns:a="http://schemas.openxmlformats.org/drawingml/2006/main">
               <a:ext uri="{FF2B5EF4-FFF2-40B4-BE49-F238E27FC236}">
-                <a16:creationId xmlns:a16="http://schemas.microsoft.com/office/drawing/2014/main" id="{706947C4-CEEC-4F61-B4A7-8CB006EDAD67}"/>
+                <a16:creationId xmlns:a16="http://schemas.microsoft.com/office/drawing/2014/main" id="{4A426F15-7424-40B0-85C6-35EE0F06A736}"/>
               </a:ext>
             </a:extLst>
           </p:cNvPr>
@@ -1783,7 +1783,7 @@
           <p:cNvPr id="3" name="Text Placeholder 2">
             <a:extLst xmlns:a="http://schemas.openxmlformats.org/drawingml/2006/main">
               <a:ext uri="{FF2B5EF4-FFF2-40B4-BE49-F238E27FC236}">
-                <a16:creationId xmlns:a16="http://schemas.microsoft.com/office/drawing/2014/main" id="{11BC3044-4FEC-4016-BF1D-FDFD124197EF}"/>
+                <a16:creationId xmlns:a16="http://schemas.microsoft.com/office/drawing/2014/main" id="{847597D1-10C5-4DC5-9EFD-191A5437A576}"/>
               </a:ext>
             </a:extLst>
           </p:cNvPr>
@@ -1909,7 +1909,7 @@
           <p:cNvPr id="4" name="Date Placeholder 3">
             <a:extLst xmlns:a="http://schemas.openxmlformats.org/drawingml/2006/main">
               <a:ext uri="{FF2B5EF4-FFF2-40B4-BE49-F238E27FC236}">
-                <a16:creationId xmlns:a16="http://schemas.microsoft.com/office/drawing/2014/main" id="{73EF337F-A34B-4DD8-B1B0-6ED2DD4E6208}"/>
+                <a16:creationId xmlns:a16="http://schemas.microsoft.com/office/drawing/2014/main" id="{692A5EB2-A060-4ABE-B38E-0FA3E503C755}"/>
               </a:ext>
             </a:extLst>
           </p:cNvPr>
@@ -1936,7 +1936,7 @@
           <p:cNvPr id="5" name="Footer Placeholder 4">
             <a:extLst xmlns:a="http://schemas.openxmlformats.org/drawingml/2006/main">
               <a:ext uri="{FF2B5EF4-FFF2-40B4-BE49-F238E27FC236}">
-                <a16:creationId xmlns:a16="http://schemas.microsoft.com/office/drawing/2014/main" id="{98926C7C-D70E-443A-9A47-5FA0173F8BA9}"/>
+                <a16:creationId xmlns:a16="http://schemas.microsoft.com/office/drawing/2014/main" id="{82AE69AC-90FC-4692-9614-7D4674316591}"/>
               </a:ext>
             </a:extLst>
           </p:cNvPr>
@@ -1959,7 +1959,7 @@
           <p:cNvPr id="6" name="Slide Number Placeholder 5">
             <a:extLst xmlns:a="http://schemas.openxmlformats.org/drawingml/2006/main">
               <a:ext uri="{FF2B5EF4-FFF2-40B4-BE49-F238E27FC236}">
-                <a16:creationId xmlns:a16="http://schemas.microsoft.com/office/drawing/2014/main" id="{A0466125-E76C-4A98-9C87-C42E5A0D57EB}"/>
+                <a16:creationId xmlns:a16="http://schemas.microsoft.com/office/drawing/2014/main" id="{BE34A524-9EA1-42A5-A09E-994D9CC8A0DC}"/>
               </a:ext>
             </a:extLst>
           </p:cNvPr>
@@ -2003,7 +2003,7 @@
           <p:cNvPr id="2" name="Title 1">
             <a:extLst xmlns:a="http://schemas.openxmlformats.org/drawingml/2006/main">
               <a:ext uri="{FF2B5EF4-FFF2-40B4-BE49-F238E27FC236}">
-                <a16:creationId xmlns:a16="http://schemas.microsoft.com/office/drawing/2014/main" id="{3284B186-A5B8-43AA-8C70-DF6A98B2AF14}"/>
+                <a16:creationId xmlns:a16="http://schemas.microsoft.com/office/drawing/2014/main" id="{EBE2428E-3C71-4CDB-B3FD-8F22E55AE4CE}"/>
               </a:ext>
             </a:extLst>
           </p:cNvPr>
@@ -2030,7 +2030,7 @@
           <p:cNvPr id="3" name="Content Placeholder 2">
             <a:extLst xmlns:a="http://schemas.openxmlformats.org/drawingml/2006/main">
               <a:ext uri="{FF2B5EF4-FFF2-40B4-BE49-F238E27FC236}">
-                <a16:creationId xmlns:a16="http://schemas.microsoft.com/office/drawing/2014/main" id="{4B1F6BB0-EBDA-4A76-B153-695E245BD272}"/>
+                <a16:creationId xmlns:a16="http://schemas.microsoft.com/office/drawing/2014/main" id="{FE02ADB3-9052-4C66-83BE-699103F47244}"/>
               </a:ext>
             </a:extLst>
           </p:cNvPr>
@@ -2134,7 +2134,7 @@
           <p:cNvPr id="4" name="Content Placeholder 3">
             <a:extLst xmlns:a="http://schemas.openxmlformats.org/drawingml/2006/main">
               <a:ext uri="{FF2B5EF4-FFF2-40B4-BE49-F238E27FC236}">
-                <a16:creationId xmlns:a16="http://schemas.microsoft.com/office/drawing/2014/main" id="{433F10E9-A582-47EB-914D-3B61B2F00EBE}"/>
+                <a16:creationId xmlns:a16="http://schemas.microsoft.com/office/drawing/2014/main" id="{CD4C6BD3-389F-429A-9141-6C90C5AA5DE3}"/>
               </a:ext>
             </a:extLst>
           </p:cNvPr>
@@ -2238,7 +2238,7 @@
           <p:cNvPr id="5" name="Date Placeholder 4">
             <a:extLst xmlns:a="http://schemas.openxmlformats.org/drawingml/2006/main">
               <a:ext uri="{FF2B5EF4-FFF2-40B4-BE49-F238E27FC236}">
-                <a16:creationId xmlns:a16="http://schemas.microsoft.com/office/drawing/2014/main" id="{59958D28-F313-4961-8D73-588A4F61CBAC}"/>
+                <a16:creationId xmlns:a16="http://schemas.microsoft.com/office/drawing/2014/main" id="{E4716589-925C-4ACD-91FB-BB89412C0B21}"/>
               </a:ext>
             </a:extLst>
           </p:cNvPr>
@@ -2265,7 +2265,7 @@
           <p:cNvPr id="6" name="Footer Placeholder 5">
             <a:extLst xmlns:a="http://schemas.openxmlformats.org/drawingml/2006/main">
               <a:ext uri="{FF2B5EF4-FFF2-40B4-BE49-F238E27FC236}">
-                <a16:creationId xmlns:a16="http://schemas.microsoft.com/office/drawing/2014/main" id="{6B54924A-C74F-4CEB-87CD-7D45256E05C6}"/>
+                <a16:creationId xmlns:a16="http://schemas.microsoft.com/office/drawing/2014/main" id="{E0D5F127-AC5E-4C81-BFE3-E5AAEA658F66}"/>
               </a:ext>
             </a:extLst>
           </p:cNvPr>
@@ -2288,7 +2288,7 @@
           <p:cNvPr id="7" name="Slide Number Placeholder 6">
             <a:extLst xmlns:a="http://schemas.openxmlformats.org/drawingml/2006/main">
               <a:ext uri="{FF2B5EF4-FFF2-40B4-BE49-F238E27FC236}">
-                <a16:creationId xmlns:a16="http://schemas.microsoft.com/office/drawing/2014/main" id="{76079BFE-C50B-4F41-9020-A077C7F8A922}"/>
+                <a16:creationId xmlns:a16="http://schemas.microsoft.com/office/drawing/2014/main" id="{9357DB2A-E462-4230-8EB0-851213FFD8B0}"/>
               </a:ext>
             </a:extLst>
           </p:cNvPr>
@@ -2332,7 +2332,7 @@
           <p:cNvPr id="2" name="Title 1">
             <a:extLst xmlns:a="http://schemas.openxmlformats.org/drawingml/2006/main">
               <a:ext uri="{FF2B5EF4-FFF2-40B4-BE49-F238E27FC236}">
-                <a16:creationId xmlns:a16="http://schemas.microsoft.com/office/drawing/2014/main" id="{F69AE09A-4627-4FC6-9A3B-74D7EA02D03C}"/>
+                <a16:creationId xmlns:a16="http://schemas.microsoft.com/office/drawing/2014/main" id="{03A020F9-6A2A-4A6C-9B4C-60BE1870E3A5}"/>
               </a:ext>
             </a:extLst>
           </p:cNvPr>
@@ -2364,7 +2364,7 @@
           <p:cNvPr id="3" name="Text Placeholder 2">
             <a:extLst xmlns:a="http://schemas.openxmlformats.org/drawingml/2006/main">
               <a:ext uri="{FF2B5EF4-FFF2-40B4-BE49-F238E27FC236}">
-                <a16:creationId xmlns:a16="http://schemas.microsoft.com/office/drawing/2014/main" id="{E2A56503-49A4-4CDF-B15C-1B3F21B51825}"/>
+                <a16:creationId xmlns:a16="http://schemas.microsoft.com/office/drawing/2014/main" id="{63F2CFEB-3EAD-4225-81A8-F4390D85054B}"/>
               </a:ext>
             </a:extLst>
           </p:cNvPr>
@@ -2436,7 +2436,7 @@
           <p:cNvPr id="4" name="Content Placeholder 3">
             <a:extLst xmlns:a="http://schemas.openxmlformats.org/drawingml/2006/main">
               <a:ext uri="{FF2B5EF4-FFF2-40B4-BE49-F238E27FC236}">
-                <a16:creationId xmlns:a16="http://schemas.microsoft.com/office/drawing/2014/main" id="{C13B2C04-E1D8-43B9-B896-B41CCDDA00B2}"/>
+                <a16:creationId xmlns:a16="http://schemas.microsoft.com/office/drawing/2014/main" id="{57750B85-70E5-4E59-8DBE-67F8B1BE65F8}"/>
               </a:ext>
             </a:extLst>
           </p:cNvPr>
@@ -2540,7 +2540,7 @@
           <p:cNvPr id="5" name="Text Placeholder 4">
             <a:extLst xmlns:a="http://schemas.openxmlformats.org/drawingml/2006/main">
               <a:ext uri="{FF2B5EF4-FFF2-40B4-BE49-F238E27FC236}">
-                <a16:creationId xmlns:a16="http://schemas.microsoft.com/office/drawing/2014/main" id="{4CDAC8A4-D7DF-4508-9CDE-7E9D3B43FF2D}"/>
+                <a16:creationId xmlns:a16="http://schemas.microsoft.com/office/drawing/2014/main" id="{CE4637BA-B7E8-4D1F-8384-048315333BCB}"/>
               </a:ext>
             </a:extLst>
           </p:cNvPr>
@@ -2612,7 +2612,7 @@
           <p:cNvPr id="6" name="Content Placeholder 5">
             <a:extLst xmlns:a="http://schemas.openxmlformats.org/drawingml/2006/main">
               <a:ext uri="{FF2B5EF4-FFF2-40B4-BE49-F238E27FC236}">
-                <a16:creationId xmlns:a16="http://schemas.microsoft.com/office/drawing/2014/main" id="{5365F492-A47A-41CB-99D7-1F5E89BB21AE}"/>
+                <a16:creationId xmlns:a16="http://schemas.microsoft.com/office/drawing/2014/main" id="{2BE568A9-DB72-45C3-A2E1-4B279EA4240F}"/>
               </a:ext>
             </a:extLst>
           </p:cNvPr>
@@ -2716,7 +2716,7 @@
           <p:cNvPr id="7" name="Date Placeholder 6">
             <a:extLst xmlns:a="http://schemas.openxmlformats.org/drawingml/2006/main">
               <a:ext uri="{FF2B5EF4-FFF2-40B4-BE49-F238E27FC236}">
-                <a16:creationId xmlns:a16="http://schemas.microsoft.com/office/drawing/2014/main" id="{28FABE77-37AD-4935-A65B-3EDA4612B360}"/>
+                <a16:creationId xmlns:a16="http://schemas.microsoft.com/office/drawing/2014/main" id="{931409B2-C1D6-446B-AF13-10258067E04A}"/>
               </a:ext>
             </a:extLst>
           </p:cNvPr>
@@ -2743,7 +2743,7 @@
           <p:cNvPr id="8" name="Footer Placeholder 7">
             <a:extLst xmlns:a="http://schemas.openxmlformats.org/drawingml/2006/main">
               <a:ext uri="{FF2B5EF4-FFF2-40B4-BE49-F238E27FC236}">
-                <a16:creationId xmlns:a16="http://schemas.microsoft.com/office/drawing/2014/main" id="{564994FD-7AF1-458C-8BEB-6B0D22480A1A}"/>
+                <a16:creationId xmlns:a16="http://schemas.microsoft.com/office/drawing/2014/main" id="{51C03960-000F-4FB1-897D-1B696A61EF45}"/>
               </a:ext>
             </a:extLst>
           </p:cNvPr>
@@ -2766,7 +2766,7 @@
           <p:cNvPr id="9" name="Slide Number Placeholder 8">
             <a:extLst xmlns:a="http://schemas.openxmlformats.org/drawingml/2006/main">
               <a:ext uri="{FF2B5EF4-FFF2-40B4-BE49-F238E27FC236}">
-                <a16:creationId xmlns:a16="http://schemas.microsoft.com/office/drawing/2014/main" id="{52C41FEF-94E4-4C91-9E32-38CD0868CEE2}"/>
+                <a16:creationId xmlns:a16="http://schemas.microsoft.com/office/drawing/2014/main" id="{B23444EB-151D-4751-8ED5-A4360B95A532}"/>
               </a:ext>
             </a:extLst>
           </p:cNvPr>
@@ -2810,7 +2810,7 @@
           <p:cNvPr id="2" name="Title 1">
             <a:extLst xmlns:a="http://schemas.openxmlformats.org/drawingml/2006/main">
               <a:ext uri="{FF2B5EF4-FFF2-40B4-BE49-F238E27FC236}">
-                <a16:creationId xmlns:a16="http://schemas.microsoft.com/office/drawing/2014/main" id="{647D0669-44A5-4B50-8160-719C6750EAA1}"/>
+                <a16:creationId xmlns:a16="http://schemas.microsoft.com/office/drawing/2014/main" id="{2ECB612E-674C-4A1B-81C6-45825594ADE8}"/>
               </a:ext>
             </a:extLst>
           </p:cNvPr>
@@ -2837,7 +2837,7 @@
           <p:cNvPr id="3" name="Date Placeholder 2">
             <a:extLst xmlns:a="http://schemas.openxmlformats.org/drawingml/2006/main">
               <a:ext uri="{FF2B5EF4-FFF2-40B4-BE49-F238E27FC236}">
-                <a16:creationId xmlns:a16="http://schemas.microsoft.com/office/drawing/2014/main" id="{28291939-DE07-4BEF-9511-DD3EF0086F2B}"/>
+                <a16:creationId xmlns:a16="http://schemas.microsoft.com/office/drawing/2014/main" id="{7812FD11-FDCC-463A-8354-D74ED79CD9FD}"/>
               </a:ext>
             </a:extLst>
           </p:cNvPr>
@@ -2864,7 +2864,7 @@
           <p:cNvPr id="4" name="Footer Placeholder 3">
             <a:extLst xmlns:a="http://schemas.openxmlformats.org/drawingml/2006/main">
               <a:ext uri="{FF2B5EF4-FFF2-40B4-BE49-F238E27FC236}">
-                <a16:creationId xmlns:a16="http://schemas.microsoft.com/office/drawing/2014/main" id="{95C99EFE-2FEC-4686-AB87-F05F15A0B40F}"/>
+                <a16:creationId xmlns:a16="http://schemas.microsoft.com/office/drawing/2014/main" id="{EF2DE0E4-6D78-4BCA-858F-58B2D4129E1D}"/>
               </a:ext>
             </a:extLst>
           </p:cNvPr>
@@ -2887,7 +2887,7 @@
           <p:cNvPr id="5" name="Slide Number Placeholder 4">
             <a:extLst xmlns:a="http://schemas.openxmlformats.org/drawingml/2006/main">
               <a:ext uri="{FF2B5EF4-FFF2-40B4-BE49-F238E27FC236}">
-                <a16:creationId xmlns:a16="http://schemas.microsoft.com/office/drawing/2014/main" id="{D798521E-A690-4B7F-9194-294B7AA0E0C1}"/>
+                <a16:creationId xmlns:a16="http://schemas.microsoft.com/office/drawing/2014/main" id="{665CBE6C-4049-419D-A128-8EBC65418A7D}"/>
               </a:ext>
             </a:extLst>
           </p:cNvPr>
@@ -2931,7 +2931,7 @@
           <p:cNvPr id="2" name="Date Placeholder 1">
             <a:extLst xmlns:a="http://schemas.openxmlformats.org/drawingml/2006/main">
               <a:ext uri="{FF2B5EF4-FFF2-40B4-BE49-F238E27FC236}">
-                <a16:creationId xmlns:a16="http://schemas.microsoft.com/office/drawing/2014/main" id="{A8D17E7F-6C90-4D95-A2B5-D86384B8AFAC}"/>
+                <a16:creationId xmlns:a16="http://schemas.microsoft.com/office/drawing/2014/main" id="{E1BD8D4A-01EE-4DA6-A0AD-7EC0969F1235}"/>
               </a:ext>
             </a:extLst>
           </p:cNvPr>
@@ -2958,7 +2958,7 @@
           <p:cNvPr id="3" name="Footer Placeholder 2">
             <a:extLst xmlns:a="http://schemas.openxmlformats.org/drawingml/2006/main">
               <a:ext uri="{FF2B5EF4-FFF2-40B4-BE49-F238E27FC236}">
-                <a16:creationId xmlns:a16="http://schemas.microsoft.com/office/drawing/2014/main" id="{A1139B46-11C4-4130-B592-78C4D446B2A0}"/>
+                <a16:creationId xmlns:a16="http://schemas.microsoft.com/office/drawing/2014/main" id="{EBF7D9F9-0FA1-4239-9855-E3118F144D76}"/>
               </a:ext>
             </a:extLst>
           </p:cNvPr>
@@ -2981,7 +2981,7 @@
           <p:cNvPr id="4" name="Slide Number Placeholder 3">
             <a:extLst xmlns:a="http://schemas.openxmlformats.org/drawingml/2006/main">
               <a:ext uri="{FF2B5EF4-FFF2-40B4-BE49-F238E27FC236}">
-                <a16:creationId xmlns:a16="http://schemas.microsoft.com/office/drawing/2014/main" id="{D9B1329A-EC76-4B69-819E-A270FBD3CF41}"/>
+                <a16:creationId xmlns:a16="http://schemas.microsoft.com/office/drawing/2014/main" id="{22B4CF88-6001-4885-81B7-2AA3519690E0}"/>
               </a:ext>
             </a:extLst>
           </p:cNvPr>
@@ -3025,7 +3025,7 @@
           <p:cNvPr id="2" name="Title 1">
             <a:extLst xmlns:a="http://schemas.openxmlformats.org/drawingml/2006/main">
               <a:ext uri="{FF2B5EF4-FFF2-40B4-BE49-F238E27FC236}">
-                <a16:creationId xmlns:a16="http://schemas.microsoft.com/office/drawing/2014/main" id="{4EB21316-9745-4DEC-885A-AE317B6E4E18}"/>
+                <a16:creationId xmlns:a16="http://schemas.microsoft.com/office/drawing/2014/main" id="{B964E7B8-6CCD-44CB-A676-5330FEE5DE9F}"/>
               </a:ext>
             </a:extLst>
           </p:cNvPr>
@@ -3062,7 +3062,7 @@
           <p:cNvPr id="3" name="Content Placeholder 2">
             <a:extLst xmlns:a="http://schemas.openxmlformats.org/drawingml/2006/main">
               <a:ext uri="{FF2B5EF4-FFF2-40B4-BE49-F238E27FC236}">
-                <a16:creationId xmlns:a16="http://schemas.microsoft.com/office/drawing/2014/main" id="{33A2E532-FBF6-482B-A063-3926C1C389C8}"/>
+                <a16:creationId xmlns:a16="http://schemas.microsoft.com/office/drawing/2014/main" id="{4BE7AA2D-2311-4B30-A98C-9E3D409E78D6}"/>
               </a:ext>
             </a:extLst>
           </p:cNvPr>
@@ -3166,7 +3166,7 @@
           <p:cNvPr id="4" name="Text Placeholder 3">
             <a:extLst xmlns:a="http://schemas.openxmlformats.org/drawingml/2006/main">
               <a:ext uri="{FF2B5EF4-FFF2-40B4-BE49-F238E27FC236}">
-                <a16:creationId xmlns:a16="http://schemas.microsoft.com/office/drawing/2014/main" id="{C978B43F-BBE6-46A0-BAEF-3052C5181A3E}"/>
+                <a16:creationId xmlns:a16="http://schemas.microsoft.com/office/drawing/2014/main" id="{CCED15BC-57DC-4402-AAAB-E75929BA914B}"/>
               </a:ext>
             </a:extLst>
           </p:cNvPr>
@@ -3238,7 +3238,7 @@
           <p:cNvPr id="5" name="Date Placeholder 4">
             <a:extLst xmlns:a="http://schemas.openxmlformats.org/drawingml/2006/main">
               <a:ext uri="{FF2B5EF4-FFF2-40B4-BE49-F238E27FC236}">
-                <a16:creationId xmlns:a16="http://schemas.microsoft.com/office/drawing/2014/main" id="{0EE85029-CBD9-4175-B68B-B7C43C6A27B7}"/>
+                <a16:creationId xmlns:a16="http://schemas.microsoft.com/office/drawing/2014/main" id="{9667E4F3-8584-4F6F-8278-5D8145790448}"/>
               </a:ext>
             </a:extLst>
           </p:cNvPr>
@@ -3265,7 +3265,7 @@
           <p:cNvPr id="6" name="Footer Placeholder 5">
             <a:extLst xmlns:a="http://schemas.openxmlformats.org/drawingml/2006/main">
               <a:ext uri="{FF2B5EF4-FFF2-40B4-BE49-F238E27FC236}">
-                <a16:creationId xmlns:a16="http://schemas.microsoft.com/office/drawing/2014/main" id="{C6D92B07-6336-4C49-8200-ABBA776AA229}"/>
+                <a16:creationId xmlns:a16="http://schemas.microsoft.com/office/drawing/2014/main" id="{F2A5B524-9AA0-456C-9174-D2F136BD1230}"/>
               </a:ext>
             </a:extLst>
           </p:cNvPr>
@@ -3288,7 +3288,7 @@
           <p:cNvPr id="7" name="Slide Number Placeholder 6">
             <a:extLst xmlns:a="http://schemas.openxmlformats.org/drawingml/2006/main">
               <a:ext uri="{FF2B5EF4-FFF2-40B4-BE49-F238E27FC236}">
-                <a16:creationId xmlns:a16="http://schemas.microsoft.com/office/drawing/2014/main" id="{677339B3-2195-4369-860B-9E6216EC0635}"/>
+                <a16:creationId xmlns:a16="http://schemas.microsoft.com/office/drawing/2014/main" id="{A70488FB-923D-40F5-B8C8-CC7DCF4C90E2}"/>
               </a:ext>
             </a:extLst>
           </p:cNvPr>
@@ -3332,7 +3332,7 @@
           <p:cNvPr id="2" name="Title 1">
             <a:extLst xmlns:a="http://schemas.openxmlformats.org/drawingml/2006/main">
               <a:ext uri="{FF2B5EF4-FFF2-40B4-BE49-F238E27FC236}">
-                <a16:creationId xmlns:a16="http://schemas.microsoft.com/office/drawing/2014/main" id="{2EE09357-D0A2-4F5F-8DCC-4BE1927C31EE}"/>
+                <a16:creationId xmlns:a16="http://schemas.microsoft.com/office/drawing/2014/main" id="{6578B670-FCCE-4510-B905-BC7E1CA37A95}"/>
               </a:ext>
             </a:extLst>
           </p:cNvPr>
@@ -3369,7 +3369,7 @@
           <p:cNvPr id="3" name="Picture Placeholder 2">
             <a:extLst xmlns:a="http://schemas.openxmlformats.org/drawingml/2006/main">
               <a:ext uri="{FF2B5EF4-FFF2-40B4-BE49-F238E27FC236}">
-                <a16:creationId xmlns:a16="http://schemas.microsoft.com/office/drawing/2014/main" id="{EF054827-CF2E-48A4-A382-7C8CE3DA2B1F}"/>
+                <a16:creationId xmlns:a16="http://schemas.microsoft.com/office/drawing/2014/main" id="{A577AD40-8B86-4A74-B02E-B0312A77339A}"/>
               </a:ext>
             </a:extLst>
           </p:cNvPr>
@@ -3434,7 +3434,7 @@
           <p:cNvPr id="4" name="Text Placeholder 3">
             <a:extLst xmlns:a="http://schemas.openxmlformats.org/drawingml/2006/main">
               <a:ext uri="{FF2B5EF4-FFF2-40B4-BE49-F238E27FC236}">
-                <a16:creationId xmlns:a16="http://schemas.microsoft.com/office/drawing/2014/main" id="{482AB492-CBD7-4C93-8EB7-3B1502EC5551}"/>
+                <a16:creationId xmlns:a16="http://schemas.microsoft.com/office/drawing/2014/main" id="{6902E262-2423-4818-8ED3-767C3E094098}"/>
               </a:ext>
             </a:extLst>
           </p:cNvPr>
@@ -3506,7 +3506,7 @@
           <p:cNvPr id="5" name="Date Placeholder 4">
             <a:extLst xmlns:a="http://schemas.openxmlformats.org/drawingml/2006/main">
               <a:ext uri="{FF2B5EF4-FFF2-40B4-BE49-F238E27FC236}">
-                <a16:creationId xmlns:a16="http://schemas.microsoft.com/office/drawing/2014/main" id="{939554FF-EA45-49EC-9A58-AFB384F16C7D}"/>
+                <a16:creationId xmlns:a16="http://schemas.microsoft.com/office/drawing/2014/main" id="{DA765508-1C01-4018-A79E-467389C50B3F}"/>
               </a:ext>
             </a:extLst>
           </p:cNvPr>
@@ -3533,7 +3533,7 @@
           <p:cNvPr id="6" name="Footer Placeholder 5">
             <a:extLst xmlns:a="http://schemas.openxmlformats.org/drawingml/2006/main">
               <a:ext uri="{FF2B5EF4-FFF2-40B4-BE49-F238E27FC236}">
-                <a16:creationId xmlns:a16="http://schemas.microsoft.com/office/drawing/2014/main" id="{46180FC4-D104-4954-A9B1-8D9A17F6EED0}"/>
+                <a16:creationId xmlns:a16="http://schemas.microsoft.com/office/drawing/2014/main" id="{0F7F2044-96FA-4D98-8A56-EE06AC242FFD}"/>
               </a:ext>
             </a:extLst>
           </p:cNvPr>
@@ -3556,7 +3556,7 @@
           <p:cNvPr id="7" name="Slide Number Placeholder 6">
             <a:extLst xmlns:a="http://schemas.openxmlformats.org/drawingml/2006/main">
               <a:ext uri="{FF2B5EF4-FFF2-40B4-BE49-F238E27FC236}">
-                <a16:creationId xmlns:a16="http://schemas.microsoft.com/office/drawing/2014/main" id="{DD3DFA04-06F5-466D-99B2-9BC6DDD09AA7}"/>
+                <a16:creationId xmlns:a16="http://schemas.microsoft.com/office/drawing/2014/main" id="{6CC6290C-5750-4490-9860-04E6A8F8E5B6}"/>
               </a:ext>
             </a:extLst>
           </p:cNvPr>
@@ -3605,7 +3605,7 @@
           <p:cNvPr id="2" name="Title Placeholder 1">
             <a:extLst xmlns:a="http://schemas.openxmlformats.org/drawingml/2006/main">
               <a:ext uri="{FF2B5EF4-FFF2-40B4-BE49-F238E27FC236}">
-                <a16:creationId xmlns:a16="http://schemas.microsoft.com/office/drawing/2014/main" id="{90C18CE3-7FDB-44EF-9442-DB1505F22654}"/>
+                <a16:creationId xmlns:a16="http://schemas.microsoft.com/office/drawing/2014/main" id="{B49AA49A-AD13-48B2-AA9A-E5EB10E5822B}"/>
               </a:ext>
             </a:extLst>
           </p:cNvPr>
@@ -3642,7 +3642,7 @@
           <p:cNvPr id="3" name="Text Placeholder 2">
             <a:extLst xmlns:a="http://schemas.openxmlformats.org/drawingml/2006/main">
               <a:ext uri="{FF2B5EF4-FFF2-40B4-BE49-F238E27FC236}">
-                <a16:creationId xmlns:a16="http://schemas.microsoft.com/office/drawing/2014/main" id="{E5D5E560-9D8F-43AE-B2BB-8F6F5BE2D7E5}"/>
+                <a16:creationId xmlns:a16="http://schemas.microsoft.com/office/drawing/2014/main" id="{143B13DB-E618-4B16-A677-C44A0FE7D210}"/>
               </a:ext>
             </a:extLst>
           </p:cNvPr>
@@ -3714,7 +3714,7 @@
           <p:cNvPr id="4" name="Date Placeholder 3">
             <a:extLst xmlns:a="http://schemas.openxmlformats.org/drawingml/2006/main">
               <a:ext uri="{FF2B5EF4-FFF2-40B4-BE49-F238E27FC236}">
-                <a16:creationId xmlns:a16="http://schemas.microsoft.com/office/drawing/2014/main" id="{07C9F6C9-1518-4CAF-A9DD-D01D86DBCA31}"/>
+                <a16:creationId xmlns:a16="http://schemas.microsoft.com/office/drawing/2014/main" id="{DF14D17B-FCF1-4C96-ACD6-D3A35A97A50E}"/>
               </a:ext>
             </a:extLst>
           </p:cNvPr>
@@ -3760,7 +3760,7 @@
           <p:cNvPr id="5" name="Footer Placeholder 4">
             <a:extLst xmlns:a="http://schemas.openxmlformats.org/drawingml/2006/main">
               <a:ext uri="{FF2B5EF4-FFF2-40B4-BE49-F238E27FC236}">
-                <a16:creationId xmlns:a16="http://schemas.microsoft.com/office/drawing/2014/main" id="{1F5E18CC-9BCC-4B48-8497-D726397AFD98}"/>
+                <a16:creationId xmlns:a16="http://schemas.microsoft.com/office/drawing/2014/main" id="{B1E2AE7C-DCF1-4DF1-A798-166E486103AD}"/>
               </a:ext>
             </a:extLst>
           </p:cNvPr>
@@ -3802,7 +3802,7 @@
           <p:cNvPr id="6" name="Slide Number Placeholder 5">
             <a:extLst xmlns:a="http://schemas.openxmlformats.org/drawingml/2006/main">
               <a:ext uri="{FF2B5EF4-FFF2-40B4-BE49-F238E27FC236}">
-                <a16:creationId xmlns:a16="http://schemas.microsoft.com/office/drawing/2014/main" id="{BE2EDA7D-18F5-4ABE-B7FE-0276B2DF69CC}"/>
+                <a16:creationId xmlns:a16="http://schemas.microsoft.com/office/drawing/2014/main" id="{595C6957-CA8F-4A8F-B779-59A75171C09A}"/>
               </a:ext>
             </a:extLst>
           </p:cNvPr>
@@ -3847,17 +3847,17 @@
   </p:cSld>
   <p:clrMap bg1="lt1" tx1="dk1" bg2="lt2" tx2="dk2" accent1="accent1" accent2="accent2" accent3="accent3" accent4="accent4" accent5="accent5" accent6="accent6" hlink="hlink" folHlink="folHlink"/>
   <p:sldLayoutIdLst>
-    <p:sldLayoutId xmlns:r="http://schemas.openxmlformats.org/officeDocument/2006/relationships" id="2147483649" r:id="Rf381d3c10c1741eb"/>
-    <p:sldLayoutId xmlns:r="http://schemas.openxmlformats.org/officeDocument/2006/relationships" id="2147483650" r:id="R67da6943154040b5"/>
-    <p:sldLayoutId xmlns:r="http://schemas.openxmlformats.org/officeDocument/2006/relationships" id="2147483651" r:id="R7025c4ccffba4843"/>
-    <p:sldLayoutId xmlns:r="http://schemas.openxmlformats.org/officeDocument/2006/relationships" id="2147483652" r:id="R80cf027507ce4691"/>
-    <p:sldLayoutId xmlns:r="http://schemas.openxmlformats.org/officeDocument/2006/relationships" id="2147483653" r:id="R8e17744694f04e79"/>
-    <p:sldLayoutId xmlns:r="http://schemas.openxmlformats.org/officeDocument/2006/relationships" id="2147483654" r:id="R54bbf4e904834578"/>
-    <p:sldLayoutId xmlns:r="http://schemas.openxmlformats.org/officeDocument/2006/relationships" id="2147483655" r:id="R7134a574b32a4ab3"/>
-    <p:sldLayoutId xmlns:r="http://schemas.openxmlformats.org/officeDocument/2006/relationships" id="2147483656" r:id="Rd14a60afa23e4704"/>
-    <p:sldLayoutId xmlns:r="http://schemas.openxmlformats.org/officeDocument/2006/relationships" id="2147483657" r:id="Rd34b6da7c88c42ae"/>
-    <p:sldLayoutId xmlns:r="http://schemas.openxmlformats.org/officeDocument/2006/relationships" id="2147483658" r:id="R291949a9a9324403"/>
-    <p:sldLayoutId xmlns:r="http://schemas.openxmlformats.org/officeDocument/2006/relationships" id="2147483659" r:id="R5984dfb5fec249a6"/>
+    <p:sldLayoutId xmlns:r="http://schemas.openxmlformats.org/officeDocument/2006/relationships" id="2147483649" r:id="R29b845cdd8404ee8"/>
+    <p:sldLayoutId xmlns:r="http://schemas.openxmlformats.org/officeDocument/2006/relationships" id="2147483650" r:id="R13b1244742804f87"/>
+    <p:sldLayoutId xmlns:r="http://schemas.openxmlformats.org/officeDocument/2006/relationships" id="2147483651" r:id="R21c6e90ac6554f53"/>
+    <p:sldLayoutId xmlns:r="http://schemas.openxmlformats.org/officeDocument/2006/relationships" id="2147483652" r:id="Rc4661f8b93fe401a"/>
+    <p:sldLayoutId xmlns:r="http://schemas.openxmlformats.org/officeDocument/2006/relationships" id="2147483653" r:id="R93b65d16a4f745e0"/>
+    <p:sldLayoutId xmlns:r="http://schemas.openxmlformats.org/officeDocument/2006/relationships" id="2147483654" r:id="Rfd83aadd606b4ada"/>
+    <p:sldLayoutId xmlns:r="http://schemas.openxmlformats.org/officeDocument/2006/relationships" id="2147483655" r:id="Rcc94d00abb194601"/>
+    <p:sldLayoutId xmlns:r="http://schemas.openxmlformats.org/officeDocument/2006/relationships" id="2147483656" r:id="R3ecfc18c3ce54834"/>
+    <p:sldLayoutId xmlns:r="http://schemas.openxmlformats.org/officeDocument/2006/relationships" id="2147483657" r:id="R8675a82788244ee5"/>
+    <p:sldLayoutId xmlns:r="http://schemas.openxmlformats.org/officeDocument/2006/relationships" id="2147483658" r:id="R4fb004a5ba744e3d"/>
+    <p:sldLayoutId xmlns:r="http://schemas.openxmlformats.org/officeDocument/2006/relationships" id="2147483659" r:id="R94c8cf28bcc94f48"/>
   </p:sldLayoutIdLst>
   <p:txStyles>
     <p:titleStyle>
@@ -4410,7 +4410,7 @@
           <p:cNvPr id="2" name="Rectangle 1">
             <a:extLst xmlns:a="http://schemas.openxmlformats.org/drawingml/2006/main">
               <a:ext uri="{FF2B5EF4-FFF2-40B4-BE49-F238E27FC236}">
-                <a16:creationId xmlns:a16="http://schemas.microsoft.com/office/drawing/2014/main" id="{102104DC-19F5-4EB4-B8E5-3C6B18CC4821}"/>
+                <a16:creationId xmlns:a16="http://schemas.microsoft.com/office/drawing/2014/main" id="{04C99BF8-CFE3-4F25-8642-672AF9DF4DF6}"/>
               </a:ext>
             </a:extLst>
           </p:cNvPr>
@@ -4465,7 +4465,7 @@
           <p:cNvPr id="3" name="TextBox 2">
             <a:extLst xmlns:a="http://schemas.openxmlformats.org/drawingml/2006/main">
               <a:ext uri="{FF2B5EF4-FFF2-40B4-BE49-F238E27FC236}">
-                <a16:creationId xmlns:a16="http://schemas.microsoft.com/office/drawing/2014/main" id="{9F971783-B09D-403C-924B-57DE35701873}"/>
+                <a16:creationId xmlns:a16="http://schemas.microsoft.com/office/drawing/2014/main" id="{8CE65EA6-3687-4BC5-B973-E1CEF249F12A}"/>
               </a:ext>
             </a:extLst>
           </p:cNvPr>
@@ -4512,7 +4512,7 @@
           <p:cNvPr id="4" name="TextBox 3">
             <a:extLst xmlns:a="http://schemas.openxmlformats.org/drawingml/2006/main">
               <a:ext uri="{FF2B5EF4-FFF2-40B4-BE49-F238E27FC236}">
-                <a16:creationId xmlns:a16="http://schemas.microsoft.com/office/drawing/2014/main" id="{FF035841-684F-4369-85E5-168CA8113F0D}"/>
+                <a16:creationId xmlns:a16="http://schemas.microsoft.com/office/drawing/2014/main" id="{6B701360-E0FA-4797-9671-57C30DC6D952}"/>
               </a:ext>
             </a:extLst>
           </p:cNvPr>
@@ -4580,7 +4580,7 @@
           <p:cNvPr id="5" name="TextBox 4">
             <a:extLst xmlns:a="http://schemas.openxmlformats.org/drawingml/2006/main">
               <a:ext uri="{FF2B5EF4-FFF2-40B4-BE49-F238E27FC236}">
-                <a16:creationId xmlns:a16="http://schemas.microsoft.com/office/drawing/2014/main" id="{8191CFAC-3BFE-4F57-B559-8F7FBBB412C0}"/>
+                <a16:creationId xmlns:a16="http://schemas.microsoft.com/office/drawing/2014/main" id="{6CEA0DEB-BCD6-475C-B512-3C1AF3F79C0D}"/>
               </a:ext>
             </a:extLst>
           </p:cNvPr>
@@ -4627,7 +4627,7 @@
           <p:cNvPr id="6" name="Rectangle 5">
             <a:extLst xmlns:a="http://schemas.openxmlformats.org/drawingml/2006/main">
               <a:ext uri="{FF2B5EF4-FFF2-40B4-BE49-F238E27FC236}">
-                <a16:creationId xmlns:a16="http://schemas.microsoft.com/office/drawing/2014/main" id="{0B40763A-3FBB-464E-8A89-BEA681B83B22}"/>
+                <a16:creationId xmlns:a16="http://schemas.microsoft.com/office/drawing/2014/main" id="{98D4CD42-B9D1-4BF9-98DB-3FCE5CA5478F}"/>
               </a:ext>
             </a:extLst>
           </p:cNvPr>
@@ -4682,7 +4682,7 @@
           <p:cNvPr id="7" name="TextBox 6">
             <a:extLst xmlns:a="http://schemas.openxmlformats.org/drawingml/2006/main">
               <a:ext uri="{FF2B5EF4-FFF2-40B4-BE49-F238E27FC236}">
-                <a16:creationId xmlns:a16="http://schemas.microsoft.com/office/drawing/2014/main" id="{61AED402-2B1F-46D3-9341-2FA1DF0912C5}"/>
+                <a16:creationId xmlns:a16="http://schemas.microsoft.com/office/drawing/2014/main" id="{4E380C14-7EF9-41F2-9503-66C5DFD496ED}"/>
               </a:ext>
             </a:extLst>
           </p:cNvPr>
@@ -4729,7 +4729,7 @@
           <p:cNvPr id="8" name="TextBox 7">
             <a:extLst xmlns:a="http://schemas.openxmlformats.org/drawingml/2006/main">
               <a:ext uri="{FF2B5EF4-FFF2-40B4-BE49-F238E27FC236}">
-                <a16:creationId xmlns:a16="http://schemas.microsoft.com/office/drawing/2014/main" id="{E806902E-37A7-4046-80BB-5DC99EADAD82}"/>
+                <a16:creationId xmlns:a16="http://schemas.microsoft.com/office/drawing/2014/main" id="{8756C361-44C3-4ED2-91CB-809419848185}"/>
               </a:ext>
             </a:extLst>
           </p:cNvPr>
@@ -4766,7 +4766,7 @@
                 <a:ea typeface="Aptos"/>
                 <a:cs typeface="Aptos"/>
               </a:rPr>
-              <a:t>2026.07.23-15</a:t>
+              <a:t>2026.07.23-16</a:t>
             </a:r>
           </a:p>
         </p:txBody>
@@ -4776,7 +4776,7 @@
           <p:cNvPr id="9" name="TextBox 8">
             <a:extLst xmlns:a="http://schemas.openxmlformats.org/drawingml/2006/main">
               <a:ext uri="{FF2B5EF4-FFF2-40B4-BE49-F238E27FC236}">
-                <a16:creationId xmlns:a16="http://schemas.microsoft.com/office/drawing/2014/main" id="{F33EEB03-25C0-433B-B77F-278F4BED4839}"/>
+                <a16:creationId xmlns:a16="http://schemas.microsoft.com/office/drawing/2014/main" id="{2E87FEC6-7F85-4C01-814F-E7F696773B9C}"/>
               </a:ext>
             </a:extLst>
           </p:cNvPr>
@@ -4844,7 +4844,7 @@
           <p:cNvPr id="10" name="TextBox 9">
             <a:extLst xmlns:a="http://schemas.openxmlformats.org/drawingml/2006/main">
               <a:ext uri="{FF2B5EF4-FFF2-40B4-BE49-F238E27FC236}">
-                <a16:creationId xmlns:a16="http://schemas.microsoft.com/office/drawing/2014/main" id="{EA30598A-5721-42D2-9415-5FD8C7A50247}"/>
+                <a16:creationId xmlns:a16="http://schemas.microsoft.com/office/drawing/2014/main" id="{DA8AC0A9-8FD3-4E1B-8C03-54862E7A4067}"/>
               </a:ext>
             </a:extLst>
           </p:cNvPr>
@@ -4891,7 +4891,7 @@
           <p:cNvPr id="11" name="TextBox 10">
             <a:extLst xmlns:a="http://schemas.openxmlformats.org/drawingml/2006/main">
               <a:ext uri="{FF2B5EF4-FFF2-40B4-BE49-F238E27FC236}">
-                <a16:creationId xmlns:a16="http://schemas.microsoft.com/office/drawing/2014/main" id="{48B1F8D6-45B2-4F4C-9BD1-7E3EC06806B6}"/>
+                <a16:creationId xmlns:a16="http://schemas.microsoft.com/office/drawing/2014/main" id="{502CB51C-8D82-4D58-9A5D-7DBC1E5C3252}"/>
               </a:ext>
             </a:extLst>
           </p:cNvPr>
@@ -4938,7 +4938,7 @@
           <p:cNvPr id="12" name="TextBox 11">
             <a:extLst xmlns:a="http://schemas.openxmlformats.org/drawingml/2006/main">
               <a:ext uri="{FF2B5EF4-FFF2-40B4-BE49-F238E27FC236}">
-                <a16:creationId xmlns:a16="http://schemas.microsoft.com/office/drawing/2014/main" id="{2CD25960-C32A-46C9-B0A8-D8390812F6BA}"/>
+                <a16:creationId xmlns:a16="http://schemas.microsoft.com/office/drawing/2014/main" id="{295EB1BD-0F3F-4DB9-BAEB-4C17B628E3B0}"/>
               </a:ext>
             </a:extLst>
           </p:cNvPr>
@@ -4983,7 +4983,7 @@
     </p:spTree>
     <p:extLst>
       <p:ext uri="{BB962C8B-B14F-4D97-AF65-F5344CB8AC3E}">
-        <p14:creationId xmlns:p14="http://schemas.microsoft.com/office/powerpoint/2010/main" val="1472000903"/>
+        <p14:creationId xmlns:p14="http://schemas.microsoft.com/office/powerpoint/2010/main" val="1441055730"/>
       </p:ext>
     </p:extLst>
   </p:cSld>
@@ -5007,7 +5007,7 @@
           <p:cNvPr id="2" name="TextBox 1">
             <a:extLst xmlns:a="http://schemas.openxmlformats.org/drawingml/2006/main">
               <a:ext uri="{FF2B5EF4-FFF2-40B4-BE49-F238E27FC236}">
-                <a16:creationId xmlns:a16="http://schemas.microsoft.com/office/drawing/2014/main" id="{9747DD21-6C9F-45EF-A98A-91EB361B19E1}"/>
+                <a16:creationId xmlns:a16="http://schemas.microsoft.com/office/drawing/2014/main" id="{59937333-AF30-4031-98AE-00AC0C250D52}"/>
               </a:ext>
             </a:extLst>
           </p:cNvPr>
@@ -5054,7 +5054,7 @@
           <p:cNvPr id="3" name="TextBox 2">
             <a:extLst xmlns:a="http://schemas.openxmlformats.org/drawingml/2006/main">
               <a:ext uri="{FF2B5EF4-FFF2-40B4-BE49-F238E27FC236}">
-                <a16:creationId xmlns:a16="http://schemas.microsoft.com/office/drawing/2014/main" id="{1EDE4DFA-6489-4B3A-A465-A512E720B70B}"/>
+                <a16:creationId xmlns:a16="http://schemas.microsoft.com/office/drawing/2014/main" id="{15E156F2-C826-4D12-8B60-6432B65DA4C2}"/>
               </a:ext>
             </a:extLst>
           </p:cNvPr>
@@ -5101,7 +5101,7 @@
           <p:cNvPr id="4" name="Rectangle 3">
             <a:extLst xmlns:a="http://schemas.openxmlformats.org/drawingml/2006/main">
               <a:ext uri="{FF2B5EF4-FFF2-40B4-BE49-F238E27FC236}">
-                <a16:creationId xmlns:a16="http://schemas.microsoft.com/office/drawing/2014/main" id="{22A51E57-132F-460D-94D5-D5F14AABB514}"/>
+                <a16:creationId xmlns:a16="http://schemas.microsoft.com/office/drawing/2014/main" id="{810141DF-2A21-4F68-B7C1-E417C35EFAA1}"/>
               </a:ext>
             </a:extLst>
           </p:cNvPr>
@@ -5156,7 +5156,7 @@
           <p:cNvPr id="5" name="Rectangle 4">
             <a:extLst xmlns:a="http://schemas.openxmlformats.org/drawingml/2006/main">
               <a:ext uri="{FF2B5EF4-FFF2-40B4-BE49-F238E27FC236}">
-                <a16:creationId xmlns:a16="http://schemas.microsoft.com/office/drawing/2014/main" id="{78047D98-9B9C-4CFF-A05A-8A8066D02D84}"/>
+                <a16:creationId xmlns:a16="http://schemas.microsoft.com/office/drawing/2014/main" id="{525A52AC-05C9-425F-89B2-1A8AA29290D5}"/>
               </a:ext>
             </a:extLst>
           </p:cNvPr>
@@ -5211,7 +5211,7 @@
           <p:cNvPr id="6" name="TextBox 5">
             <a:extLst xmlns:a="http://schemas.openxmlformats.org/drawingml/2006/main">
               <a:ext uri="{FF2B5EF4-FFF2-40B4-BE49-F238E27FC236}">
-                <a16:creationId xmlns:a16="http://schemas.microsoft.com/office/drawing/2014/main" id="{51A8B9C4-A9B5-402A-ADEA-7117BA6DE4F9}"/>
+                <a16:creationId xmlns:a16="http://schemas.microsoft.com/office/drawing/2014/main" id="{3FFAB2B2-4ECA-4C93-964F-F301469EED29}"/>
               </a:ext>
             </a:extLst>
           </p:cNvPr>
@@ -5248,7 +5248,7 @@
                 <a:ea typeface="Aptos"/>
                 <a:cs typeface="Aptos"/>
               </a:rPr>
-              <a:t>Independent public evidence summary · 2026.07.23-15 · 2026-07-22 · Sources: EPO; Germany — official judgments; WIPO</a:t>
+              <a:t>Independent public evidence summary · 2026.07.23-16 · 2026-07-22 · Sources: EPO; Germany — official judgments; WIPO</a:t>
             </a:r>
           </a:p>
         </p:txBody>
@@ -5258,7 +5258,7 @@
           <p:cNvPr id="7" name="TextBox 6">
             <a:extLst xmlns:a="http://schemas.openxmlformats.org/drawingml/2006/main">
               <a:ext uri="{FF2B5EF4-FFF2-40B4-BE49-F238E27FC236}">
-                <a16:creationId xmlns:a16="http://schemas.microsoft.com/office/drawing/2014/main" id="{0FCDFD0D-E5F1-401F-BA56-7CA116D3581F}"/>
+                <a16:creationId xmlns:a16="http://schemas.microsoft.com/office/drawing/2014/main" id="{A3FE10D3-5421-497B-B2AD-469E7AD1E16E}"/>
               </a:ext>
             </a:extLst>
           </p:cNvPr>
@@ -5305,7 +5305,7 @@
           <p:cNvPr id="8" name="TextBox 7">
             <a:extLst xmlns:a="http://schemas.openxmlformats.org/drawingml/2006/main">
               <a:ext uri="{FF2B5EF4-FFF2-40B4-BE49-F238E27FC236}">
-                <a16:creationId xmlns:a16="http://schemas.microsoft.com/office/drawing/2014/main" id="{629DD86B-28DC-4E32-AA5B-380FC837DBFB}"/>
+                <a16:creationId xmlns:a16="http://schemas.microsoft.com/office/drawing/2014/main" id="{DB994602-739E-4209-BDB7-A32914A1B96F}"/>
               </a:ext>
             </a:extLst>
           </p:cNvPr>
@@ -5352,7 +5352,7 @@
           <p:cNvPr id="9" name="TextBox 8">
             <a:extLst xmlns:a="http://schemas.openxmlformats.org/drawingml/2006/main">
               <a:ext uri="{FF2B5EF4-FFF2-40B4-BE49-F238E27FC236}">
-                <a16:creationId xmlns:a16="http://schemas.microsoft.com/office/drawing/2014/main" id="{1B3F6FFF-B0F5-40FE-9931-81126283C55D}"/>
+                <a16:creationId xmlns:a16="http://schemas.microsoft.com/office/drawing/2014/main" id="{5718091C-5C27-402A-8FC4-DDE5FCD46DD5}"/>
               </a:ext>
             </a:extLst>
           </p:cNvPr>
@@ -5449,7 +5449,7 @@
           <p:cNvPr id="10" name="Rounded Rectangle 9">
             <a:extLst xmlns:a="http://schemas.openxmlformats.org/drawingml/2006/main">
               <a:ext uri="{FF2B5EF4-FFF2-40B4-BE49-F238E27FC236}">
-                <a16:creationId xmlns:a16="http://schemas.microsoft.com/office/drawing/2014/main" id="{F35B44E9-A347-4532-BBDE-B7079689F611}"/>
+                <a16:creationId xmlns:a16="http://schemas.microsoft.com/office/drawing/2014/main" id="{924D690E-9CD0-4ADF-B9EB-9CBF36336864}"/>
               </a:ext>
             </a:extLst>
           </p:cNvPr>
@@ -5506,7 +5506,7 @@
           <p:cNvPr id="11" name="TextBox 10">
             <a:extLst xmlns:a="http://schemas.openxmlformats.org/drawingml/2006/main">
               <a:ext uri="{FF2B5EF4-FFF2-40B4-BE49-F238E27FC236}">
-                <a16:creationId xmlns:a16="http://schemas.microsoft.com/office/drawing/2014/main" id="{FE3E7B2E-95A0-47AC-918A-B3F2B9882D59}"/>
+                <a16:creationId xmlns:a16="http://schemas.microsoft.com/office/drawing/2014/main" id="{A292649C-C253-4284-927A-D5617CBAB3A5}"/>
               </a:ext>
             </a:extLst>
           </p:cNvPr>
@@ -5553,7 +5553,7 @@
           <p:cNvPr id="12" name="TextBox 11">
             <a:extLst xmlns:a="http://schemas.openxmlformats.org/drawingml/2006/main">
               <a:ext uri="{FF2B5EF4-FFF2-40B4-BE49-F238E27FC236}">
-                <a16:creationId xmlns:a16="http://schemas.microsoft.com/office/drawing/2014/main" id="{16A953A7-680D-4017-89C4-AF4DE2A50C70}"/>
+                <a16:creationId xmlns:a16="http://schemas.microsoft.com/office/drawing/2014/main" id="{54CDEF65-C20E-4DF7-A949-DA192E1E51FD}"/>
               </a:ext>
             </a:extLst>
           </p:cNvPr>
@@ -5598,7 +5598,7 @@
     </p:spTree>
     <p:extLst>
       <p:ext uri="{BB962C8B-B14F-4D97-AF65-F5344CB8AC3E}">
-        <p14:creationId xmlns:p14="http://schemas.microsoft.com/office/powerpoint/2010/main" val="264999062"/>
+        <p14:creationId xmlns:p14="http://schemas.microsoft.com/office/powerpoint/2010/main" val="1574931909"/>
       </p:ext>
     </p:extLst>
   </p:cSld>
@@ -5622,7 +5622,7 @@
           <p:cNvPr id="2" name="TextBox 1">
             <a:extLst xmlns:a="http://schemas.openxmlformats.org/drawingml/2006/main">
               <a:ext uri="{FF2B5EF4-FFF2-40B4-BE49-F238E27FC236}">
-                <a16:creationId xmlns:a16="http://schemas.microsoft.com/office/drawing/2014/main" id="{B835AF46-6BA6-4A76-9DF8-D79053C9ABF4}"/>
+                <a16:creationId xmlns:a16="http://schemas.microsoft.com/office/drawing/2014/main" id="{F2B88859-14FE-4B77-8286-9F2102E2BED7}"/>
               </a:ext>
             </a:extLst>
           </p:cNvPr>
@@ -5669,7 +5669,7 @@
           <p:cNvPr id="3" name="TextBox 2">
             <a:extLst xmlns:a="http://schemas.openxmlformats.org/drawingml/2006/main">
               <a:ext uri="{FF2B5EF4-FFF2-40B4-BE49-F238E27FC236}">
-                <a16:creationId xmlns:a16="http://schemas.microsoft.com/office/drawing/2014/main" id="{C1124CDC-AD43-4F59-AD32-5BC56FE07F41}"/>
+                <a16:creationId xmlns:a16="http://schemas.microsoft.com/office/drawing/2014/main" id="{D82EE995-BA1A-4E45-9FCD-7F66AD906B10}"/>
               </a:ext>
             </a:extLst>
           </p:cNvPr>
@@ -5716,7 +5716,7 @@
           <p:cNvPr id="4" name="Rectangle 3">
             <a:extLst xmlns:a="http://schemas.openxmlformats.org/drawingml/2006/main">
               <a:ext uri="{FF2B5EF4-FFF2-40B4-BE49-F238E27FC236}">
-                <a16:creationId xmlns:a16="http://schemas.microsoft.com/office/drawing/2014/main" id="{9BDBE8B1-CE79-4893-80FF-86E04A13D5F6}"/>
+                <a16:creationId xmlns:a16="http://schemas.microsoft.com/office/drawing/2014/main" id="{3AD39AB3-BB74-4E49-AA3E-AE5B7FBFBB26}"/>
               </a:ext>
             </a:extLst>
           </p:cNvPr>
@@ -5771,7 +5771,7 @@
           <p:cNvPr id="5" name="Rectangle 4">
             <a:extLst xmlns:a="http://schemas.openxmlformats.org/drawingml/2006/main">
               <a:ext uri="{FF2B5EF4-FFF2-40B4-BE49-F238E27FC236}">
-                <a16:creationId xmlns:a16="http://schemas.microsoft.com/office/drawing/2014/main" id="{77569667-9464-4F93-8BF2-A318C65F4E3E}"/>
+                <a16:creationId xmlns:a16="http://schemas.microsoft.com/office/drawing/2014/main" id="{31DEA33C-16AE-46CA-B802-3052A938BBFA}"/>
               </a:ext>
             </a:extLst>
           </p:cNvPr>
@@ -5826,7 +5826,7 @@
           <p:cNvPr id="6" name="TextBox 5">
             <a:extLst xmlns:a="http://schemas.openxmlformats.org/drawingml/2006/main">
               <a:ext uri="{FF2B5EF4-FFF2-40B4-BE49-F238E27FC236}">
-                <a16:creationId xmlns:a16="http://schemas.microsoft.com/office/drawing/2014/main" id="{C0110485-5DC7-455A-B10C-77060305BC85}"/>
+                <a16:creationId xmlns:a16="http://schemas.microsoft.com/office/drawing/2014/main" id="{6E014067-0BBD-4B57-B275-8E7EF9ED73DA}"/>
               </a:ext>
             </a:extLst>
           </p:cNvPr>
@@ -5863,7 +5863,7 @@
                 <a:ea typeface="Aptos"/>
                 <a:cs typeface="Aptos"/>
               </a:rPr>
-              <a:t>Independent public evidence summary · 2026.07.23-15 · 2026-07-22 · Sources: EPO Register; EP3032975B2; 8 Ni 18/24 (EP); 7 O 3341/24</a:t>
+              <a:t>Independent public evidence summary · 2026.07.23-16 · 2026-07-22 · Sources: EPO Register; EP3032975B2; 8 Ni 18/24 (EP); 7 O 3341/24</a:t>
             </a:r>
           </a:p>
         </p:txBody>
@@ -5873,7 +5873,7 @@
           <p:cNvPr id="7" name="TextBox 6">
             <a:extLst xmlns:a="http://schemas.openxmlformats.org/drawingml/2006/main">
               <a:ext uri="{FF2B5EF4-FFF2-40B4-BE49-F238E27FC236}">
-                <a16:creationId xmlns:a16="http://schemas.microsoft.com/office/drawing/2014/main" id="{69234F66-FDAD-4827-A132-27C71512319E}"/>
+                <a16:creationId xmlns:a16="http://schemas.microsoft.com/office/drawing/2014/main" id="{0E63849D-92F1-4922-B3C0-6536EF2F02F1}"/>
               </a:ext>
             </a:extLst>
           </p:cNvPr>
@@ -5920,7 +5920,7 @@
           <p:cNvPr id="8" name="Rounded Rectangle 7">
             <a:extLst xmlns:a="http://schemas.openxmlformats.org/drawingml/2006/main">
               <a:ext uri="{FF2B5EF4-FFF2-40B4-BE49-F238E27FC236}">
-                <a16:creationId xmlns:a16="http://schemas.microsoft.com/office/drawing/2014/main" id="{4078A325-4A46-4DC9-B1F1-088E64F21C36}"/>
+                <a16:creationId xmlns:a16="http://schemas.microsoft.com/office/drawing/2014/main" id="{E0E05D08-6529-49D1-A1A3-7A89EB1A1B4D}"/>
               </a:ext>
             </a:extLst>
           </p:cNvPr>
@@ -5977,7 +5977,7 @@
           <p:cNvPr id="9" name="TextBox 8">
             <a:extLst xmlns:a="http://schemas.openxmlformats.org/drawingml/2006/main">
               <a:ext uri="{FF2B5EF4-FFF2-40B4-BE49-F238E27FC236}">
-                <a16:creationId xmlns:a16="http://schemas.microsoft.com/office/drawing/2014/main" id="{4E0CF374-6EBF-4DBB-B3E1-93BB0CC9D094}"/>
+                <a16:creationId xmlns:a16="http://schemas.microsoft.com/office/drawing/2014/main" id="{9359521D-0BC5-4EE3-A587-FD68ED2E5F01}"/>
               </a:ext>
             </a:extLst>
           </p:cNvPr>
@@ -6024,7 +6024,7 @@
           <p:cNvPr id="10" name="TextBox 9">
             <a:extLst xmlns:a="http://schemas.openxmlformats.org/drawingml/2006/main">
               <a:ext uri="{FF2B5EF4-FFF2-40B4-BE49-F238E27FC236}">
-                <a16:creationId xmlns:a16="http://schemas.microsoft.com/office/drawing/2014/main" id="{A459A245-ABEA-4A5B-A780-3B1300A56D2C}"/>
+                <a16:creationId xmlns:a16="http://schemas.microsoft.com/office/drawing/2014/main" id="{EDEE0A46-C774-40C9-8B66-2C3D21DECA07}"/>
               </a:ext>
             </a:extLst>
           </p:cNvPr>
@@ -6071,7 +6071,7 @@
           <p:cNvPr id="11" name="Rounded Rectangle 10">
             <a:extLst xmlns:a="http://schemas.openxmlformats.org/drawingml/2006/main">
               <a:ext uri="{FF2B5EF4-FFF2-40B4-BE49-F238E27FC236}">
-                <a16:creationId xmlns:a16="http://schemas.microsoft.com/office/drawing/2014/main" id="{187111F3-F5BD-4350-8CA6-98BE02A9A311}"/>
+                <a16:creationId xmlns:a16="http://schemas.microsoft.com/office/drawing/2014/main" id="{C9015F74-2FA3-44BC-92D2-EA7E9EDAA6F5}"/>
               </a:ext>
             </a:extLst>
           </p:cNvPr>
@@ -6128,7 +6128,7 @@
           <p:cNvPr id="12" name="TextBox 11">
             <a:extLst xmlns:a="http://schemas.openxmlformats.org/drawingml/2006/main">
               <a:ext uri="{FF2B5EF4-FFF2-40B4-BE49-F238E27FC236}">
-                <a16:creationId xmlns:a16="http://schemas.microsoft.com/office/drawing/2014/main" id="{E0844960-18E9-47AD-9379-FAEB9A735E15}"/>
+                <a16:creationId xmlns:a16="http://schemas.microsoft.com/office/drawing/2014/main" id="{007B2437-FB3D-44C8-AFEB-867B47DD74FD}"/>
               </a:ext>
             </a:extLst>
           </p:cNvPr>
@@ -6175,7 +6175,7 @@
           <p:cNvPr id="13" name="TextBox 12">
             <a:extLst xmlns:a="http://schemas.openxmlformats.org/drawingml/2006/main">
               <a:ext uri="{FF2B5EF4-FFF2-40B4-BE49-F238E27FC236}">
-                <a16:creationId xmlns:a16="http://schemas.microsoft.com/office/drawing/2014/main" id="{DF521F85-F04A-4B28-AD0A-218DC965EE1B}"/>
+                <a16:creationId xmlns:a16="http://schemas.microsoft.com/office/drawing/2014/main" id="{631E36A0-AABE-4127-9298-DA34539730D9}"/>
               </a:ext>
             </a:extLst>
           </p:cNvPr>
@@ -6222,7 +6222,7 @@
           <p:cNvPr id="14" name="Rounded Rectangle 13">
             <a:extLst xmlns:a="http://schemas.openxmlformats.org/drawingml/2006/main">
               <a:ext uri="{FF2B5EF4-FFF2-40B4-BE49-F238E27FC236}">
-                <a16:creationId xmlns:a16="http://schemas.microsoft.com/office/drawing/2014/main" id="{F33B0A4F-F456-46B4-A648-3C765B5B9016}"/>
+                <a16:creationId xmlns:a16="http://schemas.microsoft.com/office/drawing/2014/main" id="{4C636FEC-66D8-4258-9D02-8C86321BBF2B}"/>
               </a:ext>
             </a:extLst>
           </p:cNvPr>
@@ -6279,7 +6279,7 @@
           <p:cNvPr id="15" name="TextBox 14">
             <a:extLst xmlns:a="http://schemas.openxmlformats.org/drawingml/2006/main">
               <a:ext uri="{FF2B5EF4-FFF2-40B4-BE49-F238E27FC236}">
-                <a16:creationId xmlns:a16="http://schemas.microsoft.com/office/drawing/2014/main" id="{009050D8-30F4-4863-B341-2C3292A010E3}"/>
+                <a16:creationId xmlns:a16="http://schemas.microsoft.com/office/drawing/2014/main" id="{505A9501-FBBE-4A55-8E5F-A85BF2D3F2DA}"/>
               </a:ext>
             </a:extLst>
           </p:cNvPr>
@@ -6326,7 +6326,7 @@
           <p:cNvPr id="16" name="TextBox 15">
             <a:extLst xmlns:a="http://schemas.openxmlformats.org/drawingml/2006/main">
               <a:ext uri="{FF2B5EF4-FFF2-40B4-BE49-F238E27FC236}">
-                <a16:creationId xmlns:a16="http://schemas.microsoft.com/office/drawing/2014/main" id="{11D08590-A768-4EEE-9A05-2D85EB720893}"/>
+                <a16:creationId xmlns:a16="http://schemas.microsoft.com/office/drawing/2014/main" id="{BFA181DD-7A5D-4656-A4EC-4F656868C3C7}"/>
               </a:ext>
             </a:extLst>
           </p:cNvPr>
@@ -6373,7 +6373,7 @@
           <p:cNvPr id="17" name="TextBox 16">
             <a:extLst xmlns:a="http://schemas.openxmlformats.org/drawingml/2006/main">
               <a:ext uri="{FF2B5EF4-FFF2-40B4-BE49-F238E27FC236}">
-                <a16:creationId xmlns:a16="http://schemas.microsoft.com/office/drawing/2014/main" id="{95878311-0A86-41F0-993D-F2440B1DAB2E}"/>
+                <a16:creationId xmlns:a16="http://schemas.microsoft.com/office/drawing/2014/main" id="{120D94B1-46EA-4CF1-AACB-8C8B88C2EFD2}"/>
               </a:ext>
             </a:extLst>
           </p:cNvPr>
@@ -6420,7 +6420,7 @@
           <p:cNvPr id="18" name="Rounded Rectangle 17">
             <a:extLst xmlns:a="http://schemas.openxmlformats.org/drawingml/2006/main">
               <a:ext uri="{FF2B5EF4-FFF2-40B4-BE49-F238E27FC236}">
-                <a16:creationId xmlns:a16="http://schemas.microsoft.com/office/drawing/2014/main" id="{25C52AD5-39D4-4630-A6E9-38BA6FCB2C34}"/>
+                <a16:creationId xmlns:a16="http://schemas.microsoft.com/office/drawing/2014/main" id="{258F4757-B246-4989-BAAE-EE246032E4DF}"/>
               </a:ext>
             </a:extLst>
           </p:cNvPr>
@@ -6477,7 +6477,7 @@
           <p:cNvPr id="19" name="TextBox 18">
             <a:extLst xmlns:a="http://schemas.openxmlformats.org/drawingml/2006/main">
               <a:ext uri="{FF2B5EF4-FFF2-40B4-BE49-F238E27FC236}">
-                <a16:creationId xmlns:a16="http://schemas.microsoft.com/office/drawing/2014/main" id="{91EA63DA-24A7-48DF-B007-D48E2D44678D}"/>
+                <a16:creationId xmlns:a16="http://schemas.microsoft.com/office/drawing/2014/main" id="{72C086AB-EE3B-4936-89EF-415DDB56C6BA}"/>
               </a:ext>
             </a:extLst>
           </p:cNvPr>
@@ -6524,7 +6524,7 @@
           <p:cNvPr id="20" name="TextBox 19">
             <a:extLst xmlns:a="http://schemas.openxmlformats.org/drawingml/2006/main">
               <a:ext uri="{FF2B5EF4-FFF2-40B4-BE49-F238E27FC236}">
-                <a16:creationId xmlns:a16="http://schemas.microsoft.com/office/drawing/2014/main" id="{CD460F25-03E9-4432-97A4-160C3277F342}"/>
+                <a16:creationId xmlns:a16="http://schemas.microsoft.com/office/drawing/2014/main" id="{0C0E6C4D-16B3-4E97-A616-1FB900F4DAD4}"/>
               </a:ext>
             </a:extLst>
           </p:cNvPr>
@@ -6569,7 +6569,7 @@
     </p:spTree>
     <p:extLst>
       <p:ext uri="{BB962C8B-B14F-4D97-AF65-F5344CB8AC3E}">
-        <p14:creationId xmlns:p14="http://schemas.microsoft.com/office/powerpoint/2010/main" val="1459978526"/>
+        <p14:creationId xmlns:p14="http://schemas.microsoft.com/office/powerpoint/2010/main" val="1363790002"/>
       </p:ext>
     </p:extLst>
   </p:cSld>
@@ -6593,7 +6593,7 @@
           <p:cNvPr id="2" name="TextBox 1">
             <a:extLst xmlns:a="http://schemas.openxmlformats.org/drawingml/2006/main">
               <a:ext uri="{FF2B5EF4-FFF2-40B4-BE49-F238E27FC236}">
-                <a16:creationId xmlns:a16="http://schemas.microsoft.com/office/drawing/2014/main" id="{445BAA12-5191-4027-BB3C-D783C27E9EBC}"/>
+                <a16:creationId xmlns:a16="http://schemas.microsoft.com/office/drawing/2014/main" id="{E10CF367-7A4F-4008-9161-405025F86A8E}"/>
               </a:ext>
             </a:extLst>
           </p:cNvPr>
@@ -6640,7 +6640,7 @@
           <p:cNvPr id="3" name="TextBox 2">
             <a:extLst xmlns:a="http://schemas.openxmlformats.org/drawingml/2006/main">
               <a:ext uri="{FF2B5EF4-FFF2-40B4-BE49-F238E27FC236}">
-                <a16:creationId xmlns:a16="http://schemas.microsoft.com/office/drawing/2014/main" id="{76EF573C-BD8D-422B-8EC2-E8BA55CAABBF}"/>
+                <a16:creationId xmlns:a16="http://schemas.microsoft.com/office/drawing/2014/main" id="{28037611-BFB7-4F00-BA08-9D68E3F3D533}"/>
               </a:ext>
             </a:extLst>
           </p:cNvPr>
@@ -6687,7 +6687,7 @@
           <p:cNvPr id="4" name="Rectangle 3">
             <a:extLst xmlns:a="http://schemas.openxmlformats.org/drawingml/2006/main">
               <a:ext uri="{FF2B5EF4-FFF2-40B4-BE49-F238E27FC236}">
-                <a16:creationId xmlns:a16="http://schemas.microsoft.com/office/drawing/2014/main" id="{5BDAEB3A-48B9-4928-BD9C-0194447C15B3}"/>
+                <a16:creationId xmlns:a16="http://schemas.microsoft.com/office/drawing/2014/main" id="{95EE173C-A30B-4CCE-86A8-F177B889668D}"/>
               </a:ext>
             </a:extLst>
           </p:cNvPr>
@@ -6742,7 +6742,7 @@
           <p:cNvPr id="5" name="Rectangle 4">
             <a:extLst xmlns:a="http://schemas.openxmlformats.org/drawingml/2006/main">
               <a:ext uri="{FF2B5EF4-FFF2-40B4-BE49-F238E27FC236}">
-                <a16:creationId xmlns:a16="http://schemas.microsoft.com/office/drawing/2014/main" id="{32B3CF31-E3AD-4A68-9FE9-6D26504162DB}"/>
+                <a16:creationId xmlns:a16="http://schemas.microsoft.com/office/drawing/2014/main" id="{111681E5-C7CF-4A04-A241-CF1A907E0429}"/>
               </a:ext>
             </a:extLst>
           </p:cNvPr>
@@ -6797,7 +6797,7 @@
           <p:cNvPr id="6" name="TextBox 5">
             <a:extLst xmlns:a="http://schemas.openxmlformats.org/drawingml/2006/main">
               <a:ext uri="{FF2B5EF4-FFF2-40B4-BE49-F238E27FC236}">
-                <a16:creationId xmlns:a16="http://schemas.microsoft.com/office/drawing/2014/main" id="{E1816B56-F9C3-414E-9776-C8CD614E7869}"/>
+                <a16:creationId xmlns:a16="http://schemas.microsoft.com/office/drawing/2014/main" id="{953021AA-3061-4A52-BC79-64AE90A040E5}"/>
               </a:ext>
             </a:extLst>
           </p:cNvPr>
@@ -6834,7 +6834,7 @@
                 <a:ea typeface="Aptos"/>
                 <a:cs typeface="Aptos"/>
               </a:rPr>
-              <a:t>Independent public evidence summary · 2026.07.23-15 · 2026-07-22 · Sources: Health Canada; Destatis; Vero; Sejm; Swedish Government</a:t>
+              <a:t>Independent public evidence summary · 2026.07.23-16 · 2026-07-22 · Sources: Health Canada; Destatis; Vero; Sejm; Swedish Government</a:t>
             </a:r>
           </a:p>
         </p:txBody>
@@ -6844,7 +6844,7 @@
           <p:cNvPr id="7" name="TextBox 6">
             <a:extLst xmlns:a="http://schemas.openxmlformats.org/drawingml/2006/main">
               <a:ext uri="{FF2B5EF4-FFF2-40B4-BE49-F238E27FC236}">
-                <a16:creationId xmlns:a16="http://schemas.microsoft.com/office/drawing/2014/main" id="{94764B69-FE2F-41BB-9AF5-34B5B8A1641D}"/>
+                <a16:creationId xmlns:a16="http://schemas.microsoft.com/office/drawing/2014/main" id="{8ED301AA-A94E-41B7-B315-125E37632D35}"/>
               </a:ext>
             </a:extLst>
           </p:cNvPr>
@@ -6891,7 +6891,7 @@
           <p:cNvPr id="8" name="Rounded Rectangle 7">
             <a:extLst xmlns:a="http://schemas.openxmlformats.org/drawingml/2006/main">
               <a:ext uri="{FF2B5EF4-FFF2-40B4-BE49-F238E27FC236}">
-                <a16:creationId xmlns:a16="http://schemas.microsoft.com/office/drawing/2014/main" id="{6CD5E243-2A30-47D5-A571-DE3CFB0994FB}"/>
+                <a16:creationId xmlns:a16="http://schemas.microsoft.com/office/drawing/2014/main" id="{CEA0269A-956B-4722-B4F8-10C46C65BA5B}"/>
               </a:ext>
             </a:extLst>
           </p:cNvPr>
@@ -6948,7 +6948,7 @@
           <p:cNvPr id="9" name="TextBox 8">
             <a:extLst xmlns:a="http://schemas.openxmlformats.org/drawingml/2006/main">
               <a:ext uri="{FF2B5EF4-FFF2-40B4-BE49-F238E27FC236}">
-                <a16:creationId xmlns:a16="http://schemas.microsoft.com/office/drawing/2014/main" id="{124DD633-BC02-4018-8B4A-38FF74B948C9}"/>
+                <a16:creationId xmlns:a16="http://schemas.microsoft.com/office/drawing/2014/main" id="{DB55DEBA-5481-4EA9-875B-84FD15F2A4F5}"/>
               </a:ext>
             </a:extLst>
           </p:cNvPr>
@@ -6995,7 +6995,7 @@
           <p:cNvPr id="10" name="TextBox 9">
             <a:extLst xmlns:a="http://schemas.openxmlformats.org/drawingml/2006/main">
               <a:ext uri="{FF2B5EF4-FFF2-40B4-BE49-F238E27FC236}">
-                <a16:creationId xmlns:a16="http://schemas.microsoft.com/office/drawing/2014/main" id="{A564D4FB-F7AC-4432-B84C-F6DB9665AECE}"/>
+                <a16:creationId xmlns:a16="http://schemas.microsoft.com/office/drawing/2014/main" id="{157F0464-12EA-4958-96F6-D3899E828738}"/>
               </a:ext>
             </a:extLst>
           </p:cNvPr>
@@ -7042,7 +7042,7 @@
           <p:cNvPr id="11" name="Rounded Rectangle 10">
             <a:extLst xmlns:a="http://schemas.openxmlformats.org/drawingml/2006/main">
               <a:ext uri="{FF2B5EF4-FFF2-40B4-BE49-F238E27FC236}">
-                <a16:creationId xmlns:a16="http://schemas.microsoft.com/office/drawing/2014/main" id="{A0DBACE4-FCD1-4A0C-8BEA-DA4941B2A039}"/>
+                <a16:creationId xmlns:a16="http://schemas.microsoft.com/office/drawing/2014/main" id="{CCE11A5D-4B97-47A5-9D30-CC4D7C726AC4}"/>
               </a:ext>
             </a:extLst>
           </p:cNvPr>
@@ -7099,7 +7099,7 @@
           <p:cNvPr id="12" name="TextBox 11">
             <a:extLst xmlns:a="http://schemas.openxmlformats.org/drawingml/2006/main">
               <a:ext uri="{FF2B5EF4-FFF2-40B4-BE49-F238E27FC236}">
-                <a16:creationId xmlns:a16="http://schemas.microsoft.com/office/drawing/2014/main" id="{5924B28F-AAB6-4BC8-A0FD-CE811C11CB6F}"/>
+                <a16:creationId xmlns:a16="http://schemas.microsoft.com/office/drawing/2014/main" id="{8BD530D1-AB4A-4D85-9E23-E2961494A20A}"/>
               </a:ext>
             </a:extLst>
           </p:cNvPr>
@@ -7146,7 +7146,7 @@
           <p:cNvPr id="13" name="TextBox 12">
             <a:extLst xmlns:a="http://schemas.openxmlformats.org/drawingml/2006/main">
               <a:ext uri="{FF2B5EF4-FFF2-40B4-BE49-F238E27FC236}">
-                <a16:creationId xmlns:a16="http://schemas.microsoft.com/office/drawing/2014/main" id="{8EAC5356-53F3-4E62-8D51-EE8D1F0D6483}"/>
+                <a16:creationId xmlns:a16="http://schemas.microsoft.com/office/drawing/2014/main" id="{F7D4E543-75EA-4C93-ABAF-957FB695FC79}"/>
               </a:ext>
             </a:extLst>
           </p:cNvPr>
@@ -7193,7 +7193,7 @@
           <p:cNvPr id="14" name="Rounded Rectangle 13">
             <a:extLst xmlns:a="http://schemas.openxmlformats.org/drawingml/2006/main">
               <a:ext uri="{FF2B5EF4-FFF2-40B4-BE49-F238E27FC236}">
-                <a16:creationId xmlns:a16="http://schemas.microsoft.com/office/drawing/2014/main" id="{E16DCEC9-F926-4814-8C1D-E5BA5880EC79}"/>
+                <a16:creationId xmlns:a16="http://schemas.microsoft.com/office/drawing/2014/main" id="{3B49B947-5D8C-46DF-AB76-B9D736C9B10A}"/>
               </a:ext>
             </a:extLst>
           </p:cNvPr>
@@ -7250,7 +7250,7 @@
           <p:cNvPr id="15" name="TextBox 14">
             <a:extLst xmlns:a="http://schemas.openxmlformats.org/drawingml/2006/main">
               <a:ext uri="{FF2B5EF4-FFF2-40B4-BE49-F238E27FC236}">
-                <a16:creationId xmlns:a16="http://schemas.microsoft.com/office/drawing/2014/main" id="{DFFFEB30-D1E4-4844-BC73-6916DD91A016}"/>
+                <a16:creationId xmlns:a16="http://schemas.microsoft.com/office/drawing/2014/main" id="{AB5CFC06-8C2B-4FF1-B803-C125A04C792D}"/>
               </a:ext>
             </a:extLst>
           </p:cNvPr>
@@ -7297,7 +7297,7 @@
           <p:cNvPr id="16" name="TextBox 15">
             <a:extLst xmlns:a="http://schemas.openxmlformats.org/drawingml/2006/main">
               <a:ext uri="{FF2B5EF4-FFF2-40B4-BE49-F238E27FC236}">
-                <a16:creationId xmlns:a16="http://schemas.microsoft.com/office/drawing/2014/main" id="{616626DD-4042-4F30-9238-64E4D00FA451}"/>
+                <a16:creationId xmlns:a16="http://schemas.microsoft.com/office/drawing/2014/main" id="{E59BF4FB-4587-4172-9261-6AC5CB8A9E95}"/>
               </a:ext>
             </a:extLst>
           </p:cNvPr>
@@ -7344,7 +7344,7 @@
           <p:cNvPr id="17" name="TextBox 16">
             <a:extLst xmlns:a="http://schemas.openxmlformats.org/drawingml/2006/main">
               <a:ext uri="{FF2B5EF4-FFF2-40B4-BE49-F238E27FC236}">
-                <a16:creationId xmlns:a16="http://schemas.microsoft.com/office/drawing/2014/main" id="{6AA8C3C5-E246-4A26-8A03-88F9F0923501}"/>
+                <a16:creationId xmlns:a16="http://schemas.microsoft.com/office/drawing/2014/main" id="{7C858AD9-9CB0-4F6B-A2E0-C83370539EB7}"/>
               </a:ext>
             </a:extLst>
           </p:cNvPr>
@@ -7391,7 +7391,7 @@
           <p:cNvPr id="18" name="Rounded Rectangle 17">
             <a:extLst xmlns:a="http://schemas.openxmlformats.org/drawingml/2006/main">
               <a:ext uri="{FF2B5EF4-FFF2-40B4-BE49-F238E27FC236}">
-                <a16:creationId xmlns:a16="http://schemas.microsoft.com/office/drawing/2014/main" id="{D5C658D0-808F-4344-8FCE-F68E661C05D5}"/>
+                <a16:creationId xmlns:a16="http://schemas.microsoft.com/office/drawing/2014/main" id="{E2D9A3E4-65B4-42E0-ACB2-CD1B3ADEDFFB}"/>
               </a:ext>
             </a:extLst>
           </p:cNvPr>
@@ -7448,7 +7448,7 @@
           <p:cNvPr id="19" name="TextBox 18">
             <a:extLst xmlns:a="http://schemas.openxmlformats.org/drawingml/2006/main">
               <a:ext uri="{FF2B5EF4-FFF2-40B4-BE49-F238E27FC236}">
-                <a16:creationId xmlns:a16="http://schemas.microsoft.com/office/drawing/2014/main" id="{B25F7D39-E750-4851-AC17-339848D08048}"/>
+                <a16:creationId xmlns:a16="http://schemas.microsoft.com/office/drawing/2014/main" id="{E6D1BBC9-A07F-445A-8FEE-A057885AF801}"/>
               </a:ext>
             </a:extLst>
           </p:cNvPr>
@@ -7495,7 +7495,7 @@
           <p:cNvPr id="20" name="TextBox 19">
             <a:extLst xmlns:a="http://schemas.openxmlformats.org/drawingml/2006/main">
               <a:ext uri="{FF2B5EF4-FFF2-40B4-BE49-F238E27FC236}">
-                <a16:creationId xmlns:a16="http://schemas.microsoft.com/office/drawing/2014/main" id="{C1455665-EC4F-45A3-BE9F-FC8A4D1F43AF}"/>
+                <a16:creationId xmlns:a16="http://schemas.microsoft.com/office/drawing/2014/main" id="{0B27738B-9A23-4FE3-8F6B-6966C60F4624}"/>
               </a:ext>
             </a:extLst>
           </p:cNvPr>
@@ -7540,7 +7540,7 @@
     </p:spTree>
     <p:extLst>
       <p:ext uri="{BB962C8B-B14F-4D97-AF65-F5344CB8AC3E}">
-        <p14:creationId xmlns:p14="http://schemas.microsoft.com/office/powerpoint/2010/main" val="307458197"/>
+        <p14:creationId xmlns:p14="http://schemas.microsoft.com/office/powerpoint/2010/main" val="441791533"/>
       </p:ext>
     </p:extLst>
   </p:cSld>
@@ -7564,7 +7564,7 @@
           <p:cNvPr id="2" name="TextBox 1">
             <a:extLst xmlns:a="http://schemas.openxmlformats.org/drawingml/2006/main">
               <a:ext uri="{FF2B5EF4-FFF2-40B4-BE49-F238E27FC236}">
-                <a16:creationId xmlns:a16="http://schemas.microsoft.com/office/drawing/2014/main" id="{16D77420-F333-44B0-92FA-08DC9CAE447E}"/>
+                <a16:creationId xmlns:a16="http://schemas.microsoft.com/office/drawing/2014/main" id="{C32D2A0D-6AF1-43E5-B81F-3C1F531E22B1}"/>
               </a:ext>
             </a:extLst>
           </p:cNvPr>
@@ -7611,7 +7611,7 @@
           <p:cNvPr id="3" name="TextBox 2">
             <a:extLst xmlns:a="http://schemas.openxmlformats.org/drawingml/2006/main">
               <a:ext uri="{FF2B5EF4-FFF2-40B4-BE49-F238E27FC236}">
-                <a16:creationId xmlns:a16="http://schemas.microsoft.com/office/drawing/2014/main" id="{1AFECCCF-E905-4BFA-845F-3253A43FFD57}"/>
+                <a16:creationId xmlns:a16="http://schemas.microsoft.com/office/drawing/2014/main" id="{332F9556-87A1-418A-9148-76A7AC473692}"/>
               </a:ext>
             </a:extLst>
           </p:cNvPr>
@@ -7658,7 +7658,7 @@
           <p:cNvPr id="4" name="Rectangle 3">
             <a:extLst xmlns:a="http://schemas.openxmlformats.org/drawingml/2006/main">
               <a:ext uri="{FF2B5EF4-FFF2-40B4-BE49-F238E27FC236}">
-                <a16:creationId xmlns:a16="http://schemas.microsoft.com/office/drawing/2014/main" id="{DA645E76-A893-4C5A-962C-A64B1C2A8ABE}"/>
+                <a16:creationId xmlns:a16="http://schemas.microsoft.com/office/drawing/2014/main" id="{F2412D0E-50B0-410D-9841-4F0295DB5E11}"/>
               </a:ext>
             </a:extLst>
           </p:cNvPr>
@@ -7713,7 +7713,7 @@
           <p:cNvPr id="5" name="Rectangle 4">
             <a:extLst xmlns:a="http://schemas.openxmlformats.org/drawingml/2006/main">
               <a:ext uri="{FF2B5EF4-FFF2-40B4-BE49-F238E27FC236}">
-                <a16:creationId xmlns:a16="http://schemas.microsoft.com/office/drawing/2014/main" id="{1F8EF8CB-CA51-48F3-A510-B66F9CDDE290}"/>
+                <a16:creationId xmlns:a16="http://schemas.microsoft.com/office/drawing/2014/main" id="{2F1706F6-08AC-4C2E-97C6-56EC03227469}"/>
               </a:ext>
             </a:extLst>
           </p:cNvPr>
@@ -7768,7 +7768,7 @@
           <p:cNvPr id="6" name="TextBox 5">
             <a:extLst xmlns:a="http://schemas.openxmlformats.org/drawingml/2006/main">
               <a:ext uri="{FF2B5EF4-FFF2-40B4-BE49-F238E27FC236}">
-                <a16:creationId xmlns:a16="http://schemas.microsoft.com/office/drawing/2014/main" id="{E4CA2E9C-052F-4106-B419-0D971CEA7C25}"/>
+                <a16:creationId xmlns:a16="http://schemas.microsoft.com/office/drawing/2014/main" id="{FA3AFC0A-4B46-4B51-916B-1DD04B3BAFA6}"/>
               </a:ext>
             </a:extLst>
           </p:cNvPr>
@@ -7805,7 +7805,7 @@
                 <a:ea typeface="Aptos"/>
                 <a:cs typeface="Aptos"/>
               </a:rPr>
-              <a:t>Independent public evidence summary · 2026.07.23-15 · 2026-07-22 · Sources: Evidence Register; WIPO IP valuation</a:t>
+              <a:t>Independent public evidence summary · 2026.07.23-16 · 2026-07-22 · Sources: Evidence Register; WIPO IP valuation</a:t>
             </a:r>
           </a:p>
         </p:txBody>
@@ -7815,7 +7815,7 @@
           <p:cNvPr id="7" name="TextBox 6">
             <a:extLst xmlns:a="http://schemas.openxmlformats.org/drawingml/2006/main">
               <a:ext uri="{FF2B5EF4-FFF2-40B4-BE49-F238E27FC236}">
-                <a16:creationId xmlns:a16="http://schemas.microsoft.com/office/drawing/2014/main" id="{28F16221-ED62-4ED2-9FF2-34626EE804AF}"/>
+                <a16:creationId xmlns:a16="http://schemas.microsoft.com/office/drawing/2014/main" id="{C9ED66B0-245D-4C9B-BFB2-52A2B6AF5BD4}"/>
               </a:ext>
             </a:extLst>
           </p:cNvPr>
@@ -8302,7 +8302,7 @@
           <p:cNvPr id="9" name="TextBox 8">
             <a:extLst xmlns:a="http://schemas.openxmlformats.org/drawingml/2006/main">
               <a:ext uri="{FF2B5EF4-FFF2-40B4-BE49-F238E27FC236}">
-                <a16:creationId xmlns:a16="http://schemas.microsoft.com/office/drawing/2014/main" id="{07E0AD2B-0E5C-4477-848D-2AABA13BDC7D}"/>
+                <a16:creationId xmlns:a16="http://schemas.microsoft.com/office/drawing/2014/main" id="{07F509FA-7780-4ED1-B22E-D6FB7A7694BF}"/>
               </a:ext>
             </a:extLst>
           </p:cNvPr>
@@ -8347,7 +8347,7 @@
     </p:spTree>
     <p:extLst>
       <p:ext uri="{BB962C8B-B14F-4D97-AF65-F5344CB8AC3E}">
-        <p14:creationId xmlns:p14="http://schemas.microsoft.com/office/powerpoint/2010/main" val="1905071976"/>
+        <p14:creationId xmlns:p14="http://schemas.microsoft.com/office/powerpoint/2010/main" val="887533567"/>
       </p:ext>
     </p:extLst>
   </p:cSld>
@@ -8378,7 +8378,7 @@
           <p:cNvPr id="2" name="TextBox 1">
             <a:extLst xmlns:a="http://schemas.openxmlformats.org/drawingml/2006/main">
               <a:ext uri="{FF2B5EF4-FFF2-40B4-BE49-F238E27FC236}">
-                <a16:creationId xmlns:a16="http://schemas.microsoft.com/office/drawing/2014/main" id="{2DCFCDBA-9DF3-46F8-AC41-E321F7CD922C}"/>
+                <a16:creationId xmlns:a16="http://schemas.microsoft.com/office/drawing/2014/main" id="{2AA100F3-B87C-40E3-B17D-0D2EC85A2FFF}"/>
               </a:ext>
             </a:extLst>
           </p:cNvPr>
@@ -8425,7 +8425,7 @@
           <p:cNvPr id="3" name="TextBox 2">
             <a:extLst xmlns:a="http://schemas.openxmlformats.org/drawingml/2006/main">
               <a:ext uri="{FF2B5EF4-FFF2-40B4-BE49-F238E27FC236}">
-                <a16:creationId xmlns:a16="http://schemas.microsoft.com/office/drawing/2014/main" id="{54D45D25-4C73-4B6F-A5F7-4AD2FB77DAD8}"/>
+                <a16:creationId xmlns:a16="http://schemas.microsoft.com/office/drawing/2014/main" id="{8D24A420-F8CB-43B1-AACB-904039F2C372}"/>
               </a:ext>
             </a:extLst>
           </p:cNvPr>
@@ -8472,7 +8472,7 @@
           <p:cNvPr id="4" name="TextBox 3">
             <a:extLst xmlns:a="http://schemas.openxmlformats.org/drawingml/2006/main">
               <a:ext uri="{FF2B5EF4-FFF2-40B4-BE49-F238E27FC236}">
-                <a16:creationId xmlns:a16="http://schemas.microsoft.com/office/drawing/2014/main" id="{D146A3B9-F55D-49B4-A46E-67C4EC13BBCC}"/>
+                <a16:creationId xmlns:a16="http://schemas.microsoft.com/office/drawing/2014/main" id="{5681047D-AE01-4B01-90A1-EF556294D49F}"/>
               </a:ext>
             </a:extLst>
           </p:cNvPr>
@@ -8591,7 +8591,7 @@
           <p:cNvPr id="5" name="TextBox 4">
             <a:extLst xmlns:a="http://schemas.openxmlformats.org/drawingml/2006/main">
               <a:ext uri="{FF2B5EF4-FFF2-40B4-BE49-F238E27FC236}">
-                <a16:creationId xmlns:a16="http://schemas.microsoft.com/office/drawing/2014/main" id="{68B98204-2D10-4539-8309-AA5410A08772}"/>
+                <a16:creationId xmlns:a16="http://schemas.microsoft.com/office/drawing/2014/main" id="{F9ED9B7B-EA72-4FF2-A6CB-732F96567B96}"/>
               </a:ext>
             </a:extLst>
           </p:cNvPr>
@@ -8628,7 +8628,7 @@
                 <a:ea typeface="Aptos"/>
                 <a:cs typeface="Aptos"/>
               </a:rPr>
-              <a:t>Version 2026.07.23-15 · 2026-07-22 · 6 / 6</a:t>
+              <a:t>Version 2026.07.23-16 · 2026-07-22 · 6 / 6</a:t>
             </a:r>
           </a:p>
         </p:txBody>
@@ -8636,7 +8636,7 @@
     </p:spTree>
     <p:extLst>
       <p:ext uri="{BB962C8B-B14F-4D97-AF65-F5344CB8AC3E}">
-        <p14:creationId xmlns:p14="http://schemas.microsoft.com/office/powerpoint/2010/main" val="2067226160"/>
+        <p14:creationId xmlns:p14="http://schemas.microsoft.com/office/powerpoint/2010/main" val="897186103"/>
       </p:ext>
     </p:extLst>
   </p:cSld>

--- a/site/downloads/pixan-bank-deck-short-en.pptx
+++ b/site/downloads/pixan-bank-deck-short-en.pptx
@@ -2,18 +2,18 @@
 <file path=ppt/presentation.xml><?xml version="1.0" encoding="utf-8"?>
 <p:presentation xmlns:p="http://schemas.openxmlformats.org/presentationml/2006/main">
   <p:sldMasterIdLst>
-    <p:sldMasterId xmlns:r="http://schemas.openxmlformats.org/officeDocument/2006/relationships" id="2147483648" r:id="R6dc0193ffdcb4dd1"/>
+    <p:sldMasterId xmlns:r="http://schemas.openxmlformats.org/officeDocument/2006/relationships" id="2147483648" r:id="Rd6b0d3ae0e244311"/>
   </p:sldMasterIdLst>
   <p:notesMasterIdLst>
-    <p:notesMasterId xmlns:r="http://schemas.openxmlformats.org/officeDocument/2006/relationships" r:id="R903f16c44ecc44df"/>
+    <p:notesMasterId xmlns:r="http://schemas.openxmlformats.org/officeDocument/2006/relationships" r:id="R5187682e048c41d1"/>
   </p:notesMasterIdLst>
   <p:sldIdLst>
-    <p:sldId xmlns:r="http://schemas.openxmlformats.org/officeDocument/2006/relationships" id="256" r:id="Rb5c1bc3c7ab04310"/>
-    <p:sldId xmlns:r="http://schemas.openxmlformats.org/officeDocument/2006/relationships" id="257" r:id="R76f72a194715407d"/>
-    <p:sldId xmlns:r="http://schemas.openxmlformats.org/officeDocument/2006/relationships" id="258" r:id="Reb225ff687784ae4"/>
-    <p:sldId xmlns:r="http://schemas.openxmlformats.org/officeDocument/2006/relationships" id="259" r:id="R82bbf6ec40f6488a"/>
-    <p:sldId xmlns:r="http://schemas.openxmlformats.org/officeDocument/2006/relationships" id="260" r:id="Rae05c9aa37e34b47"/>
-    <p:sldId xmlns:r="http://schemas.openxmlformats.org/officeDocument/2006/relationships" id="261" r:id="Ree60da22ec4b4426"/>
+    <p:sldId xmlns:r="http://schemas.openxmlformats.org/officeDocument/2006/relationships" id="256" r:id="R4f7c9b2c090245cf"/>
+    <p:sldId xmlns:r="http://schemas.openxmlformats.org/officeDocument/2006/relationships" id="257" r:id="Re8ddd25dbcfb4e1a"/>
+    <p:sldId xmlns:r="http://schemas.openxmlformats.org/officeDocument/2006/relationships" id="258" r:id="R05197762c75c48e9"/>
+    <p:sldId xmlns:r="http://schemas.openxmlformats.org/officeDocument/2006/relationships" id="259" r:id="R6182236c22b9435d"/>
+    <p:sldId xmlns:r="http://schemas.openxmlformats.org/officeDocument/2006/relationships" id="260" r:id="R60adaea36fcd4c42"/>
+    <p:sldId xmlns:r="http://schemas.openxmlformats.org/officeDocument/2006/relationships" id="261" r:id="R8f52a9f2b9f74d3c"/>
   </p:sldIdLst>
   <p:sldSz cx="12191999" cy="6858000"/>
   <p:notesSz cx="6858000" cy="9144000"/>
@@ -938,7 +938,7 @@
           <p:cNvPr id="2" name="Title 1">
             <a:extLst xmlns:a="http://schemas.openxmlformats.org/drawingml/2006/main">
               <a:ext uri="{FF2B5EF4-FFF2-40B4-BE49-F238E27FC236}">
-                <a16:creationId xmlns:a16="http://schemas.microsoft.com/office/drawing/2014/main" id="{BF052A4B-784C-4C97-9EC5-1F04AB033029}"/>
+                <a16:creationId xmlns:a16="http://schemas.microsoft.com/office/drawing/2014/main" id="{866C710B-5706-4679-9A22-DAD8377FC2C7}"/>
               </a:ext>
             </a:extLst>
           </p:cNvPr>
@@ -970,7 +970,7 @@
           <p:cNvPr id="3" name="Subtitle 2">
             <a:extLst xmlns:a="http://schemas.openxmlformats.org/drawingml/2006/main">
               <a:ext uri="{FF2B5EF4-FFF2-40B4-BE49-F238E27FC236}">
-                <a16:creationId xmlns:a16="http://schemas.microsoft.com/office/drawing/2014/main" id="{CA200091-EFA9-4E8B-BF20-310E666B3FA1}"/>
+                <a16:creationId xmlns:a16="http://schemas.microsoft.com/office/drawing/2014/main" id="{5E3DD999-3F97-41EE-B876-F23D71B0E3F9}"/>
               </a:ext>
             </a:extLst>
           </p:cNvPr>
@@ -1093,7 +1093,7 @@
           <p:cNvPr id="4" name="Date Placeholder 3">
             <a:extLst xmlns:a="http://schemas.openxmlformats.org/drawingml/2006/main">
               <a:ext uri="{FF2B5EF4-FFF2-40B4-BE49-F238E27FC236}">
-                <a16:creationId xmlns:a16="http://schemas.microsoft.com/office/drawing/2014/main" id="{C29513A2-A655-4363-AC7F-FF347B8B4092}"/>
+                <a16:creationId xmlns:a16="http://schemas.microsoft.com/office/drawing/2014/main" id="{F3EC3A1F-438E-4FCB-84ED-5AFFD4D441C4}"/>
               </a:ext>
             </a:extLst>
           </p:cNvPr>
@@ -1120,7 +1120,7 @@
           <p:cNvPr id="5" name="Footer Placeholder 4">
             <a:extLst xmlns:a="http://schemas.openxmlformats.org/drawingml/2006/main">
               <a:ext uri="{FF2B5EF4-FFF2-40B4-BE49-F238E27FC236}">
-                <a16:creationId xmlns:a16="http://schemas.microsoft.com/office/drawing/2014/main" id="{C22FE2A0-C5B9-4B2E-8826-BF0D55070A52}"/>
+                <a16:creationId xmlns:a16="http://schemas.microsoft.com/office/drawing/2014/main" id="{FFFFB539-4089-4626-BD32-8CBC35F8B976}"/>
               </a:ext>
             </a:extLst>
           </p:cNvPr>
@@ -1143,7 +1143,7 @@
           <p:cNvPr id="6" name="Slide Number Placeholder 5">
             <a:extLst xmlns:a="http://schemas.openxmlformats.org/drawingml/2006/main">
               <a:ext uri="{FF2B5EF4-FFF2-40B4-BE49-F238E27FC236}">
-                <a16:creationId xmlns:a16="http://schemas.microsoft.com/office/drawing/2014/main" id="{710BF0C2-6407-4418-AF2D-618BE572AFC0}"/>
+                <a16:creationId xmlns:a16="http://schemas.microsoft.com/office/drawing/2014/main" id="{134E8C78-2256-4379-85AF-2FD7D4EED9D9}"/>
               </a:ext>
             </a:extLst>
           </p:cNvPr>
@@ -1187,7 +1187,7 @@
           <p:cNvPr id="2" name="Title 1">
             <a:extLst xmlns:a="http://schemas.openxmlformats.org/drawingml/2006/main">
               <a:ext uri="{FF2B5EF4-FFF2-40B4-BE49-F238E27FC236}">
-                <a16:creationId xmlns:a16="http://schemas.microsoft.com/office/drawing/2014/main" id="{97436AD1-FEB0-4219-B4FC-1075ABDF3F5B}"/>
+                <a16:creationId xmlns:a16="http://schemas.microsoft.com/office/drawing/2014/main" id="{EAECB1D8-CE5F-4C44-BA3B-36BE09400C8E}"/>
               </a:ext>
             </a:extLst>
           </p:cNvPr>
@@ -1214,7 +1214,7 @@
           <p:cNvPr id="3" name="Vertical Text Placeholder 2">
             <a:extLst xmlns:a="http://schemas.openxmlformats.org/drawingml/2006/main">
               <a:ext uri="{FF2B5EF4-FFF2-40B4-BE49-F238E27FC236}">
-                <a16:creationId xmlns:a16="http://schemas.microsoft.com/office/drawing/2014/main" id="{A954871F-9910-4470-8AAD-C7DD65438796}"/>
+                <a16:creationId xmlns:a16="http://schemas.microsoft.com/office/drawing/2014/main" id="{84AE5F83-4F1F-4F33-8F2A-AE0502492D54}"/>
               </a:ext>
             </a:extLst>
           </p:cNvPr>
@@ -1276,7 +1276,7 @@
           <p:cNvPr id="4" name="Date Placeholder 3">
             <a:extLst xmlns:a="http://schemas.openxmlformats.org/drawingml/2006/main">
               <a:ext uri="{FF2B5EF4-FFF2-40B4-BE49-F238E27FC236}">
-                <a16:creationId xmlns:a16="http://schemas.microsoft.com/office/drawing/2014/main" id="{D11FA844-79F9-469C-ACBE-BF45924D4C02}"/>
+                <a16:creationId xmlns:a16="http://schemas.microsoft.com/office/drawing/2014/main" id="{573D2ACC-B0E1-450C-8423-5E0E2C6D0360}"/>
               </a:ext>
             </a:extLst>
           </p:cNvPr>
@@ -1303,7 +1303,7 @@
           <p:cNvPr id="5" name="Footer Placeholder 4">
             <a:extLst xmlns:a="http://schemas.openxmlformats.org/drawingml/2006/main">
               <a:ext uri="{FF2B5EF4-FFF2-40B4-BE49-F238E27FC236}">
-                <a16:creationId xmlns:a16="http://schemas.microsoft.com/office/drawing/2014/main" id="{DFDD16C8-FEAC-45A0-B2AE-3280717CD9BC}"/>
+                <a16:creationId xmlns:a16="http://schemas.microsoft.com/office/drawing/2014/main" id="{7A9372F0-3793-4343-9D69-F7F0D51A44C8}"/>
               </a:ext>
             </a:extLst>
           </p:cNvPr>
@@ -1326,7 +1326,7 @@
           <p:cNvPr id="6" name="Slide Number Placeholder 5">
             <a:extLst xmlns:a="http://schemas.openxmlformats.org/drawingml/2006/main">
               <a:ext uri="{FF2B5EF4-FFF2-40B4-BE49-F238E27FC236}">
-                <a16:creationId xmlns:a16="http://schemas.microsoft.com/office/drawing/2014/main" id="{FF3FD832-F0C6-45FF-BFA3-92EA5CD1E717}"/>
+                <a16:creationId xmlns:a16="http://schemas.microsoft.com/office/drawing/2014/main" id="{8D7D8888-C27B-4B9F-98E5-FDE92CD6B09E}"/>
               </a:ext>
             </a:extLst>
           </p:cNvPr>
@@ -1370,7 +1370,7 @@
           <p:cNvPr id="2" name="Vertical Title 1">
             <a:extLst xmlns:a="http://schemas.openxmlformats.org/drawingml/2006/main">
               <a:ext uri="{FF2B5EF4-FFF2-40B4-BE49-F238E27FC236}">
-                <a16:creationId xmlns:a16="http://schemas.microsoft.com/office/drawing/2014/main" id="{1662083C-9E3D-4E63-9445-2F58CE0A2AB6}"/>
+                <a16:creationId xmlns:a16="http://schemas.microsoft.com/office/drawing/2014/main" id="{753F0F45-61C4-4E81-81DB-3CDFE6A7D460}"/>
               </a:ext>
             </a:extLst>
           </p:cNvPr>
@@ -1402,7 +1402,7 @@
           <p:cNvPr id="3" name="Vertical Text Placeholder 2">
             <a:extLst xmlns:a="http://schemas.openxmlformats.org/drawingml/2006/main">
               <a:ext uri="{FF2B5EF4-FFF2-40B4-BE49-F238E27FC236}">
-                <a16:creationId xmlns:a16="http://schemas.microsoft.com/office/drawing/2014/main" id="{71C08300-9B42-4B11-9094-80E3EE7B1DD4}"/>
+                <a16:creationId xmlns:a16="http://schemas.microsoft.com/office/drawing/2014/main" id="{A5CB3A95-81D9-4745-A972-32A51B7AFBC7}"/>
               </a:ext>
             </a:extLst>
           </p:cNvPr>
@@ -1469,7 +1469,7 @@
           <p:cNvPr id="4" name="Date Placeholder 3">
             <a:extLst xmlns:a="http://schemas.openxmlformats.org/drawingml/2006/main">
               <a:ext uri="{FF2B5EF4-FFF2-40B4-BE49-F238E27FC236}">
-                <a16:creationId xmlns:a16="http://schemas.microsoft.com/office/drawing/2014/main" id="{BD38FA0E-D6F1-4025-ABB6-161626B5F719}"/>
+                <a16:creationId xmlns:a16="http://schemas.microsoft.com/office/drawing/2014/main" id="{E5ED8105-4918-4867-ACB5-6CE8F5A8C334}"/>
               </a:ext>
             </a:extLst>
           </p:cNvPr>
@@ -1496,7 +1496,7 @@
           <p:cNvPr id="5" name="Footer Placeholder 4">
             <a:extLst xmlns:a="http://schemas.openxmlformats.org/drawingml/2006/main">
               <a:ext uri="{FF2B5EF4-FFF2-40B4-BE49-F238E27FC236}">
-                <a16:creationId xmlns:a16="http://schemas.microsoft.com/office/drawing/2014/main" id="{4C4DBAE1-8FF2-4264-AA61-869A3D053DB5}"/>
+                <a16:creationId xmlns:a16="http://schemas.microsoft.com/office/drawing/2014/main" id="{F8F6482E-2C1B-4CFA-9A9F-4CEE562EB7EF}"/>
               </a:ext>
             </a:extLst>
           </p:cNvPr>
@@ -1519,7 +1519,7 @@
           <p:cNvPr id="6" name="Slide Number Placeholder 5">
             <a:extLst xmlns:a="http://schemas.openxmlformats.org/drawingml/2006/main">
               <a:ext uri="{FF2B5EF4-FFF2-40B4-BE49-F238E27FC236}">
-                <a16:creationId xmlns:a16="http://schemas.microsoft.com/office/drawing/2014/main" id="{17C6F992-4114-43AC-A3A5-6B35497FD9DD}"/>
+                <a16:creationId xmlns:a16="http://schemas.microsoft.com/office/drawing/2014/main" id="{104A8A2C-79EF-490F-8944-A128B2C70B02}"/>
               </a:ext>
             </a:extLst>
           </p:cNvPr>
@@ -1563,7 +1563,7 @@
           <p:cNvPr id="2" name="Title 1">
             <a:extLst xmlns:a="http://schemas.openxmlformats.org/drawingml/2006/main">
               <a:ext uri="{FF2B5EF4-FFF2-40B4-BE49-F238E27FC236}">
-                <a16:creationId xmlns:a16="http://schemas.microsoft.com/office/drawing/2014/main" id="{96CFCEBD-61CD-4150-93BD-0A8C9422BBF4}"/>
+                <a16:creationId xmlns:a16="http://schemas.microsoft.com/office/drawing/2014/main" id="{CA0FE6FB-334C-4C90-8D1C-805B824C8183}"/>
               </a:ext>
             </a:extLst>
           </p:cNvPr>
@@ -1590,7 +1590,7 @@
           <p:cNvPr id="3" name="Content Placeholder 2">
             <a:extLst xmlns:a="http://schemas.openxmlformats.org/drawingml/2006/main">
               <a:ext uri="{FF2B5EF4-FFF2-40B4-BE49-F238E27FC236}">
-                <a16:creationId xmlns:a16="http://schemas.microsoft.com/office/drawing/2014/main" id="{EA93C8C9-B787-42CA-8048-38B203B76E2C}"/>
+                <a16:creationId xmlns:a16="http://schemas.microsoft.com/office/drawing/2014/main" id="{A8E6660D-1B1F-4B08-801F-8ED5C6B78F20}"/>
               </a:ext>
             </a:extLst>
           </p:cNvPr>
@@ -1652,7 +1652,7 @@
           <p:cNvPr id="4" name="Date Placeholder 3">
             <a:extLst xmlns:a="http://schemas.openxmlformats.org/drawingml/2006/main">
               <a:ext uri="{FF2B5EF4-FFF2-40B4-BE49-F238E27FC236}">
-                <a16:creationId xmlns:a16="http://schemas.microsoft.com/office/drawing/2014/main" id="{007D4573-2141-4005-8862-05E0066628D7}"/>
+                <a16:creationId xmlns:a16="http://schemas.microsoft.com/office/drawing/2014/main" id="{C98B2DEB-874A-4A26-B57D-7896A2058145}"/>
               </a:ext>
             </a:extLst>
           </p:cNvPr>
@@ -1679,7 +1679,7 @@
           <p:cNvPr id="5" name="Footer Placeholder 4">
             <a:extLst xmlns:a="http://schemas.openxmlformats.org/drawingml/2006/main">
               <a:ext uri="{FF2B5EF4-FFF2-40B4-BE49-F238E27FC236}">
-                <a16:creationId xmlns:a16="http://schemas.microsoft.com/office/drawing/2014/main" id="{5924F374-6B2D-4A65-8E70-2305BAFB1397}"/>
+                <a16:creationId xmlns:a16="http://schemas.microsoft.com/office/drawing/2014/main" id="{915F40BD-F2A2-41E0-A0E5-AE0CF63E8E17}"/>
               </a:ext>
             </a:extLst>
           </p:cNvPr>
@@ -1702,7 +1702,7 @@
           <p:cNvPr id="6" name="Slide Number Placeholder 5">
             <a:extLst xmlns:a="http://schemas.openxmlformats.org/drawingml/2006/main">
               <a:ext uri="{FF2B5EF4-FFF2-40B4-BE49-F238E27FC236}">
-                <a16:creationId xmlns:a16="http://schemas.microsoft.com/office/drawing/2014/main" id="{BEDB18D0-8101-435F-B7C0-79D09D6FE959}"/>
+                <a16:creationId xmlns:a16="http://schemas.microsoft.com/office/drawing/2014/main" id="{31F4C834-3134-47E6-8BE4-271BD1B73541}"/>
               </a:ext>
             </a:extLst>
           </p:cNvPr>
@@ -1746,7 +1746,7 @@
           <p:cNvPr id="2" name="Title 1">
             <a:extLst xmlns:a="http://schemas.openxmlformats.org/drawingml/2006/main">
               <a:ext uri="{FF2B5EF4-FFF2-40B4-BE49-F238E27FC236}">
-                <a16:creationId xmlns:a16="http://schemas.microsoft.com/office/drawing/2014/main" id="{4A426F15-7424-40B0-85C6-35EE0F06A736}"/>
+                <a16:creationId xmlns:a16="http://schemas.microsoft.com/office/drawing/2014/main" id="{E316D8C9-C1A6-48D4-B43F-F42F73F31675}"/>
               </a:ext>
             </a:extLst>
           </p:cNvPr>
@@ -1783,7 +1783,7 @@
           <p:cNvPr id="3" name="Text Placeholder 2">
             <a:extLst xmlns:a="http://schemas.openxmlformats.org/drawingml/2006/main">
               <a:ext uri="{FF2B5EF4-FFF2-40B4-BE49-F238E27FC236}">
-                <a16:creationId xmlns:a16="http://schemas.microsoft.com/office/drawing/2014/main" id="{847597D1-10C5-4DC5-9EFD-191A5437A576}"/>
+                <a16:creationId xmlns:a16="http://schemas.microsoft.com/office/drawing/2014/main" id="{A864F53D-1233-40AE-B789-C9EED50FDE80}"/>
               </a:ext>
             </a:extLst>
           </p:cNvPr>
@@ -1909,7 +1909,7 @@
           <p:cNvPr id="4" name="Date Placeholder 3">
             <a:extLst xmlns:a="http://schemas.openxmlformats.org/drawingml/2006/main">
               <a:ext uri="{FF2B5EF4-FFF2-40B4-BE49-F238E27FC236}">
-                <a16:creationId xmlns:a16="http://schemas.microsoft.com/office/drawing/2014/main" id="{692A5EB2-A060-4ABE-B38E-0FA3E503C755}"/>
+                <a16:creationId xmlns:a16="http://schemas.microsoft.com/office/drawing/2014/main" id="{549FF319-FF96-4360-8FD8-19B1334CC13C}"/>
               </a:ext>
             </a:extLst>
           </p:cNvPr>
@@ -1936,7 +1936,7 @@
           <p:cNvPr id="5" name="Footer Placeholder 4">
             <a:extLst xmlns:a="http://schemas.openxmlformats.org/drawingml/2006/main">
               <a:ext uri="{FF2B5EF4-FFF2-40B4-BE49-F238E27FC236}">
-                <a16:creationId xmlns:a16="http://schemas.microsoft.com/office/drawing/2014/main" id="{82AE69AC-90FC-4692-9614-7D4674316591}"/>
+                <a16:creationId xmlns:a16="http://schemas.microsoft.com/office/drawing/2014/main" id="{0636B8C3-EF90-46B8-98B5-D45C35D068F9}"/>
               </a:ext>
             </a:extLst>
           </p:cNvPr>
@@ -1959,7 +1959,7 @@
           <p:cNvPr id="6" name="Slide Number Placeholder 5">
             <a:extLst xmlns:a="http://schemas.openxmlformats.org/drawingml/2006/main">
               <a:ext uri="{FF2B5EF4-FFF2-40B4-BE49-F238E27FC236}">
-                <a16:creationId xmlns:a16="http://schemas.microsoft.com/office/drawing/2014/main" id="{BE34A524-9EA1-42A5-A09E-994D9CC8A0DC}"/>
+                <a16:creationId xmlns:a16="http://schemas.microsoft.com/office/drawing/2014/main" id="{098577CD-BDB1-426B-9D45-BB3CC2349A08}"/>
               </a:ext>
             </a:extLst>
           </p:cNvPr>
@@ -2003,7 +2003,7 @@
           <p:cNvPr id="2" name="Title 1">
             <a:extLst xmlns:a="http://schemas.openxmlformats.org/drawingml/2006/main">
               <a:ext uri="{FF2B5EF4-FFF2-40B4-BE49-F238E27FC236}">
-                <a16:creationId xmlns:a16="http://schemas.microsoft.com/office/drawing/2014/main" id="{EBE2428E-3C71-4CDB-B3FD-8F22E55AE4CE}"/>
+                <a16:creationId xmlns:a16="http://schemas.microsoft.com/office/drawing/2014/main" id="{B496CE4A-0A7D-41E7-BA28-D1B5E4BC8A3F}"/>
               </a:ext>
             </a:extLst>
           </p:cNvPr>
@@ -2030,7 +2030,7 @@
           <p:cNvPr id="3" name="Content Placeholder 2">
             <a:extLst xmlns:a="http://schemas.openxmlformats.org/drawingml/2006/main">
               <a:ext uri="{FF2B5EF4-FFF2-40B4-BE49-F238E27FC236}">
-                <a16:creationId xmlns:a16="http://schemas.microsoft.com/office/drawing/2014/main" id="{FE02ADB3-9052-4C66-83BE-699103F47244}"/>
+                <a16:creationId xmlns:a16="http://schemas.microsoft.com/office/drawing/2014/main" id="{5F8E6D2E-FCC7-4649-921A-16D4C94AD52E}"/>
               </a:ext>
             </a:extLst>
           </p:cNvPr>
@@ -2134,7 +2134,7 @@
           <p:cNvPr id="4" name="Content Placeholder 3">
             <a:extLst xmlns:a="http://schemas.openxmlformats.org/drawingml/2006/main">
               <a:ext uri="{FF2B5EF4-FFF2-40B4-BE49-F238E27FC236}">
-                <a16:creationId xmlns:a16="http://schemas.microsoft.com/office/drawing/2014/main" id="{CD4C6BD3-389F-429A-9141-6C90C5AA5DE3}"/>
+                <a16:creationId xmlns:a16="http://schemas.microsoft.com/office/drawing/2014/main" id="{DC6CE855-07EB-47D5-97A5-A462BF4D10E6}"/>
               </a:ext>
             </a:extLst>
           </p:cNvPr>
@@ -2238,7 +2238,7 @@
           <p:cNvPr id="5" name="Date Placeholder 4">
             <a:extLst xmlns:a="http://schemas.openxmlformats.org/drawingml/2006/main">
               <a:ext uri="{FF2B5EF4-FFF2-40B4-BE49-F238E27FC236}">
-                <a16:creationId xmlns:a16="http://schemas.microsoft.com/office/drawing/2014/main" id="{E4716589-925C-4ACD-91FB-BB89412C0B21}"/>
+                <a16:creationId xmlns:a16="http://schemas.microsoft.com/office/drawing/2014/main" id="{DC937F56-118F-4465-A476-4CAC9927B255}"/>
               </a:ext>
             </a:extLst>
           </p:cNvPr>
@@ -2265,7 +2265,7 @@
           <p:cNvPr id="6" name="Footer Placeholder 5">
             <a:extLst xmlns:a="http://schemas.openxmlformats.org/drawingml/2006/main">
               <a:ext uri="{FF2B5EF4-FFF2-40B4-BE49-F238E27FC236}">
-                <a16:creationId xmlns:a16="http://schemas.microsoft.com/office/drawing/2014/main" id="{E0D5F127-AC5E-4C81-BFE3-E5AAEA658F66}"/>
+                <a16:creationId xmlns:a16="http://schemas.microsoft.com/office/drawing/2014/main" id="{AD02580A-F116-465D-9B68-926C795B748B}"/>
               </a:ext>
             </a:extLst>
           </p:cNvPr>
@@ -2288,7 +2288,7 @@
           <p:cNvPr id="7" name="Slide Number Placeholder 6">
             <a:extLst xmlns:a="http://schemas.openxmlformats.org/drawingml/2006/main">
               <a:ext uri="{FF2B5EF4-FFF2-40B4-BE49-F238E27FC236}">
-                <a16:creationId xmlns:a16="http://schemas.microsoft.com/office/drawing/2014/main" id="{9357DB2A-E462-4230-8EB0-851213FFD8B0}"/>
+                <a16:creationId xmlns:a16="http://schemas.microsoft.com/office/drawing/2014/main" id="{8C87F393-8B33-43E5-A667-1F17271BF7D2}"/>
               </a:ext>
             </a:extLst>
           </p:cNvPr>
@@ -2332,7 +2332,7 @@
           <p:cNvPr id="2" name="Title 1">
             <a:extLst xmlns:a="http://schemas.openxmlformats.org/drawingml/2006/main">
               <a:ext uri="{FF2B5EF4-FFF2-40B4-BE49-F238E27FC236}">
-                <a16:creationId xmlns:a16="http://schemas.microsoft.com/office/drawing/2014/main" id="{03A020F9-6A2A-4A6C-9B4C-60BE1870E3A5}"/>
+                <a16:creationId xmlns:a16="http://schemas.microsoft.com/office/drawing/2014/main" id="{52D6EBEF-9546-4F14-9226-F21BE61892C9}"/>
               </a:ext>
             </a:extLst>
           </p:cNvPr>
@@ -2364,7 +2364,7 @@
           <p:cNvPr id="3" name="Text Placeholder 2">
             <a:extLst xmlns:a="http://schemas.openxmlformats.org/drawingml/2006/main">
               <a:ext uri="{FF2B5EF4-FFF2-40B4-BE49-F238E27FC236}">
-                <a16:creationId xmlns:a16="http://schemas.microsoft.com/office/drawing/2014/main" id="{63F2CFEB-3EAD-4225-81A8-F4390D85054B}"/>
+                <a16:creationId xmlns:a16="http://schemas.microsoft.com/office/drawing/2014/main" id="{B7632BC7-CFE3-430B-953A-1B964A3C8A8B}"/>
               </a:ext>
             </a:extLst>
           </p:cNvPr>
@@ -2436,7 +2436,7 @@
           <p:cNvPr id="4" name="Content Placeholder 3">
             <a:extLst xmlns:a="http://schemas.openxmlformats.org/drawingml/2006/main">
               <a:ext uri="{FF2B5EF4-FFF2-40B4-BE49-F238E27FC236}">
-                <a16:creationId xmlns:a16="http://schemas.microsoft.com/office/drawing/2014/main" id="{57750B85-70E5-4E59-8DBE-67F8B1BE65F8}"/>
+                <a16:creationId xmlns:a16="http://schemas.microsoft.com/office/drawing/2014/main" id="{AECBFA31-CA8E-4C82-B483-5586589E34EA}"/>
               </a:ext>
             </a:extLst>
           </p:cNvPr>
@@ -2540,7 +2540,7 @@
           <p:cNvPr id="5" name="Text Placeholder 4">
             <a:extLst xmlns:a="http://schemas.openxmlformats.org/drawingml/2006/main">
               <a:ext uri="{FF2B5EF4-FFF2-40B4-BE49-F238E27FC236}">
-                <a16:creationId xmlns:a16="http://schemas.microsoft.com/office/drawing/2014/main" id="{CE4637BA-B7E8-4D1F-8384-048315333BCB}"/>
+                <a16:creationId xmlns:a16="http://schemas.microsoft.com/office/drawing/2014/main" id="{4BD896A6-1107-4D75-86DE-AFE728E8CD90}"/>
               </a:ext>
             </a:extLst>
           </p:cNvPr>
@@ -2612,7 +2612,7 @@
           <p:cNvPr id="6" name="Content Placeholder 5">
             <a:extLst xmlns:a="http://schemas.openxmlformats.org/drawingml/2006/main">
               <a:ext uri="{FF2B5EF4-FFF2-40B4-BE49-F238E27FC236}">
-                <a16:creationId xmlns:a16="http://schemas.microsoft.com/office/drawing/2014/main" id="{2BE568A9-DB72-45C3-A2E1-4B279EA4240F}"/>
+                <a16:creationId xmlns:a16="http://schemas.microsoft.com/office/drawing/2014/main" id="{2514D321-9B75-4380-B77F-FC1A90C48636}"/>
               </a:ext>
             </a:extLst>
           </p:cNvPr>
@@ -2716,7 +2716,7 @@
           <p:cNvPr id="7" name="Date Placeholder 6">
             <a:extLst xmlns:a="http://schemas.openxmlformats.org/drawingml/2006/main">
               <a:ext uri="{FF2B5EF4-FFF2-40B4-BE49-F238E27FC236}">
-                <a16:creationId xmlns:a16="http://schemas.microsoft.com/office/drawing/2014/main" id="{931409B2-C1D6-446B-AF13-10258067E04A}"/>
+                <a16:creationId xmlns:a16="http://schemas.microsoft.com/office/drawing/2014/main" id="{59281C62-79FA-46D7-BCB7-AD57FF2ACBFD}"/>
               </a:ext>
             </a:extLst>
           </p:cNvPr>
@@ -2743,7 +2743,7 @@
           <p:cNvPr id="8" name="Footer Placeholder 7">
             <a:extLst xmlns:a="http://schemas.openxmlformats.org/drawingml/2006/main">
               <a:ext uri="{FF2B5EF4-FFF2-40B4-BE49-F238E27FC236}">
-                <a16:creationId xmlns:a16="http://schemas.microsoft.com/office/drawing/2014/main" id="{51C03960-000F-4FB1-897D-1B696A61EF45}"/>
+                <a16:creationId xmlns:a16="http://schemas.microsoft.com/office/drawing/2014/main" id="{9EEF5B33-C8A5-4735-8E2B-5E7614600570}"/>
               </a:ext>
             </a:extLst>
           </p:cNvPr>
@@ -2766,7 +2766,7 @@
           <p:cNvPr id="9" name="Slide Number Placeholder 8">
             <a:extLst xmlns:a="http://schemas.openxmlformats.org/drawingml/2006/main">
               <a:ext uri="{FF2B5EF4-FFF2-40B4-BE49-F238E27FC236}">
-                <a16:creationId xmlns:a16="http://schemas.microsoft.com/office/drawing/2014/main" id="{B23444EB-151D-4751-8ED5-A4360B95A532}"/>
+                <a16:creationId xmlns:a16="http://schemas.microsoft.com/office/drawing/2014/main" id="{F0E6995C-5F7C-43E9-AB93-134432785FEC}"/>
               </a:ext>
             </a:extLst>
           </p:cNvPr>
@@ -2810,7 +2810,7 @@
           <p:cNvPr id="2" name="Title 1">
             <a:extLst xmlns:a="http://schemas.openxmlformats.org/drawingml/2006/main">
               <a:ext uri="{FF2B5EF4-FFF2-40B4-BE49-F238E27FC236}">
-                <a16:creationId xmlns:a16="http://schemas.microsoft.com/office/drawing/2014/main" id="{2ECB612E-674C-4A1B-81C6-45825594ADE8}"/>
+                <a16:creationId xmlns:a16="http://schemas.microsoft.com/office/drawing/2014/main" id="{88952B6F-B8D8-4BCA-AF11-50CEEDC9DDE0}"/>
               </a:ext>
             </a:extLst>
           </p:cNvPr>
@@ -2837,7 +2837,7 @@
           <p:cNvPr id="3" name="Date Placeholder 2">
             <a:extLst xmlns:a="http://schemas.openxmlformats.org/drawingml/2006/main">
               <a:ext uri="{FF2B5EF4-FFF2-40B4-BE49-F238E27FC236}">
-                <a16:creationId xmlns:a16="http://schemas.microsoft.com/office/drawing/2014/main" id="{7812FD11-FDCC-463A-8354-D74ED79CD9FD}"/>
+                <a16:creationId xmlns:a16="http://schemas.microsoft.com/office/drawing/2014/main" id="{32048539-19D6-4520-80C0-5FD3935BFC34}"/>
               </a:ext>
             </a:extLst>
           </p:cNvPr>
@@ -2864,7 +2864,7 @@
           <p:cNvPr id="4" name="Footer Placeholder 3">
             <a:extLst xmlns:a="http://schemas.openxmlformats.org/drawingml/2006/main">
               <a:ext uri="{FF2B5EF4-FFF2-40B4-BE49-F238E27FC236}">
-                <a16:creationId xmlns:a16="http://schemas.microsoft.com/office/drawing/2014/main" id="{EF2DE0E4-6D78-4BCA-858F-58B2D4129E1D}"/>
+                <a16:creationId xmlns:a16="http://schemas.microsoft.com/office/drawing/2014/main" id="{128436F7-54DD-4E94-B027-2D52CF7B960A}"/>
               </a:ext>
             </a:extLst>
           </p:cNvPr>
@@ -2887,7 +2887,7 @@
           <p:cNvPr id="5" name="Slide Number Placeholder 4">
             <a:extLst xmlns:a="http://schemas.openxmlformats.org/drawingml/2006/main">
               <a:ext uri="{FF2B5EF4-FFF2-40B4-BE49-F238E27FC236}">
-                <a16:creationId xmlns:a16="http://schemas.microsoft.com/office/drawing/2014/main" id="{665CBE6C-4049-419D-A128-8EBC65418A7D}"/>
+                <a16:creationId xmlns:a16="http://schemas.microsoft.com/office/drawing/2014/main" id="{9A61784D-4A45-4E68-9872-80D8CE48026C}"/>
               </a:ext>
             </a:extLst>
           </p:cNvPr>
@@ -2931,7 +2931,7 @@
           <p:cNvPr id="2" name="Date Placeholder 1">
             <a:extLst xmlns:a="http://schemas.openxmlformats.org/drawingml/2006/main">
               <a:ext uri="{FF2B5EF4-FFF2-40B4-BE49-F238E27FC236}">
-                <a16:creationId xmlns:a16="http://schemas.microsoft.com/office/drawing/2014/main" id="{E1BD8D4A-01EE-4DA6-A0AD-7EC0969F1235}"/>
+                <a16:creationId xmlns:a16="http://schemas.microsoft.com/office/drawing/2014/main" id="{5663103F-BE1D-457C-9D33-7BA816223F51}"/>
               </a:ext>
             </a:extLst>
           </p:cNvPr>
@@ -2958,7 +2958,7 @@
           <p:cNvPr id="3" name="Footer Placeholder 2">
             <a:extLst xmlns:a="http://schemas.openxmlformats.org/drawingml/2006/main">
               <a:ext uri="{FF2B5EF4-FFF2-40B4-BE49-F238E27FC236}">
-                <a16:creationId xmlns:a16="http://schemas.microsoft.com/office/drawing/2014/main" id="{EBF7D9F9-0FA1-4239-9855-E3118F144D76}"/>
+                <a16:creationId xmlns:a16="http://schemas.microsoft.com/office/drawing/2014/main" id="{1B51D9F7-4E24-408C-B584-DFFBB99923BB}"/>
               </a:ext>
             </a:extLst>
           </p:cNvPr>
@@ -2981,7 +2981,7 @@
           <p:cNvPr id="4" name="Slide Number Placeholder 3">
             <a:extLst xmlns:a="http://schemas.openxmlformats.org/drawingml/2006/main">
               <a:ext uri="{FF2B5EF4-FFF2-40B4-BE49-F238E27FC236}">
-                <a16:creationId xmlns:a16="http://schemas.microsoft.com/office/drawing/2014/main" id="{22B4CF88-6001-4885-81B7-2AA3519690E0}"/>
+                <a16:creationId xmlns:a16="http://schemas.microsoft.com/office/drawing/2014/main" id="{5B0AC4BD-7E62-4ED5-B191-B66EB81D0CA4}"/>
               </a:ext>
             </a:extLst>
           </p:cNvPr>
@@ -3025,7 +3025,7 @@
           <p:cNvPr id="2" name="Title 1">
             <a:extLst xmlns:a="http://schemas.openxmlformats.org/drawingml/2006/main">
               <a:ext uri="{FF2B5EF4-FFF2-40B4-BE49-F238E27FC236}">
-                <a16:creationId xmlns:a16="http://schemas.microsoft.com/office/drawing/2014/main" id="{B964E7B8-6CCD-44CB-A676-5330FEE5DE9F}"/>
+                <a16:creationId xmlns:a16="http://schemas.microsoft.com/office/drawing/2014/main" id="{6F03AE59-6171-4DC8-A597-526DAA5774F5}"/>
               </a:ext>
             </a:extLst>
           </p:cNvPr>
@@ -3062,7 +3062,7 @@
           <p:cNvPr id="3" name="Content Placeholder 2">
             <a:extLst xmlns:a="http://schemas.openxmlformats.org/drawingml/2006/main">
               <a:ext uri="{FF2B5EF4-FFF2-40B4-BE49-F238E27FC236}">
-                <a16:creationId xmlns:a16="http://schemas.microsoft.com/office/drawing/2014/main" id="{4BE7AA2D-2311-4B30-A98C-9E3D409E78D6}"/>
+                <a16:creationId xmlns:a16="http://schemas.microsoft.com/office/drawing/2014/main" id="{AC7F3E22-F5CA-4C29-AA6D-87FAB988727D}"/>
               </a:ext>
             </a:extLst>
           </p:cNvPr>
@@ -3166,7 +3166,7 @@
           <p:cNvPr id="4" name="Text Placeholder 3">
             <a:extLst xmlns:a="http://schemas.openxmlformats.org/drawingml/2006/main">
               <a:ext uri="{FF2B5EF4-FFF2-40B4-BE49-F238E27FC236}">
-                <a16:creationId xmlns:a16="http://schemas.microsoft.com/office/drawing/2014/main" id="{CCED15BC-57DC-4402-AAAB-E75929BA914B}"/>
+                <a16:creationId xmlns:a16="http://schemas.microsoft.com/office/drawing/2014/main" id="{6C16FCE2-10DD-41D2-B209-933B9904E7E8}"/>
               </a:ext>
             </a:extLst>
           </p:cNvPr>
@@ -3238,7 +3238,7 @@
           <p:cNvPr id="5" name="Date Placeholder 4">
             <a:extLst xmlns:a="http://schemas.openxmlformats.org/drawingml/2006/main">
               <a:ext uri="{FF2B5EF4-FFF2-40B4-BE49-F238E27FC236}">
-                <a16:creationId xmlns:a16="http://schemas.microsoft.com/office/drawing/2014/main" id="{9667E4F3-8584-4F6F-8278-5D8145790448}"/>
+                <a16:creationId xmlns:a16="http://schemas.microsoft.com/office/drawing/2014/main" id="{5E4C2921-1F58-4168-B6E9-983C5F5CD157}"/>
               </a:ext>
             </a:extLst>
           </p:cNvPr>
@@ -3265,7 +3265,7 @@
           <p:cNvPr id="6" name="Footer Placeholder 5">
             <a:extLst xmlns:a="http://schemas.openxmlformats.org/drawingml/2006/main">
               <a:ext uri="{FF2B5EF4-FFF2-40B4-BE49-F238E27FC236}">
-                <a16:creationId xmlns:a16="http://schemas.microsoft.com/office/drawing/2014/main" id="{F2A5B524-9AA0-456C-9174-D2F136BD1230}"/>
+                <a16:creationId xmlns:a16="http://schemas.microsoft.com/office/drawing/2014/main" id="{8CAAABFD-55F8-4F05-81F2-5B49F27A0FBA}"/>
               </a:ext>
             </a:extLst>
           </p:cNvPr>
@@ -3288,7 +3288,7 @@
           <p:cNvPr id="7" name="Slide Number Placeholder 6">
             <a:extLst xmlns:a="http://schemas.openxmlformats.org/drawingml/2006/main">
               <a:ext uri="{FF2B5EF4-FFF2-40B4-BE49-F238E27FC236}">
-                <a16:creationId xmlns:a16="http://schemas.microsoft.com/office/drawing/2014/main" id="{A70488FB-923D-40F5-B8C8-CC7DCF4C90E2}"/>
+                <a16:creationId xmlns:a16="http://schemas.microsoft.com/office/drawing/2014/main" id="{48213D0E-FDCC-414E-99C3-E5C2633AF7D0}"/>
               </a:ext>
             </a:extLst>
           </p:cNvPr>
@@ -3332,7 +3332,7 @@
           <p:cNvPr id="2" name="Title 1">
             <a:extLst xmlns:a="http://schemas.openxmlformats.org/drawingml/2006/main">
               <a:ext uri="{FF2B5EF4-FFF2-40B4-BE49-F238E27FC236}">
-                <a16:creationId xmlns:a16="http://schemas.microsoft.com/office/drawing/2014/main" id="{6578B670-FCCE-4510-B905-BC7E1CA37A95}"/>
+                <a16:creationId xmlns:a16="http://schemas.microsoft.com/office/drawing/2014/main" id="{DDA23159-3117-4A67-98BC-25C20CFBE89B}"/>
               </a:ext>
             </a:extLst>
           </p:cNvPr>
@@ -3369,7 +3369,7 @@
           <p:cNvPr id="3" name="Picture Placeholder 2">
             <a:extLst xmlns:a="http://schemas.openxmlformats.org/drawingml/2006/main">
               <a:ext uri="{FF2B5EF4-FFF2-40B4-BE49-F238E27FC236}">
-                <a16:creationId xmlns:a16="http://schemas.microsoft.com/office/drawing/2014/main" id="{A577AD40-8B86-4A74-B02E-B0312A77339A}"/>
+                <a16:creationId xmlns:a16="http://schemas.microsoft.com/office/drawing/2014/main" id="{E3FC9F0F-097F-41C5-9302-E927720DD0F7}"/>
               </a:ext>
             </a:extLst>
           </p:cNvPr>
@@ -3434,7 +3434,7 @@
           <p:cNvPr id="4" name="Text Placeholder 3">
             <a:extLst xmlns:a="http://schemas.openxmlformats.org/drawingml/2006/main">
               <a:ext uri="{FF2B5EF4-FFF2-40B4-BE49-F238E27FC236}">
-                <a16:creationId xmlns:a16="http://schemas.microsoft.com/office/drawing/2014/main" id="{6902E262-2423-4818-8ED3-767C3E094098}"/>
+                <a16:creationId xmlns:a16="http://schemas.microsoft.com/office/drawing/2014/main" id="{87C33D5D-2E62-4D0F-B1DE-C8CC3FB9EF1D}"/>
               </a:ext>
             </a:extLst>
           </p:cNvPr>
@@ -3506,7 +3506,7 @@
           <p:cNvPr id="5" name="Date Placeholder 4">
             <a:extLst xmlns:a="http://schemas.openxmlformats.org/drawingml/2006/main">
               <a:ext uri="{FF2B5EF4-FFF2-40B4-BE49-F238E27FC236}">
-                <a16:creationId xmlns:a16="http://schemas.microsoft.com/office/drawing/2014/main" id="{DA765508-1C01-4018-A79E-467389C50B3F}"/>
+                <a16:creationId xmlns:a16="http://schemas.microsoft.com/office/drawing/2014/main" id="{16BDB037-02B5-4387-BD61-66D1A6103CC3}"/>
               </a:ext>
             </a:extLst>
           </p:cNvPr>
@@ -3533,7 +3533,7 @@
           <p:cNvPr id="6" name="Footer Placeholder 5">
             <a:extLst xmlns:a="http://schemas.openxmlformats.org/drawingml/2006/main">
               <a:ext uri="{FF2B5EF4-FFF2-40B4-BE49-F238E27FC236}">
-                <a16:creationId xmlns:a16="http://schemas.microsoft.com/office/drawing/2014/main" id="{0F7F2044-96FA-4D98-8A56-EE06AC242FFD}"/>
+                <a16:creationId xmlns:a16="http://schemas.microsoft.com/office/drawing/2014/main" id="{D9AA2C29-64EE-4F57-B713-CC469352171C}"/>
               </a:ext>
             </a:extLst>
           </p:cNvPr>
@@ -3556,7 +3556,7 @@
           <p:cNvPr id="7" name="Slide Number Placeholder 6">
             <a:extLst xmlns:a="http://schemas.openxmlformats.org/drawingml/2006/main">
               <a:ext uri="{FF2B5EF4-FFF2-40B4-BE49-F238E27FC236}">
-                <a16:creationId xmlns:a16="http://schemas.microsoft.com/office/drawing/2014/main" id="{6CC6290C-5750-4490-9860-04E6A8F8E5B6}"/>
+                <a16:creationId xmlns:a16="http://schemas.microsoft.com/office/drawing/2014/main" id="{006584F0-E0E2-4FE4-9409-FD4B9C94B614}"/>
               </a:ext>
             </a:extLst>
           </p:cNvPr>
@@ -3605,7 +3605,7 @@
           <p:cNvPr id="2" name="Title Placeholder 1">
             <a:extLst xmlns:a="http://schemas.openxmlformats.org/drawingml/2006/main">
               <a:ext uri="{FF2B5EF4-FFF2-40B4-BE49-F238E27FC236}">
-                <a16:creationId xmlns:a16="http://schemas.microsoft.com/office/drawing/2014/main" id="{B49AA49A-AD13-48B2-AA9A-E5EB10E5822B}"/>
+                <a16:creationId xmlns:a16="http://schemas.microsoft.com/office/drawing/2014/main" id="{DFDBC3E4-868F-4F63-85A2-687CA1AD622B}"/>
               </a:ext>
             </a:extLst>
           </p:cNvPr>
@@ -3642,7 +3642,7 @@
           <p:cNvPr id="3" name="Text Placeholder 2">
             <a:extLst xmlns:a="http://schemas.openxmlformats.org/drawingml/2006/main">
               <a:ext uri="{FF2B5EF4-FFF2-40B4-BE49-F238E27FC236}">
-                <a16:creationId xmlns:a16="http://schemas.microsoft.com/office/drawing/2014/main" id="{143B13DB-E618-4B16-A677-C44A0FE7D210}"/>
+                <a16:creationId xmlns:a16="http://schemas.microsoft.com/office/drawing/2014/main" id="{8E9ADF63-FBCB-4539-8E93-EB37D5E59853}"/>
               </a:ext>
             </a:extLst>
           </p:cNvPr>
@@ -3714,7 +3714,7 @@
           <p:cNvPr id="4" name="Date Placeholder 3">
             <a:extLst xmlns:a="http://schemas.openxmlformats.org/drawingml/2006/main">
               <a:ext uri="{FF2B5EF4-FFF2-40B4-BE49-F238E27FC236}">
-                <a16:creationId xmlns:a16="http://schemas.microsoft.com/office/drawing/2014/main" id="{DF14D17B-FCF1-4C96-ACD6-D3A35A97A50E}"/>
+                <a16:creationId xmlns:a16="http://schemas.microsoft.com/office/drawing/2014/main" id="{EB98E6BB-88A0-4CE1-AA50-71588519B2FA}"/>
               </a:ext>
             </a:extLst>
           </p:cNvPr>
@@ -3760,7 +3760,7 @@
           <p:cNvPr id="5" name="Footer Placeholder 4">
             <a:extLst xmlns:a="http://schemas.openxmlformats.org/drawingml/2006/main">
               <a:ext uri="{FF2B5EF4-FFF2-40B4-BE49-F238E27FC236}">
-                <a16:creationId xmlns:a16="http://schemas.microsoft.com/office/drawing/2014/main" id="{B1E2AE7C-DCF1-4DF1-A798-166E486103AD}"/>
+                <a16:creationId xmlns:a16="http://schemas.microsoft.com/office/drawing/2014/main" id="{B27CF98E-CCD7-4027-ADDA-9E350594406C}"/>
               </a:ext>
             </a:extLst>
           </p:cNvPr>
@@ -3802,7 +3802,7 @@
           <p:cNvPr id="6" name="Slide Number Placeholder 5">
             <a:extLst xmlns:a="http://schemas.openxmlformats.org/drawingml/2006/main">
               <a:ext uri="{FF2B5EF4-FFF2-40B4-BE49-F238E27FC236}">
-                <a16:creationId xmlns:a16="http://schemas.microsoft.com/office/drawing/2014/main" id="{595C6957-CA8F-4A8F-B779-59A75171C09A}"/>
+                <a16:creationId xmlns:a16="http://schemas.microsoft.com/office/drawing/2014/main" id="{B5D137D2-F745-4BA1-B2B7-92E1ACDB2DC1}"/>
               </a:ext>
             </a:extLst>
           </p:cNvPr>
@@ -3847,17 +3847,17 @@
   </p:cSld>
   <p:clrMap bg1="lt1" tx1="dk1" bg2="lt2" tx2="dk2" accent1="accent1" accent2="accent2" accent3="accent3" accent4="accent4" accent5="accent5" accent6="accent6" hlink="hlink" folHlink="folHlink"/>
   <p:sldLayoutIdLst>
-    <p:sldLayoutId xmlns:r="http://schemas.openxmlformats.org/officeDocument/2006/relationships" id="2147483649" r:id="R29b845cdd8404ee8"/>
-    <p:sldLayoutId xmlns:r="http://schemas.openxmlformats.org/officeDocument/2006/relationships" id="2147483650" r:id="R13b1244742804f87"/>
-    <p:sldLayoutId xmlns:r="http://schemas.openxmlformats.org/officeDocument/2006/relationships" id="2147483651" r:id="R21c6e90ac6554f53"/>
-    <p:sldLayoutId xmlns:r="http://schemas.openxmlformats.org/officeDocument/2006/relationships" id="2147483652" r:id="Rc4661f8b93fe401a"/>
-    <p:sldLayoutId xmlns:r="http://schemas.openxmlformats.org/officeDocument/2006/relationships" id="2147483653" r:id="R93b65d16a4f745e0"/>
-    <p:sldLayoutId xmlns:r="http://schemas.openxmlformats.org/officeDocument/2006/relationships" id="2147483654" r:id="Rfd83aadd606b4ada"/>
-    <p:sldLayoutId xmlns:r="http://schemas.openxmlformats.org/officeDocument/2006/relationships" id="2147483655" r:id="Rcc94d00abb194601"/>
-    <p:sldLayoutId xmlns:r="http://schemas.openxmlformats.org/officeDocument/2006/relationships" id="2147483656" r:id="R3ecfc18c3ce54834"/>
-    <p:sldLayoutId xmlns:r="http://schemas.openxmlformats.org/officeDocument/2006/relationships" id="2147483657" r:id="R8675a82788244ee5"/>
-    <p:sldLayoutId xmlns:r="http://schemas.openxmlformats.org/officeDocument/2006/relationships" id="2147483658" r:id="R4fb004a5ba744e3d"/>
-    <p:sldLayoutId xmlns:r="http://schemas.openxmlformats.org/officeDocument/2006/relationships" id="2147483659" r:id="R94c8cf28bcc94f48"/>
+    <p:sldLayoutId xmlns:r="http://schemas.openxmlformats.org/officeDocument/2006/relationships" id="2147483649" r:id="R2796c957d0bf4657"/>
+    <p:sldLayoutId xmlns:r="http://schemas.openxmlformats.org/officeDocument/2006/relationships" id="2147483650" r:id="R3c4deba5b4074ffb"/>
+    <p:sldLayoutId xmlns:r="http://schemas.openxmlformats.org/officeDocument/2006/relationships" id="2147483651" r:id="R8ac5af31e10e47c5"/>
+    <p:sldLayoutId xmlns:r="http://schemas.openxmlformats.org/officeDocument/2006/relationships" id="2147483652" r:id="R65683bfe9c1b4a2e"/>
+    <p:sldLayoutId xmlns:r="http://schemas.openxmlformats.org/officeDocument/2006/relationships" id="2147483653" r:id="Rc0a2005a949d4ddf"/>
+    <p:sldLayoutId xmlns:r="http://schemas.openxmlformats.org/officeDocument/2006/relationships" id="2147483654" r:id="R70662eadec364069"/>
+    <p:sldLayoutId xmlns:r="http://schemas.openxmlformats.org/officeDocument/2006/relationships" id="2147483655" r:id="Ra5522b97e9114292"/>
+    <p:sldLayoutId xmlns:r="http://schemas.openxmlformats.org/officeDocument/2006/relationships" id="2147483656" r:id="Re8649ca1adac4ccb"/>
+    <p:sldLayoutId xmlns:r="http://schemas.openxmlformats.org/officeDocument/2006/relationships" id="2147483657" r:id="R9aade797eda84762"/>
+    <p:sldLayoutId xmlns:r="http://schemas.openxmlformats.org/officeDocument/2006/relationships" id="2147483658" r:id="R2c0eb25d80f6456e"/>
+    <p:sldLayoutId xmlns:r="http://schemas.openxmlformats.org/officeDocument/2006/relationships" id="2147483659" r:id="R4a0e5b49e2274946"/>
   </p:sldLayoutIdLst>
   <p:txStyles>
     <p:titleStyle>
@@ -4410,7 +4410,7 @@
           <p:cNvPr id="2" name="Rectangle 1">
             <a:extLst xmlns:a="http://schemas.openxmlformats.org/drawingml/2006/main">
               <a:ext uri="{FF2B5EF4-FFF2-40B4-BE49-F238E27FC236}">
-                <a16:creationId xmlns:a16="http://schemas.microsoft.com/office/drawing/2014/main" id="{04C99BF8-CFE3-4F25-8642-672AF9DF4DF6}"/>
+                <a16:creationId xmlns:a16="http://schemas.microsoft.com/office/drawing/2014/main" id="{8A015171-0212-434B-9C2C-9A139C65E5B9}"/>
               </a:ext>
             </a:extLst>
           </p:cNvPr>
@@ -4465,7 +4465,7 @@
           <p:cNvPr id="3" name="TextBox 2">
             <a:extLst xmlns:a="http://schemas.openxmlformats.org/drawingml/2006/main">
               <a:ext uri="{FF2B5EF4-FFF2-40B4-BE49-F238E27FC236}">
-                <a16:creationId xmlns:a16="http://schemas.microsoft.com/office/drawing/2014/main" id="{8CE65EA6-3687-4BC5-B973-E1CEF249F12A}"/>
+                <a16:creationId xmlns:a16="http://schemas.microsoft.com/office/drawing/2014/main" id="{48085DE9-0834-4CF3-BD2F-28DBBE942BCC}"/>
               </a:ext>
             </a:extLst>
           </p:cNvPr>
@@ -4512,7 +4512,7 @@
           <p:cNvPr id="4" name="TextBox 3">
             <a:extLst xmlns:a="http://schemas.openxmlformats.org/drawingml/2006/main">
               <a:ext uri="{FF2B5EF4-FFF2-40B4-BE49-F238E27FC236}">
-                <a16:creationId xmlns:a16="http://schemas.microsoft.com/office/drawing/2014/main" id="{6B701360-E0FA-4797-9671-57C30DC6D952}"/>
+                <a16:creationId xmlns:a16="http://schemas.microsoft.com/office/drawing/2014/main" id="{6EE5D755-A9C6-4FA7-9620-63D7E4DAE8DF}"/>
               </a:ext>
             </a:extLst>
           </p:cNvPr>
@@ -4580,7 +4580,7 @@
           <p:cNvPr id="5" name="TextBox 4">
             <a:extLst xmlns:a="http://schemas.openxmlformats.org/drawingml/2006/main">
               <a:ext uri="{FF2B5EF4-FFF2-40B4-BE49-F238E27FC236}">
-                <a16:creationId xmlns:a16="http://schemas.microsoft.com/office/drawing/2014/main" id="{6CEA0DEB-BCD6-475C-B512-3C1AF3F79C0D}"/>
+                <a16:creationId xmlns:a16="http://schemas.microsoft.com/office/drawing/2014/main" id="{1EA897F9-9EDA-46E0-98B7-DCB1BE4D2232}"/>
               </a:ext>
             </a:extLst>
           </p:cNvPr>
@@ -4627,7 +4627,7 @@
           <p:cNvPr id="6" name="Rectangle 5">
             <a:extLst xmlns:a="http://schemas.openxmlformats.org/drawingml/2006/main">
               <a:ext uri="{FF2B5EF4-FFF2-40B4-BE49-F238E27FC236}">
-                <a16:creationId xmlns:a16="http://schemas.microsoft.com/office/drawing/2014/main" id="{98D4CD42-B9D1-4BF9-98DB-3FCE5CA5478F}"/>
+                <a16:creationId xmlns:a16="http://schemas.microsoft.com/office/drawing/2014/main" id="{17CE15DB-D1B2-4FB3-897D-704E1E4FE28C}"/>
               </a:ext>
             </a:extLst>
           </p:cNvPr>
@@ -4682,7 +4682,7 @@
           <p:cNvPr id="7" name="TextBox 6">
             <a:extLst xmlns:a="http://schemas.openxmlformats.org/drawingml/2006/main">
               <a:ext uri="{FF2B5EF4-FFF2-40B4-BE49-F238E27FC236}">
-                <a16:creationId xmlns:a16="http://schemas.microsoft.com/office/drawing/2014/main" id="{4E380C14-7EF9-41F2-9503-66C5DFD496ED}"/>
+                <a16:creationId xmlns:a16="http://schemas.microsoft.com/office/drawing/2014/main" id="{FF3068A9-D50E-46B2-A308-A7C2F5A3696B}"/>
               </a:ext>
             </a:extLst>
           </p:cNvPr>
@@ -4729,7 +4729,7 @@
           <p:cNvPr id="8" name="TextBox 7">
             <a:extLst xmlns:a="http://schemas.openxmlformats.org/drawingml/2006/main">
               <a:ext uri="{FF2B5EF4-FFF2-40B4-BE49-F238E27FC236}">
-                <a16:creationId xmlns:a16="http://schemas.microsoft.com/office/drawing/2014/main" id="{8756C361-44C3-4ED2-91CB-809419848185}"/>
+                <a16:creationId xmlns:a16="http://schemas.microsoft.com/office/drawing/2014/main" id="{415453E6-2B72-4F00-A727-E738DE1B58B9}"/>
               </a:ext>
             </a:extLst>
           </p:cNvPr>
@@ -4741,7 +4741,7 @@
         <p:spPr>
           <a:xfrm xmlns:a="http://schemas.openxmlformats.org/drawingml/2006/main">
             <a:off x="8732520" y="1700784"/>
-            <a:ext cx="2880360" cy="515112"/>
+            <a:ext cx="2880360" cy="502920"/>
           </a:xfrm>
           <a:prstGeom xmlns:a="http://schemas.openxmlformats.org/drawingml/2006/main" prst="rect">
             <a:avLst/>
@@ -4766,7 +4766,7 @@
                 <a:ea typeface="Aptos"/>
                 <a:cs typeface="Aptos"/>
               </a:rPr>
-              <a:t>2026.07.23-16</a:t>
+              <a:t>2026.07.24-17</a:t>
             </a:r>
           </a:p>
         </p:txBody>
@@ -4776,7 +4776,7 @@
           <p:cNvPr id="9" name="TextBox 8">
             <a:extLst xmlns:a="http://schemas.openxmlformats.org/drawingml/2006/main">
               <a:ext uri="{FF2B5EF4-FFF2-40B4-BE49-F238E27FC236}">
-                <a16:creationId xmlns:a16="http://schemas.microsoft.com/office/drawing/2014/main" id="{2E87FEC6-7F85-4C01-814F-E7F696773B9C}"/>
+                <a16:creationId xmlns:a16="http://schemas.microsoft.com/office/drawing/2014/main" id="{F6049AE7-0B91-430E-AD5D-A9E28B6FBE2D}"/>
               </a:ext>
             </a:extLst>
           </p:cNvPr>
@@ -4813,7 +4813,7 @@
                 <a:ea typeface="Aptos"/>
                 <a:cs typeface="Aptos"/>
               </a:rPr>
-              <a:t>Updated 2026-07-22</a:t>
+              <a:t>Updated 2026-07-24</a:t>
             </a:r>
             <a:br>
               <a:rPr sz="1700" b="0">
@@ -4844,7 +4844,7 @@
           <p:cNvPr id="10" name="TextBox 9">
             <a:extLst xmlns:a="http://schemas.openxmlformats.org/drawingml/2006/main">
               <a:ext uri="{FF2B5EF4-FFF2-40B4-BE49-F238E27FC236}">
-                <a16:creationId xmlns:a16="http://schemas.microsoft.com/office/drawing/2014/main" id="{DA8AC0A9-8FD3-4E1B-8C03-54862E7A4067}"/>
+                <a16:creationId xmlns:a16="http://schemas.microsoft.com/office/drawing/2014/main" id="{3EA4DFCF-EDE8-4753-8DB3-51A392030528}"/>
               </a:ext>
             </a:extLst>
           </p:cNvPr>
@@ -4891,7 +4891,7 @@
           <p:cNvPr id="11" name="TextBox 10">
             <a:extLst xmlns:a="http://schemas.openxmlformats.org/drawingml/2006/main">
               <a:ext uri="{FF2B5EF4-FFF2-40B4-BE49-F238E27FC236}">
-                <a16:creationId xmlns:a16="http://schemas.microsoft.com/office/drawing/2014/main" id="{502CB51C-8D82-4D58-9A5D-7DBC1E5C3252}"/>
+                <a16:creationId xmlns:a16="http://schemas.microsoft.com/office/drawing/2014/main" id="{BCA49F7F-75D4-4B29-8377-0D9FA01F240B}"/>
               </a:ext>
             </a:extLst>
           </p:cNvPr>
@@ -4938,7 +4938,7 @@
           <p:cNvPr id="12" name="TextBox 11">
             <a:extLst xmlns:a="http://schemas.openxmlformats.org/drawingml/2006/main">
               <a:ext uri="{FF2B5EF4-FFF2-40B4-BE49-F238E27FC236}">
-                <a16:creationId xmlns:a16="http://schemas.microsoft.com/office/drawing/2014/main" id="{295EB1BD-0F3F-4DB9-BAEB-4C17B628E3B0}"/>
+                <a16:creationId xmlns:a16="http://schemas.microsoft.com/office/drawing/2014/main" id="{B6D2932B-BF98-45B1-8F81-767F50EA75AA}"/>
               </a:ext>
             </a:extLst>
           </p:cNvPr>
@@ -4983,7 +4983,7 @@
     </p:spTree>
     <p:extLst>
       <p:ext uri="{BB962C8B-B14F-4D97-AF65-F5344CB8AC3E}">
-        <p14:creationId xmlns:p14="http://schemas.microsoft.com/office/powerpoint/2010/main" val="1441055730"/>
+        <p14:creationId xmlns:p14="http://schemas.microsoft.com/office/powerpoint/2010/main" val="1519584842"/>
       </p:ext>
     </p:extLst>
   </p:cSld>
@@ -5007,7 +5007,7 @@
           <p:cNvPr id="2" name="TextBox 1">
             <a:extLst xmlns:a="http://schemas.openxmlformats.org/drawingml/2006/main">
               <a:ext uri="{FF2B5EF4-FFF2-40B4-BE49-F238E27FC236}">
-                <a16:creationId xmlns:a16="http://schemas.microsoft.com/office/drawing/2014/main" id="{59937333-AF30-4031-98AE-00AC0C250D52}"/>
+                <a16:creationId xmlns:a16="http://schemas.microsoft.com/office/drawing/2014/main" id="{610D888B-FEA5-4315-ADCD-4C45A4F9C101}"/>
               </a:ext>
             </a:extLst>
           </p:cNvPr>
@@ -5054,7 +5054,7 @@
           <p:cNvPr id="3" name="TextBox 2">
             <a:extLst xmlns:a="http://schemas.openxmlformats.org/drawingml/2006/main">
               <a:ext uri="{FF2B5EF4-FFF2-40B4-BE49-F238E27FC236}">
-                <a16:creationId xmlns:a16="http://schemas.microsoft.com/office/drawing/2014/main" id="{15E156F2-C826-4D12-8B60-6432B65DA4C2}"/>
+                <a16:creationId xmlns:a16="http://schemas.microsoft.com/office/drawing/2014/main" id="{066F4CD3-E4D2-4A1D-9EF9-6F7871E9BD64}"/>
               </a:ext>
             </a:extLst>
           </p:cNvPr>
@@ -5101,7 +5101,7 @@
           <p:cNvPr id="4" name="Rectangle 3">
             <a:extLst xmlns:a="http://schemas.openxmlformats.org/drawingml/2006/main">
               <a:ext uri="{FF2B5EF4-FFF2-40B4-BE49-F238E27FC236}">
-                <a16:creationId xmlns:a16="http://schemas.microsoft.com/office/drawing/2014/main" id="{810141DF-2A21-4F68-B7C1-E417C35EFAA1}"/>
+                <a16:creationId xmlns:a16="http://schemas.microsoft.com/office/drawing/2014/main" id="{635A8BD6-698C-4991-984A-27EFEFFF294C}"/>
               </a:ext>
             </a:extLst>
           </p:cNvPr>
@@ -5156,7 +5156,7 @@
           <p:cNvPr id="5" name="Rectangle 4">
             <a:extLst xmlns:a="http://schemas.openxmlformats.org/drawingml/2006/main">
               <a:ext uri="{FF2B5EF4-FFF2-40B4-BE49-F238E27FC236}">
-                <a16:creationId xmlns:a16="http://schemas.microsoft.com/office/drawing/2014/main" id="{525A52AC-05C9-425F-89B2-1A8AA29290D5}"/>
+                <a16:creationId xmlns:a16="http://schemas.microsoft.com/office/drawing/2014/main" id="{1C973341-05EA-42EF-8AE7-EC3B5852E113}"/>
               </a:ext>
             </a:extLst>
           </p:cNvPr>
@@ -5211,7 +5211,7 @@
           <p:cNvPr id="6" name="TextBox 5">
             <a:extLst xmlns:a="http://schemas.openxmlformats.org/drawingml/2006/main">
               <a:ext uri="{FF2B5EF4-FFF2-40B4-BE49-F238E27FC236}">
-                <a16:creationId xmlns:a16="http://schemas.microsoft.com/office/drawing/2014/main" id="{3FFAB2B2-4ECA-4C93-964F-F301469EED29}"/>
+                <a16:creationId xmlns:a16="http://schemas.microsoft.com/office/drawing/2014/main" id="{2CC275CD-1E69-418E-A74B-CF39C19E07C8}"/>
               </a:ext>
             </a:extLst>
           </p:cNvPr>
@@ -5248,7 +5248,7 @@
                 <a:ea typeface="Aptos"/>
                 <a:cs typeface="Aptos"/>
               </a:rPr>
-              <a:t>Independent public evidence summary · 2026.07.23-16 · 2026-07-22 · Sources: EPO; Germany — official judgments; WIPO</a:t>
+              <a:t>Independent public evidence summary · 2026.07.24-17 · 2026-07-24 · Sources: EPO; Germany — official judgments; WIPO</a:t>
             </a:r>
           </a:p>
         </p:txBody>
@@ -5258,7 +5258,7 @@
           <p:cNvPr id="7" name="TextBox 6">
             <a:extLst xmlns:a="http://schemas.openxmlformats.org/drawingml/2006/main">
               <a:ext uri="{FF2B5EF4-FFF2-40B4-BE49-F238E27FC236}">
-                <a16:creationId xmlns:a16="http://schemas.microsoft.com/office/drawing/2014/main" id="{A3FE10D3-5421-497B-B2AD-469E7AD1E16E}"/>
+                <a16:creationId xmlns:a16="http://schemas.microsoft.com/office/drawing/2014/main" id="{833F9828-A5C8-45C0-B005-8E9296A2D8C3}"/>
               </a:ext>
             </a:extLst>
           </p:cNvPr>
@@ -5305,7 +5305,7 @@
           <p:cNvPr id="8" name="TextBox 7">
             <a:extLst xmlns:a="http://schemas.openxmlformats.org/drawingml/2006/main">
               <a:ext uri="{FF2B5EF4-FFF2-40B4-BE49-F238E27FC236}">
-                <a16:creationId xmlns:a16="http://schemas.microsoft.com/office/drawing/2014/main" id="{DB994602-739E-4209-BDB7-A32914A1B96F}"/>
+                <a16:creationId xmlns:a16="http://schemas.microsoft.com/office/drawing/2014/main" id="{B6FC2919-29EC-4B50-B29C-AAA425900771}"/>
               </a:ext>
             </a:extLst>
           </p:cNvPr>
@@ -5352,7 +5352,7 @@
           <p:cNvPr id="9" name="TextBox 8">
             <a:extLst xmlns:a="http://schemas.openxmlformats.org/drawingml/2006/main">
               <a:ext uri="{FF2B5EF4-FFF2-40B4-BE49-F238E27FC236}">
-                <a16:creationId xmlns:a16="http://schemas.microsoft.com/office/drawing/2014/main" id="{5718091C-5C27-402A-8FC4-DDE5FCD46DD5}"/>
+                <a16:creationId xmlns:a16="http://schemas.microsoft.com/office/drawing/2014/main" id="{BA440A39-1EF7-4712-8F65-873B71BE9C17}"/>
               </a:ext>
             </a:extLst>
           </p:cNvPr>
@@ -5449,7 +5449,7 @@
           <p:cNvPr id="10" name="Rounded Rectangle 9">
             <a:extLst xmlns:a="http://schemas.openxmlformats.org/drawingml/2006/main">
               <a:ext uri="{FF2B5EF4-FFF2-40B4-BE49-F238E27FC236}">
-                <a16:creationId xmlns:a16="http://schemas.microsoft.com/office/drawing/2014/main" id="{924D690E-9CD0-4ADF-B9EB-9CBF36336864}"/>
+                <a16:creationId xmlns:a16="http://schemas.microsoft.com/office/drawing/2014/main" id="{B36A5033-F49D-4DA2-B5C4-04AF5EBD394C}"/>
               </a:ext>
             </a:extLst>
           </p:cNvPr>
@@ -5506,7 +5506,7 @@
           <p:cNvPr id="11" name="TextBox 10">
             <a:extLst xmlns:a="http://schemas.openxmlformats.org/drawingml/2006/main">
               <a:ext uri="{FF2B5EF4-FFF2-40B4-BE49-F238E27FC236}">
-                <a16:creationId xmlns:a16="http://schemas.microsoft.com/office/drawing/2014/main" id="{A292649C-C253-4284-927A-D5617CBAB3A5}"/>
+                <a16:creationId xmlns:a16="http://schemas.microsoft.com/office/drawing/2014/main" id="{8C564ABE-DC7B-4FE6-9E7A-9A80AAF22672}"/>
               </a:ext>
             </a:extLst>
           </p:cNvPr>
@@ -5553,7 +5553,7 @@
           <p:cNvPr id="12" name="TextBox 11">
             <a:extLst xmlns:a="http://schemas.openxmlformats.org/drawingml/2006/main">
               <a:ext uri="{FF2B5EF4-FFF2-40B4-BE49-F238E27FC236}">
-                <a16:creationId xmlns:a16="http://schemas.microsoft.com/office/drawing/2014/main" id="{54CDEF65-C20E-4DF7-A949-DA192E1E51FD}"/>
+                <a16:creationId xmlns:a16="http://schemas.microsoft.com/office/drawing/2014/main" id="{8EEDED32-E968-4261-A025-202BA8FECE66}"/>
               </a:ext>
             </a:extLst>
           </p:cNvPr>
@@ -5598,7 +5598,7 @@
     </p:spTree>
     <p:extLst>
       <p:ext uri="{BB962C8B-B14F-4D97-AF65-F5344CB8AC3E}">
-        <p14:creationId xmlns:p14="http://schemas.microsoft.com/office/powerpoint/2010/main" val="1574931909"/>
+        <p14:creationId xmlns:p14="http://schemas.microsoft.com/office/powerpoint/2010/main" val="1071827013"/>
       </p:ext>
     </p:extLst>
   </p:cSld>
@@ -5622,7 +5622,7 @@
           <p:cNvPr id="2" name="TextBox 1">
             <a:extLst xmlns:a="http://schemas.openxmlformats.org/drawingml/2006/main">
               <a:ext uri="{FF2B5EF4-FFF2-40B4-BE49-F238E27FC236}">
-                <a16:creationId xmlns:a16="http://schemas.microsoft.com/office/drawing/2014/main" id="{F2B88859-14FE-4B77-8286-9F2102E2BED7}"/>
+                <a16:creationId xmlns:a16="http://schemas.microsoft.com/office/drawing/2014/main" id="{A477D62E-D7F5-4B55-A3EE-3C35DC9AAF49}"/>
               </a:ext>
             </a:extLst>
           </p:cNvPr>
@@ -5669,7 +5669,7 @@
           <p:cNvPr id="3" name="TextBox 2">
             <a:extLst xmlns:a="http://schemas.openxmlformats.org/drawingml/2006/main">
               <a:ext uri="{FF2B5EF4-FFF2-40B4-BE49-F238E27FC236}">
-                <a16:creationId xmlns:a16="http://schemas.microsoft.com/office/drawing/2014/main" id="{D82EE995-BA1A-4E45-9FCD-7F66AD906B10}"/>
+                <a16:creationId xmlns:a16="http://schemas.microsoft.com/office/drawing/2014/main" id="{65049508-0798-406E-8A8E-E15EEE60CBA1}"/>
               </a:ext>
             </a:extLst>
           </p:cNvPr>
@@ -5716,7 +5716,7 @@
           <p:cNvPr id="4" name="Rectangle 3">
             <a:extLst xmlns:a="http://schemas.openxmlformats.org/drawingml/2006/main">
               <a:ext uri="{FF2B5EF4-FFF2-40B4-BE49-F238E27FC236}">
-                <a16:creationId xmlns:a16="http://schemas.microsoft.com/office/drawing/2014/main" id="{3AD39AB3-BB74-4E49-AA3E-AE5B7FBFBB26}"/>
+                <a16:creationId xmlns:a16="http://schemas.microsoft.com/office/drawing/2014/main" id="{1CBA8479-696C-46A4-92A0-573F53E532F1}"/>
               </a:ext>
             </a:extLst>
           </p:cNvPr>
@@ -5771,7 +5771,7 @@
           <p:cNvPr id="5" name="Rectangle 4">
             <a:extLst xmlns:a="http://schemas.openxmlformats.org/drawingml/2006/main">
               <a:ext uri="{FF2B5EF4-FFF2-40B4-BE49-F238E27FC236}">
-                <a16:creationId xmlns:a16="http://schemas.microsoft.com/office/drawing/2014/main" id="{31DEA33C-16AE-46CA-B802-3052A938BBFA}"/>
+                <a16:creationId xmlns:a16="http://schemas.microsoft.com/office/drawing/2014/main" id="{73BE64CA-E449-4720-AF93-63A2FC742C95}"/>
               </a:ext>
             </a:extLst>
           </p:cNvPr>
@@ -5826,7 +5826,7 @@
           <p:cNvPr id="6" name="TextBox 5">
             <a:extLst xmlns:a="http://schemas.openxmlformats.org/drawingml/2006/main">
               <a:ext uri="{FF2B5EF4-FFF2-40B4-BE49-F238E27FC236}">
-                <a16:creationId xmlns:a16="http://schemas.microsoft.com/office/drawing/2014/main" id="{6E014067-0BBD-4B57-B275-8E7EF9ED73DA}"/>
+                <a16:creationId xmlns:a16="http://schemas.microsoft.com/office/drawing/2014/main" id="{D0C20A3A-DD6F-4376-BEC3-29332E83F562}"/>
               </a:ext>
             </a:extLst>
           </p:cNvPr>
@@ -5863,7 +5863,7 @@
                 <a:ea typeface="Aptos"/>
                 <a:cs typeface="Aptos"/>
               </a:rPr>
-              <a:t>Independent public evidence summary · 2026.07.23-16 · 2026-07-22 · Sources: EPO Register; EP3032975B2; 8 Ni 18/24 (EP); 7 O 3341/24</a:t>
+              <a:t>Independent public evidence summary · 2026.07.24-17 · 2026-07-24 · Sources: EPO Register; EP3032975B2; 8 Ni 18/24 (EP); 7 O 3341/24</a:t>
             </a:r>
           </a:p>
         </p:txBody>
@@ -5873,7 +5873,7 @@
           <p:cNvPr id="7" name="TextBox 6">
             <a:extLst xmlns:a="http://schemas.openxmlformats.org/drawingml/2006/main">
               <a:ext uri="{FF2B5EF4-FFF2-40B4-BE49-F238E27FC236}">
-                <a16:creationId xmlns:a16="http://schemas.microsoft.com/office/drawing/2014/main" id="{0E63849D-92F1-4922-B3C0-6536EF2F02F1}"/>
+                <a16:creationId xmlns:a16="http://schemas.microsoft.com/office/drawing/2014/main" id="{87CB3A42-94DB-4EAE-B9CF-9A699DDC213C}"/>
               </a:ext>
             </a:extLst>
           </p:cNvPr>
@@ -5920,7 +5920,7 @@
           <p:cNvPr id="8" name="Rounded Rectangle 7">
             <a:extLst xmlns:a="http://schemas.openxmlformats.org/drawingml/2006/main">
               <a:ext uri="{FF2B5EF4-FFF2-40B4-BE49-F238E27FC236}">
-                <a16:creationId xmlns:a16="http://schemas.microsoft.com/office/drawing/2014/main" id="{E0E05D08-6529-49D1-A1A3-7A89EB1A1B4D}"/>
+                <a16:creationId xmlns:a16="http://schemas.microsoft.com/office/drawing/2014/main" id="{32954D54-D39F-4A78-9306-66AF7ECFE028}"/>
               </a:ext>
             </a:extLst>
           </p:cNvPr>
@@ -5977,7 +5977,7 @@
           <p:cNvPr id="9" name="TextBox 8">
             <a:extLst xmlns:a="http://schemas.openxmlformats.org/drawingml/2006/main">
               <a:ext uri="{FF2B5EF4-FFF2-40B4-BE49-F238E27FC236}">
-                <a16:creationId xmlns:a16="http://schemas.microsoft.com/office/drawing/2014/main" id="{9359521D-0BC5-4EE3-A587-FD68ED2E5F01}"/>
+                <a16:creationId xmlns:a16="http://schemas.microsoft.com/office/drawing/2014/main" id="{D70B291E-CF92-4820-AEBE-EB7BC8FB657F}"/>
               </a:ext>
             </a:extLst>
           </p:cNvPr>
@@ -6024,7 +6024,7 @@
           <p:cNvPr id="10" name="TextBox 9">
             <a:extLst xmlns:a="http://schemas.openxmlformats.org/drawingml/2006/main">
               <a:ext uri="{FF2B5EF4-FFF2-40B4-BE49-F238E27FC236}">
-                <a16:creationId xmlns:a16="http://schemas.microsoft.com/office/drawing/2014/main" id="{EDEE0A46-C774-40C9-8B66-2C3D21DECA07}"/>
+                <a16:creationId xmlns:a16="http://schemas.microsoft.com/office/drawing/2014/main" id="{819CC223-6D57-480C-81AF-DDE81B58AB4F}"/>
               </a:ext>
             </a:extLst>
           </p:cNvPr>
@@ -6071,7 +6071,7 @@
           <p:cNvPr id="11" name="Rounded Rectangle 10">
             <a:extLst xmlns:a="http://schemas.openxmlformats.org/drawingml/2006/main">
               <a:ext uri="{FF2B5EF4-FFF2-40B4-BE49-F238E27FC236}">
-                <a16:creationId xmlns:a16="http://schemas.microsoft.com/office/drawing/2014/main" id="{C9015F74-2FA3-44BC-92D2-EA7E9EDAA6F5}"/>
+                <a16:creationId xmlns:a16="http://schemas.microsoft.com/office/drawing/2014/main" id="{CB21AA11-C7CC-4D55-9954-32F85A5E040F}"/>
               </a:ext>
             </a:extLst>
           </p:cNvPr>
@@ -6128,7 +6128,7 @@
           <p:cNvPr id="12" name="TextBox 11">
             <a:extLst xmlns:a="http://schemas.openxmlformats.org/drawingml/2006/main">
               <a:ext uri="{FF2B5EF4-FFF2-40B4-BE49-F238E27FC236}">
-                <a16:creationId xmlns:a16="http://schemas.microsoft.com/office/drawing/2014/main" id="{007B2437-FB3D-44C8-AFEB-867B47DD74FD}"/>
+                <a16:creationId xmlns:a16="http://schemas.microsoft.com/office/drawing/2014/main" id="{82125E1C-CACE-4373-9232-C040F678A349}"/>
               </a:ext>
             </a:extLst>
           </p:cNvPr>
@@ -6175,7 +6175,7 @@
           <p:cNvPr id="13" name="TextBox 12">
             <a:extLst xmlns:a="http://schemas.openxmlformats.org/drawingml/2006/main">
               <a:ext uri="{FF2B5EF4-FFF2-40B4-BE49-F238E27FC236}">
-                <a16:creationId xmlns:a16="http://schemas.microsoft.com/office/drawing/2014/main" id="{631E36A0-AABE-4127-9298-DA34539730D9}"/>
+                <a16:creationId xmlns:a16="http://schemas.microsoft.com/office/drawing/2014/main" id="{EE61A3CE-DDB7-49F4-9F9F-F49D434E96F4}"/>
               </a:ext>
             </a:extLst>
           </p:cNvPr>
@@ -6222,7 +6222,7 @@
           <p:cNvPr id="14" name="Rounded Rectangle 13">
             <a:extLst xmlns:a="http://schemas.openxmlformats.org/drawingml/2006/main">
               <a:ext uri="{FF2B5EF4-FFF2-40B4-BE49-F238E27FC236}">
-                <a16:creationId xmlns:a16="http://schemas.microsoft.com/office/drawing/2014/main" id="{4C636FEC-66D8-4258-9D02-8C86321BBF2B}"/>
+                <a16:creationId xmlns:a16="http://schemas.microsoft.com/office/drawing/2014/main" id="{AFBA2AA3-8C1B-41AE-BA3C-2158C1E8D49B}"/>
               </a:ext>
             </a:extLst>
           </p:cNvPr>
@@ -6279,7 +6279,7 @@
           <p:cNvPr id="15" name="TextBox 14">
             <a:extLst xmlns:a="http://schemas.openxmlformats.org/drawingml/2006/main">
               <a:ext uri="{FF2B5EF4-FFF2-40B4-BE49-F238E27FC236}">
-                <a16:creationId xmlns:a16="http://schemas.microsoft.com/office/drawing/2014/main" id="{505A9501-FBBE-4A55-8E5F-A85BF2D3F2DA}"/>
+                <a16:creationId xmlns:a16="http://schemas.microsoft.com/office/drawing/2014/main" id="{CE119199-8925-4893-9C8D-68F300E16CFD}"/>
               </a:ext>
             </a:extLst>
           </p:cNvPr>
@@ -6326,7 +6326,7 @@
           <p:cNvPr id="16" name="TextBox 15">
             <a:extLst xmlns:a="http://schemas.openxmlformats.org/drawingml/2006/main">
               <a:ext uri="{FF2B5EF4-FFF2-40B4-BE49-F238E27FC236}">
-                <a16:creationId xmlns:a16="http://schemas.microsoft.com/office/drawing/2014/main" id="{BFA181DD-7A5D-4656-A4EC-4F656868C3C7}"/>
+                <a16:creationId xmlns:a16="http://schemas.microsoft.com/office/drawing/2014/main" id="{7409DEBF-BB6A-4334-8229-0EA062FF9A2C}"/>
               </a:ext>
             </a:extLst>
           </p:cNvPr>
@@ -6373,7 +6373,7 @@
           <p:cNvPr id="17" name="TextBox 16">
             <a:extLst xmlns:a="http://schemas.openxmlformats.org/drawingml/2006/main">
               <a:ext uri="{FF2B5EF4-FFF2-40B4-BE49-F238E27FC236}">
-                <a16:creationId xmlns:a16="http://schemas.microsoft.com/office/drawing/2014/main" id="{120D94B1-46EA-4CF1-AACB-8C8B88C2EFD2}"/>
+                <a16:creationId xmlns:a16="http://schemas.microsoft.com/office/drawing/2014/main" id="{C9BFD6FB-E2BC-46FC-A1E8-DBD5063B2678}"/>
               </a:ext>
             </a:extLst>
           </p:cNvPr>
@@ -6420,7 +6420,7 @@
           <p:cNvPr id="18" name="Rounded Rectangle 17">
             <a:extLst xmlns:a="http://schemas.openxmlformats.org/drawingml/2006/main">
               <a:ext uri="{FF2B5EF4-FFF2-40B4-BE49-F238E27FC236}">
-                <a16:creationId xmlns:a16="http://schemas.microsoft.com/office/drawing/2014/main" id="{258F4757-B246-4989-BAAE-EE246032E4DF}"/>
+                <a16:creationId xmlns:a16="http://schemas.microsoft.com/office/drawing/2014/main" id="{580FFCB0-7E63-454A-8039-5DF3E9DF66EF}"/>
               </a:ext>
             </a:extLst>
           </p:cNvPr>
@@ -6477,7 +6477,7 @@
           <p:cNvPr id="19" name="TextBox 18">
             <a:extLst xmlns:a="http://schemas.openxmlformats.org/drawingml/2006/main">
               <a:ext uri="{FF2B5EF4-FFF2-40B4-BE49-F238E27FC236}">
-                <a16:creationId xmlns:a16="http://schemas.microsoft.com/office/drawing/2014/main" id="{72C086AB-EE3B-4936-89EF-415DDB56C6BA}"/>
+                <a16:creationId xmlns:a16="http://schemas.microsoft.com/office/drawing/2014/main" id="{126390D8-080C-492F-A536-BA75792FA2BD}"/>
               </a:ext>
             </a:extLst>
           </p:cNvPr>
@@ -6524,7 +6524,7 @@
           <p:cNvPr id="20" name="TextBox 19">
             <a:extLst xmlns:a="http://schemas.openxmlformats.org/drawingml/2006/main">
               <a:ext uri="{FF2B5EF4-FFF2-40B4-BE49-F238E27FC236}">
-                <a16:creationId xmlns:a16="http://schemas.microsoft.com/office/drawing/2014/main" id="{0C0E6C4D-16B3-4E97-A616-1FB900F4DAD4}"/>
+                <a16:creationId xmlns:a16="http://schemas.microsoft.com/office/drawing/2014/main" id="{D2B83730-962E-49C5-8A1E-C3625FFDD5D3}"/>
               </a:ext>
             </a:extLst>
           </p:cNvPr>
@@ -6569,7 +6569,7 @@
     </p:spTree>
     <p:extLst>
       <p:ext uri="{BB962C8B-B14F-4D97-AF65-F5344CB8AC3E}">
-        <p14:creationId xmlns:p14="http://schemas.microsoft.com/office/powerpoint/2010/main" val="1363790002"/>
+        <p14:creationId xmlns:p14="http://schemas.microsoft.com/office/powerpoint/2010/main" val="1576364656"/>
       </p:ext>
     </p:extLst>
   </p:cSld>
@@ -6593,7 +6593,7 @@
           <p:cNvPr id="2" name="TextBox 1">
             <a:extLst xmlns:a="http://schemas.openxmlformats.org/drawingml/2006/main">
               <a:ext uri="{FF2B5EF4-FFF2-40B4-BE49-F238E27FC236}">
-                <a16:creationId xmlns:a16="http://schemas.microsoft.com/office/drawing/2014/main" id="{E10CF367-7A4F-4008-9161-405025F86A8E}"/>
+                <a16:creationId xmlns:a16="http://schemas.microsoft.com/office/drawing/2014/main" id="{0DED61B8-201F-4353-A5AB-F4AF107AC3E2}"/>
               </a:ext>
             </a:extLst>
           </p:cNvPr>
@@ -6640,7 +6640,7 @@
           <p:cNvPr id="3" name="TextBox 2">
             <a:extLst xmlns:a="http://schemas.openxmlformats.org/drawingml/2006/main">
               <a:ext uri="{FF2B5EF4-FFF2-40B4-BE49-F238E27FC236}">
-                <a16:creationId xmlns:a16="http://schemas.microsoft.com/office/drawing/2014/main" id="{28037611-BFB7-4F00-BA08-9D68E3F3D533}"/>
+                <a16:creationId xmlns:a16="http://schemas.microsoft.com/office/drawing/2014/main" id="{38512841-DD2B-412F-88B8-AA73E0A1A1A3}"/>
               </a:ext>
             </a:extLst>
           </p:cNvPr>
@@ -6687,7 +6687,7 @@
           <p:cNvPr id="4" name="Rectangle 3">
             <a:extLst xmlns:a="http://schemas.openxmlformats.org/drawingml/2006/main">
               <a:ext uri="{FF2B5EF4-FFF2-40B4-BE49-F238E27FC236}">
-                <a16:creationId xmlns:a16="http://schemas.microsoft.com/office/drawing/2014/main" id="{95EE173C-A30B-4CCE-86A8-F177B889668D}"/>
+                <a16:creationId xmlns:a16="http://schemas.microsoft.com/office/drawing/2014/main" id="{31CAFE5B-4168-4142-8139-C401AB24A811}"/>
               </a:ext>
             </a:extLst>
           </p:cNvPr>
@@ -6742,7 +6742,7 @@
           <p:cNvPr id="5" name="Rectangle 4">
             <a:extLst xmlns:a="http://schemas.openxmlformats.org/drawingml/2006/main">
               <a:ext uri="{FF2B5EF4-FFF2-40B4-BE49-F238E27FC236}">
-                <a16:creationId xmlns:a16="http://schemas.microsoft.com/office/drawing/2014/main" id="{111681E5-C7CF-4A04-A241-CF1A907E0429}"/>
+                <a16:creationId xmlns:a16="http://schemas.microsoft.com/office/drawing/2014/main" id="{9E9343CA-AFA0-4082-9292-8B7461BD9D1F}"/>
               </a:ext>
             </a:extLst>
           </p:cNvPr>
@@ -6797,7 +6797,7 @@
           <p:cNvPr id="6" name="TextBox 5">
             <a:extLst xmlns:a="http://schemas.openxmlformats.org/drawingml/2006/main">
               <a:ext uri="{FF2B5EF4-FFF2-40B4-BE49-F238E27FC236}">
-                <a16:creationId xmlns:a16="http://schemas.microsoft.com/office/drawing/2014/main" id="{953021AA-3061-4A52-BC79-64AE90A040E5}"/>
+                <a16:creationId xmlns:a16="http://schemas.microsoft.com/office/drawing/2014/main" id="{AC07FF05-94C4-4F9C-B649-BC219E593429}"/>
               </a:ext>
             </a:extLst>
           </p:cNvPr>
@@ -6834,7 +6834,7 @@
                 <a:ea typeface="Aptos"/>
                 <a:cs typeface="Aptos"/>
               </a:rPr>
-              <a:t>Independent public evidence summary · 2026.07.23-16 · 2026-07-22 · Sources: Health Canada; Destatis; Vero; Sejm; Swedish Government</a:t>
+              <a:t>Independent public evidence summary · 2026.07.24-17 · 2026-07-24 · Sources: Health Canada; New Zealand Ministry of Health; Destatis; Vero; Sejm; Swedish Government; European Commission; IMARC; GVR; Fortune</a:t>
             </a:r>
           </a:p>
         </p:txBody>
@@ -6844,7 +6844,7 @@
           <p:cNvPr id="7" name="TextBox 6">
             <a:extLst xmlns:a="http://schemas.openxmlformats.org/drawingml/2006/main">
               <a:ext uri="{FF2B5EF4-FFF2-40B4-BE49-F238E27FC236}">
-                <a16:creationId xmlns:a16="http://schemas.microsoft.com/office/drawing/2014/main" id="{8ED301AA-A94E-41B7-B315-125E37632D35}"/>
+                <a16:creationId xmlns:a16="http://schemas.microsoft.com/office/drawing/2014/main" id="{D2B48460-8827-4FEB-9529-AA583B7E11BE}"/>
               </a:ext>
             </a:extLst>
           </p:cNvPr>
@@ -6891,7 +6891,7 @@
           <p:cNvPr id="8" name="Rounded Rectangle 7">
             <a:extLst xmlns:a="http://schemas.openxmlformats.org/drawingml/2006/main">
               <a:ext uri="{FF2B5EF4-FFF2-40B4-BE49-F238E27FC236}">
-                <a16:creationId xmlns:a16="http://schemas.microsoft.com/office/drawing/2014/main" id="{CEA0269A-956B-4722-B4F8-10C46C65BA5B}"/>
+                <a16:creationId xmlns:a16="http://schemas.microsoft.com/office/drawing/2014/main" id="{108CEC53-BB21-4B13-B535-B593A5FFE530}"/>
               </a:ext>
             </a:extLst>
           </p:cNvPr>
@@ -6948,7 +6948,7 @@
           <p:cNvPr id="9" name="TextBox 8">
             <a:extLst xmlns:a="http://schemas.openxmlformats.org/drawingml/2006/main">
               <a:ext uri="{FF2B5EF4-FFF2-40B4-BE49-F238E27FC236}">
-                <a16:creationId xmlns:a16="http://schemas.microsoft.com/office/drawing/2014/main" id="{DB55DEBA-5481-4EA9-875B-84FD15F2A4F5}"/>
+                <a16:creationId xmlns:a16="http://schemas.microsoft.com/office/drawing/2014/main" id="{8092AC2A-CFAC-4358-A39F-4F04FC487EC5}"/>
               </a:ext>
             </a:extLst>
           </p:cNvPr>
@@ -6985,7 +6985,7 @@
                 <a:ea typeface="Aptos"/>
                 <a:cs typeface="Aptos"/>
               </a:rPr>
-              <a:t>195</a:t>
+              <a:t>20</a:t>
             </a:r>
           </a:p>
         </p:txBody>
@@ -6995,7 +6995,7 @@
           <p:cNvPr id="10" name="TextBox 9">
             <a:extLst xmlns:a="http://schemas.openxmlformats.org/drawingml/2006/main">
               <a:ext uri="{FF2B5EF4-FFF2-40B4-BE49-F238E27FC236}">
-                <a16:creationId xmlns:a16="http://schemas.microsoft.com/office/drawing/2014/main" id="{157F0464-12EA-4958-96F6-D3899E828738}"/>
+                <a16:creationId xmlns:a16="http://schemas.microsoft.com/office/drawing/2014/main" id="{6DDF9361-69BB-4E55-A911-6A6DDFB0F9F1}"/>
               </a:ext>
             </a:extLst>
           </p:cNvPr>
@@ -7007,7 +7007,7 @@
         <p:spPr>
           <a:xfrm xmlns:a="http://schemas.openxmlformats.org/drawingml/2006/main">
             <a:off x="694944" y="2468879"/>
-            <a:ext cx="3203448" cy="438912"/>
+            <a:ext cx="3203448" cy="499872"/>
           </a:xfrm>
           <a:prstGeom xmlns:a="http://schemas.openxmlformats.org/drawingml/2006/main" prst="rect">
             <a:avLst/>
@@ -7032,7 +7032,7 @@
                 <a:ea typeface="Aptos"/>
                 <a:cs typeface="Aptos"/>
               </a:rPr>
-              <a:t>countries in the research universe</a:t>
+              <a:t>official annual observations from 6 countries</a:t>
             </a:r>
           </a:p>
         </p:txBody>
@@ -7042,7 +7042,7 @@
           <p:cNvPr id="11" name="Rounded Rectangle 10">
             <a:extLst xmlns:a="http://schemas.openxmlformats.org/drawingml/2006/main">
               <a:ext uri="{FF2B5EF4-FFF2-40B4-BE49-F238E27FC236}">
-                <a16:creationId xmlns:a16="http://schemas.microsoft.com/office/drawing/2014/main" id="{CCE11A5D-4B97-47A5-9D30-CC4D7C726AC4}"/>
+                <a16:creationId xmlns:a16="http://schemas.microsoft.com/office/drawing/2014/main" id="{38B3372A-42EC-4FD9-8E8A-704D06765849}"/>
               </a:ext>
             </a:extLst>
           </p:cNvPr>
@@ -7099,7 +7099,7 @@
           <p:cNvPr id="12" name="TextBox 11">
             <a:extLst xmlns:a="http://schemas.openxmlformats.org/drawingml/2006/main">
               <a:ext uri="{FF2B5EF4-FFF2-40B4-BE49-F238E27FC236}">
-                <a16:creationId xmlns:a16="http://schemas.microsoft.com/office/drawing/2014/main" id="{8BD530D1-AB4A-4D85-9E23-E2961494A20A}"/>
+                <a16:creationId xmlns:a16="http://schemas.microsoft.com/office/drawing/2014/main" id="{D551213E-63D1-413B-8C70-88BE3BE0EBDC}"/>
               </a:ext>
             </a:extLst>
           </p:cNvPr>
@@ -7128,7 +7128,7 @@
               <a:buNone/>
             </a:pPr>
             <a:r>
-              <a:rPr sz="2700" b="1">
+              <a:rPr sz="2250" b="1">
                 <a:solidFill>
                   <a:srgbClr val="0D5F86"/>
                 </a:solidFill>
@@ -7136,7 +7136,7 @@
                 <a:ea typeface="Aptos"/>
                 <a:cs typeface="Aptos"/>
               </a:rPr>
-              <a:t>5</a:t>
+              <a:t>NZD 280.685m</a:t>
             </a:r>
           </a:p>
         </p:txBody>
@@ -7146,7 +7146,7 @@
           <p:cNvPr id="13" name="TextBox 12">
             <a:extLst xmlns:a="http://schemas.openxmlformats.org/drawingml/2006/main">
               <a:ext uri="{FF2B5EF4-FFF2-40B4-BE49-F238E27FC236}">
-                <a16:creationId xmlns:a16="http://schemas.microsoft.com/office/drawing/2014/main" id="{F7D4E543-75EA-4C93-ABAF-957FB695FC79}"/>
+                <a16:creationId xmlns:a16="http://schemas.microsoft.com/office/drawing/2014/main" id="{B21602CA-28F6-4D1D-8848-4C7F9EDEF6CF}"/>
               </a:ext>
             </a:extLst>
           </p:cNvPr>
@@ -7183,7 +7183,7 @@
                 <a:ea typeface="Aptos"/>
                 <a:cs typeface="Aptos"/>
               </a:rPr>
-              <a:t>countries with official annual observations</a:t>
+              <a:t>New Zealand 2024: raw sum from 29 files</a:t>
             </a:r>
           </a:p>
         </p:txBody>
@@ -7193,7 +7193,7 @@
           <p:cNvPr id="14" name="Rounded Rectangle 13">
             <a:extLst xmlns:a="http://schemas.openxmlformats.org/drawingml/2006/main">
               <a:ext uri="{FF2B5EF4-FFF2-40B4-BE49-F238E27FC236}">
-                <a16:creationId xmlns:a16="http://schemas.microsoft.com/office/drawing/2014/main" id="{3B49B947-5D8C-46DF-AB76-B9D736C9B10A}"/>
+                <a16:creationId xmlns:a16="http://schemas.microsoft.com/office/drawing/2014/main" id="{5BA29147-8D18-42E0-A0FD-1FFD25345CFE}"/>
               </a:ext>
             </a:extLst>
           </p:cNvPr>
@@ -7250,7 +7250,7 @@
           <p:cNvPr id="15" name="TextBox 14">
             <a:extLst xmlns:a="http://schemas.openxmlformats.org/drawingml/2006/main">
               <a:ext uri="{FF2B5EF4-FFF2-40B4-BE49-F238E27FC236}">
-                <a16:creationId xmlns:a16="http://schemas.microsoft.com/office/drawing/2014/main" id="{AB5CFC06-8C2B-4FF1-B803-C125A04C792D}"/>
+                <a16:creationId xmlns:a16="http://schemas.microsoft.com/office/drawing/2014/main" id="{FBE35305-4D29-4311-B3C2-C143AB692C16}"/>
               </a:ext>
             </a:extLst>
           </p:cNvPr>
@@ -7287,7 +7287,7 @@
                 <a:ea typeface="Aptos"/>
                 <a:cs typeface="Aptos"/>
               </a:rPr>
-              <a:t>0</a:t>
+              <a:t>EUR 4.99bn</a:t>
             </a:r>
           </a:p>
         </p:txBody>
@@ -7297,7 +7297,7 @@
           <p:cNvPr id="16" name="TextBox 15">
             <a:extLst xmlns:a="http://schemas.openxmlformats.org/drawingml/2006/main">
               <a:ext uri="{FF2B5EF4-FFF2-40B4-BE49-F238E27FC236}">
-                <a16:creationId xmlns:a16="http://schemas.microsoft.com/office/drawing/2014/main" id="{E59BF4FB-4587-4172-9261-6AC5CB8A9E95}"/>
+                <a16:creationId xmlns:a16="http://schemas.microsoft.com/office/drawing/2014/main" id="{52B619F3-C991-4BF6-AA75-20B7DE7509CB}"/>
               </a:ext>
             </a:extLst>
           </p:cNvPr>
@@ -7309,7 +7309,7 @@
         <p:spPr>
           <a:xfrm xmlns:a="http://schemas.openxmlformats.org/drawingml/2006/main">
             <a:off x="8272272" y="2468879"/>
-            <a:ext cx="3203448" cy="438912"/>
+            <a:ext cx="3203448" cy="499872"/>
           </a:xfrm>
           <a:prstGeom xmlns:a="http://schemas.openxmlformats.org/drawingml/2006/main" prst="rect">
             <a:avLst/>
@@ -7334,7 +7334,7 @@
                 <a:ea typeface="Aptos"/>
                 <a:cs typeface="Aptos"/>
               </a:rPr>
-              <a:t>accepted retail-value donors</a:t>
+              <a:t>EU 2023: Commission-published benchmark</a:t>
             </a:r>
           </a:p>
         </p:txBody>
@@ -7344,7 +7344,7 @@
           <p:cNvPr id="17" name="TextBox 16">
             <a:extLst xmlns:a="http://schemas.openxmlformats.org/drawingml/2006/main">
               <a:ext uri="{FF2B5EF4-FFF2-40B4-BE49-F238E27FC236}">
-                <a16:creationId xmlns:a16="http://schemas.microsoft.com/office/drawing/2014/main" id="{7C858AD9-9CB0-4F6B-A2E0-C83370539EB7}"/>
+                <a16:creationId xmlns:a16="http://schemas.microsoft.com/office/drawing/2014/main" id="{B82B9F0E-22D0-4F4F-9AB8-17CB912C0A0F}"/>
               </a:ext>
             </a:extLst>
           </p:cNvPr>
@@ -7381,7 +7381,7 @@
                 <a:ea typeface="Aptos"/>
                 <a:cs typeface="Aptos"/>
               </a:rPr>
-              <a:t>The commercial USD 26.0–46.32bn range is a reasonableness check — not Atlas's own global estimate.</a:t>
+              <a:t>4/4 candidates failed the D1–D10 protocol; the accepted-donor gate is 0/3.</a:t>
             </a:r>
           </a:p>
         </p:txBody>
@@ -7391,7 +7391,7 @@
           <p:cNvPr id="18" name="Rounded Rectangle 17">
             <a:extLst xmlns:a="http://schemas.openxmlformats.org/drawingml/2006/main">
               <a:ext uri="{FF2B5EF4-FFF2-40B4-BE49-F238E27FC236}">
-                <a16:creationId xmlns:a16="http://schemas.microsoft.com/office/drawing/2014/main" id="{E2D9A3E4-65B4-42E0-ACB2-CD1B3ADEDFFB}"/>
+                <a16:creationId xmlns:a16="http://schemas.microsoft.com/office/drawing/2014/main" id="{15FE525A-4505-4A12-826C-30163EC1CF0F}"/>
               </a:ext>
             </a:extLst>
           </p:cNvPr>
@@ -7448,7 +7448,7 @@
           <p:cNvPr id="19" name="TextBox 18">
             <a:extLst xmlns:a="http://schemas.openxmlformats.org/drawingml/2006/main">
               <a:ext uri="{FF2B5EF4-FFF2-40B4-BE49-F238E27FC236}">
-                <a16:creationId xmlns:a16="http://schemas.microsoft.com/office/drawing/2014/main" id="{E6D1BBC9-A07F-445A-8FEE-A057885AF801}"/>
+                <a16:creationId xmlns:a16="http://schemas.microsoft.com/office/drawing/2014/main" id="{9484482F-06B7-4271-915E-69C61B4811FA}"/>
               </a:ext>
             </a:extLst>
           </p:cNvPr>
@@ -7495,7 +7495,7 @@
           <p:cNvPr id="20" name="TextBox 19">
             <a:extLst xmlns:a="http://schemas.openxmlformats.org/drawingml/2006/main">
               <a:ext uri="{FF2B5EF4-FFF2-40B4-BE49-F238E27FC236}">
-                <a16:creationId xmlns:a16="http://schemas.microsoft.com/office/drawing/2014/main" id="{0B27738B-9A23-4FE3-8F6B-6966C60F4624}"/>
+                <a16:creationId xmlns:a16="http://schemas.microsoft.com/office/drawing/2014/main" id="{30ACDACF-432C-431B-8A91-0BA7D9306E3C}"/>
               </a:ext>
             </a:extLst>
           </p:cNvPr>
@@ -7507,7 +7507,7 @@
         <p:spPr>
           <a:xfrm xmlns:a="http://schemas.openxmlformats.org/drawingml/2006/main">
             <a:off x="731520" y="5038344"/>
-            <a:ext cx="10597896" cy="530352"/>
+            <a:ext cx="10597896" cy="987552"/>
           </a:xfrm>
           <a:prstGeom xmlns:a="http://schemas.openxmlformats.org/drawingml/2006/main" prst="rect">
             <a:avLst/>
@@ -7532,7 +7532,7 @@
                 <a:ea typeface="Aptos"/>
                 <a:cs typeface="Aptos"/>
               </a:rPr>
-              <a:t>Canada: CAD 1.16bn shipment value. Germany: 1.518m litres of taxed liquid in 2025 (provisional). The metrics are not summed.</a:t>
+              <a:t>New Zealand's raw sum reconciles to the official ≥NZD 280m headline. The NZD 264.561m sensitivity from removing exact repeated rows is not a corrected estimate; the identified-vaping raw sum is NZD 274.18m. The EU figure is a supported benchmark based on commercial Euromonitor 2025 data; Cyprus, Luxembourg and Malta are missing. The commercial USD 26.0–46.32bn range is only a reasonableness check; the measures are not summed.</a:t>
             </a:r>
           </a:p>
         </p:txBody>
@@ -7540,7 +7540,7 @@
     </p:spTree>
     <p:extLst>
       <p:ext uri="{BB962C8B-B14F-4D97-AF65-F5344CB8AC3E}">
-        <p14:creationId xmlns:p14="http://schemas.microsoft.com/office/powerpoint/2010/main" val="441791533"/>
+        <p14:creationId xmlns:p14="http://schemas.microsoft.com/office/powerpoint/2010/main" val="1768900374"/>
       </p:ext>
     </p:extLst>
   </p:cSld>
@@ -7564,7 +7564,7 @@
           <p:cNvPr id="2" name="TextBox 1">
             <a:extLst xmlns:a="http://schemas.openxmlformats.org/drawingml/2006/main">
               <a:ext uri="{FF2B5EF4-FFF2-40B4-BE49-F238E27FC236}">
-                <a16:creationId xmlns:a16="http://schemas.microsoft.com/office/drawing/2014/main" id="{C32D2A0D-6AF1-43E5-B81F-3C1F531E22B1}"/>
+                <a16:creationId xmlns:a16="http://schemas.microsoft.com/office/drawing/2014/main" id="{0B4C6306-1B63-4BF2-AD60-8C16D7A50BA5}"/>
               </a:ext>
             </a:extLst>
           </p:cNvPr>
@@ -7611,7 +7611,7 @@
           <p:cNvPr id="3" name="TextBox 2">
             <a:extLst xmlns:a="http://schemas.openxmlformats.org/drawingml/2006/main">
               <a:ext uri="{FF2B5EF4-FFF2-40B4-BE49-F238E27FC236}">
-                <a16:creationId xmlns:a16="http://schemas.microsoft.com/office/drawing/2014/main" id="{332F9556-87A1-418A-9148-76A7AC473692}"/>
+                <a16:creationId xmlns:a16="http://schemas.microsoft.com/office/drawing/2014/main" id="{8A3C954C-8852-441D-B464-1C4251CAA685}"/>
               </a:ext>
             </a:extLst>
           </p:cNvPr>
@@ -7623,7 +7623,7 @@
         <p:spPr>
           <a:xfrm xmlns:a="http://schemas.openxmlformats.org/drawingml/2006/main">
             <a:off x="502920" y="621792"/>
-            <a:ext cx="11109960" cy="1109472"/>
+            <a:ext cx="11109960" cy="804672"/>
           </a:xfrm>
           <a:prstGeom xmlns:a="http://schemas.openxmlformats.org/drawingml/2006/main" prst="rect">
             <a:avLst/>
@@ -7658,7 +7658,7 @@
           <p:cNvPr id="4" name="Rectangle 3">
             <a:extLst xmlns:a="http://schemas.openxmlformats.org/drawingml/2006/main">
               <a:ext uri="{FF2B5EF4-FFF2-40B4-BE49-F238E27FC236}">
-                <a16:creationId xmlns:a16="http://schemas.microsoft.com/office/drawing/2014/main" id="{F2412D0E-50B0-410D-9841-4F0295DB5E11}"/>
+                <a16:creationId xmlns:a16="http://schemas.microsoft.com/office/drawing/2014/main" id="{E311CE50-4ADB-41DA-B47B-7CA16D44FF90}"/>
               </a:ext>
             </a:extLst>
           </p:cNvPr>
@@ -7669,7 +7669,7 @@
         </p:nvSpPr>
         <p:spPr>
           <a:xfrm xmlns:a="http://schemas.openxmlformats.org/drawingml/2006/main">
-            <a:off x="502920" y="1225296"/>
+            <a:off x="502920" y="1554480"/>
             <a:ext cx="960120" cy="50292"/>
           </a:xfrm>
           <a:prstGeom xmlns:a="http://schemas.openxmlformats.org/drawingml/2006/main" prst="rect">
@@ -7713,7 +7713,7 @@
           <p:cNvPr id="5" name="Rectangle 4">
             <a:extLst xmlns:a="http://schemas.openxmlformats.org/drawingml/2006/main">
               <a:ext uri="{FF2B5EF4-FFF2-40B4-BE49-F238E27FC236}">
-                <a16:creationId xmlns:a16="http://schemas.microsoft.com/office/drawing/2014/main" id="{2F1706F6-08AC-4C2E-97C6-56EC03227469}"/>
+                <a16:creationId xmlns:a16="http://schemas.microsoft.com/office/drawing/2014/main" id="{45821E28-9977-4B94-AE0B-8B3024C5C57D}"/>
               </a:ext>
             </a:extLst>
           </p:cNvPr>
@@ -7768,7 +7768,7 @@
           <p:cNvPr id="6" name="TextBox 5">
             <a:extLst xmlns:a="http://schemas.openxmlformats.org/drawingml/2006/main">
               <a:ext uri="{FF2B5EF4-FFF2-40B4-BE49-F238E27FC236}">
-                <a16:creationId xmlns:a16="http://schemas.microsoft.com/office/drawing/2014/main" id="{FA3AFC0A-4B46-4B51-916B-1DD04B3BAFA6}"/>
+                <a16:creationId xmlns:a16="http://schemas.microsoft.com/office/drawing/2014/main" id="{D15BE68B-5BDE-4419-B27F-B27C2E13BF62}"/>
               </a:ext>
             </a:extLst>
           </p:cNvPr>
@@ -7805,7 +7805,7 @@
                 <a:ea typeface="Aptos"/>
                 <a:cs typeface="Aptos"/>
               </a:rPr>
-              <a:t>Independent public evidence summary · 2026.07.23-16 · 2026-07-22 · Sources: Evidence Register; WIPO IP valuation</a:t>
+              <a:t>Independent public evidence summary · 2026.07.24-17 · 2026-07-24 · Sources: Evidence Register; WIPO IP valuation</a:t>
             </a:r>
           </a:p>
         </p:txBody>
@@ -7815,7 +7815,7 @@
           <p:cNvPr id="7" name="TextBox 6">
             <a:extLst xmlns:a="http://schemas.openxmlformats.org/drawingml/2006/main">
               <a:ext uri="{FF2B5EF4-FFF2-40B4-BE49-F238E27FC236}">
-                <a16:creationId xmlns:a16="http://schemas.microsoft.com/office/drawing/2014/main" id="{C9ED66B0-245D-4C9B-BFB2-52A2B6AF5BD4}"/>
+                <a16:creationId xmlns:a16="http://schemas.microsoft.com/office/drawing/2014/main" id="{CD667956-F33B-4F7B-B6D2-FB94B7764289}"/>
               </a:ext>
             </a:extLst>
           </p:cNvPr>
@@ -7864,8 +7864,8 @@
           <p:nvPr/>
         </p:nvGraphicFramePr>
         <p:xfrm>
-          <a:off xmlns:a="http://schemas.openxmlformats.org/drawingml/2006/main" x="530352" y="1536192"/>
-          <a:ext xmlns:a="http://schemas.openxmlformats.org/drawingml/2006/main" cx="11109958" cy="3977636"/>
+          <a:off xmlns:a="http://schemas.openxmlformats.org/drawingml/2006/main" x="530352" y="1719072"/>
+          <a:ext xmlns:a="http://schemas.openxmlformats.org/drawingml/2006/main" cx="11109958" cy="3794760"/>
         </p:xfrm>
         <a:graphic xmlns:a="http://schemas.openxmlformats.org/drawingml/2006/main">
           <a:graphicData uri="http://schemas.openxmlformats.org/drawingml/2006/table">
@@ -7961,7 +7961,7 @@
                   </a:tcPr>
                 </a:tc>
               </a:tr>
-              <a:tr h="884681">
+              <a:tr h="838962">
                 <a:tc>
                   <a:txBody>
                     <a:bodyPr/>
@@ -8044,7 +8044,7 @@
                   </a:tcPr>
                 </a:tc>
               </a:tr>
-              <a:tr h="884681">
+              <a:tr h="838962">
                 <a:tc>
                   <a:txBody>
                     <a:bodyPr/>
@@ -8127,7 +8127,7 @@
                   </a:tcPr>
                 </a:tc>
               </a:tr>
-              <a:tr h="884681">
+              <a:tr h="838962">
                 <a:tc>
                   <a:txBody>
                     <a:bodyPr/>
@@ -8210,7 +8210,7 @@
                   </a:tcPr>
                 </a:tc>
               </a:tr>
-              <a:tr h="884681">
+              <a:tr h="838962">
                 <a:tc>
                   <a:txBody>
                     <a:bodyPr/>
@@ -8302,7 +8302,7 @@
           <p:cNvPr id="9" name="TextBox 8">
             <a:extLst xmlns:a="http://schemas.openxmlformats.org/drawingml/2006/main">
               <a:ext uri="{FF2B5EF4-FFF2-40B4-BE49-F238E27FC236}">
-                <a16:creationId xmlns:a16="http://schemas.microsoft.com/office/drawing/2014/main" id="{07F509FA-7780-4ED1-B22E-D6FB7A7694BF}"/>
+                <a16:creationId xmlns:a16="http://schemas.microsoft.com/office/drawing/2014/main" id="{79481F39-B9DF-4517-819F-488E56B2F061}"/>
               </a:ext>
             </a:extLst>
           </p:cNvPr>
@@ -8347,7 +8347,7 @@
     </p:spTree>
     <p:extLst>
       <p:ext uri="{BB962C8B-B14F-4D97-AF65-F5344CB8AC3E}">
-        <p14:creationId xmlns:p14="http://schemas.microsoft.com/office/powerpoint/2010/main" val="887533567"/>
+        <p14:creationId xmlns:p14="http://schemas.microsoft.com/office/powerpoint/2010/main" val="833196298"/>
       </p:ext>
     </p:extLst>
   </p:cSld>
@@ -8378,7 +8378,7 @@
           <p:cNvPr id="2" name="TextBox 1">
             <a:extLst xmlns:a="http://schemas.openxmlformats.org/drawingml/2006/main">
               <a:ext uri="{FF2B5EF4-FFF2-40B4-BE49-F238E27FC236}">
-                <a16:creationId xmlns:a16="http://schemas.microsoft.com/office/drawing/2014/main" id="{2AA100F3-B87C-40E3-B17D-0D2EC85A2FFF}"/>
+                <a16:creationId xmlns:a16="http://schemas.microsoft.com/office/drawing/2014/main" id="{D4BAA44E-5A84-4F2A-A352-DD7F2DE68FC1}"/>
               </a:ext>
             </a:extLst>
           </p:cNvPr>
@@ -8425,7 +8425,7 @@
           <p:cNvPr id="3" name="TextBox 2">
             <a:extLst xmlns:a="http://schemas.openxmlformats.org/drawingml/2006/main">
               <a:ext uri="{FF2B5EF4-FFF2-40B4-BE49-F238E27FC236}">
-                <a16:creationId xmlns:a16="http://schemas.microsoft.com/office/drawing/2014/main" id="{8D24A420-F8CB-43B1-AACB-904039F2C372}"/>
+                <a16:creationId xmlns:a16="http://schemas.microsoft.com/office/drawing/2014/main" id="{FDBF27A3-0666-408D-A967-38B236CD2B25}"/>
               </a:ext>
             </a:extLst>
           </p:cNvPr>
@@ -8472,7 +8472,7 @@
           <p:cNvPr id="4" name="TextBox 3">
             <a:extLst xmlns:a="http://schemas.openxmlformats.org/drawingml/2006/main">
               <a:ext uri="{FF2B5EF4-FFF2-40B4-BE49-F238E27FC236}">
-                <a16:creationId xmlns:a16="http://schemas.microsoft.com/office/drawing/2014/main" id="{5681047D-AE01-4B01-90A1-EF556294D49F}"/>
+                <a16:creationId xmlns:a16="http://schemas.microsoft.com/office/drawing/2014/main" id="{4C55AE55-0D68-402E-BC98-DA9C974AA0FC}"/>
               </a:ext>
             </a:extLst>
           </p:cNvPr>
@@ -8591,7 +8591,7 @@
           <p:cNvPr id="5" name="TextBox 4">
             <a:extLst xmlns:a="http://schemas.openxmlformats.org/drawingml/2006/main">
               <a:ext uri="{FF2B5EF4-FFF2-40B4-BE49-F238E27FC236}">
-                <a16:creationId xmlns:a16="http://schemas.microsoft.com/office/drawing/2014/main" id="{F9ED9B7B-EA72-4FF2-A6CB-732F96567B96}"/>
+                <a16:creationId xmlns:a16="http://schemas.microsoft.com/office/drawing/2014/main" id="{7345E2BD-E74D-4F84-A9B4-7A8ED981DABE}"/>
               </a:ext>
             </a:extLst>
           </p:cNvPr>
@@ -8628,7 +8628,7 @@
                 <a:ea typeface="Aptos"/>
                 <a:cs typeface="Aptos"/>
               </a:rPr>
-              <a:t>Version 2026.07.23-16 · 2026-07-22 · 6 / 6</a:t>
+              <a:t>Version 2026.07.24-17 · 2026-07-24 · 6 / 6</a:t>
             </a:r>
           </a:p>
         </p:txBody>
@@ -8636,7 +8636,7 @@
     </p:spTree>
     <p:extLst>
       <p:ext uri="{BB962C8B-B14F-4D97-AF65-F5344CB8AC3E}">
-        <p14:creationId xmlns:p14="http://schemas.microsoft.com/office/powerpoint/2010/main" val="897186103"/>
+        <p14:creationId xmlns:p14="http://schemas.microsoft.com/office/powerpoint/2010/main" val="62056118"/>
       </p:ext>
     </p:extLst>
   </p:cSld>

--- a/site/downloads/pixan-bank-deck-short-en.pptx
+++ b/site/downloads/pixan-bank-deck-short-en.pptx
@@ -2,116 +2,21 @@
 <file path=ppt/presentation.xml><?xml version="1.0" encoding="utf-8"?>
 <p:presentation xmlns:p="http://schemas.openxmlformats.org/presentationml/2006/main">
   <p:sldMasterIdLst>
-    <p:sldMasterId xmlns:r="http://schemas.openxmlformats.org/officeDocument/2006/relationships" id="2147483648" r:id="Rd6b0d3ae0e244311"/>
+    <p:sldMasterId xmlns:r="http://schemas.openxmlformats.org/officeDocument/2006/relationships" id="2147483648" r:id="R51c26368e5414112"/>
   </p:sldMasterIdLst>
   <p:notesMasterIdLst>
-    <p:notesMasterId xmlns:r="http://schemas.openxmlformats.org/officeDocument/2006/relationships" r:id="R5187682e048c41d1"/>
+    <p:notesMasterId xmlns:r="http://schemas.openxmlformats.org/officeDocument/2006/relationships" r:id="R15c09b6c451743fe"/>
   </p:notesMasterIdLst>
   <p:sldIdLst>
-    <p:sldId xmlns:r="http://schemas.openxmlformats.org/officeDocument/2006/relationships" id="256" r:id="R4f7c9b2c090245cf"/>
-    <p:sldId xmlns:r="http://schemas.openxmlformats.org/officeDocument/2006/relationships" id="257" r:id="Re8ddd25dbcfb4e1a"/>
-    <p:sldId xmlns:r="http://schemas.openxmlformats.org/officeDocument/2006/relationships" id="258" r:id="R05197762c75c48e9"/>
-    <p:sldId xmlns:r="http://schemas.openxmlformats.org/officeDocument/2006/relationships" id="259" r:id="R6182236c22b9435d"/>
-    <p:sldId xmlns:r="http://schemas.openxmlformats.org/officeDocument/2006/relationships" id="260" r:id="R60adaea36fcd4c42"/>
-    <p:sldId xmlns:r="http://schemas.openxmlformats.org/officeDocument/2006/relationships" id="261" r:id="R8f52a9f2b9f74d3c"/>
+    <p:sldId xmlns:r="http://schemas.openxmlformats.org/officeDocument/2006/relationships" id="256" r:id="R6e0c6a35d7ab44f6"/>
+    <p:sldId xmlns:r="http://schemas.openxmlformats.org/officeDocument/2006/relationships" id="257" r:id="R8d100e46df544be4"/>
+    <p:sldId xmlns:r="http://schemas.openxmlformats.org/officeDocument/2006/relationships" id="258" r:id="Rae2b830180c14341"/>
+    <p:sldId xmlns:r="http://schemas.openxmlformats.org/officeDocument/2006/relationships" id="259" r:id="R03a9f1bde2424002"/>
+    <p:sldId xmlns:r="http://schemas.openxmlformats.org/officeDocument/2006/relationships" id="260" r:id="Re893b4caecda4a71"/>
+    <p:sldId xmlns:r="http://schemas.openxmlformats.org/officeDocument/2006/relationships" id="261" r:id="R5658988d93864406"/>
   </p:sldIdLst>
   <p:sldSz cx="12191999" cy="6858000"/>
   <p:notesSz cx="6858000" cy="9144000"/>
-  <p:defaultTextStyle>
-    <a:defPPr xmlns:a="http://schemas.openxmlformats.org/drawingml/2006/main">
-      <a:defRPr lang="en-US"/>
-    </a:defPPr>
-    <a:lvl1pPr xmlns:a="http://schemas.openxmlformats.org/drawingml/2006/main" marL="0" indent="0" algn="l" defTabSz="914400">
-      <a:defRPr sz="1800" kern="1200">
-        <a:solidFill>
-          <a:schemeClr val="tx1"/>
-        </a:solidFill>
-        <a:latin typeface="+mn-lt"/>
-        <a:ea typeface="+mn-ea"/>
-        <a:cs typeface="+mn-cs"/>
-      </a:defRPr>
-    </a:lvl1pPr>
-    <a:lvl2pPr xmlns:a="http://schemas.openxmlformats.org/drawingml/2006/main" marL="457200" indent="0" algn="l" defTabSz="914400">
-      <a:defRPr sz="1800" kern="1200">
-        <a:solidFill>
-          <a:schemeClr val="tx1"/>
-        </a:solidFill>
-        <a:latin typeface="+mn-lt"/>
-        <a:ea typeface="+mn-ea"/>
-        <a:cs typeface="+mn-cs"/>
-      </a:defRPr>
-    </a:lvl2pPr>
-    <a:lvl3pPr xmlns:a="http://schemas.openxmlformats.org/drawingml/2006/main" marL="914400" indent="0" algn="l" defTabSz="914400">
-      <a:defRPr sz="1800" kern="1200">
-        <a:solidFill>
-          <a:schemeClr val="tx1"/>
-        </a:solidFill>
-        <a:latin typeface="+mn-lt"/>
-        <a:ea typeface="+mn-ea"/>
-        <a:cs typeface="+mn-cs"/>
-      </a:defRPr>
-    </a:lvl3pPr>
-    <a:lvl4pPr xmlns:a="http://schemas.openxmlformats.org/drawingml/2006/main" marL="1371600" indent="0" algn="l" defTabSz="914400">
-      <a:defRPr sz="1800" kern="1200">
-        <a:solidFill>
-          <a:schemeClr val="tx1"/>
-        </a:solidFill>
-        <a:latin typeface="+mn-lt"/>
-        <a:ea typeface="+mn-ea"/>
-        <a:cs typeface="+mn-cs"/>
-      </a:defRPr>
-    </a:lvl4pPr>
-    <a:lvl5pPr xmlns:a="http://schemas.openxmlformats.org/drawingml/2006/main" marL="1828800" indent="0" algn="l" defTabSz="914400">
-      <a:defRPr sz="1800" kern="1200">
-        <a:solidFill>
-          <a:schemeClr val="tx1"/>
-        </a:solidFill>
-        <a:latin typeface="+mn-lt"/>
-        <a:ea typeface="+mn-ea"/>
-        <a:cs typeface="+mn-cs"/>
-      </a:defRPr>
-    </a:lvl5pPr>
-    <a:lvl6pPr xmlns:a="http://schemas.openxmlformats.org/drawingml/2006/main" marL="2286000" indent="0" algn="l" defTabSz="914400">
-      <a:defRPr sz="1800" kern="1200">
-        <a:solidFill>
-          <a:schemeClr val="tx1"/>
-        </a:solidFill>
-        <a:latin typeface="+mn-lt"/>
-        <a:ea typeface="+mn-ea"/>
-        <a:cs typeface="+mn-cs"/>
-      </a:defRPr>
-    </a:lvl6pPr>
-    <a:lvl7pPr xmlns:a="http://schemas.openxmlformats.org/drawingml/2006/main" marL="2743200" indent="0" algn="l" defTabSz="914400">
-      <a:defRPr sz="1800" kern="1200">
-        <a:solidFill>
-          <a:schemeClr val="tx1"/>
-        </a:solidFill>
-        <a:latin typeface="+mn-lt"/>
-        <a:ea typeface="+mn-ea"/>
-        <a:cs typeface="+mn-cs"/>
-      </a:defRPr>
-    </a:lvl7pPr>
-    <a:lvl8pPr xmlns:a="http://schemas.openxmlformats.org/drawingml/2006/main" marL="3200400" indent="0" algn="l" defTabSz="914400">
-      <a:defRPr sz="1800" kern="1200">
-        <a:solidFill>
-          <a:schemeClr val="tx1"/>
-        </a:solidFill>
-        <a:latin typeface="+mn-lt"/>
-        <a:ea typeface="+mn-ea"/>
-        <a:cs typeface="+mn-cs"/>
-      </a:defRPr>
-    </a:lvl8pPr>
-    <a:lvl9pPr xmlns:a="http://schemas.openxmlformats.org/drawingml/2006/main" marL="3657600" indent="0" algn="l" defTabSz="914400">
-      <a:defRPr sz="1800" kern="1200">
-        <a:solidFill>
-          <a:schemeClr val="tx1"/>
-        </a:solidFill>
-        <a:latin typeface="+mn-lt"/>
-        <a:ea typeface="+mn-ea"/>
-        <a:cs typeface="+mn-cs"/>
-      </a:defRPr>
-    </a:lvl9pPr>
-  </p:defaultTextStyle>
 </p:presentation>
 </file>
 
@@ -563,7 +468,96 @@
         <p:txBody>
           <a:bodyPr xmlns:a="http://schemas.openxmlformats.org/drawingml/2006/main"/>
           <a:lstStyle xmlns:a="http://schemas.openxmlformats.org/drawingml/2006/main"/>
-          <a:p xmlns:a="http://schemas.openxmlformats.org/drawingml/2006/main"/>
+          <a:p xmlns:a="http://schemas.openxmlformats.org/drawingml/2006/main">
+            <a:r>
+              <a:t>[Sources]</a:t>
+            </a:r>
+          </a:p>
+          <a:p xmlns:a="http://schemas.openxmlformats.org/drawingml/2006/main">
+            <a:r>
+              <a:t>- https://register.epo.org/application?number=EP14836345&amp;lng=en&amp;tab=main</a:t>
+            </a:r>
+          </a:p>
+          <a:p xmlns:a="http://schemas.openxmlformats.org/drawingml/2006/main">
+            <a:r>
+              <a:t>- https://data.epo.org/publication-server/rest/v1.2/patents/EP3032975NWB2/document.pdf</a:t>
+            </a:r>
+          </a:p>
+          <a:p xmlns:a="http://schemas.openxmlformats.org/drawingml/2006/main">
+            <a:r>
+              <a:t>- https://www.rechtsprechung-im-internet.de/jportal/?quelle=jlink&amp;docid=JURE269032275&amp;psml=bsjrsprod.psml</a:t>
+            </a:r>
+          </a:p>
+          <a:p xmlns:a="http://schemas.openxmlformats.org/drawingml/2006/main">
+            <a:r>
+              <a:t>- https://www.gesetze-bayern.de/Content/Document/Y-300-Z-BECKRS-B-2026-N-14206</a:t>
+            </a:r>
+          </a:p>
+          <a:p xmlns:a="http://schemas.openxmlformats.org/drawingml/2006/main">
+            <a:r>
+              <a:t>- https://www.health.govt.nz/regulation-legislation/vaping-herbal-smoking-and-smokeless-tobacco/requirements/complete-a-notifiable-product-annual-return/annual-returns-2024</a:t>
+            </a:r>
+          </a:p>
+          <a:p xmlns:a="http://schemas.openxmlformats.org/drawingml/2006/main">
+            <a:r>
+              <a:t>- https://www.ftc.gov/reports/e-cigarette-report-2021</a:t>
+            </a:r>
+          </a:p>
+          <a:p xmlns:a="http://schemas.openxmlformats.org/drawingml/2006/main">
+            <a:r>
+              <a:t>- https://www.wipo.int/en/web/ip-financing</a:t>
+            </a:r>
+          </a:p>
+          <a:p xmlns:a="http://schemas.openxmlformats.org/drawingml/2006/main">
+            <a:r>
+              <a:t>- https://data.ecb.europa.eu/data/datasets/exr/data-information</a:t>
+            </a:r>
+          </a:p>
+          <a:p xmlns:a="http://schemas.openxmlformats.org/drawingml/2006/main">
+            <a:r>
+              <a:t>- https://www.ecb.europa.eu/stats/policy_and_exchange_rates/euro_reference_exchange_rates/html/index.en.html</a:t>
+            </a:r>
+          </a:p>
+          <a:p xmlns:a="http://schemas.openxmlformats.org/drawingml/2006/main">
+            <a:r>
+              <a:t>- https://data-api.ecb.europa.eu/service/data/EXR/A.NZD.EUR.SP00.A?startPeriod=2024&amp;endPeriod=2024&amp;format=csvdata</a:t>
+            </a:r>
+          </a:p>
+          <a:p xmlns:a="http://schemas.openxmlformats.org/drawingml/2006/main">
+            <a:r>
+              <a:t>- https://data-api.ecb.europa.eu/service/data/EXR/A.USD.EUR.SP00.A?startPeriod=2021&amp;endPeriod=2021&amp;format=csvdata</a:t>
+            </a:r>
+          </a:p>
+          <a:p xmlns:a="http://schemas.openxmlformats.org/drawingml/2006/main">
+            <a:r>
+              <a:t/>
+            </a:r>
+          </a:p>
+          <a:p xmlns:a="http://schemas.openxmlformats.org/drawingml/2006/main">
+            <a:r>
+              <a:t>[FX methodology]</a:t>
+            </a:r>
+          </a:p>
+          <a:p xmlns:a="http://schemas.openxmlformats.org/drawingml/2006/main">
+            <a:r>
+              <a:t>- EUR equivalent = original monetary amount divided by the ECB annual-average reference rate expressed as currency units per euro.</a:t>
+            </a:r>
+          </a:p>
+          <a:p xmlns:a="http://schemas.openxmlformats.org/drawingml/2006/main">
+            <a:r>
+              <a:t>- The source value and source currency remain primary. The EUR figure is a secondary analytical equivalent, not an observed transaction value or a current spot conversion.</a:t>
+            </a:r>
+          </a:p>
+          <a:p xmlns:a="http://schemas.openxmlformats.org/drawingml/2006/main">
+            <a:r>
+              <a:t>- NZD 2024: ECB-EXR-A-NZD-EUR-SP00-A-2024 · 1.788048828125 currency units per EUR</a:t>
+            </a:r>
+          </a:p>
+          <a:p xmlns:a="http://schemas.openxmlformats.org/drawingml/2006/main">
+            <a:r>
+              <a:t>- USD 2021: ECB-EXR-A-USD-EUR-SP00-A-2021 · 1.1827403100775 currency units per EUR</a:t>
+            </a:r>
+          </a:p>
         </p:txBody>
       </p:sp>
       <p:sp>
@@ -629,7 +623,96 @@
         <p:txBody>
           <a:bodyPr xmlns:a="http://schemas.openxmlformats.org/drawingml/2006/main"/>
           <a:lstStyle xmlns:a="http://schemas.openxmlformats.org/drawingml/2006/main"/>
-          <a:p xmlns:a="http://schemas.openxmlformats.org/drawingml/2006/main"/>
+          <a:p xmlns:a="http://schemas.openxmlformats.org/drawingml/2006/main">
+            <a:r>
+              <a:t>[Sources]</a:t>
+            </a:r>
+          </a:p>
+          <a:p xmlns:a="http://schemas.openxmlformats.org/drawingml/2006/main">
+            <a:r>
+              <a:t>- https://register.epo.org/application?number=EP14836345&amp;lng=en&amp;tab=main</a:t>
+            </a:r>
+          </a:p>
+          <a:p xmlns:a="http://schemas.openxmlformats.org/drawingml/2006/main">
+            <a:r>
+              <a:t>- https://data.epo.org/publication-server/rest/v1.2/patents/EP3032975NWB2/document.pdf</a:t>
+            </a:r>
+          </a:p>
+          <a:p xmlns:a="http://schemas.openxmlformats.org/drawingml/2006/main">
+            <a:r>
+              <a:t>- https://www.rechtsprechung-im-internet.de/jportal/?quelle=jlink&amp;docid=JURE269032275&amp;psml=bsjrsprod.psml</a:t>
+            </a:r>
+          </a:p>
+          <a:p xmlns:a="http://schemas.openxmlformats.org/drawingml/2006/main">
+            <a:r>
+              <a:t>- https://www.gesetze-bayern.de/Content/Document/Y-300-Z-BECKRS-B-2026-N-14206</a:t>
+            </a:r>
+          </a:p>
+          <a:p xmlns:a="http://schemas.openxmlformats.org/drawingml/2006/main">
+            <a:r>
+              <a:t>- https://www.health.govt.nz/regulation-legislation/vaping-herbal-smoking-and-smokeless-tobacco/requirements/complete-a-notifiable-product-annual-return/annual-returns-2024</a:t>
+            </a:r>
+          </a:p>
+          <a:p xmlns:a="http://schemas.openxmlformats.org/drawingml/2006/main">
+            <a:r>
+              <a:t>- https://www.ftc.gov/reports/e-cigarette-report-2021</a:t>
+            </a:r>
+          </a:p>
+          <a:p xmlns:a="http://schemas.openxmlformats.org/drawingml/2006/main">
+            <a:r>
+              <a:t>- https://www.wipo.int/en/web/ip-financing</a:t>
+            </a:r>
+          </a:p>
+          <a:p xmlns:a="http://schemas.openxmlformats.org/drawingml/2006/main">
+            <a:r>
+              <a:t>- https://data.ecb.europa.eu/data/datasets/exr/data-information</a:t>
+            </a:r>
+          </a:p>
+          <a:p xmlns:a="http://schemas.openxmlformats.org/drawingml/2006/main">
+            <a:r>
+              <a:t>- https://www.ecb.europa.eu/stats/policy_and_exchange_rates/euro_reference_exchange_rates/html/index.en.html</a:t>
+            </a:r>
+          </a:p>
+          <a:p xmlns:a="http://schemas.openxmlformats.org/drawingml/2006/main">
+            <a:r>
+              <a:t>- https://data-api.ecb.europa.eu/service/data/EXR/A.NZD.EUR.SP00.A?startPeriod=2024&amp;endPeriod=2024&amp;format=csvdata</a:t>
+            </a:r>
+          </a:p>
+          <a:p xmlns:a="http://schemas.openxmlformats.org/drawingml/2006/main">
+            <a:r>
+              <a:t>- https://data-api.ecb.europa.eu/service/data/EXR/A.USD.EUR.SP00.A?startPeriod=2021&amp;endPeriod=2021&amp;format=csvdata</a:t>
+            </a:r>
+          </a:p>
+          <a:p xmlns:a="http://schemas.openxmlformats.org/drawingml/2006/main">
+            <a:r>
+              <a:t/>
+            </a:r>
+          </a:p>
+          <a:p xmlns:a="http://schemas.openxmlformats.org/drawingml/2006/main">
+            <a:r>
+              <a:t>[FX methodology]</a:t>
+            </a:r>
+          </a:p>
+          <a:p xmlns:a="http://schemas.openxmlformats.org/drawingml/2006/main">
+            <a:r>
+              <a:t>- EUR equivalent = original monetary amount divided by the ECB annual-average reference rate expressed as currency units per euro.</a:t>
+            </a:r>
+          </a:p>
+          <a:p xmlns:a="http://schemas.openxmlformats.org/drawingml/2006/main">
+            <a:r>
+              <a:t>- The source value and source currency remain primary. The EUR figure is a secondary analytical equivalent, not an observed transaction value or a current spot conversion.</a:t>
+            </a:r>
+          </a:p>
+          <a:p xmlns:a="http://schemas.openxmlformats.org/drawingml/2006/main">
+            <a:r>
+              <a:t>- NZD 2024: ECB-EXR-A-NZD-EUR-SP00-A-2024 · 1.788048828125 currency units per EUR</a:t>
+            </a:r>
+          </a:p>
+          <a:p xmlns:a="http://schemas.openxmlformats.org/drawingml/2006/main">
+            <a:r>
+              <a:t>- USD 2021: ECB-EXR-A-USD-EUR-SP00-A-2021 · 1.1827403100775 currency units per EUR</a:t>
+            </a:r>
+          </a:p>
         </p:txBody>
       </p:sp>
       <p:sp>
@@ -695,7 +778,96 @@
         <p:txBody>
           <a:bodyPr xmlns:a="http://schemas.openxmlformats.org/drawingml/2006/main"/>
           <a:lstStyle xmlns:a="http://schemas.openxmlformats.org/drawingml/2006/main"/>
-          <a:p xmlns:a="http://schemas.openxmlformats.org/drawingml/2006/main"/>
+          <a:p xmlns:a="http://schemas.openxmlformats.org/drawingml/2006/main">
+            <a:r>
+              <a:t>[Sources]</a:t>
+            </a:r>
+          </a:p>
+          <a:p xmlns:a="http://schemas.openxmlformats.org/drawingml/2006/main">
+            <a:r>
+              <a:t>- https://register.epo.org/application?number=EP14836345&amp;lng=en&amp;tab=main</a:t>
+            </a:r>
+          </a:p>
+          <a:p xmlns:a="http://schemas.openxmlformats.org/drawingml/2006/main">
+            <a:r>
+              <a:t>- https://data.epo.org/publication-server/rest/v1.2/patents/EP3032975NWB2/document.pdf</a:t>
+            </a:r>
+          </a:p>
+          <a:p xmlns:a="http://schemas.openxmlformats.org/drawingml/2006/main">
+            <a:r>
+              <a:t>- https://www.rechtsprechung-im-internet.de/jportal/?quelle=jlink&amp;docid=JURE269032275&amp;psml=bsjrsprod.psml</a:t>
+            </a:r>
+          </a:p>
+          <a:p xmlns:a="http://schemas.openxmlformats.org/drawingml/2006/main">
+            <a:r>
+              <a:t>- https://www.gesetze-bayern.de/Content/Document/Y-300-Z-BECKRS-B-2026-N-14206</a:t>
+            </a:r>
+          </a:p>
+          <a:p xmlns:a="http://schemas.openxmlformats.org/drawingml/2006/main">
+            <a:r>
+              <a:t>- https://www.health.govt.nz/regulation-legislation/vaping-herbal-smoking-and-smokeless-tobacco/requirements/complete-a-notifiable-product-annual-return/annual-returns-2024</a:t>
+            </a:r>
+          </a:p>
+          <a:p xmlns:a="http://schemas.openxmlformats.org/drawingml/2006/main">
+            <a:r>
+              <a:t>- https://www.ftc.gov/reports/e-cigarette-report-2021</a:t>
+            </a:r>
+          </a:p>
+          <a:p xmlns:a="http://schemas.openxmlformats.org/drawingml/2006/main">
+            <a:r>
+              <a:t>- https://www.wipo.int/en/web/ip-financing</a:t>
+            </a:r>
+          </a:p>
+          <a:p xmlns:a="http://schemas.openxmlformats.org/drawingml/2006/main">
+            <a:r>
+              <a:t>- https://data.ecb.europa.eu/data/datasets/exr/data-information</a:t>
+            </a:r>
+          </a:p>
+          <a:p xmlns:a="http://schemas.openxmlformats.org/drawingml/2006/main">
+            <a:r>
+              <a:t>- https://www.ecb.europa.eu/stats/policy_and_exchange_rates/euro_reference_exchange_rates/html/index.en.html</a:t>
+            </a:r>
+          </a:p>
+          <a:p xmlns:a="http://schemas.openxmlformats.org/drawingml/2006/main">
+            <a:r>
+              <a:t>- https://data-api.ecb.europa.eu/service/data/EXR/A.NZD.EUR.SP00.A?startPeriod=2024&amp;endPeriod=2024&amp;format=csvdata</a:t>
+            </a:r>
+          </a:p>
+          <a:p xmlns:a="http://schemas.openxmlformats.org/drawingml/2006/main">
+            <a:r>
+              <a:t>- https://data-api.ecb.europa.eu/service/data/EXR/A.USD.EUR.SP00.A?startPeriod=2021&amp;endPeriod=2021&amp;format=csvdata</a:t>
+            </a:r>
+          </a:p>
+          <a:p xmlns:a="http://schemas.openxmlformats.org/drawingml/2006/main">
+            <a:r>
+              <a:t/>
+            </a:r>
+          </a:p>
+          <a:p xmlns:a="http://schemas.openxmlformats.org/drawingml/2006/main">
+            <a:r>
+              <a:t>[FX methodology]</a:t>
+            </a:r>
+          </a:p>
+          <a:p xmlns:a="http://schemas.openxmlformats.org/drawingml/2006/main">
+            <a:r>
+              <a:t>- EUR equivalent = original monetary amount divided by the ECB annual-average reference rate expressed as currency units per euro.</a:t>
+            </a:r>
+          </a:p>
+          <a:p xmlns:a="http://schemas.openxmlformats.org/drawingml/2006/main">
+            <a:r>
+              <a:t>- The source value and source currency remain primary. The EUR figure is a secondary analytical equivalent, not an observed transaction value or a current spot conversion.</a:t>
+            </a:r>
+          </a:p>
+          <a:p xmlns:a="http://schemas.openxmlformats.org/drawingml/2006/main">
+            <a:r>
+              <a:t>- NZD 2024: ECB-EXR-A-NZD-EUR-SP00-A-2024 · 1.788048828125 currency units per EUR</a:t>
+            </a:r>
+          </a:p>
+          <a:p xmlns:a="http://schemas.openxmlformats.org/drawingml/2006/main">
+            <a:r>
+              <a:t>- USD 2021: ECB-EXR-A-USD-EUR-SP00-A-2021 · 1.1827403100775 currency units per EUR</a:t>
+            </a:r>
+          </a:p>
         </p:txBody>
       </p:sp>
       <p:sp>
@@ -761,7 +933,96 @@
         <p:txBody>
           <a:bodyPr xmlns:a="http://schemas.openxmlformats.org/drawingml/2006/main"/>
           <a:lstStyle xmlns:a="http://schemas.openxmlformats.org/drawingml/2006/main"/>
-          <a:p xmlns:a="http://schemas.openxmlformats.org/drawingml/2006/main"/>
+          <a:p xmlns:a="http://schemas.openxmlformats.org/drawingml/2006/main">
+            <a:r>
+              <a:t>[Sources]</a:t>
+            </a:r>
+          </a:p>
+          <a:p xmlns:a="http://schemas.openxmlformats.org/drawingml/2006/main">
+            <a:r>
+              <a:t>- https://register.epo.org/application?number=EP14836345&amp;lng=en&amp;tab=main</a:t>
+            </a:r>
+          </a:p>
+          <a:p xmlns:a="http://schemas.openxmlformats.org/drawingml/2006/main">
+            <a:r>
+              <a:t>- https://data.epo.org/publication-server/rest/v1.2/patents/EP3032975NWB2/document.pdf</a:t>
+            </a:r>
+          </a:p>
+          <a:p xmlns:a="http://schemas.openxmlformats.org/drawingml/2006/main">
+            <a:r>
+              <a:t>- https://www.rechtsprechung-im-internet.de/jportal/?quelle=jlink&amp;docid=JURE269032275&amp;psml=bsjrsprod.psml</a:t>
+            </a:r>
+          </a:p>
+          <a:p xmlns:a="http://schemas.openxmlformats.org/drawingml/2006/main">
+            <a:r>
+              <a:t>- https://www.gesetze-bayern.de/Content/Document/Y-300-Z-BECKRS-B-2026-N-14206</a:t>
+            </a:r>
+          </a:p>
+          <a:p xmlns:a="http://schemas.openxmlformats.org/drawingml/2006/main">
+            <a:r>
+              <a:t>- https://www.health.govt.nz/regulation-legislation/vaping-herbal-smoking-and-smokeless-tobacco/requirements/complete-a-notifiable-product-annual-return/annual-returns-2024</a:t>
+            </a:r>
+          </a:p>
+          <a:p xmlns:a="http://schemas.openxmlformats.org/drawingml/2006/main">
+            <a:r>
+              <a:t>- https://www.ftc.gov/reports/e-cigarette-report-2021</a:t>
+            </a:r>
+          </a:p>
+          <a:p xmlns:a="http://schemas.openxmlformats.org/drawingml/2006/main">
+            <a:r>
+              <a:t>- https://www.wipo.int/en/web/ip-financing</a:t>
+            </a:r>
+          </a:p>
+          <a:p xmlns:a="http://schemas.openxmlformats.org/drawingml/2006/main">
+            <a:r>
+              <a:t>- https://data.ecb.europa.eu/data/datasets/exr/data-information</a:t>
+            </a:r>
+          </a:p>
+          <a:p xmlns:a="http://schemas.openxmlformats.org/drawingml/2006/main">
+            <a:r>
+              <a:t>- https://www.ecb.europa.eu/stats/policy_and_exchange_rates/euro_reference_exchange_rates/html/index.en.html</a:t>
+            </a:r>
+          </a:p>
+          <a:p xmlns:a="http://schemas.openxmlformats.org/drawingml/2006/main">
+            <a:r>
+              <a:t>- https://data-api.ecb.europa.eu/service/data/EXR/A.NZD.EUR.SP00.A?startPeriod=2024&amp;endPeriod=2024&amp;format=csvdata</a:t>
+            </a:r>
+          </a:p>
+          <a:p xmlns:a="http://schemas.openxmlformats.org/drawingml/2006/main">
+            <a:r>
+              <a:t>- https://data-api.ecb.europa.eu/service/data/EXR/A.USD.EUR.SP00.A?startPeriod=2021&amp;endPeriod=2021&amp;format=csvdata</a:t>
+            </a:r>
+          </a:p>
+          <a:p xmlns:a="http://schemas.openxmlformats.org/drawingml/2006/main">
+            <a:r>
+              <a:t/>
+            </a:r>
+          </a:p>
+          <a:p xmlns:a="http://schemas.openxmlformats.org/drawingml/2006/main">
+            <a:r>
+              <a:t>[FX methodology]</a:t>
+            </a:r>
+          </a:p>
+          <a:p xmlns:a="http://schemas.openxmlformats.org/drawingml/2006/main">
+            <a:r>
+              <a:t>- EUR equivalent = original monetary amount divided by the ECB annual-average reference rate expressed as currency units per euro.</a:t>
+            </a:r>
+          </a:p>
+          <a:p xmlns:a="http://schemas.openxmlformats.org/drawingml/2006/main">
+            <a:r>
+              <a:t>- The source value and source currency remain primary. The EUR figure is a secondary analytical equivalent, not an observed transaction value or a current spot conversion.</a:t>
+            </a:r>
+          </a:p>
+          <a:p xmlns:a="http://schemas.openxmlformats.org/drawingml/2006/main">
+            <a:r>
+              <a:t>- NZD 2024: ECB-EXR-A-NZD-EUR-SP00-A-2024 · 1.788048828125 currency units per EUR</a:t>
+            </a:r>
+          </a:p>
+          <a:p xmlns:a="http://schemas.openxmlformats.org/drawingml/2006/main">
+            <a:r>
+              <a:t>- USD 2021: ECB-EXR-A-USD-EUR-SP00-A-2021 · 1.1827403100775 currency units per EUR</a:t>
+            </a:r>
+          </a:p>
         </p:txBody>
       </p:sp>
       <p:sp>
@@ -827,7 +1088,96 @@
         <p:txBody>
           <a:bodyPr xmlns:a="http://schemas.openxmlformats.org/drawingml/2006/main"/>
           <a:lstStyle xmlns:a="http://schemas.openxmlformats.org/drawingml/2006/main"/>
-          <a:p xmlns:a="http://schemas.openxmlformats.org/drawingml/2006/main"/>
+          <a:p xmlns:a="http://schemas.openxmlformats.org/drawingml/2006/main">
+            <a:r>
+              <a:t>[Sources]</a:t>
+            </a:r>
+          </a:p>
+          <a:p xmlns:a="http://schemas.openxmlformats.org/drawingml/2006/main">
+            <a:r>
+              <a:t>- https://register.epo.org/application?number=EP14836345&amp;lng=en&amp;tab=main</a:t>
+            </a:r>
+          </a:p>
+          <a:p xmlns:a="http://schemas.openxmlformats.org/drawingml/2006/main">
+            <a:r>
+              <a:t>- https://data.epo.org/publication-server/rest/v1.2/patents/EP3032975NWB2/document.pdf</a:t>
+            </a:r>
+          </a:p>
+          <a:p xmlns:a="http://schemas.openxmlformats.org/drawingml/2006/main">
+            <a:r>
+              <a:t>- https://www.rechtsprechung-im-internet.de/jportal/?quelle=jlink&amp;docid=JURE269032275&amp;psml=bsjrsprod.psml</a:t>
+            </a:r>
+          </a:p>
+          <a:p xmlns:a="http://schemas.openxmlformats.org/drawingml/2006/main">
+            <a:r>
+              <a:t>- https://www.gesetze-bayern.de/Content/Document/Y-300-Z-BECKRS-B-2026-N-14206</a:t>
+            </a:r>
+          </a:p>
+          <a:p xmlns:a="http://schemas.openxmlformats.org/drawingml/2006/main">
+            <a:r>
+              <a:t>- https://www.health.govt.nz/regulation-legislation/vaping-herbal-smoking-and-smokeless-tobacco/requirements/complete-a-notifiable-product-annual-return/annual-returns-2024</a:t>
+            </a:r>
+          </a:p>
+          <a:p xmlns:a="http://schemas.openxmlformats.org/drawingml/2006/main">
+            <a:r>
+              <a:t>- https://www.ftc.gov/reports/e-cigarette-report-2021</a:t>
+            </a:r>
+          </a:p>
+          <a:p xmlns:a="http://schemas.openxmlformats.org/drawingml/2006/main">
+            <a:r>
+              <a:t>- https://www.wipo.int/en/web/ip-financing</a:t>
+            </a:r>
+          </a:p>
+          <a:p xmlns:a="http://schemas.openxmlformats.org/drawingml/2006/main">
+            <a:r>
+              <a:t>- https://data.ecb.europa.eu/data/datasets/exr/data-information</a:t>
+            </a:r>
+          </a:p>
+          <a:p xmlns:a="http://schemas.openxmlformats.org/drawingml/2006/main">
+            <a:r>
+              <a:t>- https://www.ecb.europa.eu/stats/policy_and_exchange_rates/euro_reference_exchange_rates/html/index.en.html</a:t>
+            </a:r>
+          </a:p>
+          <a:p xmlns:a="http://schemas.openxmlformats.org/drawingml/2006/main">
+            <a:r>
+              <a:t>- https://data-api.ecb.europa.eu/service/data/EXR/A.NZD.EUR.SP00.A?startPeriod=2024&amp;endPeriod=2024&amp;format=csvdata</a:t>
+            </a:r>
+          </a:p>
+          <a:p xmlns:a="http://schemas.openxmlformats.org/drawingml/2006/main">
+            <a:r>
+              <a:t>- https://data-api.ecb.europa.eu/service/data/EXR/A.USD.EUR.SP00.A?startPeriod=2021&amp;endPeriod=2021&amp;format=csvdata</a:t>
+            </a:r>
+          </a:p>
+          <a:p xmlns:a="http://schemas.openxmlformats.org/drawingml/2006/main">
+            <a:r>
+              <a:t/>
+            </a:r>
+          </a:p>
+          <a:p xmlns:a="http://schemas.openxmlformats.org/drawingml/2006/main">
+            <a:r>
+              <a:t>[FX methodology]</a:t>
+            </a:r>
+          </a:p>
+          <a:p xmlns:a="http://schemas.openxmlformats.org/drawingml/2006/main">
+            <a:r>
+              <a:t>- EUR equivalent = original monetary amount divided by the ECB annual-average reference rate expressed as currency units per euro.</a:t>
+            </a:r>
+          </a:p>
+          <a:p xmlns:a="http://schemas.openxmlformats.org/drawingml/2006/main">
+            <a:r>
+              <a:t>- The source value and source currency remain primary. The EUR figure is a secondary analytical equivalent, not an observed transaction value or a current spot conversion.</a:t>
+            </a:r>
+          </a:p>
+          <a:p xmlns:a="http://schemas.openxmlformats.org/drawingml/2006/main">
+            <a:r>
+              <a:t>- NZD 2024: ECB-EXR-A-NZD-EUR-SP00-A-2024 · 1.788048828125 currency units per EUR</a:t>
+            </a:r>
+          </a:p>
+          <a:p xmlns:a="http://schemas.openxmlformats.org/drawingml/2006/main">
+            <a:r>
+              <a:t>- USD 2021: ECB-EXR-A-USD-EUR-SP00-A-2021 · 1.1827403100775 currency units per EUR</a:t>
+            </a:r>
+          </a:p>
         </p:txBody>
       </p:sp>
       <p:sp>
@@ -893,7 +1243,96 @@
         <p:txBody>
           <a:bodyPr xmlns:a="http://schemas.openxmlformats.org/drawingml/2006/main"/>
           <a:lstStyle xmlns:a="http://schemas.openxmlformats.org/drawingml/2006/main"/>
-          <a:p xmlns:a="http://schemas.openxmlformats.org/drawingml/2006/main"/>
+          <a:p xmlns:a="http://schemas.openxmlformats.org/drawingml/2006/main">
+            <a:r>
+              <a:t>[Sources]</a:t>
+            </a:r>
+          </a:p>
+          <a:p xmlns:a="http://schemas.openxmlformats.org/drawingml/2006/main">
+            <a:r>
+              <a:t>- https://register.epo.org/application?number=EP14836345&amp;lng=en&amp;tab=main</a:t>
+            </a:r>
+          </a:p>
+          <a:p xmlns:a="http://schemas.openxmlformats.org/drawingml/2006/main">
+            <a:r>
+              <a:t>- https://data.epo.org/publication-server/rest/v1.2/patents/EP3032975NWB2/document.pdf</a:t>
+            </a:r>
+          </a:p>
+          <a:p xmlns:a="http://schemas.openxmlformats.org/drawingml/2006/main">
+            <a:r>
+              <a:t>- https://www.rechtsprechung-im-internet.de/jportal/?quelle=jlink&amp;docid=JURE269032275&amp;psml=bsjrsprod.psml</a:t>
+            </a:r>
+          </a:p>
+          <a:p xmlns:a="http://schemas.openxmlformats.org/drawingml/2006/main">
+            <a:r>
+              <a:t>- https://www.gesetze-bayern.de/Content/Document/Y-300-Z-BECKRS-B-2026-N-14206</a:t>
+            </a:r>
+          </a:p>
+          <a:p xmlns:a="http://schemas.openxmlformats.org/drawingml/2006/main">
+            <a:r>
+              <a:t>- https://www.health.govt.nz/regulation-legislation/vaping-herbal-smoking-and-smokeless-tobacco/requirements/complete-a-notifiable-product-annual-return/annual-returns-2024</a:t>
+            </a:r>
+          </a:p>
+          <a:p xmlns:a="http://schemas.openxmlformats.org/drawingml/2006/main">
+            <a:r>
+              <a:t>- https://www.ftc.gov/reports/e-cigarette-report-2021</a:t>
+            </a:r>
+          </a:p>
+          <a:p xmlns:a="http://schemas.openxmlformats.org/drawingml/2006/main">
+            <a:r>
+              <a:t>- https://www.wipo.int/en/web/ip-financing</a:t>
+            </a:r>
+          </a:p>
+          <a:p xmlns:a="http://schemas.openxmlformats.org/drawingml/2006/main">
+            <a:r>
+              <a:t>- https://data.ecb.europa.eu/data/datasets/exr/data-information</a:t>
+            </a:r>
+          </a:p>
+          <a:p xmlns:a="http://schemas.openxmlformats.org/drawingml/2006/main">
+            <a:r>
+              <a:t>- https://www.ecb.europa.eu/stats/policy_and_exchange_rates/euro_reference_exchange_rates/html/index.en.html</a:t>
+            </a:r>
+          </a:p>
+          <a:p xmlns:a="http://schemas.openxmlformats.org/drawingml/2006/main">
+            <a:r>
+              <a:t>- https://data-api.ecb.europa.eu/service/data/EXR/A.NZD.EUR.SP00.A?startPeriod=2024&amp;endPeriod=2024&amp;format=csvdata</a:t>
+            </a:r>
+          </a:p>
+          <a:p xmlns:a="http://schemas.openxmlformats.org/drawingml/2006/main">
+            <a:r>
+              <a:t>- https://data-api.ecb.europa.eu/service/data/EXR/A.USD.EUR.SP00.A?startPeriod=2021&amp;endPeriod=2021&amp;format=csvdata</a:t>
+            </a:r>
+          </a:p>
+          <a:p xmlns:a="http://schemas.openxmlformats.org/drawingml/2006/main">
+            <a:r>
+              <a:t/>
+            </a:r>
+          </a:p>
+          <a:p xmlns:a="http://schemas.openxmlformats.org/drawingml/2006/main">
+            <a:r>
+              <a:t>[FX methodology]</a:t>
+            </a:r>
+          </a:p>
+          <a:p xmlns:a="http://schemas.openxmlformats.org/drawingml/2006/main">
+            <a:r>
+              <a:t>- EUR equivalent = original monetary amount divided by the ECB annual-average reference rate expressed as currency units per euro.</a:t>
+            </a:r>
+          </a:p>
+          <a:p xmlns:a="http://schemas.openxmlformats.org/drawingml/2006/main">
+            <a:r>
+              <a:t>- The source value and source currency remain primary. The EUR figure is a secondary analytical equivalent, not an observed transaction value or a current spot conversion.</a:t>
+            </a:r>
+          </a:p>
+          <a:p xmlns:a="http://schemas.openxmlformats.org/drawingml/2006/main">
+            <a:r>
+              <a:t>- NZD 2024: ECB-EXR-A-NZD-EUR-SP00-A-2024 · 1.788048828125 currency units per EUR</a:t>
+            </a:r>
+          </a:p>
+          <a:p xmlns:a="http://schemas.openxmlformats.org/drawingml/2006/main">
+            <a:r>
+              <a:t>- USD 2021: ECB-EXR-A-USD-EUR-SP00-A-2021 · 1.1827403100775 currency units per EUR</a:t>
+            </a:r>
+          </a:p>
         </p:txBody>
       </p:sp>
       <p:sp>
@@ -3847,17 +4286,17 @@
   </p:cSld>
   <p:clrMap bg1="lt1" tx1="dk1" bg2="lt2" tx2="dk2" accent1="accent1" accent2="accent2" accent3="accent3" accent4="accent4" accent5="accent5" accent6="accent6" hlink="hlink" folHlink="folHlink"/>
   <p:sldLayoutIdLst>
-    <p:sldLayoutId xmlns:r="http://schemas.openxmlformats.org/officeDocument/2006/relationships" id="2147483649" r:id="R2796c957d0bf4657"/>
-    <p:sldLayoutId xmlns:r="http://schemas.openxmlformats.org/officeDocument/2006/relationships" id="2147483650" r:id="R3c4deba5b4074ffb"/>
-    <p:sldLayoutId xmlns:r="http://schemas.openxmlformats.org/officeDocument/2006/relationships" id="2147483651" r:id="R8ac5af31e10e47c5"/>
-    <p:sldLayoutId xmlns:r="http://schemas.openxmlformats.org/officeDocument/2006/relationships" id="2147483652" r:id="R65683bfe9c1b4a2e"/>
-    <p:sldLayoutId xmlns:r="http://schemas.openxmlformats.org/officeDocument/2006/relationships" id="2147483653" r:id="Rc0a2005a949d4ddf"/>
-    <p:sldLayoutId xmlns:r="http://schemas.openxmlformats.org/officeDocument/2006/relationships" id="2147483654" r:id="R70662eadec364069"/>
-    <p:sldLayoutId xmlns:r="http://schemas.openxmlformats.org/officeDocument/2006/relationships" id="2147483655" r:id="Ra5522b97e9114292"/>
-    <p:sldLayoutId xmlns:r="http://schemas.openxmlformats.org/officeDocument/2006/relationships" id="2147483656" r:id="Re8649ca1adac4ccb"/>
-    <p:sldLayoutId xmlns:r="http://schemas.openxmlformats.org/officeDocument/2006/relationships" id="2147483657" r:id="R9aade797eda84762"/>
-    <p:sldLayoutId xmlns:r="http://schemas.openxmlformats.org/officeDocument/2006/relationships" id="2147483658" r:id="R2c0eb25d80f6456e"/>
-    <p:sldLayoutId xmlns:r="http://schemas.openxmlformats.org/officeDocument/2006/relationships" id="2147483659" r:id="R4a0e5b49e2274946"/>
+    <p:sldLayoutId xmlns:r="http://schemas.openxmlformats.org/officeDocument/2006/relationships" id="2147483649" r:id="Rb46aecf6f46f4556"/>
+    <p:sldLayoutId xmlns:r="http://schemas.openxmlformats.org/officeDocument/2006/relationships" id="2147483650" r:id="R00de15d8d9f94493"/>
+    <p:sldLayoutId xmlns:r="http://schemas.openxmlformats.org/officeDocument/2006/relationships" id="2147483651" r:id="R29e866a1dc7f4632"/>
+    <p:sldLayoutId xmlns:r="http://schemas.openxmlformats.org/officeDocument/2006/relationships" id="2147483652" r:id="R0e8a02dc01e24a36"/>
+    <p:sldLayoutId xmlns:r="http://schemas.openxmlformats.org/officeDocument/2006/relationships" id="2147483653" r:id="Re8be0a355cc843a7"/>
+    <p:sldLayoutId xmlns:r="http://schemas.openxmlformats.org/officeDocument/2006/relationships" id="2147483654" r:id="Re8c05826782e4431"/>
+    <p:sldLayoutId xmlns:r="http://schemas.openxmlformats.org/officeDocument/2006/relationships" id="2147483655" r:id="Re30fe911c81a479e"/>
+    <p:sldLayoutId xmlns:r="http://schemas.openxmlformats.org/officeDocument/2006/relationships" id="2147483656" r:id="R0a526b2e2ed44065"/>
+    <p:sldLayoutId xmlns:r="http://schemas.openxmlformats.org/officeDocument/2006/relationships" id="2147483657" r:id="Rb5191e202da24889"/>
+    <p:sldLayoutId xmlns:r="http://schemas.openxmlformats.org/officeDocument/2006/relationships" id="2147483658" r:id="R0bafa29671f5427c"/>
+    <p:sldLayoutId xmlns:r="http://schemas.openxmlformats.org/officeDocument/2006/relationships" id="2147483659" r:id="R97a0a24d762545f6"/>
   </p:sldLayoutIdLst>
   <p:txStyles>
     <p:titleStyle>
@@ -4551,16 +4990,7 @@
               </a:rPr>
               <a:t>From patent to a lender-ready</a:t>
             </a:r>
-            <a:br>
-              <a:rPr sz="4000" b="1">
-                <a:solidFill>
-                  <a:srgbClr val="FFFFFF"/>
-                </a:solidFill>
-                <a:latin typeface="Aptos"/>
-                <a:ea typeface="Aptos"/>
-                <a:cs typeface="Aptos"/>
-              </a:rPr>
-            </a:br>
+            <a:br/>
             <a:r>
               <a:rPr sz="4000" b="1">
                 <a:solidFill>
@@ -4741,7 +5171,7 @@
         <p:spPr>
           <a:xfrm xmlns:a="http://schemas.openxmlformats.org/drawingml/2006/main">
             <a:off x="8732520" y="1700784"/>
-            <a:ext cx="2880360" cy="502920"/>
+            <a:ext cx="2880360" cy="515112"/>
           </a:xfrm>
           <a:prstGeom xmlns:a="http://schemas.openxmlformats.org/drawingml/2006/main" prst="rect">
             <a:avLst/>
@@ -4766,7 +5196,7 @@
                 <a:ea typeface="Aptos"/>
                 <a:cs typeface="Aptos"/>
               </a:rPr>
-              <a:t>2026.07.24-17</a:t>
+              <a:t>2026.07.24-18</a:t>
             </a:r>
           </a:p>
         </p:txBody>
@@ -4815,16 +5245,7 @@
               </a:rPr>
               <a:t>Updated 2026-07-24</a:t>
             </a:r>
-            <a:br>
-              <a:rPr sz="1700" b="0">
-                <a:solidFill>
-                  <a:srgbClr val="FFFFFF"/>
-                </a:solidFill>
-                <a:latin typeface="Aptos"/>
-                <a:ea typeface="Aptos"/>
-                <a:cs typeface="Aptos"/>
-              </a:rPr>
-            </a:br>
+            <a:br/>
             <a:r>
               <a:rPr sz="1700" b="0">
                 <a:solidFill>
@@ -5248,7 +5669,7 @@
                 <a:ea typeface="Aptos"/>
                 <a:cs typeface="Aptos"/>
               </a:rPr>
-              <a:t>Independent public evidence summary · 2026.07.24-17 · 2026-07-24 · Sources: EPO; Germany — official judgments; WIPO</a:t>
+              <a:t>Independent public evidence summary · 2026.07.24-18 · 2026-07-24 · Sources: EPO; Germany — official judgments; WIPO</a:t>
             </a:r>
           </a:p>
         </p:txBody>
@@ -5863,7 +6284,7 @@
                 <a:ea typeface="Aptos"/>
                 <a:cs typeface="Aptos"/>
               </a:rPr>
-              <a:t>Independent public evidence summary · 2026.07.24-17 · 2026-07-24 · Sources: EPO Register; EP3032975B2; 8 Ni 18/24 (EP); 7 O 3341/24</a:t>
+              <a:t>Independent public evidence summary · 2026.07.24-18 · 2026-07-24 · Sources: EPO Register; EP3032975B2; 8 Ni 18/24 (EP); 7 O 3341/24</a:t>
             </a:r>
           </a:p>
         </p:txBody>
@@ -6677,7 +7098,7 @@
                 <a:ea typeface="Aptos"/>
                 <a:cs typeface="Aptos"/>
               </a:rPr>
-              <a:t>The market evidence is transparent but not yet ready as a global value</a:t>
+              <a:t>Market evidence is transparent; a global value is not yet supported</a:t>
             </a:r>
           </a:p>
         </p:txBody>
@@ -6809,7 +7230,7 @@
         <p:spPr>
           <a:xfrm xmlns:a="http://schemas.openxmlformats.org/drawingml/2006/main">
             <a:off x="384048" y="6556248"/>
-            <a:ext cx="10835640" cy="202692"/>
+            <a:ext cx="10835640" cy="332232"/>
           </a:xfrm>
           <a:prstGeom xmlns:a="http://schemas.openxmlformats.org/drawingml/2006/main" prst="rect">
             <a:avLst/>
@@ -6834,7 +7255,7 @@
                 <a:ea typeface="Aptos"/>
                 <a:cs typeface="Aptos"/>
               </a:rPr>
-              <a:t>Independent public evidence summary · 2026.07.24-17 · 2026-07-24 · Sources: Health Canada; New Zealand Ministry of Health; Destatis; Vero; Sejm; Swedish Government; European Commission; IMARC; GVR; Fortune</a:t>
+              <a:t>Independent public evidence summary · 2026.07.24-18 · 2026-07-24 · Sources: Health Canada; New Zealand Ministry of Health; Destatis; Vero; Sejm; Swedish Government; FTC; European Commission; IMARC; GVR; Fortune</a:t>
             </a:r>
           </a:p>
         </p:txBody>
@@ -6985,7 +7406,7 @@
                 <a:ea typeface="Aptos"/>
                 <a:cs typeface="Aptos"/>
               </a:rPr>
-              <a:t>20</a:t>
+              <a:t>27</a:t>
             </a:r>
           </a:p>
         </p:txBody>
@@ -7032,7 +7453,7 @@
                 <a:ea typeface="Aptos"/>
                 <a:cs typeface="Aptos"/>
               </a:rPr>
-              <a:t>official annual observations from 6 countries</a:t>
+              <a:t>official annual observations from 7 countries</a:t>
             </a:r>
           </a:p>
         </p:txBody>
@@ -7136,7 +7557,7 @@
                 <a:ea typeface="Aptos"/>
                 <a:cs typeface="Aptos"/>
               </a:rPr>
-              <a:t>NZD 280.685m</a:t>
+              <a:t>NZD 533.7–731.2m</a:t>
             </a:r>
           </a:p>
         </p:txBody>
@@ -7183,7 +7604,7 @@
                 <a:ea typeface="Aptos"/>
                 <a:cs typeface="Aptos"/>
               </a:rPr>
-              <a:t>New Zealand 2024: raw sum from 29 files</a:t>
+              <a:t>≈EUR 298.5–408.9m · ECB 2024</a:t>
             </a:r>
           </a:p>
         </p:txBody>
@@ -7381,7 +7802,7 @@
                 <a:ea typeface="Aptos"/>
                 <a:cs typeface="Aptos"/>
               </a:rPr>
-              <a:t>4/4 candidates failed the D1–D10 protocol; the accepted-donor gate is 0/3.</a:t>
+              <a:t>5/5 candidates remain outside the D1–D10 gate; the accepted-donor count is 0/3.</a:t>
             </a:r>
           </a:p>
         </p:txBody>
@@ -7532,7 +7953,7 @@
                 <a:ea typeface="Aptos"/>
                 <a:cs typeface="Aptos"/>
               </a:rPr>
-              <a:t>New Zealand's raw sum reconciles to the official ≥NZD 280m headline. The NZD 264.561m sensitivity from removing exact repeated rows is not a corrected estimate; the identified-vaping raw sum is NZD 274.18m. The EU figure is a supported benchmark based on commercial Euromonitor 2025 data; Cyprus, Luxembourg and Malta are missing. The commercial USD 26.0–46.32bn range is only a reasonableness check; the measures are not summed.</a:t>
+              <a:t>NZ 2024: NZD 533.7–731.2m (≈EUR 298.5–408.9m; ECB 2024) is a supported model. FTC 2021: USD 2.763bn (≈EUR 2.336bn; ECB 2021) is manufacturer reporting. EU and commercial figures are not summed.</a:t>
             </a:r>
           </a:p>
         </p:txBody>
@@ -7805,7 +8226,7 @@
                 <a:ea typeface="Aptos"/>
                 <a:cs typeface="Aptos"/>
               </a:rPr>
-              <a:t>Independent public evidence summary · 2026.07.24-17 · 2026-07-24 · Sources: Evidence Register; WIPO IP valuation</a:t>
+              <a:t>Independent public evidence summary · 2026.07.24-18 · 2026-07-24 · Sources: Evidence Register; WIPO IP valuation</a:t>
             </a:r>
           </a:p>
         </p:txBody>
@@ -8628,7 +9049,7 @@
                 <a:ea typeface="Aptos"/>
                 <a:cs typeface="Aptos"/>
               </a:rPr>
-              <a:t>Version 2026.07.24-17 · 2026-07-24 · 6 / 6</a:t>
+              <a:t>Version 2026.07.24-18 · 2026-07-24 · 6 / 6</a:t>
             </a:r>
           </a:p>
         </p:txBody>

--- a/site/downloads/pixan-bank-deck-short-en.pptx
+++ b/site/downloads/pixan-bank-deck-short-en.pptx
@@ -2,18 +2,18 @@
 <file path=ppt/presentation.xml><?xml version="1.0" encoding="utf-8"?>
 <p:presentation xmlns:p="http://schemas.openxmlformats.org/presentationml/2006/main">
   <p:sldMasterIdLst>
-    <p:sldMasterId xmlns:r="http://schemas.openxmlformats.org/officeDocument/2006/relationships" id="2147483648" r:id="R51c26368e5414112"/>
+    <p:sldMasterId xmlns:r="http://schemas.openxmlformats.org/officeDocument/2006/relationships" id="2147483648" r:id="R36928a21a39943f7"/>
   </p:sldMasterIdLst>
   <p:notesMasterIdLst>
-    <p:notesMasterId xmlns:r="http://schemas.openxmlformats.org/officeDocument/2006/relationships" r:id="R15c09b6c451743fe"/>
+    <p:notesMasterId xmlns:r="http://schemas.openxmlformats.org/officeDocument/2006/relationships" r:id="Rc3c084b1ab794e55"/>
   </p:notesMasterIdLst>
   <p:sldIdLst>
-    <p:sldId xmlns:r="http://schemas.openxmlformats.org/officeDocument/2006/relationships" id="256" r:id="R6e0c6a35d7ab44f6"/>
-    <p:sldId xmlns:r="http://schemas.openxmlformats.org/officeDocument/2006/relationships" id="257" r:id="R8d100e46df544be4"/>
-    <p:sldId xmlns:r="http://schemas.openxmlformats.org/officeDocument/2006/relationships" id="258" r:id="Rae2b830180c14341"/>
-    <p:sldId xmlns:r="http://schemas.openxmlformats.org/officeDocument/2006/relationships" id="259" r:id="R03a9f1bde2424002"/>
-    <p:sldId xmlns:r="http://schemas.openxmlformats.org/officeDocument/2006/relationships" id="260" r:id="Re893b4caecda4a71"/>
-    <p:sldId xmlns:r="http://schemas.openxmlformats.org/officeDocument/2006/relationships" id="261" r:id="R5658988d93864406"/>
+    <p:sldId xmlns:r="http://schemas.openxmlformats.org/officeDocument/2006/relationships" id="256" r:id="Rfd265d81211f41b3"/>
+    <p:sldId xmlns:r="http://schemas.openxmlformats.org/officeDocument/2006/relationships" id="257" r:id="R786255e4b03f4537"/>
+    <p:sldId xmlns:r="http://schemas.openxmlformats.org/officeDocument/2006/relationships" id="258" r:id="R69b8cc683b564bb4"/>
+    <p:sldId xmlns:r="http://schemas.openxmlformats.org/officeDocument/2006/relationships" id="259" r:id="R4f593f4a5db84005"/>
+    <p:sldId xmlns:r="http://schemas.openxmlformats.org/officeDocument/2006/relationships" id="260" r:id="R9873610f346d4df1"/>
+    <p:sldId xmlns:r="http://schemas.openxmlformats.org/officeDocument/2006/relationships" id="261" r:id="R52dea29511d24e82"/>
   </p:sldIdLst>
   <p:sldSz cx="12191999" cy="6858000"/>
   <p:notesSz cx="6858000" cy="9144000"/>
@@ -500,6 +500,11 @@
           </a:p>
           <a:p xmlns:a="http://schemas.openxmlformats.org/drawingml/2006/main">
             <a:r>
+              <a:t>- https://www150.statcan.gc.ca/t1/tbl1/en/tv.action?pid=2010007101</a:t>
+            </a:r>
+          </a:p>
+          <a:p xmlns:a="http://schemas.openxmlformats.org/drawingml/2006/main">
+            <a:r>
               <a:t>- https://www.ftc.gov/reports/e-cigarette-report-2021</a:t>
             </a:r>
           </a:p>
@@ -530,6 +535,11 @@
           </a:p>
           <a:p xmlns:a="http://schemas.openxmlformats.org/drawingml/2006/main">
             <a:r>
+              <a:t>- https://data-api.ecb.europa.eu/service/data/EXR/A.CAD.EUR.SP00.A?startPeriod=2024&amp;endPeriod=2024&amp;format=csvdata</a:t>
+            </a:r>
+          </a:p>
+          <a:p xmlns:a="http://schemas.openxmlformats.org/drawingml/2006/main">
+            <a:r>
               <a:t/>
             </a:r>
           </a:p>
@@ -556,6 +566,11 @@
           <a:p xmlns:a="http://schemas.openxmlformats.org/drawingml/2006/main">
             <a:r>
               <a:t>- USD 2021: ECB-EXR-A-USD-EUR-SP00-A-2021 · 1.1827403100775 currency units per EUR</a:t>
+            </a:r>
+          </a:p>
+          <a:p xmlns:a="http://schemas.openxmlformats.org/drawingml/2006/main">
+            <a:r>
+              <a:t>- CAD 2024: ECB-EXR-A-CAD-EUR-SP00-A-2024 · 1.482110546875 currency units per EUR</a:t>
             </a:r>
           </a:p>
         </p:txBody>
@@ -655,6 +670,11 @@
           </a:p>
           <a:p xmlns:a="http://schemas.openxmlformats.org/drawingml/2006/main">
             <a:r>
+              <a:t>- https://www150.statcan.gc.ca/t1/tbl1/en/tv.action?pid=2010007101</a:t>
+            </a:r>
+          </a:p>
+          <a:p xmlns:a="http://schemas.openxmlformats.org/drawingml/2006/main">
+            <a:r>
               <a:t>- https://www.ftc.gov/reports/e-cigarette-report-2021</a:t>
             </a:r>
           </a:p>
@@ -685,6 +705,11 @@
           </a:p>
           <a:p xmlns:a="http://schemas.openxmlformats.org/drawingml/2006/main">
             <a:r>
+              <a:t>- https://data-api.ecb.europa.eu/service/data/EXR/A.CAD.EUR.SP00.A?startPeriod=2024&amp;endPeriod=2024&amp;format=csvdata</a:t>
+            </a:r>
+          </a:p>
+          <a:p xmlns:a="http://schemas.openxmlformats.org/drawingml/2006/main">
+            <a:r>
               <a:t/>
             </a:r>
           </a:p>
@@ -711,6 +736,11 @@
           <a:p xmlns:a="http://schemas.openxmlformats.org/drawingml/2006/main">
             <a:r>
               <a:t>- USD 2021: ECB-EXR-A-USD-EUR-SP00-A-2021 · 1.1827403100775 currency units per EUR</a:t>
+            </a:r>
+          </a:p>
+          <a:p xmlns:a="http://schemas.openxmlformats.org/drawingml/2006/main">
+            <a:r>
+              <a:t>- CAD 2024: ECB-EXR-A-CAD-EUR-SP00-A-2024 · 1.482110546875 currency units per EUR</a:t>
             </a:r>
           </a:p>
         </p:txBody>
@@ -810,6 +840,11 @@
           </a:p>
           <a:p xmlns:a="http://schemas.openxmlformats.org/drawingml/2006/main">
             <a:r>
+              <a:t>- https://www150.statcan.gc.ca/t1/tbl1/en/tv.action?pid=2010007101</a:t>
+            </a:r>
+          </a:p>
+          <a:p xmlns:a="http://schemas.openxmlformats.org/drawingml/2006/main">
+            <a:r>
               <a:t>- https://www.ftc.gov/reports/e-cigarette-report-2021</a:t>
             </a:r>
           </a:p>
@@ -840,6 +875,11 @@
           </a:p>
           <a:p xmlns:a="http://schemas.openxmlformats.org/drawingml/2006/main">
             <a:r>
+              <a:t>- https://data-api.ecb.europa.eu/service/data/EXR/A.CAD.EUR.SP00.A?startPeriod=2024&amp;endPeriod=2024&amp;format=csvdata</a:t>
+            </a:r>
+          </a:p>
+          <a:p xmlns:a="http://schemas.openxmlformats.org/drawingml/2006/main">
+            <a:r>
               <a:t/>
             </a:r>
           </a:p>
@@ -866,6 +906,11 @@
           <a:p xmlns:a="http://schemas.openxmlformats.org/drawingml/2006/main">
             <a:r>
               <a:t>- USD 2021: ECB-EXR-A-USD-EUR-SP00-A-2021 · 1.1827403100775 currency units per EUR</a:t>
+            </a:r>
+          </a:p>
+          <a:p xmlns:a="http://schemas.openxmlformats.org/drawingml/2006/main">
+            <a:r>
+              <a:t>- CAD 2024: ECB-EXR-A-CAD-EUR-SP00-A-2024 · 1.482110546875 currency units per EUR</a:t>
             </a:r>
           </a:p>
         </p:txBody>
@@ -965,6 +1010,11 @@
           </a:p>
           <a:p xmlns:a="http://schemas.openxmlformats.org/drawingml/2006/main">
             <a:r>
+              <a:t>- https://www150.statcan.gc.ca/t1/tbl1/en/tv.action?pid=2010007101</a:t>
+            </a:r>
+          </a:p>
+          <a:p xmlns:a="http://schemas.openxmlformats.org/drawingml/2006/main">
+            <a:r>
               <a:t>- https://www.ftc.gov/reports/e-cigarette-report-2021</a:t>
             </a:r>
           </a:p>
@@ -995,6 +1045,11 @@
           </a:p>
           <a:p xmlns:a="http://schemas.openxmlformats.org/drawingml/2006/main">
             <a:r>
+              <a:t>- https://data-api.ecb.europa.eu/service/data/EXR/A.CAD.EUR.SP00.A?startPeriod=2024&amp;endPeriod=2024&amp;format=csvdata</a:t>
+            </a:r>
+          </a:p>
+          <a:p xmlns:a="http://schemas.openxmlformats.org/drawingml/2006/main">
+            <a:r>
               <a:t/>
             </a:r>
           </a:p>
@@ -1021,6 +1076,11 @@
           <a:p xmlns:a="http://schemas.openxmlformats.org/drawingml/2006/main">
             <a:r>
               <a:t>- USD 2021: ECB-EXR-A-USD-EUR-SP00-A-2021 · 1.1827403100775 currency units per EUR</a:t>
+            </a:r>
+          </a:p>
+          <a:p xmlns:a="http://schemas.openxmlformats.org/drawingml/2006/main">
+            <a:r>
+              <a:t>- CAD 2024: ECB-EXR-A-CAD-EUR-SP00-A-2024 · 1.482110546875 currency units per EUR</a:t>
             </a:r>
           </a:p>
         </p:txBody>
@@ -1120,6 +1180,11 @@
           </a:p>
           <a:p xmlns:a="http://schemas.openxmlformats.org/drawingml/2006/main">
             <a:r>
+              <a:t>- https://www150.statcan.gc.ca/t1/tbl1/en/tv.action?pid=2010007101</a:t>
+            </a:r>
+          </a:p>
+          <a:p xmlns:a="http://schemas.openxmlformats.org/drawingml/2006/main">
+            <a:r>
               <a:t>- https://www.ftc.gov/reports/e-cigarette-report-2021</a:t>
             </a:r>
           </a:p>
@@ -1150,6 +1215,11 @@
           </a:p>
           <a:p xmlns:a="http://schemas.openxmlformats.org/drawingml/2006/main">
             <a:r>
+              <a:t>- https://data-api.ecb.europa.eu/service/data/EXR/A.CAD.EUR.SP00.A?startPeriod=2024&amp;endPeriod=2024&amp;format=csvdata</a:t>
+            </a:r>
+          </a:p>
+          <a:p xmlns:a="http://schemas.openxmlformats.org/drawingml/2006/main">
+            <a:r>
               <a:t/>
             </a:r>
           </a:p>
@@ -1176,6 +1246,11 @@
           <a:p xmlns:a="http://schemas.openxmlformats.org/drawingml/2006/main">
             <a:r>
               <a:t>- USD 2021: ECB-EXR-A-USD-EUR-SP00-A-2021 · 1.1827403100775 currency units per EUR</a:t>
+            </a:r>
+          </a:p>
+          <a:p xmlns:a="http://schemas.openxmlformats.org/drawingml/2006/main">
+            <a:r>
+              <a:t>- CAD 2024: ECB-EXR-A-CAD-EUR-SP00-A-2024 · 1.482110546875 currency units per EUR</a:t>
             </a:r>
           </a:p>
         </p:txBody>
@@ -1275,6 +1350,11 @@
           </a:p>
           <a:p xmlns:a="http://schemas.openxmlformats.org/drawingml/2006/main">
             <a:r>
+              <a:t>- https://www150.statcan.gc.ca/t1/tbl1/en/tv.action?pid=2010007101</a:t>
+            </a:r>
+          </a:p>
+          <a:p xmlns:a="http://schemas.openxmlformats.org/drawingml/2006/main">
+            <a:r>
               <a:t>- https://www.ftc.gov/reports/e-cigarette-report-2021</a:t>
             </a:r>
           </a:p>
@@ -1305,6 +1385,11 @@
           </a:p>
           <a:p xmlns:a="http://schemas.openxmlformats.org/drawingml/2006/main">
             <a:r>
+              <a:t>- https://data-api.ecb.europa.eu/service/data/EXR/A.CAD.EUR.SP00.A?startPeriod=2024&amp;endPeriod=2024&amp;format=csvdata</a:t>
+            </a:r>
+          </a:p>
+          <a:p xmlns:a="http://schemas.openxmlformats.org/drawingml/2006/main">
+            <a:r>
               <a:t/>
             </a:r>
           </a:p>
@@ -1331,6 +1416,11 @@
           <a:p xmlns:a="http://schemas.openxmlformats.org/drawingml/2006/main">
             <a:r>
               <a:t>- USD 2021: ECB-EXR-A-USD-EUR-SP00-A-2021 · 1.1827403100775 currency units per EUR</a:t>
+            </a:r>
+          </a:p>
+          <a:p xmlns:a="http://schemas.openxmlformats.org/drawingml/2006/main">
+            <a:r>
+              <a:t>- CAD 2024: ECB-EXR-A-CAD-EUR-SP00-A-2024 · 1.482110546875 currency units per EUR</a:t>
             </a:r>
           </a:p>
         </p:txBody>
@@ -4286,17 +4376,17 @@
   </p:cSld>
   <p:clrMap bg1="lt1" tx1="dk1" bg2="lt2" tx2="dk2" accent1="accent1" accent2="accent2" accent3="accent3" accent4="accent4" accent5="accent5" accent6="accent6" hlink="hlink" folHlink="folHlink"/>
   <p:sldLayoutIdLst>
-    <p:sldLayoutId xmlns:r="http://schemas.openxmlformats.org/officeDocument/2006/relationships" id="2147483649" r:id="Rb46aecf6f46f4556"/>
-    <p:sldLayoutId xmlns:r="http://schemas.openxmlformats.org/officeDocument/2006/relationships" id="2147483650" r:id="R00de15d8d9f94493"/>
-    <p:sldLayoutId xmlns:r="http://schemas.openxmlformats.org/officeDocument/2006/relationships" id="2147483651" r:id="R29e866a1dc7f4632"/>
-    <p:sldLayoutId xmlns:r="http://schemas.openxmlformats.org/officeDocument/2006/relationships" id="2147483652" r:id="R0e8a02dc01e24a36"/>
-    <p:sldLayoutId xmlns:r="http://schemas.openxmlformats.org/officeDocument/2006/relationships" id="2147483653" r:id="Re8be0a355cc843a7"/>
-    <p:sldLayoutId xmlns:r="http://schemas.openxmlformats.org/officeDocument/2006/relationships" id="2147483654" r:id="Re8c05826782e4431"/>
-    <p:sldLayoutId xmlns:r="http://schemas.openxmlformats.org/officeDocument/2006/relationships" id="2147483655" r:id="Re30fe911c81a479e"/>
-    <p:sldLayoutId xmlns:r="http://schemas.openxmlformats.org/officeDocument/2006/relationships" id="2147483656" r:id="R0a526b2e2ed44065"/>
-    <p:sldLayoutId xmlns:r="http://schemas.openxmlformats.org/officeDocument/2006/relationships" id="2147483657" r:id="Rb5191e202da24889"/>
-    <p:sldLayoutId xmlns:r="http://schemas.openxmlformats.org/officeDocument/2006/relationships" id="2147483658" r:id="R0bafa29671f5427c"/>
-    <p:sldLayoutId xmlns:r="http://schemas.openxmlformats.org/officeDocument/2006/relationships" id="2147483659" r:id="R97a0a24d762545f6"/>
+    <p:sldLayoutId xmlns:r="http://schemas.openxmlformats.org/officeDocument/2006/relationships" id="2147483649" r:id="Raafdcd0b68384ae4"/>
+    <p:sldLayoutId xmlns:r="http://schemas.openxmlformats.org/officeDocument/2006/relationships" id="2147483650" r:id="R038840c2ff444a07"/>
+    <p:sldLayoutId xmlns:r="http://schemas.openxmlformats.org/officeDocument/2006/relationships" id="2147483651" r:id="R5df0427eec12428d"/>
+    <p:sldLayoutId xmlns:r="http://schemas.openxmlformats.org/officeDocument/2006/relationships" id="2147483652" r:id="Rcdd40b6f59a94e56"/>
+    <p:sldLayoutId xmlns:r="http://schemas.openxmlformats.org/officeDocument/2006/relationships" id="2147483653" r:id="Rfcc1c77559ac4a2e"/>
+    <p:sldLayoutId xmlns:r="http://schemas.openxmlformats.org/officeDocument/2006/relationships" id="2147483654" r:id="R362f8fed9ccb4e12"/>
+    <p:sldLayoutId xmlns:r="http://schemas.openxmlformats.org/officeDocument/2006/relationships" id="2147483655" r:id="Reda8ce3839844aa1"/>
+    <p:sldLayoutId xmlns:r="http://schemas.openxmlformats.org/officeDocument/2006/relationships" id="2147483656" r:id="R687786c1b34e49c8"/>
+    <p:sldLayoutId xmlns:r="http://schemas.openxmlformats.org/officeDocument/2006/relationships" id="2147483657" r:id="R64c99990b0c04a88"/>
+    <p:sldLayoutId xmlns:r="http://schemas.openxmlformats.org/officeDocument/2006/relationships" id="2147483658" r:id="Rab89816a4ad046b9"/>
+    <p:sldLayoutId xmlns:r="http://schemas.openxmlformats.org/officeDocument/2006/relationships" id="2147483659" r:id="R0116e7b323264189"/>
   </p:sldLayoutIdLst>
   <p:txStyles>
     <p:titleStyle>
@@ -5196,7 +5286,7 @@
                 <a:ea typeface="Aptos"/>
                 <a:cs typeface="Aptos"/>
               </a:rPr>
-              <a:t>2026.07.24-18</a:t>
+              <a:t>2026.07.24-19</a:t>
             </a:r>
           </a:p>
         </p:txBody>
@@ -5669,7 +5759,7 @@
                 <a:ea typeface="Aptos"/>
                 <a:cs typeface="Aptos"/>
               </a:rPr>
-              <a:t>Independent public evidence summary · 2026.07.24-18 · 2026-07-24 · Sources: EPO; Germany — official judgments; WIPO</a:t>
+              <a:t>Independent public evidence summary · 2026.07.24-19 · 2026-07-24 · Sources: EPO; Germany — official judgments; WIPO</a:t>
             </a:r>
           </a:p>
         </p:txBody>
@@ -6284,7 +6374,7 @@
                 <a:ea typeface="Aptos"/>
                 <a:cs typeface="Aptos"/>
               </a:rPr>
-              <a:t>Independent public evidence summary · 2026.07.24-18 · 2026-07-24 · Sources: EPO Register; EP3032975B2; 8 Ni 18/24 (EP); 7 O 3341/24</a:t>
+              <a:t>Independent public evidence summary · 2026.07.24-19 · 2026-07-24 · Sources: EPO Register; EP3032975B2; 8 Ni 18/24 (EP); 7 O 3341/24</a:t>
             </a:r>
           </a:p>
         </p:txBody>
@@ -7255,7 +7345,7 @@
                 <a:ea typeface="Aptos"/>
                 <a:cs typeface="Aptos"/>
               </a:rPr>
-              <a:t>Independent public evidence summary · 2026.07.24-18 · 2026-07-24 · Sources: Health Canada; New Zealand Ministry of Health; Destatis; Vero; Sejm; Swedish Government; FTC; European Commission; IMARC; GVR; Fortune</a:t>
+              <a:t>Independent public evidence summary · 2026.07.24-19 · 2026-07-24 · Sources: Statistics Canada; Health Canada; New Zealand Ministry of Health; Destatis; Vero; Sejm; Swedish Government; FTC; European Commission; IMARC; GVR; Fortune</a:t>
             </a:r>
           </a:p>
         </p:txBody>
@@ -7406,7 +7496,7 @@
                 <a:ea typeface="Aptos"/>
                 <a:cs typeface="Aptos"/>
               </a:rPr>
-              <a:t>27</a:t>
+              <a:t>34</a:t>
             </a:r>
           </a:p>
         </p:txBody>
@@ -7945,7 +8035,7 @@
               <a:buNone/>
             </a:pPr>
             <a:r>
-              <a:rPr sz="1500" b="0">
+              <a:rPr sz="1350" b="0">
                 <a:solidFill>
                   <a:srgbClr val="182935"/>
                 </a:solidFill>
@@ -7953,7 +8043,7 @@
                 <a:ea typeface="Aptos"/>
                 <a:cs typeface="Aptos"/>
               </a:rPr>
-              <a:t>NZ 2024: NZD 533.7–731.2m (≈EUR 298.5–408.9m; ECB 2024) is a supported model. FTC 2021: USD 2.763bn (≈EUR 2.336bn; ECB 2021) is manufacturer reporting. EU and commercial figures are not summed.</a:t>
+              <a:t>Canada 2024: retail CAD 1.219bn (≈EUR 822.6m; ECB 2024); shipments CAD 1.161bn (≈EUR 783.2m; ECB 2024); all retail quarters quality E. NZ is a model; FTC 2021 USD 2.763bn (≈EUR 2.336bn; ECB 2021) is manufacturer reporting. Do not sum the measures.</a:t>
             </a:r>
           </a:p>
         </p:txBody>
@@ -8226,7 +8316,7 @@
                 <a:ea typeface="Aptos"/>
                 <a:cs typeface="Aptos"/>
               </a:rPr>
-              <a:t>Independent public evidence summary · 2026.07.24-18 · 2026-07-24 · Sources: Evidence Register; WIPO IP valuation</a:t>
+              <a:t>Independent public evidence summary · 2026.07.24-19 · 2026-07-24 · Sources: Evidence Register; WIPO IP valuation</a:t>
             </a:r>
           </a:p>
         </p:txBody>
@@ -9049,7 +9139,7 @@
                 <a:ea typeface="Aptos"/>
                 <a:cs typeface="Aptos"/>
               </a:rPr>
-              <a:t>Version 2026.07.24-18 · 2026-07-24 · 6 / 6</a:t>
+              <a:t>Version 2026.07.24-19 · 2026-07-24 · 6 / 6</a:t>
             </a:r>
           </a:p>
         </p:txBody>

--- a/site/downloads/pixan-bank-deck-short-en.pptx
+++ b/site/downloads/pixan-bank-deck-short-en.pptx
@@ -2,18 +2,18 @@
 <file path=ppt/presentation.xml><?xml version="1.0" encoding="utf-8"?>
 <p:presentation xmlns:p="http://schemas.openxmlformats.org/presentationml/2006/main">
   <p:sldMasterIdLst>
-    <p:sldMasterId xmlns:r="http://schemas.openxmlformats.org/officeDocument/2006/relationships" id="2147483648" r:id="R36928a21a39943f7"/>
+    <p:sldMasterId xmlns:r="http://schemas.openxmlformats.org/officeDocument/2006/relationships" id="2147483648" r:id="Ra07d029308dc4531"/>
   </p:sldMasterIdLst>
   <p:notesMasterIdLst>
-    <p:notesMasterId xmlns:r="http://schemas.openxmlformats.org/officeDocument/2006/relationships" r:id="Rc3c084b1ab794e55"/>
+    <p:notesMasterId xmlns:r="http://schemas.openxmlformats.org/officeDocument/2006/relationships" r:id="Raba9290fa25f4014"/>
   </p:notesMasterIdLst>
   <p:sldIdLst>
-    <p:sldId xmlns:r="http://schemas.openxmlformats.org/officeDocument/2006/relationships" id="256" r:id="Rfd265d81211f41b3"/>
-    <p:sldId xmlns:r="http://schemas.openxmlformats.org/officeDocument/2006/relationships" id="257" r:id="R786255e4b03f4537"/>
-    <p:sldId xmlns:r="http://schemas.openxmlformats.org/officeDocument/2006/relationships" id="258" r:id="R69b8cc683b564bb4"/>
-    <p:sldId xmlns:r="http://schemas.openxmlformats.org/officeDocument/2006/relationships" id="259" r:id="R4f593f4a5db84005"/>
-    <p:sldId xmlns:r="http://schemas.openxmlformats.org/officeDocument/2006/relationships" id="260" r:id="R9873610f346d4df1"/>
-    <p:sldId xmlns:r="http://schemas.openxmlformats.org/officeDocument/2006/relationships" id="261" r:id="R52dea29511d24e82"/>
+    <p:sldId xmlns:r="http://schemas.openxmlformats.org/officeDocument/2006/relationships" id="256" r:id="R5200e1bf9c004948"/>
+    <p:sldId xmlns:r="http://schemas.openxmlformats.org/officeDocument/2006/relationships" id="257" r:id="R64b57ff56a914fad"/>
+    <p:sldId xmlns:r="http://schemas.openxmlformats.org/officeDocument/2006/relationships" id="258" r:id="R94e287d09ce045fa"/>
+    <p:sldId xmlns:r="http://schemas.openxmlformats.org/officeDocument/2006/relationships" id="259" r:id="R235817fa29884617"/>
+    <p:sldId xmlns:r="http://schemas.openxmlformats.org/officeDocument/2006/relationships" id="260" r:id="R12b04fcc1ca24eb8"/>
+    <p:sldId xmlns:r="http://schemas.openxmlformats.org/officeDocument/2006/relationships" id="261" r:id="Rbd47b359d4f946ea"/>
   </p:sldIdLst>
   <p:sldSz cx="12191999" cy="6858000"/>
   <p:notesSz cx="6858000" cy="9144000"/>
@@ -4376,17 +4376,17 @@
   </p:cSld>
   <p:clrMap bg1="lt1" tx1="dk1" bg2="lt2" tx2="dk2" accent1="accent1" accent2="accent2" accent3="accent3" accent4="accent4" accent5="accent5" accent6="accent6" hlink="hlink" folHlink="folHlink"/>
   <p:sldLayoutIdLst>
-    <p:sldLayoutId xmlns:r="http://schemas.openxmlformats.org/officeDocument/2006/relationships" id="2147483649" r:id="Raafdcd0b68384ae4"/>
-    <p:sldLayoutId xmlns:r="http://schemas.openxmlformats.org/officeDocument/2006/relationships" id="2147483650" r:id="R038840c2ff444a07"/>
-    <p:sldLayoutId xmlns:r="http://schemas.openxmlformats.org/officeDocument/2006/relationships" id="2147483651" r:id="R5df0427eec12428d"/>
-    <p:sldLayoutId xmlns:r="http://schemas.openxmlformats.org/officeDocument/2006/relationships" id="2147483652" r:id="Rcdd40b6f59a94e56"/>
-    <p:sldLayoutId xmlns:r="http://schemas.openxmlformats.org/officeDocument/2006/relationships" id="2147483653" r:id="Rfcc1c77559ac4a2e"/>
-    <p:sldLayoutId xmlns:r="http://schemas.openxmlformats.org/officeDocument/2006/relationships" id="2147483654" r:id="R362f8fed9ccb4e12"/>
-    <p:sldLayoutId xmlns:r="http://schemas.openxmlformats.org/officeDocument/2006/relationships" id="2147483655" r:id="Reda8ce3839844aa1"/>
-    <p:sldLayoutId xmlns:r="http://schemas.openxmlformats.org/officeDocument/2006/relationships" id="2147483656" r:id="R687786c1b34e49c8"/>
-    <p:sldLayoutId xmlns:r="http://schemas.openxmlformats.org/officeDocument/2006/relationships" id="2147483657" r:id="R64c99990b0c04a88"/>
-    <p:sldLayoutId xmlns:r="http://schemas.openxmlformats.org/officeDocument/2006/relationships" id="2147483658" r:id="Rab89816a4ad046b9"/>
-    <p:sldLayoutId xmlns:r="http://schemas.openxmlformats.org/officeDocument/2006/relationships" id="2147483659" r:id="R0116e7b323264189"/>
+    <p:sldLayoutId xmlns:r="http://schemas.openxmlformats.org/officeDocument/2006/relationships" id="2147483649" r:id="R95d6a459f9a84c0e"/>
+    <p:sldLayoutId xmlns:r="http://schemas.openxmlformats.org/officeDocument/2006/relationships" id="2147483650" r:id="Rd865d9912f9a4b6c"/>
+    <p:sldLayoutId xmlns:r="http://schemas.openxmlformats.org/officeDocument/2006/relationships" id="2147483651" r:id="Rcb04673f684d417e"/>
+    <p:sldLayoutId xmlns:r="http://schemas.openxmlformats.org/officeDocument/2006/relationships" id="2147483652" r:id="R104ad2566533440a"/>
+    <p:sldLayoutId xmlns:r="http://schemas.openxmlformats.org/officeDocument/2006/relationships" id="2147483653" r:id="Rf497053c839641ab"/>
+    <p:sldLayoutId xmlns:r="http://schemas.openxmlformats.org/officeDocument/2006/relationships" id="2147483654" r:id="R432940508e314399"/>
+    <p:sldLayoutId xmlns:r="http://schemas.openxmlformats.org/officeDocument/2006/relationships" id="2147483655" r:id="Rc513b937566f430f"/>
+    <p:sldLayoutId xmlns:r="http://schemas.openxmlformats.org/officeDocument/2006/relationships" id="2147483656" r:id="R031aea603b754d92"/>
+    <p:sldLayoutId xmlns:r="http://schemas.openxmlformats.org/officeDocument/2006/relationships" id="2147483657" r:id="Rc77d950703cb4955"/>
+    <p:sldLayoutId xmlns:r="http://schemas.openxmlformats.org/officeDocument/2006/relationships" id="2147483658" r:id="R8809574657ba42b7"/>
+    <p:sldLayoutId xmlns:r="http://schemas.openxmlformats.org/officeDocument/2006/relationships" id="2147483659" r:id="R0748f4376f8f4026"/>
   </p:sldLayoutIdLst>
   <p:txStyles>
     <p:titleStyle>
@@ -5286,7 +5286,7 @@
                 <a:ea typeface="Aptos"/>
                 <a:cs typeface="Aptos"/>
               </a:rPr>
-              <a:t>2026.07.24-19</a:t>
+              <a:t>2026.07.24-20</a:t>
             </a:r>
           </a:p>
         </p:txBody>
@@ -5759,7 +5759,7 @@
                 <a:ea typeface="Aptos"/>
                 <a:cs typeface="Aptos"/>
               </a:rPr>
-              <a:t>Independent public evidence summary · 2026.07.24-19 · 2026-07-24 · Sources: EPO; Germany — official judgments; WIPO</a:t>
+              <a:t>Independent public evidence summary · 2026.07.24-20 · 2026-07-24 · Sources: EPO; Germany — official judgments; WIPO</a:t>
             </a:r>
           </a:p>
         </p:txBody>
@@ -6374,7 +6374,7 @@
                 <a:ea typeface="Aptos"/>
                 <a:cs typeface="Aptos"/>
               </a:rPr>
-              <a:t>Independent public evidence summary · 2026.07.24-19 · 2026-07-24 · Sources: EPO Register; EP3032975B2; 8 Ni 18/24 (EP); 7 O 3341/24</a:t>
+              <a:t>Independent public evidence summary · 2026.07.24-20 · 2026-07-24 · Sources: EPO Register; EP3032975B2; 8 Ni 18/24 (EP); 7 O 3341/24</a:t>
             </a:r>
           </a:p>
         </p:txBody>
@@ -7345,7 +7345,7 @@
                 <a:ea typeface="Aptos"/>
                 <a:cs typeface="Aptos"/>
               </a:rPr>
-              <a:t>Independent public evidence summary · 2026.07.24-19 · 2026-07-24 · Sources: Statistics Canada; Health Canada; New Zealand Ministry of Health; Destatis; Vero; Sejm; Swedish Government; FTC; European Commission; IMARC; GVR; Fortune</a:t>
+              <a:t>Independent public evidence summary · 2026.07.24-20 · 2026-07-24 · Sources: Statistics Canada; Health Canada; New Zealand Ministry of Health; Destatis; Vero; Sejm; Swedish Government; FTC; European Commission; IMARC; GVR; Fortune</a:t>
             </a:r>
           </a:p>
         </p:txBody>
@@ -8316,7 +8316,7 @@
                 <a:ea typeface="Aptos"/>
                 <a:cs typeface="Aptos"/>
               </a:rPr>
-              <a:t>Independent public evidence summary · 2026.07.24-19 · 2026-07-24 · Sources: Evidence Register; WIPO IP valuation</a:t>
+              <a:t>Independent public evidence summary · 2026.07.24-20 · 2026-07-24 · Sources: Evidence Register; WIPO IP valuation</a:t>
             </a:r>
           </a:p>
         </p:txBody>
@@ -9139,7 +9139,7 @@
                 <a:ea typeface="Aptos"/>
                 <a:cs typeface="Aptos"/>
               </a:rPr>
-              <a:t>Version 2026.07.24-19 · 2026-07-24 · 6 / 6</a:t>
+              <a:t>Version 2026.07.24-20 · 2026-07-24 · 6 / 6</a:t>
             </a:r>
           </a:p>
         </p:txBody>

--- a/site/downloads/pixan-bank-deck-short-en.pptx
+++ b/site/downloads/pixan-bank-deck-short-en.pptx
@@ -2,18 +2,18 @@
 <file path=ppt/presentation.xml><?xml version="1.0" encoding="utf-8"?>
 <p:presentation xmlns:p="http://schemas.openxmlformats.org/presentationml/2006/main">
   <p:sldMasterIdLst>
-    <p:sldMasterId xmlns:r="http://schemas.openxmlformats.org/officeDocument/2006/relationships" id="2147483648" r:id="Ra07d029308dc4531"/>
+    <p:sldMasterId xmlns:r="http://schemas.openxmlformats.org/officeDocument/2006/relationships" id="2147483648" r:id="R519b73e4f69c4f26"/>
   </p:sldMasterIdLst>
   <p:notesMasterIdLst>
-    <p:notesMasterId xmlns:r="http://schemas.openxmlformats.org/officeDocument/2006/relationships" r:id="Raba9290fa25f4014"/>
+    <p:notesMasterId xmlns:r="http://schemas.openxmlformats.org/officeDocument/2006/relationships" r:id="R25b6a1faf6124431"/>
   </p:notesMasterIdLst>
   <p:sldIdLst>
-    <p:sldId xmlns:r="http://schemas.openxmlformats.org/officeDocument/2006/relationships" id="256" r:id="R5200e1bf9c004948"/>
-    <p:sldId xmlns:r="http://schemas.openxmlformats.org/officeDocument/2006/relationships" id="257" r:id="R64b57ff56a914fad"/>
-    <p:sldId xmlns:r="http://schemas.openxmlformats.org/officeDocument/2006/relationships" id="258" r:id="R94e287d09ce045fa"/>
-    <p:sldId xmlns:r="http://schemas.openxmlformats.org/officeDocument/2006/relationships" id="259" r:id="R235817fa29884617"/>
-    <p:sldId xmlns:r="http://schemas.openxmlformats.org/officeDocument/2006/relationships" id="260" r:id="R12b04fcc1ca24eb8"/>
-    <p:sldId xmlns:r="http://schemas.openxmlformats.org/officeDocument/2006/relationships" id="261" r:id="Rbd47b359d4f946ea"/>
+    <p:sldId xmlns:r="http://schemas.openxmlformats.org/officeDocument/2006/relationships" id="256" r:id="Rf4a8e977625a4b4b"/>
+    <p:sldId xmlns:r="http://schemas.openxmlformats.org/officeDocument/2006/relationships" id="257" r:id="Rd08a0ff037ab42dc"/>
+    <p:sldId xmlns:r="http://schemas.openxmlformats.org/officeDocument/2006/relationships" id="258" r:id="R947b1f025d384f41"/>
+    <p:sldId xmlns:r="http://schemas.openxmlformats.org/officeDocument/2006/relationships" id="259" r:id="R342bc96687324bb7"/>
+    <p:sldId xmlns:r="http://schemas.openxmlformats.org/officeDocument/2006/relationships" id="260" r:id="R26d56cf9506f4bdf"/>
+    <p:sldId xmlns:r="http://schemas.openxmlformats.org/officeDocument/2006/relationships" id="261" r:id="R41c937515f8649c3"/>
   </p:sldIdLst>
   <p:sldSz cx="12191999" cy="6858000"/>
   <p:notesSz cx="6858000" cy="9144000"/>
@@ -4376,17 +4376,17 @@
   </p:cSld>
   <p:clrMap bg1="lt1" tx1="dk1" bg2="lt2" tx2="dk2" accent1="accent1" accent2="accent2" accent3="accent3" accent4="accent4" accent5="accent5" accent6="accent6" hlink="hlink" folHlink="folHlink"/>
   <p:sldLayoutIdLst>
-    <p:sldLayoutId xmlns:r="http://schemas.openxmlformats.org/officeDocument/2006/relationships" id="2147483649" r:id="R95d6a459f9a84c0e"/>
-    <p:sldLayoutId xmlns:r="http://schemas.openxmlformats.org/officeDocument/2006/relationships" id="2147483650" r:id="Rd865d9912f9a4b6c"/>
-    <p:sldLayoutId xmlns:r="http://schemas.openxmlformats.org/officeDocument/2006/relationships" id="2147483651" r:id="Rcb04673f684d417e"/>
-    <p:sldLayoutId xmlns:r="http://schemas.openxmlformats.org/officeDocument/2006/relationships" id="2147483652" r:id="R104ad2566533440a"/>
-    <p:sldLayoutId xmlns:r="http://schemas.openxmlformats.org/officeDocument/2006/relationships" id="2147483653" r:id="Rf497053c839641ab"/>
-    <p:sldLayoutId xmlns:r="http://schemas.openxmlformats.org/officeDocument/2006/relationships" id="2147483654" r:id="R432940508e314399"/>
-    <p:sldLayoutId xmlns:r="http://schemas.openxmlformats.org/officeDocument/2006/relationships" id="2147483655" r:id="Rc513b937566f430f"/>
-    <p:sldLayoutId xmlns:r="http://schemas.openxmlformats.org/officeDocument/2006/relationships" id="2147483656" r:id="R031aea603b754d92"/>
-    <p:sldLayoutId xmlns:r="http://schemas.openxmlformats.org/officeDocument/2006/relationships" id="2147483657" r:id="Rc77d950703cb4955"/>
-    <p:sldLayoutId xmlns:r="http://schemas.openxmlformats.org/officeDocument/2006/relationships" id="2147483658" r:id="R8809574657ba42b7"/>
-    <p:sldLayoutId xmlns:r="http://schemas.openxmlformats.org/officeDocument/2006/relationships" id="2147483659" r:id="R0748f4376f8f4026"/>
+    <p:sldLayoutId xmlns:r="http://schemas.openxmlformats.org/officeDocument/2006/relationships" id="2147483649" r:id="Rcff9ac45755e4f1d"/>
+    <p:sldLayoutId xmlns:r="http://schemas.openxmlformats.org/officeDocument/2006/relationships" id="2147483650" r:id="R10915c2a052c48b9"/>
+    <p:sldLayoutId xmlns:r="http://schemas.openxmlformats.org/officeDocument/2006/relationships" id="2147483651" r:id="R35d32141869943ee"/>
+    <p:sldLayoutId xmlns:r="http://schemas.openxmlformats.org/officeDocument/2006/relationships" id="2147483652" r:id="R42bd8df1285144b5"/>
+    <p:sldLayoutId xmlns:r="http://schemas.openxmlformats.org/officeDocument/2006/relationships" id="2147483653" r:id="R34e778aec9d74e4a"/>
+    <p:sldLayoutId xmlns:r="http://schemas.openxmlformats.org/officeDocument/2006/relationships" id="2147483654" r:id="Rc492214964e1439f"/>
+    <p:sldLayoutId xmlns:r="http://schemas.openxmlformats.org/officeDocument/2006/relationships" id="2147483655" r:id="Rc4e86a19bf6842d3"/>
+    <p:sldLayoutId xmlns:r="http://schemas.openxmlformats.org/officeDocument/2006/relationships" id="2147483656" r:id="R9f176303b50a46d7"/>
+    <p:sldLayoutId xmlns:r="http://schemas.openxmlformats.org/officeDocument/2006/relationships" id="2147483657" r:id="Rbcfb4e4dcf7a477a"/>
+    <p:sldLayoutId xmlns:r="http://schemas.openxmlformats.org/officeDocument/2006/relationships" id="2147483658" r:id="R3f4d8f570124411e"/>
+    <p:sldLayoutId xmlns:r="http://schemas.openxmlformats.org/officeDocument/2006/relationships" id="2147483659" r:id="Raeff86f97c444c63"/>
   </p:sldLayoutIdLst>
   <p:txStyles>
     <p:titleStyle>
@@ -5286,7 +5286,7 @@
                 <a:ea typeface="Aptos"/>
                 <a:cs typeface="Aptos"/>
               </a:rPr>
-              <a:t>2026.07.24-20</a:t>
+              <a:t>2026.07.24-21</a:t>
             </a:r>
           </a:p>
         </p:txBody>
@@ -5759,7 +5759,7 @@
                 <a:ea typeface="Aptos"/>
                 <a:cs typeface="Aptos"/>
               </a:rPr>
-              <a:t>Independent public evidence summary · 2026.07.24-20 · 2026-07-24 · Sources: EPO; Germany — official judgments; WIPO</a:t>
+              <a:t>Independent public evidence summary · 2026.07.24-21 · 2026-07-24 · Sources: EPO; Germany — official judgments; WIPO</a:t>
             </a:r>
           </a:p>
         </p:txBody>
@@ -6374,7 +6374,7 @@
                 <a:ea typeface="Aptos"/>
                 <a:cs typeface="Aptos"/>
               </a:rPr>
-              <a:t>Independent public evidence summary · 2026.07.24-20 · 2026-07-24 · Sources: EPO Register; EP3032975B2; 8 Ni 18/24 (EP); 7 O 3341/24</a:t>
+              <a:t>Independent public evidence summary · 2026.07.24-21 · 2026-07-24 · Sources: EPO Register; EP3032975B2; 8 Ni 18/24 (EP); 7 O 3341/24</a:t>
             </a:r>
           </a:p>
         </p:txBody>
@@ -7345,7 +7345,7 @@
                 <a:ea typeface="Aptos"/>
                 <a:cs typeface="Aptos"/>
               </a:rPr>
-              <a:t>Independent public evidence summary · 2026.07.24-20 · 2026-07-24 · Sources: Statistics Canada; Health Canada; New Zealand Ministry of Health; Destatis; Vero; Sejm; Swedish Government; FTC; European Commission; IMARC; GVR; Fortune</a:t>
+              <a:t>Independent public evidence summary · 2026.07.24-21 · 2026-07-24 · Sources: Statistics Canada; Health Canada; New Zealand Ministry of Health; Destatis; Vero; Sejm; Swedish Government; FTC; European Commission; IMARC; GVR; Fortune</a:t>
             </a:r>
           </a:p>
         </p:txBody>
@@ -8316,7 +8316,7 @@
                 <a:ea typeface="Aptos"/>
                 <a:cs typeface="Aptos"/>
               </a:rPr>
-              <a:t>Independent public evidence summary · 2026.07.24-20 · 2026-07-24 · Sources: Evidence Register; WIPO IP valuation</a:t>
+              <a:t>Independent public evidence summary · 2026.07.24-21 · 2026-07-24 · Sources: Evidence Register; WIPO IP valuation</a:t>
             </a:r>
           </a:p>
         </p:txBody>
@@ -9139,7 +9139,7 @@
                 <a:ea typeface="Aptos"/>
                 <a:cs typeface="Aptos"/>
               </a:rPr>
-              <a:t>Version 2026.07.24-20 · 2026-07-24 · 6 / 6</a:t>
+              <a:t>Version 2026.07.24-21 · 2026-07-24 · 6 / 6</a:t>
             </a:r>
           </a:p>
         </p:txBody>

--- a/site/downloads/pixan-bank-deck-short-en.pptx
+++ b/site/downloads/pixan-bank-deck-short-en.pptx
@@ -2,18 +2,18 @@
 <file path=ppt/presentation.xml><?xml version="1.0" encoding="utf-8"?>
 <p:presentation xmlns:p="http://schemas.openxmlformats.org/presentationml/2006/main">
   <p:sldMasterIdLst>
-    <p:sldMasterId xmlns:r="http://schemas.openxmlformats.org/officeDocument/2006/relationships" id="2147483648" r:id="R519b73e4f69c4f26"/>
+    <p:sldMasterId xmlns:r="http://schemas.openxmlformats.org/officeDocument/2006/relationships" id="2147483648" r:id="R51e0dc036b8a4e98"/>
   </p:sldMasterIdLst>
   <p:notesMasterIdLst>
-    <p:notesMasterId xmlns:r="http://schemas.openxmlformats.org/officeDocument/2006/relationships" r:id="R25b6a1faf6124431"/>
+    <p:notesMasterId xmlns:r="http://schemas.openxmlformats.org/officeDocument/2006/relationships" r:id="R772e015c3b0e437b"/>
   </p:notesMasterIdLst>
   <p:sldIdLst>
-    <p:sldId xmlns:r="http://schemas.openxmlformats.org/officeDocument/2006/relationships" id="256" r:id="Rf4a8e977625a4b4b"/>
-    <p:sldId xmlns:r="http://schemas.openxmlformats.org/officeDocument/2006/relationships" id="257" r:id="Rd08a0ff037ab42dc"/>
-    <p:sldId xmlns:r="http://schemas.openxmlformats.org/officeDocument/2006/relationships" id="258" r:id="R947b1f025d384f41"/>
-    <p:sldId xmlns:r="http://schemas.openxmlformats.org/officeDocument/2006/relationships" id="259" r:id="R342bc96687324bb7"/>
-    <p:sldId xmlns:r="http://schemas.openxmlformats.org/officeDocument/2006/relationships" id="260" r:id="R26d56cf9506f4bdf"/>
-    <p:sldId xmlns:r="http://schemas.openxmlformats.org/officeDocument/2006/relationships" id="261" r:id="R41c937515f8649c3"/>
+    <p:sldId xmlns:r="http://schemas.openxmlformats.org/officeDocument/2006/relationships" id="256" r:id="R7f0fb31d3fa94d18"/>
+    <p:sldId xmlns:r="http://schemas.openxmlformats.org/officeDocument/2006/relationships" id="257" r:id="Rf4f85d591b784ea4"/>
+    <p:sldId xmlns:r="http://schemas.openxmlformats.org/officeDocument/2006/relationships" id="258" r:id="R94dbbadddade4809"/>
+    <p:sldId xmlns:r="http://schemas.openxmlformats.org/officeDocument/2006/relationships" id="259" r:id="R018fded96ca54510"/>
+    <p:sldId xmlns:r="http://schemas.openxmlformats.org/officeDocument/2006/relationships" id="260" r:id="R43c9e90852e84ad4"/>
+    <p:sldId xmlns:r="http://schemas.openxmlformats.org/officeDocument/2006/relationships" id="261" r:id="Rf12be332a3654b6b"/>
   </p:sldIdLst>
   <p:sldSz cx="12191999" cy="6858000"/>
   <p:notesSz cx="6858000" cy="9144000"/>
@@ -510,6 +510,11 @@
           </a:p>
           <a:p xmlns:a="http://schemas.openxmlformats.org/drawingml/2006/main">
             <a:r>
+              <a:t>- https://www.folkhalsomyndigheten.se/regler-och-tillsyn/tobak-och-nikotinprodukter-regler-for-tillverkning-handel-och-hantering/elektroniska-cigaretter-och-pafyllningsbehallare-sa-foljer-du-reglerna/</a:t>
+            </a:r>
+          </a:p>
+          <a:p xmlns:a="http://schemas.openxmlformats.org/drawingml/2006/main">
+            <a:r>
               <a:t>- https://www.wipo.int/en/web/ip-financing</a:t>
             </a:r>
           </a:p>
@@ -680,6 +685,11 @@
           </a:p>
           <a:p xmlns:a="http://schemas.openxmlformats.org/drawingml/2006/main">
             <a:r>
+              <a:t>- https://www.folkhalsomyndigheten.se/regler-och-tillsyn/tobak-och-nikotinprodukter-regler-for-tillverkning-handel-och-hantering/elektroniska-cigaretter-och-pafyllningsbehallare-sa-foljer-du-reglerna/</a:t>
+            </a:r>
+          </a:p>
+          <a:p xmlns:a="http://schemas.openxmlformats.org/drawingml/2006/main">
+            <a:r>
               <a:t>- https://www.wipo.int/en/web/ip-financing</a:t>
             </a:r>
           </a:p>
@@ -850,6 +860,11 @@
           </a:p>
           <a:p xmlns:a="http://schemas.openxmlformats.org/drawingml/2006/main">
             <a:r>
+              <a:t>- https://www.folkhalsomyndigheten.se/regler-och-tillsyn/tobak-och-nikotinprodukter-regler-for-tillverkning-handel-och-hantering/elektroniska-cigaretter-och-pafyllningsbehallare-sa-foljer-du-reglerna/</a:t>
+            </a:r>
+          </a:p>
+          <a:p xmlns:a="http://schemas.openxmlformats.org/drawingml/2006/main">
+            <a:r>
               <a:t>- https://www.wipo.int/en/web/ip-financing</a:t>
             </a:r>
           </a:p>
@@ -1020,6 +1035,11 @@
           </a:p>
           <a:p xmlns:a="http://schemas.openxmlformats.org/drawingml/2006/main">
             <a:r>
+              <a:t>- https://www.folkhalsomyndigheten.se/regler-och-tillsyn/tobak-och-nikotinprodukter-regler-for-tillverkning-handel-och-hantering/elektroniska-cigaretter-och-pafyllningsbehallare-sa-foljer-du-reglerna/</a:t>
+            </a:r>
+          </a:p>
+          <a:p xmlns:a="http://schemas.openxmlformats.org/drawingml/2006/main">
+            <a:r>
               <a:t>- https://www.wipo.int/en/web/ip-financing</a:t>
             </a:r>
           </a:p>
@@ -1190,6 +1210,11 @@
           </a:p>
           <a:p xmlns:a="http://schemas.openxmlformats.org/drawingml/2006/main">
             <a:r>
+              <a:t>- https://www.folkhalsomyndigheten.se/regler-och-tillsyn/tobak-och-nikotinprodukter-regler-for-tillverkning-handel-och-hantering/elektroniska-cigaretter-och-pafyllningsbehallare-sa-foljer-du-reglerna/</a:t>
+            </a:r>
+          </a:p>
+          <a:p xmlns:a="http://schemas.openxmlformats.org/drawingml/2006/main">
+            <a:r>
               <a:t>- https://www.wipo.int/en/web/ip-financing</a:t>
             </a:r>
           </a:p>
@@ -1356,6 +1381,11 @@
           <a:p xmlns:a="http://schemas.openxmlformats.org/drawingml/2006/main">
             <a:r>
               <a:t>- https://www.ftc.gov/reports/e-cigarette-report-2021</a:t>
+            </a:r>
+          </a:p>
+          <a:p xmlns:a="http://schemas.openxmlformats.org/drawingml/2006/main">
+            <a:r>
+              <a:t>- https://www.folkhalsomyndigheten.se/regler-och-tillsyn/tobak-och-nikotinprodukter-regler-for-tillverkning-handel-och-hantering/elektroniska-cigaretter-och-pafyllningsbehallare-sa-foljer-du-reglerna/</a:t>
             </a:r>
           </a:p>
           <a:p xmlns:a="http://schemas.openxmlformats.org/drawingml/2006/main">
@@ -4376,17 +4406,17 @@
   </p:cSld>
   <p:clrMap bg1="lt1" tx1="dk1" bg2="lt2" tx2="dk2" accent1="accent1" accent2="accent2" accent3="accent3" accent4="accent4" accent5="accent5" accent6="accent6" hlink="hlink" folHlink="folHlink"/>
   <p:sldLayoutIdLst>
-    <p:sldLayoutId xmlns:r="http://schemas.openxmlformats.org/officeDocument/2006/relationships" id="2147483649" r:id="Rcff9ac45755e4f1d"/>
-    <p:sldLayoutId xmlns:r="http://schemas.openxmlformats.org/officeDocument/2006/relationships" id="2147483650" r:id="R10915c2a052c48b9"/>
-    <p:sldLayoutId xmlns:r="http://schemas.openxmlformats.org/officeDocument/2006/relationships" id="2147483651" r:id="R35d32141869943ee"/>
-    <p:sldLayoutId xmlns:r="http://schemas.openxmlformats.org/officeDocument/2006/relationships" id="2147483652" r:id="R42bd8df1285144b5"/>
-    <p:sldLayoutId xmlns:r="http://schemas.openxmlformats.org/officeDocument/2006/relationships" id="2147483653" r:id="R34e778aec9d74e4a"/>
-    <p:sldLayoutId xmlns:r="http://schemas.openxmlformats.org/officeDocument/2006/relationships" id="2147483654" r:id="Rc492214964e1439f"/>
-    <p:sldLayoutId xmlns:r="http://schemas.openxmlformats.org/officeDocument/2006/relationships" id="2147483655" r:id="Rc4e86a19bf6842d3"/>
-    <p:sldLayoutId xmlns:r="http://schemas.openxmlformats.org/officeDocument/2006/relationships" id="2147483656" r:id="R9f176303b50a46d7"/>
-    <p:sldLayoutId xmlns:r="http://schemas.openxmlformats.org/officeDocument/2006/relationships" id="2147483657" r:id="Rbcfb4e4dcf7a477a"/>
-    <p:sldLayoutId xmlns:r="http://schemas.openxmlformats.org/officeDocument/2006/relationships" id="2147483658" r:id="R3f4d8f570124411e"/>
-    <p:sldLayoutId xmlns:r="http://schemas.openxmlformats.org/officeDocument/2006/relationships" id="2147483659" r:id="Raeff86f97c444c63"/>
+    <p:sldLayoutId xmlns:r="http://schemas.openxmlformats.org/officeDocument/2006/relationships" id="2147483649" r:id="Rc92d33f679294cdc"/>
+    <p:sldLayoutId xmlns:r="http://schemas.openxmlformats.org/officeDocument/2006/relationships" id="2147483650" r:id="Rc6aed6fac7444686"/>
+    <p:sldLayoutId xmlns:r="http://schemas.openxmlformats.org/officeDocument/2006/relationships" id="2147483651" r:id="R3017893fcadd4f4c"/>
+    <p:sldLayoutId xmlns:r="http://schemas.openxmlformats.org/officeDocument/2006/relationships" id="2147483652" r:id="Ra1ffce279e09476d"/>
+    <p:sldLayoutId xmlns:r="http://schemas.openxmlformats.org/officeDocument/2006/relationships" id="2147483653" r:id="R3a93253e04394a83"/>
+    <p:sldLayoutId xmlns:r="http://schemas.openxmlformats.org/officeDocument/2006/relationships" id="2147483654" r:id="Rb848a154e5cf4c75"/>
+    <p:sldLayoutId xmlns:r="http://schemas.openxmlformats.org/officeDocument/2006/relationships" id="2147483655" r:id="R8593c3eb678144b9"/>
+    <p:sldLayoutId xmlns:r="http://schemas.openxmlformats.org/officeDocument/2006/relationships" id="2147483656" r:id="R2f79a28621c8486b"/>
+    <p:sldLayoutId xmlns:r="http://schemas.openxmlformats.org/officeDocument/2006/relationships" id="2147483657" r:id="Rd9c7ee0d9c4e4af4"/>
+    <p:sldLayoutId xmlns:r="http://schemas.openxmlformats.org/officeDocument/2006/relationships" id="2147483658" r:id="Rd1e1b234e934495f"/>
+    <p:sldLayoutId xmlns:r="http://schemas.openxmlformats.org/officeDocument/2006/relationships" id="2147483659" r:id="R30b503bb28994599"/>
   </p:sldLayoutIdLst>
   <p:txStyles>
     <p:titleStyle>
@@ -5286,7 +5316,7 @@
                 <a:ea typeface="Aptos"/>
                 <a:cs typeface="Aptos"/>
               </a:rPr>
-              <a:t>2026.07.24-21</a:t>
+              <a:t>2026.07.24-22</a:t>
             </a:r>
           </a:p>
         </p:txBody>
@@ -5759,7 +5789,7 @@
                 <a:ea typeface="Aptos"/>
                 <a:cs typeface="Aptos"/>
               </a:rPr>
-              <a:t>Independent public evidence summary · 2026.07.24-21 · 2026-07-24 · Sources: EPO; Germany — official judgments; WIPO</a:t>
+              <a:t>Independent public evidence summary · 2026.07.24-22 · 2026-07-24 · Sources: EPO; Germany — official judgments; WIPO</a:t>
             </a:r>
           </a:p>
         </p:txBody>
@@ -6374,7 +6404,7 @@
                 <a:ea typeface="Aptos"/>
                 <a:cs typeface="Aptos"/>
               </a:rPr>
-              <a:t>Independent public evidence summary · 2026.07.24-21 · 2026-07-24 · Sources: EPO Register; EP3032975B2; 8 Ni 18/24 (EP); 7 O 3341/24</a:t>
+              <a:t>Independent public evidence summary · 2026.07.24-22 · 2026-07-24 · Sources: EPO Register; EP3032975B2; 8 Ni 18/24 (EP); 7 O 3341/24</a:t>
             </a:r>
           </a:p>
         </p:txBody>
@@ -7345,7 +7375,7 @@
                 <a:ea typeface="Aptos"/>
                 <a:cs typeface="Aptos"/>
               </a:rPr>
-              <a:t>Independent public evidence summary · 2026.07.24-21 · 2026-07-24 · Sources: Statistics Canada; Health Canada; New Zealand Ministry of Health; Destatis; Vero; Sejm; Swedish Government; FTC; European Commission; IMARC; GVR; Fortune</a:t>
+              <a:t>Independent public evidence summary · 2026.07.24-22 · 2026-07-24 · Sources: Statistics Canada; Health Canada; New Zealand Ministry of Health; Destatis; Vero; Sejm; Swedish Government; FHM; FTC; European Commission; IMARC; GVR; Fortune</a:t>
             </a:r>
           </a:p>
         </p:txBody>
@@ -7496,7 +7526,7 @@
                 <a:ea typeface="Aptos"/>
                 <a:cs typeface="Aptos"/>
               </a:rPr>
-              <a:t>34</a:t>
+              <a:t>34 + 36</a:t>
             </a:r>
           </a:p>
         </p:txBody>
@@ -7518,7 +7548,7 @@
         <p:spPr>
           <a:xfrm xmlns:a="http://schemas.openxmlformats.org/drawingml/2006/main">
             <a:off x="694944" y="2468879"/>
-            <a:ext cx="3203448" cy="499872"/>
+            <a:ext cx="3203448" cy="713232"/>
           </a:xfrm>
           <a:prstGeom xmlns:a="http://schemas.openxmlformats.org/drawingml/2006/main" prst="rect">
             <a:avLst/>
@@ -7543,7 +7573,7 @@
                 <a:ea typeface="Aptos"/>
                 <a:cs typeface="Aptos"/>
               </a:rPr>
-              <a:t>official annual observations from 7 countries</a:t>
+              <a:t>34 market measures across 7 countries + 36 Swedish FHM register counts; not sales</a:t>
             </a:r>
           </a:p>
         </p:txBody>
@@ -8316,7 +8346,7 @@
                 <a:ea typeface="Aptos"/>
                 <a:cs typeface="Aptos"/>
               </a:rPr>
-              <a:t>Independent public evidence summary · 2026.07.24-21 · 2026-07-24 · Sources: Evidence Register; WIPO IP valuation</a:t>
+              <a:t>Independent public evidence summary · 2026.07.24-22 · 2026-07-24 · Sources: Evidence Register; WIPO IP valuation</a:t>
             </a:r>
           </a:p>
         </p:txBody>
@@ -9139,7 +9169,7 @@
                 <a:ea typeface="Aptos"/>
                 <a:cs typeface="Aptos"/>
               </a:rPr>
-              <a:t>Version 2026.07.24-21 · 2026-07-24 · 6 / 6</a:t>
+              <a:t>Version 2026.07.24-22 · 2026-07-24 · 6 / 6</a:t>
             </a:r>
           </a:p>
         </p:txBody>

--- a/site/downloads/pixan-bank-deck-short-en.pptx
+++ b/site/downloads/pixan-bank-deck-short-en.pptx
@@ -2,18 +2,18 @@
 <file path=ppt/presentation.xml><?xml version="1.0" encoding="utf-8"?>
 <p:presentation xmlns:p="http://schemas.openxmlformats.org/presentationml/2006/main">
   <p:sldMasterIdLst>
-    <p:sldMasterId xmlns:r="http://schemas.openxmlformats.org/officeDocument/2006/relationships" id="2147483648" r:id="R51e0dc036b8a4e98"/>
+    <p:sldMasterId xmlns:r="http://schemas.openxmlformats.org/officeDocument/2006/relationships" id="2147483648" r:id="Rc4177d7cc960483d"/>
   </p:sldMasterIdLst>
   <p:notesMasterIdLst>
-    <p:notesMasterId xmlns:r="http://schemas.openxmlformats.org/officeDocument/2006/relationships" r:id="R772e015c3b0e437b"/>
+    <p:notesMasterId xmlns:r="http://schemas.openxmlformats.org/officeDocument/2006/relationships" r:id="R8e7a0fc75f324444"/>
   </p:notesMasterIdLst>
   <p:sldIdLst>
-    <p:sldId xmlns:r="http://schemas.openxmlformats.org/officeDocument/2006/relationships" id="256" r:id="R7f0fb31d3fa94d18"/>
-    <p:sldId xmlns:r="http://schemas.openxmlformats.org/officeDocument/2006/relationships" id="257" r:id="Rf4f85d591b784ea4"/>
-    <p:sldId xmlns:r="http://schemas.openxmlformats.org/officeDocument/2006/relationships" id="258" r:id="R94dbbadddade4809"/>
-    <p:sldId xmlns:r="http://schemas.openxmlformats.org/officeDocument/2006/relationships" id="259" r:id="R018fded96ca54510"/>
-    <p:sldId xmlns:r="http://schemas.openxmlformats.org/officeDocument/2006/relationships" id="260" r:id="R43c9e90852e84ad4"/>
-    <p:sldId xmlns:r="http://schemas.openxmlformats.org/officeDocument/2006/relationships" id="261" r:id="Rf12be332a3654b6b"/>
+    <p:sldId xmlns:r="http://schemas.openxmlformats.org/officeDocument/2006/relationships" id="256" r:id="Recb802599b1a44c7"/>
+    <p:sldId xmlns:r="http://schemas.openxmlformats.org/officeDocument/2006/relationships" id="257" r:id="R1f2b9acfd18b4a6a"/>
+    <p:sldId xmlns:r="http://schemas.openxmlformats.org/officeDocument/2006/relationships" id="258" r:id="R604f1d518594446a"/>
+    <p:sldId xmlns:r="http://schemas.openxmlformats.org/officeDocument/2006/relationships" id="259" r:id="R75606f1d41774067"/>
+    <p:sldId xmlns:r="http://schemas.openxmlformats.org/officeDocument/2006/relationships" id="260" r:id="R79e5e486adfb4ff5"/>
+    <p:sldId xmlns:r="http://schemas.openxmlformats.org/officeDocument/2006/relationships" id="261" r:id="R9dc5eefadba3487e"/>
   </p:sldIdLst>
   <p:sldSz cx="12191999" cy="6858000"/>
   <p:notesSz cx="6858000" cy="9144000"/>
@@ -505,6 +505,21 @@
           </a:p>
           <a:p xmlns:a="http://schemas.openxmlformats.org/drawingml/2006/main">
             <a:r>
+              <a:t>- https://www150.statcan.gc.ca/t1/tbl1/en/tv.action?pid=2010008001</a:t>
+            </a:r>
+          </a:p>
+          <a:p xmlns:a="http://schemas.openxmlformats.org/drawingml/2006/main">
+            <a:r>
+              <a:t>- https://www23.statcan.gc.ca/imdb/p2SV.pl?Function=getSurvey&amp;Id=1544050</a:t>
+            </a:r>
+          </a:p>
+          <a:p xmlns:a="http://schemas.openxmlformats.org/drawingml/2006/main">
+            <a:r>
+              <a:t>- https://www150.statcan.gc.ca/n1/pub/36-28-0001/2025004/article/00001-eng.pdf</a:t>
+            </a:r>
+          </a:p>
+          <a:p xmlns:a="http://schemas.openxmlformats.org/drawingml/2006/main">
+            <a:r>
               <a:t>- https://www.ftc.gov/reports/e-cigarette-report-2021</a:t>
             </a:r>
           </a:p>
@@ -680,6 +695,21 @@
           </a:p>
           <a:p xmlns:a="http://schemas.openxmlformats.org/drawingml/2006/main">
             <a:r>
+              <a:t>- https://www150.statcan.gc.ca/t1/tbl1/en/tv.action?pid=2010008001</a:t>
+            </a:r>
+          </a:p>
+          <a:p xmlns:a="http://schemas.openxmlformats.org/drawingml/2006/main">
+            <a:r>
+              <a:t>- https://www23.statcan.gc.ca/imdb/p2SV.pl?Function=getSurvey&amp;Id=1544050</a:t>
+            </a:r>
+          </a:p>
+          <a:p xmlns:a="http://schemas.openxmlformats.org/drawingml/2006/main">
+            <a:r>
+              <a:t>- https://www150.statcan.gc.ca/n1/pub/36-28-0001/2025004/article/00001-eng.pdf</a:t>
+            </a:r>
+          </a:p>
+          <a:p xmlns:a="http://schemas.openxmlformats.org/drawingml/2006/main">
+            <a:r>
               <a:t>- https://www.ftc.gov/reports/e-cigarette-report-2021</a:t>
             </a:r>
           </a:p>
@@ -855,6 +885,21 @@
           </a:p>
           <a:p xmlns:a="http://schemas.openxmlformats.org/drawingml/2006/main">
             <a:r>
+              <a:t>- https://www150.statcan.gc.ca/t1/tbl1/en/tv.action?pid=2010008001</a:t>
+            </a:r>
+          </a:p>
+          <a:p xmlns:a="http://schemas.openxmlformats.org/drawingml/2006/main">
+            <a:r>
+              <a:t>- https://www23.statcan.gc.ca/imdb/p2SV.pl?Function=getSurvey&amp;Id=1544050</a:t>
+            </a:r>
+          </a:p>
+          <a:p xmlns:a="http://schemas.openxmlformats.org/drawingml/2006/main">
+            <a:r>
+              <a:t>- https://www150.statcan.gc.ca/n1/pub/36-28-0001/2025004/article/00001-eng.pdf</a:t>
+            </a:r>
+          </a:p>
+          <a:p xmlns:a="http://schemas.openxmlformats.org/drawingml/2006/main">
+            <a:r>
               <a:t>- https://www.ftc.gov/reports/e-cigarette-report-2021</a:t>
             </a:r>
           </a:p>
@@ -1030,6 +1075,21 @@
           </a:p>
           <a:p xmlns:a="http://schemas.openxmlformats.org/drawingml/2006/main">
             <a:r>
+              <a:t>- https://www150.statcan.gc.ca/t1/tbl1/en/tv.action?pid=2010008001</a:t>
+            </a:r>
+          </a:p>
+          <a:p xmlns:a="http://schemas.openxmlformats.org/drawingml/2006/main">
+            <a:r>
+              <a:t>- https://www23.statcan.gc.ca/imdb/p2SV.pl?Function=getSurvey&amp;Id=1544050</a:t>
+            </a:r>
+          </a:p>
+          <a:p xmlns:a="http://schemas.openxmlformats.org/drawingml/2006/main">
+            <a:r>
+              <a:t>- https://www150.statcan.gc.ca/n1/pub/36-28-0001/2025004/article/00001-eng.pdf</a:t>
+            </a:r>
+          </a:p>
+          <a:p xmlns:a="http://schemas.openxmlformats.org/drawingml/2006/main">
+            <a:r>
               <a:t>- https://www.ftc.gov/reports/e-cigarette-report-2021</a:t>
             </a:r>
           </a:p>
@@ -1205,6 +1265,21 @@
           </a:p>
           <a:p xmlns:a="http://schemas.openxmlformats.org/drawingml/2006/main">
             <a:r>
+              <a:t>- https://www150.statcan.gc.ca/t1/tbl1/en/tv.action?pid=2010008001</a:t>
+            </a:r>
+          </a:p>
+          <a:p xmlns:a="http://schemas.openxmlformats.org/drawingml/2006/main">
+            <a:r>
+              <a:t>- https://www23.statcan.gc.ca/imdb/p2SV.pl?Function=getSurvey&amp;Id=1544050</a:t>
+            </a:r>
+          </a:p>
+          <a:p xmlns:a="http://schemas.openxmlformats.org/drawingml/2006/main">
+            <a:r>
+              <a:t>- https://www150.statcan.gc.ca/n1/pub/36-28-0001/2025004/article/00001-eng.pdf</a:t>
+            </a:r>
+          </a:p>
+          <a:p xmlns:a="http://schemas.openxmlformats.org/drawingml/2006/main">
+            <a:r>
               <a:t>- https://www.ftc.gov/reports/e-cigarette-report-2021</a:t>
             </a:r>
           </a:p>
@@ -1376,6 +1451,21 @@
           <a:p xmlns:a="http://schemas.openxmlformats.org/drawingml/2006/main">
             <a:r>
               <a:t>- https://www150.statcan.gc.ca/t1/tbl1/en/tv.action?pid=2010007101</a:t>
+            </a:r>
+          </a:p>
+          <a:p xmlns:a="http://schemas.openxmlformats.org/drawingml/2006/main">
+            <a:r>
+              <a:t>- https://www150.statcan.gc.ca/t1/tbl1/en/tv.action?pid=2010008001</a:t>
+            </a:r>
+          </a:p>
+          <a:p xmlns:a="http://schemas.openxmlformats.org/drawingml/2006/main">
+            <a:r>
+              <a:t>- https://www23.statcan.gc.ca/imdb/p2SV.pl?Function=getSurvey&amp;Id=1544050</a:t>
+            </a:r>
+          </a:p>
+          <a:p xmlns:a="http://schemas.openxmlformats.org/drawingml/2006/main">
+            <a:r>
+              <a:t>- https://www150.statcan.gc.ca/n1/pub/36-28-0001/2025004/article/00001-eng.pdf</a:t>
             </a:r>
           </a:p>
           <a:p xmlns:a="http://schemas.openxmlformats.org/drawingml/2006/main">
@@ -4406,17 +4496,17 @@
   </p:cSld>
   <p:clrMap bg1="lt1" tx1="dk1" bg2="lt2" tx2="dk2" accent1="accent1" accent2="accent2" accent3="accent3" accent4="accent4" accent5="accent5" accent6="accent6" hlink="hlink" folHlink="folHlink"/>
   <p:sldLayoutIdLst>
-    <p:sldLayoutId xmlns:r="http://schemas.openxmlformats.org/officeDocument/2006/relationships" id="2147483649" r:id="Rc92d33f679294cdc"/>
-    <p:sldLayoutId xmlns:r="http://schemas.openxmlformats.org/officeDocument/2006/relationships" id="2147483650" r:id="Rc6aed6fac7444686"/>
-    <p:sldLayoutId xmlns:r="http://schemas.openxmlformats.org/officeDocument/2006/relationships" id="2147483651" r:id="R3017893fcadd4f4c"/>
-    <p:sldLayoutId xmlns:r="http://schemas.openxmlformats.org/officeDocument/2006/relationships" id="2147483652" r:id="Ra1ffce279e09476d"/>
-    <p:sldLayoutId xmlns:r="http://schemas.openxmlformats.org/officeDocument/2006/relationships" id="2147483653" r:id="R3a93253e04394a83"/>
-    <p:sldLayoutId xmlns:r="http://schemas.openxmlformats.org/officeDocument/2006/relationships" id="2147483654" r:id="Rb848a154e5cf4c75"/>
-    <p:sldLayoutId xmlns:r="http://schemas.openxmlformats.org/officeDocument/2006/relationships" id="2147483655" r:id="R8593c3eb678144b9"/>
-    <p:sldLayoutId xmlns:r="http://schemas.openxmlformats.org/officeDocument/2006/relationships" id="2147483656" r:id="R2f79a28621c8486b"/>
-    <p:sldLayoutId xmlns:r="http://schemas.openxmlformats.org/officeDocument/2006/relationships" id="2147483657" r:id="Rd9c7ee0d9c4e4af4"/>
-    <p:sldLayoutId xmlns:r="http://schemas.openxmlformats.org/officeDocument/2006/relationships" id="2147483658" r:id="Rd1e1b234e934495f"/>
-    <p:sldLayoutId xmlns:r="http://schemas.openxmlformats.org/officeDocument/2006/relationships" id="2147483659" r:id="R30b503bb28994599"/>
+    <p:sldLayoutId xmlns:r="http://schemas.openxmlformats.org/officeDocument/2006/relationships" id="2147483649" r:id="Rc9834c267aa547fe"/>
+    <p:sldLayoutId xmlns:r="http://schemas.openxmlformats.org/officeDocument/2006/relationships" id="2147483650" r:id="R966229ad0e5648ac"/>
+    <p:sldLayoutId xmlns:r="http://schemas.openxmlformats.org/officeDocument/2006/relationships" id="2147483651" r:id="R004c67d2720f47f7"/>
+    <p:sldLayoutId xmlns:r="http://schemas.openxmlformats.org/officeDocument/2006/relationships" id="2147483652" r:id="Ra604ee9371454d8b"/>
+    <p:sldLayoutId xmlns:r="http://schemas.openxmlformats.org/officeDocument/2006/relationships" id="2147483653" r:id="R8ed72acdbea145a9"/>
+    <p:sldLayoutId xmlns:r="http://schemas.openxmlformats.org/officeDocument/2006/relationships" id="2147483654" r:id="R52be7fc70b4c41a2"/>
+    <p:sldLayoutId xmlns:r="http://schemas.openxmlformats.org/officeDocument/2006/relationships" id="2147483655" r:id="R1bbcdbe93c474dfc"/>
+    <p:sldLayoutId xmlns:r="http://schemas.openxmlformats.org/officeDocument/2006/relationships" id="2147483656" r:id="R1ea871a960fa4419"/>
+    <p:sldLayoutId xmlns:r="http://schemas.openxmlformats.org/officeDocument/2006/relationships" id="2147483657" r:id="R166fc41e55fc4b46"/>
+    <p:sldLayoutId xmlns:r="http://schemas.openxmlformats.org/officeDocument/2006/relationships" id="2147483658" r:id="R0704d73bc5dc46c1"/>
+    <p:sldLayoutId xmlns:r="http://schemas.openxmlformats.org/officeDocument/2006/relationships" id="2147483659" r:id="R93ec95e6bac8484f"/>
   </p:sldLayoutIdLst>
   <p:txStyles>
     <p:titleStyle>
@@ -5316,7 +5406,7 @@
                 <a:ea typeface="Aptos"/>
                 <a:cs typeface="Aptos"/>
               </a:rPr>
-              <a:t>2026.07.24-22</a:t>
+              <a:t>2026.07.25-24</a:t>
             </a:r>
           </a:p>
         </p:txBody>
@@ -5789,7 +5879,7 @@
                 <a:ea typeface="Aptos"/>
                 <a:cs typeface="Aptos"/>
               </a:rPr>
-              <a:t>Independent public evidence summary · 2026.07.24-22 · 2026-07-24 · Sources: EPO; Germany — official judgments; WIPO</a:t>
+              <a:t>Independent public evidence summary · 2026.07.25-24 · 2026-07-24 · Sources: EPO; Germany — official judgments; WIPO</a:t>
             </a:r>
           </a:p>
         </p:txBody>
@@ -6404,7 +6494,7 @@
                 <a:ea typeface="Aptos"/>
                 <a:cs typeface="Aptos"/>
               </a:rPr>
-              <a:t>Independent public evidence summary · 2026.07.24-22 · 2026-07-24 · Sources: EPO Register; EP3032975B2; 8 Ni 18/24 (EP); 7 O 3341/24</a:t>
+              <a:t>Independent public evidence summary · 2026.07.25-24 · 2026-07-24 · Sources: EPO Register; EP3032975B2; 8 Ni 18/24 (EP); 7 O 3341/24</a:t>
             </a:r>
           </a:p>
         </p:txBody>
@@ -7350,7 +7440,7 @@
         <p:spPr>
           <a:xfrm xmlns:a="http://schemas.openxmlformats.org/drawingml/2006/main">
             <a:off x="384048" y="6556248"/>
-            <a:ext cx="10835640" cy="332232"/>
+            <a:ext cx="10835640" cy="202692"/>
           </a:xfrm>
           <a:prstGeom xmlns:a="http://schemas.openxmlformats.org/drawingml/2006/main" prst="rect">
             <a:avLst/>
@@ -7375,7 +7465,7 @@
                 <a:ea typeface="Aptos"/>
                 <a:cs typeface="Aptos"/>
               </a:rPr>
-              <a:t>Independent public evidence summary · 2026.07.24-22 · 2026-07-24 · Sources: Statistics Canada; Health Canada; New Zealand Ministry of Health; Destatis; Vero; Sejm; Swedish Government; FHM; FTC; European Commission; IMARC; GVR; Fortune</a:t>
+              <a:t>Independent public evidence summary · 2026.07.25-24 · 2026-07-25 · Sources: Statistics Canada; Health Canada; NZ Ministry of Health; European Commission; FHM; FTC</a:t>
             </a:r>
           </a:p>
         </p:txBody>
@@ -8073,7 +8163,7 @@
                 <a:ea typeface="Aptos"/>
                 <a:cs typeface="Aptos"/>
               </a:rPr>
-              <a:t>Canada 2024: retail CAD 1.219bn (≈EUR 822.6m; ECB 2024); shipments CAD 1.161bn (≈EUR 783.2m; ECB 2024); all retail quarters quality E. NZ is a model; FTC 2021 USD 2.763bn (≈EUR 2.336bn; ECB 2021) is manufacturer reporting. Do not sum the measures.</a:t>
+              <a:t>Canada 2024 — retail CAD 1.219160bn (≈EUR 822.6m; ECB 2024); shipments CAD 1.160754bn (≈EUR 783.2m; ECB 2024); 7/10 (D5/D7/D10 open). FTC 2021: USD 2.763bn (≈EUR 2.336bn; ECB 2021), manufacturer reporting. Do not sum.</a:t>
             </a:r>
           </a:p>
         </p:txBody>
@@ -8346,7 +8436,7 @@
                 <a:ea typeface="Aptos"/>
                 <a:cs typeface="Aptos"/>
               </a:rPr>
-              <a:t>Independent public evidence summary · 2026.07.24-22 · 2026-07-24 · Sources: Evidence Register; WIPO IP valuation</a:t>
+              <a:t>Independent public evidence summary · 2026.07.25-24 · 2026-07-24 · Sources: Evidence Register; WIPO IP valuation</a:t>
             </a:r>
           </a:p>
         </p:txBody>
@@ -9169,7 +9259,7 @@
                 <a:ea typeface="Aptos"/>
                 <a:cs typeface="Aptos"/>
               </a:rPr>
-              <a:t>Version 2026.07.24-22 · 2026-07-24 · 6 / 6</a:t>
+              <a:t>Version 2026.07.25-24 · 2026-07-24 · 6 / 6</a:t>
             </a:r>
           </a:p>
         </p:txBody>

--- a/site/downloads/pixan-bank-deck-short-en.pptx
+++ b/site/downloads/pixan-bank-deck-short-en.pptx
@@ -2,18 +2,18 @@
 <file path=ppt/presentation.xml><?xml version="1.0" encoding="utf-8"?>
 <p:presentation xmlns:p="http://schemas.openxmlformats.org/presentationml/2006/main">
   <p:sldMasterIdLst>
-    <p:sldMasterId xmlns:r="http://schemas.openxmlformats.org/officeDocument/2006/relationships" id="2147483648" r:id="Rc4177d7cc960483d"/>
+    <p:sldMasterId xmlns:r="http://schemas.openxmlformats.org/officeDocument/2006/relationships" id="2147483648" r:id="R59aee4a088b64fef"/>
   </p:sldMasterIdLst>
   <p:notesMasterIdLst>
-    <p:notesMasterId xmlns:r="http://schemas.openxmlformats.org/officeDocument/2006/relationships" r:id="R8e7a0fc75f324444"/>
+    <p:notesMasterId xmlns:r="http://schemas.openxmlformats.org/officeDocument/2006/relationships" r:id="R92b677c953e34aab"/>
   </p:notesMasterIdLst>
   <p:sldIdLst>
-    <p:sldId xmlns:r="http://schemas.openxmlformats.org/officeDocument/2006/relationships" id="256" r:id="Recb802599b1a44c7"/>
-    <p:sldId xmlns:r="http://schemas.openxmlformats.org/officeDocument/2006/relationships" id="257" r:id="R1f2b9acfd18b4a6a"/>
-    <p:sldId xmlns:r="http://schemas.openxmlformats.org/officeDocument/2006/relationships" id="258" r:id="R604f1d518594446a"/>
-    <p:sldId xmlns:r="http://schemas.openxmlformats.org/officeDocument/2006/relationships" id="259" r:id="R75606f1d41774067"/>
-    <p:sldId xmlns:r="http://schemas.openxmlformats.org/officeDocument/2006/relationships" id="260" r:id="R79e5e486adfb4ff5"/>
-    <p:sldId xmlns:r="http://schemas.openxmlformats.org/officeDocument/2006/relationships" id="261" r:id="R9dc5eefadba3487e"/>
+    <p:sldId xmlns:r="http://schemas.openxmlformats.org/officeDocument/2006/relationships" id="256" r:id="R0b11da71c25c4138"/>
+    <p:sldId xmlns:r="http://schemas.openxmlformats.org/officeDocument/2006/relationships" id="257" r:id="R159fa3f18c434a9b"/>
+    <p:sldId xmlns:r="http://schemas.openxmlformats.org/officeDocument/2006/relationships" id="258" r:id="R4f6966636e81478c"/>
+    <p:sldId xmlns:r="http://schemas.openxmlformats.org/officeDocument/2006/relationships" id="259" r:id="Raf196016ac4146d3"/>
+    <p:sldId xmlns:r="http://schemas.openxmlformats.org/officeDocument/2006/relationships" id="260" r:id="R425af6752c024fa2"/>
+    <p:sldId xmlns:r="http://schemas.openxmlformats.org/officeDocument/2006/relationships" id="261" r:id="Re43aa484ebf74744"/>
   </p:sldIdLst>
   <p:sldSz cx="12191999" cy="6858000"/>
   <p:notesSz cx="6858000" cy="9144000"/>
@@ -500,6 +500,16 @@
           </a:p>
           <a:p xmlns:a="http://schemas.openxmlformats.org/drawingml/2006/main">
             <a:r>
+              <a:t>- https://www.health.govt.nz/regulation-legislation/vaping-herbal-smoking-and-smokeless-tobacco/requirements/complete-a-notifiable-product-annual-return</a:t>
+            </a:r>
+          </a:p>
+          <a:p xmlns:a="http://schemas.openxmlformats.org/drawingml/2006/main">
+            <a:r>
+              <a:t>- https://www.health.govt.nz/system/files/2024-12/2024-annual-returns-user-guide.pdf</a:t>
+            </a:r>
+          </a:p>
+          <a:p xmlns:a="http://schemas.openxmlformats.org/drawingml/2006/main">
+            <a:r>
               <a:t>- https://www150.statcan.gc.ca/t1/tbl1/en/tv.action?pid=2010007101</a:t>
             </a:r>
           </a:p>
@@ -690,6 +700,16 @@
           </a:p>
           <a:p xmlns:a="http://schemas.openxmlformats.org/drawingml/2006/main">
             <a:r>
+              <a:t>- https://www.health.govt.nz/regulation-legislation/vaping-herbal-smoking-and-smokeless-tobacco/requirements/complete-a-notifiable-product-annual-return</a:t>
+            </a:r>
+          </a:p>
+          <a:p xmlns:a="http://schemas.openxmlformats.org/drawingml/2006/main">
+            <a:r>
+              <a:t>- https://www.health.govt.nz/system/files/2024-12/2024-annual-returns-user-guide.pdf</a:t>
+            </a:r>
+          </a:p>
+          <a:p xmlns:a="http://schemas.openxmlformats.org/drawingml/2006/main">
+            <a:r>
               <a:t>- https://www150.statcan.gc.ca/t1/tbl1/en/tv.action?pid=2010007101</a:t>
             </a:r>
           </a:p>
@@ -880,6 +900,16 @@
           </a:p>
           <a:p xmlns:a="http://schemas.openxmlformats.org/drawingml/2006/main">
             <a:r>
+              <a:t>- https://www.health.govt.nz/regulation-legislation/vaping-herbal-smoking-and-smokeless-tobacco/requirements/complete-a-notifiable-product-annual-return</a:t>
+            </a:r>
+          </a:p>
+          <a:p xmlns:a="http://schemas.openxmlformats.org/drawingml/2006/main">
+            <a:r>
+              <a:t>- https://www.health.govt.nz/system/files/2024-12/2024-annual-returns-user-guide.pdf</a:t>
+            </a:r>
+          </a:p>
+          <a:p xmlns:a="http://schemas.openxmlformats.org/drawingml/2006/main">
+            <a:r>
               <a:t>- https://www150.statcan.gc.ca/t1/tbl1/en/tv.action?pid=2010007101</a:t>
             </a:r>
           </a:p>
@@ -1070,6 +1100,16 @@
           </a:p>
           <a:p xmlns:a="http://schemas.openxmlformats.org/drawingml/2006/main">
             <a:r>
+              <a:t>- https://www.health.govt.nz/regulation-legislation/vaping-herbal-smoking-and-smokeless-tobacco/requirements/complete-a-notifiable-product-annual-return</a:t>
+            </a:r>
+          </a:p>
+          <a:p xmlns:a="http://schemas.openxmlformats.org/drawingml/2006/main">
+            <a:r>
+              <a:t>- https://www.health.govt.nz/system/files/2024-12/2024-annual-returns-user-guide.pdf</a:t>
+            </a:r>
+          </a:p>
+          <a:p xmlns:a="http://schemas.openxmlformats.org/drawingml/2006/main">
+            <a:r>
               <a:t>- https://www150.statcan.gc.ca/t1/tbl1/en/tv.action?pid=2010007101</a:t>
             </a:r>
           </a:p>
@@ -1260,6 +1300,16 @@
           </a:p>
           <a:p xmlns:a="http://schemas.openxmlformats.org/drawingml/2006/main">
             <a:r>
+              <a:t>- https://www.health.govt.nz/regulation-legislation/vaping-herbal-smoking-and-smokeless-tobacco/requirements/complete-a-notifiable-product-annual-return</a:t>
+            </a:r>
+          </a:p>
+          <a:p xmlns:a="http://schemas.openxmlformats.org/drawingml/2006/main">
+            <a:r>
+              <a:t>- https://www.health.govt.nz/system/files/2024-12/2024-annual-returns-user-guide.pdf</a:t>
+            </a:r>
+          </a:p>
+          <a:p xmlns:a="http://schemas.openxmlformats.org/drawingml/2006/main">
+            <a:r>
               <a:t>- https://www150.statcan.gc.ca/t1/tbl1/en/tv.action?pid=2010007101</a:t>
             </a:r>
           </a:p>
@@ -1446,6 +1496,16 @@
           <a:p xmlns:a="http://schemas.openxmlformats.org/drawingml/2006/main">
             <a:r>
               <a:t>- https://www.health.govt.nz/regulation-legislation/vaping-herbal-smoking-and-smokeless-tobacco/requirements/complete-a-notifiable-product-annual-return/annual-returns-2024</a:t>
+            </a:r>
+          </a:p>
+          <a:p xmlns:a="http://schemas.openxmlformats.org/drawingml/2006/main">
+            <a:r>
+              <a:t>- https://www.health.govt.nz/regulation-legislation/vaping-herbal-smoking-and-smokeless-tobacco/requirements/complete-a-notifiable-product-annual-return</a:t>
+            </a:r>
+          </a:p>
+          <a:p xmlns:a="http://schemas.openxmlformats.org/drawingml/2006/main">
+            <a:r>
+              <a:t>- https://www.health.govt.nz/system/files/2024-12/2024-annual-returns-user-guide.pdf</a:t>
             </a:r>
           </a:p>
           <a:p xmlns:a="http://schemas.openxmlformats.org/drawingml/2006/main">
@@ -4496,17 +4556,17 @@
   </p:cSld>
   <p:clrMap bg1="lt1" tx1="dk1" bg2="lt2" tx2="dk2" accent1="accent1" accent2="accent2" accent3="accent3" accent4="accent4" accent5="accent5" accent6="accent6" hlink="hlink" folHlink="folHlink"/>
   <p:sldLayoutIdLst>
-    <p:sldLayoutId xmlns:r="http://schemas.openxmlformats.org/officeDocument/2006/relationships" id="2147483649" r:id="Rc9834c267aa547fe"/>
-    <p:sldLayoutId xmlns:r="http://schemas.openxmlformats.org/officeDocument/2006/relationships" id="2147483650" r:id="R966229ad0e5648ac"/>
-    <p:sldLayoutId xmlns:r="http://schemas.openxmlformats.org/officeDocument/2006/relationships" id="2147483651" r:id="R004c67d2720f47f7"/>
-    <p:sldLayoutId xmlns:r="http://schemas.openxmlformats.org/officeDocument/2006/relationships" id="2147483652" r:id="Ra604ee9371454d8b"/>
-    <p:sldLayoutId xmlns:r="http://schemas.openxmlformats.org/officeDocument/2006/relationships" id="2147483653" r:id="R8ed72acdbea145a9"/>
-    <p:sldLayoutId xmlns:r="http://schemas.openxmlformats.org/officeDocument/2006/relationships" id="2147483654" r:id="R52be7fc70b4c41a2"/>
-    <p:sldLayoutId xmlns:r="http://schemas.openxmlformats.org/officeDocument/2006/relationships" id="2147483655" r:id="R1bbcdbe93c474dfc"/>
-    <p:sldLayoutId xmlns:r="http://schemas.openxmlformats.org/officeDocument/2006/relationships" id="2147483656" r:id="R1ea871a960fa4419"/>
-    <p:sldLayoutId xmlns:r="http://schemas.openxmlformats.org/officeDocument/2006/relationships" id="2147483657" r:id="R166fc41e55fc4b46"/>
-    <p:sldLayoutId xmlns:r="http://schemas.openxmlformats.org/officeDocument/2006/relationships" id="2147483658" r:id="R0704d73bc5dc46c1"/>
-    <p:sldLayoutId xmlns:r="http://schemas.openxmlformats.org/officeDocument/2006/relationships" id="2147483659" r:id="R93ec95e6bac8484f"/>
+    <p:sldLayoutId xmlns:r="http://schemas.openxmlformats.org/officeDocument/2006/relationships" id="2147483649" r:id="Ra32875a0d39746c7"/>
+    <p:sldLayoutId xmlns:r="http://schemas.openxmlformats.org/officeDocument/2006/relationships" id="2147483650" r:id="R4b6eb8c18c834ca5"/>
+    <p:sldLayoutId xmlns:r="http://schemas.openxmlformats.org/officeDocument/2006/relationships" id="2147483651" r:id="R34571d5ae6934791"/>
+    <p:sldLayoutId xmlns:r="http://schemas.openxmlformats.org/officeDocument/2006/relationships" id="2147483652" r:id="R44103d3edc474f12"/>
+    <p:sldLayoutId xmlns:r="http://schemas.openxmlformats.org/officeDocument/2006/relationships" id="2147483653" r:id="R8dcea10e7d16478c"/>
+    <p:sldLayoutId xmlns:r="http://schemas.openxmlformats.org/officeDocument/2006/relationships" id="2147483654" r:id="R75fcd77484954a2b"/>
+    <p:sldLayoutId xmlns:r="http://schemas.openxmlformats.org/officeDocument/2006/relationships" id="2147483655" r:id="R13b12f1eb2ac406e"/>
+    <p:sldLayoutId xmlns:r="http://schemas.openxmlformats.org/officeDocument/2006/relationships" id="2147483656" r:id="R741b8f92980e48c3"/>
+    <p:sldLayoutId xmlns:r="http://schemas.openxmlformats.org/officeDocument/2006/relationships" id="2147483657" r:id="R5cbbb94d43f94b2d"/>
+    <p:sldLayoutId xmlns:r="http://schemas.openxmlformats.org/officeDocument/2006/relationships" id="2147483658" r:id="R4308a4efaf574b2e"/>
+    <p:sldLayoutId xmlns:r="http://schemas.openxmlformats.org/officeDocument/2006/relationships" id="2147483659" r:id="R7521d21f930a4273"/>
   </p:sldLayoutIdLst>
   <p:txStyles>
     <p:titleStyle>
@@ -5406,7 +5466,7 @@
                 <a:ea typeface="Aptos"/>
                 <a:cs typeface="Aptos"/>
               </a:rPr>
-              <a:t>2026.07.25-24</a:t>
+              <a:t>2026.07.26-25</a:t>
             </a:r>
           </a:p>
         </p:txBody>
@@ -5453,7 +5513,7 @@
                 <a:ea typeface="Aptos"/>
                 <a:cs typeface="Aptos"/>
               </a:rPr>
-              <a:t>Updated 2026-07-24</a:t>
+              <a:t>Updated 2026-07-26</a:t>
             </a:r>
             <a:br/>
             <a:r>
@@ -5879,7 +5939,7 @@
                 <a:ea typeface="Aptos"/>
                 <a:cs typeface="Aptos"/>
               </a:rPr>
-              <a:t>Independent public evidence summary · 2026.07.25-24 · 2026-07-24 · Sources: EPO; Germany — official judgments; WIPO</a:t>
+              <a:t>Independent public evidence summary · 2026.07.26-25 · 2026-07-26 · Sources: EPO; Germany — official judgments; WIPO</a:t>
             </a:r>
           </a:p>
         </p:txBody>
@@ -6494,7 +6554,7 @@
                 <a:ea typeface="Aptos"/>
                 <a:cs typeface="Aptos"/>
               </a:rPr>
-              <a:t>Independent public evidence summary · 2026.07.25-24 · 2026-07-24 · Sources: EPO Register; EP3032975B2; 8 Ni 18/24 (EP); 7 O 3341/24</a:t>
+              <a:t>Independent public evidence summary · 2026.07.26-25 · 2026-07-26 · Sources: EPO Register; EP3032975B2; 8 Ni 18/24 (EP); 7 O 3341/24</a:t>
             </a:r>
           </a:p>
         </p:txBody>
@@ -7465,7 +7525,7 @@
                 <a:ea typeface="Aptos"/>
                 <a:cs typeface="Aptos"/>
               </a:rPr>
-              <a:t>Independent public evidence summary · 2026.07.25-24 · 2026-07-25 · Sources: Statistics Canada; Health Canada; NZ Ministry of Health; European Commission; FHM; FTC</a:t>
+              <a:t>Independent public evidence summary · 2026.07.26-25 · 2026-07-26 · Sources: Statistics Canada; Health Canada; NZ Ministry of Health; European Commission; FHM; FTC</a:t>
             </a:r>
           </a:p>
         </p:txBody>
@@ -7647,7 +7707,7 @@
         </p:spPr>
         <p:txBody>
           <a:bodyPr xmlns:a="http://schemas.openxmlformats.org/drawingml/2006/main" wrap="square" lIns="36576" tIns="36576" rIns="36576" bIns="36576" anchor="t">
-            <a:spAutoFit/>
+            <a:normAutofit fontScale="100000"/>
           </a:bodyPr>
           <a:lstStyle xmlns:a="http://schemas.openxmlformats.org/drawingml/2006/main"/>
           <a:p xmlns:a="http://schemas.openxmlformats.org/drawingml/2006/main">
@@ -7655,7 +7715,7 @@
               <a:buNone/>
             </a:pPr>
             <a:r>
-              <a:rPr sz="1400" b="0">
+              <a:rPr sz="1275" b="0">
                 <a:solidFill>
                   <a:srgbClr val="5B6B75"/>
                 </a:solidFill>
@@ -7767,7 +7827,7 @@
                 <a:ea typeface="Aptos"/>
                 <a:cs typeface="Aptos"/>
               </a:rPr>
-              <a:t>NZD 533.7–731.2m</a:t>
+              <a:t>NZD 274.180m</a:t>
             </a:r>
           </a:p>
         </p:txBody>
@@ -7814,7 +7874,7 @@
                 <a:ea typeface="Aptos"/>
                 <a:cs typeface="Aptos"/>
               </a:rPr>
-              <a:t>≈EUR 298.5–408.9m · ECB 2024</a:t>
+              <a:t>identified AIS/AVP subtotal · ≈EUR 153.3m</a:t>
             </a:r>
           </a:p>
         </p:txBody>
@@ -8012,7 +8072,7 @@
                 <a:ea typeface="Aptos"/>
                 <a:cs typeface="Aptos"/>
               </a:rPr>
-              <a:t>5/5 candidates remain outside the D1–D10 gate; the accepted-donor count is 0/3.</a:t>
+              <a:t>New Zealand passes 7/10: D5 failed; D8 and D10 open. Not accepted; the donor gate remains 0/3.</a:t>
             </a:r>
           </a:p>
         </p:txBody>
@@ -8436,7 +8496,7 @@
                 <a:ea typeface="Aptos"/>
                 <a:cs typeface="Aptos"/>
               </a:rPr>
-              <a:t>Independent public evidence summary · 2026.07.25-24 · 2026-07-24 · Sources: Evidence Register; WIPO IP valuation</a:t>
+              <a:t>Independent public evidence summary · 2026.07.26-25 · 2026-07-26 · Sources: Evidence Register; WIPO IP valuation</a:t>
             </a:r>
           </a:p>
         </p:txBody>
@@ -9259,7 +9319,7 @@
                 <a:ea typeface="Aptos"/>
                 <a:cs typeface="Aptos"/>
               </a:rPr>
-              <a:t>Version 2026.07.25-24 · 2026-07-24 · 6 / 6</a:t>
+              <a:t>Version 2026.07.26-25 · 2026-07-26 · 6 / 6</a:t>
             </a:r>
           </a:p>
         </p:txBody>

--- a/site/downloads/pixan-bank-deck-short-en.pptx
+++ b/site/downloads/pixan-bank-deck-short-en.pptx
@@ -2,18 +2,18 @@
 <file path=ppt/presentation.xml><?xml version="1.0" encoding="utf-8"?>
 <p:presentation xmlns:p="http://schemas.openxmlformats.org/presentationml/2006/main">
   <p:sldMasterIdLst>
-    <p:sldMasterId xmlns:r="http://schemas.openxmlformats.org/officeDocument/2006/relationships" id="2147483648" r:id="R59aee4a088b64fef"/>
+    <p:sldMasterId xmlns:r="http://schemas.openxmlformats.org/officeDocument/2006/relationships" id="2147483648" r:id="R75cfec17c4cf40e8"/>
   </p:sldMasterIdLst>
   <p:notesMasterIdLst>
-    <p:notesMasterId xmlns:r="http://schemas.openxmlformats.org/officeDocument/2006/relationships" r:id="R92b677c953e34aab"/>
+    <p:notesMasterId xmlns:r="http://schemas.openxmlformats.org/officeDocument/2006/relationships" r:id="R7f70113644204236"/>
   </p:notesMasterIdLst>
   <p:sldIdLst>
-    <p:sldId xmlns:r="http://schemas.openxmlformats.org/officeDocument/2006/relationships" id="256" r:id="R0b11da71c25c4138"/>
-    <p:sldId xmlns:r="http://schemas.openxmlformats.org/officeDocument/2006/relationships" id="257" r:id="R159fa3f18c434a9b"/>
-    <p:sldId xmlns:r="http://schemas.openxmlformats.org/officeDocument/2006/relationships" id="258" r:id="R4f6966636e81478c"/>
-    <p:sldId xmlns:r="http://schemas.openxmlformats.org/officeDocument/2006/relationships" id="259" r:id="Raf196016ac4146d3"/>
-    <p:sldId xmlns:r="http://schemas.openxmlformats.org/officeDocument/2006/relationships" id="260" r:id="R425af6752c024fa2"/>
-    <p:sldId xmlns:r="http://schemas.openxmlformats.org/officeDocument/2006/relationships" id="261" r:id="Re43aa484ebf74744"/>
+    <p:sldId xmlns:r="http://schemas.openxmlformats.org/officeDocument/2006/relationships" id="256" r:id="R29b1ae09238844b6"/>
+    <p:sldId xmlns:r="http://schemas.openxmlformats.org/officeDocument/2006/relationships" id="257" r:id="R72ed4edc056b40af"/>
+    <p:sldId xmlns:r="http://schemas.openxmlformats.org/officeDocument/2006/relationships" id="258" r:id="R4ad532a981eb4574"/>
+    <p:sldId xmlns:r="http://schemas.openxmlformats.org/officeDocument/2006/relationships" id="259" r:id="Rc948579256d34d0b"/>
+    <p:sldId xmlns:r="http://schemas.openxmlformats.org/officeDocument/2006/relationships" id="260" r:id="R7e16bc1292d84ec7"/>
+    <p:sldId xmlns:r="http://schemas.openxmlformats.org/officeDocument/2006/relationships" id="261" r:id="R0128d4d2c4e9462f"/>
   </p:sldIdLst>
   <p:sldSz cx="12191999" cy="6858000"/>
   <p:notesSz cx="6858000" cy="9144000"/>
@@ -525,7 +525,27 @@
           </a:p>
           <a:p xmlns:a="http://schemas.openxmlformats.org/drawingml/2006/main">
             <a:r>
+              <a:t>- https://www23.statcan.gc.ca/imdb/p2SV.pl?Function=getSurvey&amp;SDDS=2008</a:t>
+            </a:r>
+          </a:p>
+          <a:p xmlns:a="http://schemas.openxmlformats.org/drawingml/2006/main">
+            <a:r>
+              <a:t>- https://www23.statcan.gc.ca/imdb/p2SV.pl?Function=getSurvey&amp;SDDS=2406</a:t>
+            </a:r>
+          </a:p>
+          <a:p xmlns:a="http://schemas.openxmlformats.org/drawingml/2006/main">
+            <a:r>
               <a:t>- https://www150.statcan.gc.ca/n1/pub/36-28-0001/2025004/article/00001-eng.pdf</a:t>
+            </a:r>
+          </a:p>
+          <a:p xmlns:a="http://schemas.openxmlformats.org/drawingml/2006/main">
+            <a:r>
+              <a:t>- https://www.gov.pl/web/chemical/notification-of-electronic-cigarettes-and-refill-containers</a:t>
+            </a:r>
+          </a:p>
+          <a:p xmlns:a="http://schemas.openxmlformats.org/drawingml/2006/main">
+            <a:r>
+              <a:t>- https://www.customs.govt.nz/about-us/news/important-notices-archive/important-notices-archive-2023/reminder-classification-of-vaping-devices-and-similar</a:t>
             </a:r>
           </a:p>
           <a:p xmlns:a="http://schemas.openxmlformats.org/drawingml/2006/main">
@@ -725,7 +745,27 @@
           </a:p>
           <a:p xmlns:a="http://schemas.openxmlformats.org/drawingml/2006/main">
             <a:r>
+              <a:t>- https://www23.statcan.gc.ca/imdb/p2SV.pl?Function=getSurvey&amp;SDDS=2008</a:t>
+            </a:r>
+          </a:p>
+          <a:p xmlns:a="http://schemas.openxmlformats.org/drawingml/2006/main">
+            <a:r>
+              <a:t>- https://www23.statcan.gc.ca/imdb/p2SV.pl?Function=getSurvey&amp;SDDS=2406</a:t>
+            </a:r>
+          </a:p>
+          <a:p xmlns:a="http://schemas.openxmlformats.org/drawingml/2006/main">
+            <a:r>
               <a:t>- https://www150.statcan.gc.ca/n1/pub/36-28-0001/2025004/article/00001-eng.pdf</a:t>
+            </a:r>
+          </a:p>
+          <a:p xmlns:a="http://schemas.openxmlformats.org/drawingml/2006/main">
+            <a:r>
+              <a:t>- https://www.gov.pl/web/chemical/notification-of-electronic-cigarettes-and-refill-containers</a:t>
+            </a:r>
+          </a:p>
+          <a:p xmlns:a="http://schemas.openxmlformats.org/drawingml/2006/main">
+            <a:r>
+              <a:t>- https://www.customs.govt.nz/about-us/news/important-notices-archive/important-notices-archive-2023/reminder-classification-of-vaping-devices-and-similar</a:t>
             </a:r>
           </a:p>
           <a:p xmlns:a="http://schemas.openxmlformats.org/drawingml/2006/main">
@@ -925,7 +965,27 @@
           </a:p>
           <a:p xmlns:a="http://schemas.openxmlformats.org/drawingml/2006/main">
             <a:r>
+              <a:t>- https://www23.statcan.gc.ca/imdb/p2SV.pl?Function=getSurvey&amp;SDDS=2008</a:t>
+            </a:r>
+          </a:p>
+          <a:p xmlns:a="http://schemas.openxmlformats.org/drawingml/2006/main">
+            <a:r>
+              <a:t>- https://www23.statcan.gc.ca/imdb/p2SV.pl?Function=getSurvey&amp;SDDS=2406</a:t>
+            </a:r>
+          </a:p>
+          <a:p xmlns:a="http://schemas.openxmlformats.org/drawingml/2006/main">
+            <a:r>
               <a:t>- https://www150.statcan.gc.ca/n1/pub/36-28-0001/2025004/article/00001-eng.pdf</a:t>
+            </a:r>
+          </a:p>
+          <a:p xmlns:a="http://schemas.openxmlformats.org/drawingml/2006/main">
+            <a:r>
+              <a:t>- https://www.gov.pl/web/chemical/notification-of-electronic-cigarettes-and-refill-containers</a:t>
+            </a:r>
+          </a:p>
+          <a:p xmlns:a="http://schemas.openxmlformats.org/drawingml/2006/main">
+            <a:r>
+              <a:t>- https://www.customs.govt.nz/about-us/news/important-notices-archive/important-notices-archive-2023/reminder-classification-of-vaping-devices-and-similar</a:t>
             </a:r>
           </a:p>
           <a:p xmlns:a="http://schemas.openxmlformats.org/drawingml/2006/main">
@@ -1125,7 +1185,27 @@
           </a:p>
           <a:p xmlns:a="http://schemas.openxmlformats.org/drawingml/2006/main">
             <a:r>
+              <a:t>- https://www23.statcan.gc.ca/imdb/p2SV.pl?Function=getSurvey&amp;SDDS=2008</a:t>
+            </a:r>
+          </a:p>
+          <a:p xmlns:a="http://schemas.openxmlformats.org/drawingml/2006/main">
+            <a:r>
+              <a:t>- https://www23.statcan.gc.ca/imdb/p2SV.pl?Function=getSurvey&amp;SDDS=2406</a:t>
+            </a:r>
+          </a:p>
+          <a:p xmlns:a="http://schemas.openxmlformats.org/drawingml/2006/main">
+            <a:r>
               <a:t>- https://www150.statcan.gc.ca/n1/pub/36-28-0001/2025004/article/00001-eng.pdf</a:t>
+            </a:r>
+          </a:p>
+          <a:p xmlns:a="http://schemas.openxmlformats.org/drawingml/2006/main">
+            <a:r>
+              <a:t>- https://www.gov.pl/web/chemical/notification-of-electronic-cigarettes-and-refill-containers</a:t>
+            </a:r>
+          </a:p>
+          <a:p xmlns:a="http://schemas.openxmlformats.org/drawingml/2006/main">
+            <a:r>
+              <a:t>- https://www.customs.govt.nz/about-us/news/important-notices-archive/important-notices-archive-2023/reminder-classification-of-vaping-devices-and-similar</a:t>
             </a:r>
           </a:p>
           <a:p xmlns:a="http://schemas.openxmlformats.org/drawingml/2006/main">
@@ -1325,7 +1405,27 @@
           </a:p>
           <a:p xmlns:a="http://schemas.openxmlformats.org/drawingml/2006/main">
             <a:r>
+              <a:t>- https://www23.statcan.gc.ca/imdb/p2SV.pl?Function=getSurvey&amp;SDDS=2008</a:t>
+            </a:r>
+          </a:p>
+          <a:p xmlns:a="http://schemas.openxmlformats.org/drawingml/2006/main">
+            <a:r>
+              <a:t>- https://www23.statcan.gc.ca/imdb/p2SV.pl?Function=getSurvey&amp;SDDS=2406</a:t>
+            </a:r>
+          </a:p>
+          <a:p xmlns:a="http://schemas.openxmlformats.org/drawingml/2006/main">
+            <a:r>
               <a:t>- https://www150.statcan.gc.ca/n1/pub/36-28-0001/2025004/article/00001-eng.pdf</a:t>
+            </a:r>
+          </a:p>
+          <a:p xmlns:a="http://schemas.openxmlformats.org/drawingml/2006/main">
+            <a:r>
+              <a:t>- https://www.gov.pl/web/chemical/notification-of-electronic-cigarettes-and-refill-containers</a:t>
+            </a:r>
+          </a:p>
+          <a:p xmlns:a="http://schemas.openxmlformats.org/drawingml/2006/main">
+            <a:r>
+              <a:t>- https://www.customs.govt.nz/about-us/news/important-notices-archive/important-notices-archive-2023/reminder-classification-of-vaping-devices-and-similar</a:t>
             </a:r>
           </a:p>
           <a:p xmlns:a="http://schemas.openxmlformats.org/drawingml/2006/main">
@@ -1525,7 +1625,27 @@
           </a:p>
           <a:p xmlns:a="http://schemas.openxmlformats.org/drawingml/2006/main">
             <a:r>
+              <a:t>- https://www23.statcan.gc.ca/imdb/p2SV.pl?Function=getSurvey&amp;SDDS=2008</a:t>
+            </a:r>
+          </a:p>
+          <a:p xmlns:a="http://schemas.openxmlformats.org/drawingml/2006/main">
+            <a:r>
+              <a:t>- https://www23.statcan.gc.ca/imdb/p2SV.pl?Function=getSurvey&amp;SDDS=2406</a:t>
+            </a:r>
+          </a:p>
+          <a:p xmlns:a="http://schemas.openxmlformats.org/drawingml/2006/main">
+            <a:r>
               <a:t>- https://www150.statcan.gc.ca/n1/pub/36-28-0001/2025004/article/00001-eng.pdf</a:t>
+            </a:r>
+          </a:p>
+          <a:p xmlns:a="http://schemas.openxmlformats.org/drawingml/2006/main">
+            <a:r>
+              <a:t>- https://www.gov.pl/web/chemical/notification-of-electronic-cigarettes-and-refill-containers</a:t>
+            </a:r>
+          </a:p>
+          <a:p xmlns:a="http://schemas.openxmlformats.org/drawingml/2006/main">
+            <a:r>
+              <a:t>- https://www.customs.govt.nz/about-us/news/important-notices-archive/important-notices-archive-2023/reminder-classification-of-vaping-devices-and-similar</a:t>
             </a:r>
           </a:p>
           <a:p xmlns:a="http://schemas.openxmlformats.org/drawingml/2006/main">
@@ -4556,17 +4676,17 @@
   </p:cSld>
   <p:clrMap bg1="lt1" tx1="dk1" bg2="lt2" tx2="dk2" accent1="accent1" accent2="accent2" accent3="accent3" accent4="accent4" accent5="accent5" accent6="accent6" hlink="hlink" folHlink="folHlink"/>
   <p:sldLayoutIdLst>
-    <p:sldLayoutId xmlns:r="http://schemas.openxmlformats.org/officeDocument/2006/relationships" id="2147483649" r:id="Ra32875a0d39746c7"/>
-    <p:sldLayoutId xmlns:r="http://schemas.openxmlformats.org/officeDocument/2006/relationships" id="2147483650" r:id="R4b6eb8c18c834ca5"/>
-    <p:sldLayoutId xmlns:r="http://schemas.openxmlformats.org/officeDocument/2006/relationships" id="2147483651" r:id="R34571d5ae6934791"/>
-    <p:sldLayoutId xmlns:r="http://schemas.openxmlformats.org/officeDocument/2006/relationships" id="2147483652" r:id="R44103d3edc474f12"/>
-    <p:sldLayoutId xmlns:r="http://schemas.openxmlformats.org/officeDocument/2006/relationships" id="2147483653" r:id="R8dcea10e7d16478c"/>
-    <p:sldLayoutId xmlns:r="http://schemas.openxmlformats.org/officeDocument/2006/relationships" id="2147483654" r:id="R75fcd77484954a2b"/>
-    <p:sldLayoutId xmlns:r="http://schemas.openxmlformats.org/officeDocument/2006/relationships" id="2147483655" r:id="R13b12f1eb2ac406e"/>
-    <p:sldLayoutId xmlns:r="http://schemas.openxmlformats.org/officeDocument/2006/relationships" id="2147483656" r:id="R741b8f92980e48c3"/>
-    <p:sldLayoutId xmlns:r="http://schemas.openxmlformats.org/officeDocument/2006/relationships" id="2147483657" r:id="R5cbbb94d43f94b2d"/>
-    <p:sldLayoutId xmlns:r="http://schemas.openxmlformats.org/officeDocument/2006/relationships" id="2147483658" r:id="R4308a4efaf574b2e"/>
-    <p:sldLayoutId xmlns:r="http://schemas.openxmlformats.org/officeDocument/2006/relationships" id="2147483659" r:id="R7521d21f930a4273"/>
+    <p:sldLayoutId xmlns:r="http://schemas.openxmlformats.org/officeDocument/2006/relationships" id="2147483649" r:id="Raa54a991895d4f6c"/>
+    <p:sldLayoutId xmlns:r="http://schemas.openxmlformats.org/officeDocument/2006/relationships" id="2147483650" r:id="R33726160e87f44fb"/>
+    <p:sldLayoutId xmlns:r="http://schemas.openxmlformats.org/officeDocument/2006/relationships" id="2147483651" r:id="Re27c9a13aef04f7a"/>
+    <p:sldLayoutId xmlns:r="http://schemas.openxmlformats.org/officeDocument/2006/relationships" id="2147483652" r:id="Rffba2bc5531b4202"/>
+    <p:sldLayoutId xmlns:r="http://schemas.openxmlformats.org/officeDocument/2006/relationships" id="2147483653" r:id="R733dee1646bd4da9"/>
+    <p:sldLayoutId xmlns:r="http://schemas.openxmlformats.org/officeDocument/2006/relationships" id="2147483654" r:id="R9023138c39f149ef"/>
+    <p:sldLayoutId xmlns:r="http://schemas.openxmlformats.org/officeDocument/2006/relationships" id="2147483655" r:id="R1d016956cff74820"/>
+    <p:sldLayoutId xmlns:r="http://schemas.openxmlformats.org/officeDocument/2006/relationships" id="2147483656" r:id="R56126f598a7e4f6e"/>
+    <p:sldLayoutId xmlns:r="http://schemas.openxmlformats.org/officeDocument/2006/relationships" id="2147483657" r:id="R827c19d0dd074f13"/>
+    <p:sldLayoutId xmlns:r="http://schemas.openxmlformats.org/officeDocument/2006/relationships" id="2147483658" r:id="Rae10b44bb8f44cb1"/>
+    <p:sldLayoutId xmlns:r="http://schemas.openxmlformats.org/officeDocument/2006/relationships" id="2147483659" r:id="Ra7cbd7a762354414"/>
   </p:sldLayoutIdLst>
   <p:txStyles>
     <p:titleStyle>
@@ -5466,7 +5586,7 @@
                 <a:ea typeface="Aptos"/>
                 <a:cs typeface="Aptos"/>
               </a:rPr>
-              <a:t>2026.07.26-25</a:t>
+              <a:t>2026.07.27-26</a:t>
             </a:r>
           </a:p>
         </p:txBody>
@@ -5513,7 +5633,7 @@
                 <a:ea typeface="Aptos"/>
                 <a:cs typeface="Aptos"/>
               </a:rPr>
-              <a:t>Updated 2026-07-26</a:t>
+              <a:t>Updated 2026-07-27</a:t>
             </a:r>
             <a:br/>
             <a:r>
@@ -5939,7 +6059,7 @@
                 <a:ea typeface="Aptos"/>
                 <a:cs typeface="Aptos"/>
               </a:rPr>
-              <a:t>Independent public evidence summary · 2026.07.26-25 · 2026-07-26 · Sources: EPO; Germany — official judgments; WIPO</a:t>
+              <a:t>Independent public evidence summary · 2026.07.27-26 · 2026-07-27 · Sources: EPO; Germany — official judgments; WIPO</a:t>
             </a:r>
           </a:p>
         </p:txBody>
@@ -6554,7 +6674,7 @@
                 <a:ea typeface="Aptos"/>
                 <a:cs typeface="Aptos"/>
               </a:rPr>
-              <a:t>Independent public evidence summary · 2026.07.26-25 · 2026-07-26 · Sources: EPO Register; EP3032975B2; 8 Ni 18/24 (EP); 7 O 3341/24</a:t>
+              <a:t>Independent public evidence summary · 2026.07.27-26 · 2026-07-27 · Sources: EPO Register; EP3032975B2; 8 Ni 18/24 (EP); 7 O 3341/24</a:t>
             </a:r>
           </a:p>
         </p:txBody>
@@ -7525,7 +7645,7 @@
                 <a:ea typeface="Aptos"/>
                 <a:cs typeface="Aptos"/>
               </a:rPr>
-              <a:t>Independent public evidence summary · 2026.07.26-25 · 2026-07-26 · Sources: Statistics Canada; Health Canada; NZ Ministry of Health; European Commission; FHM; FTC</a:t>
+              <a:t>Independent public evidence summary · 2026.07.27-26 · 2026-07-27 · Sources: Statistics Canada; Health Canada; NZ Ministry of Health; European Commission; FHM; FTC</a:t>
             </a:r>
           </a:p>
         </p:txBody>
@@ -8223,7 +8343,7 @@
                 <a:ea typeface="Aptos"/>
                 <a:cs typeface="Aptos"/>
               </a:rPr>
-              <a:t>Canada 2024 — retail CAD 1.219160bn (≈EUR 822.6m; ECB 2024); shipments CAD 1.160754bn (≈EUR 783.2m; ECB 2024); 7/10 (D5/D7/D10 open). FTC 2021: USD 2.763bn (≈EUR 2.336bn; ECB 2021), manufacturer reporting. Do not sum.</a:t>
+              <a:t>Canada 2024: retail CAD 1.219160bn (≈EUR 822.6m; ECB 2024); shipments CAD 1.160754bn (≈EUR 783.2m; ECB 2024). Canada and New Zealand are 7/10 but not accepted. Poland is the next official-data programme. FTC 2021: USD 2.763bn (≈EUR 2.336bn; ECB 2021). Do not sum.</a:t>
             </a:r>
           </a:p>
         </p:txBody>
@@ -8496,7 +8616,7 @@
                 <a:ea typeface="Aptos"/>
                 <a:cs typeface="Aptos"/>
               </a:rPr>
-              <a:t>Independent public evidence summary · 2026.07.26-25 · 2026-07-26 · Sources: Evidence Register; WIPO IP valuation</a:t>
+              <a:t>Independent public evidence summary · 2026.07.27-26 · 2026-07-27 · Sources: Evidence Register; WIPO IP valuation</a:t>
             </a:r>
           </a:p>
         </p:txBody>
@@ -9319,7 +9439,7 @@
                 <a:ea typeface="Aptos"/>
                 <a:cs typeface="Aptos"/>
               </a:rPr>
-              <a:t>Version 2026.07.26-25 · 2026-07-26 · 6 / 6</a:t>
+              <a:t>Version 2026.07.27-26 · 2026-07-27 · 6 / 6</a:t>
             </a:r>
           </a:p>
         </p:txBody>

--- a/site/downloads/pixan-bank-deck-short-en.pptx
+++ b/site/downloads/pixan-bank-deck-short-en.pptx
@@ -2,18 +2,18 @@
 <file path=ppt/presentation.xml><?xml version="1.0" encoding="utf-8"?>
 <p:presentation xmlns:p="http://schemas.openxmlformats.org/presentationml/2006/main">
   <p:sldMasterIdLst>
-    <p:sldMasterId xmlns:r="http://schemas.openxmlformats.org/officeDocument/2006/relationships" id="2147483648" r:id="R75cfec17c4cf40e8"/>
+    <p:sldMasterId xmlns:r="http://schemas.openxmlformats.org/officeDocument/2006/relationships" id="2147483648" r:id="Ra80dc72820b94f3f"/>
   </p:sldMasterIdLst>
   <p:notesMasterIdLst>
-    <p:notesMasterId xmlns:r="http://schemas.openxmlformats.org/officeDocument/2006/relationships" r:id="R7f70113644204236"/>
+    <p:notesMasterId xmlns:r="http://schemas.openxmlformats.org/officeDocument/2006/relationships" r:id="R1195bf433ad04b24"/>
   </p:notesMasterIdLst>
   <p:sldIdLst>
-    <p:sldId xmlns:r="http://schemas.openxmlformats.org/officeDocument/2006/relationships" id="256" r:id="R29b1ae09238844b6"/>
-    <p:sldId xmlns:r="http://schemas.openxmlformats.org/officeDocument/2006/relationships" id="257" r:id="R72ed4edc056b40af"/>
-    <p:sldId xmlns:r="http://schemas.openxmlformats.org/officeDocument/2006/relationships" id="258" r:id="R4ad532a981eb4574"/>
-    <p:sldId xmlns:r="http://schemas.openxmlformats.org/officeDocument/2006/relationships" id="259" r:id="Rc948579256d34d0b"/>
-    <p:sldId xmlns:r="http://schemas.openxmlformats.org/officeDocument/2006/relationships" id="260" r:id="R7e16bc1292d84ec7"/>
-    <p:sldId xmlns:r="http://schemas.openxmlformats.org/officeDocument/2006/relationships" id="261" r:id="R0128d4d2c4e9462f"/>
+    <p:sldId xmlns:r="http://schemas.openxmlformats.org/officeDocument/2006/relationships" id="256" r:id="R3545c539b616422d"/>
+    <p:sldId xmlns:r="http://schemas.openxmlformats.org/officeDocument/2006/relationships" id="257" r:id="R5591cc7da4384a85"/>
+    <p:sldId xmlns:r="http://schemas.openxmlformats.org/officeDocument/2006/relationships" id="258" r:id="R3eed9e9d46c044b1"/>
+    <p:sldId xmlns:r="http://schemas.openxmlformats.org/officeDocument/2006/relationships" id="259" r:id="R53e4a861979d4b23"/>
+    <p:sldId xmlns:r="http://schemas.openxmlformats.org/officeDocument/2006/relationships" id="260" r:id="R14d72e327b5e4c7d"/>
+    <p:sldId xmlns:r="http://schemas.openxmlformats.org/officeDocument/2006/relationships" id="261" r:id="Rb9ab6da6e4b4480a"/>
   </p:sldIdLst>
   <p:sldSz cx="12191999" cy="6858000"/>
   <p:notesSz cx="6858000" cy="9144000"/>
@@ -540,6 +540,26 @@
           </a:p>
           <a:p xmlns:a="http://schemas.openxmlformats.org/drawingml/2006/main">
             <a:r>
+              <a:t>- https://datahelpdesk.worldbank.org/knowledgebase/articles/898581-api-basic-call-structures</a:t>
+            </a:r>
+          </a:p>
+          <a:p xmlns:a="http://schemas.openxmlformats.org/drawingml/2006/main">
+            <a:r>
+              <a:t>- https://www.who.int/data/gho/info/gho-odata-api</a:t>
+            </a:r>
+          </a:p>
+          <a:p xmlns:a="http://schemas.openxmlformats.org/drawingml/2006/main">
+            <a:r>
+              <a:t>- https://uncomtrade.org/docs/un-comtrade-api/</a:t>
+            </a:r>
+          </a:p>
+          <a:p xmlns:a="http://schemas.openxmlformats.org/drawingml/2006/main">
+            <a:r>
+              <a:t>- https://www.podatki.gov.pl/akcyza/stawki-podatkowe/</a:t>
+            </a:r>
+          </a:p>
+          <a:p xmlns:a="http://schemas.openxmlformats.org/drawingml/2006/main">
+            <a:r>
               <a:t>- https://www.gov.pl/web/chemical/notification-of-electronic-cigarettes-and-refill-containers</a:t>
             </a:r>
           </a:p>
@@ -760,6 +780,26 @@
           </a:p>
           <a:p xmlns:a="http://schemas.openxmlformats.org/drawingml/2006/main">
             <a:r>
+              <a:t>- https://datahelpdesk.worldbank.org/knowledgebase/articles/898581-api-basic-call-structures</a:t>
+            </a:r>
+          </a:p>
+          <a:p xmlns:a="http://schemas.openxmlformats.org/drawingml/2006/main">
+            <a:r>
+              <a:t>- https://www.who.int/data/gho/info/gho-odata-api</a:t>
+            </a:r>
+          </a:p>
+          <a:p xmlns:a="http://schemas.openxmlformats.org/drawingml/2006/main">
+            <a:r>
+              <a:t>- https://uncomtrade.org/docs/un-comtrade-api/</a:t>
+            </a:r>
+          </a:p>
+          <a:p xmlns:a="http://schemas.openxmlformats.org/drawingml/2006/main">
+            <a:r>
+              <a:t>- https://www.podatki.gov.pl/akcyza/stawki-podatkowe/</a:t>
+            </a:r>
+          </a:p>
+          <a:p xmlns:a="http://schemas.openxmlformats.org/drawingml/2006/main">
+            <a:r>
               <a:t>- https://www.gov.pl/web/chemical/notification-of-electronic-cigarettes-and-refill-containers</a:t>
             </a:r>
           </a:p>
@@ -980,6 +1020,26 @@
           </a:p>
           <a:p xmlns:a="http://schemas.openxmlformats.org/drawingml/2006/main">
             <a:r>
+              <a:t>- https://datahelpdesk.worldbank.org/knowledgebase/articles/898581-api-basic-call-structures</a:t>
+            </a:r>
+          </a:p>
+          <a:p xmlns:a="http://schemas.openxmlformats.org/drawingml/2006/main">
+            <a:r>
+              <a:t>- https://www.who.int/data/gho/info/gho-odata-api</a:t>
+            </a:r>
+          </a:p>
+          <a:p xmlns:a="http://schemas.openxmlformats.org/drawingml/2006/main">
+            <a:r>
+              <a:t>- https://uncomtrade.org/docs/un-comtrade-api/</a:t>
+            </a:r>
+          </a:p>
+          <a:p xmlns:a="http://schemas.openxmlformats.org/drawingml/2006/main">
+            <a:r>
+              <a:t>- https://www.podatki.gov.pl/akcyza/stawki-podatkowe/</a:t>
+            </a:r>
+          </a:p>
+          <a:p xmlns:a="http://schemas.openxmlformats.org/drawingml/2006/main">
+            <a:r>
               <a:t>- https://www.gov.pl/web/chemical/notification-of-electronic-cigarettes-and-refill-containers</a:t>
             </a:r>
           </a:p>
@@ -1200,6 +1260,26 @@
           </a:p>
           <a:p xmlns:a="http://schemas.openxmlformats.org/drawingml/2006/main">
             <a:r>
+              <a:t>- https://datahelpdesk.worldbank.org/knowledgebase/articles/898581-api-basic-call-structures</a:t>
+            </a:r>
+          </a:p>
+          <a:p xmlns:a="http://schemas.openxmlformats.org/drawingml/2006/main">
+            <a:r>
+              <a:t>- https://www.who.int/data/gho/info/gho-odata-api</a:t>
+            </a:r>
+          </a:p>
+          <a:p xmlns:a="http://schemas.openxmlformats.org/drawingml/2006/main">
+            <a:r>
+              <a:t>- https://uncomtrade.org/docs/un-comtrade-api/</a:t>
+            </a:r>
+          </a:p>
+          <a:p xmlns:a="http://schemas.openxmlformats.org/drawingml/2006/main">
+            <a:r>
+              <a:t>- https://www.podatki.gov.pl/akcyza/stawki-podatkowe/</a:t>
+            </a:r>
+          </a:p>
+          <a:p xmlns:a="http://schemas.openxmlformats.org/drawingml/2006/main">
+            <a:r>
               <a:t>- https://www.gov.pl/web/chemical/notification-of-electronic-cigarettes-and-refill-containers</a:t>
             </a:r>
           </a:p>
@@ -1420,6 +1500,26 @@
           </a:p>
           <a:p xmlns:a="http://schemas.openxmlformats.org/drawingml/2006/main">
             <a:r>
+              <a:t>- https://datahelpdesk.worldbank.org/knowledgebase/articles/898581-api-basic-call-structures</a:t>
+            </a:r>
+          </a:p>
+          <a:p xmlns:a="http://schemas.openxmlformats.org/drawingml/2006/main">
+            <a:r>
+              <a:t>- https://www.who.int/data/gho/info/gho-odata-api</a:t>
+            </a:r>
+          </a:p>
+          <a:p xmlns:a="http://schemas.openxmlformats.org/drawingml/2006/main">
+            <a:r>
+              <a:t>- https://uncomtrade.org/docs/un-comtrade-api/</a:t>
+            </a:r>
+          </a:p>
+          <a:p xmlns:a="http://schemas.openxmlformats.org/drawingml/2006/main">
+            <a:r>
+              <a:t>- https://www.podatki.gov.pl/akcyza/stawki-podatkowe/</a:t>
+            </a:r>
+          </a:p>
+          <a:p xmlns:a="http://schemas.openxmlformats.org/drawingml/2006/main">
+            <a:r>
               <a:t>- https://www.gov.pl/web/chemical/notification-of-electronic-cigarettes-and-refill-containers</a:t>
             </a:r>
           </a:p>
@@ -1636,6 +1736,26 @@
           <a:p xmlns:a="http://schemas.openxmlformats.org/drawingml/2006/main">
             <a:r>
               <a:t>- https://www150.statcan.gc.ca/n1/pub/36-28-0001/2025004/article/00001-eng.pdf</a:t>
+            </a:r>
+          </a:p>
+          <a:p xmlns:a="http://schemas.openxmlformats.org/drawingml/2006/main">
+            <a:r>
+              <a:t>- https://datahelpdesk.worldbank.org/knowledgebase/articles/898581-api-basic-call-structures</a:t>
+            </a:r>
+          </a:p>
+          <a:p xmlns:a="http://schemas.openxmlformats.org/drawingml/2006/main">
+            <a:r>
+              <a:t>- https://www.who.int/data/gho/info/gho-odata-api</a:t>
+            </a:r>
+          </a:p>
+          <a:p xmlns:a="http://schemas.openxmlformats.org/drawingml/2006/main">
+            <a:r>
+              <a:t>- https://uncomtrade.org/docs/un-comtrade-api/</a:t>
+            </a:r>
+          </a:p>
+          <a:p xmlns:a="http://schemas.openxmlformats.org/drawingml/2006/main">
+            <a:r>
+              <a:t>- https://www.podatki.gov.pl/akcyza/stawki-podatkowe/</a:t>
             </a:r>
           </a:p>
           <a:p xmlns:a="http://schemas.openxmlformats.org/drawingml/2006/main">
@@ -4676,17 +4796,17 @@
   </p:cSld>
   <p:clrMap bg1="lt1" tx1="dk1" bg2="lt2" tx2="dk2" accent1="accent1" accent2="accent2" accent3="accent3" accent4="accent4" accent5="accent5" accent6="accent6" hlink="hlink" folHlink="folHlink"/>
   <p:sldLayoutIdLst>
-    <p:sldLayoutId xmlns:r="http://schemas.openxmlformats.org/officeDocument/2006/relationships" id="2147483649" r:id="Raa54a991895d4f6c"/>
-    <p:sldLayoutId xmlns:r="http://schemas.openxmlformats.org/officeDocument/2006/relationships" id="2147483650" r:id="R33726160e87f44fb"/>
-    <p:sldLayoutId xmlns:r="http://schemas.openxmlformats.org/officeDocument/2006/relationships" id="2147483651" r:id="Re27c9a13aef04f7a"/>
-    <p:sldLayoutId xmlns:r="http://schemas.openxmlformats.org/officeDocument/2006/relationships" id="2147483652" r:id="Rffba2bc5531b4202"/>
-    <p:sldLayoutId xmlns:r="http://schemas.openxmlformats.org/officeDocument/2006/relationships" id="2147483653" r:id="R733dee1646bd4da9"/>
-    <p:sldLayoutId xmlns:r="http://schemas.openxmlformats.org/officeDocument/2006/relationships" id="2147483654" r:id="R9023138c39f149ef"/>
-    <p:sldLayoutId xmlns:r="http://schemas.openxmlformats.org/officeDocument/2006/relationships" id="2147483655" r:id="R1d016956cff74820"/>
-    <p:sldLayoutId xmlns:r="http://schemas.openxmlformats.org/officeDocument/2006/relationships" id="2147483656" r:id="R56126f598a7e4f6e"/>
-    <p:sldLayoutId xmlns:r="http://schemas.openxmlformats.org/officeDocument/2006/relationships" id="2147483657" r:id="R827c19d0dd074f13"/>
-    <p:sldLayoutId xmlns:r="http://schemas.openxmlformats.org/officeDocument/2006/relationships" id="2147483658" r:id="Rae10b44bb8f44cb1"/>
-    <p:sldLayoutId xmlns:r="http://schemas.openxmlformats.org/officeDocument/2006/relationships" id="2147483659" r:id="Ra7cbd7a762354414"/>
+    <p:sldLayoutId xmlns:r="http://schemas.openxmlformats.org/officeDocument/2006/relationships" id="2147483649" r:id="R48414fcdf8d541ed"/>
+    <p:sldLayoutId xmlns:r="http://schemas.openxmlformats.org/officeDocument/2006/relationships" id="2147483650" r:id="R766c442e5328469b"/>
+    <p:sldLayoutId xmlns:r="http://schemas.openxmlformats.org/officeDocument/2006/relationships" id="2147483651" r:id="Rec4905bacbd04fea"/>
+    <p:sldLayoutId xmlns:r="http://schemas.openxmlformats.org/officeDocument/2006/relationships" id="2147483652" r:id="R653cafab80ca4500"/>
+    <p:sldLayoutId xmlns:r="http://schemas.openxmlformats.org/officeDocument/2006/relationships" id="2147483653" r:id="R94be88aaef7945c6"/>
+    <p:sldLayoutId xmlns:r="http://schemas.openxmlformats.org/officeDocument/2006/relationships" id="2147483654" r:id="Rd045412596eb42ad"/>
+    <p:sldLayoutId xmlns:r="http://schemas.openxmlformats.org/officeDocument/2006/relationships" id="2147483655" r:id="R785cc0abb6a0405f"/>
+    <p:sldLayoutId xmlns:r="http://schemas.openxmlformats.org/officeDocument/2006/relationships" id="2147483656" r:id="R676b6f674e7349f4"/>
+    <p:sldLayoutId xmlns:r="http://schemas.openxmlformats.org/officeDocument/2006/relationships" id="2147483657" r:id="Rf3cf40a6dd5b4afb"/>
+    <p:sldLayoutId xmlns:r="http://schemas.openxmlformats.org/officeDocument/2006/relationships" id="2147483658" r:id="Rf9b26f240e454c8a"/>
+    <p:sldLayoutId xmlns:r="http://schemas.openxmlformats.org/officeDocument/2006/relationships" id="2147483659" r:id="R86df889d08b54146"/>
   </p:sldLayoutIdLst>
   <p:txStyles>
     <p:titleStyle>
@@ -5586,7 +5706,7 @@
                 <a:ea typeface="Aptos"/>
                 <a:cs typeface="Aptos"/>
               </a:rPr>
-              <a:t>2026.07.27-26</a:t>
+              <a:t>2026.07.27-27</a:t>
             </a:r>
           </a:p>
         </p:txBody>
@@ -6059,7 +6179,7 @@
                 <a:ea typeface="Aptos"/>
                 <a:cs typeface="Aptos"/>
               </a:rPr>
-              <a:t>Independent public evidence summary · 2026.07.27-26 · 2026-07-27 · Sources: EPO; Germany — official judgments; WIPO</a:t>
+              <a:t>Independent public evidence summary · 2026.07.27-27 · 2026-07-27 · Sources: EPO; Germany — official judgments; WIPO</a:t>
             </a:r>
           </a:p>
         </p:txBody>
@@ -6674,7 +6794,7 @@
                 <a:ea typeface="Aptos"/>
                 <a:cs typeface="Aptos"/>
               </a:rPr>
-              <a:t>Independent public evidence summary · 2026.07.27-26 · 2026-07-27 · Sources: EPO Register; EP3032975B2; 8 Ni 18/24 (EP); 7 O 3341/24</a:t>
+              <a:t>Independent public evidence summary · 2026.07.27-27 · 2026-07-27 · Sources: EPO Register; EP3032975B2; 8 Ni 18/24 (EP); 7 O 3341/24</a:t>
             </a:r>
           </a:p>
         </p:txBody>
@@ -7645,7 +7765,7 @@
                 <a:ea typeface="Aptos"/>
                 <a:cs typeface="Aptos"/>
               </a:rPr>
-              <a:t>Independent public evidence summary · 2026.07.27-26 · 2026-07-27 · Sources: Statistics Canada; Health Canada; NZ Ministry of Health; European Commission; FHM; FTC</a:t>
+              <a:t>Independent public evidence summary · 2026.07.27-27 · 2026-07-27 · Sources: World Bank; Statistics Canada; Health Canada; NZ Ministry of Health; Sejm; FHM; FTC</a:t>
             </a:r>
           </a:p>
         </p:txBody>
@@ -7796,7 +7916,7 @@
                 <a:ea typeface="Aptos"/>
                 <a:cs typeface="Aptos"/>
               </a:rPr>
-              <a:t>34 + 36</a:t>
+              <a:t>195</a:t>
             </a:r>
           </a:p>
         </p:txBody>
@@ -7843,7 +7963,7 @@
                 <a:ea typeface="Aptos"/>
                 <a:cs typeface="Aptos"/>
               </a:rPr>
-              <a:t>34 market measures across 7 countries + 36 Swedish FHM register counts; not sales</a:t>
+              <a:t>578 WB records; 39 market measures + 36 Swedish FHM register counts; not sales</a:t>
             </a:r>
           </a:p>
         </p:txBody>
@@ -8343,7 +8463,7 @@
                 <a:ea typeface="Aptos"/>
                 <a:cs typeface="Aptos"/>
               </a:rPr>
-              <a:t>Canada 2024: retail CAD 1.219160bn (≈EUR 822.6m; ECB 2024); shipments CAD 1.160754bn (≈EUR 783.2m; ECB 2024). Canada and New Zealand are 7/10 but not accepted. Poland is the next official-data programme. FTC 2021: USD 2.763bn (≈EUR 2.336bn; ECB 2021). Do not sum.</a:t>
+              <a:t>Base: 195/578 WB; not sales. Poland 2020–23 flow; 2025 tax bridge 4,382,500 devices / 62,500 sets. Canada CAD 1.219160bn (≈EUR 822.6m; ECB 2024); Health Canada shipments CAD 1.160754bn (≈EUR 783.2m; ECB 2024); FTC USD 2.763bn (≈EUR 2.336bn; ECB 2021). Euromonitor 0/6; donor 0/3.</a:t>
             </a:r>
           </a:p>
         </p:txBody>
@@ -8616,7 +8736,7 @@
                 <a:ea typeface="Aptos"/>
                 <a:cs typeface="Aptos"/>
               </a:rPr>
-              <a:t>Independent public evidence summary · 2026.07.27-26 · 2026-07-27 · Sources: Evidence Register; WIPO IP valuation</a:t>
+              <a:t>Independent public evidence summary · 2026.07.27-27 · 2026-07-27 · Sources: Evidence Register; WIPO IP valuation</a:t>
             </a:r>
           </a:p>
         </p:txBody>
@@ -9439,7 +9559,7 @@
                 <a:ea typeface="Aptos"/>
                 <a:cs typeface="Aptos"/>
               </a:rPr>
-              <a:t>Version 2026.07.27-26 · 2026-07-27 · 6 / 6</a:t>
+              <a:t>Version 2026.07.27-27 · 2026-07-27 · 6 / 6</a:t>
             </a:r>
           </a:p>
         </p:txBody>

--- a/site/downloads/pixan-bank-deck-short-en.pptx
+++ b/site/downloads/pixan-bank-deck-short-en.pptx
@@ -2,18 +2,18 @@
 <file path=ppt/presentation.xml><?xml version="1.0" encoding="utf-8"?>
 <p:presentation xmlns:p="http://schemas.openxmlformats.org/presentationml/2006/main">
   <p:sldMasterIdLst>
-    <p:sldMasterId xmlns:r="http://schemas.openxmlformats.org/officeDocument/2006/relationships" id="2147483648" r:id="Ra80dc72820b94f3f"/>
+    <p:sldMasterId xmlns:r="http://schemas.openxmlformats.org/officeDocument/2006/relationships" id="2147483648" r:id="R30ff33fe07b247e8"/>
   </p:sldMasterIdLst>
   <p:notesMasterIdLst>
-    <p:notesMasterId xmlns:r="http://schemas.openxmlformats.org/officeDocument/2006/relationships" r:id="R1195bf433ad04b24"/>
+    <p:notesMasterId xmlns:r="http://schemas.openxmlformats.org/officeDocument/2006/relationships" r:id="R91448c63c5cb46af"/>
   </p:notesMasterIdLst>
   <p:sldIdLst>
-    <p:sldId xmlns:r="http://schemas.openxmlformats.org/officeDocument/2006/relationships" id="256" r:id="R3545c539b616422d"/>
-    <p:sldId xmlns:r="http://schemas.openxmlformats.org/officeDocument/2006/relationships" id="257" r:id="R5591cc7da4384a85"/>
-    <p:sldId xmlns:r="http://schemas.openxmlformats.org/officeDocument/2006/relationships" id="258" r:id="R3eed9e9d46c044b1"/>
-    <p:sldId xmlns:r="http://schemas.openxmlformats.org/officeDocument/2006/relationships" id="259" r:id="R53e4a861979d4b23"/>
-    <p:sldId xmlns:r="http://schemas.openxmlformats.org/officeDocument/2006/relationships" id="260" r:id="R14d72e327b5e4c7d"/>
-    <p:sldId xmlns:r="http://schemas.openxmlformats.org/officeDocument/2006/relationships" id="261" r:id="Rb9ab6da6e4b4480a"/>
+    <p:sldId xmlns:r="http://schemas.openxmlformats.org/officeDocument/2006/relationships" id="256" r:id="Rbab244f7fcc04a31"/>
+    <p:sldId xmlns:r="http://schemas.openxmlformats.org/officeDocument/2006/relationships" id="257" r:id="Rd56f50e35740471a"/>
+    <p:sldId xmlns:r="http://schemas.openxmlformats.org/officeDocument/2006/relationships" id="258" r:id="Rae03d4f7d10a4b80"/>
+    <p:sldId xmlns:r="http://schemas.openxmlformats.org/officeDocument/2006/relationships" id="259" r:id="R28826d7547724288"/>
+    <p:sldId xmlns:r="http://schemas.openxmlformats.org/officeDocument/2006/relationships" id="260" r:id="R02ed5ee3e25d4b5e"/>
+    <p:sldId xmlns:r="http://schemas.openxmlformats.org/officeDocument/2006/relationships" id="261" r:id="R70337fd3ffdd4458"/>
   </p:sldIdLst>
   <p:sldSz cx="12191999" cy="6858000"/>
   <p:notesSz cx="6858000" cy="9144000"/>
@@ -4796,17 +4796,17 @@
   </p:cSld>
   <p:clrMap bg1="lt1" tx1="dk1" bg2="lt2" tx2="dk2" accent1="accent1" accent2="accent2" accent3="accent3" accent4="accent4" accent5="accent5" accent6="accent6" hlink="hlink" folHlink="folHlink"/>
   <p:sldLayoutIdLst>
-    <p:sldLayoutId xmlns:r="http://schemas.openxmlformats.org/officeDocument/2006/relationships" id="2147483649" r:id="R48414fcdf8d541ed"/>
-    <p:sldLayoutId xmlns:r="http://schemas.openxmlformats.org/officeDocument/2006/relationships" id="2147483650" r:id="R766c442e5328469b"/>
-    <p:sldLayoutId xmlns:r="http://schemas.openxmlformats.org/officeDocument/2006/relationships" id="2147483651" r:id="Rec4905bacbd04fea"/>
-    <p:sldLayoutId xmlns:r="http://schemas.openxmlformats.org/officeDocument/2006/relationships" id="2147483652" r:id="R653cafab80ca4500"/>
-    <p:sldLayoutId xmlns:r="http://schemas.openxmlformats.org/officeDocument/2006/relationships" id="2147483653" r:id="R94be88aaef7945c6"/>
-    <p:sldLayoutId xmlns:r="http://schemas.openxmlformats.org/officeDocument/2006/relationships" id="2147483654" r:id="Rd045412596eb42ad"/>
-    <p:sldLayoutId xmlns:r="http://schemas.openxmlformats.org/officeDocument/2006/relationships" id="2147483655" r:id="R785cc0abb6a0405f"/>
-    <p:sldLayoutId xmlns:r="http://schemas.openxmlformats.org/officeDocument/2006/relationships" id="2147483656" r:id="R676b6f674e7349f4"/>
-    <p:sldLayoutId xmlns:r="http://schemas.openxmlformats.org/officeDocument/2006/relationships" id="2147483657" r:id="Rf3cf40a6dd5b4afb"/>
-    <p:sldLayoutId xmlns:r="http://schemas.openxmlformats.org/officeDocument/2006/relationships" id="2147483658" r:id="Rf9b26f240e454c8a"/>
-    <p:sldLayoutId xmlns:r="http://schemas.openxmlformats.org/officeDocument/2006/relationships" id="2147483659" r:id="R86df889d08b54146"/>
+    <p:sldLayoutId xmlns:r="http://schemas.openxmlformats.org/officeDocument/2006/relationships" id="2147483649" r:id="R4e65e73c63d1446f"/>
+    <p:sldLayoutId xmlns:r="http://schemas.openxmlformats.org/officeDocument/2006/relationships" id="2147483650" r:id="Ra775ce1834874e9e"/>
+    <p:sldLayoutId xmlns:r="http://schemas.openxmlformats.org/officeDocument/2006/relationships" id="2147483651" r:id="R7a0a52970c8549fd"/>
+    <p:sldLayoutId xmlns:r="http://schemas.openxmlformats.org/officeDocument/2006/relationships" id="2147483652" r:id="R53eb703c1bc2452f"/>
+    <p:sldLayoutId xmlns:r="http://schemas.openxmlformats.org/officeDocument/2006/relationships" id="2147483653" r:id="Rf9bb87de7eba4d33"/>
+    <p:sldLayoutId xmlns:r="http://schemas.openxmlformats.org/officeDocument/2006/relationships" id="2147483654" r:id="R443160bf65354e64"/>
+    <p:sldLayoutId xmlns:r="http://schemas.openxmlformats.org/officeDocument/2006/relationships" id="2147483655" r:id="Ra7ddf0ad280b422f"/>
+    <p:sldLayoutId xmlns:r="http://schemas.openxmlformats.org/officeDocument/2006/relationships" id="2147483656" r:id="R28a8c222083147a4"/>
+    <p:sldLayoutId xmlns:r="http://schemas.openxmlformats.org/officeDocument/2006/relationships" id="2147483657" r:id="R3378147db17a43c7"/>
+    <p:sldLayoutId xmlns:r="http://schemas.openxmlformats.org/officeDocument/2006/relationships" id="2147483658" r:id="R69be33367ded47e7"/>
+    <p:sldLayoutId xmlns:r="http://schemas.openxmlformats.org/officeDocument/2006/relationships" id="2147483659" r:id="Raecc670a6289488d"/>
   </p:sldLayoutIdLst>
   <p:txStyles>
     <p:titleStyle>
@@ -5706,7 +5706,7 @@
                 <a:ea typeface="Aptos"/>
                 <a:cs typeface="Aptos"/>
               </a:rPr>
-              <a:t>2026.07.27-27</a:t>
+              <a:t>2026.07.27-28</a:t>
             </a:r>
           </a:p>
         </p:txBody>
@@ -6179,7 +6179,7 @@
                 <a:ea typeface="Aptos"/>
                 <a:cs typeface="Aptos"/>
               </a:rPr>
-              <a:t>Independent public evidence summary · 2026.07.27-27 · 2026-07-27 · Sources: EPO; Germany — official judgments; WIPO</a:t>
+              <a:t>Independent public evidence summary · 2026.07.27-28 · 2026-07-27 · Sources: EPO; Germany — official judgments; WIPO</a:t>
             </a:r>
           </a:p>
         </p:txBody>
@@ -6794,7 +6794,7 @@
                 <a:ea typeface="Aptos"/>
                 <a:cs typeface="Aptos"/>
               </a:rPr>
-              <a:t>Independent public evidence summary · 2026.07.27-27 · 2026-07-27 · Sources: EPO Register; EP3032975B2; 8 Ni 18/24 (EP); 7 O 3341/24</a:t>
+              <a:t>Independent public evidence summary · 2026.07.27-28 · 2026-07-27 · Sources: EPO Register; EP3032975B2; 8 Ni 18/24 (EP); 7 O 3341/24</a:t>
             </a:r>
           </a:p>
         </p:txBody>
@@ -7765,7 +7765,7 @@
                 <a:ea typeface="Aptos"/>
                 <a:cs typeface="Aptos"/>
               </a:rPr>
-              <a:t>Independent public evidence summary · 2026.07.27-27 · 2026-07-27 · Sources: World Bank; Statistics Canada; Health Canada; NZ Ministry of Health; Sejm; FHM; FTC</a:t>
+              <a:t>Independent public evidence summary · 2026.07.27-28 · 2026-07-27 · Sources: World Bank; Statistics Canada; Health Canada; NZ Ministry of Health; Sejm; FHM; FTC</a:t>
             </a:r>
           </a:p>
         </p:txBody>
@@ -8736,7 +8736,7 @@
                 <a:ea typeface="Aptos"/>
                 <a:cs typeface="Aptos"/>
               </a:rPr>
-              <a:t>Independent public evidence summary · 2026.07.27-27 · 2026-07-27 · Sources: Evidence Register; WIPO IP valuation</a:t>
+              <a:t>Independent public evidence summary · 2026.07.27-28 · 2026-07-27 · Sources: Evidence Register; WIPO IP valuation</a:t>
             </a:r>
           </a:p>
         </p:txBody>
@@ -9559,7 +9559,7 @@
                 <a:ea typeface="Aptos"/>
                 <a:cs typeface="Aptos"/>
               </a:rPr>
-              <a:t>Version 2026.07.27-27 · 2026-07-27 · 6 / 6</a:t>
+              <a:t>Version 2026.07.27-28 · 2026-07-27 · 6 / 6</a:t>
             </a:r>
           </a:p>
         </p:txBody>

--- a/site/downloads/pixan-bank-deck-short-en.pptx
+++ b/site/downloads/pixan-bank-deck-short-en.pptx
@@ -2,18 +2,18 @@
 <file path=ppt/presentation.xml><?xml version="1.0" encoding="utf-8"?>
 <p:presentation xmlns:p="http://schemas.openxmlformats.org/presentationml/2006/main">
   <p:sldMasterIdLst>
-    <p:sldMasterId xmlns:r="http://schemas.openxmlformats.org/officeDocument/2006/relationships" id="2147483648" r:id="R30ff33fe07b247e8"/>
+    <p:sldMasterId xmlns:r="http://schemas.openxmlformats.org/officeDocument/2006/relationships" id="2147483648" r:id="R24f7d471e1194615"/>
   </p:sldMasterIdLst>
   <p:notesMasterIdLst>
-    <p:notesMasterId xmlns:r="http://schemas.openxmlformats.org/officeDocument/2006/relationships" r:id="R91448c63c5cb46af"/>
+    <p:notesMasterId xmlns:r="http://schemas.openxmlformats.org/officeDocument/2006/relationships" r:id="R1db3395650b446e3"/>
   </p:notesMasterIdLst>
   <p:sldIdLst>
-    <p:sldId xmlns:r="http://schemas.openxmlformats.org/officeDocument/2006/relationships" id="256" r:id="Rbab244f7fcc04a31"/>
-    <p:sldId xmlns:r="http://schemas.openxmlformats.org/officeDocument/2006/relationships" id="257" r:id="Rd56f50e35740471a"/>
-    <p:sldId xmlns:r="http://schemas.openxmlformats.org/officeDocument/2006/relationships" id="258" r:id="Rae03d4f7d10a4b80"/>
-    <p:sldId xmlns:r="http://schemas.openxmlformats.org/officeDocument/2006/relationships" id="259" r:id="R28826d7547724288"/>
-    <p:sldId xmlns:r="http://schemas.openxmlformats.org/officeDocument/2006/relationships" id="260" r:id="R02ed5ee3e25d4b5e"/>
-    <p:sldId xmlns:r="http://schemas.openxmlformats.org/officeDocument/2006/relationships" id="261" r:id="R70337fd3ffdd4458"/>
+    <p:sldId xmlns:r="http://schemas.openxmlformats.org/officeDocument/2006/relationships" id="256" r:id="Re42368455df34587"/>
+    <p:sldId xmlns:r="http://schemas.openxmlformats.org/officeDocument/2006/relationships" id="257" r:id="R644a066b502e4390"/>
+    <p:sldId xmlns:r="http://schemas.openxmlformats.org/officeDocument/2006/relationships" id="258" r:id="R59f258f3bd094d28"/>
+    <p:sldId xmlns:r="http://schemas.openxmlformats.org/officeDocument/2006/relationships" id="259" r:id="R9cbb71e00d6b4aa6"/>
+    <p:sldId xmlns:r="http://schemas.openxmlformats.org/officeDocument/2006/relationships" id="260" r:id="Ra39987a828c4493f"/>
+    <p:sldId xmlns:r="http://schemas.openxmlformats.org/officeDocument/2006/relationships" id="261" r:id="Rf00ff2025a6c4137"/>
   </p:sldIdLst>
   <p:sldSz cx="12191999" cy="6858000"/>
   <p:notesSz cx="6858000" cy="9144000"/>
@@ -4796,17 +4796,17 @@
   </p:cSld>
   <p:clrMap bg1="lt1" tx1="dk1" bg2="lt2" tx2="dk2" accent1="accent1" accent2="accent2" accent3="accent3" accent4="accent4" accent5="accent5" accent6="accent6" hlink="hlink" folHlink="folHlink"/>
   <p:sldLayoutIdLst>
-    <p:sldLayoutId xmlns:r="http://schemas.openxmlformats.org/officeDocument/2006/relationships" id="2147483649" r:id="R4e65e73c63d1446f"/>
-    <p:sldLayoutId xmlns:r="http://schemas.openxmlformats.org/officeDocument/2006/relationships" id="2147483650" r:id="Ra775ce1834874e9e"/>
-    <p:sldLayoutId xmlns:r="http://schemas.openxmlformats.org/officeDocument/2006/relationships" id="2147483651" r:id="R7a0a52970c8549fd"/>
-    <p:sldLayoutId xmlns:r="http://schemas.openxmlformats.org/officeDocument/2006/relationships" id="2147483652" r:id="R53eb703c1bc2452f"/>
-    <p:sldLayoutId xmlns:r="http://schemas.openxmlformats.org/officeDocument/2006/relationships" id="2147483653" r:id="Rf9bb87de7eba4d33"/>
-    <p:sldLayoutId xmlns:r="http://schemas.openxmlformats.org/officeDocument/2006/relationships" id="2147483654" r:id="R443160bf65354e64"/>
-    <p:sldLayoutId xmlns:r="http://schemas.openxmlformats.org/officeDocument/2006/relationships" id="2147483655" r:id="Ra7ddf0ad280b422f"/>
-    <p:sldLayoutId xmlns:r="http://schemas.openxmlformats.org/officeDocument/2006/relationships" id="2147483656" r:id="R28a8c222083147a4"/>
-    <p:sldLayoutId xmlns:r="http://schemas.openxmlformats.org/officeDocument/2006/relationships" id="2147483657" r:id="R3378147db17a43c7"/>
-    <p:sldLayoutId xmlns:r="http://schemas.openxmlformats.org/officeDocument/2006/relationships" id="2147483658" r:id="R69be33367ded47e7"/>
-    <p:sldLayoutId xmlns:r="http://schemas.openxmlformats.org/officeDocument/2006/relationships" id="2147483659" r:id="Raecc670a6289488d"/>
+    <p:sldLayoutId xmlns:r="http://schemas.openxmlformats.org/officeDocument/2006/relationships" id="2147483649" r:id="R655531667db84210"/>
+    <p:sldLayoutId xmlns:r="http://schemas.openxmlformats.org/officeDocument/2006/relationships" id="2147483650" r:id="R05dbb4a268f74b2b"/>
+    <p:sldLayoutId xmlns:r="http://schemas.openxmlformats.org/officeDocument/2006/relationships" id="2147483651" r:id="R09d62eb5ee534f63"/>
+    <p:sldLayoutId xmlns:r="http://schemas.openxmlformats.org/officeDocument/2006/relationships" id="2147483652" r:id="Rd80abfdf92154fe0"/>
+    <p:sldLayoutId xmlns:r="http://schemas.openxmlformats.org/officeDocument/2006/relationships" id="2147483653" r:id="R6289e25ab3ec49a8"/>
+    <p:sldLayoutId xmlns:r="http://schemas.openxmlformats.org/officeDocument/2006/relationships" id="2147483654" r:id="R83308e09f4c9466b"/>
+    <p:sldLayoutId xmlns:r="http://schemas.openxmlformats.org/officeDocument/2006/relationships" id="2147483655" r:id="Raecbc2f4ab294989"/>
+    <p:sldLayoutId xmlns:r="http://schemas.openxmlformats.org/officeDocument/2006/relationships" id="2147483656" r:id="Rd3c2be3866254fdf"/>
+    <p:sldLayoutId xmlns:r="http://schemas.openxmlformats.org/officeDocument/2006/relationships" id="2147483657" r:id="R70a2e99bc0564567"/>
+    <p:sldLayoutId xmlns:r="http://schemas.openxmlformats.org/officeDocument/2006/relationships" id="2147483658" r:id="R1787381b25c4450f"/>
+    <p:sldLayoutId xmlns:r="http://schemas.openxmlformats.org/officeDocument/2006/relationships" id="2147483659" r:id="Rb73a2475adde44e9"/>
   </p:sldLayoutIdLst>
   <p:txStyles>
     <p:titleStyle>
@@ -5706,7 +5706,7 @@
                 <a:ea typeface="Aptos"/>
                 <a:cs typeface="Aptos"/>
               </a:rPr>
-              <a:t>2026.07.27-28</a:t>
+              <a:t>2026.07.27-29</a:t>
             </a:r>
           </a:p>
         </p:txBody>
@@ -6179,7 +6179,7 @@
                 <a:ea typeface="Aptos"/>
                 <a:cs typeface="Aptos"/>
               </a:rPr>
-              <a:t>Independent public evidence summary · 2026.07.27-28 · 2026-07-27 · Sources: EPO; Germany — official judgments; WIPO</a:t>
+              <a:t>Independent public evidence summary · 2026.07.27-29 · 2026-07-27 · Sources: EPO; Germany — official judgments; WIPO</a:t>
             </a:r>
           </a:p>
         </p:txBody>
@@ -6794,7 +6794,7 @@
                 <a:ea typeface="Aptos"/>
                 <a:cs typeface="Aptos"/>
               </a:rPr>
-              <a:t>Independent public evidence summary · 2026.07.27-28 · 2026-07-27 · Sources: EPO Register; EP3032975B2; 8 Ni 18/24 (EP); 7 O 3341/24</a:t>
+              <a:t>Independent public evidence summary · 2026.07.27-29 · 2026-07-27 · Sources: EPO Register; EP3032975B2; 8 Ni 18/24 (EP); 7 O 3341/24</a:t>
             </a:r>
           </a:p>
         </p:txBody>
@@ -7765,7 +7765,7 @@
                 <a:ea typeface="Aptos"/>
                 <a:cs typeface="Aptos"/>
               </a:rPr>
-              <a:t>Independent public evidence summary · 2026.07.27-28 · 2026-07-27 · Sources: World Bank; Statistics Canada; Health Canada; NZ Ministry of Health; Sejm; FHM; FTC</a:t>
+              <a:t>Independent public evidence summary · 2026.07.27-29 · 2026-07-27 · Sources: World Bank; Statistics Canada; Health Canada; NZ Ministry of Health; Sejm; FHM; FTC</a:t>
             </a:r>
           </a:p>
         </p:txBody>
@@ -8736,7 +8736,7 @@
                 <a:ea typeface="Aptos"/>
                 <a:cs typeface="Aptos"/>
               </a:rPr>
-              <a:t>Independent public evidence summary · 2026.07.27-28 · 2026-07-27 · Sources: Evidence Register; WIPO IP valuation</a:t>
+              <a:t>Independent public evidence summary · 2026.07.27-29 · 2026-07-27 · Sources: Evidence Register; WIPO IP valuation</a:t>
             </a:r>
           </a:p>
         </p:txBody>
@@ -9559,7 +9559,7 @@
                 <a:ea typeface="Aptos"/>
                 <a:cs typeface="Aptos"/>
               </a:rPr>
-              <a:t>Version 2026.07.27-28 · 2026-07-27 · 6 / 6</a:t>
+              <a:t>Version 2026.07.27-29 · 2026-07-27 · 6 / 6</a:t>
             </a:r>
           </a:p>
         </p:txBody>

--- a/site/downloads/pixan-bank-deck-short-en.pptx
+++ b/site/downloads/pixan-bank-deck-short-en.pptx
@@ -2,18 +2,18 @@
 <file path=ppt/presentation.xml><?xml version="1.0" encoding="utf-8"?>
 <p:presentation xmlns:p="http://schemas.openxmlformats.org/presentationml/2006/main">
   <p:sldMasterIdLst>
-    <p:sldMasterId xmlns:r="http://schemas.openxmlformats.org/officeDocument/2006/relationships" id="2147483648" r:id="R24f7d471e1194615"/>
+    <p:sldMasterId xmlns:r="http://schemas.openxmlformats.org/officeDocument/2006/relationships" id="2147483648" r:id="R5a6ad9de53cb49d1"/>
   </p:sldMasterIdLst>
   <p:notesMasterIdLst>
-    <p:notesMasterId xmlns:r="http://schemas.openxmlformats.org/officeDocument/2006/relationships" r:id="R1db3395650b446e3"/>
+    <p:notesMasterId xmlns:r="http://schemas.openxmlformats.org/officeDocument/2006/relationships" r:id="Raa3e541c7d414026"/>
   </p:notesMasterIdLst>
   <p:sldIdLst>
-    <p:sldId xmlns:r="http://schemas.openxmlformats.org/officeDocument/2006/relationships" id="256" r:id="Re42368455df34587"/>
-    <p:sldId xmlns:r="http://schemas.openxmlformats.org/officeDocument/2006/relationships" id="257" r:id="R644a066b502e4390"/>
-    <p:sldId xmlns:r="http://schemas.openxmlformats.org/officeDocument/2006/relationships" id="258" r:id="R59f258f3bd094d28"/>
-    <p:sldId xmlns:r="http://schemas.openxmlformats.org/officeDocument/2006/relationships" id="259" r:id="R9cbb71e00d6b4aa6"/>
-    <p:sldId xmlns:r="http://schemas.openxmlformats.org/officeDocument/2006/relationships" id="260" r:id="Ra39987a828c4493f"/>
-    <p:sldId xmlns:r="http://schemas.openxmlformats.org/officeDocument/2006/relationships" id="261" r:id="Rf00ff2025a6c4137"/>
+    <p:sldId xmlns:r="http://schemas.openxmlformats.org/officeDocument/2006/relationships" id="256" r:id="R7901752c24c54712"/>
+    <p:sldId xmlns:r="http://schemas.openxmlformats.org/officeDocument/2006/relationships" id="257" r:id="Re67a416706dc424b"/>
+    <p:sldId xmlns:r="http://schemas.openxmlformats.org/officeDocument/2006/relationships" id="258" r:id="Rad4011dfc7d1403c"/>
+    <p:sldId xmlns:r="http://schemas.openxmlformats.org/officeDocument/2006/relationships" id="259" r:id="Rbd03c67b1de94e02"/>
+    <p:sldId xmlns:r="http://schemas.openxmlformats.org/officeDocument/2006/relationships" id="260" r:id="R15864b6f97fc47e6"/>
+    <p:sldId xmlns:r="http://schemas.openxmlformats.org/officeDocument/2006/relationships" id="261" r:id="R5bca14f30ac6437c"/>
   </p:sldIdLst>
   <p:sldSz cx="12191999" cy="6858000"/>
   <p:notesSz cx="6858000" cy="9144000"/>
@@ -4796,17 +4796,17 @@
   </p:cSld>
   <p:clrMap bg1="lt1" tx1="dk1" bg2="lt2" tx2="dk2" accent1="accent1" accent2="accent2" accent3="accent3" accent4="accent4" accent5="accent5" accent6="accent6" hlink="hlink" folHlink="folHlink"/>
   <p:sldLayoutIdLst>
-    <p:sldLayoutId xmlns:r="http://schemas.openxmlformats.org/officeDocument/2006/relationships" id="2147483649" r:id="R655531667db84210"/>
-    <p:sldLayoutId xmlns:r="http://schemas.openxmlformats.org/officeDocument/2006/relationships" id="2147483650" r:id="R05dbb4a268f74b2b"/>
-    <p:sldLayoutId xmlns:r="http://schemas.openxmlformats.org/officeDocument/2006/relationships" id="2147483651" r:id="R09d62eb5ee534f63"/>
-    <p:sldLayoutId xmlns:r="http://schemas.openxmlformats.org/officeDocument/2006/relationships" id="2147483652" r:id="Rd80abfdf92154fe0"/>
-    <p:sldLayoutId xmlns:r="http://schemas.openxmlformats.org/officeDocument/2006/relationships" id="2147483653" r:id="R6289e25ab3ec49a8"/>
-    <p:sldLayoutId xmlns:r="http://schemas.openxmlformats.org/officeDocument/2006/relationships" id="2147483654" r:id="R83308e09f4c9466b"/>
-    <p:sldLayoutId xmlns:r="http://schemas.openxmlformats.org/officeDocument/2006/relationships" id="2147483655" r:id="Raecbc2f4ab294989"/>
-    <p:sldLayoutId xmlns:r="http://schemas.openxmlformats.org/officeDocument/2006/relationships" id="2147483656" r:id="Rd3c2be3866254fdf"/>
-    <p:sldLayoutId xmlns:r="http://schemas.openxmlformats.org/officeDocument/2006/relationships" id="2147483657" r:id="R70a2e99bc0564567"/>
-    <p:sldLayoutId xmlns:r="http://schemas.openxmlformats.org/officeDocument/2006/relationships" id="2147483658" r:id="R1787381b25c4450f"/>
-    <p:sldLayoutId xmlns:r="http://schemas.openxmlformats.org/officeDocument/2006/relationships" id="2147483659" r:id="Rb73a2475adde44e9"/>
+    <p:sldLayoutId xmlns:r="http://schemas.openxmlformats.org/officeDocument/2006/relationships" id="2147483649" r:id="Raa9c890dc73e4407"/>
+    <p:sldLayoutId xmlns:r="http://schemas.openxmlformats.org/officeDocument/2006/relationships" id="2147483650" r:id="Rb90ff496bdda4c6b"/>
+    <p:sldLayoutId xmlns:r="http://schemas.openxmlformats.org/officeDocument/2006/relationships" id="2147483651" r:id="R29363830634a4261"/>
+    <p:sldLayoutId xmlns:r="http://schemas.openxmlformats.org/officeDocument/2006/relationships" id="2147483652" r:id="Rdf47032a5eba4de1"/>
+    <p:sldLayoutId xmlns:r="http://schemas.openxmlformats.org/officeDocument/2006/relationships" id="2147483653" r:id="R5d41fff128e14bc6"/>
+    <p:sldLayoutId xmlns:r="http://schemas.openxmlformats.org/officeDocument/2006/relationships" id="2147483654" r:id="Raf91935795884b54"/>
+    <p:sldLayoutId xmlns:r="http://schemas.openxmlformats.org/officeDocument/2006/relationships" id="2147483655" r:id="R7ff45709cc65417f"/>
+    <p:sldLayoutId xmlns:r="http://schemas.openxmlformats.org/officeDocument/2006/relationships" id="2147483656" r:id="Ra969b0df7500430d"/>
+    <p:sldLayoutId xmlns:r="http://schemas.openxmlformats.org/officeDocument/2006/relationships" id="2147483657" r:id="Rff444b1a8d364e21"/>
+    <p:sldLayoutId xmlns:r="http://schemas.openxmlformats.org/officeDocument/2006/relationships" id="2147483658" r:id="Rba3552208abd481e"/>
+    <p:sldLayoutId xmlns:r="http://schemas.openxmlformats.org/officeDocument/2006/relationships" id="2147483659" r:id="R6fcd20ad7eae4228"/>
   </p:sldLayoutIdLst>
   <p:txStyles>
     <p:titleStyle>

--- a/site/downloads/pixan-bank-deck-short-en.pptx
+++ b/site/downloads/pixan-bank-deck-short-en.pptx
@@ -2,18 +2,18 @@
 <file path=ppt/presentation.xml><?xml version="1.0" encoding="utf-8"?>
 <p:presentation xmlns:p="http://schemas.openxmlformats.org/presentationml/2006/main">
   <p:sldMasterIdLst>
-    <p:sldMasterId xmlns:r="http://schemas.openxmlformats.org/officeDocument/2006/relationships" id="2147483648" r:id="R30ff33fe07b247e8"/>
+    <p:sldMasterId xmlns:r="http://schemas.openxmlformats.org/officeDocument/2006/relationships" id="2147483648" r:id="R5a6ad9de53cb49d1"/>
   </p:sldMasterIdLst>
   <p:notesMasterIdLst>
-    <p:notesMasterId xmlns:r="http://schemas.openxmlformats.org/officeDocument/2006/relationships" r:id="R91448c63c5cb46af"/>
+    <p:notesMasterId xmlns:r="http://schemas.openxmlformats.org/officeDocument/2006/relationships" r:id="Raa3e541c7d414026"/>
   </p:notesMasterIdLst>
   <p:sldIdLst>
-    <p:sldId xmlns:r="http://schemas.openxmlformats.org/officeDocument/2006/relationships" id="256" r:id="Rbab244f7fcc04a31"/>
-    <p:sldId xmlns:r="http://schemas.openxmlformats.org/officeDocument/2006/relationships" id="257" r:id="Rd56f50e35740471a"/>
-    <p:sldId xmlns:r="http://schemas.openxmlformats.org/officeDocument/2006/relationships" id="258" r:id="Rae03d4f7d10a4b80"/>
-    <p:sldId xmlns:r="http://schemas.openxmlformats.org/officeDocument/2006/relationships" id="259" r:id="R28826d7547724288"/>
-    <p:sldId xmlns:r="http://schemas.openxmlformats.org/officeDocument/2006/relationships" id="260" r:id="R02ed5ee3e25d4b5e"/>
-    <p:sldId xmlns:r="http://schemas.openxmlformats.org/officeDocument/2006/relationships" id="261" r:id="R70337fd3ffdd4458"/>
+    <p:sldId xmlns:r="http://schemas.openxmlformats.org/officeDocument/2006/relationships" id="256" r:id="R7901752c24c54712"/>
+    <p:sldId xmlns:r="http://schemas.openxmlformats.org/officeDocument/2006/relationships" id="257" r:id="Re67a416706dc424b"/>
+    <p:sldId xmlns:r="http://schemas.openxmlformats.org/officeDocument/2006/relationships" id="258" r:id="Rad4011dfc7d1403c"/>
+    <p:sldId xmlns:r="http://schemas.openxmlformats.org/officeDocument/2006/relationships" id="259" r:id="Rbd03c67b1de94e02"/>
+    <p:sldId xmlns:r="http://schemas.openxmlformats.org/officeDocument/2006/relationships" id="260" r:id="R15864b6f97fc47e6"/>
+    <p:sldId xmlns:r="http://schemas.openxmlformats.org/officeDocument/2006/relationships" id="261" r:id="R5bca14f30ac6437c"/>
   </p:sldIdLst>
   <p:sldSz cx="12191999" cy="6858000"/>
   <p:notesSz cx="6858000" cy="9144000"/>
@@ -4796,17 +4796,17 @@
   </p:cSld>
   <p:clrMap bg1="lt1" tx1="dk1" bg2="lt2" tx2="dk2" accent1="accent1" accent2="accent2" accent3="accent3" accent4="accent4" accent5="accent5" accent6="accent6" hlink="hlink" folHlink="folHlink"/>
   <p:sldLayoutIdLst>
-    <p:sldLayoutId xmlns:r="http://schemas.openxmlformats.org/officeDocument/2006/relationships" id="2147483649" r:id="R4e65e73c63d1446f"/>
-    <p:sldLayoutId xmlns:r="http://schemas.openxmlformats.org/officeDocument/2006/relationships" id="2147483650" r:id="Ra775ce1834874e9e"/>
-    <p:sldLayoutId xmlns:r="http://schemas.openxmlformats.org/officeDocument/2006/relationships" id="2147483651" r:id="R7a0a52970c8549fd"/>
-    <p:sldLayoutId xmlns:r="http://schemas.openxmlformats.org/officeDocument/2006/relationships" id="2147483652" r:id="R53eb703c1bc2452f"/>
-    <p:sldLayoutId xmlns:r="http://schemas.openxmlformats.org/officeDocument/2006/relationships" id="2147483653" r:id="Rf9bb87de7eba4d33"/>
-    <p:sldLayoutId xmlns:r="http://schemas.openxmlformats.org/officeDocument/2006/relationships" id="2147483654" r:id="R443160bf65354e64"/>
-    <p:sldLayoutId xmlns:r="http://schemas.openxmlformats.org/officeDocument/2006/relationships" id="2147483655" r:id="Ra7ddf0ad280b422f"/>
-    <p:sldLayoutId xmlns:r="http://schemas.openxmlformats.org/officeDocument/2006/relationships" id="2147483656" r:id="R28a8c222083147a4"/>
-    <p:sldLayoutId xmlns:r="http://schemas.openxmlformats.org/officeDocument/2006/relationships" id="2147483657" r:id="R3378147db17a43c7"/>
-    <p:sldLayoutId xmlns:r="http://schemas.openxmlformats.org/officeDocument/2006/relationships" id="2147483658" r:id="R69be33367ded47e7"/>
-    <p:sldLayoutId xmlns:r="http://schemas.openxmlformats.org/officeDocument/2006/relationships" id="2147483659" r:id="Raecc670a6289488d"/>
+    <p:sldLayoutId xmlns:r="http://schemas.openxmlformats.org/officeDocument/2006/relationships" id="2147483649" r:id="Raa9c890dc73e4407"/>
+    <p:sldLayoutId xmlns:r="http://schemas.openxmlformats.org/officeDocument/2006/relationships" id="2147483650" r:id="Rb90ff496bdda4c6b"/>
+    <p:sldLayoutId xmlns:r="http://schemas.openxmlformats.org/officeDocument/2006/relationships" id="2147483651" r:id="R29363830634a4261"/>
+    <p:sldLayoutId xmlns:r="http://schemas.openxmlformats.org/officeDocument/2006/relationships" id="2147483652" r:id="Rdf47032a5eba4de1"/>
+    <p:sldLayoutId xmlns:r="http://schemas.openxmlformats.org/officeDocument/2006/relationships" id="2147483653" r:id="R5d41fff128e14bc6"/>
+    <p:sldLayoutId xmlns:r="http://schemas.openxmlformats.org/officeDocument/2006/relationships" id="2147483654" r:id="Raf91935795884b54"/>
+    <p:sldLayoutId xmlns:r="http://schemas.openxmlformats.org/officeDocument/2006/relationships" id="2147483655" r:id="R7ff45709cc65417f"/>
+    <p:sldLayoutId xmlns:r="http://schemas.openxmlformats.org/officeDocument/2006/relationships" id="2147483656" r:id="Ra969b0df7500430d"/>
+    <p:sldLayoutId xmlns:r="http://schemas.openxmlformats.org/officeDocument/2006/relationships" id="2147483657" r:id="Rff444b1a8d364e21"/>
+    <p:sldLayoutId xmlns:r="http://schemas.openxmlformats.org/officeDocument/2006/relationships" id="2147483658" r:id="Rba3552208abd481e"/>
+    <p:sldLayoutId xmlns:r="http://schemas.openxmlformats.org/officeDocument/2006/relationships" id="2147483659" r:id="R6fcd20ad7eae4228"/>
   </p:sldLayoutIdLst>
   <p:txStyles>
     <p:titleStyle>
@@ -5706,7 +5706,7 @@
                 <a:ea typeface="Aptos"/>
                 <a:cs typeface="Aptos"/>
               </a:rPr>
-              <a:t>2026.07.27-28</a:t>
+              <a:t>2026.07.27-29</a:t>
             </a:r>
           </a:p>
         </p:txBody>
@@ -6179,7 +6179,7 @@
                 <a:ea typeface="Aptos"/>
                 <a:cs typeface="Aptos"/>
               </a:rPr>
-              <a:t>Independent public evidence summary · 2026.07.27-28 · 2026-07-27 · Sources: EPO; Germany — official judgments; WIPO</a:t>
+              <a:t>Independent public evidence summary · 2026.07.27-29 · 2026-07-27 · Sources: EPO; Germany — official judgments; WIPO</a:t>
             </a:r>
           </a:p>
         </p:txBody>
@@ -6794,7 +6794,7 @@
                 <a:ea typeface="Aptos"/>
                 <a:cs typeface="Aptos"/>
               </a:rPr>
-              <a:t>Independent public evidence summary · 2026.07.27-28 · 2026-07-27 · Sources: EPO Register; EP3032975B2; 8 Ni 18/24 (EP); 7 O 3341/24</a:t>
+              <a:t>Independent public evidence summary · 2026.07.27-29 · 2026-07-27 · Sources: EPO Register; EP3032975B2; 8 Ni 18/24 (EP); 7 O 3341/24</a:t>
             </a:r>
           </a:p>
         </p:txBody>
@@ -7765,7 +7765,7 @@
                 <a:ea typeface="Aptos"/>
                 <a:cs typeface="Aptos"/>
               </a:rPr>
-              <a:t>Independent public evidence summary · 2026.07.27-28 · 2026-07-27 · Sources: World Bank; Statistics Canada; Health Canada; NZ Ministry of Health; Sejm; FHM; FTC</a:t>
+              <a:t>Independent public evidence summary · 2026.07.27-29 · 2026-07-27 · Sources: World Bank; Statistics Canada; Health Canada; NZ Ministry of Health; Sejm; FHM; FTC</a:t>
             </a:r>
           </a:p>
         </p:txBody>
@@ -8736,7 +8736,7 @@
                 <a:ea typeface="Aptos"/>
                 <a:cs typeface="Aptos"/>
               </a:rPr>
-              <a:t>Independent public evidence summary · 2026.07.27-28 · 2026-07-27 · Sources: Evidence Register; WIPO IP valuation</a:t>
+              <a:t>Independent public evidence summary · 2026.07.27-29 · 2026-07-27 · Sources: Evidence Register; WIPO IP valuation</a:t>
             </a:r>
           </a:p>
         </p:txBody>
@@ -9559,7 +9559,7 @@
                 <a:ea typeface="Aptos"/>
                 <a:cs typeface="Aptos"/>
               </a:rPr>
-              <a:t>Version 2026.07.27-28 · 2026-07-27 · 6 / 6</a:t>
+              <a:t>Version 2026.07.27-29 · 2026-07-27 · 6 / 6</a:t>
             </a:r>
           </a:p>
         </p:txBody>

--- a/site/downloads/pixan-bank-deck-short-en.pptx
+++ b/site/downloads/pixan-bank-deck-short-en.pptx
@@ -2,18 +2,18 @@
 <file path=ppt/presentation.xml><?xml version="1.0" encoding="utf-8"?>
 <p:presentation xmlns:p="http://schemas.openxmlformats.org/presentationml/2006/main">
   <p:sldMasterIdLst>
-    <p:sldMasterId xmlns:r="http://schemas.openxmlformats.org/officeDocument/2006/relationships" id="2147483648" r:id="R5a6ad9de53cb49d1"/>
+    <p:sldMasterId xmlns:r="http://schemas.openxmlformats.org/officeDocument/2006/relationships" id="2147483648" r:id="Ra69d853b1c044f60"/>
   </p:sldMasterIdLst>
   <p:notesMasterIdLst>
-    <p:notesMasterId xmlns:r="http://schemas.openxmlformats.org/officeDocument/2006/relationships" r:id="Raa3e541c7d414026"/>
+    <p:notesMasterId xmlns:r="http://schemas.openxmlformats.org/officeDocument/2006/relationships" r:id="R3dcbbca746b84f0e"/>
   </p:notesMasterIdLst>
   <p:sldIdLst>
-    <p:sldId xmlns:r="http://schemas.openxmlformats.org/officeDocument/2006/relationships" id="256" r:id="R7901752c24c54712"/>
-    <p:sldId xmlns:r="http://schemas.openxmlformats.org/officeDocument/2006/relationships" id="257" r:id="Re67a416706dc424b"/>
-    <p:sldId xmlns:r="http://schemas.openxmlformats.org/officeDocument/2006/relationships" id="258" r:id="Rad4011dfc7d1403c"/>
-    <p:sldId xmlns:r="http://schemas.openxmlformats.org/officeDocument/2006/relationships" id="259" r:id="Rbd03c67b1de94e02"/>
-    <p:sldId xmlns:r="http://schemas.openxmlformats.org/officeDocument/2006/relationships" id="260" r:id="R15864b6f97fc47e6"/>
-    <p:sldId xmlns:r="http://schemas.openxmlformats.org/officeDocument/2006/relationships" id="261" r:id="R5bca14f30ac6437c"/>
+    <p:sldId xmlns:r="http://schemas.openxmlformats.org/officeDocument/2006/relationships" id="256" r:id="Re852c92406474ef2"/>
+    <p:sldId xmlns:r="http://schemas.openxmlformats.org/officeDocument/2006/relationships" id="257" r:id="R837e3786a83444fd"/>
+    <p:sldId xmlns:r="http://schemas.openxmlformats.org/officeDocument/2006/relationships" id="258" r:id="R2d75b4a0f8704b2c"/>
+    <p:sldId xmlns:r="http://schemas.openxmlformats.org/officeDocument/2006/relationships" id="259" r:id="R14e65843dba04daa"/>
+    <p:sldId xmlns:r="http://schemas.openxmlformats.org/officeDocument/2006/relationships" id="260" r:id="R868b2879f9bb4d02"/>
+    <p:sldId xmlns:r="http://schemas.openxmlformats.org/officeDocument/2006/relationships" id="261" r:id="R9ec3d5850b4741a0"/>
   </p:sldIdLst>
   <p:sldSz cx="12191999" cy="6858000"/>
   <p:notesSz cx="6858000" cy="9144000"/>
@@ -4796,17 +4796,17 @@
   </p:cSld>
   <p:clrMap bg1="lt1" tx1="dk1" bg2="lt2" tx2="dk2" accent1="accent1" accent2="accent2" accent3="accent3" accent4="accent4" accent5="accent5" accent6="accent6" hlink="hlink" folHlink="folHlink"/>
   <p:sldLayoutIdLst>
-    <p:sldLayoutId xmlns:r="http://schemas.openxmlformats.org/officeDocument/2006/relationships" id="2147483649" r:id="Raa9c890dc73e4407"/>
-    <p:sldLayoutId xmlns:r="http://schemas.openxmlformats.org/officeDocument/2006/relationships" id="2147483650" r:id="Rb90ff496bdda4c6b"/>
-    <p:sldLayoutId xmlns:r="http://schemas.openxmlformats.org/officeDocument/2006/relationships" id="2147483651" r:id="R29363830634a4261"/>
-    <p:sldLayoutId xmlns:r="http://schemas.openxmlformats.org/officeDocument/2006/relationships" id="2147483652" r:id="Rdf47032a5eba4de1"/>
-    <p:sldLayoutId xmlns:r="http://schemas.openxmlformats.org/officeDocument/2006/relationships" id="2147483653" r:id="R5d41fff128e14bc6"/>
-    <p:sldLayoutId xmlns:r="http://schemas.openxmlformats.org/officeDocument/2006/relationships" id="2147483654" r:id="Raf91935795884b54"/>
-    <p:sldLayoutId xmlns:r="http://schemas.openxmlformats.org/officeDocument/2006/relationships" id="2147483655" r:id="R7ff45709cc65417f"/>
-    <p:sldLayoutId xmlns:r="http://schemas.openxmlformats.org/officeDocument/2006/relationships" id="2147483656" r:id="Ra969b0df7500430d"/>
-    <p:sldLayoutId xmlns:r="http://schemas.openxmlformats.org/officeDocument/2006/relationships" id="2147483657" r:id="Rff444b1a8d364e21"/>
-    <p:sldLayoutId xmlns:r="http://schemas.openxmlformats.org/officeDocument/2006/relationships" id="2147483658" r:id="Rba3552208abd481e"/>
-    <p:sldLayoutId xmlns:r="http://schemas.openxmlformats.org/officeDocument/2006/relationships" id="2147483659" r:id="R6fcd20ad7eae4228"/>
+    <p:sldLayoutId xmlns:r="http://schemas.openxmlformats.org/officeDocument/2006/relationships" id="2147483649" r:id="R959e0dd509084ff4"/>
+    <p:sldLayoutId xmlns:r="http://schemas.openxmlformats.org/officeDocument/2006/relationships" id="2147483650" r:id="Re943ddcf17ad442b"/>
+    <p:sldLayoutId xmlns:r="http://schemas.openxmlformats.org/officeDocument/2006/relationships" id="2147483651" r:id="R3387bb44e9364630"/>
+    <p:sldLayoutId xmlns:r="http://schemas.openxmlformats.org/officeDocument/2006/relationships" id="2147483652" r:id="R7de72193126447fd"/>
+    <p:sldLayoutId xmlns:r="http://schemas.openxmlformats.org/officeDocument/2006/relationships" id="2147483653" r:id="R7af517d18fff46b1"/>
+    <p:sldLayoutId xmlns:r="http://schemas.openxmlformats.org/officeDocument/2006/relationships" id="2147483654" r:id="Re6e1da5a21d54277"/>
+    <p:sldLayoutId xmlns:r="http://schemas.openxmlformats.org/officeDocument/2006/relationships" id="2147483655" r:id="R2fc9a628697b415f"/>
+    <p:sldLayoutId xmlns:r="http://schemas.openxmlformats.org/officeDocument/2006/relationships" id="2147483656" r:id="R3b50455bdf314bea"/>
+    <p:sldLayoutId xmlns:r="http://schemas.openxmlformats.org/officeDocument/2006/relationships" id="2147483657" r:id="R3cc9f7ae7135433e"/>
+    <p:sldLayoutId xmlns:r="http://schemas.openxmlformats.org/officeDocument/2006/relationships" id="2147483658" r:id="R560657c24011463b"/>
+    <p:sldLayoutId xmlns:r="http://schemas.openxmlformats.org/officeDocument/2006/relationships" id="2147483659" r:id="R1d495edc40e04178"/>
   </p:sldLayoutIdLst>
   <p:txStyles>
     <p:titleStyle>
@@ -5706,7 +5706,7 @@
                 <a:ea typeface="Aptos"/>
                 <a:cs typeface="Aptos"/>
               </a:rPr>
-              <a:t>2026.07.27-29</a:t>
+              <a:t>2026.07.27-30</a:t>
             </a:r>
           </a:p>
         </p:txBody>
@@ -6179,7 +6179,7 @@
                 <a:ea typeface="Aptos"/>
                 <a:cs typeface="Aptos"/>
               </a:rPr>
-              <a:t>Independent public evidence summary · 2026.07.27-29 · 2026-07-27 · Sources: EPO; Germany — official judgments; WIPO</a:t>
+              <a:t>Independent public evidence summary · 2026.07.27-30 · 2026-07-27 · Sources: EPO; Germany — official judgments; WIPO</a:t>
             </a:r>
           </a:p>
         </p:txBody>
@@ -6794,7 +6794,7 @@
                 <a:ea typeface="Aptos"/>
                 <a:cs typeface="Aptos"/>
               </a:rPr>
-              <a:t>Independent public evidence summary · 2026.07.27-29 · 2026-07-27 · Sources: EPO Register; EP3032975B2; 8 Ni 18/24 (EP); 7 O 3341/24</a:t>
+              <a:t>Independent public evidence summary · 2026.07.27-30 · 2026-07-27 · Sources: EPO Register; EP3032975B2; 8 Ni 18/24 (EP); 7 O 3341/24</a:t>
             </a:r>
           </a:p>
         </p:txBody>
@@ -7765,7 +7765,7 @@
                 <a:ea typeface="Aptos"/>
                 <a:cs typeface="Aptos"/>
               </a:rPr>
-              <a:t>Independent public evidence summary · 2026.07.27-29 · 2026-07-27 · Sources: World Bank; Statistics Canada; Health Canada; NZ Ministry of Health; Sejm; FHM; FTC</a:t>
+              <a:t>Independent public evidence summary · 2026.07.27-30 · 2026-07-27 · Sources: World Bank; Statistics Canada; Health Canada; NZ Ministry of Health; Sejm; FHM; FTC</a:t>
             </a:r>
           </a:p>
         </p:txBody>
@@ -8463,7 +8463,7 @@
                 <a:ea typeface="Aptos"/>
                 <a:cs typeface="Aptos"/>
               </a:rPr>
-              <a:t>Base: 195/578 WB; not sales. Poland 2020–23 flow; 2025 tax bridge 4,382,500 devices / 62,500 sets. Canada CAD 1.219160bn (≈EUR 822.6m; ECB 2024); Health Canada shipments CAD 1.160754bn (≈EUR 783.2m; ECB 2024); FTC USD 2.763bn (≈EUR 2.336bn; ECB 2021). Euromonitor 0/6; donor 0/3.</a:t>
+              <a:t>Method control 23 / 5 / 15 / 152; not sales. Poland: tax bridge 4,382,500 devices / 62,500 sets. Canada CAD 1.219160bn (≈EUR 822.6m; ECB 2024); Health Canada shipments CAD 1.160754bn (≈EUR 783.2m; ECB 2024); FTC USD 2.763bn (≈EUR 2.336bn; ECB 2021). Euromonitor 0/6; donor 0/3.</a:t>
             </a:r>
           </a:p>
         </p:txBody>
@@ -8736,7 +8736,7 @@
                 <a:ea typeface="Aptos"/>
                 <a:cs typeface="Aptos"/>
               </a:rPr>
-              <a:t>Independent public evidence summary · 2026.07.27-29 · 2026-07-27 · Sources: Evidence Register; WIPO IP valuation</a:t>
+              <a:t>Independent public evidence summary · 2026.07.27-30 · 2026-07-27 · Sources: Evidence Register; WIPO IP valuation</a:t>
             </a:r>
           </a:p>
         </p:txBody>
@@ -9559,7 +9559,7 @@
                 <a:ea typeface="Aptos"/>
                 <a:cs typeface="Aptos"/>
               </a:rPr>
-              <a:t>Version 2026.07.27-29 · 2026-07-27 · 6 / 6</a:t>
+              <a:t>Version 2026.07.27-30 · 2026-07-27 · 6 / 6</a:t>
             </a:r>
           </a:p>
         </p:txBody>

--- a/site/downloads/pixan-bank-deck-short-en.pptx
+++ b/site/downloads/pixan-bank-deck-short-en.pptx
@@ -2,18 +2,18 @@
 <file path=ppt/presentation.xml><?xml version="1.0" encoding="utf-8"?>
 <p:presentation xmlns:p="http://schemas.openxmlformats.org/presentationml/2006/main">
   <p:sldMasterIdLst>
-    <p:sldMasterId xmlns:r="http://schemas.openxmlformats.org/officeDocument/2006/relationships" id="2147483648" r:id="Ra69d853b1c044f60"/>
+    <p:sldMasterId xmlns:r="http://schemas.openxmlformats.org/officeDocument/2006/relationships" id="2147483648" r:id="Rb0c22177e08f48bc"/>
   </p:sldMasterIdLst>
   <p:notesMasterIdLst>
-    <p:notesMasterId xmlns:r="http://schemas.openxmlformats.org/officeDocument/2006/relationships" r:id="R3dcbbca746b84f0e"/>
+    <p:notesMasterId xmlns:r="http://schemas.openxmlformats.org/officeDocument/2006/relationships" r:id="R86f34a8d90124004"/>
   </p:notesMasterIdLst>
   <p:sldIdLst>
-    <p:sldId xmlns:r="http://schemas.openxmlformats.org/officeDocument/2006/relationships" id="256" r:id="Re852c92406474ef2"/>
-    <p:sldId xmlns:r="http://schemas.openxmlformats.org/officeDocument/2006/relationships" id="257" r:id="R837e3786a83444fd"/>
-    <p:sldId xmlns:r="http://schemas.openxmlformats.org/officeDocument/2006/relationships" id="258" r:id="R2d75b4a0f8704b2c"/>
-    <p:sldId xmlns:r="http://schemas.openxmlformats.org/officeDocument/2006/relationships" id="259" r:id="R14e65843dba04daa"/>
-    <p:sldId xmlns:r="http://schemas.openxmlformats.org/officeDocument/2006/relationships" id="260" r:id="R868b2879f9bb4d02"/>
-    <p:sldId xmlns:r="http://schemas.openxmlformats.org/officeDocument/2006/relationships" id="261" r:id="R9ec3d5850b4741a0"/>
+    <p:sldId xmlns:r="http://schemas.openxmlformats.org/officeDocument/2006/relationships" id="256" r:id="R623e9d5ab52d48b8"/>
+    <p:sldId xmlns:r="http://schemas.openxmlformats.org/officeDocument/2006/relationships" id="257" r:id="R05a354372bad4426"/>
+    <p:sldId xmlns:r="http://schemas.openxmlformats.org/officeDocument/2006/relationships" id="258" r:id="Rcb509b8b691847da"/>
+    <p:sldId xmlns:r="http://schemas.openxmlformats.org/officeDocument/2006/relationships" id="259" r:id="R52b8d7f0a1ac4e0b"/>
+    <p:sldId xmlns:r="http://schemas.openxmlformats.org/officeDocument/2006/relationships" id="260" r:id="R860b3e254d324723"/>
+    <p:sldId xmlns:r="http://schemas.openxmlformats.org/officeDocument/2006/relationships" id="261" r:id="R5ea2561a4b1e4fdc"/>
   </p:sldIdLst>
   <p:sldSz cx="12191999" cy="6858000"/>
   <p:notesSz cx="6858000" cy="9144000"/>
@@ -580,6 +580,41 @@
           </a:p>
           <a:p xmlns:a="http://schemas.openxmlformats.org/drawingml/2006/main">
             <a:r>
+              <a:t>- https://www.ris.bka.gv.at/GeltendeFassung.wxe?Abfrage=Bundesnormen&amp;Gesetzesnummer=10010907</a:t>
+            </a:r>
+          </a:p>
+          <a:p xmlns:a="http://schemas.openxmlformats.org/drawingml/2006/main">
+            <a:r>
+              <a:t>- https://www.health.belgium.be/en/organisation-policy/legislation-policy-documents/e-cigarette-notification-eu-ceg-belgian-guidelines</a:t>
+            </a:r>
+          </a:p>
+          <a:p xmlns:a="http://schemas.openxmlformats.org/drawingml/2006/main">
+            <a:r>
+              <a:t>- https://www.lachambre.be/doc/CCRI/html/56/ic041x.html</a:t>
+            </a:r>
+          </a:p>
+          <a:p xmlns:a="http://schemas.openxmlformats.org/drawingml/2006/main">
+            <a:r>
+              <a:t>- https://www.bazg.admin.ch/dam/en/sd-web/GljEzThGISer/Tobacco%20tax.pdf</a:t>
+            </a:r>
+          </a:p>
+          <a:p xmlns:a="http://schemas.openxmlformats.org/drawingml/2006/main">
+            <a:r>
+              <a:t>- https://douanes.public.lu/fr/support/faq/e-liquides.html</a:t>
+            </a:r>
+          </a:p>
+          <a:p xmlns:a="http://schemas.openxmlformats.org/drawingml/2006/main">
+            <a:r>
+              <a:t>- https://www.helsedirektoratet.no/veiledere/tobakksskadeloven/e-sigaretter</a:t>
+            </a:r>
+          </a:p>
+          <a:p xmlns:a="http://schemas.openxmlformats.org/drawingml/2006/main">
+            <a:r>
+              <a:t>- https://www.adm.gov.it/portale/documents/20182/261920520/Libro+blu+2024+-+Relazione.pdf/e46989ce-b39f-a404-3b4b-2af3196cba43</a:t>
+            </a:r>
+          </a:p>
+          <a:p xmlns:a="http://schemas.openxmlformats.org/drawingml/2006/main">
+            <a:r>
               <a:t>- https://www.wipo.int/en/web/ip-financing</a:t>
             </a:r>
           </a:p>
@@ -820,6 +855,41 @@
           </a:p>
           <a:p xmlns:a="http://schemas.openxmlformats.org/drawingml/2006/main">
             <a:r>
+              <a:t>- https://www.ris.bka.gv.at/GeltendeFassung.wxe?Abfrage=Bundesnormen&amp;Gesetzesnummer=10010907</a:t>
+            </a:r>
+          </a:p>
+          <a:p xmlns:a="http://schemas.openxmlformats.org/drawingml/2006/main">
+            <a:r>
+              <a:t>- https://www.health.belgium.be/en/organisation-policy/legislation-policy-documents/e-cigarette-notification-eu-ceg-belgian-guidelines</a:t>
+            </a:r>
+          </a:p>
+          <a:p xmlns:a="http://schemas.openxmlformats.org/drawingml/2006/main">
+            <a:r>
+              <a:t>- https://www.lachambre.be/doc/CCRI/html/56/ic041x.html</a:t>
+            </a:r>
+          </a:p>
+          <a:p xmlns:a="http://schemas.openxmlformats.org/drawingml/2006/main">
+            <a:r>
+              <a:t>- https://www.bazg.admin.ch/dam/en/sd-web/GljEzThGISer/Tobacco%20tax.pdf</a:t>
+            </a:r>
+          </a:p>
+          <a:p xmlns:a="http://schemas.openxmlformats.org/drawingml/2006/main">
+            <a:r>
+              <a:t>- https://douanes.public.lu/fr/support/faq/e-liquides.html</a:t>
+            </a:r>
+          </a:p>
+          <a:p xmlns:a="http://schemas.openxmlformats.org/drawingml/2006/main">
+            <a:r>
+              <a:t>- https://www.helsedirektoratet.no/veiledere/tobakksskadeloven/e-sigaretter</a:t>
+            </a:r>
+          </a:p>
+          <a:p xmlns:a="http://schemas.openxmlformats.org/drawingml/2006/main">
+            <a:r>
+              <a:t>- https://www.adm.gov.it/portale/documents/20182/261920520/Libro+blu+2024+-+Relazione.pdf/e46989ce-b39f-a404-3b4b-2af3196cba43</a:t>
+            </a:r>
+          </a:p>
+          <a:p xmlns:a="http://schemas.openxmlformats.org/drawingml/2006/main">
+            <a:r>
               <a:t>- https://www.wipo.int/en/web/ip-financing</a:t>
             </a:r>
           </a:p>
@@ -1060,6 +1130,41 @@
           </a:p>
           <a:p xmlns:a="http://schemas.openxmlformats.org/drawingml/2006/main">
             <a:r>
+              <a:t>- https://www.ris.bka.gv.at/GeltendeFassung.wxe?Abfrage=Bundesnormen&amp;Gesetzesnummer=10010907</a:t>
+            </a:r>
+          </a:p>
+          <a:p xmlns:a="http://schemas.openxmlformats.org/drawingml/2006/main">
+            <a:r>
+              <a:t>- https://www.health.belgium.be/en/organisation-policy/legislation-policy-documents/e-cigarette-notification-eu-ceg-belgian-guidelines</a:t>
+            </a:r>
+          </a:p>
+          <a:p xmlns:a="http://schemas.openxmlformats.org/drawingml/2006/main">
+            <a:r>
+              <a:t>- https://www.lachambre.be/doc/CCRI/html/56/ic041x.html</a:t>
+            </a:r>
+          </a:p>
+          <a:p xmlns:a="http://schemas.openxmlformats.org/drawingml/2006/main">
+            <a:r>
+              <a:t>- https://www.bazg.admin.ch/dam/en/sd-web/GljEzThGISer/Tobacco%20tax.pdf</a:t>
+            </a:r>
+          </a:p>
+          <a:p xmlns:a="http://schemas.openxmlformats.org/drawingml/2006/main">
+            <a:r>
+              <a:t>- https://douanes.public.lu/fr/support/faq/e-liquides.html</a:t>
+            </a:r>
+          </a:p>
+          <a:p xmlns:a="http://schemas.openxmlformats.org/drawingml/2006/main">
+            <a:r>
+              <a:t>- https://www.helsedirektoratet.no/veiledere/tobakksskadeloven/e-sigaretter</a:t>
+            </a:r>
+          </a:p>
+          <a:p xmlns:a="http://schemas.openxmlformats.org/drawingml/2006/main">
+            <a:r>
+              <a:t>- https://www.adm.gov.it/portale/documents/20182/261920520/Libro+blu+2024+-+Relazione.pdf/e46989ce-b39f-a404-3b4b-2af3196cba43</a:t>
+            </a:r>
+          </a:p>
+          <a:p xmlns:a="http://schemas.openxmlformats.org/drawingml/2006/main">
+            <a:r>
               <a:t>- https://www.wipo.int/en/web/ip-financing</a:t>
             </a:r>
           </a:p>
@@ -1300,6 +1405,41 @@
           </a:p>
           <a:p xmlns:a="http://schemas.openxmlformats.org/drawingml/2006/main">
             <a:r>
+              <a:t>- https://www.ris.bka.gv.at/GeltendeFassung.wxe?Abfrage=Bundesnormen&amp;Gesetzesnummer=10010907</a:t>
+            </a:r>
+          </a:p>
+          <a:p xmlns:a="http://schemas.openxmlformats.org/drawingml/2006/main">
+            <a:r>
+              <a:t>- https://www.health.belgium.be/en/organisation-policy/legislation-policy-documents/e-cigarette-notification-eu-ceg-belgian-guidelines</a:t>
+            </a:r>
+          </a:p>
+          <a:p xmlns:a="http://schemas.openxmlformats.org/drawingml/2006/main">
+            <a:r>
+              <a:t>- https://www.lachambre.be/doc/CCRI/html/56/ic041x.html</a:t>
+            </a:r>
+          </a:p>
+          <a:p xmlns:a="http://schemas.openxmlformats.org/drawingml/2006/main">
+            <a:r>
+              <a:t>- https://www.bazg.admin.ch/dam/en/sd-web/GljEzThGISer/Tobacco%20tax.pdf</a:t>
+            </a:r>
+          </a:p>
+          <a:p xmlns:a="http://schemas.openxmlformats.org/drawingml/2006/main">
+            <a:r>
+              <a:t>- https://douanes.public.lu/fr/support/faq/e-liquides.html</a:t>
+            </a:r>
+          </a:p>
+          <a:p xmlns:a="http://schemas.openxmlformats.org/drawingml/2006/main">
+            <a:r>
+              <a:t>- https://www.helsedirektoratet.no/veiledere/tobakksskadeloven/e-sigaretter</a:t>
+            </a:r>
+          </a:p>
+          <a:p xmlns:a="http://schemas.openxmlformats.org/drawingml/2006/main">
+            <a:r>
+              <a:t>- https://www.adm.gov.it/portale/documents/20182/261920520/Libro+blu+2024+-+Relazione.pdf/e46989ce-b39f-a404-3b4b-2af3196cba43</a:t>
+            </a:r>
+          </a:p>
+          <a:p xmlns:a="http://schemas.openxmlformats.org/drawingml/2006/main">
+            <a:r>
               <a:t>- https://www.wipo.int/en/web/ip-financing</a:t>
             </a:r>
           </a:p>
@@ -1540,6 +1680,41 @@
           </a:p>
           <a:p xmlns:a="http://schemas.openxmlformats.org/drawingml/2006/main">
             <a:r>
+              <a:t>- https://www.ris.bka.gv.at/GeltendeFassung.wxe?Abfrage=Bundesnormen&amp;Gesetzesnummer=10010907</a:t>
+            </a:r>
+          </a:p>
+          <a:p xmlns:a="http://schemas.openxmlformats.org/drawingml/2006/main">
+            <a:r>
+              <a:t>- https://www.health.belgium.be/en/organisation-policy/legislation-policy-documents/e-cigarette-notification-eu-ceg-belgian-guidelines</a:t>
+            </a:r>
+          </a:p>
+          <a:p xmlns:a="http://schemas.openxmlformats.org/drawingml/2006/main">
+            <a:r>
+              <a:t>- https://www.lachambre.be/doc/CCRI/html/56/ic041x.html</a:t>
+            </a:r>
+          </a:p>
+          <a:p xmlns:a="http://schemas.openxmlformats.org/drawingml/2006/main">
+            <a:r>
+              <a:t>- https://www.bazg.admin.ch/dam/en/sd-web/GljEzThGISer/Tobacco%20tax.pdf</a:t>
+            </a:r>
+          </a:p>
+          <a:p xmlns:a="http://schemas.openxmlformats.org/drawingml/2006/main">
+            <a:r>
+              <a:t>- https://douanes.public.lu/fr/support/faq/e-liquides.html</a:t>
+            </a:r>
+          </a:p>
+          <a:p xmlns:a="http://schemas.openxmlformats.org/drawingml/2006/main">
+            <a:r>
+              <a:t>- https://www.helsedirektoratet.no/veiledere/tobakksskadeloven/e-sigaretter</a:t>
+            </a:r>
+          </a:p>
+          <a:p xmlns:a="http://schemas.openxmlformats.org/drawingml/2006/main">
+            <a:r>
+              <a:t>- https://www.adm.gov.it/portale/documents/20182/261920520/Libro+blu+2024+-+Relazione.pdf/e46989ce-b39f-a404-3b4b-2af3196cba43</a:t>
+            </a:r>
+          </a:p>
+          <a:p xmlns:a="http://schemas.openxmlformats.org/drawingml/2006/main">
+            <a:r>
               <a:t>- https://www.wipo.int/en/web/ip-financing</a:t>
             </a:r>
           </a:p>
@@ -1776,6 +1951,41 @@
           <a:p xmlns:a="http://schemas.openxmlformats.org/drawingml/2006/main">
             <a:r>
               <a:t>- https://www.folkhalsomyndigheten.se/regler-och-tillsyn/tobak-och-nikotinprodukter-regler-for-tillverkning-handel-och-hantering/elektroniska-cigaretter-och-pafyllningsbehallare-sa-foljer-du-reglerna/</a:t>
+            </a:r>
+          </a:p>
+          <a:p xmlns:a="http://schemas.openxmlformats.org/drawingml/2006/main">
+            <a:r>
+              <a:t>- https://www.ris.bka.gv.at/GeltendeFassung.wxe?Abfrage=Bundesnormen&amp;Gesetzesnummer=10010907</a:t>
+            </a:r>
+          </a:p>
+          <a:p xmlns:a="http://schemas.openxmlformats.org/drawingml/2006/main">
+            <a:r>
+              <a:t>- https://www.health.belgium.be/en/organisation-policy/legislation-policy-documents/e-cigarette-notification-eu-ceg-belgian-guidelines</a:t>
+            </a:r>
+          </a:p>
+          <a:p xmlns:a="http://schemas.openxmlformats.org/drawingml/2006/main">
+            <a:r>
+              <a:t>- https://www.lachambre.be/doc/CCRI/html/56/ic041x.html</a:t>
+            </a:r>
+          </a:p>
+          <a:p xmlns:a="http://schemas.openxmlformats.org/drawingml/2006/main">
+            <a:r>
+              <a:t>- https://www.bazg.admin.ch/dam/en/sd-web/GljEzThGISer/Tobacco%20tax.pdf</a:t>
+            </a:r>
+          </a:p>
+          <a:p xmlns:a="http://schemas.openxmlformats.org/drawingml/2006/main">
+            <a:r>
+              <a:t>- https://douanes.public.lu/fr/support/faq/e-liquides.html</a:t>
+            </a:r>
+          </a:p>
+          <a:p xmlns:a="http://schemas.openxmlformats.org/drawingml/2006/main">
+            <a:r>
+              <a:t>- https://www.helsedirektoratet.no/veiledere/tobakksskadeloven/e-sigaretter</a:t>
+            </a:r>
+          </a:p>
+          <a:p xmlns:a="http://schemas.openxmlformats.org/drawingml/2006/main">
+            <a:r>
+              <a:t>- https://www.adm.gov.it/portale/documents/20182/261920520/Libro+blu+2024+-+Relazione.pdf/e46989ce-b39f-a404-3b4b-2af3196cba43</a:t>
             </a:r>
           </a:p>
           <a:p xmlns:a="http://schemas.openxmlformats.org/drawingml/2006/main">
@@ -4796,17 +5006,17 @@
   </p:cSld>
   <p:clrMap bg1="lt1" tx1="dk1" bg2="lt2" tx2="dk2" accent1="accent1" accent2="accent2" accent3="accent3" accent4="accent4" accent5="accent5" accent6="accent6" hlink="hlink" folHlink="folHlink"/>
   <p:sldLayoutIdLst>
-    <p:sldLayoutId xmlns:r="http://schemas.openxmlformats.org/officeDocument/2006/relationships" id="2147483649" r:id="R959e0dd509084ff4"/>
-    <p:sldLayoutId xmlns:r="http://schemas.openxmlformats.org/officeDocument/2006/relationships" id="2147483650" r:id="Re943ddcf17ad442b"/>
-    <p:sldLayoutId xmlns:r="http://schemas.openxmlformats.org/officeDocument/2006/relationships" id="2147483651" r:id="R3387bb44e9364630"/>
-    <p:sldLayoutId xmlns:r="http://schemas.openxmlformats.org/officeDocument/2006/relationships" id="2147483652" r:id="R7de72193126447fd"/>
-    <p:sldLayoutId xmlns:r="http://schemas.openxmlformats.org/officeDocument/2006/relationships" id="2147483653" r:id="R7af517d18fff46b1"/>
-    <p:sldLayoutId xmlns:r="http://schemas.openxmlformats.org/officeDocument/2006/relationships" id="2147483654" r:id="Re6e1da5a21d54277"/>
-    <p:sldLayoutId xmlns:r="http://schemas.openxmlformats.org/officeDocument/2006/relationships" id="2147483655" r:id="R2fc9a628697b415f"/>
-    <p:sldLayoutId xmlns:r="http://schemas.openxmlformats.org/officeDocument/2006/relationships" id="2147483656" r:id="R3b50455bdf314bea"/>
-    <p:sldLayoutId xmlns:r="http://schemas.openxmlformats.org/officeDocument/2006/relationships" id="2147483657" r:id="R3cc9f7ae7135433e"/>
-    <p:sldLayoutId xmlns:r="http://schemas.openxmlformats.org/officeDocument/2006/relationships" id="2147483658" r:id="R560657c24011463b"/>
-    <p:sldLayoutId xmlns:r="http://schemas.openxmlformats.org/officeDocument/2006/relationships" id="2147483659" r:id="R1d495edc40e04178"/>
+    <p:sldLayoutId xmlns:r="http://schemas.openxmlformats.org/officeDocument/2006/relationships" id="2147483649" r:id="R41a7b88fa40a468d"/>
+    <p:sldLayoutId xmlns:r="http://schemas.openxmlformats.org/officeDocument/2006/relationships" id="2147483650" r:id="R7489a54a83b54ff6"/>
+    <p:sldLayoutId xmlns:r="http://schemas.openxmlformats.org/officeDocument/2006/relationships" id="2147483651" r:id="R07206bffd4dc4ab9"/>
+    <p:sldLayoutId xmlns:r="http://schemas.openxmlformats.org/officeDocument/2006/relationships" id="2147483652" r:id="Rd1a3684689cf4401"/>
+    <p:sldLayoutId xmlns:r="http://schemas.openxmlformats.org/officeDocument/2006/relationships" id="2147483653" r:id="R6ab819cd99c14c0f"/>
+    <p:sldLayoutId xmlns:r="http://schemas.openxmlformats.org/officeDocument/2006/relationships" id="2147483654" r:id="R9815a984d7e643ec"/>
+    <p:sldLayoutId xmlns:r="http://schemas.openxmlformats.org/officeDocument/2006/relationships" id="2147483655" r:id="Rcf7ed3ff79f744da"/>
+    <p:sldLayoutId xmlns:r="http://schemas.openxmlformats.org/officeDocument/2006/relationships" id="2147483656" r:id="R4296631cfaf14191"/>
+    <p:sldLayoutId xmlns:r="http://schemas.openxmlformats.org/officeDocument/2006/relationships" id="2147483657" r:id="R6f89e83aacf145f2"/>
+    <p:sldLayoutId xmlns:r="http://schemas.openxmlformats.org/officeDocument/2006/relationships" id="2147483658" r:id="R7a69e5337fb848b4"/>
+    <p:sldLayoutId xmlns:r="http://schemas.openxmlformats.org/officeDocument/2006/relationships" id="2147483659" r:id="Rbd59cdd0acac4d0c"/>
   </p:sldLayoutIdLst>
   <p:txStyles>
     <p:titleStyle>
@@ -5706,7 +5916,7 @@
                 <a:ea typeface="Aptos"/>
                 <a:cs typeface="Aptos"/>
               </a:rPr>
-              <a:t>2026.07.27-30</a:t>
+              <a:t>2026.07.28-32</a:t>
             </a:r>
           </a:p>
         </p:txBody>
@@ -5753,7 +5963,7 @@
                 <a:ea typeface="Aptos"/>
                 <a:cs typeface="Aptos"/>
               </a:rPr>
-              <a:t>Updated 2026-07-27</a:t>
+              <a:t>Updated 2026-07-28</a:t>
             </a:r>
             <a:br/>
             <a:r>
@@ -6179,7 +6389,7 @@
                 <a:ea typeface="Aptos"/>
                 <a:cs typeface="Aptos"/>
               </a:rPr>
-              <a:t>Independent public evidence summary · 2026.07.27-30 · 2026-07-27 · Sources: EPO; Germany — official judgments; WIPO</a:t>
+              <a:t>Independent public evidence summary · 2026.07.28-32 · 2026-07-28 · Sources: EPO; Germany — official judgments; WIPO</a:t>
             </a:r>
           </a:p>
         </p:txBody>
@@ -6794,7 +7004,7 @@
                 <a:ea typeface="Aptos"/>
                 <a:cs typeface="Aptos"/>
               </a:rPr>
-              <a:t>Independent public evidence summary · 2026.07.27-30 · 2026-07-27 · Sources: EPO Register; EP3032975B2; 8 Ni 18/24 (EP); 7 O 3341/24</a:t>
+              <a:t>Independent public evidence summary · 2026.07.28-32 · 2026-07-28 · Sources: EPO Register; EP3032975B2; 8 Ni 18/24 (EP); 7 O 3341/24</a:t>
             </a:r>
           </a:p>
         </p:txBody>
@@ -7765,7 +7975,7 @@
                 <a:ea typeface="Aptos"/>
                 <a:cs typeface="Aptos"/>
               </a:rPr>
-              <a:t>Independent public evidence summary · 2026.07.27-30 · 2026-07-27 · Sources: World Bank; Statistics Canada; Health Canada; NZ Ministry of Health; Sejm; FHM; FTC</a:t>
+              <a:t>Independent public evidence summary · 2026.07.28-32 · 2026-07-28 · Sources: World Bank; Statistics Canada; Health Canada; NZ Ministry of Health; Sejm; FHM; FTC; ADM</a:t>
             </a:r>
           </a:p>
         </p:txBody>
@@ -8463,7 +8673,7 @@
                 <a:ea typeface="Aptos"/>
                 <a:cs typeface="Aptos"/>
               </a:rPr>
-              <a:t>Method control 23 / 5 / 15 / 152; not sales. Poland: tax bridge 4,382,500 devices / 62,500 sets. Canada CAD 1.219160bn (≈EUR 822.6m; ECB 2024); Health Canada shipments CAD 1.160754bn (≈EUR 783.2m; ECB 2024); FTC USD 2.763bn (≈EUR 2.336bn; ECB 2021). Euromonitor 0/6; donor 0/3.</a:t>
+              <a:t>Method control 28 / 0 / 15 / 152; 5 new country plans, not sales. Belgium ≈83,333 litres (9 months; not retail); Italy EUR 84.31m PLI tax (not retail). Canada retail CAD 1.219160bn (≈EUR 822.6m; ECB 2024) and shipments CAD 1.160754bn (≈EUR 783.2m; ECB 2024); FTC USD 2.763bn (≈EUR 2.336bn; ECB 2021). Donor 0/3.</a:t>
             </a:r>
           </a:p>
         </p:txBody>
@@ -8736,7 +8946,7 @@
                 <a:ea typeface="Aptos"/>
                 <a:cs typeface="Aptos"/>
               </a:rPr>
-              <a:t>Independent public evidence summary · 2026.07.27-30 · 2026-07-27 · Sources: Evidence Register; WIPO IP valuation</a:t>
+              <a:t>Independent public evidence summary · 2026.07.28-32 · 2026-07-28 · Sources: Evidence Register; WIPO IP valuation</a:t>
             </a:r>
           </a:p>
         </p:txBody>
@@ -9559,7 +9769,7 @@
                 <a:ea typeface="Aptos"/>
                 <a:cs typeface="Aptos"/>
               </a:rPr>
-              <a:t>Version 2026.07.27-30 · 2026-07-27 · 6 / 6</a:t>
+              <a:t>Version 2026.07.28-32 · 2026-07-28 · 6 / 6</a:t>
             </a:r>
           </a:p>
         </p:txBody>

--- a/site/downloads/pixan-bank-deck-short-en.pptx
+++ b/site/downloads/pixan-bank-deck-short-en.pptx
@@ -2,18 +2,18 @@
 <file path=ppt/presentation.xml><?xml version="1.0" encoding="utf-8"?>
 <p:presentation xmlns:p="http://schemas.openxmlformats.org/presentationml/2006/main">
   <p:sldMasterIdLst>
-    <p:sldMasterId xmlns:r="http://schemas.openxmlformats.org/officeDocument/2006/relationships" id="2147483648" r:id="Rb0c22177e08f48bc"/>
+    <p:sldMasterId xmlns:r="http://schemas.openxmlformats.org/officeDocument/2006/relationships" id="2147483648" r:id="Rf589b6de300b4cec"/>
   </p:sldMasterIdLst>
   <p:notesMasterIdLst>
-    <p:notesMasterId xmlns:r="http://schemas.openxmlformats.org/officeDocument/2006/relationships" r:id="R86f34a8d90124004"/>
+    <p:notesMasterId xmlns:r="http://schemas.openxmlformats.org/officeDocument/2006/relationships" r:id="R0a6877699aca4a93"/>
   </p:notesMasterIdLst>
   <p:sldIdLst>
-    <p:sldId xmlns:r="http://schemas.openxmlformats.org/officeDocument/2006/relationships" id="256" r:id="R623e9d5ab52d48b8"/>
-    <p:sldId xmlns:r="http://schemas.openxmlformats.org/officeDocument/2006/relationships" id="257" r:id="R05a354372bad4426"/>
-    <p:sldId xmlns:r="http://schemas.openxmlformats.org/officeDocument/2006/relationships" id="258" r:id="Rcb509b8b691847da"/>
-    <p:sldId xmlns:r="http://schemas.openxmlformats.org/officeDocument/2006/relationships" id="259" r:id="R52b8d7f0a1ac4e0b"/>
-    <p:sldId xmlns:r="http://schemas.openxmlformats.org/officeDocument/2006/relationships" id="260" r:id="R860b3e254d324723"/>
-    <p:sldId xmlns:r="http://schemas.openxmlformats.org/officeDocument/2006/relationships" id="261" r:id="R5ea2561a4b1e4fdc"/>
+    <p:sldId xmlns:r="http://schemas.openxmlformats.org/officeDocument/2006/relationships" id="256" r:id="R8e8333edf21e4ed6"/>
+    <p:sldId xmlns:r="http://schemas.openxmlformats.org/officeDocument/2006/relationships" id="257" r:id="R36cb2364643341db"/>
+    <p:sldId xmlns:r="http://schemas.openxmlformats.org/officeDocument/2006/relationships" id="258" r:id="R70ed84abef134b99"/>
+    <p:sldId xmlns:r="http://schemas.openxmlformats.org/officeDocument/2006/relationships" id="259" r:id="Ra1118f6d13d34fdd"/>
+    <p:sldId xmlns:r="http://schemas.openxmlformats.org/officeDocument/2006/relationships" id="260" r:id="Rc9aebf6a06d7408d"/>
+    <p:sldId xmlns:r="http://schemas.openxmlformats.org/officeDocument/2006/relationships" id="261" r:id="R0c5e94052e3c48f0"/>
   </p:sldIdLst>
   <p:sldSz cx="12191999" cy="6858000"/>
   <p:notesSz cx="6858000" cy="9144000"/>
@@ -605,7 +605,22 @@
           </a:p>
           <a:p xmlns:a="http://schemas.openxmlformats.org/drawingml/2006/main">
             <a:r>
+              <a:t>- https://douanes.public.lu/dam-assets/fr/accises/signes-fiscaux/2024/s48/bareme-e-liquide-s48.pdf</a:t>
+            </a:r>
+          </a:p>
+          <a:p xmlns:a="http://schemas.openxmlformats.org/drawingml/2006/main">
+            <a:r>
               <a:t>- https://www.helsedirektoratet.no/veiledere/tobakksskadeloven/e-sigaretter</a:t>
+            </a:r>
+          </a:p>
+          <a:p xmlns:a="http://schemas.openxmlformats.org/drawingml/2006/main">
+            <a:r>
+              <a:t>- https://lekiosque.finances.gouv.fr/site_fr/NC8/Resultat_nc.asp?ot=1&amp;lanc=85434000</a:t>
+            </a:r>
+          </a:p>
+          <a:p xmlns:a="http://schemas.openxmlformats.org/drawingml/2006/main">
+            <a:r>
+              <a:t>- https://www.sik.dk/registre</a:t>
             </a:r>
           </a:p>
           <a:p xmlns:a="http://schemas.openxmlformats.org/drawingml/2006/main">
@@ -880,7 +895,22 @@
           </a:p>
           <a:p xmlns:a="http://schemas.openxmlformats.org/drawingml/2006/main">
             <a:r>
+              <a:t>- https://douanes.public.lu/dam-assets/fr/accises/signes-fiscaux/2024/s48/bareme-e-liquide-s48.pdf</a:t>
+            </a:r>
+          </a:p>
+          <a:p xmlns:a="http://schemas.openxmlformats.org/drawingml/2006/main">
+            <a:r>
               <a:t>- https://www.helsedirektoratet.no/veiledere/tobakksskadeloven/e-sigaretter</a:t>
+            </a:r>
+          </a:p>
+          <a:p xmlns:a="http://schemas.openxmlformats.org/drawingml/2006/main">
+            <a:r>
+              <a:t>- https://lekiosque.finances.gouv.fr/site_fr/NC8/Resultat_nc.asp?ot=1&amp;lanc=85434000</a:t>
+            </a:r>
+          </a:p>
+          <a:p xmlns:a="http://schemas.openxmlformats.org/drawingml/2006/main">
+            <a:r>
+              <a:t>- https://www.sik.dk/registre</a:t>
             </a:r>
           </a:p>
           <a:p xmlns:a="http://schemas.openxmlformats.org/drawingml/2006/main">
@@ -1155,7 +1185,22 @@
           </a:p>
           <a:p xmlns:a="http://schemas.openxmlformats.org/drawingml/2006/main">
             <a:r>
+              <a:t>- https://douanes.public.lu/dam-assets/fr/accises/signes-fiscaux/2024/s48/bareme-e-liquide-s48.pdf</a:t>
+            </a:r>
+          </a:p>
+          <a:p xmlns:a="http://schemas.openxmlformats.org/drawingml/2006/main">
+            <a:r>
               <a:t>- https://www.helsedirektoratet.no/veiledere/tobakksskadeloven/e-sigaretter</a:t>
+            </a:r>
+          </a:p>
+          <a:p xmlns:a="http://schemas.openxmlformats.org/drawingml/2006/main">
+            <a:r>
+              <a:t>- https://lekiosque.finances.gouv.fr/site_fr/NC8/Resultat_nc.asp?ot=1&amp;lanc=85434000</a:t>
+            </a:r>
+          </a:p>
+          <a:p xmlns:a="http://schemas.openxmlformats.org/drawingml/2006/main">
+            <a:r>
+              <a:t>- https://www.sik.dk/registre</a:t>
             </a:r>
           </a:p>
           <a:p xmlns:a="http://schemas.openxmlformats.org/drawingml/2006/main">
@@ -1430,7 +1475,22 @@
           </a:p>
           <a:p xmlns:a="http://schemas.openxmlformats.org/drawingml/2006/main">
             <a:r>
+              <a:t>- https://douanes.public.lu/dam-assets/fr/accises/signes-fiscaux/2024/s48/bareme-e-liquide-s48.pdf</a:t>
+            </a:r>
+          </a:p>
+          <a:p xmlns:a="http://schemas.openxmlformats.org/drawingml/2006/main">
+            <a:r>
               <a:t>- https://www.helsedirektoratet.no/veiledere/tobakksskadeloven/e-sigaretter</a:t>
+            </a:r>
+          </a:p>
+          <a:p xmlns:a="http://schemas.openxmlformats.org/drawingml/2006/main">
+            <a:r>
+              <a:t>- https://lekiosque.finances.gouv.fr/site_fr/NC8/Resultat_nc.asp?ot=1&amp;lanc=85434000</a:t>
+            </a:r>
+          </a:p>
+          <a:p xmlns:a="http://schemas.openxmlformats.org/drawingml/2006/main">
+            <a:r>
+              <a:t>- https://www.sik.dk/registre</a:t>
             </a:r>
           </a:p>
           <a:p xmlns:a="http://schemas.openxmlformats.org/drawingml/2006/main">
@@ -1705,7 +1765,22 @@
           </a:p>
           <a:p xmlns:a="http://schemas.openxmlformats.org/drawingml/2006/main">
             <a:r>
+              <a:t>- https://douanes.public.lu/dam-assets/fr/accises/signes-fiscaux/2024/s48/bareme-e-liquide-s48.pdf</a:t>
+            </a:r>
+          </a:p>
+          <a:p xmlns:a="http://schemas.openxmlformats.org/drawingml/2006/main">
+            <a:r>
               <a:t>- https://www.helsedirektoratet.no/veiledere/tobakksskadeloven/e-sigaretter</a:t>
+            </a:r>
+          </a:p>
+          <a:p xmlns:a="http://schemas.openxmlformats.org/drawingml/2006/main">
+            <a:r>
+              <a:t>- https://lekiosque.finances.gouv.fr/site_fr/NC8/Resultat_nc.asp?ot=1&amp;lanc=85434000</a:t>
+            </a:r>
+          </a:p>
+          <a:p xmlns:a="http://schemas.openxmlformats.org/drawingml/2006/main">
+            <a:r>
+              <a:t>- https://www.sik.dk/registre</a:t>
             </a:r>
           </a:p>
           <a:p xmlns:a="http://schemas.openxmlformats.org/drawingml/2006/main">
@@ -1980,7 +2055,22 @@
           </a:p>
           <a:p xmlns:a="http://schemas.openxmlformats.org/drawingml/2006/main">
             <a:r>
+              <a:t>- https://douanes.public.lu/dam-assets/fr/accises/signes-fiscaux/2024/s48/bareme-e-liquide-s48.pdf</a:t>
+            </a:r>
+          </a:p>
+          <a:p xmlns:a="http://schemas.openxmlformats.org/drawingml/2006/main">
+            <a:r>
               <a:t>- https://www.helsedirektoratet.no/veiledere/tobakksskadeloven/e-sigaretter</a:t>
+            </a:r>
+          </a:p>
+          <a:p xmlns:a="http://schemas.openxmlformats.org/drawingml/2006/main">
+            <a:r>
+              <a:t>- https://lekiosque.finances.gouv.fr/site_fr/NC8/Resultat_nc.asp?ot=1&amp;lanc=85434000</a:t>
+            </a:r>
+          </a:p>
+          <a:p xmlns:a="http://schemas.openxmlformats.org/drawingml/2006/main">
+            <a:r>
+              <a:t>- https://www.sik.dk/registre</a:t>
             </a:r>
           </a:p>
           <a:p xmlns:a="http://schemas.openxmlformats.org/drawingml/2006/main">
@@ -5006,17 +5096,17 @@
   </p:cSld>
   <p:clrMap bg1="lt1" tx1="dk1" bg2="lt2" tx2="dk2" accent1="accent1" accent2="accent2" accent3="accent3" accent4="accent4" accent5="accent5" accent6="accent6" hlink="hlink" folHlink="folHlink"/>
   <p:sldLayoutIdLst>
-    <p:sldLayoutId xmlns:r="http://schemas.openxmlformats.org/officeDocument/2006/relationships" id="2147483649" r:id="R41a7b88fa40a468d"/>
-    <p:sldLayoutId xmlns:r="http://schemas.openxmlformats.org/officeDocument/2006/relationships" id="2147483650" r:id="R7489a54a83b54ff6"/>
-    <p:sldLayoutId xmlns:r="http://schemas.openxmlformats.org/officeDocument/2006/relationships" id="2147483651" r:id="R07206bffd4dc4ab9"/>
-    <p:sldLayoutId xmlns:r="http://schemas.openxmlformats.org/officeDocument/2006/relationships" id="2147483652" r:id="Rd1a3684689cf4401"/>
-    <p:sldLayoutId xmlns:r="http://schemas.openxmlformats.org/officeDocument/2006/relationships" id="2147483653" r:id="R6ab819cd99c14c0f"/>
-    <p:sldLayoutId xmlns:r="http://schemas.openxmlformats.org/officeDocument/2006/relationships" id="2147483654" r:id="R9815a984d7e643ec"/>
-    <p:sldLayoutId xmlns:r="http://schemas.openxmlformats.org/officeDocument/2006/relationships" id="2147483655" r:id="Rcf7ed3ff79f744da"/>
-    <p:sldLayoutId xmlns:r="http://schemas.openxmlformats.org/officeDocument/2006/relationships" id="2147483656" r:id="R4296631cfaf14191"/>
-    <p:sldLayoutId xmlns:r="http://schemas.openxmlformats.org/officeDocument/2006/relationships" id="2147483657" r:id="R6f89e83aacf145f2"/>
-    <p:sldLayoutId xmlns:r="http://schemas.openxmlformats.org/officeDocument/2006/relationships" id="2147483658" r:id="R7a69e5337fb848b4"/>
-    <p:sldLayoutId xmlns:r="http://schemas.openxmlformats.org/officeDocument/2006/relationships" id="2147483659" r:id="Rbd59cdd0acac4d0c"/>
+    <p:sldLayoutId xmlns:r="http://schemas.openxmlformats.org/officeDocument/2006/relationships" id="2147483649" r:id="Ra6608a0edfc64e83"/>
+    <p:sldLayoutId xmlns:r="http://schemas.openxmlformats.org/officeDocument/2006/relationships" id="2147483650" r:id="R771fc6f7e160430b"/>
+    <p:sldLayoutId xmlns:r="http://schemas.openxmlformats.org/officeDocument/2006/relationships" id="2147483651" r:id="R76f8ddaf94f54698"/>
+    <p:sldLayoutId xmlns:r="http://schemas.openxmlformats.org/officeDocument/2006/relationships" id="2147483652" r:id="Rcc5dad9a3c4a45d7"/>
+    <p:sldLayoutId xmlns:r="http://schemas.openxmlformats.org/officeDocument/2006/relationships" id="2147483653" r:id="R0c78cc7cbe92424d"/>
+    <p:sldLayoutId xmlns:r="http://schemas.openxmlformats.org/officeDocument/2006/relationships" id="2147483654" r:id="Red54fc3e4ecc467d"/>
+    <p:sldLayoutId xmlns:r="http://schemas.openxmlformats.org/officeDocument/2006/relationships" id="2147483655" r:id="Rc8336747018b47bd"/>
+    <p:sldLayoutId xmlns:r="http://schemas.openxmlformats.org/officeDocument/2006/relationships" id="2147483656" r:id="R54cf49946c1e4a67"/>
+    <p:sldLayoutId xmlns:r="http://schemas.openxmlformats.org/officeDocument/2006/relationships" id="2147483657" r:id="R0d8affdc05d14ab9"/>
+    <p:sldLayoutId xmlns:r="http://schemas.openxmlformats.org/officeDocument/2006/relationships" id="2147483658" r:id="Rc8d12806013b4f57"/>
+    <p:sldLayoutId xmlns:r="http://schemas.openxmlformats.org/officeDocument/2006/relationships" id="2147483659" r:id="R4102b5097cd84491"/>
   </p:sldLayoutIdLst>
   <p:txStyles>
     <p:titleStyle>
@@ -5916,7 +6006,7 @@
                 <a:ea typeface="Aptos"/>
                 <a:cs typeface="Aptos"/>
               </a:rPr>
-              <a:t>2026.07.28-32</a:t>
+              <a:t>2026.07.29-35</a:t>
             </a:r>
           </a:p>
         </p:txBody>
@@ -5963,7 +6053,7 @@
                 <a:ea typeface="Aptos"/>
                 <a:cs typeface="Aptos"/>
               </a:rPr>
-              <a:t>Updated 2026-07-28</a:t>
+              <a:t>Updated 2026-07-29</a:t>
             </a:r>
             <a:br/>
             <a:r>
@@ -6389,7 +6479,7 @@
                 <a:ea typeface="Aptos"/>
                 <a:cs typeface="Aptos"/>
               </a:rPr>
-              <a:t>Independent public evidence summary · 2026.07.28-32 · 2026-07-28 · Sources: EPO; Germany — official judgments; WIPO</a:t>
+              <a:t>Independent public evidence summary · 2026.07.29-35 · 2026-07-29 · Sources: EPO; Germany — official judgments; WIPO</a:t>
             </a:r>
           </a:p>
         </p:txBody>
@@ -7004,7 +7094,7 @@
                 <a:ea typeface="Aptos"/>
                 <a:cs typeface="Aptos"/>
               </a:rPr>
-              <a:t>Independent public evidence summary · 2026.07.28-32 · 2026-07-28 · Sources: EPO Register; EP3032975B2; 8 Ni 18/24 (EP); 7 O 3341/24</a:t>
+              <a:t>Independent public evidence summary · 2026.07.29-35 · 2026-07-29 · Sources: EPO Register; EP3032975B2; 8 Ni 18/24 (EP); 7 O 3341/24</a:t>
             </a:r>
           </a:p>
         </p:txBody>
@@ -7975,7 +8065,7 @@
                 <a:ea typeface="Aptos"/>
                 <a:cs typeface="Aptos"/>
               </a:rPr>
-              <a:t>Independent public evidence summary · 2026.07.28-32 · 2026-07-28 · Sources: World Bank; Statistics Canada; Health Canada; NZ Ministry of Health; Sejm; FHM; FTC; ADM</a:t>
+              <a:t>Independent public evidence summary · 2026.07.29-35 · 2026-07-29 · Sources: World Bank; Statistics Canada; Health Canada; NZ Ministry of Health; Sejm; FHM; FTC; ADM</a:t>
             </a:r>
           </a:p>
         </p:txBody>
@@ -8497,7 +8587,7 @@
         <p:spPr>
           <a:xfrm xmlns:a="http://schemas.openxmlformats.org/drawingml/2006/main">
             <a:off x="566928" y="3529584"/>
-            <a:ext cx="10927080" cy="835152"/>
+            <a:ext cx="10927080" cy="2740152"/>
           </a:xfrm>
           <a:prstGeom xmlns:a="http://schemas.openxmlformats.org/drawingml/2006/main" prst="rect">
             <a:avLst/>
@@ -8506,7 +8596,7 @@
         </p:spPr>
         <p:txBody>
           <a:bodyPr xmlns:a="http://schemas.openxmlformats.org/drawingml/2006/main" wrap="square" lIns="36576" tIns="36576" rIns="36576" bIns="36576" anchor="t">
-            <a:spAutoFit/>
+            <a:normAutofit fontScale="100000"/>
           </a:bodyPr>
           <a:lstStyle xmlns:a="http://schemas.openxmlformats.org/drawingml/2006/main"/>
           <a:p xmlns:a="http://schemas.openxmlformats.org/drawingml/2006/main">
@@ -8514,7 +8604,7 @@
               <a:buNone/>
             </a:pPr>
             <a:r>
-              <a:rPr sz="2500" b="1">
+              <a:rPr sz="1050" b="1">
                 <a:solidFill>
                   <a:srgbClr val="071A2B"/>
                 </a:solidFill>
@@ -8522,7 +8612,7 @@
                 <a:ea typeface="Aptos"/>
                 <a:cs typeface="Aptos"/>
               </a:rPr>
-              <a:t>New Zealand passes 7/10: D5 failed; D8 and D10 open. Not accepted; the donor gate remains 0/3.</a:t>
+              <a:t>New Zealand is 7/10: D5 failed, D8/D10 open; donor gate 0/3. Official-response delta on 29 July: Germany requested clarification; the possible-fee deadline is 2026-08-11 and no fee has been accepted. France supplied customs classification, border-value and kg metadata only; the route remains a customs proxy. Denmark/Luxembourg: no sales data. Euromonitor's conditional paid Germany extract is not accepted or activated; 0/6, NOT SCORED.</a:t>
             </a:r>
           </a:p>
         </p:txBody>
@@ -8946,7 +9036,7 @@
                 <a:ea typeface="Aptos"/>
                 <a:cs typeface="Aptos"/>
               </a:rPr>
-              <a:t>Independent public evidence summary · 2026.07.28-32 · 2026-07-28 · Sources: Evidence Register; WIPO IP valuation</a:t>
+              <a:t>Independent public evidence summary · 2026.07.29-35 · 2026-07-29 · Sources: Evidence Register; WIPO IP valuation</a:t>
             </a:r>
           </a:p>
         </p:txBody>
@@ -9769,7 +9859,7 @@
                 <a:ea typeface="Aptos"/>
                 <a:cs typeface="Aptos"/>
               </a:rPr>
-              <a:t>Version 2026.07.28-32 · 2026-07-28 · 6 / 6</a:t>
+              <a:t>Version 2026.07.29-35 · 2026-07-29 · 6 / 6</a:t>
             </a:r>
           </a:p>
         </p:txBody>

--- a/site/downloads/pixan-bank-deck-short-en.pptx
+++ b/site/downloads/pixan-bank-deck-short-en.pptx
@@ -2,18 +2,18 @@
 <file path=ppt/presentation.xml><?xml version="1.0" encoding="utf-8"?>
 <p:presentation xmlns:p="http://schemas.openxmlformats.org/presentationml/2006/main">
   <p:sldMasterIdLst>
-    <p:sldMasterId xmlns:r="http://schemas.openxmlformats.org/officeDocument/2006/relationships" id="2147483648" r:id="Rf589b6de300b4cec"/>
+    <p:sldMasterId xmlns:r="http://schemas.openxmlformats.org/officeDocument/2006/relationships" id="2147483648" r:id="R03026327303a43f4"/>
   </p:sldMasterIdLst>
   <p:notesMasterIdLst>
-    <p:notesMasterId xmlns:r="http://schemas.openxmlformats.org/officeDocument/2006/relationships" r:id="R0a6877699aca4a93"/>
+    <p:notesMasterId xmlns:r="http://schemas.openxmlformats.org/officeDocument/2006/relationships" r:id="Rb910945d913b49ad"/>
   </p:notesMasterIdLst>
   <p:sldIdLst>
-    <p:sldId xmlns:r="http://schemas.openxmlformats.org/officeDocument/2006/relationships" id="256" r:id="R8e8333edf21e4ed6"/>
-    <p:sldId xmlns:r="http://schemas.openxmlformats.org/officeDocument/2006/relationships" id="257" r:id="R36cb2364643341db"/>
-    <p:sldId xmlns:r="http://schemas.openxmlformats.org/officeDocument/2006/relationships" id="258" r:id="R70ed84abef134b99"/>
-    <p:sldId xmlns:r="http://schemas.openxmlformats.org/officeDocument/2006/relationships" id="259" r:id="Ra1118f6d13d34fdd"/>
-    <p:sldId xmlns:r="http://schemas.openxmlformats.org/officeDocument/2006/relationships" id="260" r:id="Rc9aebf6a06d7408d"/>
-    <p:sldId xmlns:r="http://schemas.openxmlformats.org/officeDocument/2006/relationships" id="261" r:id="R0c5e94052e3c48f0"/>
+    <p:sldId xmlns:r="http://schemas.openxmlformats.org/officeDocument/2006/relationships" id="256" r:id="R02132dfc0fe348cd"/>
+    <p:sldId xmlns:r="http://schemas.openxmlformats.org/officeDocument/2006/relationships" id="257" r:id="R1ec53f9d183f448b"/>
+    <p:sldId xmlns:r="http://schemas.openxmlformats.org/officeDocument/2006/relationships" id="258" r:id="R91f9361286654e93"/>
+    <p:sldId xmlns:r="http://schemas.openxmlformats.org/officeDocument/2006/relationships" id="259" r:id="R39b45bc158a0478c"/>
+    <p:sldId xmlns:r="http://schemas.openxmlformats.org/officeDocument/2006/relationships" id="260" r:id="R587a4432994645d0"/>
+    <p:sldId xmlns:r="http://schemas.openxmlformats.org/officeDocument/2006/relationships" id="261" r:id="R502bf0eab8ac43e8"/>
   </p:sldIdLst>
   <p:sldSz cx="12191999" cy="6858000"/>
   <p:notesSz cx="6858000" cy="9144000"/>
@@ -5096,17 +5096,17 @@
   </p:cSld>
   <p:clrMap bg1="lt1" tx1="dk1" bg2="lt2" tx2="dk2" accent1="accent1" accent2="accent2" accent3="accent3" accent4="accent4" accent5="accent5" accent6="accent6" hlink="hlink" folHlink="folHlink"/>
   <p:sldLayoutIdLst>
-    <p:sldLayoutId xmlns:r="http://schemas.openxmlformats.org/officeDocument/2006/relationships" id="2147483649" r:id="Ra6608a0edfc64e83"/>
-    <p:sldLayoutId xmlns:r="http://schemas.openxmlformats.org/officeDocument/2006/relationships" id="2147483650" r:id="R771fc6f7e160430b"/>
-    <p:sldLayoutId xmlns:r="http://schemas.openxmlformats.org/officeDocument/2006/relationships" id="2147483651" r:id="R76f8ddaf94f54698"/>
-    <p:sldLayoutId xmlns:r="http://schemas.openxmlformats.org/officeDocument/2006/relationships" id="2147483652" r:id="Rcc5dad9a3c4a45d7"/>
-    <p:sldLayoutId xmlns:r="http://schemas.openxmlformats.org/officeDocument/2006/relationships" id="2147483653" r:id="R0c78cc7cbe92424d"/>
-    <p:sldLayoutId xmlns:r="http://schemas.openxmlformats.org/officeDocument/2006/relationships" id="2147483654" r:id="Red54fc3e4ecc467d"/>
-    <p:sldLayoutId xmlns:r="http://schemas.openxmlformats.org/officeDocument/2006/relationships" id="2147483655" r:id="Rc8336747018b47bd"/>
-    <p:sldLayoutId xmlns:r="http://schemas.openxmlformats.org/officeDocument/2006/relationships" id="2147483656" r:id="R54cf49946c1e4a67"/>
-    <p:sldLayoutId xmlns:r="http://schemas.openxmlformats.org/officeDocument/2006/relationships" id="2147483657" r:id="R0d8affdc05d14ab9"/>
-    <p:sldLayoutId xmlns:r="http://schemas.openxmlformats.org/officeDocument/2006/relationships" id="2147483658" r:id="Rc8d12806013b4f57"/>
-    <p:sldLayoutId xmlns:r="http://schemas.openxmlformats.org/officeDocument/2006/relationships" id="2147483659" r:id="R4102b5097cd84491"/>
+    <p:sldLayoutId xmlns:r="http://schemas.openxmlformats.org/officeDocument/2006/relationships" id="2147483649" r:id="Rc9804dc6cb8c43f7"/>
+    <p:sldLayoutId xmlns:r="http://schemas.openxmlformats.org/officeDocument/2006/relationships" id="2147483650" r:id="Rbf29913736d8404f"/>
+    <p:sldLayoutId xmlns:r="http://schemas.openxmlformats.org/officeDocument/2006/relationships" id="2147483651" r:id="R65165047a3814e58"/>
+    <p:sldLayoutId xmlns:r="http://schemas.openxmlformats.org/officeDocument/2006/relationships" id="2147483652" r:id="Red844ad0edf54a2d"/>
+    <p:sldLayoutId xmlns:r="http://schemas.openxmlformats.org/officeDocument/2006/relationships" id="2147483653" r:id="R41f39825a9ce4084"/>
+    <p:sldLayoutId xmlns:r="http://schemas.openxmlformats.org/officeDocument/2006/relationships" id="2147483654" r:id="R7c4b7f465b5d4b79"/>
+    <p:sldLayoutId xmlns:r="http://schemas.openxmlformats.org/officeDocument/2006/relationships" id="2147483655" r:id="R1b1f0e28ac7d4b58"/>
+    <p:sldLayoutId xmlns:r="http://schemas.openxmlformats.org/officeDocument/2006/relationships" id="2147483656" r:id="Rd0b1e021bd5c4040"/>
+    <p:sldLayoutId xmlns:r="http://schemas.openxmlformats.org/officeDocument/2006/relationships" id="2147483657" r:id="R29c3c9460dba4eef"/>
+    <p:sldLayoutId xmlns:r="http://schemas.openxmlformats.org/officeDocument/2006/relationships" id="2147483658" r:id="R80f19bcae98c42ae"/>
+    <p:sldLayoutId xmlns:r="http://schemas.openxmlformats.org/officeDocument/2006/relationships" id="2147483659" r:id="R527ad26d9cc74081"/>
   </p:sldLayoutIdLst>
   <p:txStyles>
     <p:titleStyle>
@@ -6006,7 +6006,7 @@
                 <a:ea typeface="Aptos"/>
                 <a:cs typeface="Aptos"/>
               </a:rPr>
-              <a:t>2026.07.29-35</a:t>
+              <a:t>2026.07.30-36</a:t>
             </a:r>
           </a:p>
         </p:txBody>
@@ -6053,7 +6053,7 @@
                 <a:ea typeface="Aptos"/>
                 <a:cs typeface="Aptos"/>
               </a:rPr>
-              <a:t>Updated 2026-07-29</a:t>
+              <a:t>Updated 2026-07-30</a:t>
             </a:r>
             <a:br/>
             <a:r>
@@ -6479,7 +6479,7 @@
                 <a:ea typeface="Aptos"/>
                 <a:cs typeface="Aptos"/>
               </a:rPr>
-              <a:t>Independent public evidence summary · 2026.07.29-35 · 2026-07-29 · Sources: EPO; Germany — official judgments; WIPO</a:t>
+              <a:t>Independent public evidence summary · 2026.07.30-36 · 2026-07-30 · Sources: EPO; Germany — official judgments; WIPO</a:t>
             </a:r>
           </a:p>
         </p:txBody>
@@ -7094,7 +7094,7 @@
                 <a:ea typeface="Aptos"/>
                 <a:cs typeface="Aptos"/>
               </a:rPr>
-              <a:t>Independent public evidence summary · 2026.07.29-35 · 2026-07-29 · Sources: EPO Register; EP3032975B2; 8 Ni 18/24 (EP); 7 O 3341/24</a:t>
+              <a:t>Independent public evidence summary · 2026.07.30-36 · 2026-07-30 · Sources: EPO Register; EP3032975B2; 8 Ni 18/24 (EP); 7 O 3341/24</a:t>
             </a:r>
           </a:p>
         </p:txBody>
@@ -8065,7 +8065,7 @@
                 <a:ea typeface="Aptos"/>
                 <a:cs typeface="Aptos"/>
               </a:rPr>
-              <a:t>Independent public evidence summary · 2026.07.29-35 · 2026-07-29 · Sources: World Bank; Statistics Canada; Health Canada; NZ Ministry of Health; Sejm; FHM; FTC; ADM</a:t>
+              <a:t>Independent public evidence summary · 2026.07.30-36 · 2026-07-30 · Sources: World Bank; Statistics Canada; Health Canada; NZ Ministry of Health; Sejm; FHM; FTC; ADM</a:t>
             </a:r>
           </a:p>
         </p:txBody>
@@ -8612,7 +8612,7 @@
                 <a:ea typeface="Aptos"/>
                 <a:cs typeface="Aptos"/>
               </a:rPr>
-              <a:t>New Zealand is 7/10: D5 failed, D8/D10 open; donor gate 0/3. Official-response delta on 29 July: Germany requested clarification; the possible-fee deadline is 2026-08-11 and no fee has been accepted. France supplied customs classification, border-value and kg metadata only; the route remains a customs proxy. Denmark/Luxembourg: no sales data. Euromonitor's conditional paid Germany extract is not accepted or activated; 0/6, NOT SCORED.</a:t>
+              <a:t>Canada is 7/10: an official clarification excludes GST/HST/PST/QST, includes embedded additional duties and changes no values; D5/D7/D10 remain open. Germany's narrowed reply asks the authority to handle only material available without charge; paid work is withheld absent separate approval. France remains a customs proxy. Euromonitor remains paused; 0/6, NOT SCORED and no purchase or fee is authorised.</a:t>
             </a:r>
           </a:p>
         </p:txBody>
@@ -9036,7 +9036,7 @@
                 <a:ea typeface="Aptos"/>
                 <a:cs typeface="Aptos"/>
               </a:rPr>
-              <a:t>Independent public evidence summary · 2026.07.29-35 · 2026-07-29 · Sources: Evidence Register; WIPO IP valuation</a:t>
+              <a:t>Independent public evidence summary · 2026.07.30-36 · 2026-07-30 · Sources: Evidence Register; WIPO IP valuation</a:t>
             </a:r>
           </a:p>
         </p:txBody>
@@ -9859,7 +9859,7 @@
                 <a:ea typeface="Aptos"/>
                 <a:cs typeface="Aptos"/>
               </a:rPr>
-              <a:t>Version 2026.07.29-35 · 2026-07-29 · 6 / 6</a:t>
+              <a:t>Version 2026.07.30-36 · 2026-07-30 · 6 / 6</a:t>
             </a:r>
           </a:p>
         </p:txBody>

--- a/site/downloads/pixan-bank-deck-short-en.pptx
+++ b/site/downloads/pixan-bank-deck-short-en.pptx
@@ -2,18 +2,18 @@
 <file path=ppt/presentation.xml><?xml version="1.0" encoding="utf-8"?>
 <p:presentation xmlns:p="http://schemas.openxmlformats.org/presentationml/2006/main">
   <p:sldMasterIdLst>
-    <p:sldMasterId xmlns:r="http://schemas.openxmlformats.org/officeDocument/2006/relationships" id="2147483648" r:id="R03026327303a43f4"/>
+    <p:sldMasterId xmlns:r="http://schemas.openxmlformats.org/officeDocument/2006/relationships" id="2147483648" r:id="R0cfbc3c2391e4926"/>
   </p:sldMasterIdLst>
   <p:notesMasterIdLst>
-    <p:notesMasterId xmlns:r="http://schemas.openxmlformats.org/officeDocument/2006/relationships" r:id="Rb910945d913b49ad"/>
+    <p:notesMasterId xmlns:r="http://schemas.openxmlformats.org/officeDocument/2006/relationships" r:id="Re5b15b87dd8a448c"/>
   </p:notesMasterIdLst>
   <p:sldIdLst>
-    <p:sldId xmlns:r="http://schemas.openxmlformats.org/officeDocument/2006/relationships" id="256" r:id="R02132dfc0fe348cd"/>
-    <p:sldId xmlns:r="http://schemas.openxmlformats.org/officeDocument/2006/relationships" id="257" r:id="R1ec53f9d183f448b"/>
-    <p:sldId xmlns:r="http://schemas.openxmlformats.org/officeDocument/2006/relationships" id="258" r:id="R91f9361286654e93"/>
-    <p:sldId xmlns:r="http://schemas.openxmlformats.org/officeDocument/2006/relationships" id="259" r:id="R39b45bc158a0478c"/>
-    <p:sldId xmlns:r="http://schemas.openxmlformats.org/officeDocument/2006/relationships" id="260" r:id="R587a4432994645d0"/>
-    <p:sldId xmlns:r="http://schemas.openxmlformats.org/officeDocument/2006/relationships" id="261" r:id="R502bf0eab8ac43e8"/>
+    <p:sldId xmlns:r="http://schemas.openxmlformats.org/officeDocument/2006/relationships" id="256" r:id="R0a8036c98e9e4731"/>
+    <p:sldId xmlns:r="http://schemas.openxmlformats.org/officeDocument/2006/relationships" id="257" r:id="R62ec4e1d44a4402f"/>
+    <p:sldId xmlns:r="http://schemas.openxmlformats.org/officeDocument/2006/relationships" id="258" r:id="Rb5d4a5e609f946d6"/>
+    <p:sldId xmlns:r="http://schemas.openxmlformats.org/officeDocument/2006/relationships" id="259" r:id="Ree25e0f5599d4653"/>
+    <p:sldId xmlns:r="http://schemas.openxmlformats.org/officeDocument/2006/relationships" id="260" r:id="R954baa4eb94b42c7"/>
+    <p:sldId xmlns:r="http://schemas.openxmlformats.org/officeDocument/2006/relationships" id="261" r:id="R5eae6d8a6b7b4895"/>
   </p:sldIdLst>
   <p:sldSz cx="12191999" cy="6858000"/>
   <p:notesSz cx="6858000" cy="9144000"/>
@@ -565,7 +565,32 @@
           </a:p>
           <a:p xmlns:a="http://schemas.openxmlformats.org/drawingml/2006/main">
             <a:r>
+              <a:t>- https://www.podatki.gov.pl/akcyza/komunikaty-w-zakresie-podatku-akcyzowego</a:t>
+            </a:r>
+          </a:p>
+          <a:p xmlns:a="http://schemas.openxmlformats.org/drawingml/2006/main">
+            <a:r>
+              <a:t>- https://api.sejm.gov.pl/eli/acts/DU/2025/698/text.pdf</a:t>
+            </a:r>
+          </a:p>
+          <a:p xmlns:a="http://schemas.openxmlformats.org/drawingml/2006/main">
+            <a:r>
+              <a:t>- https://api.sejm.gov.pl/sejm/term10/prints/1364/1364.pdf</a:t>
+            </a:r>
+          </a:p>
+          <a:p xmlns:a="http://schemas.openxmlformats.org/drawingml/2006/main">
+            <a:r>
               <a:t>- https://www.customs.govt.nz/about-us/news/important-notices-archive/important-notices-archive-2023/reminder-classification-of-vaping-devices-and-similar</a:t>
+            </a:r>
+          </a:p>
+          <a:p xmlns:a="http://schemas.openxmlformats.org/drawingml/2006/main">
+            <a:r>
+              <a:t>- https://www3.stats.govt.nz/HS10_by_Country/2024_Imports_HS10.zip</a:t>
+            </a:r>
+          </a:p>
+          <a:p xmlns:a="http://schemas.openxmlformats.org/drawingml/2006/main">
+            <a:r>
+              <a:t>- https://www3.stats.govt.nz/HS10_by_Country/2024_Exports_HS10.zip</a:t>
             </a:r>
           </a:p>
           <a:p xmlns:a="http://schemas.openxmlformats.org/drawingml/2006/main">
@@ -855,7 +880,32 @@
           </a:p>
           <a:p xmlns:a="http://schemas.openxmlformats.org/drawingml/2006/main">
             <a:r>
+              <a:t>- https://www.podatki.gov.pl/akcyza/komunikaty-w-zakresie-podatku-akcyzowego</a:t>
+            </a:r>
+          </a:p>
+          <a:p xmlns:a="http://schemas.openxmlformats.org/drawingml/2006/main">
+            <a:r>
+              <a:t>- https://api.sejm.gov.pl/eli/acts/DU/2025/698/text.pdf</a:t>
+            </a:r>
+          </a:p>
+          <a:p xmlns:a="http://schemas.openxmlformats.org/drawingml/2006/main">
+            <a:r>
+              <a:t>- https://api.sejm.gov.pl/sejm/term10/prints/1364/1364.pdf</a:t>
+            </a:r>
+          </a:p>
+          <a:p xmlns:a="http://schemas.openxmlformats.org/drawingml/2006/main">
+            <a:r>
               <a:t>- https://www.customs.govt.nz/about-us/news/important-notices-archive/important-notices-archive-2023/reminder-classification-of-vaping-devices-and-similar</a:t>
+            </a:r>
+          </a:p>
+          <a:p xmlns:a="http://schemas.openxmlformats.org/drawingml/2006/main">
+            <a:r>
+              <a:t>- https://www3.stats.govt.nz/HS10_by_Country/2024_Imports_HS10.zip</a:t>
+            </a:r>
+          </a:p>
+          <a:p xmlns:a="http://schemas.openxmlformats.org/drawingml/2006/main">
+            <a:r>
+              <a:t>- https://www3.stats.govt.nz/HS10_by_Country/2024_Exports_HS10.zip</a:t>
             </a:r>
           </a:p>
           <a:p xmlns:a="http://schemas.openxmlformats.org/drawingml/2006/main">
@@ -1145,7 +1195,32 @@
           </a:p>
           <a:p xmlns:a="http://schemas.openxmlformats.org/drawingml/2006/main">
             <a:r>
+              <a:t>- https://www.podatki.gov.pl/akcyza/komunikaty-w-zakresie-podatku-akcyzowego</a:t>
+            </a:r>
+          </a:p>
+          <a:p xmlns:a="http://schemas.openxmlformats.org/drawingml/2006/main">
+            <a:r>
+              <a:t>- https://api.sejm.gov.pl/eli/acts/DU/2025/698/text.pdf</a:t>
+            </a:r>
+          </a:p>
+          <a:p xmlns:a="http://schemas.openxmlformats.org/drawingml/2006/main">
+            <a:r>
+              <a:t>- https://api.sejm.gov.pl/sejm/term10/prints/1364/1364.pdf</a:t>
+            </a:r>
+          </a:p>
+          <a:p xmlns:a="http://schemas.openxmlformats.org/drawingml/2006/main">
+            <a:r>
               <a:t>- https://www.customs.govt.nz/about-us/news/important-notices-archive/important-notices-archive-2023/reminder-classification-of-vaping-devices-and-similar</a:t>
+            </a:r>
+          </a:p>
+          <a:p xmlns:a="http://schemas.openxmlformats.org/drawingml/2006/main">
+            <a:r>
+              <a:t>- https://www3.stats.govt.nz/HS10_by_Country/2024_Imports_HS10.zip</a:t>
+            </a:r>
+          </a:p>
+          <a:p xmlns:a="http://schemas.openxmlformats.org/drawingml/2006/main">
+            <a:r>
+              <a:t>- https://www3.stats.govt.nz/HS10_by_Country/2024_Exports_HS10.zip</a:t>
             </a:r>
           </a:p>
           <a:p xmlns:a="http://schemas.openxmlformats.org/drawingml/2006/main">
@@ -1435,7 +1510,32 @@
           </a:p>
           <a:p xmlns:a="http://schemas.openxmlformats.org/drawingml/2006/main">
             <a:r>
+              <a:t>- https://www.podatki.gov.pl/akcyza/komunikaty-w-zakresie-podatku-akcyzowego</a:t>
+            </a:r>
+          </a:p>
+          <a:p xmlns:a="http://schemas.openxmlformats.org/drawingml/2006/main">
+            <a:r>
+              <a:t>- https://api.sejm.gov.pl/eli/acts/DU/2025/698/text.pdf</a:t>
+            </a:r>
+          </a:p>
+          <a:p xmlns:a="http://schemas.openxmlformats.org/drawingml/2006/main">
+            <a:r>
+              <a:t>- https://api.sejm.gov.pl/sejm/term10/prints/1364/1364.pdf</a:t>
+            </a:r>
+          </a:p>
+          <a:p xmlns:a="http://schemas.openxmlformats.org/drawingml/2006/main">
+            <a:r>
               <a:t>- https://www.customs.govt.nz/about-us/news/important-notices-archive/important-notices-archive-2023/reminder-classification-of-vaping-devices-and-similar</a:t>
+            </a:r>
+          </a:p>
+          <a:p xmlns:a="http://schemas.openxmlformats.org/drawingml/2006/main">
+            <a:r>
+              <a:t>- https://www3.stats.govt.nz/HS10_by_Country/2024_Imports_HS10.zip</a:t>
+            </a:r>
+          </a:p>
+          <a:p xmlns:a="http://schemas.openxmlformats.org/drawingml/2006/main">
+            <a:r>
+              <a:t>- https://www3.stats.govt.nz/HS10_by_Country/2024_Exports_HS10.zip</a:t>
             </a:r>
           </a:p>
           <a:p xmlns:a="http://schemas.openxmlformats.org/drawingml/2006/main">
@@ -1725,7 +1825,32 @@
           </a:p>
           <a:p xmlns:a="http://schemas.openxmlformats.org/drawingml/2006/main">
             <a:r>
+              <a:t>- https://www.podatki.gov.pl/akcyza/komunikaty-w-zakresie-podatku-akcyzowego</a:t>
+            </a:r>
+          </a:p>
+          <a:p xmlns:a="http://schemas.openxmlformats.org/drawingml/2006/main">
+            <a:r>
+              <a:t>- https://api.sejm.gov.pl/eli/acts/DU/2025/698/text.pdf</a:t>
+            </a:r>
+          </a:p>
+          <a:p xmlns:a="http://schemas.openxmlformats.org/drawingml/2006/main">
+            <a:r>
+              <a:t>- https://api.sejm.gov.pl/sejm/term10/prints/1364/1364.pdf</a:t>
+            </a:r>
+          </a:p>
+          <a:p xmlns:a="http://schemas.openxmlformats.org/drawingml/2006/main">
+            <a:r>
               <a:t>- https://www.customs.govt.nz/about-us/news/important-notices-archive/important-notices-archive-2023/reminder-classification-of-vaping-devices-and-similar</a:t>
+            </a:r>
+          </a:p>
+          <a:p xmlns:a="http://schemas.openxmlformats.org/drawingml/2006/main">
+            <a:r>
+              <a:t>- https://www3.stats.govt.nz/HS10_by_Country/2024_Imports_HS10.zip</a:t>
+            </a:r>
+          </a:p>
+          <a:p xmlns:a="http://schemas.openxmlformats.org/drawingml/2006/main">
+            <a:r>
+              <a:t>- https://www3.stats.govt.nz/HS10_by_Country/2024_Exports_HS10.zip</a:t>
             </a:r>
           </a:p>
           <a:p xmlns:a="http://schemas.openxmlformats.org/drawingml/2006/main">
@@ -2015,7 +2140,32 @@
           </a:p>
           <a:p xmlns:a="http://schemas.openxmlformats.org/drawingml/2006/main">
             <a:r>
+              <a:t>- https://www.podatki.gov.pl/akcyza/komunikaty-w-zakresie-podatku-akcyzowego</a:t>
+            </a:r>
+          </a:p>
+          <a:p xmlns:a="http://schemas.openxmlformats.org/drawingml/2006/main">
+            <a:r>
+              <a:t>- https://api.sejm.gov.pl/eli/acts/DU/2025/698/text.pdf</a:t>
+            </a:r>
+          </a:p>
+          <a:p xmlns:a="http://schemas.openxmlformats.org/drawingml/2006/main">
+            <a:r>
+              <a:t>- https://api.sejm.gov.pl/sejm/term10/prints/1364/1364.pdf</a:t>
+            </a:r>
+          </a:p>
+          <a:p xmlns:a="http://schemas.openxmlformats.org/drawingml/2006/main">
+            <a:r>
               <a:t>- https://www.customs.govt.nz/about-us/news/important-notices-archive/important-notices-archive-2023/reminder-classification-of-vaping-devices-and-similar</a:t>
+            </a:r>
+          </a:p>
+          <a:p xmlns:a="http://schemas.openxmlformats.org/drawingml/2006/main">
+            <a:r>
+              <a:t>- https://www3.stats.govt.nz/HS10_by_Country/2024_Imports_HS10.zip</a:t>
+            </a:r>
+          </a:p>
+          <a:p xmlns:a="http://schemas.openxmlformats.org/drawingml/2006/main">
+            <a:r>
+              <a:t>- https://www3.stats.govt.nz/HS10_by_Country/2024_Exports_HS10.zip</a:t>
             </a:r>
           </a:p>
           <a:p xmlns:a="http://schemas.openxmlformats.org/drawingml/2006/main">
@@ -5096,17 +5246,17 @@
   </p:cSld>
   <p:clrMap bg1="lt1" tx1="dk1" bg2="lt2" tx2="dk2" accent1="accent1" accent2="accent2" accent3="accent3" accent4="accent4" accent5="accent5" accent6="accent6" hlink="hlink" folHlink="folHlink"/>
   <p:sldLayoutIdLst>
-    <p:sldLayoutId xmlns:r="http://schemas.openxmlformats.org/officeDocument/2006/relationships" id="2147483649" r:id="Rc9804dc6cb8c43f7"/>
-    <p:sldLayoutId xmlns:r="http://schemas.openxmlformats.org/officeDocument/2006/relationships" id="2147483650" r:id="Rbf29913736d8404f"/>
-    <p:sldLayoutId xmlns:r="http://schemas.openxmlformats.org/officeDocument/2006/relationships" id="2147483651" r:id="R65165047a3814e58"/>
-    <p:sldLayoutId xmlns:r="http://schemas.openxmlformats.org/officeDocument/2006/relationships" id="2147483652" r:id="Red844ad0edf54a2d"/>
-    <p:sldLayoutId xmlns:r="http://schemas.openxmlformats.org/officeDocument/2006/relationships" id="2147483653" r:id="R41f39825a9ce4084"/>
-    <p:sldLayoutId xmlns:r="http://schemas.openxmlformats.org/officeDocument/2006/relationships" id="2147483654" r:id="R7c4b7f465b5d4b79"/>
-    <p:sldLayoutId xmlns:r="http://schemas.openxmlformats.org/officeDocument/2006/relationships" id="2147483655" r:id="R1b1f0e28ac7d4b58"/>
-    <p:sldLayoutId xmlns:r="http://schemas.openxmlformats.org/officeDocument/2006/relationships" id="2147483656" r:id="Rd0b1e021bd5c4040"/>
-    <p:sldLayoutId xmlns:r="http://schemas.openxmlformats.org/officeDocument/2006/relationships" id="2147483657" r:id="R29c3c9460dba4eef"/>
-    <p:sldLayoutId xmlns:r="http://schemas.openxmlformats.org/officeDocument/2006/relationships" id="2147483658" r:id="R80f19bcae98c42ae"/>
-    <p:sldLayoutId xmlns:r="http://schemas.openxmlformats.org/officeDocument/2006/relationships" id="2147483659" r:id="R527ad26d9cc74081"/>
+    <p:sldLayoutId xmlns:r="http://schemas.openxmlformats.org/officeDocument/2006/relationships" id="2147483649" r:id="Ra012fdc2f3174a25"/>
+    <p:sldLayoutId xmlns:r="http://schemas.openxmlformats.org/officeDocument/2006/relationships" id="2147483650" r:id="R3c9269511a664708"/>
+    <p:sldLayoutId xmlns:r="http://schemas.openxmlformats.org/officeDocument/2006/relationships" id="2147483651" r:id="R46844abc670149d1"/>
+    <p:sldLayoutId xmlns:r="http://schemas.openxmlformats.org/officeDocument/2006/relationships" id="2147483652" r:id="R3c404ff81c594959"/>
+    <p:sldLayoutId xmlns:r="http://schemas.openxmlformats.org/officeDocument/2006/relationships" id="2147483653" r:id="Rc89937b840574c96"/>
+    <p:sldLayoutId xmlns:r="http://schemas.openxmlformats.org/officeDocument/2006/relationships" id="2147483654" r:id="R331ec71050f5406b"/>
+    <p:sldLayoutId xmlns:r="http://schemas.openxmlformats.org/officeDocument/2006/relationships" id="2147483655" r:id="Rf1eaa21d441f4b28"/>
+    <p:sldLayoutId xmlns:r="http://schemas.openxmlformats.org/officeDocument/2006/relationships" id="2147483656" r:id="Rd0e7370b38904ebd"/>
+    <p:sldLayoutId xmlns:r="http://schemas.openxmlformats.org/officeDocument/2006/relationships" id="2147483657" r:id="R2f69e620b2f545d3"/>
+    <p:sldLayoutId xmlns:r="http://schemas.openxmlformats.org/officeDocument/2006/relationships" id="2147483658" r:id="R6bb880b4a1ee4a97"/>
+    <p:sldLayoutId xmlns:r="http://schemas.openxmlformats.org/officeDocument/2006/relationships" id="2147483659" r:id="R89276ec61073455a"/>
   </p:sldLayoutIdLst>
   <p:txStyles>
     <p:titleStyle>
@@ -6006,7 +6156,7 @@
                 <a:ea typeface="Aptos"/>
                 <a:cs typeface="Aptos"/>
               </a:rPr>
-              <a:t>2026.07.30-36</a:t>
+              <a:t>2026.07.31-37</a:t>
             </a:r>
           </a:p>
         </p:txBody>
@@ -6053,7 +6203,7 @@
                 <a:ea typeface="Aptos"/>
                 <a:cs typeface="Aptos"/>
               </a:rPr>
-              <a:t>Updated 2026-07-30</a:t>
+              <a:t>Updated 2026-07-31</a:t>
             </a:r>
             <a:br/>
             <a:r>
@@ -6479,7 +6629,7 @@
                 <a:ea typeface="Aptos"/>
                 <a:cs typeface="Aptos"/>
               </a:rPr>
-              <a:t>Independent public evidence summary · 2026.07.30-36 · 2026-07-30 · Sources: EPO; Germany — official judgments; WIPO</a:t>
+              <a:t>Independent public evidence summary · 2026.07.31-37 · 2026-07-31 · Sources: EPO; Germany — official judgments; WIPO</a:t>
             </a:r>
           </a:p>
         </p:txBody>
@@ -7094,7 +7244,7 @@
                 <a:ea typeface="Aptos"/>
                 <a:cs typeface="Aptos"/>
               </a:rPr>
-              <a:t>Independent public evidence summary · 2026.07.30-36 · 2026-07-30 · Sources: EPO Register; EP3032975B2; 8 Ni 18/24 (EP); 7 O 3341/24</a:t>
+              <a:t>Independent public evidence summary · 2026.07.31-37 · 2026-07-31 · Sources: EPO Register; EP3032975B2; 8 Ni 18/24 (EP); 7 O 3341/24</a:t>
             </a:r>
           </a:p>
         </p:txBody>
@@ -8065,7 +8215,7 @@
                 <a:ea typeface="Aptos"/>
                 <a:cs typeface="Aptos"/>
               </a:rPr>
-              <a:t>Independent public evidence summary · 2026.07.30-36 · 2026-07-30 · Sources: World Bank; Statistics Canada; Health Canada; NZ Ministry of Health; Sejm; FHM; FTC; ADM</a:t>
+              <a:t>Independent public evidence summary · 2026.07.31-37 · 2026-07-31 · Sources: World Bank; Statistics Canada; Health Canada; NZ Ministry of Health; Sejm; FHM; FTC; ADM</a:t>
             </a:r>
           </a:p>
         </p:txBody>
@@ -8587,7 +8737,7 @@
         <p:spPr>
           <a:xfrm xmlns:a="http://schemas.openxmlformats.org/drawingml/2006/main">
             <a:off x="566928" y="3529584"/>
-            <a:ext cx="10927080" cy="2740152"/>
+            <a:ext cx="10927080" cy="838200"/>
           </a:xfrm>
           <a:prstGeom xmlns:a="http://schemas.openxmlformats.org/drawingml/2006/main" prst="rect">
             <a:avLst/>
@@ -8604,7 +8754,7 @@
               <a:buNone/>
             </a:pPr>
             <a:r>
-              <a:rPr sz="1050" b="1">
+              <a:rPr sz="1200" b="1">
                 <a:solidFill>
                   <a:srgbClr val="071A2B"/>
                 </a:solidFill>
@@ -8612,7 +8762,7 @@
                 <a:ea typeface="Aptos"/>
                 <a:cs typeface="Aptos"/>
               </a:rPr>
-              <a:t>Canada is 7/10: an official clarification excludes GST/HST/PST/QST, includes embedded additional duties and changes no values; D5/D7/D10 remain open. Germany's narrowed reply asks the authority to handle only material available without charge; paid work is withheld absent separate approval. France remains a customs proxy. Euromonitor remains paused; 0/6, NOT SCORED and no purchase or fee is authorised.</a:t>
+              <a:t>Canada 7/10: D5/D7 failed, D8 passed (GST/HST/PST/QST excluded; additional duties included), D10 open. NZ 7 August follow-up prepared, not sent. Poland's tax bridge is broad-group only. Euromonitor paused 0/6, NOT SCORED; no purchase or fee.</a:t>
             </a:r>
           </a:p>
         </p:txBody>
@@ -8763,7 +8913,7 @@
                 <a:ea typeface="Aptos"/>
                 <a:cs typeface="Aptos"/>
               </a:rPr>
-              <a:t>Method control 28 / 0 / 15 / 152; 5 new country plans, not sales. Belgium ≈83,333 litres (9 months; not retail); Italy EUR 84.31m PLI tax (not retail). Canada retail CAD 1.219160bn (≈EUR 822.6m; ECB 2024) and shipments CAD 1.160754bn (≈EUR 783.2m; ECB 2024); FTC USD 2.763bn (≈EUR 2.336bn; ECB 2021). Donor 0/3.</a:t>
+              <a:t>Method control 28 / 0 / 15 / 152. Canada retail CAD 1.219160bn (≈EUR 822.6m; ECB 2024) and shipments CAD 1.160754bn (≈EUR 783.2m; ECB 2024). New Zealand NZD 274.180m (≈EUR 153.3m; ECB 2024), 7/10. Poland has no donor score because retail value is absent. Donor 0/3.</a:t>
             </a:r>
           </a:p>
         </p:txBody>
@@ -9036,7 +9186,7 @@
                 <a:ea typeface="Aptos"/>
                 <a:cs typeface="Aptos"/>
               </a:rPr>
-              <a:t>Independent public evidence summary · 2026.07.30-36 · 2026-07-30 · Sources: Evidence Register; WIPO IP valuation</a:t>
+              <a:t>Independent public evidence summary · 2026.07.31-37 · 2026-07-31 · Sources: Evidence Register; WIPO IP valuation</a:t>
             </a:r>
           </a:p>
         </p:txBody>
@@ -9859,7 +10009,7 @@
                 <a:ea typeface="Aptos"/>
                 <a:cs typeface="Aptos"/>
               </a:rPr>
-              <a:t>Version 2026.07.30-36 · 2026-07-30 · 6 / 6</a:t>
+              <a:t>Version 2026.07.31-37 · 2026-07-31 · 6 / 6</a:t>
             </a:r>
           </a:p>
         </p:txBody>

--- a/site/downloads/pixan-bank-deck-short-en.pptx
+++ b/site/downloads/pixan-bank-deck-short-en.pptx
@@ -2,18 +2,18 @@
 <file path=ppt/presentation.xml><?xml version="1.0" encoding="utf-8"?>
 <p:presentation xmlns:p="http://schemas.openxmlformats.org/presentationml/2006/main">
   <p:sldMasterIdLst>
-    <p:sldMasterId xmlns:r="http://schemas.openxmlformats.org/officeDocument/2006/relationships" id="2147483648" r:id="R0cfbc3c2391e4926"/>
+    <p:sldMasterId xmlns:r="http://schemas.openxmlformats.org/officeDocument/2006/relationships" id="2147483648" r:id="R5a4f18c8d7f34927"/>
   </p:sldMasterIdLst>
   <p:notesMasterIdLst>
-    <p:notesMasterId xmlns:r="http://schemas.openxmlformats.org/officeDocument/2006/relationships" r:id="Re5b15b87dd8a448c"/>
+    <p:notesMasterId xmlns:r="http://schemas.openxmlformats.org/officeDocument/2006/relationships" r:id="R98e504f2af02439d"/>
   </p:notesMasterIdLst>
   <p:sldIdLst>
-    <p:sldId xmlns:r="http://schemas.openxmlformats.org/officeDocument/2006/relationships" id="256" r:id="R0a8036c98e9e4731"/>
-    <p:sldId xmlns:r="http://schemas.openxmlformats.org/officeDocument/2006/relationships" id="257" r:id="R62ec4e1d44a4402f"/>
-    <p:sldId xmlns:r="http://schemas.openxmlformats.org/officeDocument/2006/relationships" id="258" r:id="Rb5d4a5e609f946d6"/>
-    <p:sldId xmlns:r="http://schemas.openxmlformats.org/officeDocument/2006/relationships" id="259" r:id="Ree25e0f5599d4653"/>
-    <p:sldId xmlns:r="http://schemas.openxmlformats.org/officeDocument/2006/relationships" id="260" r:id="R954baa4eb94b42c7"/>
-    <p:sldId xmlns:r="http://schemas.openxmlformats.org/officeDocument/2006/relationships" id="261" r:id="R5eae6d8a6b7b4895"/>
+    <p:sldId xmlns:r="http://schemas.openxmlformats.org/officeDocument/2006/relationships" id="256" r:id="Rb535ee7d1da44afc"/>
+    <p:sldId xmlns:r="http://schemas.openxmlformats.org/officeDocument/2006/relationships" id="257" r:id="R01112b3241454ee3"/>
+    <p:sldId xmlns:r="http://schemas.openxmlformats.org/officeDocument/2006/relationships" id="258" r:id="Re10bede2ff1b4791"/>
+    <p:sldId xmlns:r="http://schemas.openxmlformats.org/officeDocument/2006/relationships" id="259" r:id="R4a0dc46914c7454f"/>
+    <p:sldId xmlns:r="http://schemas.openxmlformats.org/officeDocument/2006/relationships" id="260" r:id="Rcdc415f3ec9d473b"/>
+    <p:sldId xmlns:r="http://schemas.openxmlformats.org/officeDocument/2006/relationships" id="261" r:id="Ra12866d19c2b42ac"/>
   </p:sldIdLst>
   <p:sldSz cx="12191999" cy="6858000"/>
   <p:notesSz cx="6858000" cy="9144000"/>
@@ -5246,17 +5246,17 @@
   </p:cSld>
   <p:clrMap bg1="lt1" tx1="dk1" bg2="lt2" tx2="dk2" accent1="accent1" accent2="accent2" accent3="accent3" accent4="accent4" accent5="accent5" accent6="accent6" hlink="hlink" folHlink="folHlink"/>
   <p:sldLayoutIdLst>
-    <p:sldLayoutId xmlns:r="http://schemas.openxmlformats.org/officeDocument/2006/relationships" id="2147483649" r:id="Ra012fdc2f3174a25"/>
-    <p:sldLayoutId xmlns:r="http://schemas.openxmlformats.org/officeDocument/2006/relationships" id="2147483650" r:id="R3c9269511a664708"/>
-    <p:sldLayoutId xmlns:r="http://schemas.openxmlformats.org/officeDocument/2006/relationships" id="2147483651" r:id="R46844abc670149d1"/>
-    <p:sldLayoutId xmlns:r="http://schemas.openxmlformats.org/officeDocument/2006/relationships" id="2147483652" r:id="R3c404ff81c594959"/>
-    <p:sldLayoutId xmlns:r="http://schemas.openxmlformats.org/officeDocument/2006/relationships" id="2147483653" r:id="Rc89937b840574c96"/>
-    <p:sldLayoutId xmlns:r="http://schemas.openxmlformats.org/officeDocument/2006/relationships" id="2147483654" r:id="R331ec71050f5406b"/>
-    <p:sldLayoutId xmlns:r="http://schemas.openxmlformats.org/officeDocument/2006/relationships" id="2147483655" r:id="Rf1eaa21d441f4b28"/>
-    <p:sldLayoutId xmlns:r="http://schemas.openxmlformats.org/officeDocument/2006/relationships" id="2147483656" r:id="Rd0e7370b38904ebd"/>
-    <p:sldLayoutId xmlns:r="http://schemas.openxmlformats.org/officeDocument/2006/relationships" id="2147483657" r:id="R2f69e620b2f545d3"/>
-    <p:sldLayoutId xmlns:r="http://schemas.openxmlformats.org/officeDocument/2006/relationships" id="2147483658" r:id="R6bb880b4a1ee4a97"/>
-    <p:sldLayoutId xmlns:r="http://schemas.openxmlformats.org/officeDocument/2006/relationships" id="2147483659" r:id="R89276ec61073455a"/>
+    <p:sldLayoutId xmlns:r="http://schemas.openxmlformats.org/officeDocument/2006/relationships" id="2147483649" r:id="Rd952eddd70d84d25"/>
+    <p:sldLayoutId xmlns:r="http://schemas.openxmlformats.org/officeDocument/2006/relationships" id="2147483650" r:id="Rd219463eaa3140e1"/>
+    <p:sldLayoutId xmlns:r="http://schemas.openxmlformats.org/officeDocument/2006/relationships" id="2147483651" r:id="R55714367eaf54876"/>
+    <p:sldLayoutId xmlns:r="http://schemas.openxmlformats.org/officeDocument/2006/relationships" id="2147483652" r:id="Raf41b4fc39b54a2a"/>
+    <p:sldLayoutId xmlns:r="http://schemas.openxmlformats.org/officeDocument/2006/relationships" id="2147483653" r:id="R40b2ac0ea75a4d36"/>
+    <p:sldLayoutId xmlns:r="http://schemas.openxmlformats.org/officeDocument/2006/relationships" id="2147483654" r:id="Rf5d9bb6016904982"/>
+    <p:sldLayoutId xmlns:r="http://schemas.openxmlformats.org/officeDocument/2006/relationships" id="2147483655" r:id="R841bf092576a45ef"/>
+    <p:sldLayoutId xmlns:r="http://schemas.openxmlformats.org/officeDocument/2006/relationships" id="2147483656" r:id="Rf3a3182435b640e1"/>
+    <p:sldLayoutId xmlns:r="http://schemas.openxmlformats.org/officeDocument/2006/relationships" id="2147483657" r:id="R6b10966ffcf644a2"/>
+    <p:sldLayoutId xmlns:r="http://schemas.openxmlformats.org/officeDocument/2006/relationships" id="2147483658" r:id="Re8040970345a4768"/>
+    <p:sldLayoutId xmlns:r="http://schemas.openxmlformats.org/officeDocument/2006/relationships" id="2147483659" r:id="R3605fbd6ac5a42b8"/>
   </p:sldLayoutIdLst>
   <p:txStyles>
     <p:titleStyle>
@@ -6156,7 +6156,7 @@
                 <a:ea typeface="Aptos"/>
                 <a:cs typeface="Aptos"/>
               </a:rPr>
-              <a:t>2026.07.31-37</a:t>
+              <a:t>2026.08.02-41</a:t>
             </a:r>
           </a:p>
         </p:txBody>
@@ -6203,7 +6203,7 @@
                 <a:ea typeface="Aptos"/>
                 <a:cs typeface="Aptos"/>
               </a:rPr>
-              <a:t>Updated 2026-07-31</a:t>
+              <a:t>Updated 2026-08-02</a:t>
             </a:r>
             <a:br/>
             <a:r>
@@ -6629,7 +6629,7 @@
                 <a:ea typeface="Aptos"/>
                 <a:cs typeface="Aptos"/>
               </a:rPr>
-              <a:t>Independent public evidence summary · 2026.07.31-37 · 2026-07-31 · Sources: EPO; Germany — official judgments; WIPO</a:t>
+              <a:t>Independent public evidence summary · 2026.08.02-41 · 2026-08-02 · Sources: EPO; Germany — official judgments; WIPO</a:t>
             </a:r>
           </a:p>
         </p:txBody>
@@ -7244,7 +7244,7 @@
                 <a:ea typeface="Aptos"/>
                 <a:cs typeface="Aptos"/>
               </a:rPr>
-              <a:t>Independent public evidence summary · 2026.07.31-37 · 2026-07-31 · Sources: EPO Register; EP3032975B2; 8 Ni 18/24 (EP); 7 O 3341/24</a:t>
+              <a:t>Independent public evidence summary · 2026.08.02-41 · 2026-08-02 · Sources: EPO Register; EP3032975B2; 8 Ni 18/24 (EP); 7 O 3341/24</a:t>
             </a:r>
           </a:p>
         </p:txBody>
@@ -8215,7 +8215,7 @@
                 <a:ea typeface="Aptos"/>
                 <a:cs typeface="Aptos"/>
               </a:rPr>
-              <a:t>Independent public evidence summary · 2026.07.31-37 · 2026-07-31 · Sources: World Bank; Statistics Canada; Health Canada; NZ Ministry of Health; Sejm; FHM; FTC; ADM</a:t>
+              <a:t>Independent public evidence summary · 2026.08.02-41 · 2026-08-02 · Sources: World Bank; Statistics Canada; Health Canada; NZ Ministry of Health; Sejm; FHM; FTC; ADM</a:t>
             </a:r>
           </a:p>
         </p:txBody>
@@ -8413,7 +8413,7 @@
                 <a:ea typeface="Aptos"/>
                 <a:cs typeface="Aptos"/>
               </a:rPr>
-              <a:t>578 WB records; 39 market measures + 36 Swedish FHM register counts; not sales</a:t>
+              <a:t>578 WB records; 98 market measures + 36 Swedish FHM register counts; unlike measures are not summed</a:t>
             </a:r>
           </a:p>
         </p:txBody>
@@ -8762,7 +8762,7 @@
                 <a:ea typeface="Aptos"/>
                 <a:cs typeface="Aptos"/>
               </a:rPr>
-              <a:t>Canada 7/10: D5/D7 failed, D8 passed (GST/HST/PST/QST excluded; additional duties included), D10 open. NZ 7 August follow-up prepared, not sent. Poland's tax bridge is broad-group only. Euromonitor paused 0/6, NOT SCORED; no purchase or fee.</a:t>
+              <a:t>Canada 7/10: D5/D7 failed and D10 open. NZD 183.371m/197.070m NZ net border proxies are not retail values. Germany DE-BLIND-1.0.0: NOT SCORED. Euromonitor paused; no purchase or fee.</a:t>
             </a:r>
           </a:p>
         </p:txBody>
@@ -8913,7 +8913,7 @@
                 <a:ea typeface="Aptos"/>
                 <a:cs typeface="Aptos"/>
               </a:rPr>
-              <a:t>Method control 28 / 0 / 15 / 152. Canada retail CAD 1.219160bn (≈EUR 822.6m; ECB 2024) and shipments CAD 1.160754bn (≈EUR 783.2m; ECB 2024). New Zealand NZD 274.180m (≈EUR 153.3m; ECB 2024), 7/10. Poland has no donor score because retail value is absent. Donor 0/3.</a:t>
+              <a:t>Method control 28 / 0 / 15 / 152. Canada retail CAD 1.219160bn (≈EUR 822.6m; ECB 2024) and shipments CAD 1.160754bn (≈EUR 783.2m; ECB 2024). New Zealand NZD 274.180m (≈EUR 153.3m; ECB 2024), 7/10; customs ratios are not margins. Donor 0/3.</a:t>
             </a:r>
           </a:p>
         </p:txBody>
@@ -9186,7 +9186,7 @@
                 <a:ea typeface="Aptos"/>
                 <a:cs typeface="Aptos"/>
               </a:rPr>
-              <a:t>Independent public evidence summary · 2026.07.31-37 · 2026-07-31 · Sources: Evidence Register; WIPO IP valuation</a:t>
+              <a:t>Independent public evidence summary · 2026.08.02-41 · 2026-08-02 · Sources: Evidence Register; WIPO IP valuation</a:t>
             </a:r>
           </a:p>
         </p:txBody>
@@ -10009,7 +10009,7 @@
                 <a:ea typeface="Aptos"/>
                 <a:cs typeface="Aptos"/>
               </a:rPr>
-              <a:t>Version 2026.07.31-37 · 2026-07-31 · 6 / 6</a:t>
+              <a:t>Version 2026.08.02-41 · 2026-08-02 · 6 / 6</a:t>
             </a:r>
           </a:p>
         </p:txBody>

--- a/site/downloads/pixan-bank-deck-short-en.pptx
+++ b/site/downloads/pixan-bank-deck-short-en.pptx
@@ -2,18 +2,18 @@
 <file path=ppt/presentation.xml><?xml version="1.0" encoding="utf-8"?>
 <p:presentation xmlns:p="http://schemas.openxmlformats.org/presentationml/2006/main">
   <p:sldMasterIdLst>
-    <p:sldMasterId xmlns:r="http://schemas.openxmlformats.org/officeDocument/2006/relationships" id="2147483648" r:id="R5a4f18c8d7f34927"/>
+    <p:sldMasterId xmlns:r="http://schemas.openxmlformats.org/officeDocument/2006/relationships" id="2147483648" r:id="Rf26ea6ae029e4522"/>
   </p:sldMasterIdLst>
   <p:notesMasterIdLst>
-    <p:notesMasterId xmlns:r="http://schemas.openxmlformats.org/officeDocument/2006/relationships" r:id="R98e504f2af02439d"/>
+    <p:notesMasterId xmlns:r="http://schemas.openxmlformats.org/officeDocument/2006/relationships" r:id="R190ad435f3f64115"/>
   </p:notesMasterIdLst>
   <p:sldIdLst>
-    <p:sldId xmlns:r="http://schemas.openxmlformats.org/officeDocument/2006/relationships" id="256" r:id="Rb535ee7d1da44afc"/>
-    <p:sldId xmlns:r="http://schemas.openxmlformats.org/officeDocument/2006/relationships" id="257" r:id="R01112b3241454ee3"/>
-    <p:sldId xmlns:r="http://schemas.openxmlformats.org/officeDocument/2006/relationships" id="258" r:id="Re10bede2ff1b4791"/>
-    <p:sldId xmlns:r="http://schemas.openxmlformats.org/officeDocument/2006/relationships" id="259" r:id="R4a0dc46914c7454f"/>
-    <p:sldId xmlns:r="http://schemas.openxmlformats.org/officeDocument/2006/relationships" id="260" r:id="Rcdc415f3ec9d473b"/>
-    <p:sldId xmlns:r="http://schemas.openxmlformats.org/officeDocument/2006/relationships" id="261" r:id="Ra12866d19c2b42ac"/>
+    <p:sldId xmlns:r="http://schemas.openxmlformats.org/officeDocument/2006/relationships" id="256" r:id="R1270984f07e4431b"/>
+    <p:sldId xmlns:r="http://schemas.openxmlformats.org/officeDocument/2006/relationships" id="257" r:id="R76aaf663587544c2"/>
+    <p:sldId xmlns:r="http://schemas.openxmlformats.org/officeDocument/2006/relationships" id="258" r:id="R692b649dd1704754"/>
+    <p:sldId xmlns:r="http://schemas.openxmlformats.org/officeDocument/2006/relationships" id="259" r:id="R5b2e10f2eb3c486a"/>
+    <p:sldId xmlns:r="http://schemas.openxmlformats.org/officeDocument/2006/relationships" id="260" r:id="R8895bf26a4824343"/>
+    <p:sldId xmlns:r="http://schemas.openxmlformats.org/officeDocument/2006/relationships" id="261" r:id="R1afdc703239e4522"/>
   </p:sldIdLst>
   <p:sldSz cx="12191999" cy="6858000"/>
   <p:notesSz cx="6858000" cy="9144000"/>
@@ -5246,17 +5246,17 @@
   </p:cSld>
   <p:clrMap bg1="lt1" tx1="dk1" bg2="lt2" tx2="dk2" accent1="accent1" accent2="accent2" accent3="accent3" accent4="accent4" accent5="accent5" accent6="accent6" hlink="hlink" folHlink="folHlink"/>
   <p:sldLayoutIdLst>
-    <p:sldLayoutId xmlns:r="http://schemas.openxmlformats.org/officeDocument/2006/relationships" id="2147483649" r:id="Rd952eddd70d84d25"/>
-    <p:sldLayoutId xmlns:r="http://schemas.openxmlformats.org/officeDocument/2006/relationships" id="2147483650" r:id="Rd219463eaa3140e1"/>
-    <p:sldLayoutId xmlns:r="http://schemas.openxmlformats.org/officeDocument/2006/relationships" id="2147483651" r:id="R55714367eaf54876"/>
-    <p:sldLayoutId xmlns:r="http://schemas.openxmlformats.org/officeDocument/2006/relationships" id="2147483652" r:id="Raf41b4fc39b54a2a"/>
-    <p:sldLayoutId xmlns:r="http://schemas.openxmlformats.org/officeDocument/2006/relationships" id="2147483653" r:id="R40b2ac0ea75a4d36"/>
-    <p:sldLayoutId xmlns:r="http://schemas.openxmlformats.org/officeDocument/2006/relationships" id="2147483654" r:id="Rf5d9bb6016904982"/>
-    <p:sldLayoutId xmlns:r="http://schemas.openxmlformats.org/officeDocument/2006/relationships" id="2147483655" r:id="R841bf092576a45ef"/>
-    <p:sldLayoutId xmlns:r="http://schemas.openxmlformats.org/officeDocument/2006/relationships" id="2147483656" r:id="Rf3a3182435b640e1"/>
-    <p:sldLayoutId xmlns:r="http://schemas.openxmlformats.org/officeDocument/2006/relationships" id="2147483657" r:id="R6b10966ffcf644a2"/>
-    <p:sldLayoutId xmlns:r="http://schemas.openxmlformats.org/officeDocument/2006/relationships" id="2147483658" r:id="Re8040970345a4768"/>
-    <p:sldLayoutId xmlns:r="http://schemas.openxmlformats.org/officeDocument/2006/relationships" id="2147483659" r:id="R3605fbd6ac5a42b8"/>
+    <p:sldLayoutId xmlns:r="http://schemas.openxmlformats.org/officeDocument/2006/relationships" id="2147483649" r:id="R28d16a486c314271"/>
+    <p:sldLayoutId xmlns:r="http://schemas.openxmlformats.org/officeDocument/2006/relationships" id="2147483650" r:id="Ra12864fc757a408f"/>
+    <p:sldLayoutId xmlns:r="http://schemas.openxmlformats.org/officeDocument/2006/relationships" id="2147483651" r:id="Rc2800e9802d04e33"/>
+    <p:sldLayoutId xmlns:r="http://schemas.openxmlformats.org/officeDocument/2006/relationships" id="2147483652" r:id="R553a694a63e34a9a"/>
+    <p:sldLayoutId xmlns:r="http://schemas.openxmlformats.org/officeDocument/2006/relationships" id="2147483653" r:id="R1d4c1e36f3b543f9"/>
+    <p:sldLayoutId xmlns:r="http://schemas.openxmlformats.org/officeDocument/2006/relationships" id="2147483654" r:id="Ra57e18311c504aa1"/>
+    <p:sldLayoutId xmlns:r="http://schemas.openxmlformats.org/officeDocument/2006/relationships" id="2147483655" r:id="R18317121690a4b59"/>
+    <p:sldLayoutId xmlns:r="http://schemas.openxmlformats.org/officeDocument/2006/relationships" id="2147483656" r:id="Re09f337927b7478b"/>
+    <p:sldLayoutId xmlns:r="http://schemas.openxmlformats.org/officeDocument/2006/relationships" id="2147483657" r:id="R7a3e8aa656464163"/>
+    <p:sldLayoutId xmlns:r="http://schemas.openxmlformats.org/officeDocument/2006/relationships" id="2147483658" r:id="R5e62253a1de043a6"/>
+    <p:sldLayoutId xmlns:r="http://schemas.openxmlformats.org/officeDocument/2006/relationships" id="2147483659" r:id="R6ea9c11b78bb4e88"/>
   </p:sldLayoutIdLst>
   <p:txStyles>
     <p:titleStyle>
@@ -6156,7 +6156,7 @@
                 <a:ea typeface="Aptos"/>
                 <a:cs typeface="Aptos"/>
               </a:rPr>
-              <a:t>2026.08.02-41</a:t>
+              <a:t>2026.08.03-43</a:t>
             </a:r>
           </a:p>
         </p:txBody>
@@ -6203,7 +6203,7 @@
                 <a:ea typeface="Aptos"/>
                 <a:cs typeface="Aptos"/>
               </a:rPr>
-              <a:t>Updated 2026-08-02</a:t>
+              <a:t>Updated 2026-08-03</a:t>
             </a:r>
             <a:br/>
             <a:r>
@@ -6629,7 +6629,7 @@
                 <a:ea typeface="Aptos"/>
                 <a:cs typeface="Aptos"/>
               </a:rPr>
-              <a:t>Independent public evidence summary · 2026.08.02-41 · 2026-08-02 · Sources: EPO; Germany — official judgments; WIPO</a:t>
+              <a:t>Independent public evidence summary · 2026.08.03-43 · 2026-08-03 · Sources: EPO; Germany — official judgments; WIPO</a:t>
             </a:r>
           </a:p>
         </p:txBody>
@@ -7244,7 +7244,7 @@
                 <a:ea typeface="Aptos"/>
                 <a:cs typeface="Aptos"/>
               </a:rPr>
-              <a:t>Independent public evidence summary · 2026.08.02-41 · 2026-08-02 · Sources: EPO Register; EP3032975B2; 8 Ni 18/24 (EP); 7 O 3341/24</a:t>
+              <a:t>Independent public evidence summary · 2026.08.03-43 · 2026-08-03 · Sources: EPO Register; EP3032975B2; 8 Ni 18/24 (EP); 7 O 3341/24</a:t>
             </a:r>
           </a:p>
         </p:txBody>
@@ -8215,7 +8215,7 @@
                 <a:ea typeface="Aptos"/>
                 <a:cs typeface="Aptos"/>
               </a:rPr>
-              <a:t>Independent public evidence summary · 2026.08.02-41 · 2026-08-02 · Sources: World Bank; Statistics Canada; Health Canada; NZ Ministry of Health; Sejm; FHM; FTC; ADM</a:t>
+              <a:t>Independent public evidence summary · 2026.08.03-43 · 2026-08-03 · Sources: World Bank; Statistics Canada; Health Canada; NZ Ministry of Health; Sejm; FHM; FTC; ADM</a:t>
             </a:r>
           </a:p>
         </p:txBody>
@@ -8413,7 +8413,7 @@
                 <a:ea typeface="Aptos"/>
                 <a:cs typeface="Aptos"/>
               </a:rPr>
-              <a:t>578 WB records; 98 market measures + 36 Swedish FHM register counts; unlike measures are not summed</a:t>
+              <a:t>578 WB records; 116 market measures + 36 Swedish FHM register counts; unlike measures are not summed</a:t>
             </a:r>
           </a:p>
         </p:txBody>
@@ -8762,7 +8762,7 @@
                 <a:ea typeface="Aptos"/>
                 <a:cs typeface="Aptos"/>
               </a:rPr>
-              <a:t>Canada 7/10: D5/D7 failed and D10 open. NZD 183.371m/197.070m NZ net border proxies are not retail values. Germany DE-BLIND-1.0.0: NOT SCORED. Euromonitor paused; no purchase or fee.</a:t>
+              <a:t>Canada remains 7/10; NZ border proxies are not retail values. Germany's private DE-BLIND audit passed the 2023, 2024 and combined caps; values remain withheld. Euromonitor is 1/6 and NOT SCORED; the wider package is on hold.</a:t>
             </a:r>
           </a:p>
         </p:txBody>
@@ -9186,7 +9186,7 @@
                 <a:ea typeface="Aptos"/>
                 <a:cs typeface="Aptos"/>
               </a:rPr>
-              <a:t>Independent public evidence summary · 2026.08.02-41 · 2026-08-02 · Sources: Evidence Register; WIPO IP valuation</a:t>
+              <a:t>Independent public evidence summary · 2026.08.03-43 · 2026-08-03 · Sources: Evidence Register; WIPO IP valuation</a:t>
             </a:r>
           </a:p>
         </p:txBody>
@@ -10009,7 +10009,7 @@
                 <a:ea typeface="Aptos"/>
                 <a:cs typeface="Aptos"/>
               </a:rPr>
-              <a:t>Version 2026.08.02-41 · 2026-08-02 · 6 / 6</a:t>
+              <a:t>Version 2026.08.03-43 · 2026-08-03 · 6 / 6</a:t>
             </a:r>
           </a:p>
         </p:txBody>

--- a/site/downloads/pixan-bank-deck-short-en.pptx
+++ b/site/downloads/pixan-bank-deck-short-en.pptx
@@ -2,18 +2,18 @@
 <file path=ppt/presentation.xml><?xml version="1.0" encoding="utf-8"?>
 <p:presentation xmlns:p="http://schemas.openxmlformats.org/presentationml/2006/main">
   <p:sldMasterIdLst>
-    <p:sldMasterId xmlns:r="http://schemas.openxmlformats.org/officeDocument/2006/relationships" id="2147483648" r:id="Rf26ea6ae029e4522"/>
+    <p:sldMasterId xmlns:r="http://schemas.openxmlformats.org/officeDocument/2006/relationships" id="2147483648" r:id="R65e77e35b91d482b"/>
   </p:sldMasterIdLst>
   <p:notesMasterIdLst>
-    <p:notesMasterId xmlns:r="http://schemas.openxmlformats.org/officeDocument/2006/relationships" r:id="R190ad435f3f64115"/>
+    <p:notesMasterId xmlns:r="http://schemas.openxmlformats.org/officeDocument/2006/relationships" r:id="R63eaf161dd094f7d"/>
   </p:notesMasterIdLst>
   <p:sldIdLst>
-    <p:sldId xmlns:r="http://schemas.openxmlformats.org/officeDocument/2006/relationships" id="256" r:id="R1270984f07e4431b"/>
-    <p:sldId xmlns:r="http://schemas.openxmlformats.org/officeDocument/2006/relationships" id="257" r:id="R76aaf663587544c2"/>
-    <p:sldId xmlns:r="http://schemas.openxmlformats.org/officeDocument/2006/relationships" id="258" r:id="R692b649dd1704754"/>
-    <p:sldId xmlns:r="http://schemas.openxmlformats.org/officeDocument/2006/relationships" id="259" r:id="R5b2e10f2eb3c486a"/>
-    <p:sldId xmlns:r="http://schemas.openxmlformats.org/officeDocument/2006/relationships" id="260" r:id="R8895bf26a4824343"/>
-    <p:sldId xmlns:r="http://schemas.openxmlformats.org/officeDocument/2006/relationships" id="261" r:id="R1afdc703239e4522"/>
+    <p:sldId xmlns:r="http://schemas.openxmlformats.org/officeDocument/2006/relationships" id="256" r:id="R0725c15bf0864e0d"/>
+    <p:sldId xmlns:r="http://schemas.openxmlformats.org/officeDocument/2006/relationships" id="257" r:id="Rc8b427b655c243b7"/>
+    <p:sldId xmlns:r="http://schemas.openxmlformats.org/officeDocument/2006/relationships" id="258" r:id="R31824a5268b74959"/>
+    <p:sldId xmlns:r="http://schemas.openxmlformats.org/officeDocument/2006/relationships" id="259" r:id="R24b8e5f2b6884404"/>
+    <p:sldId xmlns:r="http://schemas.openxmlformats.org/officeDocument/2006/relationships" id="260" r:id="Rc6114520a3a04808"/>
+    <p:sldId xmlns:r="http://schemas.openxmlformats.org/officeDocument/2006/relationships" id="261" r:id="R30983f7403d649db"/>
   </p:sldIdLst>
   <p:sldSz cx="12191999" cy="6858000"/>
   <p:notesSz cx="6858000" cy="9144000"/>
@@ -5246,17 +5246,17 @@
   </p:cSld>
   <p:clrMap bg1="lt1" tx1="dk1" bg2="lt2" tx2="dk2" accent1="accent1" accent2="accent2" accent3="accent3" accent4="accent4" accent5="accent5" accent6="accent6" hlink="hlink" folHlink="folHlink"/>
   <p:sldLayoutIdLst>
-    <p:sldLayoutId xmlns:r="http://schemas.openxmlformats.org/officeDocument/2006/relationships" id="2147483649" r:id="R28d16a486c314271"/>
-    <p:sldLayoutId xmlns:r="http://schemas.openxmlformats.org/officeDocument/2006/relationships" id="2147483650" r:id="Ra12864fc757a408f"/>
-    <p:sldLayoutId xmlns:r="http://schemas.openxmlformats.org/officeDocument/2006/relationships" id="2147483651" r:id="Rc2800e9802d04e33"/>
-    <p:sldLayoutId xmlns:r="http://schemas.openxmlformats.org/officeDocument/2006/relationships" id="2147483652" r:id="R553a694a63e34a9a"/>
-    <p:sldLayoutId xmlns:r="http://schemas.openxmlformats.org/officeDocument/2006/relationships" id="2147483653" r:id="R1d4c1e36f3b543f9"/>
-    <p:sldLayoutId xmlns:r="http://schemas.openxmlformats.org/officeDocument/2006/relationships" id="2147483654" r:id="Ra57e18311c504aa1"/>
-    <p:sldLayoutId xmlns:r="http://schemas.openxmlformats.org/officeDocument/2006/relationships" id="2147483655" r:id="R18317121690a4b59"/>
-    <p:sldLayoutId xmlns:r="http://schemas.openxmlformats.org/officeDocument/2006/relationships" id="2147483656" r:id="Re09f337927b7478b"/>
-    <p:sldLayoutId xmlns:r="http://schemas.openxmlformats.org/officeDocument/2006/relationships" id="2147483657" r:id="R7a3e8aa656464163"/>
-    <p:sldLayoutId xmlns:r="http://schemas.openxmlformats.org/officeDocument/2006/relationships" id="2147483658" r:id="R5e62253a1de043a6"/>
-    <p:sldLayoutId xmlns:r="http://schemas.openxmlformats.org/officeDocument/2006/relationships" id="2147483659" r:id="R6ea9c11b78bb4e88"/>
+    <p:sldLayoutId xmlns:r="http://schemas.openxmlformats.org/officeDocument/2006/relationships" id="2147483649" r:id="R479528375dc34d80"/>
+    <p:sldLayoutId xmlns:r="http://schemas.openxmlformats.org/officeDocument/2006/relationships" id="2147483650" r:id="R60239772daa44345"/>
+    <p:sldLayoutId xmlns:r="http://schemas.openxmlformats.org/officeDocument/2006/relationships" id="2147483651" r:id="R242fbcbb425c460f"/>
+    <p:sldLayoutId xmlns:r="http://schemas.openxmlformats.org/officeDocument/2006/relationships" id="2147483652" r:id="R3849c74f72a6465f"/>
+    <p:sldLayoutId xmlns:r="http://schemas.openxmlformats.org/officeDocument/2006/relationships" id="2147483653" r:id="R6ea04e6e8af945cd"/>
+    <p:sldLayoutId xmlns:r="http://schemas.openxmlformats.org/officeDocument/2006/relationships" id="2147483654" r:id="R5b9317d7e3be495e"/>
+    <p:sldLayoutId xmlns:r="http://schemas.openxmlformats.org/officeDocument/2006/relationships" id="2147483655" r:id="Raf996e1ecce942b7"/>
+    <p:sldLayoutId xmlns:r="http://schemas.openxmlformats.org/officeDocument/2006/relationships" id="2147483656" r:id="R4af21c740ad641dc"/>
+    <p:sldLayoutId xmlns:r="http://schemas.openxmlformats.org/officeDocument/2006/relationships" id="2147483657" r:id="Reb04138ac779450c"/>
+    <p:sldLayoutId xmlns:r="http://schemas.openxmlformats.org/officeDocument/2006/relationships" id="2147483658" r:id="R33063d9fd8224f38"/>
+    <p:sldLayoutId xmlns:r="http://schemas.openxmlformats.org/officeDocument/2006/relationships" id="2147483659" r:id="Rc9bb28ca5c60419a"/>
   </p:sldLayoutIdLst>
   <p:txStyles>
     <p:titleStyle>
@@ -5948,7 +5948,7 @@
                 <a:ea typeface="Aptos"/>
                 <a:cs typeface="Aptos"/>
               </a:rPr>
-              <a:t>From patent to a lender-ready</a:t>
+              <a:t>Defensible patent value</a:t>
             </a:r>
             <a:br/>
             <a:r>
@@ -5960,7 +5960,7 @@
                 <a:ea typeface="Aptos"/>
                 <a:cs typeface="Aptos"/>
               </a:rPr>
-              <a:t>evidence package</a:t>
+              <a:t>through evidence gates</a:t>
             </a:r>
           </a:p>
         </p:txBody>
@@ -6007,7 +6007,7 @@
                 <a:ea typeface="Aptos"/>
                 <a:cs typeface="Aptos"/>
               </a:rPr>
-              <a:t>Concise decision summary</a:t>
+              <a:t>Independent public decision summary</a:t>
             </a:r>
           </a:p>
         </p:txBody>
@@ -6156,7 +6156,7 @@
                 <a:ea typeface="Aptos"/>
                 <a:cs typeface="Aptos"/>
               </a:rPr>
-              <a:t>2026.08.03-43</a:t>
+              <a:t>2026.08.03-44</a:t>
             </a:r>
           </a:p>
         </p:txBody>
@@ -6472,7 +6472,7 @@
                 <a:ea typeface="Aptos"/>
                 <a:cs typeface="Aptos"/>
               </a:rPr>
-              <a:t>The financing thesis is based on evidence — not market hype</a:t>
+              <a:t>Financing thesis: value has not been computed</a:t>
             </a:r>
           </a:p>
         </p:txBody>
@@ -6629,7 +6629,7 @@
                 <a:ea typeface="Aptos"/>
                 <a:cs typeface="Aptos"/>
               </a:rPr>
-              <a:t>Independent public evidence summary · 2026.08.03-43 · 2026-08-03 · Sources: EPO; Germany — official judgments; WIPO</a:t>
+              <a:t>Independent public evidence summary · 2026.08.03-44 · 2026-08-03 · Sources: EPO; Germany — official judgments; WIPO</a:t>
             </a:r>
           </a:p>
         </p:txBody>
@@ -6723,7 +6723,7 @@
                 <a:ea typeface="Aptos"/>
                 <a:cs typeface="Aptos"/>
               </a:rPr>
-              <a:t>The patent has a documented technical core and material official legal evidence, but collateral value has not yet been proven.</a:t>
+              <a:t>The objective is to estimate defensible, premise-specific patent-value ranges—not to select the largest possible market number.</a:t>
             </a:r>
           </a:p>
         </p:txBody>
@@ -6776,7 +6776,7 @@
               </a:defRPr>
             </a:pPr>
             <a:r>
-              <a:t>•  EPO Register: the patent was maintained as amended after opposition proceedings; the B2 patent specification was published. EP3032975B2 contains 9 claims.</a:t>
+              <a:t>•  Seven premise-specific, non-additive outputs are null/NOT_COMPUTED; all seven valuation gates are OPEN.</a:t>
             </a:r>
           </a:p>
           <a:p xmlns:a="http://schemas.openxmlformats.org/drawingml/2006/main">
@@ -6798,7 +6798,7 @@
               </a:defRPr>
             </a:pPr>
             <a:r>
-              <a:t>•  Germany: two official decisions; finality and territorial limits remain.</a:t>
+              <a:t>•  Market evidence is input only: market size is not patent value and missing evidence is not zero.</a:t>
             </a:r>
           </a:p>
           <a:p xmlns:a="http://schemas.openxmlformats.org/drawingml/2006/main">
@@ -6820,7 +6820,7 @@
               </a:defRPr>
             </a:pPr>
             <a:r>
-              <a:t>•  Financeability arises when rights, claim charts, cash flow and independent valuation are linked together.</a:t>
+              <a:t>•  The German judgment is possible case-specific evidence for the adjudicated product and claim only; transfer requires fresh counsel review.</a:t>
             </a:r>
           </a:p>
         </p:txBody>
@@ -6971,7 +6971,7 @@
                 <a:ea typeface="Aptos"/>
                 <a:cs typeface="Aptos"/>
               </a:rPr>
-              <a:t>The current evidence supports further diligence. It does not yet by itself support a specific loan amount, equity value or patent collateral value.</a:t>
+              <a:t>Current evidence supports further diligence, not a specific patent value, loan amount or equity value.</a:t>
             </a:r>
           </a:p>
         </p:txBody>
@@ -7062,7 +7062,7 @@
         <p:spPr>
           <a:xfrm xmlns:a="http://schemas.openxmlformats.org/drawingml/2006/main">
             <a:off x="502920" y="621792"/>
-            <a:ext cx="11109960" cy="591312"/>
+            <a:ext cx="11109960" cy="1109472"/>
           </a:xfrm>
           <a:prstGeom xmlns:a="http://schemas.openxmlformats.org/drawingml/2006/main" prst="rect">
             <a:avLst/>
@@ -7087,7 +7087,7 @@
                 <a:ea typeface="Aptos"/>
                 <a:cs typeface="Aptos"/>
               </a:rPr>
-              <a:t>Patent history provides a strong but limited anchor</a:t>
+              <a:t>Germany informs the adjudicated case—it does not globalise it</a:t>
             </a:r>
           </a:p>
         </p:txBody>
@@ -7244,7 +7244,7 @@
                 <a:ea typeface="Aptos"/>
                 <a:cs typeface="Aptos"/>
               </a:rPr>
-              <a:t>Independent public evidence summary · 2026.08.03-43 · 2026-08-03 · Sources: EPO Register; EP3032975B2; 8 Ni 18/24 (EP); 7 O 3341/24</a:t>
+              <a:t>Independent public evidence summary · 2026.08.03-44 · 2026-08-03 · Sources: EPO Register; EP3032975B2; 8 Ni 18/24 (EP); 7 O 3341/24</a:t>
             </a:r>
           </a:p>
         </p:txBody>
@@ -7791,7 +7791,7 @@
                 <a:ea typeface="Aptos"/>
                 <a:cs typeface="Aptos"/>
               </a:rPr>
-              <a:t>Proven legal evidence is valuable only with country-specific validity and product linkage.</a:t>
+              <a:t>Legal evidence has value only with country-specific rights, covered-use mapping and verified local acts.</a:t>
             </a:r>
           </a:p>
         </p:txBody>
@@ -7942,7 +7942,7 @@
                 <a:ea typeface="Aptos"/>
                 <a:cs typeface="Aptos"/>
               </a:rPr>
-              <a:t>The recorded proprietor, priority and central EPO outcome can be confirmed. Current national status, encumbrances and enforcement across the family require further evidence.</a:t>
+              <a:t>Rights are territorial. Ordinary PCT/EP expansion windows have expired; any exceptional route for a missing country requires country-specific counsel review.</a:t>
             </a:r>
           </a:p>
         </p:txBody>
@@ -8058,7 +8058,7 @@
                 <a:ea typeface="Aptos"/>
                 <a:cs typeface="Aptos"/>
               </a:rPr>
-              <a:t>Market evidence is transparent; a global value is not yet supported</a:t>
+              <a:t>Seven steps to separate value outputs</a:t>
             </a:r>
           </a:p>
         </p:txBody>
@@ -8215,7 +8215,7 @@
                 <a:ea typeface="Aptos"/>
                 <a:cs typeface="Aptos"/>
               </a:rPr>
-              <a:t>Independent public evidence summary · 2026.08.03-43 · 2026-08-03 · Sources: World Bank; Statistics Canada; Health Canada; NZ Ministry of Health; Sejm; FHM; FTC; ADM</a:t>
+              <a:t>Independent public evidence summary · not Pixan Oy's official position · 2026.08.03-44 · 2026-08-03</a:t>
             </a:r>
           </a:p>
         </p:txBody>
@@ -8366,7 +8366,7 @@
                 <a:ea typeface="Aptos"/>
                 <a:cs typeface="Aptos"/>
               </a:rPr>
-              <a:t>195</a:t>
+              <a:t>7</a:t>
             </a:r>
           </a:p>
         </p:txBody>
@@ -8388,7 +8388,7 @@
         <p:spPr>
           <a:xfrm xmlns:a="http://schemas.openxmlformats.org/drawingml/2006/main">
             <a:off x="694944" y="2468879"/>
-            <a:ext cx="3203448" cy="713232"/>
+            <a:ext cx="3203448" cy="499872"/>
           </a:xfrm>
           <a:prstGeom xmlns:a="http://schemas.openxmlformats.org/drawingml/2006/main" prst="rect">
             <a:avLst/>
@@ -8413,7 +8413,7 @@
                 <a:ea typeface="Aptos"/>
                 <a:cs typeface="Aptos"/>
               </a:rPr>
-              <a:t>578 WB records; 116 market measures + 36 Swedish FHM register counts; unlike measures are not summed</a:t>
+              <a:t>mandatory gates · all OPEN · seven outputs NOT_COMPUTED</a:t>
             </a:r>
           </a:p>
         </p:txBody>
@@ -8517,7 +8517,7 @@
                 <a:ea typeface="Aptos"/>
                 <a:cs typeface="Aptos"/>
               </a:rPr>
-              <a:t>NZD 274.180m</a:t>
+              <a:t>NOT_COMPUTED</a:t>
             </a:r>
           </a:p>
         </p:txBody>
@@ -8564,7 +8564,7 @@
                 <a:ea typeface="Aptos"/>
                 <a:cs typeface="Aptos"/>
               </a:rPr>
-              <a:t>identified AIS/AVP subtotal · ≈EUR 153.3m</a:t>
+              <a:t>all output values = null</a:t>
             </a:r>
           </a:p>
         </p:txBody>
@@ -8762,7 +8762,7 @@
                 <a:ea typeface="Aptos"/>
                 <a:cs typeface="Aptos"/>
               </a:rPr>
-              <a:t>Canada remains 7/10; NZ border proxies are not retail values. Germany's private DE-BLIND audit passed the 2023, 2024 and combined caps; values remain withheld. Euromonitor is 1/6 and NOT SCORED; the wider package is on hold.</a:t>
+              <a:t>Market evidence → scope-key reconciliation → covered sales → route-specific economic benefit → weighted dated cash flows → PV/non-overlapping adjustments → separate non-additive output.</a:t>
             </a:r>
           </a:p>
         </p:txBody>
@@ -8913,7 +8913,7 @@
                 <a:ea typeface="Aptos"/>
                 <a:cs typeface="Aptos"/>
               </a:rPr>
-              <a:t>Method control 28 / 0 / 15 / 152. Canada retail CAD 1.219160bn (≈EUR 822.6m; ECB 2024) and shipments CAD 1.160754bn (≈EUR 783.2m; ECB 2024). New Zealand NZD 274.180m (≈EUR 153.3m; ECB 2024), 7/10; customs ratios are not margins. Donor 0/3.</a:t>
+              <a:t>Licensing does not require infringing sales; only the past-enforcement branch does. Missing is not zero. Donor 0/3 is an evidence-readiness input, not the final objective.</a:t>
             </a:r>
           </a:p>
         </p:txBody>
@@ -9029,7 +9029,7 @@
                 <a:ea typeface="Aptos"/>
                 <a:cs typeface="Aptos"/>
               </a:rPr>
-              <a:t>The gaps can be scoped into a concrete work programme</a:t>
+              <a:t>Seven open gates define the work programme</a:t>
             </a:r>
           </a:p>
         </p:txBody>
@@ -9186,7 +9186,7 @@
                 <a:ea typeface="Aptos"/>
                 <a:cs typeface="Aptos"/>
               </a:rPr>
-              <a:t>Independent public evidence summary · 2026.08.03-43 · 2026-08-03 · Sources: Evidence Register; WIPO IP valuation</a:t>
+              <a:t>Independent public evidence summary · 2026.08.03-44 · 2026-08-03 · Sources: Evidence Register; WIPO IP valuation</a:t>
             </a:r>
           </a:p>
         </p:txBody>
@@ -9695,7 +9695,7 @@
         <p:spPr>
           <a:xfrm xmlns:a="http://schemas.openxmlformats.org/drawingml/2006/main">
             <a:off x="603504" y="5660136"/>
-            <a:ext cx="10881360" cy="502920"/>
+            <a:ext cx="10881360" cy="591312"/>
           </a:xfrm>
           <a:prstGeom xmlns:a="http://schemas.openxmlformats.org/drawingml/2006/main" prst="rect">
             <a:avLst/>
@@ -9720,7 +9720,7 @@
                 <a:ea typeface="Aptos"/>
                 <a:cs typeface="Aptos"/>
               </a:rPr>
-              <a:t>Financeability improves most when these four gaps are closed before any value discussion.</a:t>
+              <a:t>Fix basis/subject, rights, claim mapping, covered sales, economics, cash flow and risk before any output-specific computation.</a:t>
             </a:r>
           </a:p>
         </p:txBody>
@@ -9843,7 +9843,7 @@
                 <a:ea typeface="Aptos"/>
                 <a:cs typeface="Aptos"/>
               </a:rPr>
-              <a:t>Conditional progression: 90-day diligence before a financing decision</a:t>
+              <a:t>Conditional progression: close the gates before a value decision</a:t>
             </a:r>
           </a:p>
         </p:txBody>
@@ -9896,7 +9896,7 @@
               </a:defRPr>
             </a:pPr>
             <a:r>
-              <a:t>•  Days 0–30: title, encumbrance, fee-payment and rights matrix.</a:t>
+              <a:t>•  Basis and subject: rights, territories, intended use, market-participant/owner premise and gross/net/tax basis.</a:t>
             </a:r>
           </a:p>
           <a:p xmlns:a="http://schemas.openxmlformats.org/drawingml/2006/main">
@@ -9918,7 +9918,7 @@
               </a:defRPr>
             </a:pPr>
             <a:r>
-              <a:t>•  Days 31–60: prioritised claim charts, market-sales scope and counterparty data.</a:t>
+              <a:t>•  Rights, product and covered sales: Boolean/time masks, measured SKU allocation and counsel-reviewed claim state.</a:t>
             </a:r>
           </a:p>
           <a:p xmlns:a="http://schemas.openxmlformats.org/drawingml/2006/main">
@@ -9940,7 +9940,7 @@
               </a:defRPr>
             </a:pPr>
             <a:r>
-              <a:t>•  Days 61–90: independent valuation, cash-flow scenarios and financing terms.</a:t>
+              <a:t>•  Four branches: RFR/direct use, licensing, past enforcement and strategic option; only enforcement requires infringing sales.</a:t>
             </a:r>
           </a:p>
           <a:p xmlns:a="http://schemas.openxmlformats.org/drawingml/2006/main">
@@ -9962,7 +9962,7 @@
               </a:defRPr>
             </a:pPr>
             <a:r>
-              <a:t>•  Decision gate: a structure based only on confirmed rights and repayment sources.</a:t>
+              <a:t>•  Weighted dated cash flows, each risk once and a separate collateral-recovery case; never add the outputs.</a:t>
             </a:r>
           </a:p>
         </p:txBody>
@@ -10009,7 +10009,7 @@
                 <a:ea typeface="Aptos"/>
                 <a:cs typeface="Aptos"/>
               </a:rPr>
-              <a:t>Version 2026.08.03-43 · 2026-08-03 · 6 / 6</a:t>
+              <a:t>Version 2026.08.03-44 · 2026-08-03 · 6 / 6</a:t>
             </a:r>
           </a:p>
         </p:txBody>
